--- a/slides/05 Pac-Man.pptx
+++ b/slides/05 Pac-Man.pptx
@@ -32,6 +32,7 @@
     <p:sldId id="280" r:id="rId30"/>
     <p:sldId id="292" r:id="rId42"/>
     <p:sldId id="293" r:id="rId52"/>
+    <p:sldId id="314" r:id="rId41"/>
     <p:sldId id="294" r:id="rId53"/>
     <p:sldId id="296" r:id="rId55"/>
   </p:sldIdLst>
@@ -830,6 +831,343 @@
 </p:notes>
 </file>
 
+<file path=ppt/notesSlides/notesSlide10.xml><?xml version="1.0" encoding="utf-8"?>
+<p:notes xmlns:a="http://schemas.openxmlformats.org/drawingml/2006/main" xmlns:p="http://schemas.openxmlformats.org/presentationml/2006/main" xmlns:r="http://schemas.openxmlformats.org/officeDocument/2006/relationships">
+  <p:cSld>
+    <p:spTree>
+      <p:nvGrpSpPr>
+        <p:cNvPr id="1" name=""/>
+        <p:cNvGrpSpPr/>
+        <p:nvPr/>
+      </p:nvGrpSpPr>
+      <p:grpSpPr>
+        <a:xfrm>
+          <a:off x="0" y="0"/>
+          <a:ext cx="0" cy="0"/>
+          <a:chOff x="0" y="0"/>
+          <a:chExt cx="0" cy="0"/>
+        </a:xfrm>
+      </p:grpSpPr>
+      <p:sp>
+        <p:nvSpPr>
+          <p:cNvPr id="2" name="Slide Image Placeholder 1"/>
+          <p:cNvSpPr>
+            <a:spLocks noGrp="1"/>
+          </p:cNvSpPr>
+          <p:nvPr>
+            <p:ph type="sldImg" idx="2"/>
+          </p:nvPr>
+        </p:nvSpPr>
+        <p:spPr/>
+      </p:sp>
+      <p:sp>
+        <p:nvSpPr>
+          <p:cNvPr id="3" name="Notes Placeholder 2"/>
+          <p:cNvSpPr>
+            <a:spLocks noGrp="1"/>
+          </p:cNvSpPr>
+          <p:nvPr>
+            <p:ph type="body" idx="1"/>
+          </p:nvPr>
+        </p:nvSpPr>
+        <p:spPr/>
+        <p:txBody>
+          <a:bodyPr/>
+          <a:lstStyle/>
+          <a:p>
+            <a:r>
+              <a:t>Talking points:</a:t>
+            </a:r>
+          </a:p>
+          <a:p>
+            <a:r>
+              <a:t>- So far, every ghost chases straight at Pac-Man</a:t>
+            </a:r>
+          </a:p>
+          <a:p>
+            <a:r>
+              <a:t>  - They line up behind him: easy to escape</a:t>
+            </a:r>
+          </a:p>
+          <a:p>
+            <a:r>
+              <a:t>- Blinky: Pac-Man’s tile</a:t>
+            </a:r>
+          </a:p>
+          <a:p>
+            <a:r>
+              <a:t>- Pinky: four tiles ahead of Pac-Man</a:t>
+            </a:r>
+          </a:p>
+          <a:p>
+            <a:r>
+              <a:t>- Inky: two tiles ahead of Pac-Man, and double the line from Blinky</a:t>
+            </a:r>
+          </a:p>
+          <a:p>
+            <a:r>
+              <a:t>- Clyde: Pac-Man, until within eight tiles; then his corner</a:t>
+            </a:r>
+          </a:p>
+          <a:p>
+            <a:r>
+              <a:t>- Together, they trap Pac-Man</a:t>
+            </a:r>
+          </a:p>
+        </p:txBody>
+      </p:sp>
+    </p:spTree>
+  </p:cSld>
+  <p:clrMapOvr>
+    <a:masterClrMapping/>
+  </p:clrMapOvr>
+</p:notes>
+</file>
+
+<file path=ppt/notesSlides/notesSlide11.xml><?xml version="1.0" encoding="utf-8"?>
+<p:notes xmlns:a="http://schemas.openxmlformats.org/drawingml/2006/main" xmlns:p="http://schemas.openxmlformats.org/presentationml/2006/main" xmlns:r="http://schemas.openxmlformats.org/officeDocument/2006/relationships">
+  <p:cSld>
+    <p:spTree>
+      <p:nvGrpSpPr>
+        <p:cNvPr id="1" name=""/>
+        <p:cNvGrpSpPr/>
+        <p:nvPr/>
+      </p:nvGrpSpPr>
+      <p:grpSpPr>
+        <a:xfrm>
+          <a:off x="0" y="0"/>
+          <a:ext cx="0" cy="0"/>
+          <a:chOff x="0" y="0"/>
+          <a:chExt cx="0" cy="0"/>
+        </a:xfrm>
+      </p:grpSpPr>
+      <p:sp>
+        <p:nvSpPr>
+          <p:cNvPr id="2" name="Slide Image Placeholder 1"/>
+          <p:cNvSpPr>
+            <a:spLocks noGrp="1"/>
+          </p:cNvSpPr>
+          <p:nvPr>
+            <p:ph type="sldImg" idx="2"/>
+          </p:nvPr>
+        </p:nvSpPr>
+        <p:spPr/>
+      </p:sp>
+      <p:sp>
+        <p:nvSpPr>
+          <p:cNvPr id="3" name="Notes Placeholder 2"/>
+          <p:cNvSpPr>
+            <a:spLocks noGrp="1"/>
+          </p:cNvSpPr>
+          <p:nvPr>
+            <p:ph type="body" idx="1"/>
+          </p:nvPr>
+        </p:nvSpPr>
+        <p:spPr/>
+        <p:txBody>
+          <a:bodyPr/>
+          <a:lstStyle/>
+          <a:p>
+            <a:r>
+              <a:t>Talking points:</a:t>
+            </a:r>
+          </a:p>
+          <a:p>
+            <a:r>
+              <a:t>- The same structure: hold an interface, forward to it</a:t>
+            </a:r>
+          </a:p>
+          <a:p>
+            <a:r>
+              <a:t>- State: the ghost’s mode</a:t>
+            </a:r>
+          </a:p>
+          <a:p>
+            <a:r>
+              <a:t>  - Picked by the states themselves, and changes all the time</a:t>
+            </a:r>
+          </a:p>
+          <a:p>
+            <a:r>
+              <a:t>  - A state knows the next state</a:t>
+            </a:r>
+          </a:p>
+          <a:p>
+            <a:r>
+              <a:t>- Strategy: the ghost’s targeting</a:t>
+            </a:r>
+          </a:p>
+          <a:p>
+            <a:r>
+              <a:t>  - Picked from outside (World), once, and never changes</a:t>
+            </a:r>
+          </a:p>
+          <a:p>
+            <a:r>
+              <a:t>  - Strategies don’t know each other</a:t>
+            </a:r>
+          </a:p>
+          <a:p>
+            <a:r>
+              <a:t>- Together: the state decides whether to chase, the strategy how</a:t>
+            </a:r>
+          </a:p>
+        </p:txBody>
+      </p:sp>
+    </p:spTree>
+  </p:cSld>
+  <p:clrMapOvr>
+    <a:masterClrMapping/>
+  </p:clrMapOvr>
+</p:notes>
+</file>
+
+<file path=ppt/notesSlides/notesSlide12.xml><?xml version="1.0" encoding="utf-8"?>
+<p:notes xmlns:a="http://schemas.openxmlformats.org/drawingml/2006/main" xmlns:p="http://schemas.openxmlformats.org/presentationml/2006/main" xmlns:r="http://schemas.openxmlformats.org/officeDocument/2006/relationships">
+  <p:cSld>
+    <p:spTree>
+      <p:nvGrpSpPr>
+        <p:cNvPr id="1" name=""/>
+        <p:cNvGrpSpPr/>
+        <p:nvPr/>
+      </p:nvGrpSpPr>
+      <p:grpSpPr>
+        <a:xfrm>
+          <a:off x="0" y="0"/>
+          <a:ext cx="0" cy="0"/>
+          <a:chOff x="0" y="0"/>
+          <a:chExt cx="0" cy="0"/>
+        </a:xfrm>
+      </p:grpSpPr>
+      <p:sp>
+        <p:nvSpPr>
+          <p:cNvPr id="2" name="Slide Image Placeholder 1"/>
+          <p:cNvSpPr>
+            <a:spLocks noGrp="1"/>
+          </p:cNvSpPr>
+          <p:nvPr>
+            <p:ph type="sldImg" idx="2"/>
+          </p:nvPr>
+        </p:nvSpPr>
+        <p:spPr/>
+      </p:sp>
+      <p:sp>
+        <p:nvSpPr>
+          <p:cNvPr id="3" name="Notes Placeholder 2"/>
+          <p:cNvSpPr>
+            <a:spLocks noGrp="1"/>
+          </p:cNvSpPr>
+          <p:nvPr>
+            <p:ph type="body" idx="1"/>
+          </p:nvPr>
+        </p:nvSpPr>
+        <p:spPr/>
+        <p:txBody>
+          <a:bodyPr/>
+          <a:lstStyle/>
+          <a:p>
+            <a:r>
+              <a:t>Talking points:</a:t>
+            </a:r>
+          </a:p>
+          <a:p>
+            <a:r>
+              <a:t>- Lives, Pac-Man’s death, a new level when the dots are gone</a:t>
+            </a:r>
+          </a:p>
+          <a:p>
+            <a:r>
+              <a:t>- The game’s flow: a state machine, like Flappy Bird’s</a:t>
+            </a:r>
+          </a:p>
+          <a:p>
+            <a:r>
+              <a:t>  - Ready → Play → Dying → Ready or Game Over</a:t>
+            </a:r>
+          </a:p>
+          <a:p>
+            <a:r>
+              <a:t>- Two levels of state machine in one game</a:t>
+            </a:r>
+          </a:p>
+          <a:p>
+            <a:r>
+              <a:t>  - The game’s states, and each ghost’s states</a:t>
+            </a:r>
+          </a:p>
+          <a:p>
+            <a:r>
+              <a:t>  - Ghosts only update in PlayState: while Pac-Man dies, their states pause</a:t>
+            </a:r>
+          </a:p>
+        </p:txBody>
+      </p:sp>
+    </p:spTree>
+  </p:cSld>
+  <p:clrMapOvr>
+    <a:masterClrMapping/>
+  </p:clrMapOvr>
+</p:notes>
+</file>
+
+<file path=ppt/notesSlides/notesSlide13.xml><?xml version="1.0" encoding="utf-8"?>
+<p:notes xmlns:a="http://schemas.openxmlformats.org/drawingml/2006/main" xmlns:p="http://schemas.openxmlformats.org/presentationml/2006/main" xmlns:r="http://schemas.openxmlformats.org/officeDocument/2006/relationships">
+  <p:cSld>
+    <p:spTree>
+      <p:nvGrpSpPr>
+        <p:cNvPr id="1" name=""/>
+        <p:cNvGrpSpPr/>
+        <p:nvPr/>
+      </p:nvGrpSpPr>
+      <p:grpSpPr>
+        <a:xfrm>
+          <a:off x="0" y="0"/>
+          <a:ext cx="0" cy="0"/>
+          <a:chOff x="0" y="0"/>
+          <a:chExt cx="0" cy="0"/>
+        </a:xfrm>
+      </p:grpSpPr>
+      <p:sp>
+        <p:nvSpPr>
+          <p:cNvPr id="2" name="Slide Image Placeholder 1"/>
+          <p:cNvSpPr>
+            <a:spLocks noGrp="1"/>
+          </p:cNvSpPr>
+          <p:nvPr>
+            <p:ph type="sldImg" idx="2"/>
+          </p:nvPr>
+        </p:nvSpPr>
+        <p:spPr/>
+      </p:sp>
+      <p:sp>
+        <p:nvSpPr>
+          <p:cNvPr id="3" name="Notes Placeholder 2"/>
+          <p:cNvSpPr>
+            <a:spLocks noGrp="1"/>
+          </p:cNvSpPr>
+          <p:nvPr>
+            <p:ph type="body" idx="1"/>
+          </p:nvPr>
+        </p:nvSpPr>
+        <p:spPr/>
+        <p:txBody>
+          <a:bodyPr/>
+          <a:lstStyle/>
+          <a:p>
+            <a:r>
+              <a:t>Ask, let them answer in pairs for a minute, then take a few answers. These are the site’s Check yourself questions.</a:t>
+            </a:r>
+          </a:p>
+        </p:txBody>
+      </p:sp>
+    </p:spTree>
+  </p:cSld>
+  <p:clrMapOvr>
+    <a:masterClrMapping/>
+  </p:clrMapOvr>
+</p:notes>
+</file>
+
 <file path=ppt/notesSlides/notesSlide2.xml><?xml version="1.0" encoding="utf-8"?>
 <p:notes xmlns:a="http://schemas.openxmlformats.org/drawingml/2006/main" xmlns:r="http://schemas.openxmlformats.org/officeDocument/2006/relationships" xmlns:mc="http://schemas.openxmlformats.org/markup-compatibility/2006" xmlns:mv="urn:schemas-microsoft-com:mac:vml" xmlns:p="http://schemas.openxmlformats.org/presentationml/2006/main" xmlns:c="http://schemas.openxmlformats.org/drawingml/2006/chart" xmlns:dgm="http://schemas.openxmlformats.org/drawingml/2006/diagram" xmlns:o="urn:schemas-microsoft-com:office:office" xmlns:v="urn:schemas-microsoft-com:vml" xmlns:pvml="urn:schemas-microsoft-com:office:powerpoint" xmlns:com="http://schemas.openxmlformats.org/drawingml/2006/compatibility" xmlns:p14="http://schemas.microsoft.com/office/powerpoint/2010/main" xmlns:p15="http://schemas.microsoft.com/office/powerpoint/2012/main" xmlns:ahyp="http://schemas.microsoft.com/office/drawing/2018/hyperlinkcolor" showMasterPhAnim="0" showMasterSp="0">
   <p:cSld>
@@ -1301,19 +1639,323 @@
           </a:bodyPr>
           <a:lstStyle/>
           <a:p>
-            <a:pPr indent="0" lvl="0" marL="0" rtl="0" algn="l">
-              <a:spcBef>
-                <a:spcPts val="0"/>
-              </a:spcBef>
-              <a:spcAft>
-                <a:spcPts val="0"/>
-              </a:spcAft>
-              <a:buNone/>
-            </a:pPr>
-            <a:r>
-              <a:t/>
-            </a:r>
-            <a:endParaRPr/>
+            <a:r>
+              <a:t>Talking points:</a:t>
+            </a:r>
+          </a:p>
+          <a:p>
+            <a:r>
+              <a:t>- All Source code for today’s game can be found here:</a:t>
+            </a:r>
+          </a:p>
+          <a:p>
+            <a:r>
+              <a:t>  - github.com/Metamate/gar-games (folder 05-pacman)</a:t>
+            </a:r>
+          </a:p>
+          <a:p>
+            <a:r>
+              <a:t>- The game is built up in steps: Pacman0 → Pacman4, and the tests in Pacman.Tests</a:t>
+            </a:r>
+          </a:p>
+          <a:p>
+            <a:r>
+              <a:t>  - Each step is a separate project that adds one concept</a:t>
+            </a:r>
+          </a:p>
+          <a:p>
+            <a:r>
+              <a:t>  - Compare neighbouring steps to see exactly what changed</a:t>
+            </a:r>
+          </a:p>
+          <a:p>
+            <a:r>
+              <a:t>- Pacman4 is the finished game, and the starting point for the exercises</a:t>
+            </a:r>
+          </a:p>
+        </p:txBody>
+      </p:sp>
+    </p:spTree>
+  </p:cSld>
+  <p:clrMapOvr>
+    <a:masterClrMapping/>
+  </p:clrMapOvr>
+</p:notes>
+</file>
+
+<file path=ppt/notesSlides/notesSlide7.xml><?xml version="1.0" encoding="utf-8"?>
+<p:notes xmlns:a="http://schemas.openxmlformats.org/drawingml/2006/main" xmlns:p="http://schemas.openxmlformats.org/presentationml/2006/main" xmlns:r="http://schemas.openxmlformats.org/officeDocument/2006/relationships">
+  <p:cSld>
+    <p:spTree>
+      <p:nvGrpSpPr>
+        <p:cNvPr id="1" name=""/>
+        <p:cNvGrpSpPr/>
+        <p:nvPr/>
+      </p:nvGrpSpPr>
+      <p:grpSpPr>
+        <a:xfrm>
+          <a:off x="0" y="0"/>
+          <a:ext cx="0" cy="0"/>
+          <a:chOff x="0" y="0"/>
+          <a:chExt cx="0" cy="0"/>
+        </a:xfrm>
+      </p:grpSpPr>
+      <p:sp>
+        <p:nvSpPr>
+          <p:cNvPr id="2" name="Slide Image Placeholder 1"/>
+          <p:cNvSpPr>
+            <a:spLocks noGrp="1"/>
+          </p:cNvSpPr>
+          <p:nvPr>
+            <p:ph type="sldImg" idx="2"/>
+          </p:nvPr>
+        </p:nvSpPr>
+        <p:spPr/>
+      </p:sp>
+      <p:sp>
+        <p:nvSpPr>
+          <p:cNvPr id="3" name="Notes Placeholder 2"/>
+          <p:cNvSpPr>
+            <a:spLocks noGrp="1"/>
+          </p:cNvSpPr>
+          <p:nvPr>
+            <p:ph type="body" idx="1"/>
+          </p:nvPr>
+        </p:nvSpPr>
+        <p:spPr/>
+        <p:txBody>
+          <a:bodyPr/>
+          <a:lstStyle/>
+          <a:p>
+            <a:r>
+              <a:t>Talking points:</a:t>
+            </a:r>
+          </a:p>
+          <a:p>
+            <a:r>
+              <a:t>- In the house: waits, then leaves through the door</a:t>
+            </a:r>
+          </a:p>
+          <a:p>
+            <a:r>
+              <a:t>- Scatter: heads for its own corner</a:t>
+            </a:r>
+          </a:p>
+          <a:p>
+            <a:r>
+              <a:t>- Chase: hunts Pac-Man</a:t>
+            </a:r>
+          </a:p>
+          <a:p>
+            <a:r>
+              <a:t>  - Scatter and chase take turns on a schedule: 7 s, 20 s, …</a:t>
+            </a:r>
+          </a:p>
+          <a:p>
+            <a:r>
+              <a:t>- Frightened: blue, slow, random; can be eaten</a:t>
+            </a:r>
+          </a:p>
+          <a:p>
+            <a:r>
+              <a:t>- Eaten: only the eyes, racing back to the house</a:t>
+            </a:r>
+          </a:p>
+          <a:p>
+            <a:r>
+              <a:t>- At each tile centre: never turn back, and take the direction closest to a target tile</a:t>
+            </a:r>
+          </a:p>
+          <a:p>
+            <a:r>
+              <a:t>  - The mode decides the target</a:t>
+            </a:r>
+          </a:p>
+        </p:txBody>
+      </p:sp>
+    </p:spTree>
+  </p:cSld>
+  <p:clrMapOvr>
+    <a:masterClrMapping/>
+  </p:clrMapOvr>
+</p:notes>
+</file>
+
+<file path=ppt/notesSlides/notesSlide8.xml><?xml version="1.0" encoding="utf-8"?>
+<p:notes xmlns:a="http://schemas.openxmlformats.org/drawingml/2006/main" xmlns:p="http://schemas.openxmlformats.org/presentationml/2006/main" xmlns:r="http://schemas.openxmlformats.org/officeDocument/2006/relationships">
+  <p:cSld>
+    <p:spTree>
+      <p:nvGrpSpPr>
+        <p:cNvPr id="1" name=""/>
+        <p:cNvGrpSpPr/>
+        <p:nvPr/>
+      </p:nvGrpSpPr>
+      <p:grpSpPr>
+        <a:xfrm>
+          <a:off x="0" y="0"/>
+          <a:ext cx="0" cy="0"/>
+          <a:chOff x="0" y="0"/>
+          <a:chExt cx="0" cy="0"/>
+        </a:xfrm>
+      </p:grpSpPr>
+      <p:sp>
+        <p:nvSpPr>
+          <p:cNvPr id="2" name="Slide Image Placeholder 1"/>
+          <p:cNvSpPr>
+            <a:spLocks noGrp="1"/>
+          </p:cNvSpPr>
+          <p:nvPr>
+            <p:ph type="sldImg" idx="2"/>
+          </p:nvPr>
+        </p:nvSpPr>
+        <p:spPr/>
+      </p:sp>
+      <p:sp>
+        <p:nvSpPr>
+          <p:cNvPr id="3" name="Notes Placeholder 2"/>
+          <p:cNvSpPr>
+            <a:spLocks noGrp="1"/>
+          </p:cNvSpPr>
+          <p:nvPr>
+            <p:ph type="body" idx="1"/>
+          </p:nvPr>
+        </p:nvSpPr>
+        <p:spPr/>
+        <p:txBody>
+          <a:bodyPr/>
+          <a:lstStyle/>
+          <a:p>
+            <a:r>
+              <a:t>Talking points:</a:t>
+            </a:r>
+          </a:p>
+          <a:p>
+            <a:r>
+              <a:t>- One mode is spread over many methods</a:t>
+            </a:r>
+          </a:p>
+          <a:p>
+            <a:r>
+              <a:t>  - To understand frightened ghosts, read seven methods</a:t>
+            </a:r>
+          </a:p>
+          <a:p>
+            <a:r>
+              <a:t>- Fields that belong to one mode</a:t>
+            </a:r>
+          </a:p>
+          <a:p>
+            <a:r>
+              <a:t>  - _houseTimer, _frightenedTimer, _enteringHouse: always there</a:t>
+            </a:r>
+          </a:p>
+          <a:p>
+            <a:r>
+              <a:t>- A new mode touches every switch</a:t>
+            </a:r>
+          </a:p>
+          <a:p>
+            <a:r>
+              <a:t>  - Miss one, and the compiler won’t tell you</a:t>
+            </a:r>
+          </a:p>
+          <a:p>
+            <a:r>
+              <a:t>- Pong’s string-based game state, all over again</a:t>
+            </a:r>
+          </a:p>
+        </p:txBody>
+      </p:sp>
+    </p:spTree>
+  </p:cSld>
+  <p:clrMapOvr>
+    <a:masterClrMapping/>
+  </p:clrMapOvr>
+</p:notes>
+</file>
+
+<file path=ppt/notesSlides/notesSlide9.xml><?xml version="1.0" encoding="utf-8"?>
+<p:notes xmlns:a="http://schemas.openxmlformats.org/drawingml/2006/main" xmlns:p="http://schemas.openxmlformats.org/presentationml/2006/main" xmlns:r="http://schemas.openxmlformats.org/officeDocument/2006/relationships">
+  <p:cSld>
+    <p:spTree>
+      <p:nvGrpSpPr>
+        <p:cNvPr id="1" name=""/>
+        <p:cNvGrpSpPr/>
+        <p:nvPr/>
+      </p:nvGrpSpPr>
+      <p:grpSpPr>
+        <a:xfrm>
+          <a:off x="0" y="0"/>
+          <a:ext cx="0" cy="0"/>
+          <a:chOff x="0" y="0"/>
+          <a:chExt cx="0" cy="0"/>
+        </a:xfrm>
+      </p:grpSpPr>
+      <p:sp>
+        <p:nvSpPr>
+          <p:cNvPr id="2" name="Slide Image Placeholder 1"/>
+          <p:cNvSpPr>
+            <a:spLocks noGrp="1"/>
+          </p:cNvSpPr>
+          <p:nvPr>
+            <p:ph type="sldImg" idx="2"/>
+          </p:nvPr>
+        </p:nvSpPr>
+        <p:spPr/>
+      </p:sp>
+      <p:sp>
+        <p:nvSpPr>
+          <p:cNvPr id="3" name="Notes Placeholder 2"/>
+          <p:cNvSpPr>
+            <a:spLocks noGrp="1"/>
+          </p:cNvSpPr>
+          <p:nvPr>
+            <p:ph type="body" idx="1"/>
+          </p:nvPr>
+        </p:nvSpPr>
+        <p:spPr/>
+        <p:txBody>
+          <a:bodyPr/>
+          <a:lstStyle/>
+          <a:p>
+            <a:r>
+              <a:t>Talking points:</a:t>
+            </a:r>
+          </a:p>
+          <a:p>
+            <a:r>
+              <a:t>- The states decide the transitions</a:t>
+            </a:r>
+          </a:p>
+          <a:p>
+            <a:r>
+              <a:t>  - Ghost doesn’t know which states exist</a:t>
+            </a:r>
+          </a:p>
+          <a:p>
+            <a:r>
+              <a:t>- The same event, handled differently</a:t>
+            </a:r>
+          </a:p>
+          <a:p>
+            <a:r>
+              <a:t>  - Power pellet: scatter and chase get frightened, frightened starts over, eaten ignores it</a:t>
+            </a:r>
+          </a:p>
+          <a:p>
+            <a:r>
+              <a:t>- Enter and Exit: start and clean up, in one place</a:t>
+            </a:r>
+          </a:p>
+          <a:p>
+            <a:r>
+              <a:t>- Each state is small, and can be read on its own</a:t>
+            </a:r>
+          </a:p>
+          <a:p>
+            <a:r>
+              <a:t>- Pacman1 → Pacman2: World didn’t change at all</a:t>
+            </a:r>
           </a:p>
         </p:txBody>
       </p:sp>
@@ -5055,7 +5697,7 @@
         <p:spPr>
           <a:xfrm>
             <a:off x="311700" y="885950"/>
-            <a:ext cx="8520600" cy="4023300"/>
+            <a:ext cx="8520600" cy="521208"/>
           </a:xfrm>
           <a:prstGeom prst="rect">
             <a:avLst/>
@@ -5079,111 +5721,467 @@
             </a:pPr>
             <a:r>
               <a:rPr lang="en"/>
-              <a:t>One mode is spread over many methods</a:t>
+              <a:t>A sixth mode: a short pause when a ghost is eaten. What do you change?</a:t>
             </a:r>
             <a:endParaRPr/>
           </a:p>
-          <a:p>
-            <a:pPr indent="-317500" lvl="1" marL="914400" rtl="0" algn="l">
-              <a:spcBef>
-                <a:spcPts val="0"/>
-              </a:spcBef>
-              <a:spcAft>
-                <a:spcPts val="0"/>
-              </a:spcAft>
-              <a:buSzPts val="1400"/>
-              <a:buChar char="○"/>
-            </a:pPr>
-            <a:r>
-              <a:rPr lang="en"/>
-              <a:t>To understand frightened ghosts, read seven methods</a:t>
-            </a:r>
-            <a:endParaRPr/>
-          </a:p>
-          <a:p>
-            <a:pPr indent="-330200" lvl="0" marL="457200" rtl="0" algn="l">
-              <a:spcBef>
-                <a:spcPts val="0"/>
-              </a:spcBef>
-              <a:spcAft>
-                <a:spcPts val="0"/>
-              </a:spcAft>
-              <a:buSzPts val="1600"/>
-              <a:buChar char="●"/>
-            </a:pPr>
-            <a:r>
-              <a:rPr lang="en"/>
-              <a:t>Fields that belong to one mode</a:t>
-            </a:r>
-            <a:endParaRPr/>
-          </a:p>
-          <a:p>
-            <a:pPr indent="-317500" lvl="1" marL="914400" rtl="0" algn="l">
-              <a:spcBef>
-                <a:spcPts val="0"/>
-              </a:spcBef>
-              <a:spcAft>
-                <a:spcPts val="0"/>
-              </a:spcAft>
-              <a:buSzPts val="1400"/>
-              <a:buChar char="○"/>
-            </a:pPr>
-            <a:r>
-              <a:rPr lang="en"/>
-              <a:t>_houseTimer, _frightenedTimer, _enteringHouse: always there</a:t>
-            </a:r>
-            <a:endParaRPr/>
-          </a:p>
-          <a:p>
-            <a:pPr indent="-330200" lvl="0" marL="457200" rtl="0" algn="l">
-              <a:spcBef>
-                <a:spcPts val="0"/>
-              </a:spcBef>
-              <a:spcAft>
-                <a:spcPts val="0"/>
-              </a:spcAft>
-              <a:buSzPts val="1600"/>
-              <a:buChar char="●"/>
-            </a:pPr>
-            <a:r>
-              <a:rPr lang="en"/>
-              <a:t>A new mode touches every switch</a:t>
-            </a:r>
-            <a:endParaRPr/>
-          </a:p>
-          <a:p>
-            <a:pPr indent="-317500" lvl="1" marL="914400" rtl="0" algn="l">
-              <a:spcBef>
-                <a:spcPts val="0"/>
-              </a:spcBef>
-              <a:spcAft>
-                <a:spcPts val="0"/>
-              </a:spcAft>
-              <a:buSzPts val="1400"/>
-              <a:buChar char="○"/>
-            </a:pPr>
-            <a:r>
-              <a:rPr lang="en"/>
-              <a:t>Miss one, and the compiler won’t tell you</a:t>
-            </a:r>
-            <a:endParaRPr/>
-          </a:p>
-          <a:p>
-            <a:pPr indent="-330200" lvl="0" marL="457200" rtl="0" algn="l">
-              <a:spcBef>
-                <a:spcPts val="0"/>
-              </a:spcBef>
-              <a:spcAft>
-                <a:spcPts val="0"/>
-              </a:spcAft>
-              <a:buSzPts val="1600"/>
-              <a:buChar char="●"/>
-            </a:pPr>
-            <a:r>
-              <a:rPr lang="en"/>
-              <a:t>Pong’s string-based game state, all over again</a:t>
-            </a:r>
-            <a:endParaRPr/>
+        </p:txBody>
+      </p:sp>
+      <p:sp>
+        <p:nvSpPr>
+          <p:cNvPr id="295" name="Rounded Rectangle 294"/>
+          <p:cNvSpPr/>
+          <p:nvPr/>
+        </p:nvSpPr>
+        <p:spPr>
+          <a:xfrm>
+            <a:off x="411480" y="1463040"/>
+            <a:ext cx="1280160" cy="548640"/>
+          </a:xfrm>
+          <a:prstGeom prst="roundRect">
+            <a:avLst>
+              <a:gd name="adj" fmla="val 12000"/>
+            </a:avLst>
+          </a:prstGeom>
+          <a:solidFill>
+            <a:srgbClr val="2E3338"/>
+          </a:solidFill>
+          <a:ln w="25400">
+            <a:solidFill>
+              <a:srgbClr val="D45D35"/>
+            </a:solidFill>
+          </a:ln>
+          <a:effectLst/>
+        </p:spPr>
+        <p:style>
+          <a:lnRef idx="1">
+            <a:schemeClr val="accent1"/>
+          </a:lnRef>
+          <a:fillRef idx="3">
+            <a:schemeClr val="accent1"/>
+          </a:fillRef>
+          <a:effectRef idx="2">
+            <a:schemeClr val="accent1"/>
+          </a:effectRef>
+          <a:fontRef idx="minor">
+            <a:schemeClr val="lt1"/>
+          </a:fontRef>
+        </p:style>
+        <p:txBody>
+          <a:bodyPr rtlCol="0" anchor="ctr" wrap="square" lIns="73152" rIns="73152"/>
+          <a:lstStyle/>
+          <a:p>
+            <a:pPr algn="ctr"/>
+            <a:r>
+              <a:rPr sz="1300" b="1">
+                <a:solidFill>
+                  <a:srgbClr val="DEE2E6"/>
+                </a:solidFill>
+              </a:rPr>
+              <a:t>switch in</a:t>
+            </a:r>
+          </a:p>
+          <a:p>
+            <a:pPr algn="ctr"/>
+            <a:r>
+              <a:rPr sz="1100" b="0">
+                <a:solidFill>
+                  <a:srgbClr val="9AA3AB"/>
+                </a:solidFill>
+              </a:rPr>
+              <a:t>Update</a:t>
+            </a:r>
+          </a:p>
+        </p:txBody>
+      </p:sp>
+      <p:sp>
+        <p:nvSpPr>
+          <p:cNvPr id="296" name="Rounded Rectangle 295"/>
+          <p:cNvSpPr/>
+          <p:nvPr/>
+        </p:nvSpPr>
+        <p:spPr>
+          <a:xfrm>
+            <a:off x="1810512" y="1463040"/>
+            <a:ext cx="1280160" cy="548640"/>
+          </a:xfrm>
+          <a:prstGeom prst="roundRect">
+            <a:avLst>
+              <a:gd name="adj" fmla="val 12000"/>
+            </a:avLst>
+          </a:prstGeom>
+          <a:solidFill>
+            <a:srgbClr val="2E3338"/>
+          </a:solidFill>
+          <a:ln w="25400">
+            <a:solidFill>
+              <a:srgbClr val="D45D35"/>
+            </a:solidFill>
+          </a:ln>
+          <a:effectLst/>
+        </p:spPr>
+        <p:style>
+          <a:lnRef idx="1">
+            <a:schemeClr val="accent1"/>
+          </a:lnRef>
+          <a:fillRef idx="3">
+            <a:schemeClr val="accent1"/>
+          </a:fillRef>
+          <a:effectRef idx="2">
+            <a:schemeClr val="accent1"/>
+          </a:effectRef>
+          <a:fontRef idx="minor">
+            <a:schemeClr val="lt1"/>
+          </a:fontRef>
+        </p:style>
+        <p:txBody>
+          <a:bodyPr rtlCol="0" anchor="ctr" wrap="square" lIns="73152" rIns="73152"/>
+          <a:lstStyle/>
+          <a:p>
+            <a:pPr algn="ctr"/>
+            <a:r>
+              <a:rPr sz="1300" b="1">
+                <a:solidFill>
+                  <a:srgbClr val="DEE2E6"/>
+                </a:solidFill>
+              </a:rPr>
+              <a:t>switch in</a:t>
+            </a:r>
+          </a:p>
+          <a:p>
+            <a:pPr algn="ctr"/>
+            <a:r>
+              <a:rPr sz="1100" b="0">
+                <a:solidFill>
+                  <a:srgbClr val="9AA3AB"/>
+                </a:solidFill>
+              </a:rPr>
+              <a:t>ChooseDirection</a:t>
+            </a:r>
+          </a:p>
+        </p:txBody>
+      </p:sp>
+      <p:sp>
+        <p:nvSpPr>
+          <p:cNvPr id="297" name="Rounded Rectangle 296"/>
+          <p:cNvSpPr/>
+          <p:nvPr/>
+        </p:nvSpPr>
+        <p:spPr>
+          <a:xfrm>
+            <a:off x="3209544" y="1463040"/>
+            <a:ext cx="1280160" cy="548640"/>
+          </a:xfrm>
+          <a:prstGeom prst="roundRect">
+            <a:avLst>
+              <a:gd name="adj" fmla="val 12000"/>
+            </a:avLst>
+          </a:prstGeom>
+          <a:solidFill>
+            <a:srgbClr val="2E3338"/>
+          </a:solidFill>
+          <a:ln w="25400">
+            <a:solidFill>
+              <a:srgbClr val="D45D35"/>
+            </a:solidFill>
+          </a:ln>
+          <a:effectLst/>
+        </p:spPr>
+        <p:style>
+          <a:lnRef idx="1">
+            <a:schemeClr val="accent1"/>
+          </a:lnRef>
+          <a:fillRef idx="3">
+            <a:schemeClr val="accent1"/>
+          </a:fillRef>
+          <a:effectRef idx="2">
+            <a:schemeClr val="accent1"/>
+          </a:effectRef>
+          <a:fontRef idx="minor">
+            <a:schemeClr val="lt1"/>
+          </a:fontRef>
+        </p:style>
+        <p:txBody>
+          <a:bodyPr rtlCol="0" anchor="ctr" wrap="square" lIns="73152" rIns="73152"/>
+          <a:lstStyle/>
+          <a:p>
+            <a:pPr algn="ctr"/>
+            <a:r>
+              <a:rPr sz="1300" b="1">
+                <a:solidFill>
+                  <a:srgbClr val="DEE2E6"/>
+                </a:solidFill>
+              </a:rPr>
+              <a:t>switch in</a:t>
+            </a:r>
+          </a:p>
+          <a:p>
+            <a:pPr algn="ctr"/>
+            <a:r>
+              <a:rPr sz="1100" b="0">
+                <a:solidFill>
+                  <a:srgbClr val="9AA3AB"/>
+                </a:solidFill>
+              </a:rPr>
+              <a:t>OnPowerPellet</a:t>
+            </a:r>
+          </a:p>
+        </p:txBody>
+      </p:sp>
+      <p:sp>
+        <p:nvSpPr>
+          <p:cNvPr id="298" name="Rounded Rectangle 297"/>
+          <p:cNvSpPr/>
+          <p:nvPr/>
+        </p:nvSpPr>
+        <p:spPr>
+          <a:xfrm>
+            <a:off x="4608576" y="1463040"/>
+            <a:ext cx="1280160" cy="548640"/>
+          </a:xfrm>
+          <a:prstGeom prst="roundRect">
+            <a:avLst>
+              <a:gd name="adj" fmla="val 12000"/>
+            </a:avLst>
+          </a:prstGeom>
+          <a:solidFill>
+            <a:srgbClr val="2E3338"/>
+          </a:solidFill>
+          <a:ln w="25400">
+            <a:solidFill>
+              <a:srgbClr val="D45D35"/>
+            </a:solidFill>
+          </a:ln>
+          <a:effectLst/>
+        </p:spPr>
+        <p:style>
+          <a:lnRef idx="1">
+            <a:schemeClr val="accent1"/>
+          </a:lnRef>
+          <a:fillRef idx="3">
+            <a:schemeClr val="accent1"/>
+          </a:fillRef>
+          <a:effectRef idx="2">
+            <a:schemeClr val="accent1"/>
+          </a:effectRef>
+          <a:fontRef idx="minor">
+            <a:schemeClr val="lt1"/>
+          </a:fontRef>
+        </p:style>
+        <p:txBody>
+          <a:bodyPr rtlCol="0" anchor="ctr" wrap="square" lIns="73152" rIns="73152"/>
+          <a:lstStyle/>
+          <a:p>
+            <a:pPr algn="ctr"/>
+            <a:r>
+              <a:rPr sz="1300" b="1">
+                <a:solidFill>
+                  <a:srgbClr val="DEE2E6"/>
+                </a:solidFill>
+              </a:rPr>
+              <a:t>switch in</a:t>
+            </a:r>
+          </a:p>
+          <a:p>
+            <a:pPr algn="ctr"/>
+            <a:r>
+              <a:rPr sz="1100" b="0">
+                <a:solidFill>
+                  <a:srgbClr val="9AA3AB"/>
+                </a:solidFill>
+              </a:rPr>
+              <a:t>Touch</a:t>
+            </a:r>
+          </a:p>
+        </p:txBody>
+      </p:sp>
+      <p:sp>
+        <p:nvSpPr>
+          <p:cNvPr id="299" name="Rounded Rectangle 298"/>
+          <p:cNvSpPr/>
+          <p:nvPr/>
+        </p:nvSpPr>
+        <p:spPr>
+          <a:xfrm>
+            <a:off x="6007608" y="1463040"/>
+            <a:ext cx="1280160" cy="548640"/>
+          </a:xfrm>
+          <a:prstGeom prst="roundRect">
+            <a:avLst>
+              <a:gd name="adj" fmla="val 12000"/>
+            </a:avLst>
+          </a:prstGeom>
+          <a:solidFill>
+            <a:srgbClr val="2E3338"/>
+          </a:solidFill>
+          <a:ln w="25400">
+            <a:solidFill>
+              <a:srgbClr val="D45D35"/>
+            </a:solidFill>
+          </a:ln>
+          <a:effectLst/>
+        </p:spPr>
+        <p:style>
+          <a:lnRef idx="1">
+            <a:schemeClr val="accent1"/>
+          </a:lnRef>
+          <a:fillRef idx="3">
+            <a:schemeClr val="accent1"/>
+          </a:fillRef>
+          <a:effectRef idx="2">
+            <a:schemeClr val="accent1"/>
+          </a:effectRef>
+          <a:fontRef idx="minor">
+            <a:schemeClr val="lt1"/>
+          </a:fontRef>
+        </p:style>
+        <p:txBody>
+          <a:bodyPr rtlCol="0" anchor="ctr" wrap="square" lIns="73152" rIns="73152"/>
+          <a:lstStyle/>
+          <a:p>
+            <a:pPr algn="ctr"/>
+            <a:r>
+              <a:rPr sz="1300" b="1">
+                <a:solidFill>
+                  <a:srgbClr val="DEE2E6"/>
+                </a:solidFill>
+              </a:rPr>
+              <a:t>switch in</a:t>
+            </a:r>
+          </a:p>
+          <a:p>
+            <a:pPr algn="ctr"/>
+            <a:r>
+              <a:rPr sz="1100" b="0">
+                <a:solidFill>
+                  <a:srgbClr val="9AA3AB"/>
+                </a:solidFill>
+              </a:rPr>
+              <a:t>Look</a:t>
+            </a:r>
+          </a:p>
+        </p:txBody>
+      </p:sp>
+      <p:sp>
+        <p:nvSpPr>
+          <p:cNvPr id="300" name="Rounded Rectangle 299"/>
+          <p:cNvSpPr/>
+          <p:nvPr/>
+        </p:nvSpPr>
+        <p:spPr>
+          <a:xfrm>
+            <a:off x="7406640" y="1463040"/>
+            <a:ext cx="1280160" cy="548640"/>
+          </a:xfrm>
+          <a:prstGeom prst="roundRect">
+            <a:avLst>
+              <a:gd name="adj" fmla="val 12000"/>
+            </a:avLst>
+          </a:prstGeom>
+          <a:solidFill>
+            <a:srgbClr val="2E3338"/>
+          </a:solidFill>
+          <a:ln w="25400">
+            <a:solidFill>
+              <a:srgbClr val="D45D35"/>
+            </a:solidFill>
+          </a:ln>
+          <a:effectLst/>
+        </p:spPr>
+        <p:style>
+          <a:lnRef idx="1">
+            <a:schemeClr val="accent1"/>
+          </a:lnRef>
+          <a:fillRef idx="3">
+            <a:schemeClr val="accent1"/>
+          </a:fillRef>
+          <a:effectRef idx="2">
+            <a:schemeClr val="accent1"/>
+          </a:effectRef>
+          <a:fontRef idx="minor">
+            <a:schemeClr val="lt1"/>
+          </a:fontRef>
+        </p:style>
+        <p:txBody>
+          <a:bodyPr rtlCol="0" anchor="ctr" wrap="square" lIns="73152" rIns="73152"/>
+          <a:lstStyle/>
+          <a:p>
+            <a:pPr algn="ctr"/>
+            <a:r>
+              <a:rPr sz="1300" b="1">
+                <a:solidFill>
+                  <a:srgbClr val="DEE2E6"/>
+                </a:solidFill>
+              </a:rPr>
+              <a:t>switch in</a:t>
+            </a:r>
+          </a:p>
+          <a:p>
+            <a:pPr algn="ctr"/>
+            <a:r>
+              <a:rPr sz="1100" b="0">
+                <a:solidFill>
+                  <a:srgbClr val="9AA3AB"/>
+                </a:solidFill>
+              </a:rPr>
+              <a:t>SetMode</a:t>
+            </a:r>
+          </a:p>
+        </p:txBody>
+      </p:sp>
+      <p:sp>
+        <p:nvSpPr>
+          <p:cNvPr id="301" name="TextBox 300"/>
+          <p:cNvSpPr txBox="1"/>
+          <p:nvPr/>
+        </p:nvSpPr>
+        <p:spPr>
+          <a:xfrm>
+            <a:off x="411480" y="2240280"/>
+            <a:ext cx="8321040" cy="1097280"/>
+          </a:xfrm>
+          <a:prstGeom prst="rect">
+            <a:avLst/>
+          </a:prstGeom>
+          <a:noFill/>
+        </p:spPr>
+        <p:txBody>
+          <a:bodyPr wrap="square">
+            <a:spAutoFit/>
+          </a:bodyPr>
+          <a:lstStyle/>
+          <a:p>
+            <a:pPr algn="ctr"/>
+            <a:r>
+              <a:rPr sz="1500" b="0" i="0">
+                <a:solidFill>
+                  <a:srgbClr val="9AA3AB"/>
+                </a:solidFill>
+              </a:rPr>
+              <a:t>Every switch, and nothing tells you if you miss one.</a:t>
+            </a:r>
+          </a:p>
+          <a:p>
+            <a:pPr algn="ctr"/>
+            <a:r>
+              <a:rPr sz="1500" b="0" i="0">
+                <a:solidFill>
+                  <a:srgbClr val="9AA3AB"/>
+                </a:solidFill>
+              </a:rPr>
+              <a:t>Fields that belong to one mode live in the ghost all the time.</a:t>
+            </a:r>
+          </a:p>
+          <a:p>
+            <a:pPr algn="ctr"/>
+            <a:r>
+              <a:rPr sz="1500" b="0" i="0">
+                <a:solidFill>
+                  <a:srgbClr val="9AA3AB"/>
+                </a:solidFill>
+              </a:rPr>
+              <a:t>Pong’s string-based game state, all over again.</a:t>
+            </a:r>
           </a:p>
         </p:txBody>
       </p:sp>
@@ -7083,7 +8081,7 @@
         <p:spPr>
           <a:xfrm>
             <a:off x="311700" y="885950"/>
-            <a:ext cx="8520600" cy="4023300"/>
+            <a:ext cx="8520600" cy="521208"/>
           </a:xfrm>
           <a:prstGeom prst="rect">
             <a:avLst/>
@@ -7107,111 +8105,260 @@
             </a:pPr>
             <a:r>
               <a:rPr lang="en"/>
-              <a:t>The states decide the transitions</a:t>
+              <a:t>The states decide the transitions; the ghost only forwards to its state.</a:t>
             </a:r>
             <a:endParaRPr/>
           </a:p>
-          <a:p>
-            <a:pPr indent="-317500" lvl="1" marL="914400" rtl="0" algn="l">
-              <a:spcBef>
-                <a:spcPts val="0"/>
-              </a:spcBef>
-              <a:spcAft>
-                <a:spcPts val="0"/>
-              </a:spcAft>
-              <a:buSzPts val="1400"/>
-              <a:buChar char="○"/>
-            </a:pPr>
-            <a:r>
-              <a:rPr lang="en"/>
-              <a:t>Ghost doesn’t know which states exist</a:t>
-            </a:r>
-            <a:endParaRPr/>
-          </a:p>
-          <a:p>
-            <a:pPr indent="-330200" lvl="0" marL="457200" rtl="0" algn="l">
-              <a:spcBef>
-                <a:spcPts val="0"/>
-              </a:spcBef>
-              <a:spcAft>
-                <a:spcPts val="0"/>
-              </a:spcAft>
-              <a:buSzPts val="1600"/>
-              <a:buChar char="●"/>
-            </a:pPr>
-            <a:r>
-              <a:rPr lang="en"/>
-              <a:t>The same event, handled differently</a:t>
-            </a:r>
-            <a:endParaRPr/>
-          </a:p>
-          <a:p>
-            <a:pPr indent="-317500" lvl="1" marL="914400" rtl="0" algn="l">
-              <a:spcBef>
-                <a:spcPts val="0"/>
-              </a:spcBef>
-              <a:spcAft>
-                <a:spcPts val="0"/>
-              </a:spcAft>
-              <a:buSzPts val="1400"/>
-              <a:buChar char="○"/>
-            </a:pPr>
-            <a:r>
-              <a:rPr lang="en"/>
-              <a:t>Power pellet: scatter and chase get frightened, frightened starts over, eaten ignores it</a:t>
-            </a:r>
-            <a:endParaRPr/>
-          </a:p>
-          <a:p>
-            <a:pPr indent="-330200" lvl="0" marL="457200" rtl="0" algn="l">
-              <a:spcBef>
-                <a:spcPts val="0"/>
-              </a:spcBef>
-              <a:spcAft>
-                <a:spcPts val="0"/>
-              </a:spcAft>
-              <a:buSzPts val="1600"/>
-              <a:buChar char="●"/>
-            </a:pPr>
-            <a:r>
-              <a:rPr lang="en"/>
-              <a:t>Enter and Exit: start and clean up, in one place</a:t>
-            </a:r>
-            <a:endParaRPr/>
-          </a:p>
-          <a:p>
-            <a:pPr indent="-330200" lvl="0" marL="457200" rtl="0" algn="l">
-              <a:spcBef>
-                <a:spcPts val="0"/>
-              </a:spcBef>
-              <a:spcAft>
-                <a:spcPts val="0"/>
-              </a:spcAft>
-              <a:buSzPts val="1600"/>
-              <a:buChar char="●"/>
-            </a:pPr>
-            <a:r>
-              <a:rPr lang="en"/>
-              <a:t>Each state is small, and can be read on its own</a:t>
-            </a:r>
-            <a:endParaRPr/>
-          </a:p>
-          <a:p>
-            <a:pPr indent="-330200" lvl="0" marL="457200" rtl="0" algn="l">
-              <a:spcBef>
-                <a:spcPts val="0"/>
-              </a:spcBef>
-              <a:spcAft>
-                <a:spcPts val="0"/>
-              </a:spcAft>
-              <a:buSzPts val="1600"/>
-              <a:buChar char="●"/>
-            </a:pPr>
-            <a:r>
-              <a:rPr lang="en"/>
-              <a:t>Pacman1 → Pacman2: World didn’t change at all</a:t>
-            </a:r>
-            <a:endParaRPr/>
+        </p:txBody>
+      </p:sp>
+      <p:sp>
+        <p:nvSpPr>
+          <p:cNvPr id="295" name="Rounded Rectangle 294"/>
+          <p:cNvSpPr/>
+          <p:nvPr/>
+        </p:nvSpPr>
+        <p:spPr>
+          <a:xfrm>
+            <a:off x="411480" y="1463040"/>
+            <a:ext cx="2651760" cy="1097280"/>
+          </a:xfrm>
+          <a:prstGeom prst="roundRect">
+            <a:avLst>
+              <a:gd name="adj" fmla="val 12000"/>
+            </a:avLst>
+          </a:prstGeom>
+          <a:solidFill>
+            <a:srgbClr val="2E3338"/>
+          </a:solidFill>
+          <a:ln>
+            <a:noFill/>
+          </a:ln>
+          <a:effectLst/>
+        </p:spPr>
+        <p:style>
+          <a:lnRef idx="1">
+            <a:schemeClr val="accent1"/>
+          </a:lnRef>
+          <a:fillRef idx="3">
+            <a:schemeClr val="accent1"/>
+          </a:fillRef>
+          <a:effectRef idx="2">
+            <a:schemeClr val="accent1"/>
+          </a:effectRef>
+          <a:fontRef idx="minor">
+            <a:schemeClr val="lt1"/>
+          </a:fontRef>
+        </p:style>
+        <p:txBody>
+          <a:bodyPr rtlCol="0" anchor="ctr" wrap="square" lIns="73152" rIns="73152"/>
+          <a:lstStyle/>
+          <a:p>
+            <a:pPr algn="ctr"/>
+            <a:r>
+              <a:rPr sz="1500" b="1">
+                <a:solidFill>
+                  <a:srgbClr val="DEE2E6"/>
+                </a:solidFill>
+              </a:rPr>
+              <a:t>One place per mode</a:t>
+            </a:r>
+          </a:p>
+          <a:p>
+            <a:pPr algn="ctr"/>
+            <a:r>
+              <a:rPr sz="1300" b="0">
+                <a:solidFill>
+                  <a:srgbClr val="9AA3AB"/>
+                </a:solidFill>
+              </a:rPr>
+              <a:t>read a state on its own</a:t>
+            </a:r>
+          </a:p>
+        </p:txBody>
+      </p:sp>
+      <p:sp>
+        <p:nvSpPr>
+          <p:cNvPr id="296" name="Rounded Rectangle 295"/>
+          <p:cNvSpPr/>
+          <p:nvPr/>
+        </p:nvSpPr>
+        <p:spPr>
+          <a:xfrm>
+            <a:off x="3246120" y="1463040"/>
+            <a:ext cx="2651760" cy="1097280"/>
+          </a:xfrm>
+          <a:prstGeom prst="roundRect">
+            <a:avLst>
+              <a:gd name="adj" fmla="val 12000"/>
+            </a:avLst>
+          </a:prstGeom>
+          <a:solidFill>
+            <a:srgbClr val="2E3338"/>
+          </a:solidFill>
+          <a:ln>
+            <a:noFill/>
+          </a:ln>
+          <a:effectLst/>
+        </p:spPr>
+        <p:style>
+          <a:lnRef idx="1">
+            <a:schemeClr val="accent1"/>
+          </a:lnRef>
+          <a:fillRef idx="3">
+            <a:schemeClr val="accent1"/>
+          </a:fillRef>
+          <a:effectRef idx="2">
+            <a:schemeClr val="accent1"/>
+          </a:effectRef>
+          <a:fontRef idx="minor">
+            <a:schemeClr val="lt1"/>
+          </a:fontRef>
+        </p:style>
+        <p:txBody>
+          <a:bodyPr rtlCol="0" anchor="ctr" wrap="square" lIns="73152" rIns="73152"/>
+          <a:lstStyle/>
+          <a:p>
+            <a:pPr algn="ctr"/>
+            <a:r>
+              <a:rPr sz="1500" b="1">
+                <a:solidFill>
+                  <a:srgbClr val="DEE2E6"/>
+                </a:solidFill>
+              </a:rPr>
+              <a:t>Same event, different handling</a:t>
+            </a:r>
+          </a:p>
+          <a:p>
+            <a:pPr algn="ctr"/>
+            <a:r>
+              <a:rPr sz="1300" b="0">
+                <a:solidFill>
+                  <a:srgbClr val="9AA3AB"/>
+                </a:solidFill>
+              </a:rPr>
+              <a:t>a power pellet: frightened,</a:t>
+            </a:r>
+          </a:p>
+          <a:p>
+            <a:pPr algn="ctr"/>
+            <a:r>
+              <a:rPr sz="1300" b="0">
+                <a:solidFill>
+                  <a:srgbClr val="9AA3AB"/>
+                </a:solidFill>
+              </a:rPr>
+              <a:t>start over, or ignored</a:t>
+            </a:r>
+          </a:p>
+        </p:txBody>
+      </p:sp>
+      <p:sp>
+        <p:nvSpPr>
+          <p:cNvPr id="297" name="Rounded Rectangle 296"/>
+          <p:cNvSpPr/>
+          <p:nvPr/>
+        </p:nvSpPr>
+        <p:spPr>
+          <a:xfrm>
+            <a:off x="6080760" y="1463040"/>
+            <a:ext cx="2651760" cy="1097280"/>
+          </a:xfrm>
+          <a:prstGeom prst="roundRect">
+            <a:avLst>
+              <a:gd name="adj" fmla="val 12000"/>
+            </a:avLst>
+          </a:prstGeom>
+          <a:solidFill>
+            <a:srgbClr val="2E3338"/>
+          </a:solidFill>
+          <a:ln>
+            <a:noFill/>
+          </a:ln>
+          <a:effectLst/>
+        </p:spPr>
+        <p:style>
+          <a:lnRef idx="1">
+            <a:schemeClr val="accent1"/>
+          </a:lnRef>
+          <a:fillRef idx="3">
+            <a:schemeClr val="accent1"/>
+          </a:fillRef>
+          <a:effectRef idx="2">
+            <a:schemeClr val="accent1"/>
+          </a:effectRef>
+          <a:fontRef idx="minor">
+            <a:schemeClr val="lt1"/>
+          </a:fontRef>
+        </p:style>
+        <p:txBody>
+          <a:bodyPr rtlCol="0" anchor="ctr" wrap="square" lIns="73152" rIns="73152"/>
+          <a:lstStyle/>
+          <a:p>
+            <a:pPr algn="ctr"/>
+            <a:r>
+              <a:rPr sz="1500" b="1">
+                <a:solidFill>
+                  <a:srgbClr val="DEE2E6"/>
+                </a:solidFill>
+              </a:rPr>
+              <a:t>Enter and Exit</a:t>
+            </a:r>
+          </a:p>
+          <a:p>
+            <a:pPr algn="ctr"/>
+            <a:r>
+              <a:rPr sz="1300" b="0">
+                <a:solidFill>
+                  <a:srgbClr val="9AA3AB"/>
+                </a:solidFill>
+              </a:rPr>
+              <a:t>start and clean up</a:t>
+            </a:r>
+          </a:p>
+          <a:p>
+            <a:pPr algn="ctr"/>
+            <a:r>
+              <a:rPr sz="1300" b="0">
+                <a:solidFill>
+                  <a:srgbClr val="9AA3AB"/>
+                </a:solidFill>
+              </a:rPr>
+              <a:t>in one place</a:t>
+            </a:r>
+          </a:p>
+        </p:txBody>
+      </p:sp>
+      <p:sp>
+        <p:nvSpPr>
+          <p:cNvPr id="298" name="TextBox 297"/>
+          <p:cNvSpPr txBox="1"/>
+          <p:nvPr/>
+        </p:nvSpPr>
+        <p:spPr>
+          <a:xfrm>
+            <a:off x="411480" y="2834640"/>
+            <a:ext cx="8321040" cy="365760"/>
+          </a:xfrm>
+          <a:prstGeom prst="rect">
+            <a:avLst/>
+          </a:prstGeom>
+          <a:noFill/>
+        </p:spPr>
+        <p:txBody>
+          <a:bodyPr wrap="square">
+            <a:spAutoFit/>
+          </a:bodyPr>
+          <a:lstStyle/>
+          <a:p>
+            <a:pPr algn="ctr"/>
+            <a:r>
+              <a:rPr sz="1400" b="0" i="0">
+                <a:solidFill>
+                  <a:srgbClr val="9AA3AB"/>
+                </a:solidFill>
+              </a:rPr>
+              <a:t>Pacman1 → Pacman2: World didn’t change at all.</a:t>
+            </a:r>
           </a:p>
         </p:txBody>
       </p:sp>
@@ -7419,7 +8566,7 @@
         <p:spPr>
           <a:xfrm>
             <a:off x="311700" y="885950"/>
-            <a:ext cx="8520600" cy="4023300"/>
+            <a:ext cx="8520600" cy="521208"/>
           </a:xfrm>
           <a:prstGeom prst="rect">
             <a:avLst/>
@@ -7443,111 +8590,421 @@
             </a:pPr>
             <a:r>
               <a:rPr lang="en"/>
-              <a:t>So far, every ghost chases straight at Pac-Man</a:t>
+              <a:t>Four personalities, so the ghosts trap Pac-Man instead of lining up behind him.</a:t>
             </a:r>
             <a:endParaRPr/>
           </a:p>
-          <a:p>
-            <a:pPr indent="-317500" lvl="1" marL="914400" rtl="0" algn="l">
-              <a:spcBef>
-                <a:spcPts val="0"/>
-              </a:spcBef>
-              <a:spcAft>
-                <a:spcPts val="0"/>
-              </a:spcAft>
-              <a:buSzPts val="1400"/>
-              <a:buChar char="○"/>
-            </a:pPr>
-            <a:r>
-              <a:rPr lang="en"/>
-              <a:t>They line up behind him: easy to escape</a:t>
-            </a:r>
-            <a:endParaRPr/>
-          </a:p>
-          <a:p>
-            <a:pPr indent="-330200" lvl="0" marL="457200" rtl="0" algn="l">
-              <a:spcBef>
-                <a:spcPts val="0"/>
-              </a:spcBef>
-              <a:spcAft>
-                <a:spcPts val="0"/>
-              </a:spcAft>
-              <a:buSzPts val="1600"/>
-              <a:buChar char="●"/>
-            </a:pPr>
-            <a:r>
-              <a:rPr lang="en"/>
-              <a:t>Blinky: Pac-Man’s tile</a:t>
-            </a:r>
-            <a:endParaRPr/>
-          </a:p>
-          <a:p>
-            <a:pPr indent="-330200" lvl="0" marL="457200" rtl="0" algn="l">
-              <a:spcBef>
-                <a:spcPts val="0"/>
-              </a:spcBef>
-              <a:spcAft>
-                <a:spcPts val="0"/>
-              </a:spcAft>
-              <a:buSzPts val="1600"/>
-              <a:buChar char="●"/>
-            </a:pPr>
-            <a:r>
-              <a:rPr lang="en"/>
-              <a:t>Pinky: four tiles ahead of Pac-Man</a:t>
-            </a:r>
-            <a:endParaRPr/>
-          </a:p>
-          <a:p>
-            <a:pPr indent="-330200" lvl="0" marL="457200" rtl="0" algn="l">
-              <a:spcBef>
-                <a:spcPts val="0"/>
-              </a:spcBef>
-              <a:spcAft>
-                <a:spcPts val="0"/>
-              </a:spcAft>
-              <a:buSzPts val="1600"/>
-              <a:buChar char="●"/>
-            </a:pPr>
-            <a:r>
-              <a:rPr lang="en"/>
-              <a:t>Inky: two tiles ahead of Pac-Man, and double the line from Blinky</a:t>
-            </a:r>
-            <a:endParaRPr/>
-          </a:p>
-          <a:p>
-            <a:pPr indent="-330200" lvl="0" marL="457200" rtl="0" algn="l">
-              <a:spcBef>
-                <a:spcPts val="0"/>
-              </a:spcBef>
-              <a:spcAft>
-                <a:spcPts val="0"/>
-              </a:spcAft>
-              <a:buSzPts val="1600"/>
-              <a:buChar char="●"/>
-            </a:pPr>
-            <a:r>
-              <a:rPr lang="en"/>
-              <a:t>Clyde: Pac-Man, until within eight tiles; then his corner</a:t>
-            </a:r>
-            <a:endParaRPr/>
-          </a:p>
-          <a:p>
-            <a:pPr indent="-330200" lvl="0" marL="457200" rtl="0" algn="l">
-              <a:spcBef>
-                <a:spcPts val="0"/>
-              </a:spcBef>
-              <a:spcAft>
-                <a:spcPts val="0"/>
-              </a:spcAft>
-              <a:buSzPts val="1600"/>
-              <a:buChar char="●"/>
-            </a:pPr>
-            <a:r>
-              <a:rPr lang="en"/>
-              <a:t>Together, they trap Pac-Man</a:t>
-            </a:r>
-            <a:endParaRPr/>
+        </p:txBody>
+      </p:sp>
+      <p:pic>
+        <p:nvPicPr>
+          <p:cNvPr id="295" name="Picture 294" descr="ghost_blinky.png"/>
+          <p:cNvPicPr>
+            <a:picLocks noChangeAspect="1"/>
+          </p:cNvPicPr>
+          <p:nvPr/>
+        </p:nvPicPr>
+        <p:blipFill>
+          <a:blip r:embed="rId3"/>
+          <a:stretch>
+            <a:fillRect/>
+          </a:stretch>
+        </p:blipFill>
+        <p:spPr>
+          <a:xfrm>
+            <a:off x="1005840" y="1417320"/>
+            <a:ext cx="822960" cy="822960"/>
+          </a:xfrm>
+          <a:prstGeom prst="rect">
+            <a:avLst/>
+          </a:prstGeom>
+        </p:spPr>
+      </p:pic>
+      <p:sp>
+        <p:nvSpPr>
+          <p:cNvPr id="296" name="Rounded Rectangle 295"/>
+          <p:cNvSpPr/>
+          <p:nvPr/>
+        </p:nvSpPr>
+        <p:spPr>
+          <a:xfrm>
+            <a:off x="502920" y="2331720"/>
+            <a:ext cx="1828800" cy="914400"/>
+          </a:xfrm>
+          <a:prstGeom prst="roundRect">
+            <a:avLst>
+              <a:gd name="adj" fmla="val 12000"/>
+            </a:avLst>
+          </a:prstGeom>
+          <a:solidFill>
+            <a:srgbClr val="2E3338"/>
+          </a:solidFill>
+          <a:ln>
+            <a:noFill/>
+          </a:ln>
+          <a:effectLst/>
+        </p:spPr>
+        <p:style>
+          <a:lnRef idx="1">
+            <a:schemeClr val="accent1"/>
+          </a:lnRef>
+          <a:fillRef idx="3">
+            <a:schemeClr val="accent1"/>
+          </a:fillRef>
+          <a:effectRef idx="2">
+            <a:schemeClr val="accent1"/>
+          </a:effectRef>
+          <a:fontRef idx="minor">
+            <a:schemeClr val="lt1"/>
+          </a:fontRef>
+        </p:style>
+        <p:txBody>
+          <a:bodyPr rtlCol="0" anchor="ctr" wrap="square" lIns="73152" rIns="73152"/>
+          <a:lstStyle/>
+          <a:p>
+            <a:pPr algn="ctr"/>
+            <a:r>
+              <a:rPr sz="1500" b="1">
+                <a:solidFill>
+                  <a:srgbClr val="DEE2E6"/>
+                </a:solidFill>
+              </a:rPr>
+              <a:t>Blinky</a:t>
+            </a:r>
+          </a:p>
+          <a:p>
+            <a:pPr algn="ctr"/>
+            <a:r>
+              <a:rPr sz="1300" b="0">
+                <a:solidFill>
+                  <a:srgbClr val="9AA3AB"/>
+                </a:solidFill>
+              </a:rPr>
+              <a:t>Pac-Man’s tile</a:t>
+            </a:r>
+          </a:p>
+        </p:txBody>
+      </p:sp>
+      <p:pic>
+        <p:nvPicPr>
+          <p:cNvPr id="297" name="Picture 296" descr="ghost_pinky.png"/>
+          <p:cNvPicPr>
+            <a:picLocks noChangeAspect="1"/>
+          </p:cNvPicPr>
+          <p:nvPr/>
+        </p:nvPicPr>
+        <p:blipFill>
+          <a:blip r:embed="rId4"/>
+          <a:stretch>
+            <a:fillRect/>
+          </a:stretch>
+        </p:blipFill>
+        <p:spPr>
+          <a:xfrm>
+            <a:off x="3108959" y="1417320"/>
+            <a:ext cx="822960" cy="822960"/>
+          </a:xfrm>
+          <a:prstGeom prst="rect">
+            <a:avLst/>
+          </a:prstGeom>
+        </p:spPr>
+      </p:pic>
+      <p:sp>
+        <p:nvSpPr>
+          <p:cNvPr id="298" name="Rounded Rectangle 297"/>
+          <p:cNvSpPr/>
+          <p:nvPr/>
+        </p:nvSpPr>
+        <p:spPr>
+          <a:xfrm>
+            <a:off x="2606039" y="2331720"/>
+            <a:ext cx="1828800" cy="914400"/>
+          </a:xfrm>
+          <a:prstGeom prst="roundRect">
+            <a:avLst>
+              <a:gd name="adj" fmla="val 12000"/>
+            </a:avLst>
+          </a:prstGeom>
+          <a:solidFill>
+            <a:srgbClr val="2E3338"/>
+          </a:solidFill>
+          <a:ln>
+            <a:noFill/>
+          </a:ln>
+          <a:effectLst/>
+        </p:spPr>
+        <p:style>
+          <a:lnRef idx="1">
+            <a:schemeClr val="accent1"/>
+          </a:lnRef>
+          <a:fillRef idx="3">
+            <a:schemeClr val="accent1"/>
+          </a:fillRef>
+          <a:effectRef idx="2">
+            <a:schemeClr val="accent1"/>
+          </a:effectRef>
+          <a:fontRef idx="minor">
+            <a:schemeClr val="lt1"/>
+          </a:fontRef>
+        </p:style>
+        <p:txBody>
+          <a:bodyPr rtlCol="0" anchor="ctr" wrap="square" lIns="73152" rIns="73152"/>
+          <a:lstStyle/>
+          <a:p>
+            <a:pPr algn="ctr"/>
+            <a:r>
+              <a:rPr sz="1500" b="1">
+                <a:solidFill>
+                  <a:srgbClr val="DEE2E6"/>
+                </a:solidFill>
+              </a:rPr>
+              <a:t>Pinky</a:t>
+            </a:r>
+          </a:p>
+          <a:p>
+            <a:pPr algn="ctr"/>
+            <a:r>
+              <a:rPr sz="1300" b="0">
+                <a:solidFill>
+                  <a:srgbClr val="9AA3AB"/>
+                </a:solidFill>
+              </a:rPr>
+              <a:t>4 tiles ahead of him</a:t>
+            </a:r>
+          </a:p>
+        </p:txBody>
+      </p:sp>
+      <p:pic>
+        <p:nvPicPr>
+          <p:cNvPr id="299" name="Picture 298" descr="ghost_inky.png"/>
+          <p:cNvPicPr>
+            <a:picLocks noChangeAspect="1"/>
+          </p:cNvPicPr>
+          <p:nvPr/>
+        </p:nvPicPr>
+        <p:blipFill>
+          <a:blip r:embed="rId5"/>
+          <a:stretch>
+            <a:fillRect/>
+          </a:stretch>
+        </p:blipFill>
+        <p:spPr>
+          <a:xfrm>
+            <a:off x="5212079" y="1417320"/>
+            <a:ext cx="822960" cy="822960"/>
+          </a:xfrm>
+          <a:prstGeom prst="rect">
+            <a:avLst/>
+          </a:prstGeom>
+        </p:spPr>
+      </p:pic>
+      <p:sp>
+        <p:nvSpPr>
+          <p:cNvPr id="300" name="Rounded Rectangle 299"/>
+          <p:cNvSpPr/>
+          <p:nvPr/>
+        </p:nvSpPr>
+        <p:spPr>
+          <a:xfrm>
+            <a:off x="4709159" y="2331720"/>
+            <a:ext cx="1828800" cy="914400"/>
+          </a:xfrm>
+          <a:prstGeom prst="roundRect">
+            <a:avLst>
+              <a:gd name="adj" fmla="val 12000"/>
+            </a:avLst>
+          </a:prstGeom>
+          <a:solidFill>
+            <a:srgbClr val="2E3338"/>
+          </a:solidFill>
+          <a:ln>
+            <a:noFill/>
+          </a:ln>
+          <a:effectLst/>
+        </p:spPr>
+        <p:style>
+          <a:lnRef idx="1">
+            <a:schemeClr val="accent1"/>
+          </a:lnRef>
+          <a:fillRef idx="3">
+            <a:schemeClr val="accent1"/>
+          </a:fillRef>
+          <a:effectRef idx="2">
+            <a:schemeClr val="accent1"/>
+          </a:effectRef>
+          <a:fontRef idx="minor">
+            <a:schemeClr val="lt1"/>
+          </a:fontRef>
+        </p:style>
+        <p:txBody>
+          <a:bodyPr rtlCol="0" anchor="ctr" wrap="square" lIns="73152" rIns="73152"/>
+          <a:lstStyle/>
+          <a:p>
+            <a:pPr algn="ctr"/>
+            <a:r>
+              <a:rPr sz="1500" b="1">
+                <a:solidFill>
+                  <a:srgbClr val="DEE2E6"/>
+                </a:solidFill>
+              </a:rPr>
+              <a:t>Inky</a:t>
+            </a:r>
+          </a:p>
+          <a:p>
+            <a:pPr algn="ctr"/>
+            <a:r>
+              <a:rPr sz="1300" b="0">
+                <a:solidFill>
+                  <a:srgbClr val="9AA3AB"/>
+                </a:solidFill>
+              </a:rPr>
+              <a:t>2 ahead, doubled</a:t>
+            </a:r>
+          </a:p>
+          <a:p>
+            <a:pPr algn="ctr"/>
+            <a:r>
+              <a:rPr sz="1300" b="0">
+                <a:solidFill>
+                  <a:srgbClr val="9AA3AB"/>
+                </a:solidFill>
+              </a:rPr>
+              <a:t>from Blinky</a:t>
+            </a:r>
+          </a:p>
+        </p:txBody>
+      </p:sp>
+      <p:pic>
+        <p:nvPicPr>
+          <p:cNvPr id="301" name="Picture 300" descr="ghost_clyde.png"/>
+          <p:cNvPicPr>
+            <a:picLocks noChangeAspect="1"/>
+          </p:cNvPicPr>
+          <p:nvPr/>
+        </p:nvPicPr>
+        <p:blipFill>
+          <a:blip r:embed="rId6"/>
+          <a:stretch>
+            <a:fillRect/>
+          </a:stretch>
+        </p:blipFill>
+        <p:spPr>
+          <a:xfrm>
+            <a:off x="7315199" y="1417320"/>
+            <a:ext cx="822960" cy="822960"/>
+          </a:xfrm>
+          <a:prstGeom prst="rect">
+            <a:avLst/>
+          </a:prstGeom>
+        </p:spPr>
+      </p:pic>
+      <p:sp>
+        <p:nvSpPr>
+          <p:cNvPr id="302" name="Rounded Rectangle 301"/>
+          <p:cNvSpPr/>
+          <p:nvPr/>
+        </p:nvSpPr>
+        <p:spPr>
+          <a:xfrm>
+            <a:off x="6812279" y="2331720"/>
+            <a:ext cx="1828800" cy="914400"/>
+          </a:xfrm>
+          <a:prstGeom prst="roundRect">
+            <a:avLst>
+              <a:gd name="adj" fmla="val 12000"/>
+            </a:avLst>
+          </a:prstGeom>
+          <a:solidFill>
+            <a:srgbClr val="2E3338"/>
+          </a:solidFill>
+          <a:ln>
+            <a:noFill/>
+          </a:ln>
+          <a:effectLst/>
+        </p:spPr>
+        <p:style>
+          <a:lnRef idx="1">
+            <a:schemeClr val="accent1"/>
+          </a:lnRef>
+          <a:fillRef idx="3">
+            <a:schemeClr val="accent1"/>
+          </a:fillRef>
+          <a:effectRef idx="2">
+            <a:schemeClr val="accent1"/>
+          </a:effectRef>
+          <a:fontRef idx="minor">
+            <a:schemeClr val="lt1"/>
+          </a:fontRef>
+        </p:style>
+        <p:txBody>
+          <a:bodyPr rtlCol="0" anchor="ctr" wrap="square" lIns="73152" rIns="73152"/>
+          <a:lstStyle/>
+          <a:p>
+            <a:pPr algn="ctr"/>
+            <a:r>
+              <a:rPr sz="1500" b="1">
+                <a:solidFill>
+                  <a:srgbClr val="DEE2E6"/>
+                </a:solidFill>
+              </a:rPr>
+              <a:t>Clyde</a:t>
+            </a:r>
+          </a:p>
+          <a:p>
+            <a:pPr algn="ctr"/>
+            <a:r>
+              <a:rPr sz="1300" b="0">
+                <a:solidFill>
+                  <a:srgbClr val="9AA3AB"/>
+                </a:solidFill>
+              </a:rPr>
+              <a:t>Pac-Man, until</a:t>
+            </a:r>
+          </a:p>
+          <a:p>
+            <a:pPr algn="ctr"/>
+            <a:r>
+              <a:rPr sz="1300" b="0">
+                <a:solidFill>
+                  <a:srgbClr val="9AA3AB"/>
+                </a:solidFill>
+              </a:rPr>
+              <a:t>close: then his corner</a:t>
+            </a:r>
+          </a:p>
+        </p:txBody>
+      </p:sp>
+      <p:sp>
+        <p:nvSpPr>
+          <p:cNvPr id="303" name="TextBox 302"/>
+          <p:cNvSpPr txBox="1"/>
+          <p:nvPr/>
+        </p:nvSpPr>
+        <p:spPr>
+          <a:xfrm>
+            <a:off x="457200" y="3520440"/>
+            <a:ext cx="8229600" cy="731520"/>
+          </a:xfrm>
+          <a:prstGeom prst="rect">
+            <a:avLst/>
+          </a:prstGeom>
+          <a:noFill/>
+        </p:spPr>
+        <p:txBody>
+          <a:bodyPr wrap="square">
+            <a:spAutoFit/>
+          </a:bodyPr>
+          <a:lstStyle/>
+          <a:p>
+            <a:pPr algn="ctr"/>
+            <a:r>
+              <a:rPr sz="1600" b="1" i="0">
+                <a:solidFill>
+                  <a:srgbClr val="DEE2E6"/>
+                </a:solidFill>
+              </a:rPr>
+              <a:t>Where does the targeting code go, so every ghost can have its own?</a:t>
+            </a:r>
           </a:p>
         </p:txBody>
       </p:sp>
@@ -8665,7 +10122,7 @@
         <p:spPr>
           <a:xfrm>
             <a:off x="311700" y="885950"/>
-            <a:ext cx="8520600" cy="4023300"/>
+            <a:ext cx="8520600" cy="521208"/>
           </a:xfrm>
           <a:prstGeom prst="rect">
             <a:avLst/>
@@ -8689,128 +10146,219 @@
             </a:pPr>
             <a:r>
               <a:rPr lang="en"/>
-              <a:t>The same structure: hold an interface, forward to it</a:t>
+              <a:t>The same structure: hold an interface, forward to it. Different jobs.</a:t>
             </a:r>
             <a:endParaRPr/>
           </a:p>
-          <a:p>
-            <a:pPr indent="-330200" lvl="0" marL="457200" rtl="0" algn="l">
-              <a:spcBef>
-                <a:spcPts val="0"/>
-              </a:spcBef>
-              <a:spcAft>
-                <a:spcPts val="0"/>
-              </a:spcAft>
-              <a:buSzPts val="1600"/>
-              <a:buChar char="●"/>
-            </a:pPr>
-            <a:r>
-              <a:rPr lang="en"/>
-              <a:t>State: the ghost’s mode</a:t>
-            </a:r>
-            <a:endParaRPr/>
-          </a:p>
-          <a:p>
-            <a:pPr indent="-317500" lvl="1" marL="914400" rtl="0" algn="l">
-              <a:spcBef>
-                <a:spcPts val="0"/>
-              </a:spcBef>
-              <a:spcAft>
-                <a:spcPts val="0"/>
-              </a:spcAft>
-              <a:buSzPts val="1400"/>
-              <a:buChar char="○"/>
-            </a:pPr>
-            <a:r>
-              <a:rPr lang="en"/>
-              <a:t>Picked by the states themselves, and changes all the time</a:t>
-            </a:r>
-            <a:endParaRPr/>
-          </a:p>
-          <a:p>
-            <a:pPr indent="-317500" lvl="1" marL="914400" rtl="0" algn="l">
-              <a:spcBef>
-                <a:spcPts val="0"/>
-              </a:spcBef>
-              <a:spcAft>
-                <a:spcPts val="0"/>
-              </a:spcAft>
-              <a:buSzPts val="1400"/>
-              <a:buChar char="○"/>
-            </a:pPr>
-            <a:r>
-              <a:rPr lang="en"/>
-              <a:t>A state knows the next state</a:t>
-            </a:r>
-            <a:endParaRPr/>
-          </a:p>
-          <a:p>
-            <a:pPr indent="-330200" lvl="0" marL="457200" rtl="0" algn="l">
-              <a:spcBef>
-                <a:spcPts val="0"/>
-              </a:spcBef>
-              <a:spcAft>
-                <a:spcPts val="0"/>
-              </a:spcAft>
-              <a:buSzPts val="1600"/>
-              <a:buChar char="●"/>
-            </a:pPr>
-            <a:r>
-              <a:rPr lang="en"/>
-              <a:t>Strategy: the ghost’s targeting</a:t>
-            </a:r>
-            <a:endParaRPr/>
-          </a:p>
-          <a:p>
-            <a:pPr indent="-317500" lvl="1" marL="914400" rtl="0" algn="l">
-              <a:spcBef>
-                <a:spcPts val="0"/>
-              </a:spcBef>
-              <a:spcAft>
-                <a:spcPts val="0"/>
-              </a:spcAft>
-              <a:buSzPts val="1400"/>
-              <a:buChar char="○"/>
-            </a:pPr>
-            <a:r>
-              <a:rPr lang="en"/>
-              <a:t>Picked from outside (World), once, and never changes</a:t>
-            </a:r>
-            <a:endParaRPr/>
-          </a:p>
-          <a:p>
-            <a:pPr indent="-317500" lvl="1" marL="914400" rtl="0" algn="l">
-              <a:spcBef>
-                <a:spcPts val="0"/>
-              </a:spcBef>
-              <a:spcAft>
-                <a:spcPts val="0"/>
-              </a:spcAft>
-              <a:buSzPts val="1400"/>
-              <a:buChar char="○"/>
-            </a:pPr>
-            <a:r>
-              <a:rPr lang="en"/>
-              <a:t>Strategies don’t know each other</a:t>
-            </a:r>
-            <a:endParaRPr/>
-          </a:p>
-          <a:p>
-            <a:pPr indent="-330200" lvl="0" marL="457200" rtl="0" algn="l">
-              <a:spcBef>
-                <a:spcPts val="0"/>
-              </a:spcBef>
-              <a:spcAft>
-                <a:spcPts val="0"/>
-              </a:spcAft>
-              <a:buSzPts val="1600"/>
-              <a:buChar char="●"/>
-            </a:pPr>
-            <a:r>
-              <a:rPr lang="en"/>
-              <a:t>Together: the state decides whether to chase, the strategy how</a:t>
-            </a:r>
-            <a:endParaRPr/>
+        </p:txBody>
+      </p:sp>
+      <p:sp>
+        <p:nvSpPr>
+          <p:cNvPr id="295" name="Rounded Rectangle 294"/>
+          <p:cNvSpPr/>
+          <p:nvPr/>
+        </p:nvSpPr>
+        <p:spPr>
+          <a:xfrm>
+            <a:off x="548640" y="1417320"/>
+            <a:ext cx="3749039" cy="1554480"/>
+          </a:xfrm>
+          <a:prstGeom prst="roundRect">
+            <a:avLst>
+              <a:gd name="adj" fmla="val 12000"/>
+            </a:avLst>
+          </a:prstGeom>
+          <a:solidFill>
+            <a:srgbClr val="2E3338"/>
+          </a:solidFill>
+          <a:ln w="25400">
+            <a:solidFill>
+              <a:srgbClr val="D45D35"/>
+            </a:solidFill>
+          </a:ln>
+          <a:effectLst/>
+        </p:spPr>
+        <p:style>
+          <a:lnRef idx="1">
+            <a:schemeClr val="accent1"/>
+          </a:lnRef>
+          <a:fillRef idx="3">
+            <a:schemeClr val="accent1"/>
+          </a:fillRef>
+          <a:effectRef idx="2">
+            <a:schemeClr val="accent1"/>
+          </a:effectRef>
+          <a:fontRef idx="minor">
+            <a:schemeClr val="lt1"/>
+          </a:fontRef>
+        </p:style>
+        <p:txBody>
+          <a:bodyPr rtlCol="0" anchor="ctr" wrap="square" lIns="73152" rIns="73152"/>
+          <a:lstStyle/>
+          <a:p>
+            <a:pPr algn="ctr"/>
+            <a:r>
+              <a:rPr sz="1600" b="1">
+                <a:solidFill>
+                  <a:srgbClr val="DEE2E6"/>
+                </a:solidFill>
+              </a:rPr>
+              <a:t>State: the mode</a:t>
+            </a:r>
+          </a:p>
+          <a:p>
+            <a:pPr algn="ctr"/>
+            <a:r>
+              <a:rPr sz="1400" b="0">
+                <a:solidFill>
+                  <a:srgbClr val="9AA3AB"/>
+                </a:solidFill>
+              </a:rPr>
+              <a:t>chosen by the states themselves</a:t>
+            </a:r>
+          </a:p>
+          <a:p>
+            <a:pPr algn="ctr"/>
+            <a:r>
+              <a:rPr sz="1400" b="0">
+                <a:solidFill>
+                  <a:srgbClr val="9AA3AB"/>
+                </a:solidFill>
+              </a:rPr>
+              <a:t>changes all the time</a:t>
+            </a:r>
+          </a:p>
+          <a:p>
+            <a:pPr algn="ctr"/>
+            <a:r>
+              <a:rPr sz="1400" b="0">
+                <a:solidFill>
+                  <a:srgbClr val="9AA3AB"/>
+                </a:solidFill>
+              </a:rPr>
+              <a:t>a state knows the next state</a:t>
+            </a:r>
+          </a:p>
+        </p:txBody>
+      </p:sp>
+      <p:sp>
+        <p:nvSpPr>
+          <p:cNvPr id="296" name="Rounded Rectangle 295"/>
+          <p:cNvSpPr/>
+          <p:nvPr/>
+        </p:nvSpPr>
+        <p:spPr>
+          <a:xfrm>
+            <a:off x="4846320" y="1417320"/>
+            <a:ext cx="3749039" cy="1554480"/>
+          </a:xfrm>
+          <a:prstGeom prst="roundRect">
+            <a:avLst>
+              <a:gd name="adj" fmla="val 12000"/>
+            </a:avLst>
+          </a:prstGeom>
+          <a:solidFill>
+            <a:srgbClr val="2E3338"/>
+          </a:solidFill>
+          <a:ln>
+            <a:noFill/>
+          </a:ln>
+          <a:effectLst/>
+        </p:spPr>
+        <p:style>
+          <a:lnRef idx="1">
+            <a:schemeClr val="accent1"/>
+          </a:lnRef>
+          <a:fillRef idx="3">
+            <a:schemeClr val="accent1"/>
+          </a:fillRef>
+          <a:effectRef idx="2">
+            <a:schemeClr val="accent1"/>
+          </a:effectRef>
+          <a:fontRef idx="minor">
+            <a:schemeClr val="lt1"/>
+          </a:fontRef>
+        </p:style>
+        <p:txBody>
+          <a:bodyPr rtlCol="0" anchor="ctr" wrap="square" lIns="73152" rIns="73152"/>
+          <a:lstStyle/>
+          <a:p>
+            <a:pPr algn="ctr"/>
+            <a:r>
+              <a:rPr sz="1600" b="1">
+                <a:solidFill>
+                  <a:srgbClr val="DEE2E6"/>
+                </a:solidFill>
+              </a:rPr>
+              <a:t>Strategy: the targeting</a:t>
+            </a:r>
+          </a:p>
+          <a:p>
+            <a:pPr algn="ctr"/>
+            <a:r>
+              <a:rPr sz="1400" b="0">
+                <a:solidFill>
+                  <a:srgbClr val="9AA3AB"/>
+                </a:solidFill>
+              </a:rPr>
+              <a:t>chosen from outside, once</a:t>
+            </a:r>
+          </a:p>
+          <a:p>
+            <a:pPr algn="ctr"/>
+            <a:r>
+              <a:rPr sz="1400" b="0">
+                <a:solidFill>
+                  <a:srgbClr val="9AA3AB"/>
+                </a:solidFill>
+              </a:rPr>
+              <a:t>never changes</a:t>
+            </a:r>
+          </a:p>
+          <a:p>
+            <a:pPr algn="ctr"/>
+            <a:r>
+              <a:rPr sz="1400" b="0">
+                <a:solidFill>
+                  <a:srgbClr val="9AA3AB"/>
+                </a:solidFill>
+              </a:rPr>
+              <a:t>strategies don’t know each other</a:t>
+            </a:r>
+          </a:p>
+        </p:txBody>
+      </p:sp>
+      <p:sp>
+        <p:nvSpPr>
+          <p:cNvPr id="297" name="TextBox 296"/>
+          <p:cNvSpPr txBox="1"/>
+          <p:nvPr/>
+        </p:nvSpPr>
+        <p:spPr>
+          <a:xfrm>
+            <a:off x="457200" y="3246120"/>
+            <a:ext cx="8229600" cy="731520"/>
+          </a:xfrm>
+          <a:prstGeom prst="rect">
+            <a:avLst/>
+          </a:prstGeom>
+          <a:noFill/>
+        </p:spPr>
+        <p:txBody>
+          <a:bodyPr wrap="square">
+            <a:spAutoFit/>
+          </a:bodyPr>
+          <a:lstStyle/>
+          <a:p>
+            <a:pPr algn="ctr"/>
+            <a:r>
+              <a:rPr sz="1600" b="1" i="0">
+                <a:solidFill>
+                  <a:srgbClr val="DEE2E6"/>
+                </a:solidFill>
+              </a:rPr>
+              <a:t>Together: the state decides whether to chase, the strategy how.</a:t>
+            </a:r>
           </a:p>
         </p:txBody>
       </p:sp>
@@ -9724,7 +11272,7 @@
         <p:spPr>
           <a:xfrm>
             <a:off x="311700" y="885950"/>
-            <a:ext cx="8520600" cy="4023300"/>
+            <a:ext cx="8520600" cy="521208"/>
           </a:xfrm>
           <a:prstGeom prst="rect">
             <a:avLst/>
@@ -9748,94 +11296,470 @@
             </a:pPr>
             <a:r>
               <a:rPr lang="en"/>
-              <a:t>Lives, Pac-Man’s death, a new level when the dots are gone</a:t>
+              <a:t>Two levels of state machine: the game’s, and each ghost’s.</a:t>
             </a:r>
             <a:endParaRPr/>
           </a:p>
-          <a:p>
-            <a:pPr indent="-330200" lvl="0" marL="457200" rtl="0" algn="l">
-              <a:spcBef>
-                <a:spcPts val="0"/>
-              </a:spcBef>
-              <a:spcAft>
-                <a:spcPts val="0"/>
-              </a:spcAft>
-              <a:buSzPts val="1600"/>
-              <a:buChar char="●"/>
-            </a:pPr>
-            <a:r>
-              <a:rPr lang="en"/>
-              <a:t>The game’s flow: a state machine, like Flappy Bird’s</a:t>
-            </a:r>
-            <a:endParaRPr/>
-          </a:p>
-          <a:p>
-            <a:pPr indent="-317500" lvl="1" marL="914400" rtl="0" algn="l">
-              <a:spcBef>
-                <a:spcPts val="0"/>
-              </a:spcBef>
-              <a:spcAft>
-                <a:spcPts val="0"/>
-              </a:spcAft>
-              <a:buSzPts val="1400"/>
-              <a:buChar char="○"/>
-            </a:pPr>
-            <a:r>
-              <a:rPr lang="en"/>
-              <a:t>Ready → Play → Dying → Ready or Game Over</a:t>
-            </a:r>
-            <a:endParaRPr/>
-          </a:p>
-          <a:p>
-            <a:pPr indent="-330200" lvl="0" marL="457200" rtl="0" algn="l">
-              <a:spcBef>
-                <a:spcPts val="0"/>
-              </a:spcBef>
-              <a:spcAft>
-                <a:spcPts val="0"/>
-              </a:spcAft>
-              <a:buSzPts val="1600"/>
-              <a:buChar char="●"/>
-            </a:pPr>
-            <a:r>
-              <a:rPr lang="en"/>
-              <a:t>Two levels of state machine in one game</a:t>
-            </a:r>
-            <a:endParaRPr/>
-          </a:p>
-          <a:p>
-            <a:pPr indent="-317500" lvl="1" marL="914400" rtl="0" algn="l">
-              <a:spcBef>
-                <a:spcPts val="0"/>
-              </a:spcBef>
-              <a:spcAft>
-                <a:spcPts val="0"/>
-              </a:spcAft>
-              <a:buSzPts val="1400"/>
-              <a:buChar char="○"/>
-            </a:pPr>
-            <a:r>
-              <a:rPr lang="en"/>
-              <a:t>The game’s states, and each ghost’s states</a:t>
-            </a:r>
-            <a:endParaRPr/>
-          </a:p>
-          <a:p>
-            <a:pPr indent="-317500" lvl="1" marL="914400" rtl="0" algn="l">
-              <a:spcBef>
-                <a:spcPts val="0"/>
-              </a:spcBef>
-              <a:spcAft>
-                <a:spcPts val="0"/>
-              </a:spcAft>
-              <a:buSzPts val="1400"/>
-              <a:buChar char="○"/>
-            </a:pPr>
-            <a:r>
-              <a:rPr lang="en"/>
-              <a:t>Ghosts only update in PlayState: while Pac-Man dies, their states pause</a:t>
-            </a:r>
-            <a:endParaRPr/>
+        </p:txBody>
+      </p:sp>
+      <p:sp>
+        <p:nvSpPr>
+          <p:cNvPr id="295" name="Rounded Rectangle 294"/>
+          <p:cNvSpPr/>
+          <p:nvPr/>
+        </p:nvSpPr>
+        <p:spPr>
+          <a:xfrm>
+            <a:off x="822960" y="1463040"/>
+            <a:ext cx="1645920" cy="548640"/>
+          </a:xfrm>
+          <a:prstGeom prst="roundRect">
+            <a:avLst>
+              <a:gd name="adj" fmla="val 12000"/>
+            </a:avLst>
+          </a:prstGeom>
+          <a:solidFill>
+            <a:srgbClr val="2E3338"/>
+          </a:solidFill>
+          <a:ln>
+            <a:noFill/>
+          </a:ln>
+          <a:effectLst/>
+        </p:spPr>
+        <p:style>
+          <a:lnRef idx="1">
+            <a:schemeClr val="accent1"/>
+          </a:lnRef>
+          <a:fillRef idx="3">
+            <a:schemeClr val="accent1"/>
+          </a:fillRef>
+          <a:effectRef idx="2">
+            <a:schemeClr val="accent1"/>
+          </a:effectRef>
+          <a:fontRef idx="minor">
+            <a:schemeClr val="lt1"/>
+          </a:fontRef>
+        </p:style>
+        <p:txBody>
+          <a:bodyPr rtlCol="0" anchor="ctr" wrap="square" lIns="73152" rIns="73152"/>
+          <a:lstStyle/>
+          <a:p>
+            <a:pPr algn="ctr"/>
+            <a:r>
+              <a:rPr sz="1500" b="1">
+                <a:solidFill>
+                  <a:srgbClr val="DEE2E6"/>
+                </a:solidFill>
+              </a:rPr>
+              <a:t>Ready</a:t>
+            </a:r>
+          </a:p>
+        </p:txBody>
+      </p:sp>
+      <p:cxnSp>
+        <p:nvCxnSpPr>
+          <p:cNvPr id="296" name="Connector 295"/>
+          <p:cNvCxnSpPr/>
+          <p:nvPr/>
+        </p:nvCxnSpPr>
+        <p:spPr>
+          <a:xfrm>
+            <a:off x="2487168" y="1737360"/>
+            <a:ext cx="237744" cy="0"/>
+          </a:xfrm>
+          <a:prstGeom prst="line">
+            <a:avLst/>
+          </a:prstGeom>
+          <a:ln w="25400">
+            <a:solidFill>
+              <a:srgbClr val="9AA3AB"/>
+            </a:solidFill>
+            <a:tailEnd type="triangle"/>
+          </a:ln>
+        </p:spPr>
+        <p:style>
+          <a:lnRef idx="2">
+            <a:schemeClr val="accent1"/>
+          </a:lnRef>
+          <a:fillRef idx="0">
+            <a:schemeClr val="accent1"/>
+          </a:fillRef>
+          <a:effectRef idx="1">
+            <a:schemeClr val="accent1"/>
+          </a:effectRef>
+          <a:fontRef idx="minor">
+            <a:schemeClr val="tx1"/>
+          </a:fontRef>
+        </p:style>
+      </p:cxnSp>
+      <p:sp>
+        <p:nvSpPr>
+          <p:cNvPr id="297" name="Rounded Rectangle 296"/>
+          <p:cNvSpPr/>
+          <p:nvPr/>
+        </p:nvSpPr>
+        <p:spPr>
+          <a:xfrm>
+            <a:off x="2743200" y="1463040"/>
+            <a:ext cx="1645920" cy="548640"/>
+          </a:xfrm>
+          <a:prstGeom prst="roundRect">
+            <a:avLst>
+              <a:gd name="adj" fmla="val 12000"/>
+            </a:avLst>
+          </a:prstGeom>
+          <a:solidFill>
+            <a:srgbClr val="2E3338"/>
+          </a:solidFill>
+          <a:ln w="25400">
+            <a:solidFill>
+              <a:srgbClr val="D45D35"/>
+            </a:solidFill>
+          </a:ln>
+          <a:effectLst/>
+        </p:spPr>
+        <p:style>
+          <a:lnRef idx="1">
+            <a:schemeClr val="accent1"/>
+          </a:lnRef>
+          <a:fillRef idx="3">
+            <a:schemeClr val="accent1"/>
+          </a:fillRef>
+          <a:effectRef idx="2">
+            <a:schemeClr val="accent1"/>
+          </a:effectRef>
+          <a:fontRef idx="minor">
+            <a:schemeClr val="lt1"/>
+          </a:fontRef>
+        </p:style>
+        <p:txBody>
+          <a:bodyPr rtlCol="0" anchor="ctr" wrap="square" lIns="73152" rIns="73152"/>
+          <a:lstStyle/>
+          <a:p>
+            <a:pPr algn="ctr"/>
+            <a:r>
+              <a:rPr sz="1500" b="1">
+                <a:solidFill>
+                  <a:srgbClr val="DEE2E6"/>
+                </a:solidFill>
+              </a:rPr>
+              <a:t>Play</a:t>
+            </a:r>
+          </a:p>
+        </p:txBody>
+      </p:sp>
+      <p:cxnSp>
+        <p:nvCxnSpPr>
+          <p:cNvPr id="298" name="Connector 297"/>
+          <p:cNvCxnSpPr/>
+          <p:nvPr/>
+        </p:nvCxnSpPr>
+        <p:spPr>
+          <a:xfrm>
+            <a:off x="4407407" y="1737360"/>
+            <a:ext cx="237745" cy="0"/>
+          </a:xfrm>
+          <a:prstGeom prst="line">
+            <a:avLst/>
+          </a:prstGeom>
+          <a:ln w="25400">
+            <a:solidFill>
+              <a:srgbClr val="9AA3AB"/>
+            </a:solidFill>
+            <a:tailEnd type="triangle"/>
+          </a:ln>
+        </p:spPr>
+        <p:style>
+          <a:lnRef idx="2">
+            <a:schemeClr val="accent1"/>
+          </a:lnRef>
+          <a:fillRef idx="0">
+            <a:schemeClr val="accent1"/>
+          </a:fillRef>
+          <a:effectRef idx="1">
+            <a:schemeClr val="accent1"/>
+          </a:effectRef>
+          <a:fontRef idx="minor">
+            <a:schemeClr val="tx1"/>
+          </a:fontRef>
+        </p:style>
+      </p:cxnSp>
+      <p:sp>
+        <p:nvSpPr>
+          <p:cNvPr id="299" name="Rounded Rectangle 298"/>
+          <p:cNvSpPr/>
+          <p:nvPr/>
+        </p:nvSpPr>
+        <p:spPr>
+          <a:xfrm>
+            <a:off x="4663440" y="1463040"/>
+            <a:ext cx="1645920" cy="548640"/>
+          </a:xfrm>
+          <a:prstGeom prst="roundRect">
+            <a:avLst>
+              <a:gd name="adj" fmla="val 12000"/>
+            </a:avLst>
+          </a:prstGeom>
+          <a:solidFill>
+            <a:srgbClr val="2E3338"/>
+          </a:solidFill>
+          <a:ln>
+            <a:noFill/>
+          </a:ln>
+          <a:effectLst/>
+        </p:spPr>
+        <p:style>
+          <a:lnRef idx="1">
+            <a:schemeClr val="accent1"/>
+          </a:lnRef>
+          <a:fillRef idx="3">
+            <a:schemeClr val="accent1"/>
+          </a:fillRef>
+          <a:effectRef idx="2">
+            <a:schemeClr val="accent1"/>
+          </a:effectRef>
+          <a:fontRef idx="minor">
+            <a:schemeClr val="lt1"/>
+          </a:fontRef>
+        </p:style>
+        <p:txBody>
+          <a:bodyPr rtlCol="0" anchor="ctr" wrap="square" lIns="73152" rIns="73152"/>
+          <a:lstStyle/>
+          <a:p>
+            <a:pPr algn="ctr"/>
+            <a:r>
+              <a:rPr sz="1500" b="1">
+                <a:solidFill>
+                  <a:srgbClr val="DEE2E6"/>
+                </a:solidFill>
+              </a:rPr>
+              <a:t>Dying</a:t>
+            </a:r>
+          </a:p>
+        </p:txBody>
+      </p:sp>
+      <p:cxnSp>
+        <p:nvCxnSpPr>
+          <p:cNvPr id="300" name="Connector 299"/>
+          <p:cNvCxnSpPr/>
+          <p:nvPr/>
+        </p:nvCxnSpPr>
+        <p:spPr>
+          <a:xfrm>
+            <a:off x="6327648" y="1737360"/>
+            <a:ext cx="237744" cy="0"/>
+          </a:xfrm>
+          <a:prstGeom prst="line">
+            <a:avLst/>
+          </a:prstGeom>
+          <a:ln w="25400">
+            <a:solidFill>
+              <a:srgbClr val="9AA3AB"/>
+            </a:solidFill>
+            <a:tailEnd type="triangle"/>
+          </a:ln>
+        </p:spPr>
+        <p:style>
+          <a:lnRef idx="2">
+            <a:schemeClr val="accent1"/>
+          </a:lnRef>
+          <a:fillRef idx="0">
+            <a:schemeClr val="accent1"/>
+          </a:fillRef>
+          <a:effectRef idx="1">
+            <a:schemeClr val="accent1"/>
+          </a:effectRef>
+          <a:fontRef idx="minor">
+            <a:schemeClr val="tx1"/>
+          </a:fontRef>
+        </p:style>
+      </p:cxnSp>
+      <p:sp>
+        <p:nvSpPr>
+          <p:cNvPr id="301" name="Rounded Rectangle 300"/>
+          <p:cNvSpPr/>
+          <p:nvPr/>
+        </p:nvSpPr>
+        <p:spPr>
+          <a:xfrm>
+            <a:off x="6583680" y="1463040"/>
+            <a:ext cx="1645920" cy="548640"/>
+          </a:xfrm>
+          <a:prstGeom prst="roundRect">
+            <a:avLst>
+              <a:gd name="adj" fmla="val 12000"/>
+            </a:avLst>
+          </a:prstGeom>
+          <a:solidFill>
+            <a:srgbClr val="2E3338"/>
+          </a:solidFill>
+          <a:ln>
+            <a:noFill/>
+          </a:ln>
+          <a:effectLst/>
+        </p:spPr>
+        <p:style>
+          <a:lnRef idx="1">
+            <a:schemeClr val="accent1"/>
+          </a:lnRef>
+          <a:fillRef idx="3">
+            <a:schemeClr val="accent1"/>
+          </a:fillRef>
+          <a:effectRef idx="2">
+            <a:schemeClr val="accent1"/>
+          </a:effectRef>
+          <a:fontRef idx="minor">
+            <a:schemeClr val="lt1"/>
+          </a:fontRef>
+        </p:style>
+        <p:txBody>
+          <a:bodyPr rtlCol="0" anchor="ctr" wrap="square" lIns="73152" rIns="73152"/>
+          <a:lstStyle/>
+          <a:p>
+            <a:pPr algn="ctr"/>
+            <a:r>
+              <a:rPr sz="1500" b="1">
+                <a:solidFill>
+                  <a:srgbClr val="DEE2E6"/>
+                </a:solidFill>
+              </a:rPr>
+              <a:t>Ready or Game Over</a:t>
+            </a:r>
+          </a:p>
+        </p:txBody>
+      </p:sp>
+      <p:sp>
+        <p:nvSpPr>
+          <p:cNvPr id="302" name="Rounded Rectangle 301"/>
+          <p:cNvSpPr/>
+          <p:nvPr/>
+        </p:nvSpPr>
+        <p:spPr>
+          <a:xfrm>
+            <a:off x="2651760" y="2377440"/>
+            <a:ext cx="3840480" cy="731520"/>
+          </a:xfrm>
+          <a:prstGeom prst="roundRect">
+            <a:avLst>
+              <a:gd name="adj" fmla="val 12000"/>
+            </a:avLst>
+          </a:prstGeom>
+          <a:solidFill>
+            <a:srgbClr val="2E3338"/>
+          </a:solidFill>
+          <a:ln>
+            <a:noFill/>
+          </a:ln>
+          <a:effectLst/>
+        </p:spPr>
+        <p:style>
+          <a:lnRef idx="1">
+            <a:schemeClr val="accent1"/>
+          </a:lnRef>
+          <a:fillRef idx="3">
+            <a:schemeClr val="accent1"/>
+          </a:fillRef>
+          <a:effectRef idx="2">
+            <a:schemeClr val="accent1"/>
+          </a:effectRef>
+          <a:fontRef idx="minor">
+            <a:schemeClr val="lt1"/>
+          </a:fontRef>
+        </p:style>
+        <p:txBody>
+          <a:bodyPr rtlCol="0" anchor="ctr" wrap="square" lIns="73152" rIns="73152"/>
+          <a:lstStyle/>
+          <a:p>
+            <a:pPr algn="ctr"/>
+            <a:r>
+              <a:rPr sz="1400" b="1">
+                <a:solidFill>
+                  <a:srgbClr val="DEE2E6"/>
+                </a:solidFill>
+              </a:rPr>
+              <a:t>Each ghost: InHouse, Scatter, Chase, ...</a:t>
+            </a:r>
+          </a:p>
+          <a:p>
+            <a:pPr algn="ctr"/>
+            <a:r>
+              <a:rPr sz="1200" b="0">
+                <a:solidFill>
+                  <a:srgbClr val="9AA3AB"/>
+                </a:solidFill>
+              </a:rPr>
+              <a:t>updated only while the game is in Play</a:t>
+            </a:r>
+          </a:p>
+        </p:txBody>
+      </p:sp>
+      <p:cxnSp>
+        <p:nvCxnSpPr>
+          <p:cNvPr id="303" name="Connector 302"/>
+          <p:cNvCxnSpPr/>
+          <p:nvPr/>
+        </p:nvCxnSpPr>
+        <p:spPr>
+          <a:xfrm>
+            <a:off x="3749039" y="2057400"/>
+            <a:ext cx="457201" cy="301752"/>
+          </a:xfrm>
+          <a:prstGeom prst="line">
+            <a:avLst/>
+          </a:prstGeom>
+          <a:ln w="25400">
+            <a:solidFill>
+              <a:srgbClr val="9AA3AB"/>
+            </a:solidFill>
+            <a:tailEnd type="triangle"/>
+          </a:ln>
+        </p:spPr>
+        <p:style>
+          <a:lnRef idx="2">
+            <a:schemeClr val="accent1"/>
+          </a:lnRef>
+          <a:fillRef idx="0">
+            <a:schemeClr val="accent1"/>
+          </a:fillRef>
+          <a:effectRef idx="1">
+            <a:schemeClr val="accent1"/>
+          </a:effectRef>
+          <a:fontRef idx="minor">
+            <a:schemeClr val="tx1"/>
+          </a:fontRef>
+        </p:style>
+      </p:cxnSp>
+      <p:sp>
+        <p:nvSpPr>
+          <p:cNvPr id="304" name="TextBox 303"/>
+          <p:cNvSpPr txBox="1"/>
+          <p:nvPr/>
+        </p:nvSpPr>
+        <p:spPr>
+          <a:xfrm>
+            <a:off x="548640" y="3383280"/>
+            <a:ext cx="8046720" cy="365760"/>
+          </a:xfrm>
+          <a:prstGeom prst="rect">
+            <a:avLst/>
+          </a:prstGeom>
+          <a:noFill/>
+        </p:spPr>
+        <p:txBody>
+          <a:bodyPr wrap="square">
+            <a:spAutoFit/>
+          </a:bodyPr>
+          <a:lstStyle/>
+          <a:p>
+            <a:pPr algn="ctr"/>
+            <a:r>
+              <a:rPr sz="1400" b="0" i="0">
+                <a:solidFill>
+                  <a:srgbClr val="9AA3AB"/>
+                </a:solidFill>
+              </a:rPr>
+              <a:t>While Pac-Man dies, the ghosts’ states simply pause.</a:t>
+            </a:r>
           </a:p>
         </p:txBody>
       </p:sp>
@@ -12719,6 +14643,179 @@
 </p:sld>
 </file>
 
+<file path=ppt/slides/slide27.xml><?xml version="1.0" encoding="utf-8"?>
+<p:sld xmlns:a="http://schemas.openxmlformats.org/drawingml/2006/main" xmlns:p="http://schemas.openxmlformats.org/presentationml/2006/main" xmlns:r="http://schemas.openxmlformats.org/officeDocument/2006/relationships">
+  <p:cSld>
+    <p:spTree>
+      <p:nvGrpSpPr>
+        <p:cNvPr id="1" name=""/>
+        <p:cNvGrpSpPr/>
+        <p:nvPr/>
+      </p:nvGrpSpPr>
+      <p:grpSpPr/>
+      <p:sp>
+        <p:nvSpPr>
+          <p:cNvPr id="2" name="Title 1"/>
+          <p:cNvSpPr>
+            <a:spLocks noGrp="1"/>
+          </p:cNvSpPr>
+          <p:nvPr>
+            <p:ph type="title"/>
+          </p:nvPr>
+        </p:nvSpPr>
+        <p:spPr/>
+        <p:txBody>
+          <a:bodyPr/>
+          <a:lstStyle/>
+          <a:p>
+            <a:pPr indent="0" lvl="0" marL="0" rtl="0" algn="l">
+              <a:spcBef>
+                <a:spcPts val="0"/>
+              </a:spcBef>
+              <a:spcAft>
+                <a:spcPts val="0"/>
+              </a:spcAft>
+              <a:buNone/>
+            </a:pPr>
+            <a:r>
+              <a:rPr lang="en"/>
+              <a:t>Check Yourself</a:t>
+            </a:r>
+            <a:endParaRPr/>
+          </a:p>
+        </p:txBody>
+      </p:sp>
+      <p:sp>
+        <p:nvSpPr>
+          <p:cNvPr id="3" name="Text Placeholder 2"/>
+          <p:cNvSpPr>
+            <a:spLocks noGrp="1"/>
+          </p:cNvSpPr>
+          <p:nvPr>
+            <p:ph type="body" idx="1"/>
+          </p:nvPr>
+        </p:nvSpPr>
+        <p:spPr>
+          <a:xfrm>
+            <a:off x="311700" y="885950"/>
+            <a:ext cx="8520600" cy="1719072"/>
+          </a:xfrm>
+        </p:spPr>
+        <p:txBody>
+          <a:bodyPr/>
+          <a:lstStyle/>
+          <a:p>
+            <a:pPr indent="-330200" lvl="0" marL="457200" rtl="0" algn="l">
+              <a:spcBef>
+                <a:spcPts val="0"/>
+              </a:spcBef>
+              <a:spcAft>
+                <a:spcPts val="0"/>
+              </a:spcAft>
+              <a:buSzPts val="1600"/>
+              <a:buChar char="●"/>
+            </a:pPr>
+            <a:r>
+              <a:rPr lang="en"/>
+              <a:t>What problems does the enum version of the ghost have?</a:t>
+            </a:r>
+            <a:endParaRPr/>
+          </a:p>
+          <a:p>
+            <a:pPr indent="-330200" lvl="0" marL="457200" rtl="0" algn="l">
+              <a:spcBef>
+                <a:spcPts val="0"/>
+              </a:spcBef>
+              <a:spcAft>
+                <a:spcPts val="0"/>
+              </a:spcAft>
+              <a:buSzPts val="1600"/>
+              <a:buChar char="●"/>
+            </a:pPr>
+            <a:r>
+              <a:rPr lang="en"/>
+              <a:t>In the State pattern, who decides when to change state?</a:t>
+            </a:r>
+            <a:endParaRPr/>
+          </a:p>
+          <a:p>
+            <a:pPr indent="-330200" lvl="0" marL="457200" rtl="0" algn="l">
+              <a:spcBef>
+                <a:spcPts val="0"/>
+              </a:spcBef>
+              <a:spcAft>
+                <a:spcPts val="0"/>
+              </a:spcAft>
+              <a:buSzPts val="1600"/>
+              <a:buChar char="●"/>
+            </a:pPr>
+            <a:r>
+              <a:rPr lang="en"/>
+              <a:t>What are Enter and Exit for?</a:t>
+            </a:r>
+            <a:endParaRPr/>
+          </a:p>
+          <a:p>
+            <a:pPr indent="-330200" lvl="0" marL="457200" rtl="0" algn="l">
+              <a:spcBef>
+                <a:spcPts val="0"/>
+              </a:spcBef>
+              <a:spcAft>
+                <a:spcPts val="0"/>
+              </a:spcAft>
+              <a:buSzPts val="1600"/>
+              <a:buChar char="●"/>
+            </a:pPr>
+            <a:r>
+              <a:rPr lang="en"/>
+              <a:t>State and Strategy have the same structure. How do they differ?</a:t>
+            </a:r>
+            <a:endParaRPr/>
+          </a:p>
+        </p:txBody>
+      </p:sp>
+      <p:sp>
+        <p:nvSpPr>
+          <p:cNvPr id="4" name="TextBox 3"/>
+          <p:cNvSpPr txBox="1"/>
+          <p:nvPr/>
+        </p:nvSpPr>
+        <p:spPr>
+          <a:xfrm>
+            <a:off x="457200" y="3182112"/>
+            <a:ext cx="8229600" cy="457200"/>
+          </a:xfrm>
+          <a:prstGeom prst="rect">
+            <a:avLst/>
+          </a:prstGeom>
+          <a:noFill/>
+        </p:spPr>
+        <p:txBody>
+          <a:bodyPr wrap="square">
+            <a:spAutoFit/>
+          </a:bodyPr>
+          <a:lstStyle/>
+          <a:p>
+            <a:pPr algn="ctr"/>
+            <a:r>
+              <a:rPr sz="1400" b="0" i="0">
+                <a:solidFill>
+                  <a:srgbClr val="9AA3AB"/>
+                </a:solidFill>
+              </a:rPr>
+              <a:t>The answers, and more questions, are on the course site.</a:t>
+            </a:r>
+          </a:p>
+        </p:txBody>
+      </p:sp>
+    </p:spTree>
+  </p:cSld>
+  <p:clrMapOvr>
+    <a:masterClrMapping/>
+  </p:clrMapOvr>
+</p:sld>
+</file>
+
 <file path=ppt/slides/slide3.xml><?xml version="1.0" encoding="utf-8"?>
 <p:sld xmlns:a="http://schemas.openxmlformats.org/drawingml/2006/main" xmlns:r="http://schemas.openxmlformats.org/officeDocument/2006/relationships" xmlns:mc="http://schemas.openxmlformats.org/markup-compatibility/2006" xmlns:mv="urn:schemas-microsoft-com:mac:vml" xmlns:p="http://schemas.openxmlformats.org/presentationml/2006/main" xmlns:c="http://schemas.openxmlformats.org/drawingml/2006/chart" xmlns:dgm="http://schemas.openxmlformats.org/drawingml/2006/diagram" xmlns:o="urn:schemas-microsoft-com:office:office" xmlns:v="urn:schemas-microsoft-com:vml" xmlns:pvml="urn:schemas-microsoft-com:office:powerpoint" xmlns:com="http://schemas.openxmlformats.org/drawingml/2006/compatibility" xmlns:p14="http://schemas.microsoft.com/office/powerpoint/2010/main" xmlns:p15="http://schemas.microsoft.com/office/powerpoint/2012/main" xmlns:ahyp="http://schemas.microsoft.com/office/drawing/2018/hyperlinkcolor">
   <p:cSld>
@@ -13253,7 +15350,7 @@
         <p:spPr>
           <a:xfrm>
             <a:off x="311700" y="885950"/>
-            <a:ext cx="8520600" cy="4023300"/>
+            <a:ext cx="8520600" cy="1289304"/>
           </a:xfrm>
           <a:prstGeom prst="rect">
             <a:avLst/>
@@ -13277,29 +15374,7 @@
             </a:pPr>
             <a:r>
               <a:rPr lang="en"/>
-              <a:t>All Source code for today’s game can be found here:</a:t>
-            </a:r>
-            <a:endParaRPr/>
-          </a:p>
-          <a:p>
-            <a:pPr indent="-317500" lvl="1" marL="914400" rtl="0" algn="l">
-              <a:spcBef>
-                <a:spcPts val="0"/>
-              </a:spcBef>
-              <a:spcAft>
-                <a:spcPts val="0"/>
-              </a:spcAft>
-              <a:buSzPts val="1400"/>
-              <a:buChar char="○"/>
-            </a:pPr>
-            <a:r>
-              <a:rPr lang="en" u="sng">
-                <a:solidFill>
-                  <a:schemeClr val="hlink"/>
-                </a:solidFill>
-                <a:hlinkClick r:id="rId3"/>
-              </a:rPr>
-              <a:t>github.com/Metamate/gar-games (folder 05-pacman)</a:t>
+              <a:t>github.com/Metamate/gar-games, folder 05-pacman</a:t>
             </a:r>
             <a:endParaRPr/>
           </a:p>
@@ -13316,41 +15391,7 @@
             </a:pPr>
             <a:r>
               <a:rPr lang="en"/>
-              <a:t>The game is built up in steps: Pacman0 → Pacman4, and the tests in Pacman.Tests</a:t>
-            </a:r>
-            <a:endParaRPr/>
-          </a:p>
-          <a:p>
-            <a:pPr indent="-317500" lvl="1" marL="914400" rtl="0" algn="l">
-              <a:spcBef>
-                <a:spcPts val="0"/>
-              </a:spcBef>
-              <a:spcAft>
-                <a:spcPts val="0"/>
-              </a:spcAft>
-              <a:buSzPts val="1400"/>
-              <a:buChar char="○"/>
-            </a:pPr>
-            <a:r>
-              <a:rPr lang="en"/>
-              <a:t>Each step is a separate project that adds one concept</a:t>
-            </a:r>
-            <a:endParaRPr/>
-          </a:p>
-          <a:p>
-            <a:pPr indent="-317500" lvl="1" marL="914400" rtl="0" algn="l">
-              <a:spcBef>
-                <a:spcPts val="0"/>
-              </a:spcBef>
-              <a:spcAft>
-                <a:spcPts val="0"/>
-              </a:spcAft>
-              <a:buSzPts val="1400"/>
-              <a:buChar char="○"/>
-            </a:pPr>
-            <a:r>
-              <a:rPr lang="en"/>
-              <a:t>Compare neighbouring steps to see exactly what changed</a:t>
+              <a:t>Its README: the steps (Pacman0 to Pacman4, and Pacman.Tests), a map of the code, how to run it</a:t>
             </a:r>
             <a:endParaRPr/>
           </a:p>
@@ -13367,7 +15408,7 @@
             </a:pPr>
             <a:r>
               <a:rPr lang="en"/>
-              <a:t>Pacman4 is the finished game, and the starting point for the exercises</a:t>
+              <a:t>The course site: today’s concepts in full, the exercises, and questions to check yourself</a:t>
             </a:r>
             <a:endParaRPr/>
           </a:p>
@@ -15123,7 +17164,7 @@
         <p:spPr>
           <a:xfrm>
             <a:off x="311700" y="885950"/>
-            <a:ext cx="8520600" cy="4023300"/>
+            <a:ext cx="8520600" cy="521208"/>
           </a:xfrm>
           <a:prstGeom prst="rect">
             <a:avLst/>
@@ -15147,128 +17188,652 @@
             </a:pPr>
             <a:r>
               <a:rPr lang="en"/>
-              <a:t>In the house: waits, then leaves through the door</a:t>
+              <a:t>Every ghost is always in one of five modes. The mode decides where it heads.</a:t>
             </a:r>
             <a:endParaRPr/>
           </a:p>
-          <a:p>
-            <a:pPr indent="-330200" lvl="0" marL="457200" rtl="0" algn="l">
-              <a:spcBef>
-                <a:spcPts val="0"/>
-              </a:spcBef>
-              <a:spcAft>
-                <a:spcPts val="0"/>
-              </a:spcAft>
-              <a:buSzPts val="1600"/>
-              <a:buChar char="●"/>
-            </a:pPr>
-            <a:r>
-              <a:rPr lang="en"/>
-              <a:t>Scatter: heads for its own corner</a:t>
-            </a:r>
-            <a:endParaRPr/>
-          </a:p>
-          <a:p>
-            <a:pPr indent="-330200" lvl="0" marL="457200" rtl="0" algn="l">
-              <a:spcBef>
-                <a:spcPts val="0"/>
-              </a:spcBef>
-              <a:spcAft>
-                <a:spcPts val="0"/>
-              </a:spcAft>
-              <a:buSzPts val="1600"/>
-              <a:buChar char="●"/>
-            </a:pPr>
-            <a:r>
-              <a:rPr lang="en"/>
-              <a:t>Chase: hunts Pac-Man</a:t>
-            </a:r>
-            <a:endParaRPr/>
-          </a:p>
-          <a:p>
-            <a:pPr indent="-317500" lvl="1" marL="914400" rtl="0" algn="l">
-              <a:spcBef>
-                <a:spcPts val="0"/>
-              </a:spcBef>
-              <a:spcAft>
-                <a:spcPts val="0"/>
-              </a:spcAft>
-              <a:buSzPts val="1400"/>
-              <a:buChar char="○"/>
-            </a:pPr>
-            <a:r>
-              <a:rPr lang="en"/>
-              <a:t>Scatter and chase take turns on a schedule: 7 s, 20 s, …</a:t>
-            </a:r>
-            <a:endParaRPr/>
-          </a:p>
-          <a:p>
-            <a:pPr indent="-330200" lvl="0" marL="457200" rtl="0" algn="l">
-              <a:spcBef>
-                <a:spcPts val="0"/>
-              </a:spcBef>
-              <a:spcAft>
-                <a:spcPts val="0"/>
-              </a:spcAft>
-              <a:buSzPts val="1600"/>
-              <a:buChar char="●"/>
-            </a:pPr>
-            <a:r>
-              <a:rPr lang="en"/>
-              <a:t>Frightened: blue, slow, random; can be eaten</a:t>
-            </a:r>
-            <a:endParaRPr/>
-          </a:p>
-          <a:p>
-            <a:pPr indent="-330200" lvl="0" marL="457200" rtl="0" algn="l">
-              <a:spcBef>
-                <a:spcPts val="0"/>
-              </a:spcBef>
-              <a:spcAft>
-                <a:spcPts val="0"/>
-              </a:spcAft>
-              <a:buSzPts val="1600"/>
-              <a:buChar char="●"/>
-            </a:pPr>
-            <a:r>
-              <a:rPr lang="en"/>
-              <a:t>Eaten: only the eyes, racing back to the house</a:t>
-            </a:r>
-            <a:endParaRPr/>
-          </a:p>
-          <a:p>
-            <a:pPr indent="-330200" lvl="0" marL="457200" rtl="0" algn="l">
-              <a:spcBef>
-                <a:spcPts val="0"/>
-              </a:spcBef>
-              <a:spcAft>
-                <a:spcPts val="0"/>
-              </a:spcAft>
-              <a:buSzPts val="1600"/>
-              <a:buChar char="●"/>
-            </a:pPr>
-            <a:r>
-              <a:rPr lang="en"/>
-              <a:t>At each tile centre: never turn back, and take the direction closest to a target tile</a:t>
-            </a:r>
-            <a:endParaRPr/>
-          </a:p>
-          <a:p>
-            <a:pPr indent="-317500" lvl="1" marL="914400" rtl="0" algn="l">
-              <a:spcBef>
-                <a:spcPts val="0"/>
-              </a:spcBef>
-              <a:spcAft>
-                <a:spcPts val="0"/>
-              </a:spcAft>
-              <a:buSzPts val="1400"/>
-              <a:buChar char="○"/>
-            </a:pPr>
-            <a:r>
-              <a:rPr lang="en"/>
-              <a:t>The mode decides the target</a:t>
-            </a:r>
-            <a:endParaRPr/>
+        </p:txBody>
+      </p:sp>
+      <p:sp>
+        <p:nvSpPr>
+          <p:cNvPr id="295" name="Rounded Rectangle 294"/>
+          <p:cNvSpPr/>
+          <p:nvPr/>
+        </p:nvSpPr>
+        <p:spPr>
+          <a:xfrm>
+            <a:off x="365760" y="1828800"/>
+            <a:ext cx="1463040" cy="640080"/>
+          </a:xfrm>
+          <a:prstGeom prst="roundRect">
+            <a:avLst>
+              <a:gd name="adj" fmla="val 12000"/>
+            </a:avLst>
+          </a:prstGeom>
+          <a:solidFill>
+            <a:srgbClr val="2E3338"/>
+          </a:solidFill>
+          <a:ln>
+            <a:noFill/>
+          </a:ln>
+          <a:effectLst/>
+        </p:spPr>
+        <p:style>
+          <a:lnRef idx="1">
+            <a:schemeClr val="accent1"/>
+          </a:lnRef>
+          <a:fillRef idx="3">
+            <a:schemeClr val="accent1"/>
+          </a:fillRef>
+          <a:effectRef idx="2">
+            <a:schemeClr val="accent1"/>
+          </a:effectRef>
+          <a:fontRef idx="minor">
+            <a:schemeClr val="lt1"/>
+          </a:fontRef>
+        </p:style>
+        <p:txBody>
+          <a:bodyPr rtlCol="0" anchor="ctr" wrap="square" lIns="73152" rIns="73152"/>
+          <a:lstStyle/>
+          <a:p>
+            <a:pPr algn="ctr"/>
+            <a:r>
+              <a:rPr sz="1400" b="1">
+                <a:solidFill>
+                  <a:srgbClr val="DEE2E6"/>
+                </a:solidFill>
+              </a:rPr>
+              <a:t>In the house</a:t>
+            </a:r>
+          </a:p>
+          <a:p>
+            <a:pPr algn="ctr"/>
+            <a:r>
+              <a:rPr sz="1200" b="0">
+                <a:solidFill>
+                  <a:srgbClr val="9AA3AB"/>
+                </a:solidFill>
+              </a:rPr>
+              <a:t>waits</a:t>
+            </a:r>
+          </a:p>
+        </p:txBody>
+      </p:sp>
+      <p:sp>
+        <p:nvSpPr>
+          <p:cNvPr id="296" name="Rounded Rectangle 295"/>
+          <p:cNvSpPr/>
+          <p:nvPr/>
+        </p:nvSpPr>
+        <p:spPr>
+          <a:xfrm>
+            <a:off x="2468880" y="1325880"/>
+            <a:ext cx="1463040" cy="640080"/>
+          </a:xfrm>
+          <a:prstGeom prst="roundRect">
+            <a:avLst>
+              <a:gd name="adj" fmla="val 12000"/>
+            </a:avLst>
+          </a:prstGeom>
+          <a:solidFill>
+            <a:srgbClr val="2E3338"/>
+          </a:solidFill>
+          <a:ln>
+            <a:noFill/>
+          </a:ln>
+          <a:effectLst/>
+        </p:spPr>
+        <p:style>
+          <a:lnRef idx="1">
+            <a:schemeClr val="accent1"/>
+          </a:lnRef>
+          <a:fillRef idx="3">
+            <a:schemeClr val="accent1"/>
+          </a:fillRef>
+          <a:effectRef idx="2">
+            <a:schemeClr val="accent1"/>
+          </a:effectRef>
+          <a:fontRef idx="minor">
+            <a:schemeClr val="lt1"/>
+          </a:fontRef>
+        </p:style>
+        <p:txBody>
+          <a:bodyPr rtlCol="0" anchor="ctr" wrap="square" lIns="73152" rIns="73152"/>
+          <a:lstStyle/>
+          <a:p>
+            <a:pPr algn="ctr"/>
+            <a:r>
+              <a:rPr sz="1400" b="1">
+                <a:solidFill>
+                  <a:srgbClr val="DEE2E6"/>
+                </a:solidFill>
+              </a:rPr>
+              <a:t>Scatter</a:t>
+            </a:r>
+          </a:p>
+          <a:p>
+            <a:pPr algn="ctr"/>
+            <a:r>
+              <a:rPr sz="1200" b="0">
+                <a:solidFill>
+                  <a:srgbClr val="9AA3AB"/>
+                </a:solidFill>
+              </a:rPr>
+              <a:t>its corner</a:t>
+            </a:r>
+          </a:p>
+        </p:txBody>
+      </p:sp>
+      <p:sp>
+        <p:nvSpPr>
+          <p:cNvPr id="297" name="Rounded Rectangle 296"/>
+          <p:cNvSpPr/>
+          <p:nvPr/>
+        </p:nvSpPr>
+        <p:spPr>
+          <a:xfrm>
+            <a:off x="2468880" y="2331720"/>
+            <a:ext cx="1463040" cy="640080"/>
+          </a:xfrm>
+          <a:prstGeom prst="roundRect">
+            <a:avLst>
+              <a:gd name="adj" fmla="val 12000"/>
+            </a:avLst>
+          </a:prstGeom>
+          <a:solidFill>
+            <a:srgbClr val="2E3338"/>
+          </a:solidFill>
+          <a:ln w="25400">
+            <a:solidFill>
+              <a:srgbClr val="D45D35"/>
+            </a:solidFill>
+          </a:ln>
+          <a:effectLst/>
+        </p:spPr>
+        <p:style>
+          <a:lnRef idx="1">
+            <a:schemeClr val="accent1"/>
+          </a:lnRef>
+          <a:fillRef idx="3">
+            <a:schemeClr val="accent1"/>
+          </a:fillRef>
+          <a:effectRef idx="2">
+            <a:schemeClr val="accent1"/>
+          </a:effectRef>
+          <a:fontRef idx="minor">
+            <a:schemeClr val="lt1"/>
+          </a:fontRef>
+        </p:style>
+        <p:txBody>
+          <a:bodyPr rtlCol="0" anchor="ctr" wrap="square" lIns="73152" rIns="73152"/>
+          <a:lstStyle/>
+          <a:p>
+            <a:pPr algn="ctr"/>
+            <a:r>
+              <a:rPr sz="1400" b="1">
+                <a:solidFill>
+                  <a:srgbClr val="DEE2E6"/>
+                </a:solidFill>
+              </a:rPr>
+              <a:t>Chase</a:t>
+            </a:r>
+          </a:p>
+          <a:p>
+            <a:pPr algn="ctr"/>
+            <a:r>
+              <a:rPr sz="1200" b="0">
+                <a:solidFill>
+                  <a:srgbClr val="9AA3AB"/>
+                </a:solidFill>
+              </a:rPr>
+              <a:t>Pac-Man</a:t>
+            </a:r>
+          </a:p>
+        </p:txBody>
+      </p:sp>
+      <p:sp>
+        <p:nvSpPr>
+          <p:cNvPr id="298" name="Rounded Rectangle 297"/>
+          <p:cNvSpPr/>
+          <p:nvPr/>
+        </p:nvSpPr>
+        <p:spPr>
+          <a:xfrm>
+            <a:off x="4846320" y="1828800"/>
+            <a:ext cx="1645920" cy="640080"/>
+          </a:xfrm>
+          <a:prstGeom prst="roundRect">
+            <a:avLst>
+              <a:gd name="adj" fmla="val 12000"/>
+            </a:avLst>
+          </a:prstGeom>
+          <a:solidFill>
+            <a:srgbClr val="2E3338"/>
+          </a:solidFill>
+          <a:ln>
+            <a:noFill/>
+          </a:ln>
+          <a:effectLst/>
+        </p:spPr>
+        <p:style>
+          <a:lnRef idx="1">
+            <a:schemeClr val="accent1"/>
+          </a:lnRef>
+          <a:fillRef idx="3">
+            <a:schemeClr val="accent1"/>
+          </a:fillRef>
+          <a:effectRef idx="2">
+            <a:schemeClr val="accent1"/>
+          </a:effectRef>
+          <a:fontRef idx="minor">
+            <a:schemeClr val="lt1"/>
+          </a:fontRef>
+        </p:style>
+        <p:txBody>
+          <a:bodyPr rtlCol="0" anchor="ctr" wrap="square" lIns="73152" rIns="73152"/>
+          <a:lstStyle/>
+          <a:p>
+            <a:pPr algn="ctr"/>
+            <a:r>
+              <a:rPr sz="1400" b="1">
+                <a:solidFill>
+                  <a:srgbClr val="DEE2E6"/>
+                </a:solidFill>
+              </a:rPr>
+              <a:t>Frightened</a:t>
+            </a:r>
+          </a:p>
+          <a:p>
+            <a:pPr algn="ctr"/>
+            <a:r>
+              <a:rPr sz="1200" b="0">
+                <a:solidFill>
+                  <a:srgbClr val="9AA3AB"/>
+                </a:solidFill>
+              </a:rPr>
+              <a:t>blue, random</a:t>
+            </a:r>
+          </a:p>
+        </p:txBody>
+      </p:sp>
+      <p:sp>
+        <p:nvSpPr>
+          <p:cNvPr id="299" name="Rounded Rectangle 298"/>
+          <p:cNvSpPr/>
+          <p:nvPr/>
+        </p:nvSpPr>
+        <p:spPr>
+          <a:xfrm>
+            <a:off x="7132320" y="1828800"/>
+            <a:ext cx="1463040" cy="640080"/>
+          </a:xfrm>
+          <a:prstGeom prst="roundRect">
+            <a:avLst>
+              <a:gd name="adj" fmla="val 12000"/>
+            </a:avLst>
+          </a:prstGeom>
+          <a:solidFill>
+            <a:srgbClr val="2E3338"/>
+          </a:solidFill>
+          <a:ln>
+            <a:noFill/>
+          </a:ln>
+          <a:effectLst/>
+        </p:spPr>
+        <p:style>
+          <a:lnRef idx="1">
+            <a:schemeClr val="accent1"/>
+          </a:lnRef>
+          <a:fillRef idx="3">
+            <a:schemeClr val="accent1"/>
+          </a:fillRef>
+          <a:effectRef idx="2">
+            <a:schemeClr val="accent1"/>
+          </a:effectRef>
+          <a:fontRef idx="minor">
+            <a:schemeClr val="lt1"/>
+          </a:fontRef>
+        </p:style>
+        <p:txBody>
+          <a:bodyPr rtlCol="0" anchor="ctr" wrap="square" lIns="73152" rIns="73152"/>
+          <a:lstStyle/>
+          <a:p>
+            <a:pPr algn="ctr"/>
+            <a:r>
+              <a:rPr sz="1400" b="1">
+                <a:solidFill>
+                  <a:srgbClr val="DEE2E6"/>
+                </a:solidFill>
+              </a:rPr>
+              <a:t>Eaten</a:t>
+            </a:r>
+          </a:p>
+          <a:p>
+            <a:pPr algn="ctr"/>
+            <a:r>
+              <a:rPr sz="1200" b="0">
+                <a:solidFill>
+                  <a:srgbClr val="9AA3AB"/>
+                </a:solidFill>
+              </a:rPr>
+              <a:t>eyes go home</a:t>
+            </a:r>
+          </a:p>
+        </p:txBody>
+      </p:sp>
+      <p:cxnSp>
+        <p:nvCxnSpPr>
+          <p:cNvPr id="300" name="Connector 299"/>
+          <p:cNvCxnSpPr/>
+          <p:nvPr/>
+        </p:nvCxnSpPr>
+        <p:spPr>
+          <a:xfrm flipV="1">
+            <a:off x="1847088" y="1691640"/>
+            <a:ext cx="603504" cy="320040"/>
+          </a:xfrm>
+          <a:prstGeom prst="line">
+            <a:avLst/>
+          </a:prstGeom>
+          <a:ln w="25400">
+            <a:solidFill>
+              <a:srgbClr val="9AA3AB"/>
+            </a:solidFill>
+            <a:tailEnd type="triangle"/>
+          </a:ln>
+        </p:spPr>
+        <p:style>
+          <a:lnRef idx="2">
+            <a:schemeClr val="accent1"/>
+          </a:lnRef>
+          <a:fillRef idx="0">
+            <a:schemeClr val="accent1"/>
+          </a:fillRef>
+          <a:effectRef idx="1">
+            <a:schemeClr val="accent1"/>
+          </a:effectRef>
+          <a:fontRef idx="minor">
+            <a:schemeClr val="tx1"/>
+          </a:fontRef>
+        </p:style>
+      </p:cxnSp>
+      <p:cxnSp>
+        <p:nvCxnSpPr>
+          <p:cNvPr id="301" name="Connector 300"/>
+          <p:cNvCxnSpPr/>
+          <p:nvPr/>
+        </p:nvCxnSpPr>
+        <p:spPr>
+          <a:xfrm>
+            <a:off x="3108960" y="1984248"/>
+            <a:ext cx="0" cy="329184"/>
+          </a:xfrm>
+          <a:prstGeom prst="line">
+            <a:avLst/>
+          </a:prstGeom>
+          <a:ln w="25400">
+            <a:solidFill>
+              <a:srgbClr val="9AA3AB"/>
+            </a:solidFill>
+            <a:tailEnd type="triangle"/>
+          </a:ln>
+        </p:spPr>
+        <p:style>
+          <a:lnRef idx="2">
+            <a:schemeClr val="accent1"/>
+          </a:lnRef>
+          <a:fillRef idx="0">
+            <a:schemeClr val="accent1"/>
+          </a:fillRef>
+          <a:effectRef idx="1">
+            <a:schemeClr val="accent1"/>
+          </a:effectRef>
+          <a:fontRef idx="minor">
+            <a:schemeClr val="tx1"/>
+          </a:fontRef>
+        </p:style>
+      </p:cxnSp>
+      <p:cxnSp>
+        <p:nvCxnSpPr>
+          <p:cNvPr id="302" name="Connector 301"/>
+          <p:cNvCxnSpPr/>
+          <p:nvPr/>
+        </p:nvCxnSpPr>
+        <p:spPr>
+          <a:xfrm flipV="1">
+            <a:off x="3291840" y="1984248"/>
+            <a:ext cx="0" cy="329184"/>
+          </a:xfrm>
+          <a:prstGeom prst="line">
+            <a:avLst/>
+          </a:prstGeom>
+          <a:ln w="25400">
+            <a:solidFill>
+              <a:srgbClr val="9AA3AB"/>
+            </a:solidFill>
+            <a:tailEnd type="triangle"/>
+          </a:ln>
+        </p:spPr>
+        <p:style>
+          <a:lnRef idx="2">
+            <a:schemeClr val="accent1"/>
+          </a:lnRef>
+          <a:fillRef idx="0">
+            <a:schemeClr val="accent1"/>
+          </a:fillRef>
+          <a:effectRef idx="1">
+            <a:schemeClr val="accent1"/>
+          </a:effectRef>
+          <a:fontRef idx="minor">
+            <a:schemeClr val="tx1"/>
+          </a:fontRef>
+        </p:style>
+      </p:cxnSp>
+      <p:sp>
+        <p:nvSpPr>
+          <p:cNvPr id="303" name="TextBox 302"/>
+          <p:cNvSpPr txBox="1"/>
+          <p:nvPr/>
+        </p:nvSpPr>
+        <p:spPr>
+          <a:xfrm>
+            <a:off x="3429000" y="2011680"/>
+            <a:ext cx="1097280" cy="274320"/>
+          </a:xfrm>
+          <a:prstGeom prst="rect">
+            <a:avLst/>
+          </a:prstGeom>
+          <a:noFill/>
+        </p:spPr>
+        <p:txBody>
+          <a:bodyPr wrap="square">
+            <a:spAutoFit/>
+          </a:bodyPr>
+          <a:lstStyle/>
+          <a:p>
+            <a:pPr algn="l"/>
+            <a:r>
+              <a:rPr sz="1100" b="0" i="0">
+                <a:solidFill>
+                  <a:srgbClr val="9AA3AB"/>
+                </a:solidFill>
+              </a:rPr>
+              <a:t>schedule</a:t>
+            </a:r>
+          </a:p>
+        </p:txBody>
+      </p:sp>
+      <p:cxnSp>
+        <p:nvCxnSpPr>
+          <p:cNvPr id="304" name="Connector 303"/>
+          <p:cNvCxnSpPr/>
+          <p:nvPr/>
+        </p:nvCxnSpPr>
+        <p:spPr>
+          <a:xfrm flipV="1">
+            <a:off x="3950208" y="2331720"/>
+            <a:ext cx="877824" cy="320040"/>
+          </a:xfrm>
+          <a:prstGeom prst="line">
+            <a:avLst/>
+          </a:prstGeom>
+          <a:ln w="25400">
+            <a:solidFill>
+              <a:srgbClr val="9AA3AB"/>
+            </a:solidFill>
+            <a:tailEnd type="triangle"/>
+          </a:ln>
+        </p:spPr>
+        <p:style>
+          <a:lnRef idx="2">
+            <a:schemeClr val="accent1"/>
+          </a:lnRef>
+          <a:fillRef idx="0">
+            <a:schemeClr val="accent1"/>
+          </a:fillRef>
+          <a:effectRef idx="1">
+            <a:schemeClr val="accent1"/>
+          </a:effectRef>
+          <a:fontRef idx="minor">
+            <a:schemeClr val="tx1"/>
+          </a:fontRef>
+        </p:style>
+      </p:cxnSp>
+      <p:sp>
+        <p:nvSpPr>
+          <p:cNvPr id="305" name="TextBox 304"/>
+          <p:cNvSpPr txBox="1"/>
+          <p:nvPr/>
+        </p:nvSpPr>
+        <p:spPr>
+          <a:xfrm>
+            <a:off x="3977639" y="2560320"/>
+            <a:ext cx="1097280" cy="274320"/>
+          </a:xfrm>
+          <a:prstGeom prst="rect">
+            <a:avLst/>
+          </a:prstGeom>
+          <a:noFill/>
+        </p:spPr>
+        <p:txBody>
+          <a:bodyPr wrap="square">
+            <a:spAutoFit/>
+          </a:bodyPr>
+          <a:lstStyle/>
+          <a:p>
+            <a:pPr algn="l"/>
+            <a:r>
+              <a:rPr sz="1100" b="0" i="0">
+                <a:solidFill>
+                  <a:srgbClr val="9AA3AB"/>
+                </a:solidFill>
+              </a:rPr>
+              <a:t>power pellet</a:t>
+            </a:r>
+          </a:p>
+        </p:txBody>
+      </p:sp>
+      <p:cxnSp>
+        <p:nvCxnSpPr>
+          <p:cNvPr id="306" name="Connector 305"/>
+          <p:cNvCxnSpPr/>
+          <p:nvPr/>
+        </p:nvCxnSpPr>
+        <p:spPr>
+          <a:xfrm>
+            <a:off x="6510528" y="2148840"/>
+            <a:ext cx="603504" cy="0"/>
+          </a:xfrm>
+          <a:prstGeom prst="line">
+            <a:avLst/>
+          </a:prstGeom>
+          <a:ln w="25400">
+            <a:solidFill>
+              <a:srgbClr val="9AA3AB"/>
+            </a:solidFill>
+            <a:tailEnd type="triangle"/>
+          </a:ln>
+        </p:spPr>
+        <p:style>
+          <a:lnRef idx="2">
+            <a:schemeClr val="accent1"/>
+          </a:lnRef>
+          <a:fillRef idx="0">
+            <a:schemeClr val="accent1"/>
+          </a:fillRef>
+          <a:effectRef idx="1">
+            <a:schemeClr val="accent1"/>
+          </a:effectRef>
+          <a:fontRef idx="minor">
+            <a:schemeClr val="tx1"/>
+          </a:fontRef>
+        </p:style>
+      </p:cxnSp>
+      <p:sp>
+        <p:nvSpPr>
+          <p:cNvPr id="307" name="TextBox 306"/>
+          <p:cNvSpPr txBox="1"/>
+          <p:nvPr/>
+        </p:nvSpPr>
+        <p:spPr>
+          <a:xfrm>
+            <a:off x="6327648" y="1856232"/>
+            <a:ext cx="969264" cy="274320"/>
+          </a:xfrm>
+          <a:prstGeom prst="rect">
+            <a:avLst/>
+          </a:prstGeom>
+          <a:noFill/>
+        </p:spPr>
+        <p:txBody>
+          <a:bodyPr wrap="square">
+            <a:spAutoFit/>
+          </a:bodyPr>
+          <a:lstStyle/>
+          <a:p>
+            <a:pPr algn="ctr"/>
+            <a:r>
+              <a:rPr sz="1100" b="0" i="0">
+                <a:solidFill>
+                  <a:srgbClr val="9AA3AB"/>
+                </a:solidFill>
+              </a:rPr>
+              <a:t>touched</a:t>
+            </a:r>
+          </a:p>
+        </p:txBody>
+      </p:sp>
+      <p:sp>
+        <p:nvSpPr>
+          <p:cNvPr id="308" name="TextBox 307"/>
+          <p:cNvSpPr txBox="1"/>
+          <p:nvPr/>
+        </p:nvSpPr>
+        <p:spPr>
+          <a:xfrm>
+            <a:off x="365760" y="3200400"/>
+            <a:ext cx="8229600" cy="548640"/>
+          </a:xfrm>
+          <a:prstGeom prst="rect">
+            <a:avLst/>
+          </a:prstGeom>
+          <a:noFill/>
+        </p:spPr>
+        <p:txBody>
+          <a:bodyPr wrap="square">
+            <a:spAutoFit/>
+          </a:bodyPr>
+          <a:lstStyle/>
+          <a:p>
+            <a:pPr algn="ctr"/>
+            <a:r>
+              <a:rPr sz="1500" b="1" i="0">
+                <a:solidFill>
+                  <a:srgbClr val="DEE2E6"/>
+                </a:solidFill>
+              </a:rPr>
+              <a:t>At each tile centre: never turn back, and take the direction closest to a target tile.</a:t>
+            </a:r>
           </a:p>
         </p:txBody>
       </p:sp>

--- a/slides/05 Pac-Man.pptx
+++ b/slides/05 Pac-Man.pptx
@@ -807,19 +807,14 @@
           </a:bodyPr>
           <a:lstStyle/>
           <a:p>
-            <a:pPr indent="0" lvl="0" marL="0" rtl="0" algn="l">
-              <a:spcBef>
-                <a:spcPts val="0"/>
-              </a:spcBef>
-              <a:spcAft>
-                <a:spcPts val="0"/>
-              </a:spcAft>
-              <a:buNone/>
-            </a:pPr>
-            <a:r>
-              <a:t/>
-            </a:r>
-            <a:endParaRPr/>
+            <a:r>
+              <a:t>Welcome. Today we build Pac-Man. The main topic: the State pattern.</a:t>
+            </a:r>
+          </a:p>
+          <a:p>
+            <a:r>
+              <a:t>Start by playing the finished game, Pacman4, before any code.</a:t>
+            </a:r>
           </a:p>
         </p:txBody>
       </p:sp>
@@ -876,42 +871,12 @@
           <a:lstStyle/>
           <a:p>
             <a:r>
-              <a:t>Talking points:</a:t>
-            </a:r>
-          </a:p>
-          <a:p>
-            <a:r>
-              <a:t>- So far, every ghost chases straight at Pac-Man</a:t>
-            </a:r>
-          </a:p>
-          <a:p>
-            <a:r>
-              <a:t>  - They line up behind him: easy to escape</a:t>
-            </a:r>
-          </a:p>
-          <a:p>
-            <a:r>
-              <a:t>- Blinky: Pac-Man’s tile</a:t>
-            </a:r>
-          </a:p>
-          <a:p>
-            <a:r>
-              <a:t>- Pinky: four tiles ahead of Pac-Man</a:t>
-            </a:r>
-          </a:p>
-          <a:p>
-            <a:r>
-              <a:t>- Inky: two tiles ahead of Pac-Man, and double the line from Blinky</a:t>
-            </a:r>
-          </a:p>
-          <a:p>
-            <a:r>
-              <a:t>- Clyde: Pac-Man, until within eight tiles; then his corner</a:t>
-            </a:r>
-          </a:p>
-          <a:p>
-            <a:r>
-              <a:t>- Together, they trap Pac-Man</a:t>
+              <a:t>Chasing straight at Pac-Man, the ghosts line up behind him. Each ghost aims somewhere else, and together they trap him.</a:t>
+            </a:r>
+          </a:p>
+          <a:p>
+            <a:r>
+              <a:t>Ask the question at the bottom before the next slide: where does each ghost’s targeting code go?</a:t>
             </a:r>
           </a:p>
         </p:txBody>
@@ -969,47 +934,12 @@
           <a:lstStyle/>
           <a:p>
             <a:r>
-              <a:t>Talking points:</a:t>
-            </a:r>
-          </a:p>
-          <a:p>
-            <a:r>
-              <a:t>- The same structure: hold an interface, forward to it</a:t>
-            </a:r>
-          </a:p>
-          <a:p>
-            <a:r>
-              <a:t>- State: the ghost’s mode</a:t>
-            </a:r>
-          </a:p>
-          <a:p>
-            <a:r>
-              <a:t>  - Picked by the states themselves, and changes all the time</a:t>
-            </a:r>
-          </a:p>
-          <a:p>
-            <a:r>
-              <a:t>  - A state knows the next state</a:t>
-            </a:r>
-          </a:p>
-          <a:p>
-            <a:r>
-              <a:t>- Strategy: the ghost’s targeting</a:t>
-            </a:r>
-          </a:p>
-          <a:p>
-            <a:r>
-              <a:t>  - Picked from outside (World), once, and never changes</a:t>
-            </a:r>
-          </a:p>
-          <a:p>
-            <a:r>
-              <a:t>  - Strategies don’t know each other</a:t>
-            </a:r>
-          </a:p>
-          <a:p>
-            <a:r>
-              <a:t>- Together: the state decides whether to chase, the strategy how</a:t>
+              <a:t>Same structure, different jobs. A state changes all the time and knows the next state; a strategy is chosen once, from outside.</a:t>
+            </a:r>
+          </a:p>
+          <a:p>
+            <a:r>
+              <a:t>Together: the state decides whether to chase, the strategy how.</a:t>
             </a:r>
           </a:p>
         </p:txBody>
@@ -1067,37 +997,7 @@
           <a:lstStyle/>
           <a:p>
             <a:r>
-              <a:t>Talking points:</a:t>
-            </a:r>
-          </a:p>
-          <a:p>
-            <a:r>
-              <a:t>- Lives, Pac-Man’s death, a new level when the dots are gone</a:t>
-            </a:r>
-          </a:p>
-          <a:p>
-            <a:r>
-              <a:t>- The game’s flow: a state machine, like Flappy Bird’s</a:t>
-            </a:r>
-          </a:p>
-          <a:p>
-            <a:r>
-              <a:t>  - Ready → Play → Dying → Ready or Game Over</a:t>
-            </a:r>
-          </a:p>
-          <a:p>
-            <a:r>
-              <a:t>- Two levels of state machine in one game</a:t>
-            </a:r>
-          </a:p>
-          <a:p>
-            <a:r>
-              <a:t>  - The game’s states, and each ghost’s states</a:t>
-            </a:r>
-          </a:p>
-          <a:p>
-            <a:r>
-              <a:t>  - Ghosts only update in PlayState: while Pac-Man dies, their states pause</a:t>
+              <a:t>Two levels of state machine: the game’s (ready, play, dying, game over) and each ghost’s. The ghosts only update in play.</a:t>
             </a:r>
           </a:p>
         </p:txBody>
@@ -1155,7 +1055,434 @@
           <a:lstStyle/>
           <a:p>
             <a:r>
-              <a:t>Ask, let them answer in pairs for a minute, then take a few answers. These are the site’s Check yourself questions.</a:t>
+              <a:t>Ask one question at a time. Pairs discuss for a minute, then take two or three answers.</a:t>
+            </a:r>
+          </a:p>
+          <a:p>
+            <a:r>
+              <a:t>Expected answers (from the course site):</a:t>
+            </a:r>
+          </a:p>
+          <a:p/>
+          <a:p>
+            <a:r>
+              <a:t>Q: What problems does the enum version of the ghost have?</a:t>
+            </a:r>
+          </a:p>
+          <a:p>
+            <a:r>
+              <a:t>A: Every method switches over the mode, so one mode's behaviour is spread over many methods. Fields that belong to one mode exist in all of them, and adding a mode means finding and changing every switch.</a:t>
+            </a:r>
+          </a:p>
+          <a:p/>
+          <a:p>
+            <a:r>
+              <a:t>Q: In the State pattern, who decides when to change state?</a:t>
+            </a:r>
+          </a:p>
+          <a:p>
+            <a:r>
+              <a:t>A: Usually the states themselves: a state knows which events end it, and which state comes next. The object that holds the state only forwards to it, and doesn't need to know which states exist.</a:t>
+            </a:r>
+          </a:p>
+          <a:p/>
+          <a:p>
+            <a:r>
+              <a:t>Q: What are Enter and Exit for?</a:t>
+            </a:r>
+          </a:p>
+          <a:p>
+            <a:r>
+              <a:t>A: Setting up and cleaning up a state, in one place, whichever state came before or comes after. Here, FrightenedState.Enter turns the ghost around.</a:t>
+            </a:r>
+          </a:p>
+          <a:p/>
+          <a:p>
+            <a:r>
+              <a:t>Q: State and Strategy have the same structure. How do they differ?</a:t>
+            </a:r>
+          </a:p>
+          <a:p>
+            <a:r>
+              <a:t>A: A state changes during the object's life, often chosen by the states themselves. A strategy is chosen from outside, usually once, and strategies don't know about each other.</a:t>
+            </a:r>
+          </a:p>
+        </p:txBody>
+      </p:sp>
+    </p:spTree>
+  </p:cSld>
+  <p:clrMapOvr>
+    <a:masterClrMapping/>
+  </p:clrMapOvr>
+</p:notes>
+</file>
+
+<file path=ppt/notesSlides/notesSlide14.xml><?xml version="1.0" encoding="utf-8"?>
+<p:notes xmlns:a="http://schemas.openxmlformats.org/drawingml/2006/main" xmlns:p="http://schemas.openxmlformats.org/presentationml/2006/main" xmlns:r="http://schemas.openxmlformats.org/officeDocument/2006/relationships">
+  <p:cSld>
+    <p:spTree>
+      <p:nvGrpSpPr>
+        <p:cNvPr id="1" name=""/>
+        <p:cNvGrpSpPr/>
+        <p:nvPr/>
+      </p:nvGrpSpPr>
+      <p:grpSpPr>
+        <a:xfrm>
+          <a:off x="0" y="0"/>
+          <a:ext cx="0" cy="0"/>
+          <a:chOff x="0" y="0"/>
+          <a:chExt cx="0" cy="0"/>
+        </a:xfrm>
+      </p:grpSpPr>
+      <p:sp>
+        <p:nvSpPr>
+          <p:cNvPr id="2" name="Slide Image Placeholder 1"/>
+          <p:cNvSpPr>
+            <a:spLocks noGrp="1"/>
+          </p:cNvSpPr>
+          <p:nvPr>
+            <p:ph type="sldImg" idx="2"/>
+          </p:nvPr>
+        </p:nvSpPr>
+        <p:spPr/>
+      </p:sp>
+      <p:sp>
+        <p:nvSpPr>
+          <p:cNvPr id="3" name="Notes Placeholder 2"/>
+          <p:cNvSpPr>
+            <a:spLocks noGrp="1"/>
+          </p:cNvSpPr>
+          <p:nvPr>
+            <p:ph type="body" idx="1"/>
+          </p:nvPr>
+        </p:nvSpPr>
+        <p:spPr/>
+        <p:txBody>
+          <a:bodyPr/>
+          <a:lstStyle/>
+          <a:p>
+            <a:r>
+              <a:t>A text file again, like Sokoban. Point at the house, the door and the tunnel row.</a:t>
+            </a:r>
+          </a:p>
+          <a:p>
+            <a:r>
+              <a:t>Rules apart from drawing again: Maze, PacMan and World are the game; the views draw it.</a:t>
+            </a:r>
+          </a:p>
+        </p:txBody>
+      </p:sp>
+    </p:spTree>
+  </p:cSld>
+  <p:clrMapOvr>
+    <a:masterClrMapping/>
+  </p:clrMapOvr>
+</p:notes>
+</file>
+
+<file path=ppt/notesSlides/notesSlide15.xml><?xml version="1.0" encoding="utf-8"?>
+<p:notes xmlns:a="http://schemas.openxmlformats.org/drawingml/2006/main" xmlns:p="http://schemas.openxmlformats.org/presentationml/2006/main" xmlns:r="http://schemas.openxmlformats.org/officeDocument/2006/relationships">
+  <p:cSld>
+    <p:spTree>
+      <p:nvGrpSpPr>
+        <p:cNvPr id="1" name=""/>
+        <p:cNvGrpSpPr/>
+        <p:nvPr/>
+      </p:nvGrpSpPr>
+      <p:grpSpPr>
+        <a:xfrm>
+          <a:off x="0" y="0"/>
+          <a:ext cx="0" cy="0"/>
+          <a:chOff x="0" y="0"/>
+          <a:chExt cx="0" cy="0"/>
+        </a:xfrm>
+      </p:grpSpPr>
+      <p:sp>
+        <p:nvSpPr>
+          <p:cNvPr id="2" name="Slide Image Placeholder 1"/>
+          <p:cNvSpPr>
+            <a:spLocks noGrp="1"/>
+          </p:cNvSpPr>
+          <p:nvPr>
+            <p:ph type="sldImg" idx="2"/>
+          </p:nvPr>
+        </p:nvSpPr>
+        <p:spPr/>
+      </p:sp>
+      <p:sp>
+        <p:nvSpPr>
+          <p:cNvPr id="3" name="Notes Placeholder 2"/>
+          <p:cNvSpPr>
+            <a:spLocks noGrp="1"/>
+          </p:cNvSpPr>
+          <p:nvPr>
+            <p:ph type="body" idx="1"/>
+          </p:nvPr>
+        </p:nvSpPr>
+        <p:spPr/>
+        <p:txBody>
+          <a:bodyPr/>
+          <a:lstStyle/>
+          <a:p>
+            <a:r>
+              <a:t>Actors move tile centre to tile centre and turn only at a centre. The only difference between Pac-Man and a ghost: ChooseDirection.</a:t>
+            </a:r>
+          </a:p>
+          <a:p>
+            <a:r>
+              <a:t>Wanted is kept until he can turn: input buffering, as in Snake.</a:t>
+            </a:r>
+          </a:p>
+        </p:txBody>
+      </p:sp>
+    </p:spTree>
+  </p:cSld>
+  <p:clrMapOvr>
+    <a:masterClrMapping/>
+  </p:clrMapOvr>
+</p:notes>
+</file>
+
+<file path=ppt/notesSlides/notesSlide16.xml><?xml version="1.0" encoding="utf-8"?>
+<p:notes xmlns:a="http://schemas.openxmlformats.org/drawingml/2006/main" xmlns:p="http://schemas.openxmlformats.org/presentationml/2006/main" xmlns:r="http://schemas.openxmlformats.org/officeDocument/2006/relationships">
+  <p:cSld>
+    <p:spTree>
+      <p:nvGrpSpPr>
+        <p:cNvPr id="1" name=""/>
+        <p:cNvGrpSpPr/>
+        <p:nvPr/>
+      </p:nvGrpSpPr>
+      <p:grpSpPr>
+        <a:xfrm>
+          <a:off x="0" y="0"/>
+          <a:ext cx="0" cy="0"/>
+          <a:chOff x="0" y="0"/>
+          <a:chExt cx="0" cy="0"/>
+        </a:xfrm>
+      </p:grpSpPr>
+      <p:sp>
+        <p:nvSpPr>
+          <p:cNvPr id="2" name="Slide Image Placeholder 1"/>
+          <p:cNvSpPr>
+            <a:spLocks noGrp="1"/>
+          </p:cNvSpPr>
+          <p:nvPr>
+            <p:ph type="sldImg" idx="2"/>
+          </p:nvPr>
+        </p:nvSpPr>
+        <p:spPr/>
+      </p:sp>
+      <p:sp>
+        <p:nvSpPr>
+          <p:cNvPr id="3" name="Notes Placeholder 2"/>
+          <p:cNvSpPr>
+            <a:spLocks noGrp="1"/>
+          </p:cNvSpPr>
+          <p:nvPr>
+            <p:ph type="body" idx="1"/>
+          </p:nvPr>
+        </p:nvSpPr>
+        <p:spPr/>
+        <p:txBody>
+          <a:bodyPr/>
+          <a:lstStyle/>
+          <a:p>
+            <a:r>
+              <a:t>Demo: run Pacman0.</a:t>
+            </a:r>
+          </a:p>
+          <a:p>
+            <a:r>
+              <a:t>- press a direction just before a corner: he turns there</a:t>
+            </a:r>
+          </a:p>
+          <a:p>
+            <a:r>
+              <a:t>- the tunnel on the middle row</a:t>
+            </a:r>
+          </a:p>
+        </p:txBody>
+      </p:sp>
+    </p:spTree>
+  </p:cSld>
+  <p:clrMapOvr>
+    <a:masterClrMapping/>
+  </p:clrMapOvr>
+</p:notes>
+</file>
+
+<file path=ppt/notesSlides/notesSlide17.xml><?xml version="1.0" encoding="utf-8"?>
+<p:notes xmlns:a="http://schemas.openxmlformats.org/drawingml/2006/main" xmlns:p="http://schemas.openxmlformats.org/presentationml/2006/main" xmlns:r="http://schemas.openxmlformats.org/officeDocument/2006/relationships">
+  <p:cSld>
+    <p:spTree>
+      <p:nvGrpSpPr>
+        <p:cNvPr id="1" name=""/>
+        <p:cNvGrpSpPr/>
+        <p:nvPr/>
+      </p:nvGrpSpPr>
+      <p:grpSpPr>
+        <a:xfrm>
+          <a:off x="0" y="0"/>
+          <a:ext cx="0" cy="0"/>
+          <a:chOff x="0" y="0"/>
+          <a:chExt cx="0" cy="0"/>
+        </a:xfrm>
+      </p:grpSpPr>
+      <p:sp>
+        <p:nvSpPr>
+          <p:cNvPr id="2" name="Slide Image Placeholder 1"/>
+          <p:cNvSpPr>
+            <a:spLocks noGrp="1"/>
+          </p:cNvSpPr>
+          <p:nvPr>
+            <p:ph type="sldImg" idx="2"/>
+          </p:nvPr>
+        </p:nvSpPr>
+        <p:spPr/>
+      </p:sp>
+      <p:sp>
+        <p:nvSpPr>
+          <p:cNvPr id="3" name="Notes Placeholder 2"/>
+          <p:cNvSpPr>
+            <a:spLocks noGrp="1"/>
+          </p:cNvSpPr>
+          <p:nvPr>
+            <p:ph type="body" idx="1"/>
+          </p:nvPr>
+        </p:nvSpPr>
+        <p:spPr/>
+        <p:txBody>
+          <a:bodyPr/>
+          <a:lstStyle/>
+          <a:p>
+            <a:r>
+              <a:t>Pacman1 does this with an enum and a switch in every method. It works; read one case together.</a:t>
+            </a:r>
+          </a:p>
+        </p:txBody>
+      </p:sp>
+    </p:spTree>
+  </p:cSld>
+  <p:clrMapOvr>
+    <a:masterClrMapping/>
+  </p:clrMapOvr>
+</p:notes>
+</file>
+
+<file path=ppt/notesSlides/notesSlide18.xml><?xml version="1.0" encoding="utf-8"?>
+<p:notes xmlns:a="http://schemas.openxmlformats.org/drawingml/2006/main" xmlns:p="http://schemas.openxmlformats.org/presentationml/2006/main" xmlns:r="http://schemas.openxmlformats.org/officeDocument/2006/relationships">
+  <p:cSld>
+    <p:spTree>
+      <p:nvGrpSpPr>
+        <p:cNvPr id="1" name=""/>
+        <p:cNvGrpSpPr/>
+        <p:nvPr/>
+      </p:nvGrpSpPr>
+      <p:grpSpPr>
+        <a:xfrm>
+          <a:off x="0" y="0"/>
+          <a:ext cx="0" cy="0"/>
+          <a:chOff x="0" y="0"/>
+          <a:chExt cx="0" cy="0"/>
+        </a:xfrm>
+      </p:grpSpPr>
+      <p:sp>
+        <p:nvSpPr>
+          <p:cNvPr id="2" name="Slide Image Placeholder 1"/>
+          <p:cNvSpPr>
+            <a:spLocks noGrp="1"/>
+          </p:cNvSpPr>
+          <p:nvPr>
+            <p:ph type="sldImg" idx="2"/>
+          </p:nvPr>
+        </p:nvSpPr>
+        <p:spPr/>
+      </p:sp>
+      <p:sp>
+        <p:nvSpPr>
+          <p:cNvPr id="3" name="Notes Placeholder 2"/>
+          <p:cNvSpPr>
+            <a:spLocks noGrp="1"/>
+          </p:cNvSpPr>
+          <p:nvPr>
+            <p:ph type="body" idx="1"/>
+          </p:nvPr>
+        </p:nvSpPr>
+        <p:spPr/>
+        <p:txBody>
+          <a:bodyPr/>
+          <a:lstStyle/>
+          <a:p>
+            <a:r>
+              <a:t>Demo: run Pacman1.</a:t>
+            </a:r>
+          </a:p>
+          <a:p>
+            <a:r>
+              <a:t>- find GhostMode and count the switches over it</a:t>
+            </a:r>
+          </a:p>
+          <a:p>
+            <a:r>
+              <a:t>- the fields that only one mode uses</a:t>
+            </a:r>
+          </a:p>
+        </p:txBody>
+      </p:sp>
+    </p:spTree>
+  </p:cSld>
+  <p:clrMapOvr>
+    <a:masterClrMapping/>
+  </p:clrMapOvr>
+</p:notes>
+</file>
+
+<file path=ppt/notesSlides/notesSlide19.xml><?xml version="1.0" encoding="utf-8"?>
+<p:notes xmlns:a="http://schemas.openxmlformats.org/drawingml/2006/main" xmlns:p="http://schemas.openxmlformats.org/presentationml/2006/main" xmlns:r="http://schemas.openxmlformats.org/officeDocument/2006/relationships">
+  <p:cSld>
+    <p:spTree>
+      <p:nvGrpSpPr>
+        <p:cNvPr id="1" name=""/>
+        <p:cNvGrpSpPr/>
+        <p:nvPr/>
+      </p:nvGrpSpPr>
+      <p:grpSpPr>
+        <a:xfrm>
+          <a:off x="0" y="0"/>
+          <a:ext cx="0" cy="0"/>
+          <a:chOff x="0" y="0"/>
+          <a:chExt cx="0" cy="0"/>
+        </a:xfrm>
+      </p:grpSpPr>
+      <p:sp>
+        <p:nvSpPr>
+          <p:cNvPr id="2" name="Slide Image Placeholder 1"/>
+          <p:cNvSpPr>
+            <a:spLocks noGrp="1"/>
+          </p:cNvSpPr>
+          <p:nvPr>
+            <p:ph type="sldImg" idx="2"/>
+          </p:nvPr>
+        </p:nvSpPr>
+        <p:spPr/>
+      </p:sp>
+      <p:sp>
+        <p:nvSpPr>
+          <p:cNvPr id="3" name="Notes Placeholder 2"/>
+          <p:cNvSpPr>
+            <a:spLocks noGrp="1"/>
+          </p:cNvSpPr>
+          <p:nvPr>
+            <p:ph type="body" idx="1"/>
+          </p:nvPr>
+        </p:nvSpPr>
+        <p:spPr/>
+        <p:txBody>
+          <a:bodyPr/>
+          <a:lstStyle/>
+          <a:p>
+            <a:r>
+              <a:t>Each mode becomes a class; the ghost forwards to its current state. Flappy Bird did this for the whole game; now for one object in it.</a:t>
             </a:r>
           </a:p>
         </p:txBody>
@@ -1243,19 +1570,334 @@
           </a:bodyPr>
           <a:lstStyle/>
           <a:p>
-            <a:pPr indent="0" lvl="0" marL="0" rtl="0" algn="l">
-              <a:spcBef>
-                <a:spcPts val="0"/>
-              </a:spcBef>
-              <a:spcAft>
-                <a:spcPts val="0"/>
-              </a:spcAft>
-              <a:buNone/>
-            </a:pPr>
-            <a:r>
-              <a:t/>
-            </a:r>
-            <a:endParaRPr/>
+            <a:r>
+              <a:t>Run Pacman4 and play it for a minute.</a:t>
+            </a:r>
+          </a:p>
+          <a:p>
+            <a:r>
+              <a:t>Ask: what would you need to build this? Collect answers on the board, and come back to them at the end.</a:t>
+            </a:r>
+          </a:p>
+        </p:txBody>
+      </p:sp>
+    </p:spTree>
+  </p:cSld>
+  <p:clrMapOvr>
+    <a:masterClrMapping/>
+  </p:clrMapOvr>
+</p:notes>
+</file>
+
+<file path=ppt/notesSlides/notesSlide20.xml><?xml version="1.0" encoding="utf-8"?>
+<p:notes xmlns:a="http://schemas.openxmlformats.org/drawingml/2006/main" xmlns:p="http://schemas.openxmlformats.org/presentationml/2006/main" xmlns:r="http://schemas.openxmlformats.org/officeDocument/2006/relationships">
+  <p:cSld>
+    <p:spTree>
+      <p:nvGrpSpPr>
+        <p:cNvPr id="1" name=""/>
+        <p:cNvGrpSpPr/>
+        <p:nvPr/>
+      </p:nvGrpSpPr>
+      <p:grpSpPr>
+        <a:xfrm>
+          <a:off x="0" y="0"/>
+          <a:ext cx="0" cy="0"/>
+          <a:chOff x="0" y="0"/>
+          <a:chExt cx="0" cy="0"/>
+        </a:xfrm>
+      </p:grpSpPr>
+      <p:sp>
+        <p:nvSpPr>
+          <p:cNvPr id="2" name="Slide Image Placeholder 1"/>
+          <p:cNvSpPr>
+            <a:spLocks noGrp="1"/>
+          </p:cNvSpPr>
+          <p:nvPr>
+            <p:ph type="sldImg" idx="2"/>
+          </p:nvPr>
+        </p:nvSpPr>
+        <p:spPr/>
+      </p:sp>
+      <p:sp>
+        <p:nvSpPr>
+          <p:cNvPr id="3" name="Notes Placeholder 2"/>
+          <p:cNvSpPr>
+            <a:spLocks noGrp="1"/>
+          </p:cNvSpPr>
+          <p:nvPr>
+            <p:ph type="body" idx="1"/>
+          </p:nvPr>
+        </p:nvSpPr>
+        <p:spPr/>
+        <p:txBody>
+          <a:bodyPr/>
+          <a:lstStyle/>
+          <a:p>
+            <a:r>
+              <a:t>Everything about being frightened in one class, including its timer. Enter turns the ghost around; the state decides where to go next.</a:t>
+            </a:r>
+          </a:p>
+        </p:txBody>
+      </p:sp>
+    </p:spTree>
+  </p:cSld>
+  <p:clrMapOvr>
+    <a:masterClrMapping/>
+  </p:clrMapOvr>
+</p:notes>
+</file>
+
+<file path=ppt/notesSlides/notesSlide21.xml><?xml version="1.0" encoding="utf-8"?>
+<p:notes xmlns:a="http://schemas.openxmlformats.org/drawingml/2006/main" xmlns:p="http://schemas.openxmlformats.org/presentationml/2006/main" xmlns:r="http://schemas.openxmlformats.org/officeDocument/2006/relationships">
+  <p:cSld>
+    <p:spTree>
+      <p:nvGrpSpPr>
+        <p:cNvPr id="1" name=""/>
+        <p:cNvGrpSpPr/>
+        <p:nvPr/>
+      </p:nvGrpSpPr>
+      <p:grpSpPr>
+        <a:xfrm>
+          <a:off x="0" y="0"/>
+          <a:ext cx="0" cy="0"/>
+          <a:chOff x="0" y="0"/>
+          <a:chExt cx="0" cy="0"/>
+        </a:xfrm>
+      </p:grpSpPr>
+      <p:sp>
+        <p:nvSpPr>
+          <p:cNvPr id="2" name="Slide Image Placeholder 1"/>
+          <p:cNvSpPr>
+            <a:spLocks noGrp="1"/>
+          </p:cNvSpPr>
+          <p:nvPr>
+            <p:ph type="sldImg" idx="2"/>
+          </p:nvPr>
+        </p:nvSpPr>
+        <p:spPr/>
+      </p:sp>
+      <p:sp>
+        <p:nvSpPr>
+          <p:cNvPr id="3" name="Notes Placeholder 2"/>
+          <p:cNvSpPr>
+            <a:spLocks noGrp="1"/>
+          </p:cNvSpPr>
+          <p:nvPr>
+            <p:ph type="body" idx="1"/>
+          </p:nvPr>
+        </p:nvSpPr>
+        <p:spPr/>
+        <p:txBody>
+          <a:bodyPr/>
+          <a:lstStyle/>
+          <a:p>
+            <a:r>
+              <a:t>Demo: open Pacman1 and Pacman2 side by side (a diff tool, or two editor panes), then run Pacman2.</a:t>
+            </a:r>
+          </a:p>
+          <a:p>
+            <a:r>
+              <a:t>- the enum and its switches become GhostStates/</a:t>
+            </a:r>
+          </a:p>
+          <a:p>
+            <a:r>
+              <a:t>- Ghost.cs gets much shorter</a:t>
+            </a:r>
+          </a:p>
+          <a:p>
+            <a:r>
+              <a:t>- World.cs is unchanged</a:t>
+            </a:r>
+          </a:p>
+        </p:txBody>
+      </p:sp>
+    </p:spTree>
+  </p:cSld>
+  <p:clrMapOvr>
+    <a:masterClrMapping/>
+  </p:clrMapOvr>
+</p:notes>
+</file>
+
+<file path=ppt/notesSlides/notesSlide22.xml><?xml version="1.0" encoding="utf-8"?>
+<p:notes xmlns:a="http://schemas.openxmlformats.org/drawingml/2006/main" xmlns:p="http://schemas.openxmlformats.org/presentationml/2006/main" xmlns:r="http://schemas.openxmlformats.org/officeDocument/2006/relationships">
+  <p:cSld>
+    <p:spTree>
+      <p:nvGrpSpPr>
+        <p:cNvPr id="1" name=""/>
+        <p:cNvGrpSpPr/>
+        <p:nvPr/>
+      </p:nvGrpSpPr>
+      <p:grpSpPr>
+        <a:xfrm>
+          <a:off x="0" y="0"/>
+          <a:ext cx="0" cy="0"/>
+          <a:chOff x="0" y="0"/>
+          <a:chExt cx="0" cy="0"/>
+        </a:xfrm>
+      </p:grpSpPr>
+      <p:sp>
+        <p:nvSpPr>
+          <p:cNvPr id="2" name="Slide Image Placeholder 1"/>
+          <p:cNvSpPr>
+            <a:spLocks noGrp="1"/>
+          </p:cNvSpPr>
+          <p:nvPr>
+            <p:ph type="sldImg" idx="2"/>
+          </p:nvPr>
+        </p:nvSpPr>
+        <p:spPr/>
+      </p:sp>
+      <p:sp>
+        <p:nvSpPr>
+          <p:cNvPr id="3" name="Notes Placeholder 2"/>
+          <p:cNvSpPr>
+            <a:spLocks noGrp="1"/>
+          </p:cNvSpPr>
+          <p:nvPr>
+            <p:ph type="body" idx="1"/>
+          </p:nvPr>
+        </p:nvSpPr>
+        <p:spPr/>
+        <p:txBody>
+          <a:bodyPr/>
+          <a:lstStyle/>
+          <a:p>
+            <a:r>
+              <a:t>Each ghost gets an ITargetStrategy when it’s created. ChaseState asks the ghost’s strategy, and works for every ghost. A new personality is one class.</a:t>
+            </a:r>
+          </a:p>
+        </p:txBody>
+      </p:sp>
+    </p:spTree>
+  </p:cSld>
+  <p:clrMapOvr>
+    <a:masterClrMapping/>
+  </p:clrMapOvr>
+</p:notes>
+</file>
+
+<file path=ppt/notesSlides/notesSlide23.xml><?xml version="1.0" encoding="utf-8"?>
+<p:notes xmlns:a="http://schemas.openxmlformats.org/drawingml/2006/main" xmlns:p="http://schemas.openxmlformats.org/presentationml/2006/main" xmlns:r="http://schemas.openxmlformats.org/officeDocument/2006/relationships">
+  <p:cSld>
+    <p:spTree>
+      <p:nvGrpSpPr>
+        <p:cNvPr id="1" name=""/>
+        <p:cNvGrpSpPr/>
+        <p:nvPr/>
+      </p:nvGrpSpPr>
+      <p:grpSpPr>
+        <a:xfrm>
+          <a:off x="0" y="0"/>
+          <a:ext cx="0" cy="0"/>
+          <a:chOff x="0" y="0"/>
+          <a:chExt cx="0" cy="0"/>
+        </a:xfrm>
+      </p:grpSpPr>
+      <p:sp>
+        <p:nvSpPr>
+          <p:cNvPr id="2" name="Slide Image Placeholder 1"/>
+          <p:cNvSpPr>
+            <a:spLocks noGrp="1"/>
+          </p:cNvSpPr>
+          <p:nvPr>
+            <p:ph type="sldImg" idx="2"/>
+          </p:nvPr>
+        </p:nvSpPr>
+        <p:spPr/>
+      </p:sp>
+      <p:sp>
+        <p:nvSpPr>
+          <p:cNvPr id="3" name="Notes Placeholder 2"/>
+          <p:cNvSpPr>
+            <a:spLocks noGrp="1"/>
+          </p:cNvSpPr>
+          <p:nvPr>
+            <p:ph type="body" idx="1"/>
+          </p:nvPr>
+        </p:nvSpPr>
+        <p:spPr/>
+        <p:txBody>
+          <a:bodyPr/>
+          <a:lstStyle/>
+          <a:p>
+            <a:r>
+              <a:t>Demo: open Pacman2 and Pacman3 side by side (a diff tool, or two editor panes), then run Pacman3.</a:t>
+            </a:r>
+          </a:p>
+          <a:p>
+            <a:r>
+              <a:t>- Targeting/: one small class per ghost</a:t>
+            </a:r>
+          </a:p>
+          <a:p>
+            <a:r>
+              <a:t>- World passes a strategy to each ghost</a:t>
+            </a:r>
+          </a:p>
+        </p:txBody>
+      </p:sp>
+    </p:spTree>
+  </p:cSld>
+  <p:clrMapOvr>
+    <a:masterClrMapping/>
+  </p:clrMapOvr>
+</p:notes>
+</file>
+
+<file path=ppt/notesSlides/notesSlide24.xml><?xml version="1.0" encoding="utf-8"?>
+<p:notes xmlns:a="http://schemas.openxmlformats.org/drawingml/2006/main" xmlns:p="http://schemas.openxmlformats.org/presentationml/2006/main" xmlns:r="http://schemas.openxmlformats.org/officeDocument/2006/relationships">
+  <p:cSld>
+    <p:spTree>
+      <p:nvGrpSpPr>
+        <p:cNvPr id="1" name=""/>
+        <p:cNvGrpSpPr/>
+        <p:nvPr/>
+      </p:nvGrpSpPr>
+      <p:grpSpPr>
+        <a:xfrm>
+          <a:off x="0" y="0"/>
+          <a:ext cx="0" cy="0"/>
+          <a:chOff x="0" y="0"/>
+          <a:chExt cx="0" cy="0"/>
+        </a:xfrm>
+      </p:grpSpPr>
+      <p:sp>
+        <p:nvSpPr>
+          <p:cNvPr id="2" name="Slide Image Placeholder 1"/>
+          <p:cNvSpPr>
+            <a:spLocks noGrp="1"/>
+          </p:cNvSpPr>
+          <p:nvPr>
+            <p:ph type="sldImg" idx="2"/>
+          </p:nvPr>
+        </p:nvSpPr>
+        <p:spPr/>
+      </p:sp>
+      <p:sp>
+        <p:nvSpPr>
+          <p:cNvPr id="3" name="Notes Placeholder 2"/>
+          <p:cNvSpPr>
+            <a:spLocks noGrp="1"/>
+          </p:cNvSpPr>
+          <p:nvPr>
+            <p:ph type="body" idx="1"/>
+          </p:nvPr>
+        </p:nvSpPr>
+        <p:spPr/>
+        <p:txBody>
+          <a:bodyPr/>
+          <a:lstStyle/>
+          <a:p>
+            <a:r>
+              <a:t>A strategy is one method: perfect for a test. Inky’s target is invisible while playing, but a test can check it on paper.</a:t>
+            </a:r>
+          </a:p>
+          <a:p>
+            <a:r>
+              <a:t>Work the numbers on the slide together.</a:t>
+            </a:r>
           </a:p>
         </p:txBody>
       </p:sp>
@@ -1342,19 +1984,130 @@
           </a:bodyPr>
           <a:lstStyle/>
           <a:p>
-            <a:pPr indent="0" lvl="0" marL="0" rtl="0" algn="l">
-              <a:spcBef>
-                <a:spcPts val="0"/>
-              </a:spcBef>
-              <a:spcAft>
-                <a:spcPts val="0"/>
-              </a:spcAft>
-              <a:buNone/>
-            </a:pPr>
-            <a:r>
-              <a:t/>
-            </a:r>
-            <a:endParaRPr/>
+            <a:r>
+              <a:t>Demo: run Pacman4 for a full life, then run dotnet test in 05-pacman and open TargetingTests.cs.</a:t>
+            </a:r>
+          </a:p>
+        </p:txBody>
+      </p:sp>
+    </p:spTree>
+  </p:cSld>
+  <p:clrMapOvr>
+    <a:masterClrMapping/>
+  </p:clrMapOvr>
+</p:notes>
+</file>
+
+<file path=ppt/notesSlides/notesSlide26.xml><?xml version="1.0" encoding="utf-8"?>
+<p:notes xmlns:a="http://schemas.openxmlformats.org/drawingml/2006/main" xmlns:p="http://schemas.openxmlformats.org/presentationml/2006/main" xmlns:r="http://schemas.openxmlformats.org/officeDocument/2006/relationships">
+  <p:cSld>
+    <p:spTree>
+      <p:nvGrpSpPr>
+        <p:cNvPr id="1" name=""/>
+        <p:cNvGrpSpPr/>
+        <p:nvPr/>
+      </p:nvGrpSpPr>
+      <p:grpSpPr>
+        <a:xfrm>
+          <a:off x="0" y="0"/>
+          <a:ext cx="0" cy="0"/>
+          <a:chOff x="0" y="0"/>
+          <a:chExt cx="0" cy="0"/>
+        </a:xfrm>
+      </p:grpSpPr>
+      <p:sp>
+        <p:nvSpPr>
+          <p:cNvPr id="2" name="Slide Image Placeholder 1"/>
+          <p:cNvSpPr>
+            <a:spLocks noGrp="1"/>
+          </p:cNvSpPr>
+          <p:nvPr>
+            <p:ph type="sldImg" idx="2"/>
+          </p:nvPr>
+        </p:nvSpPr>
+        <p:spPr/>
+      </p:sp>
+      <p:sp>
+        <p:nvSpPr>
+          <p:cNvPr id="3" name="Notes Placeholder 2"/>
+          <p:cNvSpPr>
+            <a:spLocks noGrp="1"/>
+          </p:cNvSpPr>
+          <p:nvPr>
+            <p:ph type="body" idx="1"/>
+          </p:nvPr>
+        </p:nvSpPr>
+        <p:spPr/>
+        <p:txBody>
+          <a:bodyPr/>
+          <a:lstStyle/>
+          <a:p>
+            <a:r>
+              <a:t>Next milestone by session 06: a playable core loop and a first class diagram. Look for modes in your game.</a:t>
+            </a:r>
+          </a:p>
+        </p:txBody>
+      </p:sp>
+    </p:spTree>
+  </p:cSld>
+  <p:clrMapOvr>
+    <a:masterClrMapping/>
+  </p:clrMapOvr>
+</p:notes>
+</file>
+
+<file path=ppt/notesSlides/notesSlide27.xml><?xml version="1.0" encoding="utf-8"?>
+<p:notes xmlns:a="http://schemas.openxmlformats.org/drawingml/2006/main" xmlns:p="http://schemas.openxmlformats.org/presentationml/2006/main" xmlns:r="http://schemas.openxmlformats.org/officeDocument/2006/relationships">
+  <p:cSld>
+    <p:spTree>
+      <p:nvGrpSpPr>
+        <p:cNvPr id="1" name=""/>
+        <p:cNvGrpSpPr/>
+        <p:nvPr/>
+      </p:nvGrpSpPr>
+      <p:grpSpPr>
+        <a:xfrm>
+          <a:off x="0" y="0"/>
+          <a:ext cx="0" cy="0"/>
+          <a:chOff x="0" y="0"/>
+          <a:chExt cx="0" cy="0"/>
+        </a:xfrm>
+      </p:grpSpPr>
+      <p:sp>
+        <p:nvSpPr>
+          <p:cNvPr id="2" name="Slide Image Placeholder 1"/>
+          <p:cNvSpPr>
+            <a:spLocks noGrp="1"/>
+          </p:cNvSpPr>
+          <p:nvPr>
+            <p:ph type="sldImg" idx="2"/>
+          </p:nvPr>
+        </p:nvSpPr>
+        <p:spPr/>
+      </p:sp>
+      <p:sp>
+        <p:nvSpPr>
+          <p:cNvPr id="3" name="Notes Placeholder 2"/>
+          <p:cNvSpPr>
+            <a:spLocks noGrp="1"/>
+          </p:cNvSpPr>
+          <p:nvPr>
+            <p:ph type="body" idx="1"/>
+          </p:nvPr>
+        </p:nvSpPr>
+        <p:spPr/>
+        <p:txBody>
+          <a:bodyPr/>
+          <a:lstStyle/>
+          <a:p>
+            <a:r>
+              <a:t>Give the project groups five minutes with these questions.</a:t>
+            </a:r>
+          </a:p>
+          <a:p>
+            <a:r>
+              <a:t>Ask two groups to share one answer each. Push for concrete classes and files, not intentions.</a:t>
+            </a:r>
           </a:p>
         </p:txBody>
       </p:sp>
@@ -1441,19 +2194,9 @@
           </a:bodyPr>
           <a:lstStyle/>
           <a:p>
-            <a:pPr indent="0" lvl="0" marL="0" rtl="0" algn="l">
-              <a:spcBef>
-                <a:spcPts val="0"/>
-              </a:spcBef>
-              <a:spcAft>
-                <a:spcPts val="0"/>
-              </a:spcAft>
-              <a:buNone/>
-            </a:pPr>
-            <a:r>
-              <a:t/>
-            </a:r>
-            <a:endParaRPr/>
+            <a:r>
+              <a:t>The main topic: the State pattern, through the ghosts’ modes. Then Strategy for their targeting, and how the two differ.</a:t>
+            </a:r>
           </a:p>
         </p:txBody>
       </p:sp>
@@ -1540,19 +2283,9 @@
           </a:bodyPr>
           <a:lstStyle/>
           <a:p>
-            <a:pPr indent="0" lvl="0" marL="0" rtl="0" algn="l">
-              <a:spcBef>
-                <a:spcPts val="0"/>
-              </a:spcBef>
-              <a:spcAft>
-                <a:spcPts val="0"/>
-              </a:spcAft>
-              <a:buNone/>
-            </a:pPr>
-            <a:r>
-              <a:t/>
-            </a:r>
-            <a:endParaRPr/>
+            <a:r>
+              <a:t>Start from Pacman4. For the new mode, ask them to compare the classes they changed with Pacman1’s enum. Test first for the new ghost.</a:t>
+            </a:r>
           </a:p>
         </p:txBody>
       </p:sp>
@@ -1640,37 +2373,70 @@
           <a:lstStyle/>
           <a:p>
             <a:r>
-              <a:t>Talking points:</a:t>
-            </a:r>
-          </a:p>
-          <a:p>
-            <a:r>
-              <a:t>- All Source code for today’s game can be found here:</a:t>
-            </a:r>
-          </a:p>
-          <a:p>
-            <a:r>
-              <a:t>  - github.com/Metamate/gar-games (folder 05-pacman)</a:t>
-            </a:r>
-          </a:p>
-          <a:p>
-            <a:r>
-              <a:t>- The game is built up in steps: Pacman0 → Pacman4, and the tests in Pacman.Tests</a:t>
-            </a:r>
-          </a:p>
-          <a:p>
-            <a:r>
-              <a:t>  - Each step is a separate project that adds one concept</a:t>
-            </a:r>
-          </a:p>
-          <a:p>
-            <a:r>
-              <a:t>  - Compare neighbouring steps to see exactly what changed</a:t>
-            </a:r>
-          </a:p>
-          <a:p>
-            <a:r>
-              <a:t>- Pacman4 is the finished game, and the starting point for the exercises</a:t>
+              <a:t>Open gar-games/05-pacman live. Show the README: the step table, the code map, how to run a step.</a:t>
+            </a:r>
+          </a:p>
+          <a:p>
+            <a:r>
+              <a:t>Say: the site explains the ideas, the README helps you find them in the code, the slides are for today.</a:t>
+            </a:r>
+          </a:p>
+        </p:txBody>
+      </p:sp>
+    </p:spTree>
+  </p:cSld>
+  <p:clrMapOvr>
+    <a:masterClrMapping/>
+  </p:clrMapOvr>
+</p:notes>
+</file>
+
+<file path=ppt/notesSlides/notesSlide6.xml><?xml version="1.0" encoding="utf-8"?>
+<p:notes xmlns:a="http://schemas.openxmlformats.org/drawingml/2006/main" xmlns:p="http://schemas.openxmlformats.org/presentationml/2006/main" xmlns:r="http://schemas.openxmlformats.org/officeDocument/2006/relationships">
+  <p:cSld>
+    <p:spTree>
+      <p:nvGrpSpPr>
+        <p:cNvPr id="1" name=""/>
+        <p:cNvGrpSpPr/>
+        <p:nvPr/>
+      </p:nvGrpSpPr>
+      <p:grpSpPr>
+        <a:xfrm>
+          <a:off x="0" y="0"/>
+          <a:ext cx="0" cy="0"/>
+          <a:chOff x="0" y="0"/>
+          <a:chExt cx="0" cy="0"/>
+        </a:xfrm>
+      </p:grpSpPr>
+      <p:sp>
+        <p:nvSpPr>
+          <p:cNvPr id="2" name="Slide Image Placeholder 1"/>
+          <p:cNvSpPr>
+            <a:spLocks noGrp="1"/>
+          </p:cNvSpPr>
+          <p:nvPr>
+            <p:ph type="sldImg" idx="2"/>
+          </p:nvPr>
+        </p:nvSpPr>
+        <p:spPr/>
+      </p:sp>
+      <p:sp>
+        <p:nvSpPr>
+          <p:cNvPr id="3" name="Notes Placeholder 2"/>
+          <p:cNvSpPr>
+            <a:spLocks noGrp="1"/>
+          </p:cNvSpPr>
+          <p:nvPr>
+            <p:ph type="body" idx="1"/>
+          </p:nvPr>
+        </p:nvSpPr>
+        <p:spPr/>
+        <p:txBody>
+          <a:bodyPr/>
+          <a:lstStyle/>
+          <a:p>
+            <a:r>
+              <a:t>Fruit and the tunnel: the questions are about where a rule belongs. Discuss answers before code.</a:t>
             </a:r>
           </a:p>
         </p:txBody>
@@ -1728,47 +2494,12 @@
           <a:lstStyle/>
           <a:p>
             <a:r>
-              <a:t>Talking points:</a:t>
-            </a:r>
-          </a:p>
-          <a:p>
-            <a:r>
-              <a:t>- In the house: waits, then leaves through the door</a:t>
-            </a:r>
-          </a:p>
-          <a:p>
-            <a:r>
-              <a:t>- Scatter: heads for its own corner</a:t>
-            </a:r>
-          </a:p>
-          <a:p>
-            <a:r>
-              <a:t>- Chase: hunts Pac-Man</a:t>
-            </a:r>
-          </a:p>
-          <a:p>
-            <a:r>
-              <a:t>  - Scatter and chase take turns on a schedule: 7 s, 20 s, …</a:t>
-            </a:r>
-          </a:p>
-          <a:p>
-            <a:r>
-              <a:t>- Frightened: blue, slow, random; can be eaten</a:t>
-            </a:r>
-          </a:p>
-          <a:p>
-            <a:r>
-              <a:t>- Eaten: only the eyes, racing back to the house</a:t>
-            </a:r>
-          </a:p>
-          <a:p>
-            <a:r>
-              <a:t>- At each tile centre: never turn back, and take the direction closest to a target tile</a:t>
-            </a:r>
-          </a:p>
-          <a:p>
-            <a:r>
-              <a:t>  - The mode decides the target</a:t>
+              <a:t>Walk through the diagram: in the house, then scatter and chase on a schedule; a power pellet frightens; touched means eaten, and the eyes go home.</a:t>
+            </a:r>
+          </a:p>
+          <a:p>
+            <a:r>
+              <a:t>The rule at the bottom is all a ghost ever does. The mode only picks the target tile.</a:t>
             </a:r>
           </a:p>
         </p:txBody>
@@ -1826,42 +2557,12 @@
           <a:lstStyle/>
           <a:p>
             <a:r>
-              <a:t>Talking points:</a:t>
-            </a:r>
-          </a:p>
-          <a:p>
-            <a:r>
-              <a:t>- One mode is spread over many methods</a:t>
-            </a:r>
-          </a:p>
-          <a:p>
-            <a:r>
-              <a:t>  - To understand frightened ghosts, read seven methods</a:t>
-            </a:r>
-          </a:p>
-          <a:p>
-            <a:r>
-              <a:t>- Fields that belong to one mode</a:t>
-            </a:r>
-          </a:p>
-          <a:p>
-            <a:r>
-              <a:t>  - _houseTimer, _frightenedTimer, _enteringHouse: always there</a:t>
-            </a:r>
-          </a:p>
-          <a:p>
-            <a:r>
-              <a:t>- A new mode touches every switch</a:t>
-            </a:r>
-          </a:p>
-          <a:p>
-            <a:r>
-              <a:t>  - Miss one, and the compiler won’t tell you</a:t>
-            </a:r>
-          </a:p>
-          <a:p>
-            <a:r>
-              <a:t>- Pong’s string-based game state, all over again</a:t>
+              <a:t>Ask the question: a sixth mode, a short pause when a ghost is eaten. Where do you change the code?</a:t>
+            </a:r>
+          </a:p>
+          <a:p>
+            <a:r>
+              <a:t>Answer: every switch in six methods, and the compiler won’t tell you if you miss one.</a:t>
             </a:r>
           </a:p>
         </p:txBody>
@@ -1919,42 +2620,12 @@
           <a:lstStyle/>
           <a:p>
             <a:r>
-              <a:t>Talking points:</a:t>
-            </a:r>
-          </a:p>
-          <a:p>
-            <a:r>
-              <a:t>- The states decide the transitions</a:t>
-            </a:r>
-          </a:p>
-          <a:p>
-            <a:r>
-              <a:t>  - Ghost doesn’t know which states exist</a:t>
-            </a:r>
-          </a:p>
-          <a:p>
-            <a:r>
-              <a:t>- The same event, handled differently</a:t>
-            </a:r>
-          </a:p>
-          <a:p>
-            <a:r>
-              <a:t>  - Power pellet: scatter and chase get frightened, frightened starts over, eaten ignores it</a:t>
-            </a:r>
-          </a:p>
-          <a:p>
-            <a:r>
-              <a:t>- Enter and Exit: start and clean up, in one place</a:t>
-            </a:r>
-          </a:p>
-          <a:p>
-            <a:r>
-              <a:t>- Each state is small, and can be read on its own</a:t>
-            </a:r>
-          </a:p>
-          <a:p>
-            <a:r>
-              <a:t>- Pacman1 → Pacman2: World didn’t change at all</a:t>
+              <a:t>Three gains: one place per mode, the same event handled differently per state, and Enter/Exit.</a:t>
+            </a:r>
+          </a:p>
+          <a:p>
+            <a:r>
+              <a:t>And the proof: from Pacman1 to Pacman2, World didn’t change at all.</a:t>
             </a:r>
           </a:p>
         </p:txBody>
@@ -13621,6 +14292,179 @@
 </file>
 
 <file path=ppt/slides/slide25.xml><?xml version="1.0" encoding="utf-8"?>
+<p:sld xmlns:a="http://schemas.openxmlformats.org/drawingml/2006/main" xmlns:p="http://schemas.openxmlformats.org/presentationml/2006/main" xmlns:r="http://schemas.openxmlformats.org/officeDocument/2006/relationships">
+  <p:cSld>
+    <p:spTree>
+      <p:nvGrpSpPr>
+        <p:cNvPr id="1" name=""/>
+        <p:cNvGrpSpPr/>
+        <p:nvPr/>
+      </p:nvGrpSpPr>
+      <p:grpSpPr/>
+      <p:sp>
+        <p:nvSpPr>
+          <p:cNvPr id="2" name="Title 1"/>
+          <p:cNvSpPr>
+            <a:spLocks noGrp="1"/>
+          </p:cNvSpPr>
+          <p:nvPr>
+            <p:ph type="title"/>
+          </p:nvPr>
+        </p:nvSpPr>
+        <p:spPr/>
+        <p:txBody>
+          <a:bodyPr/>
+          <a:lstStyle/>
+          <a:p>
+            <a:pPr indent="0" lvl="0" marL="0" rtl="0" algn="l">
+              <a:spcBef>
+                <a:spcPts val="0"/>
+              </a:spcBef>
+              <a:spcAft>
+                <a:spcPts val="0"/>
+              </a:spcAft>
+              <a:buNone/>
+            </a:pPr>
+            <a:r>
+              <a:rPr lang="en"/>
+              <a:t>Check Yourself</a:t>
+            </a:r>
+            <a:endParaRPr/>
+          </a:p>
+        </p:txBody>
+      </p:sp>
+      <p:sp>
+        <p:nvSpPr>
+          <p:cNvPr id="3" name="Text Placeholder 2"/>
+          <p:cNvSpPr>
+            <a:spLocks noGrp="1"/>
+          </p:cNvSpPr>
+          <p:nvPr>
+            <p:ph type="body" idx="1"/>
+          </p:nvPr>
+        </p:nvSpPr>
+        <p:spPr>
+          <a:xfrm>
+            <a:off x="311700" y="885950"/>
+            <a:ext cx="8520600" cy="1719072"/>
+          </a:xfrm>
+        </p:spPr>
+        <p:txBody>
+          <a:bodyPr/>
+          <a:lstStyle/>
+          <a:p>
+            <a:pPr indent="-330200" lvl="0" marL="457200" rtl="0" algn="l">
+              <a:spcBef>
+                <a:spcPts val="0"/>
+              </a:spcBef>
+              <a:spcAft>
+                <a:spcPts val="0"/>
+              </a:spcAft>
+              <a:buSzPts val="1600"/>
+              <a:buChar char="●"/>
+            </a:pPr>
+            <a:r>
+              <a:rPr lang="en"/>
+              <a:t>What problems does the enum version of the ghost have?</a:t>
+            </a:r>
+            <a:endParaRPr/>
+          </a:p>
+          <a:p>
+            <a:pPr indent="-330200" lvl="0" marL="457200" rtl="0" algn="l">
+              <a:spcBef>
+                <a:spcPts val="0"/>
+              </a:spcBef>
+              <a:spcAft>
+                <a:spcPts val="0"/>
+              </a:spcAft>
+              <a:buSzPts val="1600"/>
+              <a:buChar char="●"/>
+            </a:pPr>
+            <a:r>
+              <a:rPr lang="en"/>
+              <a:t>In the State pattern, who decides when to change state?</a:t>
+            </a:r>
+            <a:endParaRPr/>
+          </a:p>
+          <a:p>
+            <a:pPr indent="-330200" lvl="0" marL="457200" rtl="0" algn="l">
+              <a:spcBef>
+                <a:spcPts val="0"/>
+              </a:spcBef>
+              <a:spcAft>
+                <a:spcPts val="0"/>
+              </a:spcAft>
+              <a:buSzPts val="1600"/>
+              <a:buChar char="●"/>
+            </a:pPr>
+            <a:r>
+              <a:rPr lang="en"/>
+              <a:t>What are Enter and Exit for?</a:t>
+            </a:r>
+            <a:endParaRPr/>
+          </a:p>
+          <a:p>
+            <a:pPr indent="-330200" lvl="0" marL="457200" rtl="0" algn="l">
+              <a:spcBef>
+                <a:spcPts val="0"/>
+              </a:spcBef>
+              <a:spcAft>
+                <a:spcPts val="0"/>
+              </a:spcAft>
+              <a:buSzPts val="1600"/>
+              <a:buChar char="●"/>
+            </a:pPr>
+            <a:r>
+              <a:rPr lang="en"/>
+              <a:t>State and Strategy have the same structure. How do they differ?</a:t>
+            </a:r>
+            <a:endParaRPr/>
+          </a:p>
+        </p:txBody>
+      </p:sp>
+      <p:sp>
+        <p:nvSpPr>
+          <p:cNvPr id="4" name="TextBox 3"/>
+          <p:cNvSpPr txBox="1"/>
+          <p:nvPr/>
+        </p:nvSpPr>
+        <p:spPr>
+          <a:xfrm>
+            <a:off x="457200" y="3182112"/>
+            <a:ext cx="8229600" cy="457200"/>
+          </a:xfrm>
+          <a:prstGeom prst="rect">
+            <a:avLst/>
+          </a:prstGeom>
+          <a:noFill/>
+        </p:spPr>
+        <p:txBody>
+          <a:bodyPr wrap="square">
+            <a:spAutoFit/>
+          </a:bodyPr>
+          <a:lstStyle/>
+          <a:p>
+            <a:pPr algn="ctr"/>
+            <a:r>
+              <a:rPr sz="1400" b="0" i="0">
+                <a:solidFill>
+                  <a:srgbClr val="9AA3AB"/>
+                </a:solidFill>
+              </a:rPr>
+              <a:t>The answers, and more questions, are on the course site.</a:t>
+            </a:r>
+          </a:p>
+        </p:txBody>
+      </p:sp>
+    </p:spTree>
+  </p:cSld>
+  <p:clrMapOvr>
+    <a:masterClrMapping/>
+  </p:clrMapOvr>
+</p:sld>
+</file>
+
+<file path=ppt/slides/slide26.xml><?xml version="1.0" encoding="utf-8"?>
 <p:sld xmlns:a="http://schemas.openxmlformats.org/drawingml/2006/main" xmlns:r="http://schemas.openxmlformats.org/officeDocument/2006/relationships" xmlns:mc="http://schemas.openxmlformats.org/markup-compatibility/2006" xmlns:mv="urn:schemas-microsoft-com:mac:vml" xmlns:p="http://schemas.openxmlformats.org/presentationml/2006/main" xmlns:c="http://schemas.openxmlformats.org/drawingml/2006/chart" xmlns:dgm="http://schemas.openxmlformats.org/drawingml/2006/diagram" xmlns:o="urn:schemas-microsoft-com:office:office" xmlns:v="urn:schemas-microsoft-com:vml" xmlns:pvml="urn:schemas-microsoft-com:office:powerpoint" xmlns:com="http://schemas.openxmlformats.org/drawingml/2006/compatibility" xmlns:p14="http://schemas.microsoft.com/office/powerpoint/2010/main" xmlns:p15="http://schemas.microsoft.com/office/powerpoint/2012/main" xmlns:ahyp="http://schemas.microsoft.com/office/drawing/2018/hyperlinkcolor">
   <p:cSld>
     <p:spTree>
@@ -14469,7 +15313,7 @@
 </p:sld>
 </file>
 
-<file path=ppt/slides/slide26.xml><?xml version="1.0" encoding="utf-8"?>
+<file path=ppt/slides/slide27.xml><?xml version="1.0" encoding="utf-8"?>
 <p:sld xmlns:a="http://schemas.openxmlformats.org/drawingml/2006/main" xmlns:r="http://schemas.openxmlformats.org/officeDocument/2006/relationships" xmlns:mc="http://schemas.openxmlformats.org/markup-compatibility/2006" xmlns:mv="urn:schemas-microsoft-com:mac:vml" xmlns:p="http://schemas.openxmlformats.org/presentationml/2006/main" xmlns:c="http://schemas.openxmlformats.org/drawingml/2006/chart" xmlns:dgm="http://schemas.openxmlformats.org/drawingml/2006/diagram" xmlns:o="urn:schemas-microsoft-com:office:office" xmlns:v="urn:schemas-microsoft-com:vml" xmlns:pvml="urn:schemas-microsoft-com:office:powerpoint" xmlns:com="http://schemas.openxmlformats.org/drawingml/2006/compatibility" xmlns:p14="http://schemas.microsoft.com/office/powerpoint/2010/main" xmlns:p15="http://schemas.microsoft.com/office/powerpoint/2012/main" xmlns:ahyp="http://schemas.microsoft.com/office/drawing/2018/hyperlinkcolor">
   <p:cSld>
     <p:spTree>
@@ -14632,179 +15476,6 @@
               <a:t>Would they be clearer as states?</a:t>
             </a:r>
             <a:endParaRPr/>
-          </a:p>
-        </p:txBody>
-      </p:sp>
-    </p:spTree>
-  </p:cSld>
-  <p:clrMapOvr>
-    <a:masterClrMapping/>
-  </p:clrMapOvr>
-</p:sld>
-</file>
-
-<file path=ppt/slides/slide27.xml><?xml version="1.0" encoding="utf-8"?>
-<p:sld xmlns:a="http://schemas.openxmlformats.org/drawingml/2006/main" xmlns:p="http://schemas.openxmlformats.org/presentationml/2006/main" xmlns:r="http://schemas.openxmlformats.org/officeDocument/2006/relationships">
-  <p:cSld>
-    <p:spTree>
-      <p:nvGrpSpPr>
-        <p:cNvPr id="1" name=""/>
-        <p:cNvGrpSpPr/>
-        <p:nvPr/>
-      </p:nvGrpSpPr>
-      <p:grpSpPr/>
-      <p:sp>
-        <p:nvSpPr>
-          <p:cNvPr id="2" name="Title 1"/>
-          <p:cNvSpPr>
-            <a:spLocks noGrp="1"/>
-          </p:cNvSpPr>
-          <p:nvPr>
-            <p:ph type="title"/>
-          </p:nvPr>
-        </p:nvSpPr>
-        <p:spPr/>
-        <p:txBody>
-          <a:bodyPr/>
-          <a:lstStyle/>
-          <a:p>
-            <a:pPr indent="0" lvl="0" marL="0" rtl="0" algn="l">
-              <a:spcBef>
-                <a:spcPts val="0"/>
-              </a:spcBef>
-              <a:spcAft>
-                <a:spcPts val="0"/>
-              </a:spcAft>
-              <a:buNone/>
-            </a:pPr>
-            <a:r>
-              <a:rPr lang="en"/>
-              <a:t>Check Yourself</a:t>
-            </a:r>
-            <a:endParaRPr/>
-          </a:p>
-        </p:txBody>
-      </p:sp>
-      <p:sp>
-        <p:nvSpPr>
-          <p:cNvPr id="3" name="Text Placeholder 2"/>
-          <p:cNvSpPr>
-            <a:spLocks noGrp="1"/>
-          </p:cNvSpPr>
-          <p:nvPr>
-            <p:ph type="body" idx="1"/>
-          </p:nvPr>
-        </p:nvSpPr>
-        <p:spPr>
-          <a:xfrm>
-            <a:off x="311700" y="885950"/>
-            <a:ext cx="8520600" cy="1719072"/>
-          </a:xfrm>
-        </p:spPr>
-        <p:txBody>
-          <a:bodyPr/>
-          <a:lstStyle/>
-          <a:p>
-            <a:pPr indent="-330200" lvl="0" marL="457200" rtl="0" algn="l">
-              <a:spcBef>
-                <a:spcPts val="0"/>
-              </a:spcBef>
-              <a:spcAft>
-                <a:spcPts val="0"/>
-              </a:spcAft>
-              <a:buSzPts val="1600"/>
-              <a:buChar char="●"/>
-            </a:pPr>
-            <a:r>
-              <a:rPr lang="en"/>
-              <a:t>What problems does the enum version of the ghost have?</a:t>
-            </a:r>
-            <a:endParaRPr/>
-          </a:p>
-          <a:p>
-            <a:pPr indent="-330200" lvl="0" marL="457200" rtl="0" algn="l">
-              <a:spcBef>
-                <a:spcPts val="0"/>
-              </a:spcBef>
-              <a:spcAft>
-                <a:spcPts val="0"/>
-              </a:spcAft>
-              <a:buSzPts val="1600"/>
-              <a:buChar char="●"/>
-            </a:pPr>
-            <a:r>
-              <a:rPr lang="en"/>
-              <a:t>In the State pattern, who decides when to change state?</a:t>
-            </a:r>
-            <a:endParaRPr/>
-          </a:p>
-          <a:p>
-            <a:pPr indent="-330200" lvl="0" marL="457200" rtl="0" algn="l">
-              <a:spcBef>
-                <a:spcPts val="0"/>
-              </a:spcBef>
-              <a:spcAft>
-                <a:spcPts val="0"/>
-              </a:spcAft>
-              <a:buSzPts val="1600"/>
-              <a:buChar char="●"/>
-            </a:pPr>
-            <a:r>
-              <a:rPr lang="en"/>
-              <a:t>What are Enter and Exit for?</a:t>
-            </a:r>
-            <a:endParaRPr/>
-          </a:p>
-          <a:p>
-            <a:pPr indent="-330200" lvl="0" marL="457200" rtl="0" algn="l">
-              <a:spcBef>
-                <a:spcPts val="0"/>
-              </a:spcBef>
-              <a:spcAft>
-                <a:spcPts val="0"/>
-              </a:spcAft>
-              <a:buSzPts val="1600"/>
-              <a:buChar char="●"/>
-            </a:pPr>
-            <a:r>
-              <a:rPr lang="en"/>
-              <a:t>State and Strategy have the same structure. How do they differ?</a:t>
-            </a:r>
-            <a:endParaRPr/>
-          </a:p>
-        </p:txBody>
-      </p:sp>
-      <p:sp>
-        <p:nvSpPr>
-          <p:cNvPr id="4" name="TextBox 3"/>
-          <p:cNvSpPr txBox="1"/>
-          <p:nvPr/>
-        </p:nvSpPr>
-        <p:spPr>
-          <a:xfrm>
-            <a:off x="457200" y="3182112"/>
-            <a:ext cx="8229600" cy="457200"/>
-          </a:xfrm>
-          <a:prstGeom prst="rect">
-            <a:avLst/>
-          </a:prstGeom>
-          <a:noFill/>
-        </p:spPr>
-        <p:txBody>
-          <a:bodyPr wrap="square">
-            <a:spAutoFit/>
-          </a:bodyPr>
-          <a:lstStyle/>
-          <a:p>
-            <a:pPr algn="ctr"/>
-            <a:r>
-              <a:rPr sz="1400" b="0" i="0">
-                <a:solidFill>
-                  <a:srgbClr val="9AA3AB"/>
-                </a:solidFill>
-              </a:rPr>
-              <a:t>The answers, and more questions, are on the course site.</a:t>
-            </a:r>
           </a:p>
         </p:txBody>
       </p:sp>

--- a/slides/05 Pac-Man.pptx
+++ b/slides/05 Pac-Man.pptx
@@ -2285,6 +2285,11 @@
           <a:p>
             <a:r>
               <a:t>Start from Pacman4. For the new mode, ask them to compare the classes they changed with Pacman1’s enum. Test first for the new ghost.</a:t>
+            </a:r>
+          </a:p>
+          <a:p>
+            <a:r>
+              <a:t>The fifth ghost (green) and a cherry are drawn in sprites.png but not in the XML: describing them is part of the exercise.</a:t>
             </a:r>
           </a:p>
         </p:txBody>

--- a/slides/05 Pac-Man.pptx
+++ b/slides/05 Pac-Man.pptx
@@ -2106,7 +2106,7 @@
           </a:p>
           <a:p>
             <a:r>
-              <a:t>Ask two groups to share one answer each. Push for concrete classes and files, not intentions.</a:t>
+              <a:t>Ask two groups to share one answer each, and push them to name actual classes and files.</a:t>
             </a:r>
           </a:p>
         </p:txBody>
@@ -10822,7 +10822,7 @@
             </a:pPr>
             <a:r>
               <a:rPr lang="en"/>
-              <a:t>The same structure: hold an interface, forward to it. Different jobs.</a:t>
+              <a:t>The same structure (hold an interface, forward to it), used for different jobs.</a:t>
             </a:r>
             <a:endParaRPr/>
           </a:p>
@@ -16067,7 +16067,7 @@
             </a:pPr>
             <a:r>
               <a:rPr lang="en"/>
-              <a:t>Its README: the steps (Pacman0 to Pacman4, and Pacman.Tests), a map of the code, how to run it</a:t>
+              <a:t>Its README: the steps (Pacman0 to Pacman4, and Pacman.Tests), where things are in the code, how to run it</a:t>
             </a:r>
             <a:endParaRPr/>
           </a:p>

--- a/slides/05 Pac-Man.pptx
+++ b/slides/05 Pac-Man.pptx
@@ -9,6 +9,7 @@
   </p:notesMasterIdLst>
   <p:sldIdLst>
     <p:sldId id="256" r:id="rId6"/>
+    <p:sldId id="315" r:id="rId40"/>
     <p:sldId id="257" r:id="rId7"/>
     <p:sldId id="258" r:id="rId8"/>
     <p:sldId id="259" r:id="rId9"/>
@@ -2107,6 +2108,69 @@
           <a:p>
             <a:r>
               <a:t>Ask two groups to share one answer each, and push them to name actual classes and files.</a:t>
+            </a:r>
+          </a:p>
+        </p:txBody>
+      </p:sp>
+    </p:spTree>
+  </p:cSld>
+  <p:clrMapOvr>
+    <a:masterClrMapping/>
+  </p:clrMapOvr>
+</p:notes>
+</file>
+
+<file path=ppt/notesSlides/notesSlide28.xml><?xml version="1.0" encoding="utf-8"?>
+<p:notes xmlns:a="http://schemas.openxmlformats.org/drawingml/2006/main" xmlns:p="http://schemas.openxmlformats.org/presentationml/2006/main" xmlns:r="http://schemas.openxmlformats.org/officeDocument/2006/relationships">
+  <p:cSld>
+    <p:spTree>
+      <p:nvGrpSpPr>
+        <p:cNvPr id="1" name=""/>
+        <p:cNvGrpSpPr/>
+        <p:nvPr/>
+      </p:nvGrpSpPr>
+      <p:grpSpPr>
+        <a:xfrm>
+          <a:off x="0" y="0"/>
+          <a:ext cx="0" cy="0"/>
+          <a:chOff x="0" y="0"/>
+          <a:chExt cx="0" cy="0"/>
+        </a:xfrm>
+      </p:grpSpPr>
+      <p:sp>
+        <p:nvSpPr>
+          <p:cNvPr id="2" name="Slide Image Placeholder 1"/>
+          <p:cNvSpPr>
+            <a:spLocks noGrp="1"/>
+          </p:cNvSpPr>
+          <p:nvPr>
+            <p:ph type="sldImg" idx="2"/>
+          </p:nvPr>
+        </p:nvSpPr>
+        <p:spPr/>
+      </p:sp>
+      <p:sp>
+        <p:nvSpPr>
+          <p:cNvPr id="3" name="Notes Placeholder 2"/>
+          <p:cNvSpPr>
+            <a:spLocks noGrp="1"/>
+          </p:cNvSpPr>
+          <p:nvPr>
+            <p:ph type="body" idx="1"/>
+          </p:nvPr>
+        </p:nvSpPr>
+        <p:spPr/>
+        <p:txBody>
+          <a:bodyPr/>
+          <a:lstStyle/>
+          <a:p>
+            <a:r>
+              <a:t>The original: Pac-Man. Ask who has played it, and what they remember of how it plays.</a:t>
+            </a:r>
+          </a:p>
+          <a:p>
+            <a:r>
+              <a:t>Today we build the parts that matter for the architecture, not the whole game.</a:t>
             </a:r>
           </a:p>
         </p:txBody>
@@ -6316,6 +6380,906 @@
       <p:grpSpPr/>
       <p:sp>
         <p:nvSpPr>
+          <p:cNvPr id="140" name="Google Shape;140;p23"/>
+          <p:cNvSpPr txBox="1"/>
+          <p:nvPr>
+            <p:ph type="title"/>
+          </p:nvPr>
+        </p:nvSpPr>
+        <p:spPr>
+          <a:xfrm>
+            <a:off x="311700" y="195615"/>
+            <a:ext cx="8520600" cy="572700"/>
+          </a:xfrm>
+          <a:prstGeom prst="rect">
+            <a:avLst/>
+          </a:prstGeom>
+        </p:spPr>
+        <p:txBody>
+          <a:bodyPr anchorCtr="0" anchor="t" bIns="91425" lIns="91425" spcFirstLastPara="1" rIns="91425" wrap="square" tIns="91425">
+            <a:normAutofit fontScale="90000"/>
+          </a:bodyPr>
+          <a:lstStyle/>
+          <a:p>
+            <a:pPr indent="0" lvl="0" marL="0" rtl="0" algn="l">
+              <a:spcBef>
+                <a:spcPts val="0"/>
+              </a:spcBef>
+              <a:spcAft>
+                <a:spcPts val="0"/>
+              </a:spcAft>
+              <a:buNone/>
+            </a:pPr>
+            <a:r>
+              <a:rPr lang="en"/>
+              <a:t>Ghosts With an Enum</a:t>
+            </a:r>
+            <a:endParaRPr/>
+          </a:p>
+        </p:txBody>
+      </p:sp>
+      <p:sp>
+        <p:nvSpPr>
+          <p:cNvPr id="293" name="Google Shape;293;p45"/>
+          <p:cNvSpPr txBox="1"/>
+          <p:nvPr>
+            <p:ph type="title"/>
+          </p:nvPr>
+        </p:nvSpPr>
+        <p:spPr>
+          <a:xfrm>
+            <a:off x="311700" y="1152475"/>
+            <a:ext cx="3700000" cy="3500000"/>
+          </a:xfrm>
+          <a:prstGeom prst="rect">
+            <a:avLst/>
+          </a:prstGeom>
+        </p:spPr>
+        <p:txBody>
+          <a:bodyPr anchorCtr="0" anchor="t" bIns="91425" lIns="91425" spcFirstLastPara="1" rIns="91425" wrap="square" tIns="91425">
+            <a:normAutofit fontScale="90000"/>
+          </a:bodyPr>
+          <a:lstStyle/>
+          <a:p>
+            <a:pPr indent="-330200" lvl="0" marL="457200" rtl="0" algn="l">
+              <a:buClr>
+                <a:srgbClr val="DEE2E6"/>
+              </a:buClr>
+              <a:spcBef>
+                <a:spcPts val="0"/>
+              </a:spcBef>
+              <a:spcAft>
+                <a:spcPts val="0"/>
+              </a:spcAft>
+              <a:buSzPts val="1600"/>
+              <a:buChar char="●"/>
+            </a:pPr>
+            <a:r>
+              <a:rPr lang="en" sz="1600">
+                <a:solidFill>
+                  <a:srgbClr val="DEE2E6"/>
+                </a:solidFill>
+              </a:rPr>
+              <a:t>GhostMode: InHouse, Scatter, Chase, Frightened, Eaten</a:t>
+            </a:r>
+            <a:endParaRPr/>
+          </a:p>
+          <a:p>
+            <a:pPr indent="-330200" lvl="0" marL="457200" rtl="0" algn="l">
+              <a:buClr>
+                <a:srgbClr val="DEE2E6"/>
+              </a:buClr>
+              <a:spcBef>
+                <a:spcPts val="0"/>
+              </a:spcBef>
+              <a:spcAft>
+                <a:spcPts val="0"/>
+              </a:spcAft>
+              <a:buSzPts val="1600"/>
+              <a:buChar char="●"/>
+            </a:pPr>
+            <a:r>
+              <a:rPr lang="en" sz="1600">
+                <a:solidFill>
+                  <a:srgbClr val="DEE2E6"/>
+                </a:solidFill>
+              </a:rPr>
+              <a:t>Every method switches over the mode</a:t>
+            </a:r>
+            <a:endParaRPr/>
+          </a:p>
+          <a:p>
+            <a:pPr indent="-317500" lvl="1" marL="914400" rtl="0" algn="l">
+              <a:buClr>
+                <a:srgbClr val="6C757D"/>
+              </a:buClr>
+              <a:spcBef>
+                <a:spcPts val="0"/>
+              </a:spcBef>
+              <a:spcAft>
+                <a:spcPts val="0"/>
+              </a:spcAft>
+              <a:buSzPts val="1400"/>
+              <a:buChar char="○"/>
+            </a:pPr>
+            <a:r>
+              <a:rPr lang="en" sz="1400">
+                <a:solidFill>
+                  <a:srgbClr val="6C757D"/>
+                </a:solidFill>
+              </a:rPr>
+              <a:t>Update, ChooseDirection, OnPowerPellet, Touch, Look, SetMode</a:t>
+            </a:r>
+            <a:endParaRPr/>
+          </a:p>
+        </p:txBody>
+      </p:sp>
+      <p:sp>
+        <p:nvSpPr>
+          <p:cNvPr id="141" name="Google Shape;141;p23"/>
+          <p:cNvSpPr txBox="1"/>
+          <p:nvPr>
+            <p:ph idx="2" type="body"/>
+          </p:nvPr>
+        </p:nvSpPr>
+        <p:spPr>
+          <a:xfrm>
+            <a:off x="4150000" y="1152475"/>
+            <a:ext cx="4750000" cy="3600000"/>
+          </a:xfrm>
+          <a:prstGeom prst="rect">
+            <a:avLst/>
+          </a:prstGeom>
+        </p:spPr>
+        <p:txBody>
+          <a:bodyPr anchorCtr="0" anchor="t" bIns="91425" lIns="91425" spcFirstLastPara="1" rIns="91425" wrap="square" tIns="91425">
+            <a:noAutofit/>
+          </a:bodyPr>
+          <a:lstStyle/>
+          <a:p>
+            <a:pPr indent="0" lvl="0" marL="0" rtl="0" algn="l">
+              <a:lnSpc>
+                <a:spcPct val="115000"/>
+              </a:lnSpc>
+              <a:spcBef>
+                <a:spcPts val="0"/>
+              </a:spcBef>
+              <a:spcAft>
+                <a:spcPts val="0"/>
+              </a:spcAft>
+              <a:buNone/>
+            </a:pPr>
+            <a:r>
+              <a:rPr lang="en" sz="1000">
+                <a:highlight>
+                  <a:schemeClr val="dk2"/>
+                </a:highlight>
+                <a:latin typeface="Consolas"/>
+                <a:ea typeface="Consolas"/>
+                <a:cs typeface="Consolas"/>
+                <a:sym typeface="Consolas"/>
+              </a:rPr>
+              <a:t>public void Update(float deltaSeconds)</a:t>
+            </a:r>
+            <a:endParaRPr sz="1000">
+              <a:solidFill>
+                <a:srgbClr val="CCCCCC"/>
+              </a:solidFill>
+              <a:highlight>
+                <a:schemeClr val="dk2"/>
+              </a:highlight>
+              <a:latin typeface="Consolas"/>
+              <a:ea typeface="Consolas"/>
+              <a:cs typeface="Consolas"/>
+              <a:sym typeface="Consolas"/>
+            </a:endParaRPr>
+          </a:p>
+          <a:p>
+            <a:pPr indent="0" lvl="0" marL="0" rtl="0" algn="l">
+              <a:lnSpc>
+                <a:spcPct val="115000"/>
+              </a:lnSpc>
+              <a:spcBef>
+                <a:spcPts val="0"/>
+              </a:spcBef>
+              <a:spcAft>
+                <a:spcPts val="0"/>
+              </a:spcAft>
+              <a:buNone/>
+            </a:pPr>
+            <a:r>
+              <a:rPr lang="en" sz="1000">
+                <a:highlight>
+                  <a:schemeClr val="dk2"/>
+                </a:highlight>
+                <a:latin typeface="Consolas"/>
+                <a:ea typeface="Consolas"/>
+                <a:cs typeface="Consolas"/>
+                <a:sym typeface="Consolas"/>
+              </a:rPr>
+              <a:t>{</a:t>
+            </a:r>
+            <a:endParaRPr sz="1000">
+              <a:solidFill>
+                <a:srgbClr val="CCCCCC"/>
+              </a:solidFill>
+              <a:highlight>
+                <a:schemeClr val="dk2"/>
+              </a:highlight>
+              <a:latin typeface="Consolas"/>
+              <a:ea typeface="Consolas"/>
+              <a:cs typeface="Consolas"/>
+              <a:sym typeface="Consolas"/>
+            </a:endParaRPr>
+          </a:p>
+          <a:p>
+            <a:pPr indent="0" lvl="0" marL="0" rtl="0" algn="l">
+              <a:lnSpc>
+                <a:spcPct val="115000"/>
+              </a:lnSpc>
+              <a:spcBef>
+                <a:spcPts val="0"/>
+              </a:spcBef>
+              <a:spcAft>
+                <a:spcPts val="0"/>
+              </a:spcAft>
+              <a:buNone/>
+            </a:pPr>
+            <a:r>
+              <a:rPr lang="en" sz="1000">
+                <a:highlight>
+                  <a:schemeClr val="dk2"/>
+                </a:highlight>
+                <a:latin typeface="Consolas"/>
+                <a:ea typeface="Consolas"/>
+                <a:cs typeface="Consolas"/>
+                <a:sym typeface="Consolas"/>
+              </a:rPr>
+              <a:t>    switch (Mode)</a:t>
+            </a:r>
+            <a:endParaRPr sz="1000">
+              <a:solidFill>
+                <a:srgbClr val="CCCCCC"/>
+              </a:solidFill>
+              <a:highlight>
+                <a:schemeClr val="dk2"/>
+              </a:highlight>
+              <a:latin typeface="Consolas"/>
+              <a:ea typeface="Consolas"/>
+              <a:cs typeface="Consolas"/>
+              <a:sym typeface="Consolas"/>
+            </a:endParaRPr>
+          </a:p>
+          <a:p>
+            <a:pPr indent="0" lvl="0" marL="0" rtl="0" algn="l">
+              <a:lnSpc>
+                <a:spcPct val="115000"/>
+              </a:lnSpc>
+              <a:spcBef>
+                <a:spcPts val="0"/>
+              </a:spcBef>
+              <a:spcAft>
+                <a:spcPts val="0"/>
+              </a:spcAft>
+              <a:buNone/>
+            </a:pPr>
+            <a:r>
+              <a:rPr lang="en" sz="1000">
+                <a:highlight>
+                  <a:schemeClr val="dk2"/>
+                </a:highlight>
+                <a:latin typeface="Consolas"/>
+                <a:ea typeface="Consolas"/>
+                <a:cs typeface="Consolas"/>
+                <a:sym typeface="Consolas"/>
+              </a:rPr>
+              <a:t>    {</a:t>
+            </a:r>
+            <a:endParaRPr sz="1000">
+              <a:solidFill>
+                <a:srgbClr val="CCCCCC"/>
+              </a:solidFill>
+              <a:highlight>
+                <a:schemeClr val="dk2"/>
+              </a:highlight>
+              <a:latin typeface="Consolas"/>
+              <a:ea typeface="Consolas"/>
+              <a:cs typeface="Consolas"/>
+              <a:sym typeface="Consolas"/>
+            </a:endParaRPr>
+          </a:p>
+          <a:p>
+            <a:pPr indent="0" lvl="0" marL="0" rtl="0" algn="l">
+              <a:lnSpc>
+                <a:spcPct val="115000"/>
+              </a:lnSpc>
+              <a:spcBef>
+                <a:spcPts val="0"/>
+              </a:spcBef>
+              <a:spcAft>
+                <a:spcPts val="0"/>
+              </a:spcAft>
+              <a:buNone/>
+            </a:pPr>
+            <a:r>
+              <a:rPr lang="en" sz="1000">
+                <a:highlight>
+                  <a:schemeClr val="dk2"/>
+                </a:highlight>
+                <a:latin typeface="Consolas"/>
+                <a:ea typeface="Consolas"/>
+                <a:cs typeface="Consolas"/>
+                <a:sym typeface="Consolas"/>
+              </a:rPr>
+              <a:t>        case GhostMode.InHouse:</a:t>
+            </a:r>
+            <a:endParaRPr sz="1000">
+              <a:solidFill>
+                <a:srgbClr val="CCCCCC"/>
+              </a:solidFill>
+              <a:highlight>
+                <a:schemeClr val="dk2"/>
+              </a:highlight>
+              <a:latin typeface="Consolas"/>
+              <a:ea typeface="Consolas"/>
+              <a:cs typeface="Consolas"/>
+              <a:sym typeface="Consolas"/>
+            </a:endParaRPr>
+          </a:p>
+          <a:p>
+            <a:pPr indent="0" lvl="0" marL="0" rtl="0" algn="l">
+              <a:lnSpc>
+                <a:spcPct val="115000"/>
+              </a:lnSpc>
+              <a:spcBef>
+                <a:spcPts val="0"/>
+              </a:spcBef>
+              <a:spcAft>
+                <a:spcPts val="0"/>
+              </a:spcAft>
+              <a:buNone/>
+            </a:pPr>
+            <a:r>
+              <a:rPr lang="en" sz="1000">
+                <a:highlight>
+                  <a:schemeClr val="dk2"/>
+                </a:highlight>
+                <a:latin typeface="Consolas"/>
+                <a:ea typeface="Consolas"/>
+                <a:cs typeface="Consolas"/>
+                <a:sym typeface="Consolas"/>
+              </a:rPr>
+              <a:t>            _houseTimer += deltaSeconds;</a:t>
+            </a:r>
+            <a:endParaRPr sz="1000">
+              <a:solidFill>
+                <a:srgbClr val="CCCCCC"/>
+              </a:solidFill>
+              <a:highlight>
+                <a:schemeClr val="dk2"/>
+              </a:highlight>
+              <a:latin typeface="Consolas"/>
+              <a:ea typeface="Consolas"/>
+              <a:cs typeface="Consolas"/>
+              <a:sym typeface="Consolas"/>
+            </a:endParaRPr>
+          </a:p>
+          <a:p>
+            <a:pPr indent="0" lvl="0" marL="0" rtl="0" algn="l">
+              <a:lnSpc>
+                <a:spcPct val="115000"/>
+              </a:lnSpc>
+              <a:spcBef>
+                <a:spcPts val="0"/>
+              </a:spcBef>
+              <a:spcAft>
+                <a:spcPts val="0"/>
+              </a:spcAft>
+              <a:buNone/>
+            </a:pPr>
+            <a:r>
+              <a:rPr lang="en" sz="1000">
+                <a:highlight>
+                  <a:schemeClr val="dk2"/>
+                </a:highlight>
+                <a:latin typeface="Consolas"/>
+                <a:ea typeface="Consolas"/>
+                <a:cs typeface="Consolas"/>
+                <a:sym typeface="Consolas"/>
+              </a:rPr>
+              <a:t>            if (_houseTimer &lt; _releaseDelay)</a:t>
+            </a:r>
+            <a:endParaRPr sz="1000">
+              <a:solidFill>
+                <a:srgbClr val="CCCCCC"/>
+              </a:solidFill>
+              <a:highlight>
+                <a:schemeClr val="dk2"/>
+              </a:highlight>
+              <a:latin typeface="Consolas"/>
+              <a:ea typeface="Consolas"/>
+              <a:cs typeface="Consolas"/>
+              <a:sym typeface="Consolas"/>
+            </a:endParaRPr>
+          </a:p>
+          <a:p>
+            <a:pPr indent="0" lvl="0" marL="0" rtl="0" algn="l">
+              <a:lnSpc>
+                <a:spcPct val="115000"/>
+              </a:lnSpc>
+              <a:spcBef>
+                <a:spcPts val="0"/>
+              </a:spcBef>
+              <a:spcAft>
+                <a:spcPts val="0"/>
+              </a:spcAft>
+              <a:buNone/>
+            </a:pPr>
+            <a:r>
+              <a:rPr lang="en" sz="1000">
+                <a:highlight>
+                  <a:schemeClr val="dk2"/>
+                </a:highlight>
+                <a:latin typeface="Consolas"/>
+                <a:ea typeface="Consolas"/>
+                <a:cs typeface="Consolas"/>
+                <a:sym typeface="Consolas"/>
+              </a:rPr>
+              <a:t>                return;</a:t>
+            </a:r>
+            <a:endParaRPr sz="1000">
+              <a:solidFill>
+                <a:srgbClr val="CCCCCC"/>
+              </a:solidFill>
+              <a:highlight>
+                <a:schemeClr val="dk2"/>
+              </a:highlight>
+              <a:latin typeface="Consolas"/>
+              <a:ea typeface="Consolas"/>
+              <a:cs typeface="Consolas"/>
+              <a:sym typeface="Consolas"/>
+            </a:endParaRPr>
+          </a:p>
+          <a:p>
+            <a:pPr indent="0" lvl="0" marL="0" rtl="0" algn="l">
+              <a:lnSpc>
+                <a:spcPct val="115000"/>
+              </a:lnSpc>
+              <a:spcBef>
+                <a:spcPts val="0"/>
+              </a:spcBef>
+              <a:spcAft>
+                <a:spcPts val="0"/>
+              </a:spcAft>
+              <a:buNone/>
+            </a:pPr>
+            <a:r>
+              <a:rPr lang="en" sz="1000">
+                <a:highlight>
+                  <a:schemeClr val="dk2"/>
+                </a:highlight>
+                <a:latin typeface="Consolas"/>
+                <a:ea typeface="Consolas"/>
+                <a:cs typeface="Consolas"/>
+                <a:sym typeface="Consolas"/>
+              </a:rPr>
+              <a:t>            Move(HouseSpeed * deltaSeconds);</a:t>
+            </a:r>
+            <a:endParaRPr sz="1000">
+              <a:solidFill>
+                <a:srgbClr val="CCCCCC"/>
+              </a:solidFill>
+              <a:highlight>
+                <a:schemeClr val="dk2"/>
+              </a:highlight>
+              <a:latin typeface="Consolas"/>
+              <a:ea typeface="Consolas"/>
+              <a:cs typeface="Consolas"/>
+              <a:sym typeface="Consolas"/>
+            </a:endParaRPr>
+          </a:p>
+          <a:p>
+            <a:pPr indent="0" lvl="0" marL="0" rtl="0" algn="l">
+              <a:lnSpc>
+                <a:spcPct val="115000"/>
+              </a:lnSpc>
+              <a:spcBef>
+                <a:spcPts val="0"/>
+              </a:spcBef>
+              <a:spcAft>
+                <a:spcPts val="0"/>
+              </a:spcAft>
+              <a:buNone/>
+            </a:pPr>
+            <a:r>
+              <a:rPr lang="en" sz="1000">
+                <a:highlight>
+                  <a:schemeClr val="dk2"/>
+                </a:highlight>
+                <a:latin typeface="Consolas"/>
+                <a:ea typeface="Consolas"/>
+                <a:cs typeface="Consolas"/>
+                <a:sym typeface="Consolas"/>
+              </a:rPr>
+              <a:t>            if (!Maze.IsInHouse(Tile))</a:t>
+            </a:r>
+            <a:endParaRPr sz="1000">
+              <a:solidFill>
+                <a:srgbClr val="CCCCCC"/>
+              </a:solidFill>
+              <a:highlight>
+                <a:schemeClr val="dk2"/>
+              </a:highlight>
+              <a:latin typeface="Consolas"/>
+              <a:ea typeface="Consolas"/>
+              <a:cs typeface="Consolas"/>
+              <a:sym typeface="Consolas"/>
+            </a:endParaRPr>
+          </a:p>
+          <a:p>
+            <a:pPr indent="0" lvl="0" marL="0" rtl="0" algn="l">
+              <a:lnSpc>
+                <a:spcPct val="115000"/>
+              </a:lnSpc>
+              <a:spcBef>
+                <a:spcPts val="0"/>
+              </a:spcBef>
+              <a:spcAft>
+                <a:spcPts val="0"/>
+              </a:spcAft>
+              <a:buNone/>
+            </a:pPr>
+            <a:r>
+              <a:rPr lang="en" sz="1000">
+                <a:highlight>
+                  <a:schemeClr val="dk2"/>
+                </a:highlight>
+                <a:latin typeface="Consolas"/>
+                <a:ea typeface="Consolas"/>
+                <a:cs typeface="Consolas"/>
+                <a:sym typeface="Consolas"/>
+              </a:rPr>
+              <a:t>                SetMode(ScheduledMode());</a:t>
+            </a:r>
+            <a:endParaRPr sz="1000">
+              <a:solidFill>
+                <a:srgbClr val="CCCCCC"/>
+              </a:solidFill>
+              <a:highlight>
+                <a:schemeClr val="dk2"/>
+              </a:highlight>
+              <a:latin typeface="Consolas"/>
+              <a:ea typeface="Consolas"/>
+              <a:cs typeface="Consolas"/>
+              <a:sym typeface="Consolas"/>
+            </a:endParaRPr>
+          </a:p>
+          <a:p>
+            <a:pPr indent="0" lvl="0" marL="0" rtl="0" algn="l">
+              <a:lnSpc>
+                <a:spcPct val="115000"/>
+              </a:lnSpc>
+              <a:spcBef>
+                <a:spcPts val="0"/>
+              </a:spcBef>
+              <a:spcAft>
+                <a:spcPts val="0"/>
+              </a:spcAft>
+              <a:buNone/>
+            </a:pPr>
+            <a:r>
+              <a:rPr lang="en" sz="1000">
+                <a:highlight>
+                  <a:schemeClr val="dk2"/>
+                </a:highlight>
+                <a:latin typeface="Consolas"/>
+                <a:ea typeface="Consolas"/>
+                <a:cs typeface="Consolas"/>
+                <a:sym typeface="Consolas"/>
+              </a:rPr>
+              <a:t>            break;</a:t>
+            </a:r>
+            <a:endParaRPr sz="1000">
+              <a:solidFill>
+                <a:srgbClr val="CCCCCC"/>
+              </a:solidFill>
+              <a:highlight>
+                <a:schemeClr val="dk2"/>
+              </a:highlight>
+              <a:latin typeface="Consolas"/>
+              <a:ea typeface="Consolas"/>
+              <a:cs typeface="Consolas"/>
+              <a:sym typeface="Consolas"/>
+            </a:endParaRPr>
+          </a:p>
+          <a:p>
+            <a:pPr indent="0" lvl="0" marL="0" rtl="0" algn="l">
+              <a:lnSpc>
+                <a:spcPct val="115000"/>
+              </a:lnSpc>
+              <a:spcBef>
+                <a:spcPts val="0"/>
+              </a:spcBef>
+              <a:spcAft>
+                <a:spcPts val="0"/>
+              </a:spcAft>
+              <a:buNone/>
+            </a:pPr>
+            <a:r>
+              <a:rPr lang="en" sz="1000">
+                <a:highlight>
+                  <a:schemeClr val="dk2"/>
+                </a:highlight>
+                <a:latin typeface="Consolas"/>
+                <a:ea typeface="Consolas"/>
+                <a:cs typeface="Consolas"/>
+                <a:sym typeface="Consolas"/>
+              </a:rPr>
+              <a:t>        case GhostMode.Scatter:</a:t>
+            </a:r>
+            <a:endParaRPr sz="1000">
+              <a:solidFill>
+                <a:srgbClr val="CCCCCC"/>
+              </a:solidFill>
+              <a:highlight>
+                <a:schemeClr val="dk2"/>
+              </a:highlight>
+              <a:latin typeface="Consolas"/>
+              <a:ea typeface="Consolas"/>
+              <a:cs typeface="Consolas"/>
+              <a:sym typeface="Consolas"/>
+            </a:endParaRPr>
+          </a:p>
+          <a:p>
+            <a:pPr indent="0" lvl="0" marL="0" rtl="0" algn="l">
+              <a:lnSpc>
+                <a:spcPct val="115000"/>
+              </a:lnSpc>
+              <a:spcBef>
+                <a:spcPts val="0"/>
+              </a:spcBef>
+              <a:spcAft>
+                <a:spcPts val="0"/>
+              </a:spcAft>
+              <a:buNone/>
+            </a:pPr>
+            <a:r>
+              <a:rPr lang="en" sz="1000">
+                <a:highlight>
+                  <a:schemeClr val="dk2"/>
+                </a:highlight>
+                <a:latin typeface="Consolas"/>
+                <a:ea typeface="Consolas"/>
+                <a:cs typeface="Consolas"/>
+                <a:sym typeface="Consolas"/>
+              </a:rPr>
+              <a:t>        case GhostMode.Chase:</a:t>
+            </a:r>
+            <a:endParaRPr sz="1000">
+              <a:solidFill>
+                <a:srgbClr val="CCCCCC"/>
+              </a:solidFill>
+              <a:highlight>
+                <a:schemeClr val="dk2"/>
+              </a:highlight>
+              <a:latin typeface="Consolas"/>
+              <a:ea typeface="Consolas"/>
+              <a:cs typeface="Consolas"/>
+              <a:sym typeface="Consolas"/>
+            </a:endParaRPr>
+          </a:p>
+          <a:p>
+            <a:pPr indent="0" lvl="0" marL="0" rtl="0" algn="l">
+              <a:lnSpc>
+                <a:spcPct val="115000"/>
+              </a:lnSpc>
+              <a:spcBef>
+                <a:spcPts val="0"/>
+              </a:spcBef>
+              <a:spcAft>
+                <a:spcPts val="0"/>
+              </a:spcAft>
+              <a:buNone/>
+            </a:pPr>
+            <a:r>
+              <a:rPr lang="en" sz="1000">
+                <a:highlight>
+                  <a:schemeClr val="dk2"/>
+                </a:highlight>
+                <a:latin typeface="Consolas"/>
+                <a:ea typeface="Consolas"/>
+                <a:cs typeface="Consolas"/>
+                <a:sym typeface="Consolas"/>
+              </a:rPr>
+              <a:t>            Move(Speed * deltaSeconds);</a:t>
+            </a:r>
+            <a:endParaRPr sz="1000">
+              <a:solidFill>
+                <a:srgbClr val="CCCCCC"/>
+              </a:solidFill>
+              <a:highlight>
+                <a:schemeClr val="dk2"/>
+              </a:highlight>
+              <a:latin typeface="Consolas"/>
+              <a:ea typeface="Consolas"/>
+              <a:cs typeface="Consolas"/>
+              <a:sym typeface="Consolas"/>
+            </a:endParaRPr>
+          </a:p>
+          <a:p>
+            <a:pPr indent="0" lvl="0" marL="0" rtl="0" algn="l">
+              <a:lnSpc>
+                <a:spcPct val="115000"/>
+              </a:lnSpc>
+              <a:spcBef>
+                <a:spcPts val="0"/>
+              </a:spcBef>
+              <a:spcAft>
+                <a:spcPts val="0"/>
+              </a:spcAft>
+              <a:buNone/>
+            </a:pPr>
+            <a:r>
+              <a:rPr lang="en" sz="1000">
+                <a:highlight>
+                  <a:schemeClr val="dk2"/>
+                </a:highlight>
+                <a:latin typeface="Consolas"/>
+                <a:ea typeface="Consolas"/>
+                <a:cs typeface="Consolas"/>
+                <a:sym typeface="Consolas"/>
+              </a:rPr>
+              <a:t>            break;</a:t>
+            </a:r>
+            <a:endParaRPr sz="1000">
+              <a:solidFill>
+                <a:srgbClr val="CCCCCC"/>
+              </a:solidFill>
+              <a:highlight>
+                <a:schemeClr val="dk2"/>
+              </a:highlight>
+              <a:latin typeface="Consolas"/>
+              <a:ea typeface="Consolas"/>
+              <a:cs typeface="Consolas"/>
+              <a:sym typeface="Consolas"/>
+            </a:endParaRPr>
+          </a:p>
+          <a:p>
+            <a:pPr indent="0" lvl="0" marL="0" rtl="0" algn="l">
+              <a:lnSpc>
+                <a:spcPct val="115000"/>
+              </a:lnSpc>
+              <a:spcBef>
+                <a:spcPts val="0"/>
+              </a:spcBef>
+              <a:spcAft>
+                <a:spcPts val="0"/>
+              </a:spcAft>
+              <a:buNone/>
+            </a:pPr>
+            <a:r>
+              <a:rPr lang="en" sz="1000">
+                <a:highlight>
+                  <a:schemeClr val="dk2"/>
+                </a:highlight>
+                <a:latin typeface="Consolas"/>
+                <a:ea typeface="Consolas"/>
+                <a:cs typeface="Consolas"/>
+                <a:sym typeface="Consolas"/>
+              </a:rPr>
+              <a:t>        // Frightened, Eaten…</a:t>
+            </a:r>
+            <a:endParaRPr sz="1000">
+              <a:solidFill>
+                <a:srgbClr val="CCCCCC"/>
+              </a:solidFill>
+              <a:highlight>
+                <a:schemeClr val="dk2"/>
+              </a:highlight>
+              <a:latin typeface="Consolas"/>
+              <a:ea typeface="Consolas"/>
+              <a:cs typeface="Consolas"/>
+              <a:sym typeface="Consolas"/>
+            </a:endParaRPr>
+          </a:p>
+          <a:p>
+            <a:pPr indent="0" lvl="0" marL="0" rtl="0" algn="l">
+              <a:lnSpc>
+                <a:spcPct val="115000"/>
+              </a:lnSpc>
+              <a:spcBef>
+                <a:spcPts val="0"/>
+              </a:spcBef>
+              <a:spcAft>
+                <a:spcPts val="0"/>
+              </a:spcAft>
+              <a:buNone/>
+            </a:pPr>
+            <a:r>
+              <a:rPr lang="en" sz="1000">
+                <a:highlight>
+                  <a:schemeClr val="dk2"/>
+                </a:highlight>
+                <a:latin typeface="Consolas"/>
+                <a:ea typeface="Consolas"/>
+                <a:cs typeface="Consolas"/>
+                <a:sym typeface="Consolas"/>
+              </a:rPr>
+              <a:t>    }</a:t>
+            </a:r>
+            <a:endParaRPr sz="1000">
+              <a:solidFill>
+                <a:srgbClr val="CCCCCC"/>
+              </a:solidFill>
+              <a:highlight>
+                <a:schemeClr val="dk2"/>
+              </a:highlight>
+              <a:latin typeface="Consolas"/>
+              <a:ea typeface="Consolas"/>
+              <a:cs typeface="Consolas"/>
+              <a:sym typeface="Consolas"/>
+            </a:endParaRPr>
+          </a:p>
+          <a:p>
+            <a:pPr indent="0" lvl="0" marL="0" rtl="0" algn="l">
+              <a:lnSpc>
+                <a:spcPct val="115000"/>
+              </a:lnSpc>
+              <a:spcBef>
+                <a:spcPts val="0"/>
+              </a:spcBef>
+              <a:spcAft>
+                <a:spcPts val="0"/>
+              </a:spcAft>
+              <a:buNone/>
+            </a:pPr>
+            <a:r>
+              <a:rPr lang="en" sz="1000">
+                <a:highlight>
+                  <a:schemeClr val="dk2"/>
+                </a:highlight>
+                <a:latin typeface="Consolas"/>
+                <a:ea typeface="Consolas"/>
+                <a:cs typeface="Consolas"/>
+                <a:sym typeface="Consolas"/>
+              </a:rPr>
+              <a:t>}</a:t>
+            </a:r>
+            <a:endParaRPr sz="1000">
+              <a:solidFill>
+                <a:srgbClr val="CCCCCC"/>
+              </a:solidFill>
+              <a:highlight>
+                <a:schemeClr val="dk2"/>
+              </a:highlight>
+              <a:latin typeface="Consolas"/>
+              <a:ea typeface="Consolas"/>
+              <a:cs typeface="Consolas"/>
+              <a:sym typeface="Consolas"/>
+            </a:endParaRPr>
+          </a:p>
+        </p:txBody>
+      </p:sp>
+    </p:spTree>
+  </p:cSld>
+  <p:clrMapOvr>
+    <a:masterClrMapping/>
+  </p:clrMapOvr>
+</p:sld>
+</file>
+
+<file path=ppt/slides/slide11.xml><?xml version="1.0" encoding="utf-8"?>
+<p:sld xmlns:a="http://schemas.openxmlformats.org/drawingml/2006/main" xmlns:p="http://schemas.openxmlformats.org/presentationml/2006/main" xmlns:r="http://schemas.openxmlformats.org/officeDocument/2006/relationships">
+  <p:cSld>
+    <p:spTree>
+      <p:nvGrpSpPr>
+        <p:cNvPr id="1" name=""/>
+        <p:cNvGrpSpPr/>
+        <p:nvPr/>
+      </p:nvGrpSpPr>
+      <p:grpSpPr/>
+      <p:sp>
+        <p:nvSpPr>
           <p:cNvPr id="293" name="Google Shape;293;p45"/>
           <p:cNvSpPr txBox="1"/>
           <p:nvPr>
@@ -6869,7 +7833,7 @@
 </p:sld>
 </file>
 
-<file path=ppt/slides/slide11.xml><?xml version="1.0" encoding="utf-8"?>
+<file path=ppt/slides/slide12.xml><?xml version="1.0" encoding="utf-8"?>
 <p:sld xmlns:a="http://schemas.openxmlformats.org/drawingml/2006/main" xmlns:p="http://schemas.openxmlformats.org/presentationml/2006/main" xmlns:r="http://schemas.openxmlformats.org/officeDocument/2006/relationships">
   <p:cSld>
     <p:spTree>
@@ -6985,726 +7949,6 @@
               <a:t>Pacman1: four ghosts, their modes as an enum</a:t>
             </a:r>
             <a:endParaRPr sz="1800"/>
-          </a:p>
-        </p:txBody>
-      </p:sp>
-    </p:spTree>
-  </p:cSld>
-  <p:clrMapOvr>
-    <a:masterClrMapping/>
-  </p:clrMapOvr>
-</p:sld>
-</file>
-
-<file path=ppt/slides/slide12.xml><?xml version="1.0" encoding="utf-8"?>
-<p:sld xmlns:a="http://schemas.openxmlformats.org/drawingml/2006/main" xmlns:p="http://schemas.openxmlformats.org/presentationml/2006/main" xmlns:r="http://schemas.openxmlformats.org/officeDocument/2006/relationships">
-  <p:cSld>
-    <p:spTree>
-      <p:nvGrpSpPr>
-        <p:cNvPr id="1" name=""/>
-        <p:cNvGrpSpPr/>
-        <p:nvPr/>
-      </p:nvGrpSpPr>
-      <p:grpSpPr/>
-      <p:sp>
-        <p:nvSpPr>
-          <p:cNvPr id="140" name="Google Shape;140;p23"/>
-          <p:cNvSpPr txBox="1"/>
-          <p:nvPr>
-            <p:ph type="title"/>
-          </p:nvPr>
-        </p:nvSpPr>
-        <p:spPr>
-          <a:xfrm>
-            <a:off x="311700" y="195615"/>
-            <a:ext cx="8520600" cy="572700"/>
-          </a:xfrm>
-          <a:prstGeom prst="rect">
-            <a:avLst/>
-          </a:prstGeom>
-        </p:spPr>
-        <p:txBody>
-          <a:bodyPr anchorCtr="0" anchor="t" bIns="91425" lIns="91425" spcFirstLastPara="1" rIns="91425" wrap="square" tIns="91425">
-            <a:normAutofit fontScale="90000"/>
-          </a:bodyPr>
-          <a:lstStyle/>
-          <a:p>
-            <a:pPr indent="0" lvl="0" marL="0" rtl="0" algn="l">
-              <a:spcBef>
-                <a:spcPts val="0"/>
-              </a:spcBef>
-              <a:spcAft>
-                <a:spcPts val="0"/>
-              </a:spcAft>
-              <a:buNone/>
-            </a:pPr>
-            <a:r>
-              <a:rPr lang="en"/>
-              <a:t>The State Pattern</a:t>
-            </a:r>
-            <a:endParaRPr/>
-          </a:p>
-        </p:txBody>
-      </p:sp>
-      <p:sp>
-        <p:nvSpPr>
-          <p:cNvPr id="293" name="Google Shape;293;p45"/>
-          <p:cNvSpPr txBox="1"/>
-          <p:nvPr>
-            <p:ph type="title"/>
-          </p:nvPr>
-        </p:nvSpPr>
-        <p:spPr>
-          <a:xfrm>
-            <a:off x="311700" y="1152475"/>
-            <a:ext cx="3700000" cy="3500000"/>
-          </a:xfrm>
-          <a:prstGeom prst="rect">
-            <a:avLst/>
-          </a:prstGeom>
-        </p:spPr>
-        <p:txBody>
-          <a:bodyPr anchorCtr="0" anchor="t" bIns="91425" lIns="91425" spcFirstLastPara="1" rIns="91425" wrap="square" tIns="91425">
-            <a:normAutofit fontScale="90000"/>
-          </a:bodyPr>
-          <a:lstStyle/>
-          <a:p>
-            <a:pPr indent="-330200" lvl="0" marL="457200" rtl="0" algn="l">
-              <a:buClr>
-                <a:srgbClr val="DEE2E6"/>
-              </a:buClr>
-              <a:spcBef>
-                <a:spcPts val="0"/>
-              </a:spcBef>
-              <a:spcAft>
-                <a:spcPts val="0"/>
-              </a:spcAft>
-              <a:buSzPts val="1600"/>
-              <a:buChar char="●"/>
-            </a:pPr>
-            <a:r>
-              <a:rPr lang="en" sz="1600">
-                <a:solidFill>
-                  <a:srgbClr val="DEE2E6"/>
-                </a:solidFill>
-              </a:rPr>
-              <a:t>“Allow an object to alter its behavior when its internal state changes.”</a:t>
-            </a:r>
-            <a:endParaRPr/>
-          </a:p>
-          <a:p>
-            <a:pPr indent="-330200" lvl="0" marL="457200" rtl="0" algn="l">
-              <a:buClr>
-                <a:srgbClr val="DEE2E6"/>
-              </a:buClr>
-              <a:spcBef>
-                <a:spcPts val="0"/>
-              </a:spcBef>
-              <a:spcAft>
-                <a:spcPts val="0"/>
-              </a:spcAft>
-              <a:buSzPts val="1600"/>
-              <a:buChar char="●"/>
-            </a:pPr>
-            <a:r>
-              <a:rPr lang="en" sz="1600">
-                <a:solidFill>
-                  <a:srgbClr val="DEE2E6"/>
-                </a:solidFill>
-              </a:rPr>
-              <a:t>Each mode becomes a class</a:t>
-            </a:r>
-            <a:endParaRPr/>
-          </a:p>
-          <a:p>
-            <a:pPr indent="-317500" lvl="1" marL="914400" rtl="0" algn="l">
-              <a:buClr>
-                <a:srgbClr val="6C757D"/>
-              </a:buClr>
-              <a:spcBef>
-                <a:spcPts val="0"/>
-              </a:spcBef>
-              <a:spcAft>
-                <a:spcPts val="0"/>
-              </a:spcAft>
-              <a:buSzPts val="1400"/>
-              <a:buChar char="○"/>
-            </a:pPr>
-            <a:r>
-              <a:rPr lang="en" sz="1400">
-                <a:solidFill>
-                  <a:srgbClr val="6C757D"/>
-                </a:solidFill>
-              </a:rPr>
-              <a:t>InHouseState, ScatterState, ChaseState, FrightenedState, EatenState</a:t>
-            </a:r>
-            <a:endParaRPr/>
-          </a:p>
-          <a:p>
-            <a:pPr indent="-330200" lvl="0" marL="457200" rtl="0" algn="l">
-              <a:buClr>
-                <a:srgbClr val="DEE2E6"/>
-              </a:buClr>
-              <a:spcBef>
-                <a:spcPts val="0"/>
-              </a:spcBef>
-              <a:spcAft>
-                <a:spcPts val="0"/>
-              </a:spcAft>
-              <a:buSzPts val="1600"/>
-              <a:buChar char="●"/>
-            </a:pPr>
-            <a:r>
-              <a:rPr lang="en" sz="1600">
-                <a:solidFill>
-                  <a:srgbClr val="DEE2E6"/>
-                </a:solidFill>
-              </a:rPr>
-              <a:t>The ghost forwards to its current state</a:t>
-            </a:r>
-            <a:endParaRPr/>
-          </a:p>
-          <a:p>
-            <a:pPr indent="-330200" lvl="0" marL="457200" rtl="0" algn="l">
-              <a:buClr>
-                <a:srgbClr val="DEE2E6"/>
-              </a:buClr>
-              <a:spcBef>
-                <a:spcPts val="0"/>
-              </a:spcBef>
-              <a:spcAft>
-                <a:spcPts val="0"/>
-              </a:spcAft>
-              <a:buSzPts val="1600"/>
-              <a:buChar char="●"/>
-            </a:pPr>
-            <a:r>
-              <a:rPr lang="en" sz="1600">
-                <a:solidFill>
-                  <a:srgbClr val="DEE2E6"/>
-                </a:solidFill>
-              </a:rPr>
-              <a:t>Flappy Bird did this for the game; now for an object in it</a:t>
-            </a:r>
-            <a:endParaRPr/>
-          </a:p>
-        </p:txBody>
-      </p:sp>
-      <p:sp>
-        <p:nvSpPr>
-          <p:cNvPr id="141" name="Google Shape;141;p23"/>
-          <p:cNvSpPr txBox="1"/>
-          <p:nvPr>
-            <p:ph idx="2" type="body"/>
-          </p:nvPr>
-        </p:nvSpPr>
-        <p:spPr>
-          <a:xfrm>
-            <a:off x="4150000" y="1152475"/>
-            <a:ext cx="4750000" cy="3600000"/>
-          </a:xfrm>
-          <a:prstGeom prst="rect">
-            <a:avLst/>
-          </a:prstGeom>
-        </p:spPr>
-        <p:txBody>
-          <a:bodyPr anchorCtr="0" anchor="t" bIns="91425" lIns="91425" spcFirstLastPara="1" rIns="91425" wrap="square" tIns="91425">
-            <a:noAutofit/>
-          </a:bodyPr>
-          <a:lstStyle/>
-          <a:p>
-            <a:pPr indent="0" lvl="0" marL="0" rtl="0" algn="l">
-              <a:lnSpc>
-                <a:spcPct val="115000"/>
-              </a:lnSpc>
-              <a:spcBef>
-                <a:spcPts val="0"/>
-              </a:spcBef>
-              <a:spcAft>
-                <a:spcPts val="0"/>
-              </a:spcAft>
-              <a:buNone/>
-            </a:pPr>
-            <a:r>
-              <a:rPr lang="en" sz="1000">
-                <a:highlight>
-                  <a:schemeClr val="dk2"/>
-                </a:highlight>
-                <a:latin typeface="Consolas"/>
-                <a:ea typeface="Consolas"/>
-                <a:cs typeface="Consolas"/>
-                <a:sym typeface="Consolas"/>
-              </a:rPr>
-              <a:t>public void ChangeState(GhostState state)</a:t>
-            </a:r>
-            <a:endParaRPr sz="1000">
-              <a:solidFill>
-                <a:srgbClr val="CCCCCC"/>
-              </a:solidFill>
-              <a:highlight>
-                <a:schemeClr val="dk2"/>
-              </a:highlight>
-              <a:latin typeface="Consolas"/>
-              <a:ea typeface="Consolas"/>
-              <a:cs typeface="Consolas"/>
-              <a:sym typeface="Consolas"/>
-            </a:endParaRPr>
-          </a:p>
-          <a:p>
-            <a:pPr indent="0" lvl="0" marL="0" rtl="0" algn="l">
-              <a:lnSpc>
-                <a:spcPct val="115000"/>
-              </a:lnSpc>
-              <a:spcBef>
-                <a:spcPts val="0"/>
-              </a:spcBef>
-              <a:spcAft>
-                <a:spcPts val="0"/>
-              </a:spcAft>
-              <a:buNone/>
-            </a:pPr>
-            <a:r>
-              <a:rPr lang="en" sz="1000">
-                <a:highlight>
-                  <a:schemeClr val="dk2"/>
-                </a:highlight>
-                <a:latin typeface="Consolas"/>
-                <a:ea typeface="Consolas"/>
-                <a:cs typeface="Consolas"/>
-                <a:sym typeface="Consolas"/>
-              </a:rPr>
-              <a:t>{</a:t>
-            </a:r>
-            <a:endParaRPr sz="1000">
-              <a:solidFill>
-                <a:srgbClr val="CCCCCC"/>
-              </a:solidFill>
-              <a:highlight>
-                <a:schemeClr val="dk2"/>
-              </a:highlight>
-              <a:latin typeface="Consolas"/>
-              <a:ea typeface="Consolas"/>
-              <a:cs typeface="Consolas"/>
-              <a:sym typeface="Consolas"/>
-            </a:endParaRPr>
-          </a:p>
-          <a:p>
-            <a:pPr indent="0" lvl="0" marL="0" rtl="0" algn="l">
-              <a:lnSpc>
-                <a:spcPct val="115000"/>
-              </a:lnSpc>
-              <a:spcBef>
-                <a:spcPts val="0"/>
-              </a:spcBef>
-              <a:spcAft>
-                <a:spcPts val="0"/>
-              </a:spcAft>
-              <a:buNone/>
-            </a:pPr>
-            <a:r>
-              <a:rPr lang="en" sz="1000">
-                <a:highlight>
-                  <a:schemeClr val="dk2"/>
-                </a:highlight>
-                <a:latin typeface="Consolas"/>
-                <a:ea typeface="Consolas"/>
-                <a:cs typeface="Consolas"/>
-                <a:sym typeface="Consolas"/>
-              </a:rPr>
-              <a:t>    State?.Exit(this);</a:t>
-            </a:r>
-            <a:endParaRPr sz="1000">
-              <a:solidFill>
-                <a:srgbClr val="CCCCCC"/>
-              </a:solidFill>
-              <a:highlight>
-                <a:schemeClr val="dk2"/>
-              </a:highlight>
-              <a:latin typeface="Consolas"/>
-              <a:ea typeface="Consolas"/>
-              <a:cs typeface="Consolas"/>
-              <a:sym typeface="Consolas"/>
-            </a:endParaRPr>
-          </a:p>
-          <a:p>
-            <a:pPr indent="0" lvl="0" marL="0" rtl="0" algn="l">
-              <a:lnSpc>
-                <a:spcPct val="115000"/>
-              </a:lnSpc>
-              <a:spcBef>
-                <a:spcPts val="0"/>
-              </a:spcBef>
-              <a:spcAft>
-                <a:spcPts val="0"/>
-              </a:spcAft>
-              <a:buNone/>
-            </a:pPr>
-            <a:r>
-              <a:rPr lang="en" sz="1000">
-                <a:highlight>
-                  <a:schemeClr val="dk2"/>
-                </a:highlight>
-                <a:latin typeface="Consolas"/>
-                <a:ea typeface="Consolas"/>
-                <a:cs typeface="Consolas"/>
-                <a:sym typeface="Consolas"/>
-              </a:rPr>
-              <a:t>    State = state;</a:t>
-            </a:r>
-            <a:endParaRPr sz="1000">
-              <a:solidFill>
-                <a:srgbClr val="CCCCCC"/>
-              </a:solidFill>
-              <a:highlight>
-                <a:schemeClr val="dk2"/>
-              </a:highlight>
-              <a:latin typeface="Consolas"/>
-              <a:ea typeface="Consolas"/>
-              <a:cs typeface="Consolas"/>
-              <a:sym typeface="Consolas"/>
-            </a:endParaRPr>
-          </a:p>
-          <a:p>
-            <a:pPr indent="0" lvl="0" marL="0" rtl="0" algn="l">
-              <a:lnSpc>
-                <a:spcPct val="115000"/>
-              </a:lnSpc>
-              <a:spcBef>
-                <a:spcPts val="0"/>
-              </a:spcBef>
-              <a:spcAft>
-                <a:spcPts val="0"/>
-              </a:spcAft>
-              <a:buNone/>
-            </a:pPr>
-            <a:r>
-              <a:rPr lang="en" sz="1000">
-                <a:highlight>
-                  <a:schemeClr val="dk2"/>
-                </a:highlight>
-                <a:latin typeface="Consolas"/>
-                <a:ea typeface="Consolas"/>
-                <a:cs typeface="Consolas"/>
-                <a:sym typeface="Consolas"/>
-              </a:rPr>
-              <a:t>    State.Enter(this);</a:t>
-            </a:r>
-            <a:endParaRPr sz="1000">
-              <a:solidFill>
-                <a:srgbClr val="CCCCCC"/>
-              </a:solidFill>
-              <a:highlight>
-                <a:schemeClr val="dk2"/>
-              </a:highlight>
-              <a:latin typeface="Consolas"/>
-              <a:ea typeface="Consolas"/>
-              <a:cs typeface="Consolas"/>
-              <a:sym typeface="Consolas"/>
-            </a:endParaRPr>
-          </a:p>
-          <a:p>
-            <a:pPr indent="0" lvl="0" marL="0" rtl="0" algn="l">
-              <a:lnSpc>
-                <a:spcPct val="115000"/>
-              </a:lnSpc>
-              <a:spcBef>
-                <a:spcPts val="0"/>
-              </a:spcBef>
-              <a:spcAft>
-                <a:spcPts val="0"/>
-              </a:spcAft>
-              <a:buNone/>
-            </a:pPr>
-            <a:r>
-              <a:rPr lang="en" sz="1000">
-                <a:highlight>
-                  <a:schemeClr val="dk2"/>
-                </a:highlight>
-                <a:latin typeface="Consolas"/>
-                <a:ea typeface="Consolas"/>
-                <a:cs typeface="Consolas"/>
-                <a:sym typeface="Consolas"/>
-              </a:rPr>
-              <a:t>}</a:t>
-            </a:r>
-            <a:endParaRPr sz="1000">
-              <a:solidFill>
-                <a:srgbClr val="CCCCCC"/>
-              </a:solidFill>
-              <a:highlight>
-                <a:schemeClr val="dk2"/>
-              </a:highlight>
-              <a:latin typeface="Consolas"/>
-              <a:ea typeface="Consolas"/>
-              <a:cs typeface="Consolas"/>
-              <a:sym typeface="Consolas"/>
-            </a:endParaRPr>
-          </a:p>
-          <a:p>
-            <a:pPr indent="0" lvl="0" marL="0" rtl="0" algn="l">
-              <a:lnSpc>
-                <a:spcPct val="115000"/>
-              </a:lnSpc>
-              <a:spcBef>
-                <a:spcPts val="0"/>
-              </a:spcBef>
-              <a:spcAft>
-                <a:spcPts val="0"/>
-              </a:spcAft>
-              <a:buNone/>
-            </a:pPr>
-            <a:r>
-              <a:rPr lang="en" sz="1000">
-                <a:highlight>
-                  <a:schemeClr val="dk2"/>
-                </a:highlight>
-                <a:latin typeface="Consolas"/>
-                <a:ea typeface="Consolas"/>
-                <a:cs typeface="Consolas"/>
-                <a:sym typeface="Consolas"/>
-              </a:rPr>
-              <a:t/>
-            </a:r>
-            <a:endParaRPr sz="1000">
-              <a:solidFill>
-                <a:srgbClr val="CCCCCC"/>
-              </a:solidFill>
-              <a:highlight>
-                <a:schemeClr val="dk2"/>
-              </a:highlight>
-              <a:latin typeface="Consolas"/>
-              <a:ea typeface="Consolas"/>
-              <a:cs typeface="Consolas"/>
-              <a:sym typeface="Consolas"/>
-            </a:endParaRPr>
-          </a:p>
-          <a:p>
-            <a:pPr indent="0" lvl="0" marL="0" rtl="0" algn="l">
-              <a:lnSpc>
-                <a:spcPct val="115000"/>
-              </a:lnSpc>
-              <a:spcBef>
-                <a:spcPts val="0"/>
-              </a:spcBef>
-              <a:spcAft>
-                <a:spcPts val="0"/>
-              </a:spcAft>
-              <a:buNone/>
-            </a:pPr>
-            <a:r>
-              <a:rPr lang="en" sz="1000">
-                <a:highlight>
-                  <a:schemeClr val="dk2"/>
-                </a:highlight>
-                <a:latin typeface="Consolas"/>
-                <a:ea typeface="Consolas"/>
-                <a:cs typeface="Consolas"/>
-                <a:sym typeface="Consolas"/>
-              </a:rPr>
-              <a:t>public void Update(float deltaSeconds) =&gt;</a:t>
-            </a:r>
-            <a:endParaRPr sz="1000">
-              <a:solidFill>
-                <a:srgbClr val="CCCCCC"/>
-              </a:solidFill>
-              <a:highlight>
-                <a:schemeClr val="dk2"/>
-              </a:highlight>
-              <a:latin typeface="Consolas"/>
-              <a:ea typeface="Consolas"/>
-              <a:cs typeface="Consolas"/>
-              <a:sym typeface="Consolas"/>
-            </a:endParaRPr>
-          </a:p>
-          <a:p>
-            <a:pPr indent="0" lvl="0" marL="0" rtl="0" algn="l">
-              <a:lnSpc>
-                <a:spcPct val="115000"/>
-              </a:lnSpc>
-              <a:spcBef>
-                <a:spcPts val="0"/>
-              </a:spcBef>
-              <a:spcAft>
-                <a:spcPts val="0"/>
-              </a:spcAft>
-              <a:buNone/>
-            </a:pPr>
-            <a:r>
-              <a:rPr lang="en" sz="1000">
-                <a:highlight>
-                  <a:schemeClr val="dk2"/>
-                </a:highlight>
-                <a:latin typeface="Consolas"/>
-                <a:ea typeface="Consolas"/>
-                <a:cs typeface="Consolas"/>
-                <a:sym typeface="Consolas"/>
-              </a:rPr>
-              <a:t>    State.Update(this, deltaSeconds);</a:t>
-            </a:r>
-            <a:endParaRPr sz="1000">
-              <a:solidFill>
-                <a:srgbClr val="CCCCCC"/>
-              </a:solidFill>
-              <a:highlight>
-                <a:schemeClr val="dk2"/>
-              </a:highlight>
-              <a:latin typeface="Consolas"/>
-              <a:ea typeface="Consolas"/>
-              <a:cs typeface="Consolas"/>
-              <a:sym typeface="Consolas"/>
-            </a:endParaRPr>
-          </a:p>
-          <a:p>
-            <a:pPr indent="0" lvl="0" marL="0" rtl="0" algn="l">
-              <a:lnSpc>
-                <a:spcPct val="115000"/>
-              </a:lnSpc>
-              <a:spcBef>
-                <a:spcPts val="0"/>
-              </a:spcBef>
-              <a:spcAft>
-                <a:spcPts val="0"/>
-              </a:spcAft>
-              <a:buNone/>
-            </a:pPr>
-            <a:r>
-              <a:rPr lang="en" sz="1000">
-                <a:highlight>
-                  <a:schemeClr val="dk2"/>
-                </a:highlight>
-                <a:latin typeface="Consolas"/>
-                <a:ea typeface="Consolas"/>
-                <a:cs typeface="Consolas"/>
-                <a:sym typeface="Consolas"/>
-              </a:rPr>
-              <a:t>public void OnPowerPellet() =&gt;</a:t>
-            </a:r>
-            <a:endParaRPr sz="1000">
-              <a:solidFill>
-                <a:srgbClr val="CCCCCC"/>
-              </a:solidFill>
-              <a:highlight>
-                <a:schemeClr val="dk2"/>
-              </a:highlight>
-              <a:latin typeface="Consolas"/>
-              <a:ea typeface="Consolas"/>
-              <a:cs typeface="Consolas"/>
-              <a:sym typeface="Consolas"/>
-            </a:endParaRPr>
-          </a:p>
-          <a:p>
-            <a:pPr indent="0" lvl="0" marL="0" rtl="0" algn="l">
-              <a:lnSpc>
-                <a:spcPct val="115000"/>
-              </a:lnSpc>
-              <a:spcBef>
-                <a:spcPts val="0"/>
-              </a:spcBef>
-              <a:spcAft>
-                <a:spcPts val="0"/>
-              </a:spcAft>
-              <a:buNone/>
-            </a:pPr>
-            <a:r>
-              <a:rPr lang="en" sz="1000">
-                <a:highlight>
-                  <a:schemeClr val="dk2"/>
-                </a:highlight>
-                <a:latin typeface="Consolas"/>
-                <a:ea typeface="Consolas"/>
-                <a:cs typeface="Consolas"/>
-                <a:sym typeface="Consolas"/>
-              </a:rPr>
-              <a:t>    State.OnPowerPellet(this);</a:t>
-            </a:r>
-            <a:endParaRPr sz="1000">
-              <a:solidFill>
-                <a:srgbClr val="CCCCCC"/>
-              </a:solidFill>
-              <a:highlight>
-                <a:schemeClr val="dk2"/>
-              </a:highlight>
-              <a:latin typeface="Consolas"/>
-              <a:ea typeface="Consolas"/>
-              <a:cs typeface="Consolas"/>
-              <a:sym typeface="Consolas"/>
-            </a:endParaRPr>
-          </a:p>
-          <a:p>
-            <a:pPr indent="0" lvl="0" marL="0" rtl="0" algn="l">
-              <a:lnSpc>
-                <a:spcPct val="115000"/>
-              </a:lnSpc>
-              <a:spcBef>
-                <a:spcPts val="0"/>
-              </a:spcBef>
-              <a:spcAft>
-                <a:spcPts val="0"/>
-              </a:spcAft>
-              <a:buNone/>
-            </a:pPr>
-            <a:r>
-              <a:rPr lang="en" sz="1000">
-                <a:highlight>
-                  <a:schemeClr val="dk2"/>
-                </a:highlight>
-                <a:latin typeface="Consolas"/>
-                <a:ea typeface="Consolas"/>
-                <a:cs typeface="Consolas"/>
-                <a:sym typeface="Consolas"/>
-              </a:rPr>
-              <a:t>public TouchResult Touch() =&gt;</a:t>
-            </a:r>
-            <a:endParaRPr sz="1000">
-              <a:solidFill>
-                <a:srgbClr val="CCCCCC"/>
-              </a:solidFill>
-              <a:highlight>
-                <a:schemeClr val="dk2"/>
-              </a:highlight>
-              <a:latin typeface="Consolas"/>
-              <a:ea typeface="Consolas"/>
-              <a:cs typeface="Consolas"/>
-              <a:sym typeface="Consolas"/>
-            </a:endParaRPr>
-          </a:p>
-          <a:p>
-            <a:pPr indent="0" lvl="0" marL="0" rtl="0" algn="l">
-              <a:lnSpc>
-                <a:spcPct val="115000"/>
-              </a:lnSpc>
-              <a:spcBef>
-                <a:spcPts val="0"/>
-              </a:spcBef>
-              <a:spcAft>
-                <a:spcPts val="0"/>
-              </a:spcAft>
-              <a:buNone/>
-            </a:pPr>
-            <a:r>
-              <a:rPr lang="en" sz="1000">
-                <a:highlight>
-                  <a:schemeClr val="dk2"/>
-                </a:highlight>
-                <a:latin typeface="Consolas"/>
-                <a:ea typeface="Consolas"/>
-                <a:cs typeface="Consolas"/>
-                <a:sym typeface="Consolas"/>
-              </a:rPr>
-              <a:t>    State.OnTouch(this);</a:t>
-            </a:r>
-            <a:endParaRPr sz="1000">
-              <a:solidFill>
-                <a:srgbClr val="CCCCCC"/>
-              </a:solidFill>
-              <a:highlight>
-                <a:schemeClr val="dk2"/>
-              </a:highlight>
-              <a:latin typeface="Consolas"/>
-              <a:ea typeface="Consolas"/>
-              <a:cs typeface="Consolas"/>
-              <a:sym typeface="Consolas"/>
-            </a:endParaRPr>
           </a:p>
         </p:txBody>
       </p:sp>
@@ -7760,7 +8004,7 @@
             </a:pPr>
             <a:r>
               <a:rPr lang="en"/>
-              <a:t>A State: Frightened</a:t>
+              <a:t>The State Pattern</a:t>
             </a:r>
             <a:endParaRPr/>
           </a:p>
@@ -7808,7 +8052,31 @@
                   <a:srgbClr val="DEE2E6"/>
                 </a:solidFill>
               </a:rPr>
-              <a:t>Everything about being frightened, in one class</a:t>
+              <a:t>“Allow an object to alter its behavior when its internal state changes.”</a:t>
+            </a:r>
+            <a:endParaRPr/>
+          </a:p>
+          <a:p>
+            <a:pPr indent="-330200" lvl="0" marL="457200" rtl="0" algn="l">
+              <a:buClr>
+                <a:srgbClr val="DEE2E6"/>
+              </a:buClr>
+              <a:spcBef>
+                <a:spcPts val="0"/>
+              </a:spcBef>
+              <a:spcAft>
+                <a:spcPts val="0"/>
+              </a:spcAft>
+              <a:buSzPts val="1600"/>
+              <a:buChar char="●"/>
+            </a:pPr>
+            <a:r>
+              <a:rPr lang="en" sz="1600">
+                <a:solidFill>
+                  <a:srgbClr val="DEE2E6"/>
+                </a:solidFill>
+              </a:rPr>
+              <a:t>Each mode becomes a class</a:t>
             </a:r>
             <a:endParaRPr/>
           </a:p>
@@ -7832,7 +8100,7 @@
                   <a:srgbClr val="6C757D"/>
                 </a:solidFill>
               </a:rPr>
-              <a:t>Including its own timer</a:t>
+              <a:t>InHouseState, ScatterState, ChaseState, FrightenedState, EatenState</a:t>
             </a:r>
             <a:endParaRPr/>
           </a:p>
@@ -7856,7 +8124,7 @@
                   <a:srgbClr val="DEE2E6"/>
                 </a:solidFill>
               </a:rPr>
-              <a:t>Enter: turn around</a:t>
+              <a:t>The ghost forwards to its current state</a:t>
             </a:r>
             <a:endParaRPr/>
           </a:p>
@@ -7880,55 +8148,7 @@
                   <a:srgbClr val="DEE2E6"/>
                 </a:solidFill>
               </a:rPr>
-              <a:t>The state decides the transitions</a:t>
-            </a:r>
-            <a:endParaRPr/>
-          </a:p>
-          <a:p>
-            <a:pPr indent="-317500" lvl="1" marL="914400" rtl="0" algn="l">
-              <a:buClr>
-                <a:srgbClr val="6C757D"/>
-              </a:buClr>
-              <a:spcBef>
-                <a:spcPts val="0"/>
-              </a:spcBef>
-              <a:spcAft>
-                <a:spcPts val="0"/>
-              </a:spcAft>
-              <a:buSzPts val="1400"/>
-              <a:buChar char="○"/>
-            </a:pPr>
-            <a:r>
-              <a:rPr lang="en" sz="1400">
-                <a:solidFill>
-                  <a:srgbClr val="6C757D"/>
-                </a:solidFill>
-              </a:rPr>
-              <a:t>Time’s up: back to the schedule</a:t>
-            </a:r>
-            <a:endParaRPr/>
-          </a:p>
-          <a:p>
-            <a:pPr indent="-317500" lvl="1" marL="914400" rtl="0" algn="l">
-              <a:buClr>
-                <a:srgbClr val="6C757D"/>
-              </a:buClr>
-              <a:spcBef>
-                <a:spcPts val="0"/>
-              </a:spcBef>
-              <a:spcAft>
-                <a:spcPts val="0"/>
-              </a:spcAft>
-              <a:buSzPts val="1400"/>
-              <a:buChar char="○"/>
-            </a:pPr>
-            <a:r>
-              <a:rPr lang="en" sz="1400">
-                <a:solidFill>
-                  <a:srgbClr val="6C757D"/>
-                </a:solidFill>
-              </a:rPr>
-              <a:t>Touched: eaten</a:t>
+              <a:t>Flappy Bird did this for the game; now for an object in it</a:t>
             </a:r>
             <a:endParaRPr/>
           </a:p>
@@ -7979,7 +8199,7 @@
                 <a:cs typeface="Consolas"/>
                 <a:sym typeface="Consolas"/>
               </a:rPr>
-              <a:t>public class FrightenedState : GhostState</a:t>
+              <a:t>public void ChangeState(GhostState state)</a:t>
             </a:r>
             <a:endParaRPr sz="1000">
               <a:solidFill>
@@ -8055,7 +8275,7 @@
                 <a:cs typeface="Consolas"/>
                 <a:sym typeface="Consolas"/>
               </a:rPr>
-              <a:t>    private float _elapsed;</a:t>
+              <a:t>    State?.Exit(this);</a:t>
             </a:r>
             <a:endParaRPr sz="1000">
               <a:solidFill>
@@ -8093,7 +8313,7 @@
                 <a:cs typeface="Consolas"/>
                 <a:sym typeface="Consolas"/>
               </a:rPr>
-              <a:t>    public override void Enter(Ghost ghost) =&gt;</a:t>
+              <a:t>    State = state;</a:t>
             </a:r>
             <a:endParaRPr sz="1000">
               <a:solidFill>
@@ -8131,7 +8351,7 @@
                 <a:cs typeface="Consolas"/>
                 <a:sym typeface="Consolas"/>
               </a:rPr>
-              <a:t>        ghost.Reverse();</a:t>
+              <a:t>    State.Enter(this);</a:t>
             </a:r>
             <a:endParaRPr sz="1000">
               <a:solidFill>
@@ -8169,7 +8389,7 @@
                 <a:cs typeface="Consolas"/>
                 <a:sym typeface="Consolas"/>
               </a:rPr>
-              <a:t>    public override void Update(Ghost ghost, float dt)</a:t>
+              <a:t>}</a:t>
             </a:r>
             <a:endParaRPr sz="1000">
               <a:solidFill>
@@ -8207,7 +8427,7 @@
                 <a:cs typeface="Consolas"/>
                 <a:sym typeface="Consolas"/>
               </a:rPr>
-              <a:t>    {</a:t>
+              <a:t/>
             </a:r>
             <a:endParaRPr sz="1000">
               <a:solidFill>
@@ -8245,7 +8465,7 @@
                 <a:cs typeface="Consolas"/>
                 <a:sym typeface="Consolas"/>
               </a:rPr>
-              <a:t>        _elapsed += dt;</a:t>
+              <a:t>public void Update(float deltaSeconds) =&gt;</a:t>
             </a:r>
             <a:endParaRPr sz="1000">
               <a:solidFill>
@@ -8283,7 +8503,7 @@
                 <a:cs typeface="Consolas"/>
                 <a:sym typeface="Consolas"/>
               </a:rPr>
-              <a:t>        ghost.Move(Speed * dt);</a:t>
+              <a:t>    State.Update(this, deltaSeconds);</a:t>
             </a:r>
             <a:endParaRPr sz="1000">
               <a:solidFill>
@@ -8321,7 +8541,7 @@
                 <a:cs typeface="Consolas"/>
                 <a:sym typeface="Consolas"/>
               </a:rPr>
-              <a:t>        if (_elapsed &gt;= Seconds)</a:t>
+              <a:t>public void OnPowerPellet() =&gt;</a:t>
             </a:r>
             <a:endParaRPr sz="1000">
               <a:solidFill>
@@ -8359,7 +8579,7 @@
                 <a:cs typeface="Consolas"/>
                 <a:sym typeface="Consolas"/>
               </a:rPr>
-              <a:t>            ghost.ChangeState(ghost.ScheduledState());</a:t>
+              <a:t>    State.OnPowerPellet(this);</a:t>
             </a:r>
             <a:endParaRPr sz="1000">
               <a:solidFill>
@@ -8397,7 +8617,7 @@
                 <a:cs typeface="Consolas"/>
                 <a:sym typeface="Consolas"/>
               </a:rPr>
-              <a:t>    }</a:t>
+              <a:t>public TouchResult Touch() =&gt;</a:t>
             </a:r>
             <a:endParaRPr sz="1000">
               <a:solidFill>
@@ -8435,7 +8655,7 @@
                 <a:cs typeface="Consolas"/>
                 <a:sym typeface="Consolas"/>
               </a:rPr>
-              <a:t/>
+              <a:t>    State.OnTouch(this);</a:t>
             </a:r>
             <a:endParaRPr sz="1000">
               <a:solidFill>
@@ -8450,6 +8670,256 @@
               <a:sym typeface="Consolas"/>
             </a:endParaRPr>
           </a:p>
+        </p:txBody>
+      </p:sp>
+    </p:spTree>
+  </p:cSld>
+  <p:clrMapOvr>
+    <a:masterClrMapping/>
+  </p:clrMapOvr>
+</p:sld>
+</file>
+
+<file path=ppt/slides/slide14.xml><?xml version="1.0" encoding="utf-8"?>
+<p:sld xmlns:a="http://schemas.openxmlformats.org/drawingml/2006/main" xmlns:p="http://schemas.openxmlformats.org/presentationml/2006/main" xmlns:r="http://schemas.openxmlformats.org/officeDocument/2006/relationships">
+  <p:cSld>
+    <p:spTree>
+      <p:nvGrpSpPr>
+        <p:cNvPr id="1" name=""/>
+        <p:cNvGrpSpPr/>
+        <p:nvPr/>
+      </p:nvGrpSpPr>
+      <p:grpSpPr/>
+      <p:sp>
+        <p:nvSpPr>
+          <p:cNvPr id="140" name="Google Shape;140;p23"/>
+          <p:cNvSpPr txBox="1"/>
+          <p:nvPr>
+            <p:ph type="title"/>
+          </p:nvPr>
+        </p:nvSpPr>
+        <p:spPr>
+          <a:xfrm>
+            <a:off x="311700" y="195615"/>
+            <a:ext cx="8520600" cy="572700"/>
+          </a:xfrm>
+          <a:prstGeom prst="rect">
+            <a:avLst/>
+          </a:prstGeom>
+        </p:spPr>
+        <p:txBody>
+          <a:bodyPr anchorCtr="0" anchor="t" bIns="91425" lIns="91425" spcFirstLastPara="1" rIns="91425" wrap="square" tIns="91425">
+            <a:normAutofit fontScale="90000"/>
+          </a:bodyPr>
+          <a:lstStyle/>
+          <a:p>
+            <a:pPr indent="0" lvl="0" marL="0" rtl="0" algn="l">
+              <a:spcBef>
+                <a:spcPts val="0"/>
+              </a:spcBef>
+              <a:spcAft>
+                <a:spcPts val="0"/>
+              </a:spcAft>
+              <a:buNone/>
+            </a:pPr>
+            <a:r>
+              <a:rPr lang="en"/>
+              <a:t>A State: Frightened</a:t>
+            </a:r>
+            <a:endParaRPr/>
+          </a:p>
+        </p:txBody>
+      </p:sp>
+      <p:sp>
+        <p:nvSpPr>
+          <p:cNvPr id="293" name="Google Shape;293;p45"/>
+          <p:cNvSpPr txBox="1"/>
+          <p:nvPr>
+            <p:ph type="title"/>
+          </p:nvPr>
+        </p:nvSpPr>
+        <p:spPr>
+          <a:xfrm>
+            <a:off x="311700" y="1152475"/>
+            <a:ext cx="3700000" cy="3500000"/>
+          </a:xfrm>
+          <a:prstGeom prst="rect">
+            <a:avLst/>
+          </a:prstGeom>
+        </p:spPr>
+        <p:txBody>
+          <a:bodyPr anchorCtr="0" anchor="t" bIns="91425" lIns="91425" spcFirstLastPara="1" rIns="91425" wrap="square" tIns="91425">
+            <a:normAutofit fontScale="90000"/>
+          </a:bodyPr>
+          <a:lstStyle/>
+          <a:p>
+            <a:pPr indent="-330200" lvl="0" marL="457200" rtl="0" algn="l">
+              <a:buClr>
+                <a:srgbClr val="DEE2E6"/>
+              </a:buClr>
+              <a:spcBef>
+                <a:spcPts val="0"/>
+              </a:spcBef>
+              <a:spcAft>
+                <a:spcPts val="0"/>
+              </a:spcAft>
+              <a:buSzPts val="1600"/>
+              <a:buChar char="●"/>
+            </a:pPr>
+            <a:r>
+              <a:rPr lang="en" sz="1600">
+                <a:solidFill>
+                  <a:srgbClr val="DEE2E6"/>
+                </a:solidFill>
+              </a:rPr>
+              <a:t>Everything about being frightened, in one class</a:t>
+            </a:r>
+            <a:endParaRPr/>
+          </a:p>
+          <a:p>
+            <a:pPr indent="-317500" lvl="1" marL="914400" rtl="0" algn="l">
+              <a:buClr>
+                <a:srgbClr val="6C757D"/>
+              </a:buClr>
+              <a:spcBef>
+                <a:spcPts val="0"/>
+              </a:spcBef>
+              <a:spcAft>
+                <a:spcPts val="0"/>
+              </a:spcAft>
+              <a:buSzPts val="1400"/>
+              <a:buChar char="○"/>
+            </a:pPr>
+            <a:r>
+              <a:rPr lang="en" sz="1400">
+                <a:solidFill>
+                  <a:srgbClr val="6C757D"/>
+                </a:solidFill>
+              </a:rPr>
+              <a:t>Including its own timer</a:t>
+            </a:r>
+            <a:endParaRPr/>
+          </a:p>
+          <a:p>
+            <a:pPr indent="-330200" lvl="0" marL="457200" rtl="0" algn="l">
+              <a:buClr>
+                <a:srgbClr val="DEE2E6"/>
+              </a:buClr>
+              <a:spcBef>
+                <a:spcPts val="0"/>
+              </a:spcBef>
+              <a:spcAft>
+                <a:spcPts val="0"/>
+              </a:spcAft>
+              <a:buSzPts val="1600"/>
+              <a:buChar char="●"/>
+            </a:pPr>
+            <a:r>
+              <a:rPr lang="en" sz="1600">
+                <a:solidFill>
+                  <a:srgbClr val="DEE2E6"/>
+                </a:solidFill>
+              </a:rPr>
+              <a:t>Enter: turn around</a:t>
+            </a:r>
+            <a:endParaRPr/>
+          </a:p>
+          <a:p>
+            <a:pPr indent="-330200" lvl="0" marL="457200" rtl="0" algn="l">
+              <a:buClr>
+                <a:srgbClr val="DEE2E6"/>
+              </a:buClr>
+              <a:spcBef>
+                <a:spcPts val="0"/>
+              </a:spcBef>
+              <a:spcAft>
+                <a:spcPts val="0"/>
+              </a:spcAft>
+              <a:buSzPts val="1600"/>
+              <a:buChar char="●"/>
+            </a:pPr>
+            <a:r>
+              <a:rPr lang="en" sz="1600">
+                <a:solidFill>
+                  <a:srgbClr val="DEE2E6"/>
+                </a:solidFill>
+              </a:rPr>
+              <a:t>The state decides the transitions</a:t>
+            </a:r>
+            <a:endParaRPr/>
+          </a:p>
+          <a:p>
+            <a:pPr indent="-317500" lvl="1" marL="914400" rtl="0" algn="l">
+              <a:buClr>
+                <a:srgbClr val="6C757D"/>
+              </a:buClr>
+              <a:spcBef>
+                <a:spcPts val="0"/>
+              </a:spcBef>
+              <a:spcAft>
+                <a:spcPts val="0"/>
+              </a:spcAft>
+              <a:buSzPts val="1400"/>
+              <a:buChar char="○"/>
+            </a:pPr>
+            <a:r>
+              <a:rPr lang="en" sz="1400">
+                <a:solidFill>
+                  <a:srgbClr val="6C757D"/>
+                </a:solidFill>
+              </a:rPr>
+              <a:t>Time’s up: back to the schedule</a:t>
+            </a:r>
+            <a:endParaRPr/>
+          </a:p>
+          <a:p>
+            <a:pPr indent="-317500" lvl="1" marL="914400" rtl="0" algn="l">
+              <a:buClr>
+                <a:srgbClr val="6C757D"/>
+              </a:buClr>
+              <a:spcBef>
+                <a:spcPts val="0"/>
+              </a:spcBef>
+              <a:spcAft>
+                <a:spcPts val="0"/>
+              </a:spcAft>
+              <a:buSzPts val="1400"/>
+              <a:buChar char="○"/>
+            </a:pPr>
+            <a:r>
+              <a:rPr lang="en" sz="1400">
+                <a:solidFill>
+                  <a:srgbClr val="6C757D"/>
+                </a:solidFill>
+              </a:rPr>
+              <a:t>Touched: eaten</a:t>
+            </a:r>
+            <a:endParaRPr/>
+          </a:p>
+        </p:txBody>
+      </p:sp>
+      <p:sp>
+        <p:nvSpPr>
+          <p:cNvPr id="141" name="Google Shape;141;p23"/>
+          <p:cNvSpPr txBox="1"/>
+          <p:nvPr>
+            <p:ph idx="2" type="body"/>
+          </p:nvPr>
+        </p:nvSpPr>
+        <p:spPr>
+          <a:xfrm>
+            <a:off x="4150000" y="1152475"/>
+            <a:ext cx="4750000" cy="3600000"/>
+          </a:xfrm>
+          <a:prstGeom prst="rect">
+            <a:avLst/>
+          </a:prstGeom>
+        </p:spPr>
+        <p:txBody>
+          <a:bodyPr anchorCtr="0" anchor="t" bIns="91425" lIns="91425" spcFirstLastPara="1" rIns="91425" wrap="square" tIns="91425">
+            <a:noAutofit/>
+          </a:bodyPr>
+          <a:lstStyle/>
           <a:p>
             <a:pPr indent="0" lvl="0" marL="0" rtl="0" algn="l">
               <a:lnSpc>
@@ -8473,7 +8943,7 @@
                 <a:cs typeface="Consolas"/>
                 <a:sym typeface="Consolas"/>
               </a:rPr>
-              <a:t>    public override TouchResult OnTouch(Ghost ghost)</a:t>
+              <a:t>public class FrightenedState : GhostState</a:t>
             </a:r>
             <a:endParaRPr sz="1000">
               <a:solidFill>
@@ -8511,7 +8981,7 @@
                 <a:cs typeface="Consolas"/>
                 <a:sym typeface="Consolas"/>
               </a:rPr>
-              <a:t>    {</a:t>
+              <a:t>{</a:t>
             </a:r>
             <a:endParaRPr sz="1000">
               <a:solidFill>
@@ -8549,7 +9019,7 @@
                 <a:cs typeface="Consolas"/>
                 <a:sym typeface="Consolas"/>
               </a:rPr>
-              <a:t>        ghost.ChangeState(new EatenState());</a:t>
+              <a:t>    private float _elapsed;</a:t>
             </a:r>
             <a:endParaRPr sz="1000">
               <a:solidFill>
@@ -8587,7 +9057,7 @@
                 <a:cs typeface="Consolas"/>
                 <a:sym typeface="Consolas"/>
               </a:rPr>
-              <a:t>        return TouchResult.GhostEaten;</a:t>
+              <a:t>    public override void Enter(Ghost ghost) =&gt;</a:t>
             </a:r>
             <a:endParaRPr sz="1000">
               <a:solidFill>
@@ -8625,7 +9095,7 @@
                 <a:cs typeface="Consolas"/>
                 <a:sym typeface="Consolas"/>
               </a:rPr>
-              <a:t>    }</a:t>
+              <a:t>        ghost.Reverse();</a:t>
             </a:r>
             <a:endParaRPr sz="1000">
               <a:solidFill>
@@ -8663,7 +9133,7 @@
                 <a:cs typeface="Consolas"/>
                 <a:sym typeface="Consolas"/>
               </a:rPr>
-              <a:t>}</a:t>
+              <a:t>    public override void Update(Ghost ghost, float dt)</a:t>
             </a:r>
             <a:endParaRPr sz="1000">
               <a:solidFill>
@@ -8678,6 +9148,500 @@
               <a:sym typeface="Consolas"/>
             </a:endParaRPr>
           </a:p>
+          <a:p>
+            <a:pPr indent="0" lvl="0" marL="0" rtl="0" algn="l">
+              <a:lnSpc>
+                <a:spcPct val="115000"/>
+              </a:lnSpc>
+              <a:spcBef>
+                <a:spcPts val="0"/>
+              </a:spcBef>
+              <a:spcAft>
+                <a:spcPts val="0"/>
+              </a:spcAft>
+              <a:buNone/>
+            </a:pPr>
+            <a:r>
+              <a:rPr lang="en" sz="1000">
+                <a:highlight>
+                  <a:schemeClr val="dk2"/>
+                </a:highlight>
+                <a:latin typeface="Consolas"/>
+                <a:ea typeface="Consolas"/>
+                <a:cs typeface="Consolas"/>
+                <a:sym typeface="Consolas"/>
+              </a:rPr>
+              <a:t>    {</a:t>
+            </a:r>
+            <a:endParaRPr sz="1000">
+              <a:solidFill>
+                <a:srgbClr val="CCCCCC"/>
+              </a:solidFill>
+              <a:highlight>
+                <a:schemeClr val="dk2"/>
+              </a:highlight>
+              <a:latin typeface="Consolas"/>
+              <a:ea typeface="Consolas"/>
+              <a:cs typeface="Consolas"/>
+              <a:sym typeface="Consolas"/>
+            </a:endParaRPr>
+          </a:p>
+          <a:p>
+            <a:pPr indent="0" lvl="0" marL="0" rtl="0" algn="l">
+              <a:lnSpc>
+                <a:spcPct val="115000"/>
+              </a:lnSpc>
+              <a:spcBef>
+                <a:spcPts val="0"/>
+              </a:spcBef>
+              <a:spcAft>
+                <a:spcPts val="0"/>
+              </a:spcAft>
+              <a:buNone/>
+            </a:pPr>
+            <a:r>
+              <a:rPr lang="en" sz="1000">
+                <a:highlight>
+                  <a:schemeClr val="dk2"/>
+                </a:highlight>
+                <a:latin typeface="Consolas"/>
+                <a:ea typeface="Consolas"/>
+                <a:cs typeface="Consolas"/>
+                <a:sym typeface="Consolas"/>
+              </a:rPr>
+              <a:t>        _elapsed += dt;</a:t>
+            </a:r>
+            <a:endParaRPr sz="1000">
+              <a:solidFill>
+                <a:srgbClr val="CCCCCC"/>
+              </a:solidFill>
+              <a:highlight>
+                <a:schemeClr val="dk2"/>
+              </a:highlight>
+              <a:latin typeface="Consolas"/>
+              <a:ea typeface="Consolas"/>
+              <a:cs typeface="Consolas"/>
+              <a:sym typeface="Consolas"/>
+            </a:endParaRPr>
+          </a:p>
+          <a:p>
+            <a:pPr indent="0" lvl="0" marL="0" rtl="0" algn="l">
+              <a:lnSpc>
+                <a:spcPct val="115000"/>
+              </a:lnSpc>
+              <a:spcBef>
+                <a:spcPts val="0"/>
+              </a:spcBef>
+              <a:spcAft>
+                <a:spcPts val="0"/>
+              </a:spcAft>
+              <a:buNone/>
+            </a:pPr>
+            <a:r>
+              <a:rPr lang="en" sz="1000">
+                <a:highlight>
+                  <a:schemeClr val="dk2"/>
+                </a:highlight>
+                <a:latin typeface="Consolas"/>
+                <a:ea typeface="Consolas"/>
+                <a:cs typeface="Consolas"/>
+                <a:sym typeface="Consolas"/>
+              </a:rPr>
+              <a:t>        ghost.Move(Speed * dt);</a:t>
+            </a:r>
+            <a:endParaRPr sz="1000">
+              <a:solidFill>
+                <a:srgbClr val="CCCCCC"/>
+              </a:solidFill>
+              <a:highlight>
+                <a:schemeClr val="dk2"/>
+              </a:highlight>
+              <a:latin typeface="Consolas"/>
+              <a:ea typeface="Consolas"/>
+              <a:cs typeface="Consolas"/>
+              <a:sym typeface="Consolas"/>
+            </a:endParaRPr>
+          </a:p>
+          <a:p>
+            <a:pPr indent="0" lvl="0" marL="0" rtl="0" algn="l">
+              <a:lnSpc>
+                <a:spcPct val="115000"/>
+              </a:lnSpc>
+              <a:spcBef>
+                <a:spcPts val="0"/>
+              </a:spcBef>
+              <a:spcAft>
+                <a:spcPts val="0"/>
+              </a:spcAft>
+              <a:buNone/>
+            </a:pPr>
+            <a:r>
+              <a:rPr lang="en" sz="1000">
+                <a:highlight>
+                  <a:schemeClr val="dk2"/>
+                </a:highlight>
+                <a:latin typeface="Consolas"/>
+                <a:ea typeface="Consolas"/>
+                <a:cs typeface="Consolas"/>
+                <a:sym typeface="Consolas"/>
+              </a:rPr>
+              <a:t>        if (_elapsed &gt;= Seconds)</a:t>
+            </a:r>
+            <a:endParaRPr sz="1000">
+              <a:solidFill>
+                <a:srgbClr val="CCCCCC"/>
+              </a:solidFill>
+              <a:highlight>
+                <a:schemeClr val="dk2"/>
+              </a:highlight>
+              <a:latin typeface="Consolas"/>
+              <a:ea typeface="Consolas"/>
+              <a:cs typeface="Consolas"/>
+              <a:sym typeface="Consolas"/>
+            </a:endParaRPr>
+          </a:p>
+          <a:p>
+            <a:pPr indent="0" lvl="0" marL="0" rtl="0" algn="l">
+              <a:lnSpc>
+                <a:spcPct val="115000"/>
+              </a:lnSpc>
+              <a:spcBef>
+                <a:spcPts val="0"/>
+              </a:spcBef>
+              <a:spcAft>
+                <a:spcPts val="0"/>
+              </a:spcAft>
+              <a:buNone/>
+            </a:pPr>
+            <a:r>
+              <a:rPr lang="en" sz="1000">
+                <a:highlight>
+                  <a:schemeClr val="dk2"/>
+                </a:highlight>
+                <a:latin typeface="Consolas"/>
+                <a:ea typeface="Consolas"/>
+                <a:cs typeface="Consolas"/>
+                <a:sym typeface="Consolas"/>
+              </a:rPr>
+              <a:t>            ghost.ChangeState(ghost.ScheduledState());</a:t>
+            </a:r>
+            <a:endParaRPr sz="1000">
+              <a:solidFill>
+                <a:srgbClr val="CCCCCC"/>
+              </a:solidFill>
+              <a:highlight>
+                <a:schemeClr val="dk2"/>
+              </a:highlight>
+              <a:latin typeface="Consolas"/>
+              <a:ea typeface="Consolas"/>
+              <a:cs typeface="Consolas"/>
+              <a:sym typeface="Consolas"/>
+            </a:endParaRPr>
+          </a:p>
+          <a:p>
+            <a:pPr indent="0" lvl="0" marL="0" rtl="0" algn="l">
+              <a:lnSpc>
+                <a:spcPct val="115000"/>
+              </a:lnSpc>
+              <a:spcBef>
+                <a:spcPts val="0"/>
+              </a:spcBef>
+              <a:spcAft>
+                <a:spcPts val="0"/>
+              </a:spcAft>
+              <a:buNone/>
+            </a:pPr>
+            <a:r>
+              <a:rPr lang="en" sz="1000">
+                <a:highlight>
+                  <a:schemeClr val="dk2"/>
+                </a:highlight>
+                <a:latin typeface="Consolas"/>
+                <a:ea typeface="Consolas"/>
+                <a:cs typeface="Consolas"/>
+                <a:sym typeface="Consolas"/>
+              </a:rPr>
+              <a:t>    }</a:t>
+            </a:r>
+            <a:endParaRPr sz="1000">
+              <a:solidFill>
+                <a:srgbClr val="CCCCCC"/>
+              </a:solidFill>
+              <a:highlight>
+                <a:schemeClr val="dk2"/>
+              </a:highlight>
+              <a:latin typeface="Consolas"/>
+              <a:ea typeface="Consolas"/>
+              <a:cs typeface="Consolas"/>
+              <a:sym typeface="Consolas"/>
+            </a:endParaRPr>
+          </a:p>
+          <a:p>
+            <a:pPr indent="0" lvl="0" marL="0" rtl="0" algn="l">
+              <a:lnSpc>
+                <a:spcPct val="115000"/>
+              </a:lnSpc>
+              <a:spcBef>
+                <a:spcPts val="0"/>
+              </a:spcBef>
+              <a:spcAft>
+                <a:spcPts val="0"/>
+              </a:spcAft>
+              <a:buNone/>
+            </a:pPr>
+            <a:r>
+              <a:rPr lang="en" sz="1000">
+                <a:highlight>
+                  <a:schemeClr val="dk2"/>
+                </a:highlight>
+                <a:latin typeface="Consolas"/>
+                <a:ea typeface="Consolas"/>
+                <a:cs typeface="Consolas"/>
+                <a:sym typeface="Consolas"/>
+              </a:rPr>
+              <a:t/>
+            </a:r>
+            <a:endParaRPr sz="1000">
+              <a:solidFill>
+                <a:srgbClr val="CCCCCC"/>
+              </a:solidFill>
+              <a:highlight>
+                <a:schemeClr val="dk2"/>
+              </a:highlight>
+              <a:latin typeface="Consolas"/>
+              <a:ea typeface="Consolas"/>
+              <a:cs typeface="Consolas"/>
+              <a:sym typeface="Consolas"/>
+            </a:endParaRPr>
+          </a:p>
+          <a:p>
+            <a:pPr indent="0" lvl="0" marL="0" rtl="0" algn="l">
+              <a:lnSpc>
+                <a:spcPct val="115000"/>
+              </a:lnSpc>
+              <a:spcBef>
+                <a:spcPts val="0"/>
+              </a:spcBef>
+              <a:spcAft>
+                <a:spcPts val="0"/>
+              </a:spcAft>
+              <a:buNone/>
+            </a:pPr>
+            <a:r>
+              <a:rPr lang="en" sz="1000">
+                <a:highlight>
+                  <a:schemeClr val="dk2"/>
+                </a:highlight>
+                <a:latin typeface="Consolas"/>
+                <a:ea typeface="Consolas"/>
+                <a:cs typeface="Consolas"/>
+                <a:sym typeface="Consolas"/>
+              </a:rPr>
+              <a:t>    public override TouchResult OnTouch(Ghost ghost)</a:t>
+            </a:r>
+            <a:endParaRPr sz="1000">
+              <a:solidFill>
+                <a:srgbClr val="CCCCCC"/>
+              </a:solidFill>
+              <a:highlight>
+                <a:schemeClr val="dk2"/>
+              </a:highlight>
+              <a:latin typeface="Consolas"/>
+              <a:ea typeface="Consolas"/>
+              <a:cs typeface="Consolas"/>
+              <a:sym typeface="Consolas"/>
+            </a:endParaRPr>
+          </a:p>
+          <a:p>
+            <a:pPr indent="0" lvl="0" marL="0" rtl="0" algn="l">
+              <a:lnSpc>
+                <a:spcPct val="115000"/>
+              </a:lnSpc>
+              <a:spcBef>
+                <a:spcPts val="0"/>
+              </a:spcBef>
+              <a:spcAft>
+                <a:spcPts val="0"/>
+              </a:spcAft>
+              <a:buNone/>
+            </a:pPr>
+            <a:r>
+              <a:rPr lang="en" sz="1000">
+                <a:highlight>
+                  <a:schemeClr val="dk2"/>
+                </a:highlight>
+                <a:latin typeface="Consolas"/>
+                <a:ea typeface="Consolas"/>
+                <a:cs typeface="Consolas"/>
+                <a:sym typeface="Consolas"/>
+              </a:rPr>
+              <a:t>    {</a:t>
+            </a:r>
+            <a:endParaRPr sz="1000">
+              <a:solidFill>
+                <a:srgbClr val="CCCCCC"/>
+              </a:solidFill>
+              <a:highlight>
+                <a:schemeClr val="dk2"/>
+              </a:highlight>
+              <a:latin typeface="Consolas"/>
+              <a:ea typeface="Consolas"/>
+              <a:cs typeface="Consolas"/>
+              <a:sym typeface="Consolas"/>
+            </a:endParaRPr>
+          </a:p>
+          <a:p>
+            <a:pPr indent="0" lvl="0" marL="0" rtl="0" algn="l">
+              <a:lnSpc>
+                <a:spcPct val="115000"/>
+              </a:lnSpc>
+              <a:spcBef>
+                <a:spcPts val="0"/>
+              </a:spcBef>
+              <a:spcAft>
+                <a:spcPts val="0"/>
+              </a:spcAft>
+              <a:buNone/>
+            </a:pPr>
+            <a:r>
+              <a:rPr lang="en" sz="1000">
+                <a:highlight>
+                  <a:schemeClr val="dk2"/>
+                </a:highlight>
+                <a:latin typeface="Consolas"/>
+                <a:ea typeface="Consolas"/>
+                <a:cs typeface="Consolas"/>
+                <a:sym typeface="Consolas"/>
+              </a:rPr>
+              <a:t>        ghost.ChangeState(new EatenState());</a:t>
+            </a:r>
+            <a:endParaRPr sz="1000">
+              <a:solidFill>
+                <a:srgbClr val="CCCCCC"/>
+              </a:solidFill>
+              <a:highlight>
+                <a:schemeClr val="dk2"/>
+              </a:highlight>
+              <a:latin typeface="Consolas"/>
+              <a:ea typeface="Consolas"/>
+              <a:cs typeface="Consolas"/>
+              <a:sym typeface="Consolas"/>
+            </a:endParaRPr>
+          </a:p>
+          <a:p>
+            <a:pPr indent="0" lvl="0" marL="0" rtl="0" algn="l">
+              <a:lnSpc>
+                <a:spcPct val="115000"/>
+              </a:lnSpc>
+              <a:spcBef>
+                <a:spcPts val="0"/>
+              </a:spcBef>
+              <a:spcAft>
+                <a:spcPts val="0"/>
+              </a:spcAft>
+              <a:buNone/>
+            </a:pPr>
+            <a:r>
+              <a:rPr lang="en" sz="1000">
+                <a:highlight>
+                  <a:schemeClr val="dk2"/>
+                </a:highlight>
+                <a:latin typeface="Consolas"/>
+                <a:ea typeface="Consolas"/>
+                <a:cs typeface="Consolas"/>
+                <a:sym typeface="Consolas"/>
+              </a:rPr>
+              <a:t>        return TouchResult.GhostEaten;</a:t>
+            </a:r>
+            <a:endParaRPr sz="1000">
+              <a:solidFill>
+                <a:srgbClr val="CCCCCC"/>
+              </a:solidFill>
+              <a:highlight>
+                <a:schemeClr val="dk2"/>
+              </a:highlight>
+              <a:latin typeface="Consolas"/>
+              <a:ea typeface="Consolas"/>
+              <a:cs typeface="Consolas"/>
+              <a:sym typeface="Consolas"/>
+            </a:endParaRPr>
+          </a:p>
+          <a:p>
+            <a:pPr indent="0" lvl="0" marL="0" rtl="0" algn="l">
+              <a:lnSpc>
+                <a:spcPct val="115000"/>
+              </a:lnSpc>
+              <a:spcBef>
+                <a:spcPts val="0"/>
+              </a:spcBef>
+              <a:spcAft>
+                <a:spcPts val="0"/>
+              </a:spcAft>
+              <a:buNone/>
+            </a:pPr>
+            <a:r>
+              <a:rPr lang="en" sz="1000">
+                <a:highlight>
+                  <a:schemeClr val="dk2"/>
+                </a:highlight>
+                <a:latin typeface="Consolas"/>
+                <a:ea typeface="Consolas"/>
+                <a:cs typeface="Consolas"/>
+                <a:sym typeface="Consolas"/>
+              </a:rPr>
+              <a:t>    }</a:t>
+            </a:r>
+            <a:endParaRPr sz="1000">
+              <a:solidFill>
+                <a:srgbClr val="CCCCCC"/>
+              </a:solidFill>
+              <a:highlight>
+                <a:schemeClr val="dk2"/>
+              </a:highlight>
+              <a:latin typeface="Consolas"/>
+              <a:ea typeface="Consolas"/>
+              <a:cs typeface="Consolas"/>
+              <a:sym typeface="Consolas"/>
+            </a:endParaRPr>
+          </a:p>
+          <a:p>
+            <a:pPr indent="0" lvl="0" marL="0" rtl="0" algn="l">
+              <a:lnSpc>
+                <a:spcPct val="115000"/>
+              </a:lnSpc>
+              <a:spcBef>
+                <a:spcPts val="0"/>
+              </a:spcBef>
+              <a:spcAft>
+                <a:spcPts val="0"/>
+              </a:spcAft>
+              <a:buNone/>
+            </a:pPr>
+            <a:r>
+              <a:rPr lang="en" sz="1000">
+                <a:highlight>
+                  <a:schemeClr val="dk2"/>
+                </a:highlight>
+                <a:latin typeface="Consolas"/>
+                <a:ea typeface="Consolas"/>
+                <a:cs typeface="Consolas"/>
+                <a:sym typeface="Consolas"/>
+              </a:rPr>
+              <a:t>}</a:t>
+            </a:r>
+            <a:endParaRPr sz="1000">
+              <a:solidFill>
+                <a:srgbClr val="CCCCCC"/>
+              </a:solidFill>
+              <a:highlight>
+                <a:schemeClr val="dk2"/>
+              </a:highlight>
+              <a:latin typeface="Consolas"/>
+              <a:ea typeface="Consolas"/>
+              <a:cs typeface="Consolas"/>
+              <a:sym typeface="Consolas"/>
+            </a:endParaRPr>
+          </a:p>
         </p:txBody>
       </p:sp>
     </p:spTree>
@@ -8688,7 +9652,7 @@
 </p:sld>
 </file>
 
-<file path=ppt/slides/slide14.xml><?xml version="1.0" encoding="utf-8"?>
+<file path=ppt/slides/slide15.xml><?xml version="1.0" encoding="utf-8"?>
 <p:sld xmlns:a="http://schemas.openxmlformats.org/drawingml/2006/main" xmlns:p="http://schemas.openxmlformats.org/presentationml/2006/main" xmlns:r="http://schemas.openxmlformats.org/officeDocument/2006/relationships">
   <p:cSld>
     <p:spTree>
@@ -9046,7 +10010,7 @@
 </p:sld>
 </file>
 
-<file path=ppt/slides/slide15.xml><?xml version="1.0" encoding="utf-8"?>
+<file path=ppt/slides/slide16.xml><?xml version="1.0" encoding="utf-8"?>
 <p:sld xmlns:a="http://schemas.openxmlformats.org/drawingml/2006/main" xmlns:p="http://schemas.openxmlformats.org/presentationml/2006/main" xmlns:r="http://schemas.openxmlformats.org/officeDocument/2006/relationships">
   <p:cSld>
     <p:spTree>
@@ -9173,7 +10137,7 @@
 </p:sld>
 </file>
 
-<file path=ppt/slides/slide16.xml><?xml version="1.0" encoding="utf-8"?>
+<file path=ppt/slides/slide17.xml><?xml version="1.0" encoding="utf-8"?>
 <p:sld xmlns:a="http://schemas.openxmlformats.org/drawingml/2006/main" xmlns:p="http://schemas.openxmlformats.org/presentationml/2006/main" xmlns:r="http://schemas.openxmlformats.org/officeDocument/2006/relationships">
   <p:cSld>
     <p:spTree>
@@ -9692,7 +10656,7 @@
 </p:sld>
 </file>
 
-<file path=ppt/slides/slide17.xml><?xml version="1.0" encoding="utf-8"?>
+<file path=ppt/slides/slide18.xml><?xml version="1.0" encoding="utf-8"?>
 <p:sld xmlns:a="http://schemas.openxmlformats.org/drawingml/2006/main" xmlns:p="http://schemas.openxmlformats.org/presentationml/2006/main" xmlns:r="http://schemas.openxmlformats.org/officeDocument/2006/relationships">
   <p:cSld>
     <p:spTree>
@@ -10602,7 +11566,7 @@
 </p:sld>
 </file>
 
-<file path=ppt/slides/slide18.xml><?xml version="1.0" encoding="utf-8"?>
+<file path=ppt/slides/slide19.xml><?xml version="1.0" encoding="utf-8"?>
 <p:sld xmlns:a="http://schemas.openxmlformats.org/drawingml/2006/main" xmlns:p="http://schemas.openxmlformats.org/presentationml/2006/main" xmlns:r="http://schemas.openxmlformats.org/officeDocument/2006/relationships">
   <p:cSld>
     <p:spTree>
@@ -10729,7 +11693,120 @@
 </p:sld>
 </file>
 
-<file path=ppt/slides/slide19.xml><?xml version="1.0" encoding="utf-8"?>
+<file path=ppt/slides/slide2.xml><?xml version="1.0" encoding="utf-8"?>
+<p:sld xmlns:a="http://schemas.openxmlformats.org/drawingml/2006/main" xmlns:p="http://schemas.openxmlformats.org/presentationml/2006/main" xmlns:r="http://schemas.openxmlformats.org/officeDocument/2006/relationships">
+  <p:cSld>
+    <p:spTree>
+      <p:nvGrpSpPr>
+        <p:cNvPr id="1" name=""/>
+        <p:cNvGrpSpPr/>
+        <p:nvPr/>
+      </p:nvGrpSpPr>
+      <p:grpSpPr/>
+      <p:sp>
+        <p:nvSpPr>
+          <p:cNvPr id="2" name="Title 1"/>
+          <p:cNvSpPr>
+            <a:spLocks noGrp="1"/>
+          </p:cNvSpPr>
+          <p:nvPr>
+            <p:ph type="title"/>
+          </p:nvPr>
+        </p:nvSpPr>
+        <p:spPr>
+          <a:xfrm>
+            <a:off x="311700" y="195615"/>
+            <a:ext cx="8520600" cy="572700"/>
+          </a:xfrm>
+        </p:spPr>
+        <p:txBody>
+          <a:bodyPr/>
+          <a:lstStyle/>
+          <a:p>
+            <a:pPr indent="0" lvl="0" marL="0" rtl="0" algn="l">
+              <a:spcBef>
+                <a:spcPts val="0"/>
+              </a:spcBef>
+              <a:spcAft>
+                <a:spcPts val="0"/>
+              </a:spcAft>
+              <a:buNone/>
+            </a:pPr>
+            <a:r>
+              <a:rPr lang="en"/>
+              <a:t>Pac-Man</a:t>
+            </a:r>
+            <a:endParaRPr/>
+          </a:p>
+        </p:txBody>
+      </p:sp>
+      <p:pic>
+        <p:nvPicPr>
+          <p:cNvPr id="3" name="Picture 2" descr="pac-man.png"/>
+          <p:cNvPicPr>
+            <a:picLocks noChangeAspect="1"/>
+          </p:cNvPicPr>
+          <p:nvPr/>
+        </p:nvPicPr>
+        <p:blipFill>
+          <a:blip r:embed="rId2"/>
+          <a:stretch>
+            <a:fillRect/>
+          </a:stretch>
+        </p:blipFill>
+        <p:spPr>
+          <a:xfrm>
+            <a:off x="3149600" y="960120"/>
+            <a:ext cx="2844800" cy="3657600"/>
+          </a:xfrm>
+          <a:prstGeom prst="rect">
+            <a:avLst/>
+          </a:prstGeom>
+        </p:spPr>
+      </p:pic>
+      <p:sp>
+        <p:nvSpPr>
+          <p:cNvPr id="4" name="TextBox 3"/>
+          <p:cNvSpPr txBox="1"/>
+          <p:nvPr/>
+        </p:nvSpPr>
+        <p:spPr>
+          <a:xfrm>
+            <a:off x="457200" y="4736592"/>
+            <a:ext cx="8229600" cy="274320"/>
+          </a:xfrm>
+          <a:prstGeom prst="rect">
+            <a:avLst/>
+          </a:prstGeom>
+          <a:noFill/>
+        </p:spPr>
+        <p:txBody>
+          <a:bodyPr wrap="square">
+            <a:spAutoFit/>
+          </a:bodyPr>
+          <a:lstStyle/>
+          <a:p>
+            <a:pPr algn="ctr"/>
+            <a:r>
+              <a:rPr sz="900" b="0" i="0">
+                <a:solidFill>
+                  <a:srgbClr val="9AA3AB"/>
+                </a:solidFill>
+              </a:rPr>
+              <a:t>Pac-Man (Namco, 1980). Image: Bandai Namco Entertainment America, CC BY 3.0, via Wikimedia Commons.</a:t>
+            </a:r>
+          </a:p>
+        </p:txBody>
+      </p:sp>
+    </p:spTree>
+  </p:cSld>
+  <p:clrMapOvr>
+    <a:masterClrMapping/>
+  </p:clrMapOvr>
+</p:sld>
+</file>
+
+<file path=ppt/slides/slide20.xml><?xml version="1.0" encoding="utf-8"?>
 <p:sld xmlns:a="http://schemas.openxmlformats.org/drawingml/2006/main" xmlns:p="http://schemas.openxmlformats.org/presentationml/2006/main" xmlns:r="http://schemas.openxmlformats.org/officeDocument/2006/relationships">
   <p:cSld>
     <p:spTree>
@@ -11046,96 +12123,7 @@
 </p:sld>
 </file>
 
-<file path=ppt/slides/slide2.xml><?xml version="1.0" encoding="utf-8"?>
-<p:sld xmlns:a="http://schemas.openxmlformats.org/drawingml/2006/main" xmlns:r="http://schemas.openxmlformats.org/officeDocument/2006/relationships" xmlns:mc="http://schemas.openxmlformats.org/markup-compatibility/2006" xmlns:mv="urn:schemas-microsoft-com:mac:vml" xmlns:p="http://schemas.openxmlformats.org/presentationml/2006/main" xmlns:c="http://schemas.openxmlformats.org/drawingml/2006/chart" xmlns:dgm="http://schemas.openxmlformats.org/drawingml/2006/diagram" xmlns:o="urn:schemas-microsoft-com:office:office" xmlns:v="urn:schemas-microsoft-com:vml" xmlns:pvml="urn:schemas-microsoft-com:office:powerpoint" xmlns:com="http://schemas.openxmlformats.org/drawingml/2006/compatibility" xmlns:p14="http://schemas.microsoft.com/office/powerpoint/2010/main" xmlns:p15="http://schemas.microsoft.com/office/powerpoint/2012/main" xmlns:ahyp="http://schemas.microsoft.com/office/drawing/2018/hyperlinkcolor">
-  <p:cSld>
-    <p:spTree>
-      <p:nvGrpSpPr>
-        <p:cNvPr id="44" name="Shape 44"/>
-        <p:cNvGrpSpPr/>
-        <p:nvPr/>
-      </p:nvGrpSpPr>
-      <p:grpSpPr>
-        <a:xfrm>
-          <a:off x="0" y="0"/>
-          <a:ext cx="0" cy="0"/>
-          <a:chOff x="0" y="0"/>
-          <a:chExt cx="0" cy="0"/>
-        </a:xfrm>
-      </p:grpSpPr>
-      <p:sp>
-        <p:nvSpPr>
-          <p:cNvPr id="45" name="Google Shape;45;p10"/>
-          <p:cNvSpPr txBox="1"/>
-          <p:nvPr>
-            <p:ph type="title"/>
-          </p:nvPr>
-        </p:nvSpPr>
-        <p:spPr>
-          <a:xfrm>
-            <a:off x="311700" y="195615"/>
-            <a:ext cx="8520600" cy="572700"/>
-          </a:xfrm>
-          <a:prstGeom prst="rect">
-            <a:avLst/>
-          </a:prstGeom>
-        </p:spPr>
-        <p:txBody>
-          <a:bodyPr anchorCtr="0" anchor="t" bIns="91425" lIns="91425" spcFirstLastPara="1" rIns="91425" wrap="square" tIns="91425">
-            <a:normAutofit fontScale="90000"/>
-          </a:bodyPr>
-          <a:lstStyle/>
-          <a:p>
-            <a:pPr indent="0" lvl="0" marL="0" rtl="0" algn="l">
-              <a:spcBef>
-                <a:spcPts val="0"/>
-              </a:spcBef>
-              <a:spcAft>
-                <a:spcPts val="0"/>
-              </a:spcAft>
-              <a:buNone/>
-            </a:pPr>
-            <a:r>
-              <a:rPr lang="en"/>
-              <a:t>Today’s Goal</a:t>
-            </a:r>
-            <a:endParaRPr/>
-          </a:p>
-        </p:txBody>
-      </p:sp>
-      <p:pic>
-        <p:nvPicPr>
-          <p:cNvPr id="46" name="Picture 46" descr="pacman-play.png"/>
-          <p:cNvPicPr>
-            <a:picLocks noChangeAspect="1"/>
-          </p:cNvPicPr>
-          <p:nvPr/>
-        </p:nvPicPr>
-        <p:blipFill>
-          <a:blip r:embed="rId4"/>
-          <a:stretch>
-            <a:fillRect/>
-          </a:stretch>
-        </p:blipFill>
-        <p:spPr>
-          <a:xfrm>
-            <a:off x="3101255" y="1531275"/>
-            <a:ext cx="2941489" cy="3256648"/>
-          </a:xfrm>
-          <a:prstGeom prst="rect">
-            <a:avLst/>
-          </a:prstGeom>
-        </p:spPr>
-      </p:pic>
-    </p:spTree>
-  </p:cSld>
-  <p:clrMapOvr>
-    <a:masterClrMapping/>
-  </p:clrMapOvr>
-</p:sld>
-</file>
-
-<file path=ppt/slides/slide20.xml><?xml version="1.0" encoding="utf-8"?>
+<file path=ppt/slides/slide21.xml><?xml version="1.0" encoding="utf-8"?>
 <p:sld xmlns:a="http://schemas.openxmlformats.org/drawingml/2006/main" xmlns:p="http://schemas.openxmlformats.org/presentationml/2006/main" xmlns:r="http://schemas.openxmlformats.org/officeDocument/2006/relationships">
   <p:cSld>
     <p:spTree>
@@ -11879,7 +12867,7 @@
 </p:sld>
 </file>
 
-<file path=ppt/slides/slide21.xml><?xml version="1.0" encoding="utf-8"?>
+<file path=ppt/slides/slide22.xml><?xml version="1.0" encoding="utf-8"?>
 <p:sld xmlns:a="http://schemas.openxmlformats.org/drawingml/2006/main" xmlns:p="http://schemas.openxmlformats.org/presentationml/2006/main" xmlns:r="http://schemas.openxmlformats.org/officeDocument/2006/relationships">
   <p:cSld>
     <p:spTree>
@@ -12447,7 +13435,7 @@
 </p:sld>
 </file>
 
-<file path=ppt/slides/slide22.xml><?xml version="1.0" encoding="utf-8"?>
+<file path=ppt/slides/slide23.xml><?xml version="1.0" encoding="utf-8"?>
 <p:sld xmlns:a="http://schemas.openxmlformats.org/drawingml/2006/main" xmlns:r="http://schemas.openxmlformats.org/officeDocument/2006/relationships" xmlns:mc="http://schemas.openxmlformats.org/markup-compatibility/2006" xmlns:mv="urn:schemas-microsoft-com:mac:vml" xmlns:p="http://schemas.openxmlformats.org/presentationml/2006/main" xmlns:c="http://schemas.openxmlformats.org/drawingml/2006/chart" xmlns:dgm="http://schemas.openxmlformats.org/drawingml/2006/diagram" xmlns:o="urn:schemas-microsoft-com:office:office" xmlns:v="urn:schemas-microsoft-com:vml" xmlns:pvml="urn:schemas-microsoft-com:office:powerpoint" xmlns:com="http://schemas.openxmlformats.org/drawingml/2006/compatibility" xmlns:p14="http://schemas.microsoft.com/office/powerpoint/2010/main" xmlns:p15="http://schemas.microsoft.com/office/powerpoint/2012/main" xmlns:ahyp="http://schemas.microsoft.com/office/drawing/2018/hyperlinkcolor">
   <p:cSld>
     <p:spTree>
@@ -12578,889 +13566,6 @@
   <p:clrMapOvr>
     <a:masterClrMapping/>
   </p:clrMapOvr>
-</p:sld>
-</file>
-
-<file path=ppt/slides/slide23.xml><?xml version="1.0" encoding="utf-8"?>
-<p:sld xmlns:a="http://schemas.openxmlformats.org/drawingml/2006/main" xmlns:r="http://schemas.openxmlformats.org/officeDocument/2006/relationships" xmlns:mc="http://schemas.openxmlformats.org/markup-compatibility/2006" xmlns:mv="urn:schemas-microsoft-com:mac:vml" xmlns:p="http://schemas.openxmlformats.org/presentationml/2006/main" xmlns:c="http://schemas.openxmlformats.org/drawingml/2006/chart" xmlns:dgm="http://schemas.openxmlformats.org/drawingml/2006/diagram" xmlns:o="urn:schemas-microsoft-com:office:office" xmlns:v="urn:schemas-microsoft-com:vml" xmlns:pvml="urn:schemas-microsoft-com:office:powerpoint" xmlns:com="http://schemas.openxmlformats.org/drawingml/2006/compatibility" xmlns:p14="http://schemas.microsoft.com/office/powerpoint/2010/main" xmlns:p15="http://schemas.microsoft.com/office/powerpoint/2012/main" xmlns:ahyp="http://schemas.microsoft.com/office/drawing/2018/hyperlinkcolor">
-  <p:cSld>
-    <p:spTree>
-      <p:nvGrpSpPr>
-        <p:cNvPr id="292" name="Shape 292"/>
-        <p:cNvGrpSpPr/>
-        <p:nvPr/>
-      </p:nvGrpSpPr>
-      <p:grpSpPr>
-        <a:xfrm>
-          <a:off x="0" y="0"/>
-          <a:ext cx="0" cy="0"/>
-          <a:chOff x="0" y="0"/>
-          <a:chExt cx="0" cy="0"/>
-        </a:xfrm>
-      </p:grpSpPr>
-      <p:sp>
-        <p:nvSpPr>
-          <p:cNvPr id="293" name="Google Shape;293;p45"/>
-          <p:cNvSpPr txBox="1"/>
-          <p:nvPr>
-            <p:ph type="title"/>
-          </p:nvPr>
-        </p:nvSpPr>
-        <p:spPr>
-          <a:xfrm>
-            <a:off x="311700" y="195615"/>
-            <a:ext cx="8520600" cy="572700"/>
-          </a:xfrm>
-          <a:prstGeom prst="rect">
-            <a:avLst/>
-          </a:prstGeom>
-        </p:spPr>
-        <p:txBody>
-          <a:bodyPr anchorCtr="0" anchor="t" bIns="91425" lIns="91425" spcFirstLastPara="1" rIns="91425" wrap="square" tIns="91425">
-            <a:normAutofit fontScale="90000"/>
-          </a:bodyPr>
-          <a:lstStyle/>
-          <a:p>
-            <a:pPr indent="0" lvl="0" marL="0" rtl="0" algn="l">
-              <a:spcBef>
-                <a:spcPts val="0"/>
-              </a:spcBef>
-              <a:spcAft>
-                <a:spcPts val="0"/>
-              </a:spcAft>
-              <a:buNone/>
-            </a:pPr>
-            <a:r>
-              <a:rPr lang="en">
-                <a:solidFill>
-                  <a:schemeClr val="accent5"/>
-                </a:solidFill>
-              </a:rPr>
-              <a:t>Exercises</a:t>
-            </a:r>
-            <a:endParaRPr>
-              <a:solidFill>
-                <a:schemeClr val="accent5"/>
-              </a:solidFill>
-            </a:endParaRPr>
-          </a:p>
-        </p:txBody>
-      </p:sp>
-      <p:sp>
-        <p:nvSpPr>
-          <p:cNvPr id="294" name="Google Shape;294;p45"/>
-          <p:cNvSpPr txBox="1"/>
-          <p:nvPr>
-            <p:ph idx="1" type="body"/>
-          </p:nvPr>
-        </p:nvSpPr>
-        <p:spPr>
-          <a:xfrm>
-            <a:off x="311700" y="885950"/>
-            <a:ext cx="8520600" cy="4023300"/>
-          </a:xfrm>
-          <a:prstGeom prst="rect">
-            <a:avLst/>
-          </a:prstGeom>
-        </p:spPr>
-        <p:txBody>
-          <a:bodyPr anchorCtr="0" anchor="t" bIns="91425" lIns="91425" spcFirstLastPara="1" rIns="91425" wrap="square" tIns="91425">
-            <a:normAutofit/>
-          </a:bodyPr>
-          <a:lstStyle/>
-          <a:p>
-            <a:pPr indent="-330200" lvl="0" marL="457200" rtl="0" algn="l">
-              <a:spcBef>
-                <a:spcPts val="0"/>
-              </a:spcBef>
-              <a:spcAft>
-                <a:spcPts val="0"/>
-              </a:spcAft>
-              <a:buSzPts val="1600"/>
-              <a:buChar char="●"/>
-            </a:pPr>
-            <a:r>
-              <a:rPr lang="en"/>
-              <a:t>Start from Pacman4, the finished game</a:t>
-            </a:r>
-            <a:endParaRPr/>
-          </a:p>
-          <a:p>
-            <a:pPr indent="-330200" lvl="0" marL="457200" rtl="0" algn="l">
-              <a:spcBef>
-                <a:spcPts val="0"/>
-              </a:spcBef>
-              <a:spcAft>
-                <a:spcPts val="0"/>
-              </a:spcAft>
-              <a:buSzPts val="1600"/>
-              <a:buChar char="●"/>
-            </a:pPr>
-            <a:r>
-              <a:rPr lang="en"/>
-              <a:t>A new mode: a short pause when a ghost is eaten</a:t>
-            </a:r>
-            <a:endParaRPr/>
-          </a:p>
-          <a:p>
-            <a:pPr indent="-317500" lvl="1" marL="914400" rtl="0" algn="l">
-              <a:spcBef>
-                <a:spcPts val="0"/>
-              </a:spcBef>
-              <a:spcAft>
-                <a:spcPts val="0"/>
-              </a:spcAft>
-              <a:buSzPts val="1400"/>
-              <a:buChar char="○"/>
-            </a:pPr>
-            <a:r>
-              <a:rPr lang="en"/>
-              <a:t>Which classes did you change? Compare with Pacman1’s enum</a:t>
-            </a:r>
-            <a:endParaRPr/>
-          </a:p>
-          <a:p>
-            <a:pPr indent="-330200" lvl="0" marL="457200" rtl="0" algn="l">
-              <a:spcBef>
-                <a:spcPts val="0"/>
-              </a:spcBef>
-              <a:spcAft>
-                <a:spcPts val="0"/>
-              </a:spcAft>
-              <a:buSzPts val="1600"/>
-              <a:buChar char="●"/>
-            </a:pPr>
-            <a:r>
-              <a:rPr lang="en"/>
-              <a:t>A new personality: a fifth ghost with its own strategy</a:t>
-            </a:r>
-            <a:endParaRPr/>
-          </a:p>
-          <a:p>
-            <a:pPr indent="-317500" lvl="1" marL="914400" rtl="0" algn="l">
-              <a:spcBef>
-                <a:spcPts val="0"/>
-              </a:spcBef>
-              <a:spcAft>
-                <a:spcPts val="0"/>
-              </a:spcAft>
-              <a:buSzPts val="1400"/>
-              <a:buChar char="○"/>
-            </a:pPr>
-            <a:r>
-              <a:rPr lang="en"/>
-              <a:t>Write its test first</a:t>
-            </a:r>
-            <a:endParaRPr/>
-          </a:p>
-          <a:p>
-            <a:pPr indent="-330200" lvl="0" marL="457200" rtl="0" algn="l">
-              <a:spcBef>
-                <a:spcPts val="0"/>
-              </a:spcBef>
-              <a:spcAft>
-                <a:spcPts val="0"/>
-              </a:spcAft>
-              <a:buSzPts val="1600"/>
-              <a:buChar char="●"/>
-            </a:pPr>
-            <a:r>
-              <a:rPr lang="en"/>
-              <a:t>Ghosts in the house also turn blue after a power pellet</a:t>
-            </a:r>
-            <a:endParaRPr/>
-          </a:p>
-          <a:p>
-            <a:pPr indent="-317500" lvl="1" marL="914400" rtl="0" algn="l">
-              <a:spcBef>
-                <a:spcPts val="0"/>
-              </a:spcBef>
-              <a:spcAft>
-                <a:spcPts val="0"/>
-              </a:spcAft>
-              <a:buSzPts val="1400"/>
-              <a:buChar char="○"/>
-            </a:pPr>
-            <a:r>
-              <a:rPr lang="en"/>
-              <a:t>What does InHouseState need to remember?</a:t>
-            </a:r>
-            <a:endParaRPr/>
-          </a:p>
-        </p:txBody>
-      </p:sp>
-    </p:spTree>
-  </p:cSld>
-  <p:clrMapOvr>
-    <a:masterClrMapping/>
-  </p:clrMapOvr>
-  <p:timing>
-    <p:tnLst>
-      <p:par>
-        <p:cTn dur="indefinite" nodeType="tmRoot" restart="never">
-          <p:childTnLst>
-            <p:seq concurrent="1" nextAc="seek">
-              <p:cTn dur="indefinite" id="2" nodeType="mainSeq">
-                <p:childTnLst>
-                  <p:par>
-                    <p:cTn fill="hold">
-                      <p:stCondLst>
-                        <p:cond delay="indefinite"/>
-                      </p:stCondLst>
-                      <p:childTnLst>
-                        <p:par>
-                          <p:cTn fill="hold">
-                            <p:stCondLst>
-                              <p:cond delay="0"/>
-                            </p:stCondLst>
-                            <p:childTnLst>
-                              <p:par>
-                                <p:cTn fill="hold" nodeType="clickEffect" presetClass="entr" presetID="1" presetSubtype="0">
-                                  <p:stCondLst>
-                                    <p:cond delay="0"/>
-                                  </p:stCondLst>
-                                  <p:childTnLst>
-                                    <p:set>
-                                      <p:cBhvr>
-                                        <p:cTn dur="1" fill="hold">
-                                          <p:stCondLst>
-                                            <p:cond delay="0"/>
-                                          </p:stCondLst>
-                                        </p:cTn>
-                                        <p:tgtEl>
-                                          <p:spTgt spid="294">
-                                            <p:txEl>
-                                              <p:pRg end="0" st="0"/>
-                                            </p:txEl>
-                                          </p:spTgt>
-                                        </p:tgtEl>
-                                        <p:attrNameLst>
-                                          <p:attrName>style.visibility</p:attrName>
-                                        </p:attrNameLst>
-                                      </p:cBhvr>
-                                      <p:to>
-                                        <p:strVal val="visible"/>
-                                      </p:to>
-                                    </p:set>
-                                  </p:childTnLst>
-                                </p:cTn>
-                              </p:par>
-                            </p:childTnLst>
-                          </p:cTn>
-                        </p:par>
-                      </p:childTnLst>
-                    </p:cTn>
-                  </p:par>
-                  <p:par>
-                    <p:cTn fill="hold">
-                      <p:stCondLst>
-                        <p:cond delay="indefinite"/>
-                      </p:stCondLst>
-                      <p:childTnLst>
-                        <p:par>
-                          <p:cTn fill="hold">
-                            <p:stCondLst>
-                              <p:cond delay="0"/>
-                            </p:stCondLst>
-                            <p:childTnLst>
-                              <p:par>
-                                <p:cTn fill="hold" nodeType="clickEffect" presetClass="entr" presetID="1" presetSubtype="0">
-                                  <p:stCondLst>
-                                    <p:cond delay="0"/>
-                                  </p:stCondLst>
-                                  <p:childTnLst>
-                                    <p:set>
-                                      <p:cBhvr>
-                                        <p:cTn dur="1" fill="hold">
-                                          <p:stCondLst>
-                                            <p:cond delay="0"/>
-                                          </p:stCondLst>
-                                        </p:cTn>
-                                        <p:tgtEl>
-                                          <p:spTgt spid="294">
-                                            <p:txEl>
-                                              <p:pRg end="1" st="1"/>
-                                            </p:txEl>
-                                          </p:spTgt>
-                                        </p:tgtEl>
-                                        <p:attrNameLst>
-                                          <p:attrName>style.visibility</p:attrName>
-                                        </p:attrNameLst>
-                                      </p:cBhvr>
-                                      <p:to>
-                                        <p:strVal val="visible"/>
-                                      </p:to>
-                                    </p:set>
-                                  </p:childTnLst>
-                                </p:cTn>
-                              </p:par>
-                            </p:childTnLst>
-                          </p:cTn>
-                        </p:par>
-                      </p:childTnLst>
-                    </p:cTn>
-                  </p:par>
-                  <p:par>
-                    <p:cTn fill="hold">
-                      <p:stCondLst>
-                        <p:cond delay="indefinite"/>
-                      </p:stCondLst>
-                      <p:childTnLst>
-                        <p:par>
-                          <p:cTn fill="hold">
-                            <p:stCondLst>
-                              <p:cond delay="0"/>
-                            </p:stCondLst>
-                            <p:childTnLst>
-                              <p:par>
-                                <p:cTn fill="hold" nodeType="clickEffect" presetClass="entr" presetID="1" presetSubtype="0">
-                                  <p:stCondLst>
-                                    <p:cond delay="0"/>
-                                  </p:stCondLst>
-                                  <p:childTnLst>
-                                    <p:set>
-                                      <p:cBhvr>
-                                        <p:cTn dur="1" fill="hold">
-                                          <p:stCondLst>
-                                            <p:cond delay="0"/>
-                                          </p:stCondLst>
-                                        </p:cTn>
-                                        <p:tgtEl>
-                                          <p:spTgt spid="294">
-                                            <p:txEl>
-                                              <p:pRg end="2" st="2"/>
-                                            </p:txEl>
-                                          </p:spTgt>
-                                        </p:tgtEl>
-                                        <p:attrNameLst>
-                                          <p:attrName>style.visibility</p:attrName>
-                                        </p:attrNameLst>
-                                      </p:cBhvr>
-                                      <p:to>
-                                        <p:strVal val="visible"/>
-                                      </p:to>
-                                    </p:set>
-                                  </p:childTnLst>
-                                </p:cTn>
-                              </p:par>
-                            </p:childTnLst>
-                          </p:cTn>
-                        </p:par>
-                      </p:childTnLst>
-                    </p:cTn>
-                  </p:par>
-                  <p:par>
-                    <p:cTn fill="hold">
-                      <p:stCondLst>
-                        <p:cond delay="indefinite"/>
-                      </p:stCondLst>
-                      <p:childTnLst>
-                        <p:par>
-                          <p:cTn fill="hold">
-                            <p:stCondLst>
-                              <p:cond delay="0"/>
-                            </p:stCondLst>
-                            <p:childTnLst>
-                              <p:par>
-                                <p:cTn fill="hold" nodeType="clickEffect" presetClass="entr" presetID="1" presetSubtype="0">
-                                  <p:stCondLst>
-                                    <p:cond delay="0"/>
-                                  </p:stCondLst>
-                                  <p:childTnLst>
-                                    <p:set>
-                                      <p:cBhvr>
-                                        <p:cTn dur="1" fill="hold">
-                                          <p:stCondLst>
-                                            <p:cond delay="0"/>
-                                          </p:stCondLst>
-                                        </p:cTn>
-                                        <p:tgtEl>
-                                          <p:spTgt spid="294">
-                                            <p:txEl>
-                                              <p:pRg end="3" st="3"/>
-                                            </p:txEl>
-                                          </p:spTgt>
-                                        </p:tgtEl>
-                                        <p:attrNameLst>
-                                          <p:attrName>style.visibility</p:attrName>
-                                        </p:attrNameLst>
-                                      </p:cBhvr>
-                                      <p:to>
-                                        <p:strVal val="visible"/>
-                                      </p:to>
-                                    </p:set>
-                                  </p:childTnLst>
-                                </p:cTn>
-                              </p:par>
-                            </p:childTnLst>
-                          </p:cTn>
-                        </p:par>
-                      </p:childTnLst>
-                    </p:cTn>
-                  </p:par>
-                  <p:par>
-                    <p:cTn fill="hold">
-                      <p:stCondLst>
-                        <p:cond delay="indefinite"/>
-                      </p:stCondLst>
-                      <p:childTnLst>
-                        <p:par>
-                          <p:cTn fill="hold">
-                            <p:stCondLst>
-                              <p:cond delay="0"/>
-                            </p:stCondLst>
-                            <p:childTnLst>
-                              <p:par>
-                                <p:cTn fill="hold" nodeType="clickEffect" presetClass="entr" presetID="1" presetSubtype="0">
-                                  <p:stCondLst>
-                                    <p:cond delay="0"/>
-                                  </p:stCondLst>
-                                  <p:childTnLst>
-                                    <p:set>
-                                      <p:cBhvr>
-                                        <p:cTn dur="1" fill="hold">
-                                          <p:stCondLst>
-                                            <p:cond delay="0"/>
-                                          </p:stCondLst>
-                                        </p:cTn>
-                                        <p:tgtEl>
-                                          <p:spTgt spid="294">
-                                            <p:txEl>
-                                              <p:pRg end="4" st="4"/>
-                                            </p:txEl>
-                                          </p:spTgt>
-                                        </p:tgtEl>
-                                        <p:attrNameLst>
-                                          <p:attrName>style.visibility</p:attrName>
-                                        </p:attrNameLst>
-                                      </p:cBhvr>
-                                      <p:to>
-                                        <p:strVal val="visible"/>
-                                      </p:to>
-                                    </p:set>
-                                  </p:childTnLst>
-                                </p:cTn>
-                              </p:par>
-                            </p:childTnLst>
-                          </p:cTn>
-                        </p:par>
-                      </p:childTnLst>
-                    </p:cTn>
-                  </p:par>
-                  <p:par>
-                    <p:cTn fill="hold">
-                      <p:stCondLst>
-                        <p:cond delay="indefinite"/>
-                      </p:stCondLst>
-                      <p:childTnLst>
-                        <p:par>
-                          <p:cTn fill="hold">
-                            <p:stCondLst>
-                              <p:cond delay="0"/>
-                            </p:stCondLst>
-                            <p:childTnLst>
-                              <p:par>
-                                <p:cTn fill="hold" nodeType="clickEffect" presetClass="entr" presetID="1" presetSubtype="0">
-                                  <p:stCondLst>
-                                    <p:cond delay="0"/>
-                                  </p:stCondLst>
-                                  <p:childTnLst>
-                                    <p:set>
-                                      <p:cBhvr>
-                                        <p:cTn dur="1" fill="hold">
-                                          <p:stCondLst>
-                                            <p:cond delay="0"/>
-                                          </p:stCondLst>
-                                        </p:cTn>
-                                        <p:tgtEl>
-                                          <p:spTgt spid="294">
-                                            <p:txEl>
-                                              <p:pRg end="5" st="5"/>
-                                            </p:txEl>
-                                          </p:spTgt>
-                                        </p:tgtEl>
-                                        <p:attrNameLst>
-                                          <p:attrName>style.visibility</p:attrName>
-                                        </p:attrNameLst>
-                                      </p:cBhvr>
-                                      <p:to>
-                                        <p:strVal val="visible"/>
-                                      </p:to>
-                                    </p:set>
-                                  </p:childTnLst>
-                                </p:cTn>
-                              </p:par>
-                            </p:childTnLst>
-                          </p:cTn>
-                        </p:par>
-                      </p:childTnLst>
-                    </p:cTn>
-                  </p:par>
-                  <p:par>
-                    <p:cTn fill="hold">
-                      <p:stCondLst>
-                        <p:cond delay="indefinite"/>
-                      </p:stCondLst>
-                      <p:childTnLst>
-                        <p:par>
-                          <p:cTn fill="hold">
-                            <p:stCondLst>
-                              <p:cond delay="0"/>
-                            </p:stCondLst>
-                            <p:childTnLst>
-                              <p:par>
-                                <p:cTn fill="hold" nodeType="clickEffect" presetClass="entr" presetID="1" presetSubtype="0">
-                                  <p:stCondLst>
-                                    <p:cond delay="0"/>
-                                  </p:stCondLst>
-                                  <p:childTnLst>
-                                    <p:set>
-                                      <p:cBhvr>
-                                        <p:cTn dur="1" fill="hold">
-                                          <p:stCondLst>
-                                            <p:cond delay="0"/>
-                                          </p:stCondLst>
-                                        </p:cTn>
-                                        <p:tgtEl>
-                                          <p:spTgt spid="294">
-                                            <p:txEl>
-                                              <p:pRg end="6" st="6"/>
-                                            </p:txEl>
-                                          </p:spTgt>
-                                        </p:tgtEl>
-                                        <p:attrNameLst>
-                                          <p:attrName>style.visibility</p:attrName>
-                                        </p:attrNameLst>
-                                      </p:cBhvr>
-                                      <p:to>
-                                        <p:strVal val="visible"/>
-                                      </p:to>
-                                    </p:set>
-                                  </p:childTnLst>
-                                </p:cTn>
-                              </p:par>
-                            </p:childTnLst>
-                          </p:cTn>
-                        </p:par>
-                      </p:childTnLst>
-                    </p:cTn>
-                  </p:par>
-                  <p:par>
-                    <p:cTn fill="hold">
-                      <p:stCondLst>
-                        <p:cond delay="indefinite"/>
-                      </p:stCondLst>
-                      <p:childTnLst>
-                        <p:par>
-                          <p:cTn fill="hold">
-                            <p:stCondLst>
-                              <p:cond delay="0"/>
-                            </p:stCondLst>
-                            <p:childTnLst>
-                              <p:par>
-                                <p:cTn fill="hold" nodeType="clickEffect" presetClass="entr" presetID="1" presetSubtype="0">
-                                  <p:stCondLst>
-                                    <p:cond delay="0"/>
-                                  </p:stCondLst>
-                                  <p:childTnLst>
-                                    <p:set>
-                                      <p:cBhvr>
-                                        <p:cTn dur="1" fill="hold">
-                                          <p:stCondLst>
-                                            <p:cond delay="0"/>
-                                          </p:stCondLst>
-                                        </p:cTn>
-                                        <p:tgtEl>
-                                          <p:spTgt spid="294">
-                                            <p:txEl>
-                                              <p:pRg end="7" st="7"/>
-                                            </p:txEl>
-                                          </p:spTgt>
-                                        </p:tgtEl>
-                                        <p:attrNameLst>
-                                          <p:attrName>style.visibility</p:attrName>
-                                        </p:attrNameLst>
-                                      </p:cBhvr>
-                                      <p:to>
-                                        <p:strVal val="visible"/>
-                                      </p:to>
-                                    </p:set>
-                                  </p:childTnLst>
-                                </p:cTn>
-                              </p:par>
-                            </p:childTnLst>
-                          </p:cTn>
-                        </p:par>
-                      </p:childTnLst>
-                    </p:cTn>
-                  </p:par>
-                  <p:par>
-                    <p:cTn fill="hold">
-                      <p:stCondLst>
-                        <p:cond delay="indefinite"/>
-                      </p:stCondLst>
-                      <p:childTnLst>
-                        <p:par>
-                          <p:cTn fill="hold">
-                            <p:stCondLst>
-                              <p:cond delay="0"/>
-                            </p:stCondLst>
-                            <p:childTnLst>
-                              <p:par>
-                                <p:cTn fill="hold" nodeType="clickEffect" presetClass="entr" presetID="1" presetSubtype="0">
-                                  <p:stCondLst>
-                                    <p:cond delay="0"/>
-                                  </p:stCondLst>
-                                  <p:childTnLst>
-                                    <p:set>
-                                      <p:cBhvr>
-                                        <p:cTn dur="1" fill="hold">
-                                          <p:stCondLst>
-                                            <p:cond delay="0"/>
-                                          </p:stCondLst>
-                                        </p:cTn>
-                                        <p:tgtEl>
-                                          <p:spTgt spid="294">
-                                            <p:txEl>
-                                              <p:pRg end="8" st="8"/>
-                                            </p:txEl>
-                                          </p:spTgt>
-                                        </p:tgtEl>
-                                        <p:attrNameLst>
-                                          <p:attrName>style.visibility</p:attrName>
-                                        </p:attrNameLst>
-                                      </p:cBhvr>
-                                      <p:to>
-                                        <p:strVal val="visible"/>
-                                      </p:to>
-                                    </p:set>
-                                  </p:childTnLst>
-                                </p:cTn>
-                              </p:par>
-                            </p:childTnLst>
-                          </p:cTn>
-                        </p:par>
-                      </p:childTnLst>
-                    </p:cTn>
-                  </p:par>
-                  <p:par>
-                    <p:cTn fill="hold">
-                      <p:stCondLst>
-                        <p:cond delay="indefinite"/>
-                      </p:stCondLst>
-                      <p:childTnLst>
-                        <p:par>
-                          <p:cTn fill="hold">
-                            <p:stCondLst>
-                              <p:cond delay="0"/>
-                            </p:stCondLst>
-                            <p:childTnLst>
-                              <p:par>
-                                <p:cTn fill="hold" nodeType="clickEffect" presetClass="entr" presetID="1" presetSubtype="0">
-                                  <p:stCondLst>
-                                    <p:cond delay="0"/>
-                                  </p:stCondLst>
-                                  <p:childTnLst>
-                                    <p:set>
-                                      <p:cBhvr>
-                                        <p:cTn dur="1" fill="hold">
-                                          <p:stCondLst>
-                                            <p:cond delay="0"/>
-                                          </p:stCondLst>
-                                        </p:cTn>
-                                        <p:tgtEl>
-                                          <p:spTgt spid="294">
-                                            <p:txEl>
-                                              <p:pRg end="9" st="9"/>
-                                            </p:txEl>
-                                          </p:spTgt>
-                                        </p:tgtEl>
-                                        <p:attrNameLst>
-                                          <p:attrName>style.visibility</p:attrName>
-                                        </p:attrNameLst>
-                                      </p:cBhvr>
-                                      <p:to>
-                                        <p:strVal val="visible"/>
-                                      </p:to>
-                                    </p:set>
-                                  </p:childTnLst>
-                                </p:cTn>
-                              </p:par>
-                            </p:childTnLst>
-                          </p:cTn>
-                        </p:par>
-                      </p:childTnLst>
-                    </p:cTn>
-                  </p:par>
-                  <p:par>
-                    <p:cTn fill="hold">
-                      <p:stCondLst>
-                        <p:cond delay="indefinite"/>
-                      </p:stCondLst>
-                      <p:childTnLst>
-                        <p:par>
-                          <p:cTn fill="hold">
-                            <p:stCondLst>
-                              <p:cond delay="0"/>
-                            </p:stCondLst>
-                            <p:childTnLst>
-                              <p:par>
-                                <p:cTn fill="hold" nodeType="clickEffect" presetClass="entr" presetID="1" presetSubtype="0">
-                                  <p:stCondLst>
-                                    <p:cond delay="0"/>
-                                  </p:stCondLst>
-                                  <p:childTnLst>
-                                    <p:set>
-                                      <p:cBhvr>
-                                        <p:cTn dur="1" fill="hold">
-                                          <p:stCondLst>
-                                            <p:cond delay="0"/>
-                                          </p:stCondLst>
-                                        </p:cTn>
-                                        <p:tgtEl>
-                                          <p:spTgt spid="294">
-                                            <p:txEl>
-                                              <p:pRg end="10" st="10"/>
-                                            </p:txEl>
-                                          </p:spTgt>
-                                        </p:tgtEl>
-                                        <p:attrNameLst>
-                                          <p:attrName>style.visibility</p:attrName>
-                                        </p:attrNameLst>
-                                      </p:cBhvr>
-                                      <p:to>
-                                        <p:strVal val="visible"/>
-                                      </p:to>
-                                    </p:set>
-                                  </p:childTnLst>
-                                </p:cTn>
-                              </p:par>
-                            </p:childTnLst>
-                          </p:cTn>
-                        </p:par>
-                      </p:childTnLst>
-                    </p:cTn>
-                  </p:par>
-                  <p:par>
-                    <p:cTn fill="hold">
-                      <p:stCondLst>
-                        <p:cond delay="indefinite"/>
-                      </p:stCondLst>
-                      <p:childTnLst>
-                        <p:par>
-                          <p:cTn fill="hold">
-                            <p:stCondLst>
-                              <p:cond delay="0"/>
-                            </p:stCondLst>
-                            <p:childTnLst>
-                              <p:par>
-                                <p:cTn fill="hold" nodeType="clickEffect" presetClass="entr" presetID="1" presetSubtype="0">
-                                  <p:stCondLst>
-                                    <p:cond delay="0"/>
-                                  </p:stCondLst>
-                                  <p:childTnLst>
-                                    <p:set>
-                                      <p:cBhvr>
-                                        <p:cTn dur="1" fill="hold">
-                                          <p:stCondLst>
-                                            <p:cond delay="0"/>
-                                          </p:stCondLst>
-                                        </p:cTn>
-                                        <p:tgtEl>
-                                          <p:spTgt spid="294">
-                                            <p:txEl>
-                                              <p:pRg end="11" st="11"/>
-                                            </p:txEl>
-                                          </p:spTgt>
-                                        </p:tgtEl>
-                                        <p:attrNameLst>
-                                          <p:attrName>style.visibility</p:attrName>
-                                        </p:attrNameLst>
-                                      </p:cBhvr>
-                                      <p:to>
-                                        <p:strVal val="visible"/>
-                                      </p:to>
-                                    </p:set>
-                                  </p:childTnLst>
-                                </p:cTn>
-                              </p:par>
-                            </p:childTnLst>
-                          </p:cTn>
-                        </p:par>
-                      </p:childTnLst>
-                    </p:cTn>
-                  </p:par>
-                  <p:par>
-                    <p:cTn fill="hold">
-                      <p:stCondLst>
-                        <p:cond delay="indefinite"/>
-                      </p:stCondLst>
-                      <p:childTnLst>
-                        <p:par>
-                          <p:cTn fill="hold">
-                            <p:stCondLst>
-                              <p:cond delay="0"/>
-                            </p:stCondLst>
-                            <p:childTnLst>
-                              <p:par>
-                                <p:cTn fill="hold" nodeType="clickEffect" presetClass="entr" presetID="1" presetSubtype="0">
-                                  <p:stCondLst>
-                                    <p:cond delay="0"/>
-                                  </p:stCondLst>
-                                  <p:childTnLst>
-                                    <p:set>
-                                      <p:cBhvr>
-                                        <p:cTn dur="1" fill="hold">
-                                          <p:stCondLst>
-                                            <p:cond delay="0"/>
-                                          </p:stCondLst>
-                                        </p:cTn>
-                                        <p:tgtEl>
-                                          <p:spTgt spid="294">
-                                            <p:txEl>
-                                              <p:pRg end="12" st="12"/>
-                                            </p:txEl>
-                                          </p:spTgt>
-                                        </p:tgtEl>
-                                        <p:attrNameLst>
-                                          <p:attrName>style.visibility</p:attrName>
-                                        </p:attrNameLst>
-                                      </p:cBhvr>
-                                      <p:to>
-                                        <p:strVal val="visible"/>
-                                      </p:to>
-                                    </p:set>
-                                  </p:childTnLst>
-                                </p:cTn>
-                              </p:par>
-                            </p:childTnLst>
-                          </p:cTn>
-                        </p:par>
-                      </p:childTnLst>
-                    </p:cTn>
-                  </p:par>
-                </p:childTnLst>
-              </p:cTn>
-              <p:prevCondLst>
-                <p:cond evt="onPrev">
-                  <p:tgtEl>
-                    <p:sldTgt/>
-                  </p:tgtEl>
-                </p:cond>
-              </p:prevCondLst>
-              <p:nextCondLst>
-                <p:cond evt="onNext">
-                  <p:tgtEl>
-                    <p:sldTgt/>
-                  </p:tgtEl>
-                </p:cond>
-              </p:nextCondLst>
-            </p:seq>
-          </p:childTnLst>
-        </p:cTn>
-      </p:par>
-    </p:tnLst>
-  </p:timing>
 </p:sld>
 </file>
 
@@ -13519,7 +13624,7 @@
                   <a:schemeClr val="accent5"/>
                 </a:solidFill>
               </a:rPr>
-              <a:t>Exercises (Stretch)</a:t>
+              <a:t>Exercises</a:t>
             </a:r>
             <a:endParaRPr>
               <a:solidFill>
@@ -13564,7 +13669,24 @@
             </a:pPr>
             <a:r>
               <a:rPr lang="en"/>
-              <a:t>Fruit: after 70 dots, a fruit appears below the house for ten seconds</a:t>
+              <a:t>Start from Pacman4, the finished game</a:t>
+            </a:r>
+            <a:endParaRPr/>
+          </a:p>
+          <a:p>
+            <a:pPr indent="-330200" lvl="0" marL="457200" rtl="0" algn="l">
+              <a:spcBef>
+                <a:spcPts val="0"/>
+              </a:spcBef>
+              <a:spcAft>
+                <a:spcPts val="0"/>
+              </a:spcAft>
+              <a:buSzPts val="1600"/>
+              <a:buChar char="●"/>
+            </a:pPr>
+            <a:r>
+              <a:rPr lang="en"/>
+              <a:t>A new mode: a short pause when a ghost is eaten</a:t>
             </a:r>
             <a:endParaRPr/>
           </a:p>
@@ -13581,7 +13703,7 @@
             </a:pPr>
             <a:r>
               <a:rPr lang="en"/>
-              <a:t>Where does that rule belong: World, Maze, or a class of its own?</a:t>
+              <a:t>Which classes did you change? Compare with Pacman1’s enum</a:t>
             </a:r>
             <a:endParaRPr/>
           </a:p>
@@ -13598,7 +13720,7 @@
             </a:pPr>
             <a:r>
               <a:rPr lang="en"/>
-              <a:t>Tunnel: ghosts slow down in the tunnel</a:t>
+              <a:t>A new personality: a fifth ghost with its own strategy</a:t>
             </a:r>
             <a:endParaRPr/>
           </a:p>
@@ -13615,7 +13737,41 @@
             </a:pPr>
             <a:r>
               <a:rPr lang="en"/>
-              <a:t>Which class knows the ghost is in the tunnel, and which how fast to go?</a:t>
+              <a:t>Write its test first</a:t>
+            </a:r>
+            <a:endParaRPr/>
+          </a:p>
+          <a:p>
+            <a:pPr indent="-330200" lvl="0" marL="457200" rtl="0" algn="l">
+              <a:spcBef>
+                <a:spcPts val="0"/>
+              </a:spcBef>
+              <a:spcAft>
+                <a:spcPts val="0"/>
+              </a:spcAft>
+              <a:buSzPts val="1600"/>
+              <a:buChar char="●"/>
+            </a:pPr>
+            <a:r>
+              <a:rPr lang="en"/>
+              <a:t>Ghosts in the house also turn blue after a power pellet</a:t>
+            </a:r>
+            <a:endParaRPr/>
+          </a:p>
+          <a:p>
+            <a:pPr indent="-317500" lvl="1" marL="914400" rtl="0" algn="l">
+              <a:spcBef>
+                <a:spcPts val="0"/>
+              </a:spcBef>
+              <a:spcAft>
+                <a:spcPts val="0"/>
+              </a:spcAft>
+              <a:buSzPts val="1400"/>
+              <a:buChar char="○"/>
+            </a:pPr>
+            <a:r>
+              <a:rPr lang="en"/>
+              <a:t>What does InHouseState need to remember?</a:t>
             </a:r>
             <a:endParaRPr/>
           </a:p>
@@ -14297,179 +14453,6 @@
 </file>
 
 <file path=ppt/slides/slide25.xml><?xml version="1.0" encoding="utf-8"?>
-<p:sld xmlns:a="http://schemas.openxmlformats.org/drawingml/2006/main" xmlns:p="http://schemas.openxmlformats.org/presentationml/2006/main" xmlns:r="http://schemas.openxmlformats.org/officeDocument/2006/relationships">
-  <p:cSld>
-    <p:spTree>
-      <p:nvGrpSpPr>
-        <p:cNvPr id="1" name=""/>
-        <p:cNvGrpSpPr/>
-        <p:nvPr/>
-      </p:nvGrpSpPr>
-      <p:grpSpPr/>
-      <p:sp>
-        <p:nvSpPr>
-          <p:cNvPr id="2" name="Title 1"/>
-          <p:cNvSpPr>
-            <a:spLocks noGrp="1"/>
-          </p:cNvSpPr>
-          <p:nvPr>
-            <p:ph type="title"/>
-          </p:nvPr>
-        </p:nvSpPr>
-        <p:spPr/>
-        <p:txBody>
-          <a:bodyPr/>
-          <a:lstStyle/>
-          <a:p>
-            <a:pPr indent="0" lvl="0" marL="0" rtl="0" algn="l">
-              <a:spcBef>
-                <a:spcPts val="0"/>
-              </a:spcBef>
-              <a:spcAft>
-                <a:spcPts val="0"/>
-              </a:spcAft>
-              <a:buNone/>
-            </a:pPr>
-            <a:r>
-              <a:rPr lang="en"/>
-              <a:t>Check Yourself</a:t>
-            </a:r>
-            <a:endParaRPr/>
-          </a:p>
-        </p:txBody>
-      </p:sp>
-      <p:sp>
-        <p:nvSpPr>
-          <p:cNvPr id="3" name="Text Placeholder 2"/>
-          <p:cNvSpPr>
-            <a:spLocks noGrp="1"/>
-          </p:cNvSpPr>
-          <p:nvPr>
-            <p:ph type="body" idx="1"/>
-          </p:nvPr>
-        </p:nvSpPr>
-        <p:spPr>
-          <a:xfrm>
-            <a:off x="311700" y="885950"/>
-            <a:ext cx="8520600" cy="1719072"/>
-          </a:xfrm>
-        </p:spPr>
-        <p:txBody>
-          <a:bodyPr/>
-          <a:lstStyle/>
-          <a:p>
-            <a:pPr indent="-330200" lvl="0" marL="457200" rtl="0" algn="l">
-              <a:spcBef>
-                <a:spcPts val="0"/>
-              </a:spcBef>
-              <a:spcAft>
-                <a:spcPts val="0"/>
-              </a:spcAft>
-              <a:buSzPts val="1600"/>
-              <a:buChar char="●"/>
-            </a:pPr>
-            <a:r>
-              <a:rPr lang="en"/>
-              <a:t>What problems does the enum version of the ghost have?</a:t>
-            </a:r>
-            <a:endParaRPr/>
-          </a:p>
-          <a:p>
-            <a:pPr indent="-330200" lvl="0" marL="457200" rtl="0" algn="l">
-              <a:spcBef>
-                <a:spcPts val="0"/>
-              </a:spcBef>
-              <a:spcAft>
-                <a:spcPts val="0"/>
-              </a:spcAft>
-              <a:buSzPts val="1600"/>
-              <a:buChar char="●"/>
-            </a:pPr>
-            <a:r>
-              <a:rPr lang="en"/>
-              <a:t>In the State pattern, who decides when to change state?</a:t>
-            </a:r>
-            <a:endParaRPr/>
-          </a:p>
-          <a:p>
-            <a:pPr indent="-330200" lvl="0" marL="457200" rtl="0" algn="l">
-              <a:spcBef>
-                <a:spcPts val="0"/>
-              </a:spcBef>
-              <a:spcAft>
-                <a:spcPts val="0"/>
-              </a:spcAft>
-              <a:buSzPts val="1600"/>
-              <a:buChar char="●"/>
-            </a:pPr>
-            <a:r>
-              <a:rPr lang="en"/>
-              <a:t>What are Enter and Exit for?</a:t>
-            </a:r>
-            <a:endParaRPr/>
-          </a:p>
-          <a:p>
-            <a:pPr indent="-330200" lvl="0" marL="457200" rtl="0" algn="l">
-              <a:spcBef>
-                <a:spcPts val="0"/>
-              </a:spcBef>
-              <a:spcAft>
-                <a:spcPts val="0"/>
-              </a:spcAft>
-              <a:buSzPts val="1600"/>
-              <a:buChar char="●"/>
-            </a:pPr>
-            <a:r>
-              <a:rPr lang="en"/>
-              <a:t>State and Strategy have the same structure. How do they differ?</a:t>
-            </a:r>
-            <a:endParaRPr/>
-          </a:p>
-        </p:txBody>
-      </p:sp>
-      <p:sp>
-        <p:nvSpPr>
-          <p:cNvPr id="4" name="TextBox 3"/>
-          <p:cNvSpPr txBox="1"/>
-          <p:nvPr/>
-        </p:nvSpPr>
-        <p:spPr>
-          <a:xfrm>
-            <a:off x="457200" y="3182112"/>
-            <a:ext cx="8229600" cy="457200"/>
-          </a:xfrm>
-          <a:prstGeom prst="rect">
-            <a:avLst/>
-          </a:prstGeom>
-          <a:noFill/>
-        </p:spPr>
-        <p:txBody>
-          <a:bodyPr wrap="square">
-            <a:spAutoFit/>
-          </a:bodyPr>
-          <a:lstStyle/>
-          <a:p>
-            <a:pPr algn="ctr"/>
-            <a:r>
-              <a:rPr sz="1400" b="0" i="0">
-                <a:solidFill>
-                  <a:srgbClr val="9AA3AB"/>
-                </a:solidFill>
-              </a:rPr>
-              <a:t>The answers, and more questions, are on the course site.</a:t>
-            </a:r>
-          </a:p>
-        </p:txBody>
-      </p:sp>
-    </p:spTree>
-  </p:cSld>
-  <p:clrMapOvr>
-    <a:masterClrMapping/>
-  </p:clrMapOvr>
-</p:sld>
-</file>
-
-<file path=ppt/slides/slide26.xml><?xml version="1.0" encoding="utf-8"?>
 <p:sld xmlns:a="http://schemas.openxmlformats.org/drawingml/2006/main" xmlns:r="http://schemas.openxmlformats.org/officeDocument/2006/relationships" xmlns:mc="http://schemas.openxmlformats.org/markup-compatibility/2006" xmlns:mv="urn:schemas-microsoft-com:mac:vml" xmlns:p="http://schemas.openxmlformats.org/presentationml/2006/main" xmlns:c="http://schemas.openxmlformats.org/drawingml/2006/chart" xmlns:dgm="http://schemas.openxmlformats.org/drawingml/2006/diagram" xmlns:o="urn:schemas-microsoft-com:office:office" xmlns:v="urn:schemas-microsoft-com:vml" xmlns:pvml="urn:schemas-microsoft-com:office:powerpoint" xmlns:com="http://schemas.openxmlformats.org/drawingml/2006/compatibility" xmlns:p14="http://schemas.microsoft.com/office/powerpoint/2010/main" xmlns:p15="http://schemas.microsoft.com/office/powerpoint/2012/main" xmlns:ahyp="http://schemas.microsoft.com/office/drawing/2018/hyperlinkcolor">
   <p:cSld>
     <p:spTree>
@@ -14524,7 +14507,7 @@
                   <a:schemeClr val="accent5"/>
                 </a:solidFill>
               </a:rPr>
-              <a:t>Apply It to Your Project</a:t>
+              <a:t>Exercises (Stretch)</a:t>
             </a:r>
             <a:endParaRPr>
               <a:solidFill>
@@ -14569,7 +14552,7 @@
             </a:pPr>
             <a:r>
               <a:rPr lang="en"/>
-              <a:t>Which objects in your game have modes?</a:t>
+              <a:t>Fruit: after 70 dots, a fruit appears below the house for ten seconds</a:t>
             </a:r>
             <a:endParaRPr/>
           </a:p>
@@ -14586,7 +14569,7 @@
             </a:pPr>
             <a:r>
               <a:rPr lang="en"/>
-              <a:t>Flags, an enum, or state objects?</a:t>
+              <a:t>Where does that rule belong: World, Maze, or a class of its own?</a:t>
             </a:r>
             <a:endParaRPr/>
           </a:p>
@@ -14603,24 +14586,7 @@
             </a:pPr>
             <a:r>
               <a:rPr lang="en"/>
-              <a:t>Where do you switch over a mode in more than one method?</a:t>
-            </a:r>
-            <a:endParaRPr/>
-          </a:p>
-          <a:p>
-            <a:pPr indent="-330200" lvl="0" marL="457200" rtl="0" algn="l">
-              <a:spcBef>
-                <a:spcPts val="0"/>
-              </a:spcBef>
-              <a:spcAft>
-                <a:spcPts val="0"/>
-              </a:spcAft>
-              <a:buSzPts val="1600"/>
-              <a:buChar char="●"/>
-            </a:pPr>
-            <a:r>
-              <a:rPr lang="en"/>
-              <a:t>A behaviour that differs per object, but never changes for one object?</a:t>
+              <a:t>Tunnel: ghosts slow down in the tunnel</a:t>
             </a:r>
             <a:endParaRPr/>
           </a:p>
@@ -14637,7 +14603,7 @@
             </a:pPr>
             <a:r>
               <a:rPr lang="en"/>
-              <a:t>That’s a strategy</a:t>
+              <a:t>Which class knows the ghost is in the tunnel, and which how fast to go?</a:t>
             </a:r>
             <a:endParaRPr/>
           </a:p>
@@ -15318,7 +15284,1029 @@
 </p:sld>
 </file>
 
+<file path=ppt/slides/slide26.xml><?xml version="1.0" encoding="utf-8"?>
+<p:sld xmlns:a="http://schemas.openxmlformats.org/drawingml/2006/main" xmlns:p="http://schemas.openxmlformats.org/presentationml/2006/main" xmlns:r="http://schemas.openxmlformats.org/officeDocument/2006/relationships">
+  <p:cSld>
+    <p:spTree>
+      <p:nvGrpSpPr>
+        <p:cNvPr id="1" name=""/>
+        <p:cNvGrpSpPr/>
+        <p:nvPr/>
+      </p:nvGrpSpPr>
+      <p:grpSpPr/>
+      <p:sp>
+        <p:nvSpPr>
+          <p:cNvPr id="2" name="Title 1"/>
+          <p:cNvSpPr>
+            <a:spLocks noGrp="1"/>
+          </p:cNvSpPr>
+          <p:nvPr>
+            <p:ph type="title"/>
+          </p:nvPr>
+        </p:nvSpPr>
+        <p:spPr/>
+        <p:txBody>
+          <a:bodyPr/>
+          <a:lstStyle/>
+          <a:p>
+            <a:pPr indent="0" lvl="0" marL="0" rtl="0" algn="l">
+              <a:spcBef>
+                <a:spcPts val="0"/>
+              </a:spcBef>
+              <a:spcAft>
+                <a:spcPts val="0"/>
+              </a:spcAft>
+              <a:buNone/>
+            </a:pPr>
+            <a:r>
+              <a:rPr lang="en"/>
+              <a:t>Check Yourself</a:t>
+            </a:r>
+            <a:endParaRPr/>
+          </a:p>
+        </p:txBody>
+      </p:sp>
+      <p:sp>
+        <p:nvSpPr>
+          <p:cNvPr id="3" name="Text Placeholder 2"/>
+          <p:cNvSpPr>
+            <a:spLocks noGrp="1"/>
+          </p:cNvSpPr>
+          <p:nvPr>
+            <p:ph type="body" idx="1"/>
+          </p:nvPr>
+        </p:nvSpPr>
+        <p:spPr>
+          <a:xfrm>
+            <a:off x="311700" y="885950"/>
+            <a:ext cx="8520600" cy="1719072"/>
+          </a:xfrm>
+        </p:spPr>
+        <p:txBody>
+          <a:bodyPr/>
+          <a:lstStyle/>
+          <a:p>
+            <a:pPr indent="-330200" lvl="0" marL="457200" rtl="0" algn="l">
+              <a:spcBef>
+                <a:spcPts val="0"/>
+              </a:spcBef>
+              <a:spcAft>
+                <a:spcPts val="0"/>
+              </a:spcAft>
+              <a:buSzPts val="1600"/>
+              <a:buChar char="●"/>
+            </a:pPr>
+            <a:r>
+              <a:rPr lang="en"/>
+              <a:t>What problems does the enum version of the ghost have?</a:t>
+            </a:r>
+            <a:endParaRPr/>
+          </a:p>
+          <a:p>
+            <a:pPr indent="-330200" lvl="0" marL="457200" rtl="0" algn="l">
+              <a:spcBef>
+                <a:spcPts val="0"/>
+              </a:spcBef>
+              <a:spcAft>
+                <a:spcPts val="0"/>
+              </a:spcAft>
+              <a:buSzPts val="1600"/>
+              <a:buChar char="●"/>
+            </a:pPr>
+            <a:r>
+              <a:rPr lang="en"/>
+              <a:t>In the State pattern, who decides when to change state?</a:t>
+            </a:r>
+            <a:endParaRPr/>
+          </a:p>
+          <a:p>
+            <a:pPr indent="-330200" lvl="0" marL="457200" rtl="0" algn="l">
+              <a:spcBef>
+                <a:spcPts val="0"/>
+              </a:spcBef>
+              <a:spcAft>
+                <a:spcPts val="0"/>
+              </a:spcAft>
+              <a:buSzPts val="1600"/>
+              <a:buChar char="●"/>
+            </a:pPr>
+            <a:r>
+              <a:rPr lang="en"/>
+              <a:t>What are Enter and Exit for?</a:t>
+            </a:r>
+            <a:endParaRPr/>
+          </a:p>
+          <a:p>
+            <a:pPr indent="-330200" lvl="0" marL="457200" rtl="0" algn="l">
+              <a:spcBef>
+                <a:spcPts val="0"/>
+              </a:spcBef>
+              <a:spcAft>
+                <a:spcPts val="0"/>
+              </a:spcAft>
+              <a:buSzPts val="1600"/>
+              <a:buChar char="●"/>
+            </a:pPr>
+            <a:r>
+              <a:rPr lang="en"/>
+              <a:t>State and Strategy have the same structure. How do they differ?</a:t>
+            </a:r>
+            <a:endParaRPr/>
+          </a:p>
+        </p:txBody>
+      </p:sp>
+      <p:sp>
+        <p:nvSpPr>
+          <p:cNvPr id="4" name="TextBox 3"/>
+          <p:cNvSpPr txBox="1"/>
+          <p:nvPr/>
+        </p:nvSpPr>
+        <p:spPr>
+          <a:xfrm>
+            <a:off x="457200" y="3182112"/>
+            <a:ext cx="8229600" cy="457200"/>
+          </a:xfrm>
+          <a:prstGeom prst="rect">
+            <a:avLst/>
+          </a:prstGeom>
+          <a:noFill/>
+        </p:spPr>
+        <p:txBody>
+          <a:bodyPr wrap="square">
+            <a:spAutoFit/>
+          </a:bodyPr>
+          <a:lstStyle/>
+          <a:p>
+            <a:pPr algn="ctr"/>
+            <a:r>
+              <a:rPr sz="1400" b="0" i="0">
+                <a:solidFill>
+                  <a:srgbClr val="9AA3AB"/>
+                </a:solidFill>
+              </a:rPr>
+              <a:t>The answers, and more questions, are on the course site.</a:t>
+            </a:r>
+          </a:p>
+        </p:txBody>
+      </p:sp>
+    </p:spTree>
+  </p:cSld>
+  <p:clrMapOvr>
+    <a:masterClrMapping/>
+  </p:clrMapOvr>
+</p:sld>
+</file>
+
 <file path=ppt/slides/slide27.xml><?xml version="1.0" encoding="utf-8"?>
+<p:sld xmlns:a="http://schemas.openxmlformats.org/drawingml/2006/main" xmlns:r="http://schemas.openxmlformats.org/officeDocument/2006/relationships" xmlns:mc="http://schemas.openxmlformats.org/markup-compatibility/2006" xmlns:mv="urn:schemas-microsoft-com:mac:vml" xmlns:p="http://schemas.openxmlformats.org/presentationml/2006/main" xmlns:c="http://schemas.openxmlformats.org/drawingml/2006/chart" xmlns:dgm="http://schemas.openxmlformats.org/drawingml/2006/diagram" xmlns:o="urn:schemas-microsoft-com:office:office" xmlns:v="urn:schemas-microsoft-com:vml" xmlns:pvml="urn:schemas-microsoft-com:office:powerpoint" xmlns:com="http://schemas.openxmlformats.org/drawingml/2006/compatibility" xmlns:p14="http://schemas.microsoft.com/office/powerpoint/2010/main" xmlns:p15="http://schemas.microsoft.com/office/powerpoint/2012/main" xmlns:ahyp="http://schemas.microsoft.com/office/drawing/2018/hyperlinkcolor">
+  <p:cSld>
+    <p:spTree>
+      <p:nvGrpSpPr>
+        <p:cNvPr id="292" name="Shape 292"/>
+        <p:cNvGrpSpPr/>
+        <p:nvPr/>
+      </p:nvGrpSpPr>
+      <p:grpSpPr>
+        <a:xfrm>
+          <a:off x="0" y="0"/>
+          <a:ext cx="0" cy="0"/>
+          <a:chOff x="0" y="0"/>
+          <a:chExt cx="0" cy="0"/>
+        </a:xfrm>
+      </p:grpSpPr>
+      <p:sp>
+        <p:nvSpPr>
+          <p:cNvPr id="293" name="Google Shape;293;p45"/>
+          <p:cNvSpPr txBox="1"/>
+          <p:nvPr>
+            <p:ph type="title"/>
+          </p:nvPr>
+        </p:nvSpPr>
+        <p:spPr>
+          <a:xfrm>
+            <a:off x="311700" y="195615"/>
+            <a:ext cx="8520600" cy="572700"/>
+          </a:xfrm>
+          <a:prstGeom prst="rect">
+            <a:avLst/>
+          </a:prstGeom>
+        </p:spPr>
+        <p:txBody>
+          <a:bodyPr anchorCtr="0" anchor="t" bIns="91425" lIns="91425" spcFirstLastPara="1" rIns="91425" wrap="square" tIns="91425">
+            <a:normAutofit fontScale="90000"/>
+          </a:bodyPr>
+          <a:lstStyle/>
+          <a:p>
+            <a:pPr indent="0" lvl="0" marL="0" rtl="0" algn="l">
+              <a:spcBef>
+                <a:spcPts val="0"/>
+              </a:spcBef>
+              <a:spcAft>
+                <a:spcPts val="0"/>
+              </a:spcAft>
+              <a:buNone/>
+            </a:pPr>
+            <a:r>
+              <a:rPr lang="en">
+                <a:solidFill>
+                  <a:schemeClr val="accent5"/>
+                </a:solidFill>
+              </a:rPr>
+              <a:t>Apply It to Your Project</a:t>
+            </a:r>
+            <a:endParaRPr>
+              <a:solidFill>
+                <a:schemeClr val="accent5"/>
+              </a:solidFill>
+            </a:endParaRPr>
+          </a:p>
+        </p:txBody>
+      </p:sp>
+      <p:sp>
+        <p:nvSpPr>
+          <p:cNvPr id="294" name="Google Shape;294;p45"/>
+          <p:cNvSpPr txBox="1"/>
+          <p:nvPr>
+            <p:ph idx="1" type="body"/>
+          </p:nvPr>
+        </p:nvSpPr>
+        <p:spPr>
+          <a:xfrm>
+            <a:off x="311700" y="885950"/>
+            <a:ext cx="8520600" cy="4023300"/>
+          </a:xfrm>
+          <a:prstGeom prst="rect">
+            <a:avLst/>
+          </a:prstGeom>
+        </p:spPr>
+        <p:txBody>
+          <a:bodyPr anchorCtr="0" anchor="t" bIns="91425" lIns="91425" spcFirstLastPara="1" rIns="91425" wrap="square" tIns="91425">
+            <a:normAutofit/>
+          </a:bodyPr>
+          <a:lstStyle/>
+          <a:p>
+            <a:pPr indent="-330200" lvl="0" marL="457200" rtl="0" algn="l">
+              <a:spcBef>
+                <a:spcPts val="0"/>
+              </a:spcBef>
+              <a:spcAft>
+                <a:spcPts val="0"/>
+              </a:spcAft>
+              <a:buSzPts val="1600"/>
+              <a:buChar char="●"/>
+            </a:pPr>
+            <a:r>
+              <a:rPr lang="en"/>
+              <a:t>Which objects in your game have modes?</a:t>
+            </a:r>
+            <a:endParaRPr/>
+          </a:p>
+          <a:p>
+            <a:pPr indent="-317500" lvl="1" marL="914400" rtl="0" algn="l">
+              <a:spcBef>
+                <a:spcPts val="0"/>
+              </a:spcBef>
+              <a:spcAft>
+                <a:spcPts val="0"/>
+              </a:spcAft>
+              <a:buSzPts val="1400"/>
+              <a:buChar char="○"/>
+            </a:pPr>
+            <a:r>
+              <a:rPr lang="en"/>
+              <a:t>Flags, an enum, or state objects?</a:t>
+            </a:r>
+            <a:endParaRPr/>
+          </a:p>
+          <a:p>
+            <a:pPr indent="-330200" lvl="0" marL="457200" rtl="0" algn="l">
+              <a:spcBef>
+                <a:spcPts val="0"/>
+              </a:spcBef>
+              <a:spcAft>
+                <a:spcPts val="0"/>
+              </a:spcAft>
+              <a:buSzPts val="1600"/>
+              <a:buChar char="●"/>
+            </a:pPr>
+            <a:r>
+              <a:rPr lang="en"/>
+              <a:t>Where do you switch over a mode in more than one method?</a:t>
+            </a:r>
+            <a:endParaRPr/>
+          </a:p>
+          <a:p>
+            <a:pPr indent="-330200" lvl="0" marL="457200" rtl="0" algn="l">
+              <a:spcBef>
+                <a:spcPts val="0"/>
+              </a:spcBef>
+              <a:spcAft>
+                <a:spcPts val="0"/>
+              </a:spcAft>
+              <a:buSzPts val="1600"/>
+              <a:buChar char="●"/>
+            </a:pPr>
+            <a:r>
+              <a:rPr lang="en"/>
+              <a:t>A behaviour that differs per object, but never changes for one object?</a:t>
+            </a:r>
+            <a:endParaRPr/>
+          </a:p>
+          <a:p>
+            <a:pPr indent="-317500" lvl="1" marL="914400" rtl="0" algn="l">
+              <a:spcBef>
+                <a:spcPts val="0"/>
+              </a:spcBef>
+              <a:spcAft>
+                <a:spcPts val="0"/>
+              </a:spcAft>
+              <a:buSzPts val="1400"/>
+              <a:buChar char="○"/>
+            </a:pPr>
+            <a:r>
+              <a:rPr lang="en"/>
+              <a:t>That’s a strategy</a:t>
+            </a:r>
+            <a:endParaRPr/>
+          </a:p>
+        </p:txBody>
+      </p:sp>
+    </p:spTree>
+  </p:cSld>
+  <p:clrMapOvr>
+    <a:masterClrMapping/>
+  </p:clrMapOvr>
+  <p:timing>
+    <p:tnLst>
+      <p:par>
+        <p:cTn dur="indefinite" nodeType="tmRoot" restart="never">
+          <p:childTnLst>
+            <p:seq concurrent="1" nextAc="seek">
+              <p:cTn dur="indefinite" id="2" nodeType="mainSeq">
+                <p:childTnLst>
+                  <p:par>
+                    <p:cTn fill="hold">
+                      <p:stCondLst>
+                        <p:cond delay="indefinite"/>
+                      </p:stCondLst>
+                      <p:childTnLst>
+                        <p:par>
+                          <p:cTn fill="hold">
+                            <p:stCondLst>
+                              <p:cond delay="0"/>
+                            </p:stCondLst>
+                            <p:childTnLst>
+                              <p:par>
+                                <p:cTn fill="hold" nodeType="clickEffect" presetClass="entr" presetID="1" presetSubtype="0">
+                                  <p:stCondLst>
+                                    <p:cond delay="0"/>
+                                  </p:stCondLst>
+                                  <p:childTnLst>
+                                    <p:set>
+                                      <p:cBhvr>
+                                        <p:cTn dur="1" fill="hold">
+                                          <p:stCondLst>
+                                            <p:cond delay="0"/>
+                                          </p:stCondLst>
+                                        </p:cTn>
+                                        <p:tgtEl>
+                                          <p:spTgt spid="294">
+                                            <p:txEl>
+                                              <p:pRg end="0" st="0"/>
+                                            </p:txEl>
+                                          </p:spTgt>
+                                        </p:tgtEl>
+                                        <p:attrNameLst>
+                                          <p:attrName>style.visibility</p:attrName>
+                                        </p:attrNameLst>
+                                      </p:cBhvr>
+                                      <p:to>
+                                        <p:strVal val="visible"/>
+                                      </p:to>
+                                    </p:set>
+                                  </p:childTnLst>
+                                </p:cTn>
+                              </p:par>
+                            </p:childTnLst>
+                          </p:cTn>
+                        </p:par>
+                      </p:childTnLst>
+                    </p:cTn>
+                  </p:par>
+                  <p:par>
+                    <p:cTn fill="hold">
+                      <p:stCondLst>
+                        <p:cond delay="indefinite"/>
+                      </p:stCondLst>
+                      <p:childTnLst>
+                        <p:par>
+                          <p:cTn fill="hold">
+                            <p:stCondLst>
+                              <p:cond delay="0"/>
+                            </p:stCondLst>
+                            <p:childTnLst>
+                              <p:par>
+                                <p:cTn fill="hold" nodeType="clickEffect" presetClass="entr" presetID="1" presetSubtype="0">
+                                  <p:stCondLst>
+                                    <p:cond delay="0"/>
+                                  </p:stCondLst>
+                                  <p:childTnLst>
+                                    <p:set>
+                                      <p:cBhvr>
+                                        <p:cTn dur="1" fill="hold">
+                                          <p:stCondLst>
+                                            <p:cond delay="0"/>
+                                          </p:stCondLst>
+                                        </p:cTn>
+                                        <p:tgtEl>
+                                          <p:spTgt spid="294">
+                                            <p:txEl>
+                                              <p:pRg end="1" st="1"/>
+                                            </p:txEl>
+                                          </p:spTgt>
+                                        </p:tgtEl>
+                                        <p:attrNameLst>
+                                          <p:attrName>style.visibility</p:attrName>
+                                        </p:attrNameLst>
+                                      </p:cBhvr>
+                                      <p:to>
+                                        <p:strVal val="visible"/>
+                                      </p:to>
+                                    </p:set>
+                                  </p:childTnLst>
+                                </p:cTn>
+                              </p:par>
+                            </p:childTnLst>
+                          </p:cTn>
+                        </p:par>
+                      </p:childTnLst>
+                    </p:cTn>
+                  </p:par>
+                  <p:par>
+                    <p:cTn fill="hold">
+                      <p:stCondLst>
+                        <p:cond delay="indefinite"/>
+                      </p:stCondLst>
+                      <p:childTnLst>
+                        <p:par>
+                          <p:cTn fill="hold">
+                            <p:stCondLst>
+                              <p:cond delay="0"/>
+                            </p:stCondLst>
+                            <p:childTnLst>
+                              <p:par>
+                                <p:cTn fill="hold" nodeType="clickEffect" presetClass="entr" presetID="1" presetSubtype="0">
+                                  <p:stCondLst>
+                                    <p:cond delay="0"/>
+                                  </p:stCondLst>
+                                  <p:childTnLst>
+                                    <p:set>
+                                      <p:cBhvr>
+                                        <p:cTn dur="1" fill="hold">
+                                          <p:stCondLst>
+                                            <p:cond delay="0"/>
+                                          </p:stCondLst>
+                                        </p:cTn>
+                                        <p:tgtEl>
+                                          <p:spTgt spid="294">
+                                            <p:txEl>
+                                              <p:pRg end="2" st="2"/>
+                                            </p:txEl>
+                                          </p:spTgt>
+                                        </p:tgtEl>
+                                        <p:attrNameLst>
+                                          <p:attrName>style.visibility</p:attrName>
+                                        </p:attrNameLst>
+                                      </p:cBhvr>
+                                      <p:to>
+                                        <p:strVal val="visible"/>
+                                      </p:to>
+                                    </p:set>
+                                  </p:childTnLst>
+                                </p:cTn>
+                              </p:par>
+                            </p:childTnLst>
+                          </p:cTn>
+                        </p:par>
+                      </p:childTnLst>
+                    </p:cTn>
+                  </p:par>
+                  <p:par>
+                    <p:cTn fill="hold">
+                      <p:stCondLst>
+                        <p:cond delay="indefinite"/>
+                      </p:stCondLst>
+                      <p:childTnLst>
+                        <p:par>
+                          <p:cTn fill="hold">
+                            <p:stCondLst>
+                              <p:cond delay="0"/>
+                            </p:stCondLst>
+                            <p:childTnLst>
+                              <p:par>
+                                <p:cTn fill="hold" nodeType="clickEffect" presetClass="entr" presetID="1" presetSubtype="0">
+                                  <p:stCondLst>
+                                    <p:cond delay="0"/>
+                                  </p:stCondLst>
+                                  <p:childTnLst>
+                                    <p:set>
+                                      <p:cBhvr>
+                                        <p:cTn dur="1" fill="hold">
+                                          <p:stCondLst>
+                                            <p:cond delay="0"/>
+                                          </p:stCondLst>
+                                        </p:cTn>
+                                        <p:tgtEl>
+                                          <p:spTgt spid="294">
+                                            <p:txEl>
+                                              <p:pRg end="3" st="3"/>
+                                            </p:txEl>
+                                          </p:spTgt>
+                                        </p:tgtEl>
+                                        <p:attrNameLst>
+                                          <p:attrName>style.visibility</p:attrName>
+                                        </p:attrNameLst>
+                                      </p:cBhvr>
+                                      <p:to>
+                                        <p:strVal val="visible"/>
+                                      </p:to>
+                                    </p:set>
+                                  </p:childTnLst>
+                                </p:cTn>
+                              </p:par>
+                            </p:childTnLst>
+                          </p:cTn>
+                        </p:par>
+                      </p:childTnLst>
+                    </p:cTn>
+                  </p:par>
+                  <p:par>
+                    <p:cTn fill="hold">
+                      <p:stCondLst>
+                        <p:cond delay="indefinite"/>
+                      </p:stCondLst>
+                      <p:childTnLst>
+                        <p:par>
+                          <p:cTn fill="hold">
+                            <p:stCondLst>
+                              <p:cond delay="0"/>
+                            </p:stCondLst>
+                            <p:childTnLst>
+                              <p:par>
+                                <p:cTn fill="hold" nodeType="clickEffect" presetClass="entr" presetID="1" presetSubtype="0">
+                                  <p:stCondLst>
+                                    <p:cond delay="0"/>
+                                  </p:stCondLst>
+                                  <p:childTnLst>
+                                    <p:set>
+                                      <p:cBhvr>
+                                        <p:cTn dur="1" fill="hold">
+                                          <p:stCondLst>
+                                            <p:cond delay="0"/>
+                                          </p:stCondLst>
+                                        </p:cTn>
+                                        <p:tgtEl>
+                                          <p:spTgt spid="294">
+                                            <p:txEl>
+                                              <p:pRg end="4" st="4"/>
+                                            </p:txEl>
+                                          </p:spTgt>
+                                        </p:tgtEl>
+                                        <p:attrNameLst>
+                                          <p:attrName>style.visibility</p:attrName>
+                                        </p:attrNameLst>
+                                      </p:cBhvr>
+                                      <p:to>
+                                        <p:strVal val="visible"/>
+                                      </p:to>
+                                    </p:set>
+                                  </p:childTnLst>
+                                </p:cTn>
+                              </p:par>
+                            </p:childTnLst>
+                          </p:cTn>
+                        </p:par>
+                      </p:childTnLst>
+                    </p:cTn>
+                  </p:par>
+                  <p:par>
+                    <p:cTn fill="hold">
+                      <p:stCondLst>
+                        <p:cond delay="indefinite"/>
+                      </p:stCondLst>
+                      <p:childTnLst>
+                        <p:par>
+                          <p:cTn fill="hold">
+                            <p:stCondLst>
+                              <p:cond delay="0"/>
+                            </p:stCondLst>
+                            <p:childTnLst>
+                              <p:par>
+                                <p:cTn fill="hold" nodeType="clickEffect" presetClass="entr" presetID="1" presetSubtype="0">
+                                  <p:stCondLst>
+                                    <p:cond delay="0"/>
+                                  </p:stCondLst>
+                                  <p:childTnLst>
+                                    <p:set>
+                                      <p:cBhvr>
+                                        <p:cTn dur="1" fill="hold">
+                                          <p:stCondLst>
+                                            <p:cond delay="0"/>
+                                          </p:stCondLst>
+                                        </p:cTn>
+                                        <p:tgtEl>
+                                          <p:spTgt spid="294">
+                                            <p:txEl>
+                                              <p:pRg end="5" st="5"/>
+                                            </p:txEl>
+                                          </p:spTgt>
+                                        </p:tgtEl>
+                                        <p:attrNameLst>
+                                          <p:attrName>style.visibility</p:attrName>
+                                        </p:attrNameLst>
+                                      </p:cBhvr>
+                                      <p:to>
+                                        <p:strVal val="visible"/>
+                                      </p:to>
+                                    </p:set>
+                                  </p:childTnLst>
+                                </p:cTn>
+                              </p:par>
+                            </p:childTnLst>
+                          </p:cTn>
+                        </p:par>
+                      </p:childTnLst>
+                    </p:cTn>
+                  </p:par>
+                  <p:par>
+                    <p:cTn fill="hold">
+                      <p:stCondLst>
+                        <p:cond delay="indefinite"/>
+                      </p:stCondLst>
+                      <p:childTnLst>
+                        <p:par>
+                          <p:cTn fill="hold">
+                            <p:stCondLst>
+                              <p:cond delay="0"/>
+                            </p:stCondLst>
+                            <p:childTnLst>
+                              <p:par>
+                                <p:cTn fill="hold" nodeType="clickEffect" presetClass="entr" presetID="1" presetSubtype="0">
+                                  <p:stCondLst>
+                                    <p:cond delay="0"/>
+                                  </p:stCondLst>
+                                  <p:childTnLst>
+                                    <p:set>
+                                      <p:cBhvr>
+                                        <p:cTn dur="1" fill="hold">
+                                          <p:stCondLst>
+                                            <p:cond delay="0"/>
+                                          </p:stCondLst>
+                                        </p:cTn>
+                                        <p:tgtEl>
+                                          <p:spTgt spid="294">
+                                            <p:txEl>
+                                              <p:pRg end="6" st="6"/>
+                                            </p:txEl>
+                                          </p:spTgt>
+                                        </p:tgtEl>
+                                        <p:attrNameLst>
+                                          <p:attrName>style.visibility</p:attrName>
+                                        </p:attrNameLst>
+                                      </p:cBhvr>
+                                      <p:to>
+                                        <p:strVal val="visible"/>
+                                      </p:to>
+                                    </p:set>
+                                  </p:childTnLst>
+                                </p:cTn>
+                              </p:par>
+                            </p:childTnLst>
+                          </p:cTn>
+                        </p:par>
+                      </p:childTnLst>
+                    </p:cTn>
+                  </p:par>
+                  <p:par>
+                    <p:cTn fill="hold">
+                      <p:stCondLst>
+                        <p:cond delay="indefinite"/>
+                      </p:stCondLst>
+                      <p:childTnLst>
+                        <p:par>
+                          <p:cTn fill="hold">
+                            <p:stCondLst>
+                              <p:cond delay="0"/>
+                            </p:stCondLst>
+                            <p:childTnLst>
+                              <p:par>
+                                <p:cTn fill="hold" nodeType="clickEffect" presetClass="entr" presetID="1" presetSubtype="0">
+                                  <p:stCondLst>
+                                    <p:cond delay="0"/>
+                                  </p:stCondLst>
+                                  <p:childTnLst>
+                                    <p:set>
+                                      <p:cBhvr>
+                                        <p:cTn dur="1" fill="hold">
+                                          <p:stCondLst>
+                                            <p:cond delay="0"/>
+                                          </p:stCondLst>
+                                        </p:cTn>
+                                        <p:tgtEl>
+                                          <p:spTgt spid="294">
+                                            <p:txEl>
+                                              <p:pRg end="7" st="7"/>
+                                            </p:txEl>
+                                          </p:spTgt>
+                                        </p:tgtEl>
+                                        <p:attrNameLst>
+                                          <p:attrName>style.visibility</p:attrName>
+                                        </p:attrNameLst>
+                                      </p:cBhvr>
+                                      <p:to>
+                                        <p:strVal val="visible"/>
+                                      </p:to>
+                                    </p:set>
+                                  </p:childTnLst>
+                                </p:cTn>
+                              </p:par>
+                            </p:childTnLst>
+                          </p:cTn>
+                        </p:par>
+                      </p:childTnLst>
+                    </p:cTn>
+                  </p:par>
+                  <p:par>
+                    <p:cTn fill="hold">
+                      <p:stCondLst>
+                        <p:cond delay="indefinite"/>
+                      </p:stCondLst>
+                      <p:childTnLst>
+                        <p:par>
+                          <p:cTn fill="hold">
+                            <p:stCondLst>
+                              <p:cond delay="0"/>
+                            </p:stCondLst>
+                            <p:childTnLst>
+                              <p:par>
+                                <p:cTn fill="hold" nodeType="clickEffect" presetClass="entr" presetID="1" presetSubtype="0">
+                                  <p:stCondLst>
+                                    <p:cond delay="0"/>
+                                  </p:stCondLst>
+                                  <p:childTnLst>
+                                    <p:set>
+                                      <p:cBhvr>
+                                        <p:cTn dur="1" fill="hold">
+                                          <p:stCondLst>
+                                            <p:cond delay="0"/>
+                                          </p:stCondLst>
+                                        </p:cTn>
+                                        <p:tgtEl>
+                                          <p:spTgt spid="294">
+                                            <p:txEl>
+                                              <p:pRg end="8" st="8"/>
+                                            </p:txEl>
+                                          </p:spTgt>
+                                        </p:tgtEl>
+                                        <p:attrNameLst>
+                                          <p:attrName>style.visibility</p:attrName>
+                                        </p:attrNameLst>
+                                      </p:cBhvr>
+                                      <p:to>
+                                        <p:strVal val="visible"/>
+                                      </p:to>
+                                    </p:set>
+                                  </p:childTnLst>
+                                </p:cTn>
+                              </p:par>
+                            </p:childTnLst>
+                          </p:cTn>
+                        </p:par>
+                      </p:childTnLst>
+                    </p:cTn>
+                  </p:par>
+                  <p:par>
+                    <p:cTn fill="hold">
+                      <p:stCondLst>
+                        <p:cond delay="indefinite"/>
+                      </p:stCondLst>
+                      <p:childTnLst>
+                        <p:par>
+                          <p:cTn fill="hold">
+                            <p:stCondLst>
+                              <p:cond delay="0"/>
+                            </p:stCondLst>
+                            <p:childTnLst>
+                              <p:par>
+                                <p:cTn fill="hold" nodeType="clickEffect" presetClass="entr" presetID="1" presetSubtype="0">
+                                  <p:stCondLst>
+                                    <p:cond delay="0"/>
+                                  </p:stCondLst>
+                                  <p:childTnLst>
+                                    <p:set>
+                                      <p:cBhvr>
+                                        <p:cTn dur="1" fill="hold">
+                                          <p:stCondLst>
+                                            <p:cond delay="0"/>
+                                          </p:stCondLst>
+                                        </p:cTn>
+                                        <p:tgtEl>
+                                          <p:spTgt spid="294">
+                                            <p:txEl>
+                                              <p:pRg end="9" st="9"/>
+                                            </p:txEl>
+                                          </p:spTgt>
+                                        </p:tgtEl>
+                                        <p:attrNameLst>
+                                          <p:attrName>style.visibility</p:attrName>
+                                        </p:attrNameLst>
+                                      </p:cBhvr>
+                                      <p:to>
+                                        <p:strVal val="visible"/>
+                                      </p:to>
+                                    </p:set>
+                                  </p:childTnLst>
+                                </p:cTn>
+                              </p:par>
+                            </p:childTnLst>
+                          </p:cTn>
+                        </p:par>
+                      </p:childTnLst>
+                    </p:cTn>
+                  </p:par>
+                  <p:par>
+                    <p:cTn fill="hold">
+                      <p:stCondLst>
+                        <p:cond delay="indefinite"/>
+                      </p:stCondLst>
+                      <p:childTnLst>
+                        <p:par>
+                          <p:cTn fill="hold">
+                            <p:stCondLst>
+                              <p:cond delay="0"/>
+                            </p:stCondLst>
+                            <p:childTnLst>
+                              <p:par>
+                                <p:cTn fill="hold" nodeType="clickEffect" presetClass="entr" presetID="1" presetSubtype="0">
+                                  <p:stCondLst>
+                                    <p:cond delay="0"/>
+                                  </p:stCondLst>
+                                  <p:childTnLst>
+                                    <p:set>
+                                      <p:cBhvr>
+                                        <p:cTn dur="1" fill="hold">
+                                          <p:stCondLst>
+                                            <p:cond delay="0"/>
+                                          </p:stCondLst>
+                                        </p:cTn>
+                                        <p:tgtEl>
+                                          <p:spTgt spid="294">
+                                            <p:txEl>
+                                              <p:pRg end="10" st="10"/>
+                                            </p:txEl>
+                                          </p:spTgt>
+                                        </p:tgtEl>
+                                        <p:attrNameLst>
+                                          <p:attrName>style.visibility</p:attrName>
+                                        </p:attrNameLst>
+                                      </p:cBhvr>
+                                      <p:to>
+                                        <p:strVal val="visible"/>
+                                      </p:to>
+                                    </p:set>
+                                  </p:childTnLst>
+                                </p:cTn>
+                              </p:par>
+                            </p:childTnLst>
+                          </p:cTn>
+                        </p:par>
+                      </p:childTnLst>
+                    </p:cTn>
+                  </p:par>
+                  <p:par>
+                    <p:cTn fill="hold">
+                      <p:stCondLst>
+                        <p:cond delay="indefinite"/>
+                      </p:stCondLst>
+                      <p:childTnLst>
+                        <p:par>
+                          <p:cTn fill="hold">
+                            <p:stCondLst>
+                              <p:cond delay="0"/>
+                            </p:stCondLst>
+                            <p:childTnLst>
+                              <p:par>
+                                <p:cTn fill="hold" nodeType="clickEffect" presetClass="entr" presetID="1" presetSubtype="0">
+                                  <p:stCondLst>
+                                    <p:cond delay="0"/>
+                                  </p:stCondLst>
+                                  <p:childTnLst>
+                                    <p:set>
+                                      <p:cBhvr>
+                                        <p:cTn dur="1" fill="hold">
+                                          <p:stCondLst>
+                                            <p:cond delay="0"/>
+                                          </p:stCondLst>
+                                        </p:cTn>
+                                        <p:tgtEl>
+                                          <p:spTgt spid="294">
+                                            <p:txEl>
+                                              <p:pRg end="11" st="11"/>
+                                            </p:txEl>
+                                          </p:spTgt>
+                                        </p:tgtEl>
+                                        <p:attrNameLst>
+                                          <p:attrName>style.visibility</p:attrName>
+                                        </p:attrNameLst>
+                                      </p:cBhvr>
+                                      <p:to>
+                                        <p:strVal val="visible"/>
+                                      </p:to>
+                                    </p:set>
+                                  </p:childTnLst>
+                                </p:cTn>
+                              </p:par>
+                            </p:childTnLst>
+                          </p:cTn>
+                        </p:par>
+                      </p:childTnLst>
+                    </p:cTn>
+                  </p:par>
+                  <p:par>
+                    <p:cTn fill="hold">
+                      <p:stCondLst>
+                        <p:cond delay="indefinite"/>
+                      </p:stCondLst>
+                      <p:childTnLst>
+                        <p:par>
+                          <p:cTn fill="hold">
+                            <p:stCondLst>
+                              <p:cond delay="0"/>
+                            </p:stCondLst>
+                            <p:childTnLst>
+                              <p:par>
+                                <p:cTn fill="hold" nodeType="clickEffect" presetClass="entr" presetID="1" presetSubtype="0">
+                                  <p:stCondLst>
+                                    <p:cond delay="0"/>
+                                  </p:stCondLst>
+                                  <p:childTnLst>
+                                    <p:set>
+                                      <p:cBhvr>
+                                        <p:cTn dur="1" fill="hold">
+                                          <p:stCondLst>
+                                            <p:cond delay="0"/>
+                                          </p:stCondLst>
+                                        </p:cTn>
+                                        <p:tgtEl>
+                                          <p:spTgt spid="294">
+                                            <p:txEl>
+                                              <p:pRg end="12" st="12"/>
+                                            </p:txEl>
+                                          </p:spTgt>
+                                        </p:tgtEl>
+                                        <p:attrNameLst>
+                                          <p:attrName>style.visibility</p:attrName>
+                                        </p:attrNameLst>
+                                      </p:cBhvr>
+                                      <p:to>
+                                        <p:strVal val="visible"/>
+                                      </p:to>
+                                    </p:set>
+                                  </p:childTnLst>
+                                </p:cTn>
+                              </p:par>
+                            </p:childTnLst>
+                          </p:cTn>
+                        </p:par>
+                      </p:childTnLst>
+                    </p:cTn>
+                  </p:par>
+                </p:childTnLst>
+              </p:cTn>
+              <p:prevCondLst>
+                <p:cond evt="onPrev">
+                  <p:tgtEl>
+                    <p:sldTgt/>
+                  </p:tgtEl>
+                </p:cond>
+              </p:prevCondLst>
+              <p:nextCondLst>
+                <p:cond evt="onNext">
+                  <p:tgtEl>
+                    <p:sldTgt/>
+                  </p:tgtEl>
+                </p:cond>
+              </p:nextCondLst>
+            </p:seq>
+          </p:childTnLst>
+        </p:cTn>
+      </p:par>
+    </p:tnLst>
+  </p:timing>
+</p:sld>
+</file>
+
+<file path=ppt/slides/slide28.xml><?xml version="1.0" encoding="utf-8"?>
 <p:sld xmlns:a="http://schemas.openxmlformats.org/drawingml/2006/main" xmlns:r="http://schemas.openxmlformats.org/officeDocument/2006/relationships" xmlns:mc="http://schemas.openxmlformats.org/markup-compatibility/2006" xmlns:mv="urn:schemas-microsoft-com:mac:vml" xmlns:p="http://schemas.openxmlformats.org/presentationml/2006/main" xmlns:c="http://schemas.openxmlformats.org/drawingml/2006/chart" xmlns:dgm="http://schemas.openxmlformats.org/drawingml/2006/diagram" xmlns:o="urn:schemas-microsoft-com:office:office" xmlns:v="urn:schemas-microsoft-com:vml" xmlns:pvml="urn:schemas-microsoft-com:office:powerpoint" xmlns:com="http://schemas.openxmlformats.org/drawingml/2006/compatibility" xmlns:p14="http://schemas.microsoft.com/office/powerpoint/2010/main" xmlns:p15="http://schemas.microsoft.com/office/powerpoint/2012/main" xmlns:ahyp="http://schemas.microsoft.com/office/drawing/2018/hyperlinkcolor">
   <p:cSld>
     <p:spTree>
@@ -15493,6 +16481,95 @@
 </file>
 
 <file path=ppt/slides/slide3.xml><?xml version="1.0" encoding="utf-8"?>
+<p:sld xmlns:a="http://schemas.openxmlformats.org/drawingml/2006/main" xmlns:r="http://schemas.openxmlformats.org/officeDocument/2006/relationships" xmlns:mc="http://schemas.openxmlformats.org/markup-compatibility/2006" xmlns:mv="urn:schemas-microsoft-com:mac:vml" xmlns:p="http://schemas.openxmlformats.org/presentationml/2006/main" xmlns:c="http://schemas.openxmlformats.org/drawingml/2006/chart" xmlns:dgm="http://schemas.openxmlformats.org/drawingml/2006/diagram" xmlns:o="urn:schemas-microsoft-com:office:office" xmlns:v="urn:schemas-microsoft-com:vml" xmlns:pvml="urn:schemas-microsoft-com:office:powerpoint" xmlns:com="http://schemas.openxmlformats.org/drawingml/2006/compatibility" xmlns:p14="http://schemas.microsoft.com/office/powerpoint/2010/main" xmlns:p15="http://schemas.microsoft.com/office/powerpoint/2012/main" xmlns:ahyp="http://schemas.microsoft.com/office/drawing/2018/hyperlinkcolor">
+  <p:cSld>
+    <p:spTree>
+      <p:nvGrpSpPr>
+        <p:cNvPr id="44" name="Shape 44"/>
+        <p:cNvGrpSpPr/>
+        <p:nvPr/>
+      </p:nvGrpSpPr>
+      <p:grpSpPr>
+        <a:xfrm>
+          <a:off x="0" y="0"/>
+          <a:ext cx="0" cy="0"/>
+          <a:chOff x="0" y="0"/>
+          <a:chExt cx="0" cy="0"/>
+        </a:xfrm>
+      </p:grpSpPr>
+      <p:sp>
+        <p:nvSpPr>
+          <p:cNvPr id="45" name="Google Shape;45;p10"/>
+          <p:cNvSpPr txBox="1"/>
+          <p:nvPr>
+            <p:ph type="title"/>
+          </p:nvPr>
+        </p:nvSpPr>
+        <p:spPr>
+          <a:xfrm>
+            <a:off x="311700" y="195615"/>
+            <a:ext cx="8520600" cy="572700"/>
+          </a:xfrm>
+          <a:prstGeom prst="rect">
+            <a:avLst/>
+          </a:prstGeom>
+        </p:spPr>
+        <p:txBody>
+          <a:bodyPr anchorCtr="0" anchor="t" bIns="91425" lIns="91425" spcFirstLastPara="1" rIns="91425" wrap="square" tIns="91425">
+            <a:normAutofit fontScale="90000"/>
+          </a:bodyPr>
+          <a:lstStyle/>
+          <a:p>
+            <a:pPr indent="0" lvl="0" marL="0" rtl="0" algn="l">
+              <a:spcBef>
+                <a:spcPts val="0"/>
+              </a:spcBef>
+              <a:spcAft>
+                <a:spcPts val="0"/>
+              </a:spcAft>
+              <a:buNone/>
+            </a:pPr>
+            <a:r>
+              <a:rPr lang="en"/>
+              <a:t>Today’s Goal</a:t>
+            </a:r>
+            <a:endParaRPr/>
+          </a:p>
+        </p:txBody>
+      </p:sp>
+      <p:pic>
+        <p:nvPicPr>
+          <p:cNvPr id="46" name="Picture 46" descr="pacman-play.png"/>
+          <p:cNvPicPr>
+            <a:picLocks noChangeAspect="1"/>
+          </p:cNvPicPr>
+          <p:nvPr/>
+        </p:nvPicPr>
+        <p:blipFill>
+          <a:blip r:embed="rId4"/>
+          <a:stretch>
+            <a:fillRect/>
+          </a:stretch>
+        </p:blipFill>
+        <p:spPr>
+          <a:xfrm>
+            <a:off x="3101255" y="1531275"/>
+            <a:ext cx="2941489" cy="3256648"/>
+          </a:xfrm>
+          <a:prstGeom prst="rect">
+            <a:avLst/>
+          </a:prstGeom>
+        </p:spPr>
+      </p:pic>
+    </p:spTree>
+  </p:cSld>
+  <p:clrMapOvr>
+    <a:masterClrMapping/>
+  </p:clrMapOvr>
+</p:sld>
+</file>
+
+<file path=ppt/slides/slide4.xml><?xml version="1.0" encoding="utf-8"?>
 <p:sld xmlns:a="http://schemas.openxmlformats.org/drawingml/2006/main" xmlns:r="http://schemas.openxmlformats.org/officeDocument/2006/relationships" xmlns:mc="http://schemas.openxmlformats.org/markup-compatibility/2006" xmlns:mv="urn:schemas-microsoft-com:mac:vml" xmlns:p="http://schemas.openxmlformats.org/presentationml/2006/main" xmlns:c="http://schemas.openxmlformats.org/drawingml/2006/chart" xmlns:dgm="http://schemas.openxmlformats.org/drawingml/2006/diagram" xmlns:o="urn:schemas-microsoft-com:office:office" xmlns:v="urn:schemas-microsoft-com:vml" xmlns:pvml="urn:schemas-microsoft-com:office:powerpoint" xmlns:com="http://schemas.openxmlformats.org/drawingml/2006/compatibility" xmlns:p14="http://schemas.microsoft.com/office/powerpoint/2010/main" xmlns:p15="http://schemas.microsoft.com/office/powerpoint/2012/main" xmlns:ahyp="http://schemas.microsoft.com/office/drawing/2018/hyperlinkcolor">
   <p:cSld>
     <p:spTree>
@@ -15958,7 +17035,7 @@
 </p:sld>
 </file>
 
-<file path=ppt/slides/slide4.xml><?xml version="1.0" encoding="utf-8"?>
+<file path=ppt/slides/slide5.xml><?xml version="1.0" encoding="utf-8"?>
 <p:sld xmlns:a="http://schemas.openxmlformats.org/drawingml/2006/main" xmlns:r="http://schemas.openxmlformats.org/officeDocument/2006/relationships" xmlns:mc="http://schemas.openxmlformats.org/markup-compatibility/2006" xmlns:mv="urn:schemas-microsoft-com:mac:vml" xmlns:p="http://schemas.openxmlformats.org/presentationml/2006/main" xmlns:c="http://schemas.openxmlformats.org/drawingml/2006/chart" xmlns:dgm="http://schemas.openxmlformats.org/drawingml/2006/diagram" xmlns:o="urn:schemas-microsoft-com:office:office" xmlns:v="urn:schemas-microsoft-com:vml" xmlns:pvml="urn:schemas-microsoft-com:office:powerpoint" xmlns:com="http://schemas.openxmlformats.org/drawingml/2006/compatibility" xmlns:p14="http://schemas.microsoft.com/office/powerpoint/2010/main" xmlns:p15="http://schemas.microsoft.com/office/powerpoint/2012/main" xmlns:ahyp="http://schemas.microsoft.com/office/drawing/2018/hyperlinkcolor">
   <p:cSld>
     <p:spTree>
@@ -16087,746 +17164,6 @@
               <a:t>The course site: today’s concepts in full, the exercises, and questions to check yourself</a:t>
             </a:r>
             <a:endParaRPr/>
-          </a:p>
-        </p:txBody>
-      </p:sp>
-    </p:spTree>
-  </p:cSld>
-  <p:clrMapOvr>
-    <a:masterClrMapping/>
-  </p:clrMapOvr>
-</p:sld>
-</file>
-
-<file path=ppt/slides/slide5.xml><?xml version="1.0" encoding="utf-8"?>
-<p:sld xmlns:a="http://schemas.openxmlformats.org/drawingml/2006/main" xmlns:p="http://schemas.openxmlformats.org/presentationml/2006/main" xmlns:r="http://schemas.openxmlformats.org/officeDocument/2006/relationships">
-  <p:cSld>
-    <p:spTree>
-      <p:nvGrpSpPr>
-        <p:cNvPr id="1" name=""/>
-        <p:cNvGrpSpPr/>
-        <p:nvPr/>
-      </p:nvGrpSpPr>
-      <p:grpSpPr/>
-      <p:sp>
-        <p:nvSpPr>
-          <p:cNvPr id="140" name="Google Shape;140;p23"/>
-          <p:cNvSpPr txBox="1"/>
-          <p:nvPr>
-            <p:ph type="title"/>
-          </p:nvPr>
-        </p:nvSpPr>
-        <p:spPr>
-          <a:xfrm>
-            <a:off x="311700" y="195615"/>
-            <a:ext cx="8520600" cy="572700"/>
-          </a:xfrm>
-          <a:prstGeom prst="rect">
-            <a:avLst/>
-          </a:prstGeom>
-        </p:spPr>
-        <p:txBody>
-          <a:bodyPr anchorCtr="0" anchor="t" bIns="91425" lIns="91425" spcFirstLastPara="1" rIns="91425" wrap="square" tIns="91425">
-            <a:normAutofit fontScale="90000"/>
-          </a:bodyPr>
-          <a:lstStyle/>
-          <a:p>
-            <a:pPr indent="0" lvl="0" marL="0" rtl="0" algn="l">
-              <a:spcBef>
-                <a:spcPts val="0"/>
-              </a:spcBef>
-              <a:spcAft>
-                <a:spcPts val="0"/>
-              </a:spcAft>
-              <a:buNone/>
-            </a:pPr>
-            <a:r>
-              <a:rPr lang="en"/>
-              <a:t>The Maze</a:t>
-            </a:r>
-            <a:endParaRPr/>
-          </a:p>
-        </p:txBody>
-      </p:sp>
-      <p:sp>
-        <p:nvSpPr>
-          <p:cNvPr id="293" name="Google Shape;293;p45"/>
-          <p:cNvSpPr txBox="1"/>
-          <p:nvPr>
-            <p:ph type="title"/>
-          </p:nvPr>
-        </p:nvSpPr>
-        <p:spPr>
-          <a:xfrm>
-            <a:off x="311700" y="1152475"/>
-            <a:ext cx="3700000" cy="3500000"/>
-          </a:xfrm>
-          <a:prstGeom prst="rect">
-            <a:avLst/>
-          </a:prstGeom>
-        </p:spPr>
-        <p:txBody>
-          <a:bodyPr anchorCtr="0" anchor="t" bIns="91425" lIns="91425" spcFirstLastPara="1" rIns="91425" wrap="square" tIns="91425">
-            <a:normAutofit fontScale="90000"/>
-          </a:bodyPr>
-          <a:lstStyle/>
-          <a:p>
-            <a:pPr indent="-330200" lvl="0" marL="457200" rtl="0" algn="l">
-              <a:buClr>
-                <a:srgbClr val="DEE2E6"/>
-              </a:buClr>
-              <a:spcBef>
-                <a:spcPts val="0"/>
-              </a:spcBef>
-              <a:spcAft>
-                <a:spcPts val="0"/>
-              </a:spcAft>
-              <a:buSzPts val="1600"/>
-              <a:buChar char="●"/>
-            </a:pPr>
-            <a:r>
-              <a:rPr lang="en" sz="1600">
-                <a:solidFill>
-                  <a:srgbClr val="DEE2E6"/>
-                </a:solidFill>
-              </a:rPr>
-              <a:t>A text file, like Sokoban’s levels</a:t>
-            </a:r>
-            <a:endParaRPr/>
-          </a:p>
-          <a:p>
-            <a:pPr indent="-317500" lvl="1" marL="914400" rtl="0" algn="l">
-              <a:buClr>
-                <a:srgbClr val="6C757D"/>
-              </a:buClr>
-              <a:spcBef>
-                <a:spcPts val="0"/>
-              </a:spcBef>
-              <a:spcAft>
-                <a:spcPts val="0"/>
-              </a:spcAft>
-              <a:buSzPts val="1400"/>
-              <a:buChar char="○"/>
-            </a:pPr>
-            <a:r>
-              <a:rPr lang="en" sz="1400">
-                <a:solidFill>
-                  <a:srgbClr val="6C757D"/>
-                </a:solidFill>
-              </a:rPr>
-              <a:t># wall   . dot   o power pellet</a:t>
-            </a:r>
-            <a:endParaRPr/>
-          </a:p>
-          <a:p>
-            <a:pPr indent="-317500" lvl="1" marL="914400" rtl="0" algn="l">
-              <a:buClr>
-                <a:srgbClr val="6C757D"/>
-              </a:buClr>
-              <a:spcBef>
-                <a:spcPts val="0"/>
-              </a:spcBef>
-              <a:spcAft>
-                <a:spcPts val="0"/>
-              </a:spcAft>
-              <a:buSzPts val="1400"/>
-              <a:buChar char="○"/>
-            </a:pPr>
-            <a:r>
-              <a:rPr lang="en" sz="1400">
-                <a:solidFill>
-                  <a:srgbClr val="6C757D"/>
-                </a:solidFill>
-              </a:rPr>
-              <a:t>- house door   H inside the house</a:t>
-            </a:r>
-            <a:endParaRPr/>
-          </a:p>
-          <a:p>
-            <a:pPr indent="-317500" lvl="1" marL="914400" rtl="0" algn="l">
-              <a:buClr>
-                <a:srgbClr val="6C757D"/>
-              </a:buClr>
-              <a:spcBef>
-                <a:spcPts val="0"/>
-              </a:spcBef>
-              <a:spcAft>
-                <a:spcPts val="0"/>
-              </a:spcAft>
-              <a:buSzPts val="1400"/>
-              <a:buChar char="○"/>
-            </a:pPr>
-            <a:r>
-              <a:rPr lang="en" sz="1400">
-                <a:solidFill>
-                  <a:srgbClr val="6C757D"/>
-                </a:solidFill>
-              </a:rPr>
-              <a:t>P Pac-Man   b p i c the ghosts</a:t>
-            </a:r>
-            <a:endParaRPr/>
-          </a:p>
-          <a:p>
-            <a:pPr indent="-330200" lvl="0" marL="457200" rtl="0" algn="l">
-              <a:buClr>
-                <a:srgbClr val="DEE2E6"/>
-              </a:buClr>
-              <a:spcBef>
-                <a:spcPts val="0"/>
-              </a:spcBef>
-              <a:spcAft>
-                <a:spcPts val="0"/>
-              </a:spcAft>
-              <a:buSzPts val="1600"/>
-              <a:buChar char="●"/>
-            </a:pPr>
-            <a:r>
-              <a:rPr lang="en" sz="1600">
-                <a:solidFill>
-                  <a:srgbClr val="DEE2E6"/>
-                </a:solidFill>
-              </a:rPr>
-              <a:t>A row open at both ends is a tunnel</a:t>
-            </a:r>
-            <a:endParaRPr/>
-          </a:p>
-          <a:p>
-            <a:pPr indent="-330200" lvl="0" marL="457200" rtl="0" algn="l">
-              <a:buClr>
-                <a:srgbClr val="DEE2E6"/>
-              </a:buClr>
-              <a:spcBef>
-                <a:spcPts val="0"/>
-              </a:spcBef>
-              <a:spcAft>
-                <a:spcPts val="0"/>
-              </a:spcAft>
-              <a:buSzPts val="1600"/>
-              <a:buChar char="●"/>
-            </a:pPr>
-            <a:r>
-              <a:rPr lang="en" sz="1600">
-                <a:solidFill>
-                  <a:srgbClr val="DEE2E6"/>
-                </a:solidFill>
-              </a:rPr>
-              <a:t>Rules apart from drawing, as in Sokoban</a:t>
-            </a:r>
-            <a:endParaRPr/>
-          </a:p>
-          <a:p>
-            <a:pPr indent="-317500" lvl="1" marL="914400" rtl="0" algn="l">
-              <a:buClr>
-                <a:srgbClr val="6C757D"/>
-              </a:buClr>
-              <a:spcBef>
-                <a:spcPts val="0"/>
-              </a:spcBef>
-              <a:spcAft>
-                <a:spcPts val="0"/>
-              </a:spcAft>
-              <a:buSzPts val="1400"/>
-              <a:buChar char="○"/>
-            </a:pPr>
-            <a:r>
-              <a:rPr lang="en" sz="1400">
-                <a:solidFill>
-                  <a:srgbClr val="6C757D"/>
-                </a:solidFill>
-              </a:rPr>
-              <a:t>Maze, PacMan, World: the game</a:t>
-            </a:r>
-            <a:endParaRPr/>
-          </a:p>
-          <a:p>
-            <a:pPr indent="-317500" lvl="1" marL="914400" rtl="0" algn="l">
-              <a:buClr>
-                <a:srgbClr val="6C757D"/>
-              </a:buClr>
-              <a:spcBef>
-                <a:spcPts val="0"/>
-              </a:spcBef>
-              <a:spcAft>
-                <a:spcPts val="0"/>
-              </a:spcAft>
-              <a:buSzPts val="1400"/>
-              <a:buChar char="○"/>
-            </a:pPr>
-            <a:r>
-              <a:rPr lang="en" sz="1400">
-                <a:solidFill>
-                  <a:srgbClr val="6C757D"/>
-                </a:solidFill>
-              </a:rPr>
-              <a:t>MazeView, PacManView: the drawing</a:t>
-            </a:r>
-            <a:endParaRPr/>
-          </a:p>
-          <a:p>
-            <a:pPr indent="-330200" lvl="0" marL="457200" rtl="0" algn="l">
-              <a:buClr>
-                <a:srgbClr val="DEE2E6"/>
-              </a:buClr>
-              <a:spcBef>
-                <a:spcPts val="0"/>
-              </a:spcBef>
-              <a:spcAft>
-                <a:spcPts val="0"/>
-              </a:spcAft>
-              <a:buSzPts val="1600"/>
-              <a:buChar char="●"/>
-            </a:pPr>
-            <a:r>
-              <a:rPr lang="en" sz="1600">
-                <a:solidFill>
-                  <a:srgbClr val="DEE2E6"/>
-                </a:solidFill>
-              </a:rPr>
-              <a:t>The walls are lines, not images</a:t>
-            </a:r>
-            <a:endParaRPr/>
-          </a:p>
-        </p:txBody>
-      </p:sp>
-      <p:sp>
-        <p:nvSpPr>
-          <p:cNvPr id="141" name="Google Shape;141;p23"/>
-          <p:cNvSpPr txBox="1"/>
-          <p:nvPr>
-            <p:ph idx="2" type="body"/>
-          </p:nvPr>
-        </p:nvSpPr>
-        <p:spPr>
-          <a:xfrm>
-            <a:off x="4150000" y="1152475"/>
-            <a:ext cx="4750000" cy="3600000"/>
-          </a:xfrm>
-          <a:prstGeom prst="rect">
-            <a:avLst/>
-          </a:prstGeom>
-        </p:spPr>
-        <p:txBody>
-          <a:bodyPr anchorCtr="0" anchor="t" bIns="91425" lIns="91425" spcFirstLastPara="1" rIns="91425" wrap="square" tIns="91425">
-            <a:noAutofit/>
-          </a:bodyPr>
-          <a:lstStyle/>
-          <a:p>
-            <a:pPr indent="0" lvl="0" marL="0" rtl="0" algn="l">
-              <a:lnSpc>
-                <a:spcPct val="115000"/>
-              </a:lnSpc>
-              <a:spcBef>
-                <a:spcPts val="0"/>
-              </a:spcBef>
-              <a:spcAft>
-                <a:spcPts val="0"/>
-              </a:spcAft>
-              <a:buNone/>
-            </a:pPr>
-            <a:r>
-              <a:rPr lang="en" sz="1000">
-                <a:highlight>
-                  <a:schemeClr val="dk2"/>
-                </a:highlight>
-                <a:latin typeface="Consolas"/>
-                <a:ea typeface="Consolas"/>
-                <a:cs typeface="Consolas"/>
-                <a:sym typeface="Consolas"/>
-              </a:rPr>
-              <a:t>############################</a:t>
-            </a:r>
-            <a:endParaRPr sz="1000">
-              <a:solidFill>
-                <a:srgbClr val="CCCCCC"/>
-              </a:solidFill>
-              <a:highlight>
-                <a:schemeClr val="dk2"/>
-              </a:highlight>
-              <a:latin typeface="Consolas"/>
-              <a:ea typeface="Consolas"/>
-              <a:cs typeface="Consolas"/>
-              <a:sym typeface="Consolas"/>
-            </a:endParaRPr>
-          </a:p>
-          <a:p>
-            <a:pPr indent="0" lvl="0" marL="0" rtl="0" algn="l">
-              <a:lnSpc>
-                <a:spcPct val="115000"/>
-              </a:lnSpc>
-              <a:spcBef>
-                <a:spcPts val="0"/>
-              </a:spcBef>
-              <a:spcAft>
-                <a:spcPts val="0"/>
-              </a:spcAft>
-              <a:buNone/>
-            </a:pPr>
-            <a:r>
-              <a:rPr lang="en" sz="1000">
-                <a:highlight>
-                  <a:schemeClr val="dk2"/>
-                </a:highlight>
-                <a:latin typeface="Consolas"/>
-                <a:ea typeface="Consolas"/>
-                <a:cs typeface="Consolas"/>
-                <a:sym typeface="Consolas"/>
-              </a:rPr>
-              <a:t>#............##............#</a:t>
-            </a:r>
-            <a:endParaRPr sz="1000">
-              <a:solidFill>
-                <a:srgbClr val="CCCCCC"/>
-              </a:solidFill>
-              <a:highlight>
-                <a:schemeClr val="dk2"/>
-              </a:highlight>
-              <a:latin typeface="Consolas"/>
-              <a:ea typeface="Consolas"/>
-              <a:cs typeface="Consolas"/>
-              <a:sym typeface="Consolas"/>
-            </a:endParaRPr>
-          </a:p>
-          <a:p>
-            <a:pPr indent="0" lvl="0" marL="0" rtl="0" algn="l">
-              <a:lnSpc>
-                <a:spcPct val="115000"/>
-              </a:lnSpc>
-              <a:spcBef>
-                <a:spcPts val="0"/>
-              </a:spcBef>
-              <a:spcAft>
-                <a:spcPts val="0"/>
-              </a:spcAft>
-              <a:buNone/>
-            </a:pPr>
-            <a:r>
-              <a:rPr lang="en" sz="1000">
-                <a:highlight>
-                  <a:schemeClr val="dk2"/>
-                </a:highlight>
-                <a:latin typeface="Consolas"/>
-                <a:ea typeface="Consolas"/>
-                <a:cs typeface="Consolas"/>
-                <a:sym typeface="Consolas"/>
-              </a:rPr>
-              <a:t>#.####.#####.##.#####.####.#</a:t>
-            </a:r>
-            <a:endParaRPr sz="1000">
-              <a:solidFill>
-                <a:srgbClr val="CCCCCC"/>
-              </a:solidFill>
-              <a:highlight>
-                <a:schemeClr val="dk2"/>
-              </a:highlight>
-              <a:latin typeface="Consolas"/>
-              <a:ea typeface="Consolas"/>
-              <a:cs typeface="Consolas"/>
-              <a:sym typeface="Consolas"/>
-            </a:endParaRPr>
-          </a:p>
-          <a:p>
-            <a:pPr indent="0" lvl="0" marL="0" rtl="0" algn="l">
-              <a:lnSpc>
-                <a:spcPct val="115000"/>
-              </a:lnSpc>
-              <a:spcBef>
-                <a:spcPts val="0"/>
-              </a:spcBef>
-              <a:spcAft>
-                <a:spcPts val="0"/>
-              </a:spcAft>
-              <a:buNone/>
-            </a:pPr>
-            <a:r>
-              <a:rPr lang="en" sz="1000">
-                <a:highlight>
-                  <a:schemeClr val="dk2"/>
-                </a:highlight>
-                <a:latin typeface="Consolas"/>
-                <a:ea typeface="Consolas"/>
-                <a:cs typeface="Consolas"/>
-                <a:sym typeface="Consolas"/>
-              </a:rPr>
-              <a:t>#o####.#####.##.#####.####o#</a:t>
-            </a:r>
-            <a:endParaRPr sz="1000">
-              <a:solidFill>
-                <a:srgbClr val="CCCCCC"/>
-              </a:solidFill>
-              <a:highlight>
-                <a:schemeClr val="dk2"/>
-              </a:highlight>
-              <a:latin typeface="Consolas"/>
-              <a:ea typeface="Consolas"/>
-              <a:cs typeface="Consolas"/>
-              <a:sym typeface="Consolas"/>
-            </a:endParaRPr>
-          </a:p>
-          <a:p>
-            <a:pPr indent="0" lvl="0" marL="0" rtl="0" algn="l">
-              <a:lnSpc>
-                <a:spcPct val="115000"/>
-              </a:lnSpc>
-              <a:spcBef>
-                <a:spcPts val="0"/>
-              </a:spcBef>
-              <a:spcAft>
-                <a:spcPts val="0"/>
-              </a:spcAft>
-              <a:buNone/>
-            </a:pPr>
-            <a:r>
-              <a:rPr lang="en" sz="1000">
-                <a:highlight>
-                  <a:schemeClr val="dk2"/>
-                </a:highlight>
-                <a:latin typeface="Consolas"/>
-                <a:ea typeface="Consolas"/>
-                <a:cs typeface="Consolas"/>
-                <a:sym typeface="Consolas"/>
-              </a:rPr>
-              <a:t>#.####.#####.##.#####.####.#</a:t>
-            </a:r>
-            <a:endParaRPr sz="1000">
-              <a:solidFill>
-                <a:srgbClr val="CCCCCC"/>
-              </a:solidFill>
-              <a:highlight>
-                <a:schemeClr val="dk2"/>
-              </a:highlight>
-              <a:latin typeface="Consolas"/>
-              <a:ea typeface="Consolas"/>
-              <a:cs typeface="Consolas"/>
-              <a:sym typeface="Consolas"/>
-            </a:endParaRPr>
-          </a:p>
-          <a:p>
-            <a:pPr indent="0" lvl="0" marL="0" rtl="0" algn="l">
-              <a:lnSpc>
-                <a:spcPct val="115000"/>
-              </a:lnSpc>
-              <a:spcBef>
-                <a:spcPts val="0"/>
-              </a:spcBef>
-              <a:spcAft>
-                <a:spcPts val="0"/>
-              </a:spcAft>
-              <a:buNone/>
-            </a:pPr>
-            <a:r>
-              <a:rPr lang="en" sz="1000">
-                <a:highlight>
-                  <a:schemeClr val="dk2"/>
-                </a:highlight>
-                <a:latin typeface="Consolas"/>
-                <a:ea typeface="Consolas"/>
-                <a:cs typeface="Consolas"/>
-                <a:sym typeface="Consolas"/>
-              </a:rPr>
-              <a:t>#..........................#</a:t>
-            </a:r>
-            <a:endParaRPr sz="1000">
-              <a:solidFill>
-                <a:srgbClr val="CCCCCC"/>
-              </a:solidFill>
-              <a:highlight>
-                <a:schemeClr val="dk2"/>
-              </a:highlight>
-              <a:latin typeface="Consolas"/>
-              <a:ea typeface="Consolas"/>
-              <a:cs typeface="Consolas"/>
-              <a:sym typeface="Consolas"/>
-            </a:endParaRPr>
-          </a:p>
-          <a:p>
-            <a:pPr indent="0" lvl="0" marL="0" rtl="0" algn="l">
-              <a:lnSpc>
-                <a:spcPct val="115000"/>
-              </a:lnSpc>
-              <a:spcBef>
-                <a:spcPts val="0"/>
-              </a:spcBef>
-              <a:spcAft>
-                <a:spcPts val="0"/>
-              </a:spcAft>
-              <a:buNone/>
-            </a:pPr>
-            <a:r>
-              <a:rPr lang="en" sz="1000">
-                <a:highlight>
-                  <a:schemeClr val="dk2"/>
-                </a:highlight>
-                <a:latin typeface="Consolas"/>
-                <a:ea typeface="Consolas"/>
-                <a:cs typeface="Consolas"/>
-                <a:sym typeface="Consolas"/>
-              </a:rPr>
-              <a:t>...</a:t>
-            </a:r>
-            <a:endParaRPr sz="1000">
-              <a:solidFill>
-                <a:srgbClr val="CCCCCC"/>
-              </a:solidFill>
-              <a:highlight>
-                <a:schemeClr val="dk2"/>
-              </a:highlight>
-              <a:latin typeface="Consolas"/>
-              <a:ea typeface="Consolas"/>
-              <a:cs typeface="Consolas"/>
-              <a:sym typeface="Consolas"/>
-            </a:endParaRPr>
-          </a:p>
-          <a:p>
-            <a:pPr indent="0" lvl="0" marL="0" rtl="0" algn="l">
-              <a:lnSpc>
-                <a:spcPct val="115000"/>
-              </a:lnSpc>
-              <a:spcBef>
-                <a:spcPts val="0"/>
-              </a:spcBef>
-              <a:spcAft>
-                <a:spcPts val="0"/>
-              </a:spcAft>
-              <a:buNone/>
-            </a:pPr>
-            <a:r>
-              <a:rPr lang="en" sz="1000">
-                <a:highlight>
-                  <a:schemeClr val="dk2"/>
-                </a:highlight>
-                <a:latin typeface="Consolas"/>
-                <a:ea typeface="Consolas"/>
-                <a:cs typeface="Consolas"/>
-                <a:sym typeface="Consolas"/>
-              </a:rPr>
-              <a:t>######.##.###--###.##.######</a:t>
-            </a:r>
-            <a:endParaRPr sz="1000">
-              <a:solidFill>
-                <a:srgbClr val="CCCCCC"/>
-              </a:solidFill>
-              <a:highlight>
-                <a:schemeClr val="dk2"/>
-              </a:highlight>
-              <a:latin typeface="Consolas"/>
-              <a:ea typeface="Consolas"/>
-              <a:cs typeface="Consolas"/>
-              <a:sym typeface="Consolas"/>
-            </a:endParaRPr>
-          </a:p>
-          <a:p>
-            <a:pPr indent="0" lvl="0" marL="0" rtl="0" algn="l">
-              <a:lnSpc>
-                <a:spcPct val="115000"/>
-              </a:lnSpc>
-              <a:spcBef>
-                <a:spcPts val="0"/>
-              </a:spcBef>
-              <a:spcAft>
-                <a:spcPts val="0"/>
-              </a:spcAft>
-              <a:buNone/>
-            </a:pPr>
-            <a:r>
-              <a:rPr lang="en" sz="1000">
-                <a:highlight>
-                  <a:schemeClr val="dk2"/>
-                </a:highlight>
-                <a:latin typeface="Consolas"/>
-                <a:ea typeface="Consolas"/>
-                <a:cs typeface="Consolas"/>
-                <a:sym typeface="Consolas"/>
-              </a:rPr>
-              <a:t>######.##.#HHHHHH#.##.######</a:t>
-            </a:r>
-            <a:endParaRPr sz="1000">
-              <a:solidFill>
-                <a:srgbClr val="CCCCCC"/>
-              </a:solidFill>
-              <a:highlight>
-                <a:schemeClr val="dk2"/>
-              </a:highlight>
-              <a:latin typeface="Consolas"/>
-              <a:ea typeface="Consolas"/>
-              <a:cs typeface="Consolas"/>
-              <a:sym typeface="Consolas"/>
-            </a:endParaRPr>
-          </a:p>
-          <a:p>
-            <a:pPr indent="0" lvl="0" marL="0" rtl="0" algn="l">
-              <a:lnSpc>
-                <a:spcPct val="115000"/>
-              </a:lnSpc>
-              <a:spcBef>
-                <a:spcPts val="0"/>
-              </a:spcBef>
-              <a:spcAft>
-                <a:spcPts val="0"/>
-              </a:spcAft>
-              <a:buNone/>
-            </a:pPr>
-            <a:r>
-              <a:rPr lang="en" sz="1000">
-                <a:highlight>
-                  <a:schemeClr val="dk2"/>
-                </a:highlight>
-                <a:latin typeface="Consolas"/>
-                <a:ea typeface="Consolas"/>
-                <a:cs typeface="Consolas"/>
-                <a:sym typeface="Consolas"/>
-              </a:rPr>
-              <a:t>      .   #iHpHHc#   .      </a:t>
-            </a:r>
-            <a:endParaRPr sz="1000">
-              <a:solidFill>
-                <a:srgbClr val="CCCCCC"/>
-              </a:solidFill>
-              <a:highlight>
-                <a:schemeClr val="dk2"/>
-              </a:highlight>
-              <a:latin typeface="Consolas"/>
-              <a:ea typeface="Consolas"/>
-              <a:cs typeface="Consolas"/>
-              <a:sym typeface="Consolas"/>
-            </a:endParaRPr>
-          </a:p>
-          <a:p>
-            <a:pPr indent="0" lvl="0" marL="0" rtl="0" algn="l">
-              <a:lnSpc>
-                <a:spcPct val="115000"/>
-              </a:lnSpc>
-              <a:spcBef>
-                <a:spcPts val="0"/>
-              </a:spcBef>
-              <a:spcAft>
-                <a:spcPts val="0"/>
-              </a:spcAft>
-              <a:buNone/>
-            </a:pPr>
-            <a:r>
-              <a:rPr lang="en" sz="1000">
-                <a:highlight>
-                  <a:schemeClr val="dk2"/>
-                </a:highlight>
-                <a:latin typeface="Consolas"/>
-                <a:ea typeface="Consolas"/>
-                <a:cs typeface="Consolas"/>
-                <a:sym typeface="Consolas"/>
-              </a:rPr>
-              <a:t>######.##.#HHHHHH#.##.######</a:t>
-            </a:r>
-            <a:endParaRPr sz="1000">
-              <a:solidFill>
-                <a:srgbClr val="CCCCCC"/>
-              </a:solidFill>
-              <a:highlight>
-                <a:schemeClr val="dk2"/>
-              </a:highlight>
-              <a:latin typeface="Consolas"/>
-              <a:ea typeface="Consolas"/>
-              <a:cs typeface="Consolas"/>
-              <a:sym typeface="Consolas"/>
-            </a:endParaRPr>
           </a:p>
         </p:txBody>
       </p:sp>
@@ -16882,7 +17219,7 @@
             </a:pPr>
             <a:r>
               <a:rPr lang="en"/>
-              <a:t>Moving Through the Maze</a:t>
+              <a:t>The Maze</a:t>
             </a:r>
             <a:endParaRPr/>
           </a:p>
@@ -16930,7 +17267,7 @@
                   <a:srgbClr val="DEE2E6"/>
                 </a:solidFill>
               </a:rPr>
-              <a:t>From tile centre to tile centre</a:t>
+              <a:t>A text file, like Sokoban’s levels</a:t>
             </a:r>
             <a:endParaRPr/>
           </a:p>
@@ -16954,7 +17291,55 @@
                   <a:srgbClr val="6C757D"/>
                 </a:solidFill>
               </a:rPr>
-              <a:t>Turning only at a centre</a:t>
+              <a:t># wall   . dot   o power pellet</a:t>
+            </a:r>
+            <a:endParaRPr/>
+          </a:p>
+          <a:p>
+            <a:pPr indent="-317500" lvl="1" marL="914400" rtl="0" algn="l">
+              <a:buClr>
+                <a:srgbClr val="6C757D"/>
+              </a:buClr>
+              <a:spcBef>
+                <a:spcPts val="0"/>
+              </a:spcBef>
+              <a:spcAft>
+                <a:spcPts val="0"/>
+              </a:spcAft>
+              <a:buSzPts val="1400"/>
+              <a:buChar char="○"/>
+            </a:pPr>
+            <a:r>
+              <a:rPr lang="en" sz="1400">
+                <a:solidFill>
+                  <a:srgbClr val="6C757D"/>
+                </a:solidFill>
+              </a:rPr>
+              <a:t>- house door   H inside the house</a:t>
+            </a:r>
+            <a:endParaRPr/>
+          </a:p>
+          <a:p>
+            <a:pPr indent="-317500" lvl="1" marL="914400" rtl="0" algn="l">
+              <a:buClr>
+                <a:srgbClr val="6C757D"/>
+              </a:buClr>
+              <a:spcBef>
+                <a:spcPts val="0"/>
+              </a:spcBef>
+              <a:spcAft>
+                <a:spcPts val="0"/>
+              </a:spcAft>
+              <a:buSzPts val="1400"/>
+              <a:buChar char="○"/>
+            </a:pPr>
+            <a:r>
+              <a:rPr lang="en" sz="1400">
+                <a:solidFill>
+                  <a:srgbClr val="6C757D"/>
+                </a:solidFill>
+              </a:rPr>
+              <a:t>P Pac-Man   b p i c the ghosts</a:t>
             </a:r>
             <a:endParaRPr/>
           </a:p>
@@ -16978,7 +17363,31 @@
                   <a:srgbClr val="DEE2E6"/>
                 </a:solidFill>
               </a:rPr>
-              <a:t>Actor: shared by Pac-Man and the ghosts</a:t>
+              <a:t>A row open at both ends is a tunnel</a:t>
+            </a:r>
+            <a:endParaRPr/>
+          </a:p>
+          <a:p>
+            <a:pPr indent="-330200" lvl="0" marL="457200" rtl="0" algn="l">
+              <a:buClr>
+                <a:srgbClr val="DEE2E6"/>
+              </a:buClr>
+              <a:spcBef>
+                <a:spcPts val="0"/>
+              </a:spcBef>
+              <a:spcAft>
+                <a:spcPts val="0"/>
+              </a:spcAft>
+              <a:buSzPts val="1600"/>
+              <a:buChar char="●"/>
+            </a:pPr>
+            <a:r>
+              <a:rPr lang="en" sz="1600">
+                <a:solidFill>
+                  <a:srgbClr val="DEE2E6"/>
+                </a:solidFill>
+              </a:rPr>
+              <a:t>Rules apart from drawing, as in Sokoban</a:t>
             </a:r>
             <a:endParaRPr/>
           </a:p>
@@ -17002,7 +17411,31 @@
                   <a:srgbClr val="6C757D"/>
                 </a:solidFill>
               </a:rPr>
-              <a:t>They differ only in ChooseDirection</a:t>
+              <a:t>Maze, PacMan, World: the game</a:t>
+            </a:r>
+            <a:endParaRPr/>
+          </a:p>
+          <a:p>
+            <a:pPr indent="-317500" lvl="1" marL="914400" rtl="0" algn="l">
+              <a:buClr>
+                <a:srgbClr val="6C757D"/>
+              </a:buClr>
+              <a:spcBef>
+                <a:spcPts val="0"/>
+              </a:spcBef>
+              <a:spcAft>
+                <a:spcPts val="0"/>
+              </a:spcAft>
+              <a:buSzPts val="1400"/>
+              <a:buChar char="○"/>
+            </a:pPr>
+            <a:r>
+              <a:rPr lang="en" sz="1400">
+                <a:solidFill>
+                  <a:srgbClr val="6C757D"/>
+                </a:solidFill>
+              </a:rPr>
+              <a:t>MazeView, PacManView: the drawing</a:t>
             </a:r>
             <a:endParaRPr/>
           </a:p>
@@ -17026,55 +17459,7 @@
                   <a:srgbClr val="DEE2E6"/>
                 </a:solidFill>
               </a:rPr>
-              <a:t>Wanted is kept until Pac-Man can turn</a:t>
-            </a:r>
-            <a:endParaRPr/>
-          </a:p>
-          <a:p>
-            <a:pPr indent="-317500" lvl="1" marL="914400" rtl="0" algn="l">
-              <a:buClr>
-                <a:srgbClr val="6C757D"/>
-              </a:buClr>
-              <a:spcBef>
-                <a:spcPts val="0"/>
-              </a:spcBef>
-              <a:spcAft>
-                <a:spcPts val="0"/>
-              </a:spcAft>
-              <a:buSzPts val="1400"/>
-              <a:buChar char="○"/>
-            </a:pPr>
-            <a:r>
-              <a:rPr lang="en" sz="1400">
-                <a:solidFill>
-                  <a:srgbClr val="6C757D"/>
-                </a:solidFill>
-              </a:rPr>
-              <a:t>Input buffering, as in Snake</a:t>
-            </a:r>
-            <a:endParaRPr/>
-          </a:p>
-          <a:p>
-            <a:pPr indent="-317500" lvl="1" marL="914400" rtl="0" algn="l">
-              <a:buClr>
-                <a:srgbClr val="6C757D"/>
-              </a:buClr>
-              <a:spcBef>
-                <a:spcPts val="0"/>
-              </a:spcBef>
-              <a:spcAft>
-                <a:spcPts val="0"/>
-              </a:spcAft>
-              <a:buSzPts val="1400"/>
-              <a:buChar char="○"/>
-            </a:pPr>
-            <a:r>
-              <a:rPr lang="en" sz="1400">
-                <a:solidFill>
-                  <a:srgbClr val="6C757D"/>
-                </a:solidFill>
-              </a:rPr>
-              <a:t>Press up before the corner: he turns there</a:t>
+              <a:t>The walls are lines, not images</a:t>
             </a:r>
             <a:endParaRPr/>
           </a:p>
@@ -17125,7 +17510,7 @@
                 <a:cs typeface="Consolas"/>
                 <a:sym typeface="Consolas"/>
               </a:rPr>
-              <a:t>// Actor.Move, at a tile centre:</a:t>
+              <a:t>############################</a:t>
             </a:r>
             <a:endParaRPr sz="1000">
               <a:solidFill>
@@ -17163,7 +17548,7 @@
                 <a:cs typeface="Consolas"/>
                 <a:sym typeface="Consolas"/>
               </a:rPr>
-              <a:t>Heading = ChooseDirection(_target);</a:t>
+              <a:t>#............##............#</a:t>
             </a:r>
             <a:endParaRPr sz="1000">
               <a:solidFill>
@@ -17201,7 +17586,7 @@
                 <a:cs typeface="Consolas"/>
                 <a:sym typeface="Consolas"/>
               </a:rPr>
-              <a:t/>
+              <a:t>#.####.#####.##.#####.####.#</a:t>
             </a:r>
             <a:endParaRPr sz="1000">
               <a:solidFill>
@@ -17239,7 +17624,7 @@
                 <a:cs typeface="Consolas"/>
                 <a:sym typeface="Consolas"/>
               </a:rPr>
-              <a:t>// PacMan.cs</a:t>
+              <a:t>#o####.#####.##.#####.####o#</a:t>
             </a:r>
             <a:endParaRPr sz="1000">
               <a:solidFill>
@@ -17277,7 +17662,7 @@
                 <a:cs typeface="Consolas"/>
                 <a:sym typeface="Consolas"/>
               </a:rPr>
-              <a:t>protected override Point ChooseDirection(</a:t>
+              <a:t>#.####.#####.##.#####.####.#</a:t>
             </a:r>
             <a:endParaRPr sz="1000">
               <a:solidFill>
@@ -17315,7 +17700,7 @@
                 <a:cs typeface="Consolas"/>
                 <a:sym typeface="Consolas"/>
               </a:rPr>
-              <a:t>    Point tile)</a:t>
+              <a:t>#..........................#</a:t>
             </a:r>
             <a:endParaRPr sz="1000">
               <a:solidFill>
@@ -17353,7 +17738,7 @@
                 <a:cs typeface="Consolas"/>
                 <a:sym typeface="Consolas"/>
               </a:rPr>
-              <a:t>{</a:t>
+              <a:t>...</a:t>
             </a:r>
             <a:endParaRPr sz="1000">
               <a:solidFill>
@@ -17391,7 +17776,7 @@
                 <a:cs typeface="Consolas"/>
                 <a:sym typeface="Consolas"/>
               </a:rPr>
-              <a:t>    if (Wanted != Direction.None &amp;&amp;</a:t>
+              <a:t>######.##.###--###.##.######</a:t>
             </a:r>
             <a:endParaRPr sz="1000">
               <a:solidFill>
@@ -17429,7 +17814,7 @@
                 <a:cs typeface="Consolas"/>
                 <a:sym typeface="Consolas"/>
               </a:rPr>
-              <a:t>        !Maze.BlocksPacMan(tile + Wanted))</a:t>
+              <a:t>######.##.#HHHHHH#.##.######</a:t>
             </a:r>
             <a:endParaRPr sz="1000">
               <a:solidFill>
@@ -17467,7 +17852,7 @@
                 <a:cs typeface="Consolas"/>
                 <a:sym typeface="Consolas"/>
               </a:rPr>
-              <a:t>        return Wanted;</a:t>
+              <a:t>      .   #iHpHHc#   .      </a:t>
             </a:r>
             <a:endParaRPr sz="1000">
               <a:solidFill>
@@ -17505,7 +17890,7 @@
                 <a:cs typeface="Consolas"/>
                 <a:sym typeface="Consolas"/>
               </a:rPr>
-              <a:t>    if (!Maze.BlocksPacMan(tile + Heading))</a:t>
+              <a:t>######.##.#HHHHHH#.##.######</a:t>
             </a:r>
             <a:endParaRPr sz="1000">
               <a:solidFill>
@@ -17520,6 +17905,280 @@
               <a:sym typeface="Consolas"/>
             </a:endParaRPr>
           </a:p>
+        </p:txBody>
+      </p:sp>
+    </p:spTree>
+  </p:cSld>
+  <p:clrMapOvr>
+    <a:masterClrMapping/>
+  </p:clrMapOvr>
+</p:sld>
+</file>
+
+<file path=ppt/slides/slide7.xml><?xml version="1.0" encoding="utf-8"?>
+<p:sld xmlns:a="http://schemas.openxmlformats.org/drawingml/2006/main" xmlns:p="http://schemas.openxmlformats.org/presentationml/2006/main" xmlns:r="http://schemas.openxmlformats.org/officeDocument/2006/relationships">
+  <p:cSld>
+    <p:spTree>
+      <p:nvGrpSpPr>
+        <p:cNvPr id="1" name=""/>
+        <p:cNvGrpSpPr/>
+        <p:nvPr/>
+      </p:nvGrpSpPr>
+      <p:grpSpPr/>
+      <p:sp>
+        <p:nvSpPr>
+          <p:cNvPr id="140" name="Google Shape;140;p23"/>
+          <p:cNvSpPr txBox="1"/>
+          <p:nvPr>
+            <p:ph type="title"/>
+          </p:nvPr>
+        </p:nvSpPr>
+        <p:spPr>
+          <a:xfrm>
+            <a:off x="311700" y="195615"/>
+            <a:ext cx="8520600" cy="572700"/>
+          </a:xfrm>
+          <a:prstGeom prst="rect">
+            <a:avLst/>
+          </a:prstGeom>
+        </p:spPr>
+        <p:txBody>
+          <a:bodyPr anchorCtr="0" anchor="t" bIns="91425" lIns="91425" spcFirstLastPara="1" rIns="91425" wrap="square" tIns="91425">
+            <a:normAutofit fontScale="90000"/>
+          </a:bodyPr>
+          <a:lstStyle/>
+          <a:p>
+            <a:pPr indent="0" lvl="0" marL="0" rtl="0" algn="l">
+              <a:spcBef>
+                <a:spcPts val="0"/>
+              </a:spcBef>
+              <a:spcAft>
+                <a:spcPts val="0"/>
+              </a:spcAft>
+              <a:buNone/>
+            </a:pPr>
+            <a:r>
+              <a:rPr lang="en"/>
+              <a:t>Moving Through the Maze</a:t>
+            </a:r>
+            <a:endParaRPr/>
+          </a:p>
+        </p:txBody>
+      </p:sp>
+      <p:sp>
+        <p:nvSpPr>
+          <p:cNvPr id="293" name="Google Shape;293;p45"/>
+          <p:cNvSpPr txBox="1"/>
+          <p:nvPr>
+            <p:ph type="title"/>
+          </p:nvPr>
+        </p:nvSpPr>
+        <p:spPr>
+          <a:xfrm>
+            <a:off x="311700" y="1152475"/>
+            <a:ext cx="3700000" cy="3500000"/>
+          </a:xfrm>
+          <a:prstGeom prst="rect">
+            <a:avLst/>
+          </a:prstGeom>
+        </p:spPr>
+        <p:txBody>
+          <a:bodyPr anchorCtr="0" anchor="t" bIns="91425" lIns="91425" spcFirstLastPara="1" rIns="91425" wrap="square" tIns="91425">
+            <a:normAutofit fontScale="90000"/>
+          </a:bodyPr>
+          <a:lstStyle/>
+          <a:p>
+            <a:pPr indent="-330200" lvl="0" marL="457200" rtl="0" algn="l">
+              <a:buClr>
+                <a:srgbClr val="DEE2E6"/>
+              </a:buClr>
+              <a:spcBef>
+                <a:spcPts val="0"/>
+              </a:spcBef>
+              <a:spcAft>
+                <a:spcPts val="0"/>
+              </a:spcAft>
+              <a:buSzPts val="1600"/>
+              <a:buChar char="●"/>
+            </a:pPr>
+            <a:r>
+              <a:rPr lang="en" sz="1600">
+                <a:solidFill>
+                  <a:srgbClr val="DEE2E6"/>
+                </a:solidFill>
+              </a:rPr>
+              <a:t>From tile centre to tile centre</a:t>
+            </a:r>
+            <a:endParaRPr/>
+          </a:p>
+          <a:p>
+            <a:pPr indent="-317500" lvl="1" marL="914400" rtl="0" algn="l">
+              <a:buClr>
+                <a:srgbClr val="6C757D"/>
+              </a:buClr>
+              <a:spcBef>
+                <a:spcPts val="0"/>
+              </a:spcBef>
+              <a:spcAft>
+                <a:spcPts val="0"/>
+              </a:spcAft>
+              <a:buSzPts val="1400"/>
+              <a:buChar char="○"/>
+            </a:pPr>
+            <a:r>
+              <a:rPr lang="en" sz="1400">
+                <a:solidFill>
+                  <a:srgbClr val="6C757D"/>
+                </a:solidFill>
+              </a:rPr>
+              <a:t>Turning only at a centre</a:t>
+            </a:r>
+            <a:endParaRPr/>
+          </a:p>
+          <a:p>
+            <a:pPr indent="-330200" lvl="0" marL="457200" rtl="0" algn="l">
+              <a:buClr>
+                <a:srgbClr val="DEE2E6"/>
+              </a:buClr>
+              <a:spcBef>
+                <a:spcPts val="0"/>
+              </a:spcBef>
+              <a:spcAft>
+                <a:spcPts val="0"/>
+              </a:spcAft>
+              <a:buSzPts val="1600"/>
+              <a:buChar char="●"/>
+            </a:pPr>
+            <a:r>
+              <a:rPr lang="en" sz="1600">
+                <a:solidFill>
+                  <a:srgbClr val="DEE2E6"/>
+                </a:solidFill>
+              </a:rPr>
+              <a:t>Actor: shared by Pac-Man and the ghosts</a:t>
+            </a:r>
+            <a:endParaRPr/>
+          </a:p>
+          <a:p>
+            <a:pPr indent="-317500" lvl="1" marL="914400" rtl="0" algn="l">
+              <a:buClr>
+                <a:srgbClr val="6C757D"/>
+              </a:buClr>
+              <a:spcBef>
+                <a:spcPts val="0"/>
+              </a:spcBef>
+              <a:spcAft>
+                <a:spcPts val="0"/>
+              </a:spcAft>
+              <a:buSzPts val="1400"/>
+              <a:buChar char="○"/>
+            </a:pPr>
+            <a:r>
+              <a:rPr lang="en" sz="1400">
+                <a:solidFill>
+                  <a:srgbClr val="6C757D"/>
+                </a:solidFill>
+              </a:rPr>
+              <a:t>They differ only in ChooseDirection</a:t>
+            </a:r>
+            <a:endParaRPr/>
+          </a:p>
+          <a:p>
+            <a:pPr indent="-330200" lvl="0" marL="457200" rtl="0" algn="l">
+              <a:buClr>
+                <a:srgbClr val="DEE2E6"/>
+              </a:buClr>
+              <a:spcBef>
+                <a:spcPts val="0"/>
+              </a:spcBef>
+              <a:spcAft>
+                <a:spcPts val="0"/>
+              </a:spcAft>
+              <a:buSzPts val="1600"/>
+              <a:buChar char="●"/>
+            </a:pPr>
+            <a:r>
+              <a:rPr lang="en" sz="1600">
+                <a:solidFill>
+                  <a:srgbClr val="DEE2E6"/>
+                </a:solidFill>
+              </a:rPr>
+              <a:t>Wanted is kept until Pac-Man can turn</a:t>
+            </a:r>
+            <a:endParaRPr/>
+          </a:p>
+          <a:p>
+            <a:pPr indent="-317500" lvl="1" marL="914400" rtl="0" algn="l">
+              <a:buClr>
+                <a:srgbClr val="6C757D"/>
+              </a:buClr>
+              <a:spcBef>
+                <a:spcPts val="0"/>
+              </a:spcBef>
+              <a:spcAft>
+                <a:spcPts val="0"/>
+              </a:spcAft>
+              <a:buSzPts val="1400"/>
+              <a:buChar char="○"/>
+            </a:pPr>
+            <a:r>
+              <a:rPr lang="en" sz="1400">
+                <a:solidFill>
+                  <a:srgbClr val="6C757D"/>
+                </a:solidFill>
+              </a:rPr>
+              <a:t>Input buffering, as in Snake</a:t>
+            </a:r>
+            <a:endParaRPr/>
+          </a:p>
+          <a:p>
+            <a:pPr indent="-317500" lvl="1" marL="914400" rtl="0" algn="l">
+              <a:buClr>
+                <a:srgbClr val="6C757D"/>
+              </a:buClr>
+              <a:spcBef>
+                <a:spcPts val="0"/>
+              </a:spcBef>
+              <a:spcAft>
+                <a:spcPts val="0"/>
+              </a:spcAft>
+              <a:buSzPts val="1400"/>
+              <a:buChar char="○"/>
+            </a:pPr>
+            <a:r>
+              <a:rPr lang="en" sz="1400">
+                <a:solidFill>
+                  <a:srgbClr val="6C757D"/>
+                </a:solidFill>
+              </a:rPr>
+              <a:t>Press up before the corner: he turns there</a:t>
+            </a:r>
+            <a:endParaRPr/>
+          </a:p>
+        </p:txBody>
+      </p:sp>
+      <p:sp>
+        <p:nvSpPr>
+          <p:cNvPr id="141" name="Google Shape;141;p23"/>
+          <p:cNvSpPr txBox="1"/>
+          <p:nvPr>
+            <p:ph idx="2" type="body"/>
+          </p:nvPr>
+        </p:nvSpPr>
+        <p:spPr>
+          <a:xfrm>
+            <a:off x="4150000" y="1152475"/>
+            <a:ext cx="4750000" cy="3600000"/>
+          </a:xfrm>
+          <a:prstGeom prst="rect">
+            <a:avLst/>
+          </a:prstGeom>
+        </p:spPr>
+        <p:txBody>
+          <a:bodyPr anchorCtr="0" anchor="t" bIns="91425" lIns="91425" spcFirstLastPara="1" rIns="91425" wrap="square" tIns="91425">
+            <a:noAutofit/>
+          </a:bodyPr>
+          <a:lstStyle/>
           <a:p>
             <a:pPr indent="0" lvl="0" marL="0" rtl="0" algn="l">
               <a:lnSpc>
@@ -17543,7 +18202,7 @@
                 <a:cs typeface="Consolas"/>
                 <a:sym typeface="Consolas"/>
               </a:rPr>
-              <a:t>        return Heading;</a:t>
+              <a:t>// Actor.Move, at a tile centre:</a:t>
             </a:r>
             <a:endParaRPr sz="1000">
               <a:solidFill>
@@ -17581,7 +18240,7 @@
                 <a:cs typeface="Consolas"/>
                 <a:sym typeface="Consolas"/>
               </a:rPr>
-              <a:t>    return Direction.None;</a:t>
+              <a:t>Heading = ChooseDirection(_target);</a:t>
             </a:r>
             <a:endParaRPr sz="1000">
               <a:solidFill>
@@ -17619,7 +18278,7 @@
                 <a:cs typeface="Consolas"/>
                 <a:sym typeface="Consolas"/>
               </a:rPr>
-              <a:t>}</a:t>
+              <a:t/>
             </a:r>
             <a:endParaRPr sz="1000">
               <a:solidFill>
@@ -17634,6 +18293,424 @@
               <a:sym typeface="Consolas"/>
             </a:endParaRPr>
           </a:p>
+          <a:p>
+            <a:pPr indent="0" lvl="0" marL="0" rtl="0" algn="l">
+              <a:lnSpc>
+                <a:spcPct val="115000"/>
+              </a:lnSpc>
+              <a:spcBef>
+                <a:spcPts val="0"/>
+              </a:spcBef>
+              <a:spcAft>
+                <a:spcPts val="0"/>
+              </a:spcAft>
+              <a:buNone/>
+            </a:pPr>
+            <a:r>
+              <a:rPr lang="en" sz="1000">
+                <a:highlight>
+                  <a:schemeClr val="dk2"/>
+                </a:highlight>
+                <a:latin typeface="Consolas"/>
+                <a:ea typeface="Consolas"/>
+                <a:cs typeface="Consolas"/>
+                <a:sym typeface="Consolas"/>
+              </a:rPr>
+              <a:t>// PacMan.cs</a:t>
+            </a:r>
+            <a:endParaRPr sz="1000">
+              <a:solidFill>
+                <a:srgbClr val="CCCCCC"/>
+              </a:solidFill>
+              <a:highlight>
+                <a:schemeClr val="dk2"/>
+              </a:highlight>
+              <a:latin typeface="Consolas"/>
+              <a:ea typeface="Consolas"/>
+              <a:cs typeface="Consolas"/>
+              <a:sym typeface="Consolas"/>
+            </a:endParaRPr>
+          </a:p>
+          <a:p>
+            <a:pPr indent="0" lvl="0" marL="0" rtl="0" algn="l">
+              <a:lnSpc>
+                <a:spcPct val="115000"/>
+              </a:lnSpc>
+              <a:spcBef>
+                <a:spcPts val="0"/>
+              </a:spcBef>
+              <a:spcAft>
+                <a:spcPts val="0"/>
+              </a:spcAft>
+              <a:buNone/>
+            </a:pPr>
+            <a:r>
+              <a:rPr lang="en" sz="1000">
+                <a:highlight>
+                  <a:schemeClr val="dk2"/>
+                </a:highlight>
+                <a:latin typeface="Consolas"/>
+                <a:ea typeface="Consolas"/>
+                <a:cs typeface="Consolas"/>
+                <a:sym typeface="Consolas"/>
+              </a:rPr>
+              <a:t>protected override Point ChooseDirection(</a:t>
+            </a:r>
+            <a:endParaRPr sz="1000">
+              <a:solidFill>
+                <a:srgbClr val="CCCCCC"/>
+              </a:solidFill>
+              <a:highlight>
+                <a:schemeClr val="dk2"/>
+              </a:highlight>
+              <a:latin typeface="Consolas"/>
+              <a:ea typeface="Consolas"/>
+              <a:cs typeface="Consolas"/>
+              <a:sym typeface="Consolas"/>
+            </a:endParaRPr>
+          </a:p>
+          <a:p>
+            <a:pPr indent="0" lvl="0" marL="0" rtl="0" algn="l">
+              <a:lnSpc>
+                <a:spcPct val="115000"/>
+              </a:lnSpc>
+              <a:spcBef>
+                <a:spcPts val="0"/>
+              </a:spcBef>
+              <a:spcAft>
+                <a:spcPts val="0"/>
+              </a:spcAft>
+              <a:buNone/>
+            </a:pPr>
+            <a:r>
+              <a:rPr lang="en" sz="1000">
+                <a:highlight>
+                  <a:schemeClr val="dk2"/>
+                </a:highlight>
+                <a:latin typeface="Consolas"/>
+                <a:ea typeface="Consolas"/>
+                <a:cs typeface="Consolas"/>
+                <a:sym typeface="Consolas"/>
+              </a:rPr>
+              <a:t>    Point tile)</a:t>
+            </a:r>
+            <a:endParaRPr sz="1000">
+              <a:solidFill>
+                <a:srgbClr val="CCCCCC"/>
+              </a:solidFill>
+              <a:highlight>
+                <a:schemeClr val="dk2"/>
+              </a:highlight>
+              <a:latin typeface="Consolas"/>
+              <a:ea typeface="Consolas"/>
+              <a:cs typeface="Consolas"/>
+              <a:sym typeface="Consolas"/>
+            </a:endParaRPr>
+          </a:p>
+          <a:p>
+            <a:pPr indent="0" lvl="0" marL="0" rtl="0" algn="l">
+              <a:lnSpc>
+                <a:spcPct val="115000"/>
+              </a:lnSpc>
+              <a:spcBef>
+                <a:spcPts val="0"/>
+              </a:spcBef>
+              <a:spcAft>
+                <a:spcPts val="0"/>
+              </a:spcAft>
+              <a:buNone/>
+            </a:pPr>
+            <a:r>
+              <a:rPr lang="en" sz="1000">
+                <a:highlight>
+                  <a:schemeClr val="dk2"/>
+                </a:highlight>
+                <a:latin typeface="Consolas"/>
+                <a:ea typeface="Consolas"/>
+                <a:cs typeface="Consolas"/>
+                <a:sym typeface="Consolas"/>
+              </a:rPr>
+              <a:t>{</a:t>
+            </a:r>
+            <a:endParaRPr sz="1000">
+              <a:solidFill>
+                <a:srgbClr val="CCCCCC"/>
+              </a:solidFill>
+              <a:highlight>
+                <a:schemeClr val="dk2"/>
+              </a:highlight>
+              <a:latin typeface="Consolas"/>
+              <a:ea typeface="Consolas"/>
+              <a:cs typeface="Consolas"/>
+              <a:sym typeface="Consolas"/>
+            </a:endParaRPr>
+          </a:p>
+          <a:p>
+            <a:pPr indent="0" lvl="0" marL="0" rtl="0" algn="l">
+              <a:lnSpc>
+                <a:spcPct val="115000"/>
+              </a:lnSpc>
+              <a:spcBef>
+                <a:spcPts val="0"/>
+              </a:spcBef>
+              <a:spcAft>
+                <a:spcPts val="0"/>
+              </a:spcAft>
+              <a:buNone/>
+            </a:pPr>
+            <a:r>
+              <a:rPr lang="en" sz="1000">
+                <a:highlight>
+                  <a:schemeClr val="dk2"/>
+                </a:highlight>
+                <a:latin typeface="Consolas"/>
+                <a:ea typeface="Consolas"/>
+                <a:cs typeface="Consolas"/>
+                <a:sym typeface="Consolas"/>
+              </a:rPr>
+              <a:t>    if (Wanted != Direction.None &amp;&amp;</a:t>
+            </a:r>
+            <a:endParaRPr sz="1000">
+              <a:solidFill>
+                <a:srgbClr val="CCCCCC"/>
+              </a:solidFill>
+              <a:highlight>
+                <a:schemeClr val="dk2"/>
+              </a:highlight>
+              <a:latin typeface="Consolas"/>
+              <a:ea typeface="Consolas"/>
+              <a:cs typeface="Consolas"/>
+              <a:sym typeface="Consolas"/>
+            </a:endParaRPr>
+          </a:p>
+          <a:p>
+            <a:pPr indent="0" lvl="0" marL="0" rtl="0" algn="l">
+              <a:lnSpc>
+                <a:spcPct val="115000"/>
+              </a:lnSpc>
+              <a:spcBef>
+                <a:spcPts val="0"/>
+              </a:spcBef>
+              <a:spcAft>
+                <a:spcPts val="0"/>
+              </a:spcAft>
+              <a:buNone/>
+            </a:pPr>
+            <a:r>
+              <a:rPr lang="en" sz="1000">
+                <a:highlight>
+                  <a:schemeClr val="dk2"/>
+                </a:highlight>
+                <a:latin typeface="Consolas"/>
+                <a:ea typeface="Consolas"/>
+                <a:cs typeface="Consolas"/>
+                <a:sym typeface="Consolas"/>
+              </a:rPr>
+              <a:t>        !Maze.BlocksPacMan(tile + Wanted))</a:t>
+            </a:r>
+            <a:endParaRPr sz="1000">
+              <a:solidFill>
+                <a:srgbClr val="CCCCCC"/>
+              </a:solidFill>
+              <a:highlight>
+                <a:schemeClr val="dk2"/>
+              </a:highlight>
+              <a:latin typeface="Consolas"/>
+              <a:ea typeface="Consolas"/>
+              <a:cs typeface="Consolas"/>
+              <a:sym typeface="Consolas"/>
+            </a:endParaRPr>
+          </a:p>
+          <a:p>
+            <a:pPr indent="0" lvl="0" marL="0" rtl="0" algn="l">
+              <a:lnSpc>
+                <a:spcPct val="115000"/>
+              </a:lnSpc>
+              <a:spcBef>
+                <a:spcPts val="0"/>
+              </a:spcBef>
+              <a:spcAft>
+                <a:spcPts val="0"/>
+              </a:spcAft>
+              <a:buNone/>
+            </a:pPr>
+            <a:r>
+              <a:rPr lang="en" sz="1000">
+                <a:highlight>
+                  <a:schemeClr val="dk2"/>
+                </a:highlight>
+                <a:latin typeface="Consolas"/>
+                <a:ea typeface="Consolas"/>
+                <a:cs typeface="Consolas"/>
+                <a:sym typeface="Consolas"/>
+              </a:rPr>
+              <a:t>        return Wanted;</a:t>
+            </a:r>
+            <a:endParaRPr sz="1000">
+              <a:solidFill>
+                <a:srgbClr val="CCCCCC"/>
+              </a:solidFill>
+              <a:highlight>
+                <a:schemeClr val="dk2"/>
+              </a:highlight>
+              <a:latin typeface="Consolas"/>
+              <a:ea typeface="Consolas"/>
+              <a:cs typeface="Consolas"/>
+              <a:sym typeface="Consolas"/>
+            </a:endParaRPr>
+          </a:p>
+          <a:p>
+            <a:pPr indent="0" lvl="0" marL="0" rtl="0" algn="l">
+              <a:lnSpc>
+                <a:spcPct val="115000"/>
+              </a:lnSpc>
+              <a:spcBef>
+                <a:spcPts val="0"/>
+              </a:spcBef>
+              <a:spcAft>
+                <a:spcPts val="0"/>
+              </a:spcAft>
+              <a:buNone/>
+            </a:pPr>
+            <a:r>
+              <a:rPr lang="en" sz="1000">
+                <a:highlight>
+                  <a:schemeClr val="dk2"/>
+                </a:highlight>
+                <a:latin typeface="Consolas"/>
+                <a:ea typeface="Consolas"/>
+                <a:cs typeface="Consolas"/>
+                <a:sym typeface="Consolas"/>
+              </a:rPr>
+              <a:t>    if (!Maze.BlocksPacMan(tile + Heading))</a:t>
+            </a:r>
+            <a:endParaRPr sz="1000">
+              <a:solidFill>
+                <a:srgbClr val="CCCCCC"/>
+              </a:solidFill>
+              <a:highlight>
+                <a:schemeClr val="dk2"/>
+              </a:highlight>
+              <a:latin typeface="Consolas"/>
+              <a:ea typeface="Consolas"/>
+              <a:cs typeface="Consolas"/>
+              <a:sym typeface="Consolas"/>
+            </a:endParaRPr>
+          </a:p>
+          <a:p>
+            <a:pPr indent="0" lvl="0" marL="0" rtl="0" algn="l">
+              <a:lnSpc>
+                <a:spcPct val="115000"/>
+              </a:lnSpc>
+              <a:spcBef>
+                <a:spcPts val="0"/>
+              </a:spcBef>
+              <a:spcAft>
+                <a:spcPts val="0"/>
+              </a:spcAft>
+              <a:buNone/>
+            </a:pPr>
+            <a:r>
+              <a:rPr lang="en" sz="1000">
+                <a:highlight>
+                  <a:schemeClr val="dk2"/>
+                </a:highlight>
+                <a:latin typeface="Consolas"/>
+                <a:ea typeface="Consolas"/>
+                <a:cs typeface="Consolas"/>
+                <a:sym typeface="Consolas"/>
+              </a:rPr>
+              <a:t>        return Heading;</a:t>
+            </a:r>
+            <a:endParaRPr sz="1000">
+              <a:solidFill>
+                <a:srgbClr val="CCCCCC"/>
+              </a:solidFill>
+              <a:highlight>
+                <a:schemeClr val="dk2"/>
+              </a:highlight>
+              <a:latin typeface="Consolas"/>
+              <a:ea typeface="Consolas"/>
+              <a:cs typeface="Consolas"/>
+              <a:sym typeface="Consolas"/>
+            </a:endParaRPr>
+          </a:p>
+          <a:p>
+            <a:pPr indent="0" lvl="0" marL="0" rtl="0" algn="l">
+              <a:lnSpc>
+                <a:spcPct val="115000"/>
+              </a:lnSpc>
+              <a:spcBef>
+                <a:spcPts val="0"/>
+              </a:spcBef>
+              <a:spcAft>
+                <a:spcPts val="0"/>
+              </a:spcAft>
+              <a:buNone/>
+            </a:pPr>
+            <a:r>
+              <a:rPr lang="en" sz="1000">
+                <a:highlight>
+                  <a:schemeClr val="dk2"/>
+                </a:highlight>
+                <a:latin typeface="Consolas"/>
+                <a:ea typeface="Consolas"/>
+                <a:cs typeface="Consolas"/>
+                <a:sym typeface="Consolas"/>
+              </a:rPr>
+              <a:t>    return Direction.None;</a:t>
+            </a:r>
+            <a:endParaRPr sz="1000">
+              <a:solidFill>
+                <a:srgbClr val="CCCCCC"/>
+              </a:solidFill>
+              <a:highlight>
+                <a:schemeClr val="dk2"/>
+              </a:highlight>
+              <a:latin typeface="Consolas"/>
+              <a:ea typeface="Consolas"/>
+              <a:cs typeface="Consolas"/>
+              <a:sym typeface="Consolas"/>
+            </a:endParaRPr>
+          </a:p>
+          <a:p>
+            <a:pPr indent="0" lvl="0" marL="0" rtl="0" algn="l">
+              <a:lnSpc>
+                <a:spcPct val="115000"/>
+              </a:lnSpc>
+              <a:spcBef>
+                <a:spcPts val="0"/>
+              </a:spcBef>
+              <a:spcAft>
+                <a:spcPts val="0"/>
+              </a:spcAft>
+              <a:buNone/>
+            </a:pPr>
+            <a:r>
+              <a:rPr lang="en" sz="1000">
+                <a:highlight>
+                  <a:schemeClr val="dk2"/>
+                </a:highlight>
+                <a:latin typeface="Consolas"/>
+                <a:ea typeface="Consolas"/>
+                <a:cs typeface="Consolas"/>
+                <a:sym typeface="Consolas"/>
+              </a:rPr>
+              <a:t>}</a:t>
+            </a:r>
+            <a:endParaRPr sz="1000">
+              <a:solidFill>
+                <a:srgbClr val="CCCCCC"/>
+              </a:solidFill>
+              <a:highlight>
+                <a:schemeClr val="dk2"/>
+              </a:highlight>
+              <a:latin typeface="Consolas"/>
+              <a:ea typeface="Consolas"/>
+              <a:cs typeface="Consolas"/>
+              <a:sym typeface="Consolas"/>
+            </a:endParaRPr>
+          </a:p>
         </p:txBody>
       </p:sp>
     </p:spTree>
@@ -17644,7 +18721,7 @@
 </p:sld>
 </file>
 
-<file path=ppt/slides/slide7.xml><?xml version="1.0" encoding="utf-8"?>
+<file path=ppt/slides/slide8.xml><?xml version="1.0" encoding="utf-8"?>
 <p:sld xmlns:a="http://schemas.openxmlformats.org/drawingml/2006/main" xmlns:p="http://schemas.openxmlformats.org/presentationml/2006/main" xmlns:r="http://schemas.openxmlformats.org/officeDocument/2006/relationships">
   <p:cSld>
     <p:spTree>
@@ -17771,7 +18848,7 @@
 </p:sld>
 </file>
 
-<file path=ppt/slides/slide8.xml><?xml version="1.0" encoding="utf-8"?>
+<file path=ppt/slides/slide9.xml><?xml version="1.0" encoding="utf-8"?>
 <p:sld xmlns:a="http://schemas.openxmlformats.org/drawingml/2006/main" xmlns:p="http://schemas.openxmlformats.org/presentationml/2006/main" xmlns:r="http://schemas.openxmlformats.org/officeDocument/2006/relationships">
   <p:cSld>
     <p:spTree>
@@ -18510,906 +19587,6 @@
               </a:rPr>
               <a:t>At each tile centre: never turn back, and take the direction closest to a target tile.</a:t>
             </a:r>
-          </a:p>
-        </p:txBody>
-      </p:sp>
-    </p:spTree>
-  </p:cSld>
-  <p:clrMapOvr>
-    <a:masterClrMapping/>
-  </p:clrMapOvr>
-</p:sld>
-</file>
-
-<file path=ppt/slides/slide9.xml><?xml version="1.0" encoding="utf-8"?>
-<p:sld xmlns:a="http://schemas.openxmlformats.org/drawingml/2006/main" xmlns:p="http://schemas.openxmlformats.org/presentationml/2006/main" xmlns:r="http://schemas.openxmlformats.org/officeDocument/2006/relationships">
-  <p:cSld>
-    <p:spTree>
-      <p:nvGrpSpPr>
-        <p:cNvPr id="1" name=""/>
-        <p:cNvGrpSpPr/>
-        <p:nvPr/>
-      </p:nvGrpSpPr>
-      <p:grpSpPr/>
-      <p:sp>
-        <p:nvSpPr>
-          <p:cNvPr id="140" name="Google Shape;140;p23"/>
-          <p:cNvSpPr txBox="1"/>
-          <p:nvPr>
-            <p:ph type="title"/>
-          </p:nvPr>
-        </p:nvSpPr>
-        <p:spPr>
-          <a:xfrm>
-            <a:off x="311700" y="195615"/>
-            <a:ext cx="8520600" cy="572700"/>
-          </a:xfrm>
-          <a:prstGeom prst="rect">
-            <a:avLst/>
-          </a:prstGeom>
-        </p:spPr>
-        <p:txBody>
-          <a:bodyPr anchorCtr="0" anchor="t" bIns="91425" lIns="91425" spcFirstLastPara="1" rIns="91425" wrap="square" tIns="91425">
-            <a:normAutofit fontScale="90000"/>
-          </a:bodyPr>
-          <a:lstStyle/>
-          <a:p>
-            <a:pPr indent="0" lvl="0" marL="0" rtl="0" algn="l">
-              <a:spcBef>
-                <a:spcPts val="0"/>
-              </a:spcBef>
-              <a:spcAft>
-                <a:spcPts val="0"/>
-              </a:spcAft>
-              <a:buNone/>
-            </a:pPr>
-            <a:r>
-              <a:rPr lang="en"/>
-              <a:t>Ghosts With an Enum</a:t>
-            </a:r>
-            <a:endParaRPr/>
-          </a:p>
-        </p:txBody>
-      </p:sp>
-      <p:sp>
-        <p:nvSpPr>
-          <p:cNvPr id="293" name="Google Shape;293;p45"/>
-          <p:cNvSpPr txBox="1"/>
-          <p:nvPr>
-            <p:ph type="title"/>
-          </p:nvPr>
-        </p:nvSpPr>
-        <p:spPr>
-          <a:xfrm>
-            <a:off x="311700" y="1152475"/>
-            <a:ext cx="3700000" cy="3500000"/>
-          </a:xfrm>
-          <a:prstGeom prst="rect">
-            <a:avLst/>
-          </a:prstGeom>
-        </p:spPr>
-        <p:txBody>
-          <a:bodyPr anchorCtr="0" anchor="t" bIns="91425" lIns="91425" spcFirstLastPara="1" rIns="91425" wrap="square" tIns="91425">
-            <a:normAutofit fontScale="90000"/>
-          </a:bodyPr>
-          <a:lstStyle/>
-          <a:p>
-            <a:pPr indent="-330200" lvl="0" marL="457200" rtl="0" algn="l">
-              <a:buClr>
-                <a:srgbClr val="DEE2E6"/>
-              </a:buClr>
-              <a:spcBef>
-                <a:spcPts val="0"/>
-              </a:spcBef>
-              <a:spcAft>
-                <a:spcPts val="0"/>
-              </a:spcAft>
-              <a:buSzPts val="1600"/>
-              <a:buChar char="●"/>
-            </a:pPr>
-            <a:r>
-              <a:rPr lang="en" sz="1600">
-                <a:solidFill>
-                  <a:srgbClr val="DEE2E6"/>
-                </a:solidFill>
-              </a:rPr>
-              <a:t>GhostMode: InHouse, Scatter, Chase, Frightened, Eaten</a:t>
-            </a:r>
-            <a:endParaRPr/>
-          </a:p>
-          <a:p>
-            <a:pPr indent="-330200" lvl="0" marL="457200" rtl="0" algn="l">
-              <a:buClr>
-                <a:srgbClr val="DEE2E6"/>
-              </a:buClr>
-              <a:spcBef>
-                <a:spcPts val="0"/>
-              </a:spcBef>
-              <a:spcAft>
-                <a:spcPts val="0"/>
-              </a:spcAft>
-              <a:buSzPts val="1600"/>
-              <a:buChar char="●"/>
-            </a:pPr>
-            <a:r>
-              <a:rPr lang="en" sz="1600">
-                <a:solidFill>
-                  <a:srgbClr val="DEE2E6"/>
-                </a:solidFill>
-              </a:rPr>
-              <a:t>Every method switches over the mode</a:t>
-            </a:r>
-            <a:endParaRPr/>
-          </a:p>
-          <a:p>
-            <a:pPr indent="-317500" lvl="1" marL="914400" rtl="0" algn="l">
-              <a:buClr>
-                <a:srgbClr val="6C757D"/>
-              </a:buClr>
-              <a:spcBef>
-                <a:spcPts val="0"/>
-              </a:spcBef>
-              <a:spcAft>
-                <a:spcPts val="0"/>
-              </a:spcAft>
-              <a:buSzPts val="1400"/>
-              <a:buChar char="○"/>
-            </a:pPr>
-            <a:r>
-              <a:rPr lang="en" sz="1400">
-                <a:solidFill>
-                  <a:srgbClr val="6C757D"/>
-                </a:solidFill>
-              </a:rPr>
-              <a:t>Update, ChooseDirection, OnPowerPellet, Touch, Look, SetMode</a:t>
-            </a:r>
-            <a:endParaRPr/>
-          </a:p>
-        </p:txBody>
-      </p:sp>
-      <p:sp>
-        <p:nvSpPr>
-          <p:cNvPr id="141" name="Google Shape;141;p23"/>
-          <p:cNvSpPr txBox="1"/>
-          <p:nvPr>
-            <p:ph idx="2" type="body"/>
-          </p:nvPr>
-        </p:nvSpPr>
-        <p:spPr>
-          <a:xfrm>
-            <a:off x="4150000" y="1152475"/>
-            <a:ext cx="4750000" cy="3600000"/>
-          </a:xfrm>
-          <a:prstGeom prst="rect">
-            <a:avLst/>
-          </a:prstGeom>
-        </p:spPr>
-        <p:txBody>
-          <a:bodyPr anchorCtr="0" anchor="t" bIns="91425" lIns="91425" spcFirstLastPara="1" rIns="91425" wrap="square" tIns="91425">
-            <a:noAutofit/>
-          </a:bodyPr>
-          <a:lstStyle/>
-          <a:p>
-            <a:pPr indent="0" lvl="0" marL="0" rtl="0" algn="l">
-              <a:lnSpc>
-                <a:spcPct val="115000"/>
-              </a:lnSpc>
-              <a:spcBef>
-                <a:spcPts val="0"/>
-              </a:spcBef>
-              <a:spcAft>
-                <a:spcPts val="0"/>
-              </a:spcAft>
-              <a:buNone/>
-            </a:pPr>
-            <a:r>
-              <a:rPr lang="en" sz="1000">
-                <a:highlight>
-                  <a:schemeClr val="dk2"/>
-                </a:highlight>
-                <a:latin typeface="Consolas"/>
-                <a:ea typeface="Consolas"/>
-                <a:cs typeface="Consolas"/>
-                <a:sym typeface="Consolas"/>
-              </a:rPr>
-              <a:t>public void Update(float deltaSeconds)</a:t>
-            </a:r>
-            <a:endParaRPr sz="1000">
-              <a:solidFill>
-                <a:srgbClr val="CCCCCC"/>
-              </a:solidFill>
-              <a:highlight>
-                <a:schemeClr val="dk2"/>
-              </a:highlight>
-              <a:latin typeface="Consolas"/>
-              <a:ea typeface="Consolas"/>
-              <a:cs typeface="Consolas"/>
-              <a:sym typeface="Consolas"/>
-            </a:endParaRPr>
-          </a:p>
-          <a:p>
-            <a:pPr indent="0" lvl="0" marL="0" rtl="0" algn="l">
-              <a:lnSpc>
-                <a:spcPct val="115000"/>
-              </a:lnSpc>
-              <a:spcBef>
-                <a:spcPts val="0"/>
-              </a:spcBef>
-              <a:spcAft>
-                <a:spcPts val="0"/>
-              </a:spcAft>
-              <a:buNone/>
-            </a:pPr>
-            <a:r>
-              <a:rPr lang="en" sz="1000">
-                <a:highlight>
-                  <a:schemeClr val="dk2"/>
-                </a:highlight>
-                <a:latin typeface="Consolas"/>
-                <a:ea typeface="Consolas"/>
-                <a:cs typeface="Consolas"/>
-                <a:sym typeface="Consolas"/>
-              </a:rPr>
-              <a:t>{</a:t>
-            </a:r>
-            <a:endParaRPr sz="1000">
-              <a:solidFill>
-                <a:srgbClr val="CCCCCC"/>
-              </a:solidFill>
-              <a:highlight>
-                <a:schemeClr val="dk2"/>
-              </a:highlight>
-              <a:latin typeface="Consolas"/>
-              <a:ea typeface="Consolas"/>
-              <a:cs typeface="Consolas"/>
-              <a:sym typeface="Consolas"/>
-            </a:endParaRPr>
-          </a:p>
-          <a:p>
-            <a:pPr indent="0" lvl="0" marL="0" rtl="0" algn="l">
-              <a:lnSpc>
-                <a:spcPct val="115000"/>
-              </a:lnSpc>
-              <a:spcBef>
-                <a:spcPts val="0"/>
-              </a:spcBef>
-              <a:spcAft>
-                <a:spcPts val="0"/>
-              </a:spcAft>
-              <a:buNone/>
-            </a:pPr>
-            <a:r>
-              <a:rPr lang="en" sz="1000">
-                <a:highlight>
-                  <a:schemeClr val="dk2"/>
-                </a:highlight>
-                <a:latin typeface="Consolas"/>
-                <a:ea typeface="Consolas"/>
-                <a:cs typeface="Consolas"/>
-                <a:sym typeface="Consolas"/>
-              </a:rPr>
-              <a:t>    switch (Mode)</a:t>
-            </a:r>
-            <a:endParaRPr sz="1000">
-              <a:solidFill>
-                <a:srgbClr val="CCCCCC"/>
-              </a:solidFill>
-              <a:highlight>
-                <a:schemeClr val="dk2"/>
-              </a:highlight>
-              <a:latin typeface="Consolas"/>
-              <a:ea typeface="Consolas"/>
-              <a:cs typeface="Consolas"/>
-              <a:sym typeface="Consolas"/>
-            </a:endParaRPr>
-          </a:p>
-          <a:p>
-            <a:pPr indent="0" lvl="0" marL="0" rtl="0" algn="l">
-              <a:lnSpc>
-                <a:spcPct val="115000"/>
-              </a:lnSpc>
-              <a:spcBef>
-                <a:spcPts val="0"/>
-              </a:spcBef>
-              <a:spcAft>
-                <a:spcPts val="0"/>
-              </a:spcAft>
-              <a:buNone/>
-            </a:pPr>
-            <a:r>
-              <a:rPr lang="en" sz="1000">
-                <a:highlight>
-                  <a:schemeClr val="dk2"/>
-                </a:highlight>
-                <a:latin typeface="Consolas"/>
-                <a:ea typeface="Consolas"/>
-                <a:cs typeface="Consolas"/>
-                <a:sym typeface="Consolas"/>
-              </a:rPr>
-              <a:t>    {</a:t>
-            </a:r>
-            <a:endParaRPr sz="1000">
-              <a:solidFill>
-                <a:srgbClr val="CCCCCC"/>
-              </a:solidFill>
-              <a:highlight>
-                <a:schemeClr val="dk2"/>
-              </a:highlight>
-              <a:latin typeface="Consolas"/>
-              <a:ea typeface="Consolas"/>
-              <a:cs typeface="Consolas"/>
-              <a:sym typeface="Consolas"/>
-            </a:endParaRPr>
-          </a:p>
-          <a:p>
-            <a:pPr indent="0" lvl="0" marL="0" rtl="0" algn="l">
-              <a:lnSpc>
-                <a:spcPct val="115000"/>
-              </a:lnSpc>
-              <a:spcBef>
-                <a:spcPts val="0"/>
-              </a:spcBef>
-              <a:spcAft>
-                <a:spcPts val="0"/>
-              </a:spcAft>
-              <a:buNone/>
-            </a:pPr>
-            <a:r>
-              <a:rPr lang="en" sz="1000">
-                <a:highlight>
-                  <a:schemeClr val="dk2"/>
-                </a:highlight>
-                <a:latin typeface="Consolas"/>
-                <a:ea typeface="Consolas"/>
-                <a:cs typeface="Consolas"/>
-                <a:sym typeface="Consolas"/>
-              </a:rPr>
-              <a:t>        case GhostMode.InHouse:</a:t>
-            </a:r>
-            <a:endParaRPr sz="1000">
-              <a:solidFill>
-                <a:srgbClr val="CCCCCC"/>
-              </a:solidFill>
-              <a:highlight>
-                <a:schemeClr val="dk2"/>
-              </a:highlight>
-              <a:latin typeface="Consolas"/>
-              <a:ea typeface="Consolas"/>
-              <a:cs typeface="Consolas"/>
-              <a:sym typeface="Consolas"/>
-            </a:endParaRPr>
-          </a:p>
-          <a:p>
-            <a:pPr indent="0" lvl="0" marL="0" rtl="0" algn="l">
-              <a:lnSpc>
-                <a:spcPct val="115000"/>
-              </a:lnSpc>
-              <a:spcBef>
-                <a:spcPts val="0"/>
-              </a:spcBef>
-              <a:spcAft>
-                <a:spcPts val="0"/>
-              </a:spcAft>
-              <a:buNone/>
-            </a:pPr>
-            <a:r>
-              <a:rPr lang="en" sz="1000">
-                <a:highlight>
-                  <a:schemeClr val="dk2"/>
-                </a:highlight>
-                <a:latin typeface="Consolas"/>
-                <a:ea typeface="Consolas"/>
-                <a:cs typeface="Consolas"/>
-                <a:sym typeface="Consolas"/>
-              </a:rPr>
-              <a:t>            _houseTimer += deltaSeconds;</a:t>
-            </a:r>
-            <a:endParaRPr sz="1000">
-              <a:solidFill>
-                <a:srgbClr val="CCCCCC"/>
-              </a:solidFill>
-              <a:highlight>
-                <a:schemeClr val="dk2"/>
-              </a:highlight>
-              <a:latin typeface="Consolas"/>
-              <a:ea typeface="Consolas"/>
-              <a:cs typeface="Consolas"/>
-              <a:sym typeface="Consolas"/>
-            </a:endParaRPr>
-          </a:p>
-          <a:p>
-            <a:pPr indent="0" lvl="0" marL="0" rtl="0" algn="l">
-              <a:lnSpc>
-                <a:spcPct val="115000"/>
-              </a:lnSpc>
-              <a:spcBef>
-                <a:spcPts val="0"/>
-              </a:spcBef>
-              <a:spcAft>
-                <a:spcPts val="0"/>
-              </a:spcAft>
-              <a:buNone/>
-            </a:pPr>
-            <a:r>
-              <a:rPr lang="en" sz="1000">
-                <a:highlight>
-                  <a:schemeClr val="dk2"/>
-                </a:highlight>
-                <a:latin typeface="Consolas"/>
-                <a:ea typeface="Consolas"/>
-                <a:cs typeface="Consolas"/>
-                <a:sym typeface="Consolas"/>
-              </a:rPr>
-              <a:t>            if (_houseTimer &lt; _releaseDelay)</a:t>
-            </a:r>
-            <a:endParaRPr sz="1000">
-              <a:solidFill>
-                <a:srgbClr val="CCCCCC"/>
-              </a:solidFill>
-              <a:highlight>
-                <a:schemeClr val="dk2"/>
-              </a:highlight>
-              <a:latin typeface="Consolas"/>
-              <a:ea typeface="Consolas"/>
-              <a:cs typeface="Consolas"/>
-              <a:sym typeface="Consolas"/>
-            </a:endParaRPr>
-          </a:p>
-          <a:p>
-            <a:pPr indent="0" lvl="0" marL="0" rtl="0" algn="l">
-              <a:lnSpc>
-                <a:spcPct val="115000"/>
-              </a:lnSpc>
-              <a:spcBef>
-                <a:spcPts val="0"/>
-              </a:spcBef>
-              <a:spcAft>
-                <a:spcPts val="0"/>
-              </a:spcAft>
-              <a:buNone/>
-            </a:pPr>
-            <a:r>
-              <a:rPr lang="en" sz="1000">
-                <a:highlight>
-                  <a:schemeClr val="dk2"/>
-                </a:highlight>
-                <a:latin typeface="Consolas"/>
-                <a:ea typeface="Consolas"/>
-                <a:cs typeface="Consolas"/>
-                <a:sym typeface="Consolas"/>
-              </a:rPr>
-              <a:t>                return;</a:t>
-            </a:r>
-            <a:endParaRPr sz="1000">
-              <a:solidFill>
-                <a:srgbClr val="CCCCCC"/>
-              </a:solidFill>
-              <a:highlight>
-                <a:schemeClr val="dk2"/>
-              </a:highlight>
-              <a:latin typeface="Consolas"/>
-              <a:ea typeface="Consolas"/>
-              <a:cs typeface="Consolas"/>
-              <a:sym typeface="Consolas"/>
-            </a:endParaRPr>
-          </a:p>
-          <a:p>
-            <a:pPr indent="0" lvl="0" marL="0" rtl="0" algn="l">
-              <a:lnSpc>
-                <a:spcPct val="115000"/>
-              </a:lnSpc>
-              <a:spcBef>
-                <a:spcPts val="0"/>
-              </a:spcBef>
-              <a:spcAft>
-                <a:spcPts val="0"/>
-              </a:spcAft>
-              <a:buNone/>
-            </a:pPr>
-            <a:r>
-              <a:rPr lang="en" sz="1000">
-                <a:highlight>
-                  <a:schemeClr val="dk2"/>
-                </a:highlight>
-                <a:latin typeface="Consolas"/>
-                <a:ea typeface="Consolas"/>
-                <a:cs typeface="Consolas"/>
-                <a:sym typeface="Consolas"/>
-              </a:rPr>
-              <a:t>            Move(HouseSpeed * deltaSeconds);</a:t>
-            </a:r>
-            <a:endParaRPr sz="1000">
-              <a:solidFill>
-                <a:srgbClr val="CCCCCC"/>
-              </a:solidFill>
-              <a:highlight>
-                <a:schemeClr val="dk2"/>
-              </a:highlight>
-              <a:latin typeface="Consolas"/>
-              <a:ea typeface="Consolas"/>
-              <a:cs typeface="Consolas"/>
-              <a:sym typeface="Consolas"/>
-            </a:endParaRPr>
-          </a:p>
-          <a:p>
-            <a:pPr indent="0" lvl="0" marL="0" rtl="0" algn="l">
-              <a:lnSpc>
-                <a:spcPct val="115000"/>
-              </a:lnSpc>
-              <a:spcBef>
-                <a:spcPts val="0"/>
-              </a:spcBef>
-              <a:spcAft>
-                <a:spcPts val="0"/>
-              </a:spcAft>
-              <a:buNone/>
-            </a:pPr>
-            <a:r>
-              <a:rPr lang="en" sz="1000">
-                <a:highlight>
-                  <a:schemeClr val="dk2"/>
-                </a:highlight>
-                <a:latin typeface="Consolas"/>
-                <a:ea typeface="Consolas"/>
-                <a:cs typeface="Consolas"/>
-                <a:sym typeface="Consolas"/>
-              </a:rPr>
-              <a:t>            if (!Maze.IsInHouse(Tile))</a:t>
-            </a:r>
-            <a:endParaRPr sz="1000">
-              <a:solidFill>
-                <a:srgbClr val="CCCCCC"/>
-              </a:solidFill>
-              <a:highlight>
-                <a:schemeClr val="dk2"/>
-              </a:highlight>
-              <a:latin typeface="Consolas"/>
-              <a:ea typeface="Consolas"/>
-              <a:cs typeface="Consolas"/>
-              <a:sym typeface="Consolas"/>
-            </a:endParaRPr>
-          </a:p>
-          <a:p>
-            <a:pPr indent="0" lvl="0" marL="0" rtl="0" algn="l">
-              <a:lnSpc>
-                <a:spcPct val="115000"/>
-              </a:lnSpc>
-              <a:spcBef>
-                <a:spcPts val="0"/>
-              </a:spcBef>
-              <a:spcAft>
-                <a:spcPts val="0"/>
-              </a:spcAft>
-              <a:buNone/>
-            </a:pPr>
-            <a:r>
-              <a:rPr lang="en" sz="1000">
-                <a:highlight>
-                  <a:schemeClr val="dk2"/>
-                </a:highlight>
-                <a:latin typeface="Consolas"/>
-                <a:ea typeface="Consolas"/>
-                <a:cs typeface="Consolas"/>
-                <a:sym typeface="Consolas"/>
-              </a:rPr>
-              <a:t>                SetMode(ScheduledMode());</a:t>
-            </a:r>
-            <a:endParaRPr sz="1000">
-              <a:solidFill>
-                <a:srgbClr val="CCCCCC"/>
-              </a:solidFill>
-              <a:highlight>
-                <a:schemeClr val="dk2"/>
-              </a:highlight>
-              <a:latin typeface="Consolas"/>
-              <a:ea typeface="Consolas"/>
-              <a:cs typeface="Consolas"/>
-              <a:sym typeface="Consolas"/>
-            </a:endParaRPr>
-          </a:p>
-          <a:p>
-            <a:pPr indent="0" lvl="0" marL="0" rtl="0" algn="l">
-              <a:lnSpc>
-                <a:spcPct val="115000"/>
-              </a:lnSpc>
-              <a:spcBef>
-                <a:spcPts val="0"/>
-              </a:spcBef>
-              <a:spcAft>
-                <a:spcPts val="0"/>
-              </a:spcAft>
-              <a:buNone/>
-            </a:pPr>
-            <a:r>
-              <a:rPr lang="en" sz="1000">
-                <a:highlight>
-                  <a:schemeClr val="dk2"/>
-                </a:highlight>
-                <a:latin typeface="Consolas"/>
-                <a:ea typeface="Consolas"/>
-                <a:cs typeface="Consolas"/>
-                <a:sym typeface="Consolas"/>
-              </a:rPr>
-              <a:t>            break;</a:t>
-            </a:r>
-            <a:endParaRPr sz="1000">
-              <a:solidFill>
-                <a:srgbClr val="CCCCCC"/>
-              </a:solidFill>
-              <a:highlight>
-                <a:schemeClr val="dk2"/>
-              </a:highlight>
-              <a:latin typeface="Consolas"/>
-              <a:ea typeface="Consolas"/>
-              <a:cs typeface="Consolas"/>
-              <a:sym typeface="Consolas"/>
-            </a:endParaRPr>
-          </a:p>
-          <a:p>
-            <a:pPr indent="0" lvl="0" marL="0" rtl="0" algn="l">
-              <a:lnSpc>
-                <a:spcPct val="115000"/>
-              </a:lnSpc>
-              <a:spcBef>
-                <a:spcPts val="0"/>
-              </a:spcBef>
-              <a:spcAft>
-                <a:spcPts val="0"/>
-              </a:spcAft>
-              <a:buNone/>
-            </a:pPr>
-            <a:r>
-              <a:rPr lang="en" sz="1000">
-                <a:highlight>
-                  <a:schemeClr val="dk2"/>
-                </a:highlight>
-                <a:latin typeface="Consolas"/>
-                <a:ea typeface="Consolas"/>
-                <a:cs typeface="Consolas"/>
-                <a:sym typeface="Consolas"/>
-              </a:rPr>
-              <a:t>        case GhostMode.Scatter:</a:t>
-            </a:r>
-            <a:endParaRPr sz="1000">
-              <a:solidFill>
-                <a:srgbClr val="CCCCCC"/>
-              </a:solidFill>
-              <a:highlight>
-                <a:schemeClr val="dk2"/>
-              </a:highlight>
-              <a:latin typeface="Consolas"/>
-              <a:ea typeface="Consolas"/>
-              <a:cs typeface="Consolas"/>
-              <a:sym typeface="Consolas"/>
-            </a:endParaRPr>
-          </a:p>
-          <a:p>
-            <a:pPr indent="0" lvl="0" marL="0" rtl="0" algn="l">
-              <a:lnSpc>
-                <a:spcPct val="115000"/>
-              </a:lnSpc>
-              <a:spcBef>
-                <a:spcPts val="0"/>
-              </a:spcBef>
-              <a:spcAft>
-                <a:spcPts val="0"/>
-              </a:spcAft>
-              <a:buNone/>
-            </a:pPr>
-            <a:r>
-              <a:rPr lang="en" sz="1000">
-                <a:highlight>
-                  <a:schemeClr val="dk2"/>
-                </a:highlight>
-                <a:latin typeface="Consolas"/>
-                <a:ea typeface="Consolas"/>
-                <a:cs typeface="Consolas"/>
-                <a:sym typeface="Consolas"/>
-              </a:rPr>
-              <a:t>        case GhostMode.Chase:</a:t>
-            </a:r>
-            <a:endParaRPr sz="1000">
-              <a:solidFill>
-                <a:srgbClr val="CCCCCC"/>
-              </a:solidFill>
-              <a:highlight>
-                <a:schemeClr val="dk2"/>
-              </a:highlight>
-              <a:latin typeface="Consolas"/>
-              <a:ea typeface="Consolas"/>
-              <a:cs typeface="Consolas"/>
-              <a:sym typeface="Consolas"/>
-            </a:endParaRPr>
-          </a:p>
-          <a:p>
-            <a:pPr indent="0" lvl="0" marL="0" rtl="0" algn="l">
-              <a:lnSpc>
-                <a:spcPct val="115000"/>
-              </a:lnSpc>
-              <a:spcBef>
-                <a:spcPts val="0"/>
-              </a:spcBef>
-              <a:spcAft>
-                <a:spcPts val="0"/>
-              </a:spcAft>
-              <a:buNone/>
-            </a:pPr>
-            <a:r>
-              <a:rPr lang="en" sz="1000">
-                <a:highlight>
-                  <a:schemeClr val="dk2"/>
-                </a:highlight>
-                <a:latin typeface="Consolas"/>
-                <a:ea typeface="Consolas"/>
-                <a:cs typeface="Consolas"/>
-                <a:sym typeface="Consolas"/>
-              </a:rPr>
-              <a:t>            Move(Speed * deltaSeconds);</a:t>
-            </a:r>
-            <a:endParaRPr sz="1000">
-              <a:solidFill>
-                <a:srgbClr val="CCCCCC"/>
-              </a:solidFill>
-              <a:highlight>
-                <a:schemeClr val="dk2"/>
-              </a:highlight>
-              <a:latin typeface="Consolas"/>
-              <a:ea typeface="Consolas"/>
-              <a:cs typeface="Consolas"/>
-              <a:sym typeface="Consolas"/>
-            </a:endParaRPr>
-          </a:p>
-          <a:p>
-            <a:pPr indent="0" lvl="0" marL="0" rtl="0" algn="l">
-              <a:lnSpc>
-                <a:spcPct val="115000"/>
-              </a:lnSpc>
-              <a:spcBef>
-                <a:spcPts val="0"/>
-              </a:spcBef>
-              <a:spcAft>
-                <a:spcPts val="0"/>
-              </a:spcAft>
-              <a:buNone/>
-            </a:pPr>
-            <a:r>
-              <a:rPr lang="en" sz="1000">
-                <a:highlight>
-                  <a:schemeClr val="dk2"/>
-                </a:highlight>
-                <a:latin typeface="Consolas"/>
-                <a:ea typeface="Consolas"/>
-                <a:cs typeface="Consolas"/>
-                <a:sym typeface="Consolas"/>
-              </a:rPr>
-              <a:t>            break;</a:t>
-            </a:r>
-            <a:endParaRPr sz="1000">
-              <a:solidFill>
-                <a:srgbClr val="CCCCCC"/>
-              </a:solidFill>
-              <a:highlight>
-                <a:schemeClr val="dk2"/>
-              </a:highlight>
-              <a:latin typeface="Consolas"/>
-              <a:ea typeface="Consolas"/>
-              <a:cs typeface="Consolas"/>
-              <a:sym typeface="Consolas"/>
-            </a:endParaRPr>
-          </a:p>
-          <a:p>
-            <a:pPr indent="0" lvl="0" marL="0" rtl="0" algn="l">
-              <a:lnSpc>
-                <a:spcPct val="115000"/>
-              </a:lnSpc>
-              <a:spcBef>
-                <a:spcPts val="0"/>
-              </a:spcBef>
-              <a:spcAft>
-                <a:spcPts val="0"/>
-              </a:spcAft>
-              <a:buNone/>
-            </a:pPr>
-            <a:r>
-              <a:rPr lang="en" sz="1000">
-                <a:highlight>
-                  <a:schemeClr val="dk2"/>
-                </a:highlight>
-                <a:latin typeface="Consolas"/>
-                <a:ea typeface="Consolas"/>
-                <a:cs typeface="Consolas"/>
-                <a:sym typeface="Consolas"/>
-              </a:rPr>
-              <a:t>        // Frightened, Eaten…</a:t>
-            </a:r>
-            <a:endParaRPr sz="1000">
-              <a:solidFill>
-                <a:srgbClr val="CCCCCC"/>
-              </a:solidFill>
-              <a:highlight>
-                <a:schemeClr val="dk2"/>
-              </a:highlight>
-              <a:latin typeface="Consolas"/>
-              <a:ea typeface="Consolas"/>
-              <a:cs typeface="Consolas"/>
-              <a:sym typeface="Consolas"/>
-            </a:endParaRPr>
-          </a:p>
-          <a:p>
-            <a:pPr indent="0" lvl="0" marL="0" rtl="0" algn="l">
-              <a:lnSpc>
-                <a:spcPct val="115000"/>
-              </a:lnSpc>
-              <a:spcBef>
-                <a:spcPts val="0"/>
-              </a:spcBef>
-              <a:spcAft>
-                <a:spcPts val="0"/>
-              </a:spcAft>
-              <a:buNone/>
-            </a:pPr>
-            <a:r>
-              <a:rPr lang="en" sz="1000">
-                <a:highlight>
-                  <a:schemeClr val="dk2"/>
-                </a:highlight>
-                <a:latin typeface="Consolas"/>
-                <a:ea typeface="Consolas"/>
-                <a:cs typeface="Consolas"/>
-                <a:sym typeface="Consolas"/>
-              </a:rPr>
-              <a:t>    }</a:t>
-            </a:r>
-            <a:endParaRPr sz="1000">
-              <a:solidFill>
-                <a:srgbClr val="CCCCCC"/>
-              </a:solidFill>
-              <a:highlight>
-                <a:schemeClr val="dk2"/>
-              </a:highlight>
-              <a:latin typeface="Consolas"/>
-              <a:ea typeface="Consolas"/>
-              <a:cs typeface="Consolas"/>
-              <a:sym typeface="Consolas"/>
-            </a:endParaRPr>
-          </a:p>
-          <a:p>
-            <a:pPr indent="0" lvl="0" marL="0" rtl="0" algn="l">
-              <a:lnSpc>
-                <a:spcPct val="115000"/>
-              </a:lnSpc>
-              <a:spcBef>
-                <a:spcPts val="0"/>
-              </a:spcBef>
-              <a:spcAft>
-                <a:spcPts val="0"/>
-              </a:spcAft>
-              <a:buNone/>
-            </a:pPr>
-            <a:r>
-              <a:rPr lang="en" sz="1000">
-                <a:highlight>
-                  <a:schemeClr val="dk2"/>
-                </a:highlight>
-                <a:latin typeface="Consolas"/>
-                <a:ea typeface="Consolas"/>
-                <a:cs typeface="Consolas"/>
-                <a:sym typeface="Consolas"/>
-              </a:rPr>
-              <a:t>}</a:t>
-            </a:r>
-            <a:endParaRPr sz="1000">
-              <a:solidFill>
-                <a:srgbClr val="CCCCCC"/>
-              </a:solidFill>
-              <a:highlight>
-                <a:schemeClr val="dk2"/>
-              </a:highlight>
-              <a:latin typeface="Consolas"/>
-              <a:ea typeface="Consolas"/>
-              <a:cs typeface="Consolas"/>
-              <a:sym typeface="Consolas"/>
-            </a:endParaRPr>
           </a:p>
         </p:txBody>
       </p:sp>

--- a/slides/05 Pac-Man.pptx
+++ b/slides/05 Pac-Man.pptx
@@ -16,17 +16,21 @@
     <p:sldId id="297" r:id="rId56"/>
     <p:sldId id="298" r:id="rId57"/>
     <p:sldId id="299" r:id="rId58"/>
+    <p:sldId id="319" r:id="rId36"/>
     <p:sldId id="300" r:id="rId59"/>
     <p:sldId id="301" r:id="rId60"/>
     <p:sldId id="302" r:id="rId61"/>
     <p:sldId id="303" r:id="rId62"/>
+    <p:sldId id="318" r:id="rId37"/>
     <p:sldId id="304" r:id="rId63"/>
     <p:sldId id="305" r:id="rId64"/>
     <p:sldId id="306" r:id="rId65"/>
     <p:sldId id="307" r:id="rId66"/>
+    <p:sldId id="317" r:id="rId38"/>
     <p:sldId id="308" r:id="rId67"/>
     <p:sldId id="309" r:id="rId68"/>
     <p:sldId id="310" r:id="rId69"/>
+    <p:sldId id="316" r:id="rId39"/>
     <p:sldId id="311" r:id="rId70"/>
     <p:sldId id="312" r:id="rId71"/>
     <p:sldId id="313" r:id="rId72"/>
@@ -2183,6 +2187,64 @@
 </p:notes>
 </file>
 
+<file path=ppt/notesSlides/notesSlide29.xml><?xml version="1.0" encoding="utf-8"?>
+<p:notes xmlns:a="http://schemas.openxmlformats.org/drawingml/2006/main" xmlns:p="http://schemas.openxmlformats.org/presentationml/2006/main" xmlns:r="http://schemas.openxmlformats.org/officeDocument/2006/relationships">
+  <p:cSld>
+    <p:spTree>
+      <p:nvGrpSpPr>
+        <p:cNvPr id="1" name=""/>
+        <p:cNvGrpSpPr/>
+        <p:nvPr/>
+      </p:nvGrpSpPr>
+      <p:grpSpPr>
+        <a:xfrm>
+          <a:off x="0" y="0"/>
+          <a:ext cx="0" cy="0"/>
+          <a:chOff x="0" y="0"/>
+          <a:chExt cx="0" cy="0"/>
+        </a:xfrm>
+      </p:grpSpPr>
+      <p:sp>
+        <p:nvSpPr>
+          <p:cNvPr id="2" name="Slide Image Placeholder 1"/>
+          <p:cNvSpPr>
+            <a:spLocks noGrp="1"/>
+          </p:cNvSpPr>
+          <p:nvPr>
+            <p:ph type="sldImg" idx="2"/>
+          </p:nvPr>
+        </p:nvSpPr>
+        <p:spPr/>
+      </p:sp>
+      <p:sp>
+        <p:nvSpPr>
+          <p:cNvPr id="3" name="Notes Placeholder 2"/>
+          <p:cNvSpPr>
+            <a:spLocks noGrp="1"/>
+          </p:cNvSpPr>
+          <p:nvPr>
+            <p:ph type="body" idx="1"/>
+          </p:nvPr>
+        </p:nvSpPr>
+        <p:spPr/>
+        <p:txBody>
+          <a:bodyPr/>
+          <a:lstStyle/>
+          <a:p>
+            <a:r>
+              <a:t>Pairs, about 5 minutes. One argument in World. Two ghosts that chase straight at Pac-Man end up in a line behind him, which is easy to escape.</a:t>
+            </a:r>
+          </a:p>
+        </p:txBody>
+      </p:sp>
+    </p:spTree>
+  </p:cSld>
+  <p:clrMapOvr>
+    <a:masterClrMapping/>
+  </p:clrMapOvr>
+</p:notes>
+</file>
+
 <file path=ppt/notesSlides/notesSlide3.xml><?xml version="1.0" encoding="utf-8"?>
 <p:notes xmlns:a="http://schemas.openxmlformats.org/drawingml/2006/main" xmlns:r="http://schemas.openxmlformats.org/officeDocument/2006/relationships" xmlns:mc="http://schemas.openxmlformats.org/markup-compatibility/2006" xmlns:mv="urn:schemas-microsoft-com:mac:vml" xmlns:p="http://schemas.openxmlformats.org/presentationml/2006/main" xmlns:c="http://schemas.openxmlformats.org/drawingml/2006/chart" xmlns:dgm="http://schemas.openxmlformats.org/drawingml/2006/diagram" xmlns:o="urn:schemas-microsoft-com:office:office" xmlns:v="urn:schemas-microsoft-com:vml" xmlns:pvml="urn:schemas-microsoft-com:office:powerpoint" xmlns:com="http://schemas.openxmlformats.org/drawingml/2006/compatibility" xmlns:p14="http://schemas.microsoft.com/office/powerpoint/2010/main" xmlns:p15="http://schemas.microsoft.com/office/powerpoint/2012/main" xmlns:ahyp="http://schemas.microsoft.com/office/drawing/2018/hyperlinkcolor" showMasterPhAnim="0" showMasterSp="0">
   <p:cSld>
@@ -2260,6 +2322,185 @@
           <a:p>
             <a:r>
               <a:t>The main topic: the State pattern, through the ghosts’ modes. Then Strategy for their targeting, and how the two differ.</a:t>
+            </a:r>
+          </a:p>
+        </p:txBody>
+      </p:sp>
+    </p:spTree>
+  </p:cSld>
+  <p:clrMapOvr>
+    <a:masterClrMapping/>
+  </p:clrMapOvr>
+</p:notes>
+</file>
+
+<file path=ppt/notesSlides/notesSlide30.xml><?xml version="1.0" encoding="utf-8"?>
+<p:notes xmlns:a="http://schemas.openxmlformats.org/drawingml/2006/main" xmlns:p="http://schemas.openxmlformats.org/presentationml/2006/main" xmlns:r="http://schemas.openxmlformats.org/officeDocument/2006/relationships">
+  <p:cSld>
+    <p:spTree>
+      <p:nvGrpSpPr>
+        <p:cNvPr id="1" name=""/>
+        <p:cNvGrpSpPr/>
+        <p:nvPr/>
+      </p:nvGrpSpPr>
+      <p:grpSpPr>
+        <a:xfrm>
+          <a:off x="0" y="0"/>
+          <a:ext cx="0" cy="0"/>
+          <a:chOff x="0" y="0"/>
+          <a:chExt cx="0" cy="0"/>
+        </a:xfrm>
+      </p:grpSpPr>
+      <p:sp>
+        <p:nvSpPr>
+          <p:cNvPr id="2" name="Slide Image Placeholder 1"/>
+          <p:cNvSpPr>
+            <a:spLocks noGrp="1"/>
+          </p:cNvSpPr>
+          <p:nvPr>
+            <p:ph type="sldImg" idx="2"/>
+          </p:nvPr>
+        </p:nvSpPr>
+        <p:spPr/>
+      </p:sp>
+      <p:sp>
+        <p:nvSpPr>
+          <p:cNvPr id="3" name="Notes Placeholder 2"/>
+          <p:cNvSpPr>
+            <a:spLocks noGrp="1"/>
+          </p:cNvSpPr>
+          <p:nvPr>
+            <p:ph type="body" idx="1"/>
+          </p:nvPr>
+        </p:nvSpPr>
+        <p:spPr/>
+        <p:txBody>
+          <a:bodyPr/>
+          <a:lstStyle/>
+          <a:p>
+            <a:r>
+              <a:t>Pairs, about 5 minutes. Answer: one constant in FrightenedState. A FrozenState is one new class, and EatenState (or whatever state comes before it) changes to it. Compare with the seven switches.</a:t>
+            </a:r>
+          </a:p>
+        </p:txBody>
+      </p:sp>
+    </p:spTree>
+  </p:cSld>
+  <p:clrMapOvr>
+    <a:masterClrMapping/>
+  </p:clrMapOvr>
+</p:notes>
+</file>
+
+<file path=ppt/notesSlides/notesSlide31.xml><?xml version="1.0" encoding="utf-8"?>
+<p:notes xmlns:a="http://schemas.openxmlformats.org/drawingml/2006/main" xmlns:p="http://schemas.openxmlformats.org/presentationml/2006/main" xmlns:r="http://schemas.openxmlformats.org/officeDocument/2006/relationships">
+  <p:cSld>
+    <p:spTree>
+      <p:nvGrpSpPr>
+        <p:cNvPr id="1" name=""/>
+        <p:cNvGrpSpPr/>
+        <p:nvPr/>
+      </p:nvGrpSpPr>
+      <p:grpSpPr>
+        <a:xfrm>
+          <a:off x="0" y="0"/>
+          <a:ext cx="0" cy="0"/>
+          <a:chOff x="0" y="0"/>
+          <a:chExt cx="0" cy="0"/>
+        </a:xfrm>
+      </p:grpSpPr>
+      <p:sp>
+        <p:nvSpPr>
+          <p:cNvPr id="2" name="Slide Image Placeholder 1"/>
+          <p:cNvSpPr>
+            <a:spLocks noGrp="1"/>
+          </p:cNvSpPr>
+          <p:nvPr>
+            <p:ph type="sldImg" idx="2"/>
+          </p:nvPr>
+        </p:nvSpPr>
+        <p:spPr/>
+      </p:sp>
+      <p:sp>
+        <p:nvSpPr>
+          <p:cNvPr id="3" name="Notes Placeholder 2"/>
+          <p:cNvSpPr>
+            <a:spLocks noGrp="1"/>
+          </p:cNvSpPr>
+          <p:nvPr>
+            <p:ph type="body" idx="1"/>
+          </p:nvPr>
+        </p:nvSpPr>
+        <p:spPr/>
+        <p:txBody>
+          <a:bodyPr/>
+          <a:lstStyle/>
+          <a:p>
+            <a:r>
+              <a:t>Pairs, about 5 minutes. Answer: seven (six switch statements and the Look switch expression), and nothing warns you about the ones you miss. Keep the count on the board for the next slides.</a:t>
+            </a:r>
+          </a:p>
+        </p:txBody>
+      </p:sp>
+    </p:spTree>
+  </p:cSld>
+  <p:clrMapOvr>
+    <a:masterClrMapping/>
+  </p:clrMapOvr>
+</p:notes>
+</file>
+
+<file path=ppt/notesSlides/notesSlide32.xml><?xml version="1.0" encoding="utf-8"?>
+<p:notes xmlns:a="http://schemas.openxmlformats.org/drawingml/2006/main" xmlns:p="http://schemas.openxmlformats.org/presentationml/2006/main" xmlns:r="http://schemas.openxmlformats.org/officeDocument/2006/relationships">
+  <p:cSld>
+    <p:spTree>
+      <p:nvGrpSpPr>
+        <p:cNvPr id="1" name=""/>
+        <p:cNvGrpSpPr/>
+        <p:nvPr/>
+      </p:nvGrpSpPr>
+      <p:grpSpPr>
+        <a:xfrm>
+          <a:off x="0" y="0"/>
+          <a:ext cx="0" cy="0"/>
+          <a:chOff x="0" y="0"/>
+          <a:chExt cx="0" cy="0"/>
+        </a:xfrm>
+      </p:grpSpPr>
+      <p:sp>
+        <p:nvSpPr>
+          <p:cNvPr id="2" name="Slide Image Placeholder 1"/>
+          <p:cNvSpPr>
+            <a:spLocks noGrp="1"/>
+          </p:cNvSpPr>
+          <p:nvPr>
+            <p:ph type="sldImg" idx="2"/>
+          </p:nvPr>
+        </p:nvSpPr>
+        <p:spPr/>
+      </p:sp>
+      <p:sp>
+        <p:nvSpPr>
+          <p:cNvPr id="3" name="Notes Placeholder 2"/>
+          <p:cNvSpPr>
+            <a:spLocks noGrp="1"/>
+          </p:cNvSpPr>
+          <p:nvPr>
+            <p:ph type="body" idx="1"/>
+          </p:nvPr>
+        </p:nvSpPr>
+        <p:spPr/>
+        <p:txBody>
+          <a:bodyPr/>
+          <a:lstStyle/>
+          <a:p>
+            <a:r>
+              <a:t>Pairs, about 5 minutes. Pacman0 reads the maze at start-up, so a restart shows the change.</a:t>
+            </a:r>
+          </a:p>
+          <a:p>
+            <a:r>
+              <a:t>The early press shows the buffered turn: he turns when he reaches the corner.</a:t>
             </a:r>
           </a:p>
         </p:txBody>
@@ -6380,6 +6621,756 @@
       <p:grpSpPr/>
       <p:sp>
         <p:nvSpPr>
+          <p:cNvPr id="293" name="Google Shape;293;p45"/>
+          <p:cNvSpPr txBox="1"/>
+          <p:nvPr>
+            <p:ph type="title"/>
+          </p:nvPr>
+        </p:nvSpPr>
+        <p:spPr>
+          <a:xfrm>
+            <a:off x="311700" y="195615"/>
+            <a:ext cx="8520600" cy="572700"/>
+          </a:xfrm>
+          <a:prstGeom prst="rect">
+            <a:avLst/>
+          </a:prstGeom>
+        </p:spPr>
+        <p:txBody>
+          <a:bodyPr anchorCtr="0" anchor="t" bIns="91425" lIns="91425" spcFirstLastPara="1" rIns="91425" wrap="square" tIns="91425">
+            <a:normAutofit fontScale="90000"/>
+          </a:bodyPr>
+          <a:lstStyle/>
+          <a:p>
+            <a:pPr indent="0" lvl="0" marL="0" rtl="0" algn="l">
+              <a:spcBef>
+                <a:spcPts val="0"/>
+              </a:spcBef>
+              <a:spcAft>
+                <a:spcPts val="0"/>
+              </a:spcAft>
+              <a:buNone/>
+            </a:pPr>
+            <a:r>
+              <a:rPr lang="en">
+                <a:solidFill>
+                  <a:schemeClr val="accent5"/>
+                </a:solidFill>
+              </a:rPr>
+              <a:t>Five Ghost Modes</a:t>
+            </a:r>
+            <a:endParaRPr>
+              <a:solidFill>
+                <a:schemeClr val="accent5"/>
+              </a:solidFill>
+            </a:endParaRPr>
+          </a:p>
+        </p:txBody>
+      </p:sp>
+      <p:sp>
+        <p:nvSpPr>
+          <p:cNvPr id="294" name="Google Shape;294;p45"/>
+          <p:cNvSpPr txBox="1"/>
+          <p:nvPr>
+            <p:ph idx="1" type="body"/>
+          </p:nvPr>
+        </p:nvSpPr>
+        <p:spPr>
+          <a:xfrm>
+            <a:off x="311700" y="885950"/>
+            <a:ext cx="8520600" cy="521208"/>
+          </a:xfrm>
+          <a:prstGeom prst="rect">
+            <a:avLst/>
+          </a:prstGeom>
+        </p:spPr>
+        <p:txBody>
+          <a:bodyPr anchorCtr="0" anchor="t" bIns="91425" lIns="91425" spcFirstLastPara="1" rIns="91425" wrap="square" tIns="91425">
+            <a:normAutofit/>
+          </a:bodyPr>
+          <a:lstStyle/>
+          <a:p>
+            <a:pPr indent="-330200" lvl="0" marL="457200" rtl="0" algn="l">
+              <a:spcBef>
+                <a:spcPts val="0"/>
+              </a:spcBef>
+              <a:spcAft>
+                <a:spcPts val="0"/>
+              </a:spcAft>
+              <a:buSzPts val="1600"/>
+              <a:buChar char="●"/>
+            </a:pPr>
+            <a:r>
+              <a:rPr lang="en"/>
+              <a:t>Every ghost is always in one of five modes. The mode decides where it heads.</a:t>
+            </a:r>
+            <a:endParaRPr/>
+          </a:p>
+        </p:txBody>
+      </p:sp>
+      <p:sp>
+        <p:nvSpPr>
+          <p:cNvPr id="295" name="Rounded Rectangle 294"/>
+          <p:cNvSpPr/>
+          <p:nvPr/>
+        </p:nvSpPr>
+        <p:spPr>
+          <a:xfrm>
+            <a:off x="365760" y="1828800"/>
+            <a:ext cx="1463040" cy="640080"/>
+          </a:xfrm>
+          <a:prstGeom prst="roundRect">
+            <a:avLst>
+              <a:gd name="adj" fmla="val 12000"/>
+            </a:avLst>
+          </a:prstGeom>
+          <a:solidFill>
+            <a:srgbClr val="2E3338"/>
+          </a:solidFill>
+          <a:ln>
+            <a:noFill/>
+          </a:ln>
+          <a:effectLst/>
+        </p:spPr>
+        <p:style>
+          <a:lnRef idx="1">
+            <a:schemeClr val="accent1"/>
+          </a:lnRef>
+          <a:fillRef idx="3">
+            <a:schemeClr val="accent1"/>
+          </a:fillRef>
+          <a:effectRef idx="2">
+            <a:schemeClr val="accent1"/>
+          </a:effectRef>
+          <a:fontRef idx="minor">
+            <a:schemeClr val="lt1"/>
+          </a:fontRef>
+        </p:style>
+        <p:txBody>
+          <a:bodyPr rtlCol="0" anchor="ctr" wrap="square" lIns="73152" rIns="73152"/>
+          <a:lstStyle/>
+          <a:p>
+            <a:pPr algn="ctr"/>
+            <a:r>
+              <a:rPr sz="1400" b="1">
+                <a:solidFill>
+                  <a:srgbClr val="DEE2E6"/>
+                </a:solidFill>
+              </a:rPr>
+              <a:t>In the house</a:t>
+            </a:r>
+          </a:p>
+          <a:p>
+            <a:pPr algn="ctr"/>
+            <a:r>
+              <a:rPr sz="1200" b="0">
+                <a:solidFill>
+                  <a:srgbClr val="9AA3AB"/>
+                </a:solidFill>
+              </a:rPr>
+              <a:t>waits</a:t>
+            </a:r>
+          </a:p>
+        </p:txBody>
+      </p:sp>
+      <p:sp>
+        <p:nvSpPr>
+          <p:cNvPr id="296" name="Rounded Rectangle 295"/>
+          <p:cNvSpPr/>
+          <p:nvPr/>
+        </p:nvSpPr>
+        <p:spPr>
+          <a:xfrm>
+            <a:off x="2468880" y="1325880"/>
+            <a:ext cx="1463040" cy="640080"/>
+          </a:xfrm>
+          <a:prstGeom prst="roundRect">
+            <a:avLst>
+              <a:gd name="adj" fmla="val 12000"/>
+            </a:avLst>
+          </a:prstGeom>
+          <a:solidFill>
+            <a:srgbClr val="2E3338"/>
+          </a:solidFill>
+          <a:ln>
+            <a:noFill/>
+          </a:ln>
+          <a:effectLst/>
+        </p:spPr>
+        <p:style>
+          <a:lnRef idx="1">
+            <a:schemeClr val="accent1"/>
+          </a:lnRef>
+          <a:fillRef idx="3">
+            <a:schemeClr val="accent1"/>
+          </a:fillRef>
+          <a:effectRef idx="2">
+            <a:schemeClr val="accent1"/>
+          </a:effectRef>
+          <a:fontRef idx="minor">
+            <a:schemeClr val="lt1"/>
+          </a:fontRef>
+        </p:style>
+        <p:txBody>
+          <a:bodyPr rtlCol="0" anchor="ctr" wrap="square" lIns="73152" rIns="73152"/>
+          <a:lstStyle/>
+          <a:p>
+            <a:pPr algn="ctr"/>
+            <a:r>
+              <a:rPr sz="1400" b="1">
+                <a:solidFill>
+                  <a:srgbClr val="DEE2E6"/>
+                </a:solidFill>
+              </a:rPr>
+              <a:t>Scatter</a:t>
+            </a:r>
+          </a:p>
+          <a:p>
+            <a:pPr algn="ctr"/>
+            <a:r>
+              <a:rPr sz="1200" b="0">
+                <a:solidFill>
+                  <a:srgbClr val="9AA3AB"/>
+                </a:solidFill>
+              </a:rPr>
+              <a:t>its corner</a:t>
+            </a:r>
+          </a:p>
+        </p:txBody>
+      </p:sp>
+      <p:sp>
+        <p:nvSpPr>
+          <p:cNvPr id="297" name="Rounded Rectangle 296"/>
+          <p:cNvSpPr/>
+          <p:nvPr/>
+        </p:nvSpPr>
+        <p:spPr>
+          <a:xfrm>
+            <a:off x="2468880" y="2331720"/>
+            <a:ext cx="1463040" cy="640080"/>
+          </a:xfrm>
+          <a:prstGeom prst="roundRect">
+            <a:avLst>
+              <a:gd name="adj" fmla="val 12000"/>
+            </a:avLst>
+          </a:prstGeom>
+          <a:solidFill>
+            <a:srgbClr val="2E3338"/>
+          </a:solidFill>
+          <a:ln w="25400">
+            <a:solidFill>
+              <a:srgbClr val="D45D35"/>
+            </a:solidFill>
+          </a:ln>
+          <a:effectLst/>
+        </p:spPr>
+        <p:style>
+          <a:lnRef idx="1">
+            <a:schemeClr val="accent1"/>
+          </a:lnRef>
+          <a:fillRef idx="3">
+            <a:schemeClr val="accent1"/>
+          </a:fillRef>
+          <a:effectRef idx="2">
+            <a:schemeClr val="accent1"/>
+          </a:effectRef>
+          <a:fontRef idx="minor">
+            <a:schemeClr val="lt1"/>
+          </a:fontRef>
+        </p:style>
+        <p:txBody>
+          <a:bodyPr rtlCol="0" anchor="ctr" wrap="square" lIns="73152" rIns="73152"/>
+          <a:lstStyle/>
+          <a:p>
+            <a:pPr algn="ctr"/>
+            <a:r>
+              <a:rPr sz="1400" b="1">
+                <a:solidFill>
+                  <a:srgbClr val="DEE2E6"/>
+                </a:solidFill>
+              </a:rPr>
+              <a:t>Chase</a:t>
+            </a:r>
+          </a:p>
+          <a:p>
+            <a:pPr algn="ctr"/>
+            <a:r>
+              <a:rPr sz="1200" b="0">
+                <a:solidFill>
+                  <a:srgbClr val="9AA3AB"/>
+                </a:solidFill>
+              </a:rPr>
+              <a:t>Pac-Man</a:t>
+            </a:r>
+          </a:p>
+        </p:txBody>
+      </p:sp>
+      <p:sp>
+        <p:nvSpPr>
+          <p:cNvPr id="298" name="Rounded Rectangle 297"/>
+          <p:cNvSpPr/>
+          <p:nvPr/>
+        </p:nvSpPr>
+        <p:spPr>
+          <a:xfrm>
+            <a:off x="4846320" y="1828800"/>
+            <a:ext cx="1645920" cy="640080"/>
+          </a:xfrm>
+          <a:prstGeom prst="roundRect">
+            <a:avLst>
+              <a:gd name="adj" fmla="val 12000"/>
+            </a:avLst>
+          </a:prstGeom>
+          <a:solidFill>
+            <a:srgbClr val="2E3338"/>
+          </a:solidFill>
+          <a:ln>
+            <a:noFill/>
+          </a:ln>
+          <a:effectLst/>
+        </p:spPr>
+        <p:style>
+          <a:lnRef idx="1">
+            <a:schemeClr val="accent1"/>
+          </a:lnRef>
+          <a:fillRef idx="3">
+            <a:schemeClr val="accent1"/>
+          </a:fillRef>
+          <a:effectRef idx="2">
+            <a:schemeClr val="accent1"/>
+          </a:effectRef>
+          <a:fontRef idx="minor">
+            <a:schemeClr val="lt1"/>
+          </a:fontRef>
+        </p:style>
+        <p:txBody>
+          <a:bodyPr rtlCol="0" anchor="ctr" wrap="square" lIns="73152" rIns="73152"/>
+          <a:lstStyle/>
+          <a:p>
+            <a:pPr algn="ctr"/>
+            <a:r>
+              <a:rPr sz="1400" b="1">
+                <a:solidFill>
+                  <a:srgbClr val="DEE2E6"/>
+                </a:solidFill>
+              </a:rPr>
+              <a:t>Frightened</a:t>
+            </a:r>
+          </a:p>
+          <a:p>
+            <a:pPr algn="ctr"/>
+            <a:r>
+              <a:rPr sz="1200" b="0">
+                <a:solidFill>
+                  <a:srgbClr val="9AA3AB"/>
+                </a:solidFill>
+              </a:rPr>
+              <a:t>blue, random</a:t>
+            </a:r>
+          </a:p>
+        </p:txBody>
+      </p:sp>
+      <p:sp>
+        <p:nvSpPr>
+          <p:cNvPr id="299" name="Rounded Rectangle 298"/>
+          <p:cNvSpPr/>
+          <p:nvPr/>
+        </p:nvSpPr>
+        <p:spPr>
+          <a:xfrm>
+            <a:off x="7132320" y="1828800"/>
+            <a:ext cx="1463040" cy="640080"/>
+          </a:xfrm>
+          <a:prstGeom prst="roundRect">
+            <a:avLst>
+              <a:gd name="adj" fmla="val 12000"/>
+            </a:avLst>
+          </a:prstGeom>
+          <a:solidFill>
+            <a:srgbClr val="2E3338"/>
+          </a:solidFill>
+          <a:ln>
+            <a:noFill/>
+          </a:ln>
+          <a:effectLst/>
+        </p:spPr>
+        <p:style>
+          <a:lnRef idx="1">
+            <a:schemeClr val="accent1"/>
+          </a:lnRef>
+          <a:fillRef idx="3">
+            <a:schemeClr val="accent1"/>
+          </a:fillRef>
+          <a:effectRef idx="2">
+            <a:schemeClr val="accent1"/>
+          </a:effectRef>
+          <a:fontRef idx="minor">
+            <a:schemeClr val="lt1"/>
+          </a:fontRef>
+        </p:style>
+        <p:txBody>
+          <a:bodyPr rtlCol="0" anchor="ctr" wrap="square" lIns="73152" rIns="73152"/>
+          <a:lstStyle/>
+          <a:p>
+            <a:pPr algn="ctr"/>
+            <a:r>
+              <a:rPr sz="1400" b="1">
+                <a:solidFill>
+                  <a:srgbClr val="DEE2E6"/>
+                </a:solidFill>
+              </a:rPr>
+              <a:t>Eaten</a:t>
+            </a:r>
+          </a:p>
+          <a:p>
+            <a:pPr algn="ctr"/>
+            <a:r>
+              <a:rPr sz="1200" b="0">
+                <a:solidFill>
+                  <a:srgbClr val="9AA3AB"/>
+                </a:solidFill>
+              </a:rPr>
+              <a:t>eyes go home</a:t>
+            </a:r>
+          </a:p>
+        </p:txBody>
+      </p:sp>
+      <p:cxnSp>
+        <p:nvCxnSpPr>
+          <p:cNvPr id="300" name="Connector 299"/>
+          <p:cNvCxnSpPr/>
+          <p:nvPr/>
+        </p:nvCxnSpPr>
+        <p:spPr>
+          <a:xfrm flipV="1">
+            <a:off x="1847088" y="1691640"/>
+            <a:ext cx="603504" cy="320040"/>
+          </a:xfrm>
+          <a:prstGeom prst="line">
+            <a:avLst/>
+          </a:prstGeom>
+          <a:ln w="25400">
+            <a:solidFill>
+              <a:srgbClr val="9AA3AB"/>
+            </a:solidFill>
+            <a:tailEnd type="triangle"/>
+          </a:ln>
+        </p:spPr>
+        <p:style>
+          <a:lnRef idx="2">
+            <a:schemeClr val="accent1"/>
+          </a:lnRef>
+          <a:fillRef idx="0">
+            <a:schemeClr val="accent1"/>
+          </a:fillRef>
+          <a:effectRef idx="1">
+            <a:schemeClr val="accent1"/>
+          </a:effectRef>
+          <a:fontRef idx="minor">
+            <a:schemeClr val="tx1"/>
+          </a:fontRef>
+        </p:style>
+      </p:cxnSp>
+      <p:cxnSp>
+        <p:nvCxnSpPr>
+          <p:cNvPr id="301" name="Connector 300"/>
+          <p:cNvCxnSpPr/>
+          <p:nvPr/>
+        </p:nvCxnSpPr>
+        <p:spPr>
+          <a:xfrm>
+            <a:off x="3108960" y="1984248"/>
+            <a:ext cx="0" cy="329184"/>
+          </a:xfrm>
+          <a:prstGeom prst="line">
+            <a:avLst/>
+          </a:prstGeom>
+          <a:ln w="25400">
+            <a:solidFill>
+              <a:srgbClr val="9AA3AB"/>
+            </a:solidFill>
+            <a:tailEnd type="triangle"/>
+          </a:ln>
+        </p:spPr>
+        <p:style>
+          <a:lnRef idx="2">
+            <a:schemeClr val="accent1"/>
+          </a:lnRef>
+          <a:fillRef idx="0">
+            <a:schemeClr val="accent1"/>
+          </a:fillRef>
+          <a:effectRef idx="1">
+            <a:schemeClr val="accent1"/>
+          </a:effectRef>
+          <a:fontRef idx="minor">
+            <a:schemeClr val="tx1"/>
+          </a:fontRef>
+        </p:style>
+      </p:cxnSp>
+      <p:cxnSp>
+        <p:nvCxnSpPr>
+          <p:cNvPr id="302" name="Connector 301"/>
+          <p:cNvCxnSpPr/>
+          <p:nvPr/>
+        </p:nvCxnSpPr>
+        <p:spPr>
+          <a:xfrm flipV="1">
+            <a:off x="3291840" y="1984248"/>
+            <a:ext cx="0" cy="329184"/>
+          </a:xfrm>
+          <a:prstGeom prst="line">
+            <a:avLst/>
+          </a:prstGeom>
+          <a:ln w="25400">
+            <a:solidFill>
+              <a:srgbClr val="9AA3AB"/>
+            </a:solidFill>
+            <a:tailEnd type="triangle"/>
+          </a:ln>
+        </p:spPr>
+        <p:style>
+          <a:lnRef idx="2">
+            <a:schemeClr val="accent1"/>
+          </a:lnRef>
+          <a:fillRef idx="0">
+            <a:schemeClr val="accent1"/>
+          </a:fillRef>
+          <a:effectRef idx="1">
+            <a:schemeClr val="accent1"/>
+          </a:effectRef>
+          <a:fontRef idx="minor">
+            <a:schemeClr val="tx1"/>
+          </a:fontRef>
+        </p:style>
+      </p:cxnSp>
+      <p:sp>
+        <p:nvSpPr>
+          <p:cNvPr id="303" name="TextBox 302"/>
+          <p:cNvSpPr txBox="1"/>
+          <p:nvPr/>
+        </p:nvSpPr>
+        <p:spPr>
+          <a:xfrm>
+            <a:off x="3429000" y="2011680"/>
+            <a:ext cx="1097280" cy="274320"/>
+          </a:xfrm>
+          <a:prstGeom prst="rect">
+            <a:avLst/>
+          </a:prstGeom>
+          <a:noFill/>
+        </p:spPr>
+        <p:txBody>
+          <a:bodyPr wrap="square">
+            <a:spAutoFit/>
+          </a:bodyPr>
+          <a:lstStyle/>
+          <a:p>
+            <a:pPr algn="l"/>
+            <a:r>
+              <a:rPr sz="1100" b="0" i="0">
+                <a:solidFill>
+                  <a:srgbClr val="9AA3AB"/>
+                </a:solidFill>
+              </a:rPr>
+              <a:t>schedule</a:t>
+            </a:r>
+          </a:p>
+        </p:txBody>
+      </p:sp>
+      <p:cxnSp>
+        <p:nvCxnSpPr>
+          <p:cNvPr id="304" name="Connector 303"/>
+          <p:cNvCxnSpPr/>
+          <p:nvPr/>
+        </p:nvCxnSpPr>
+        <p:spPr>
+          <a:xfrm flipV="1">
+            <a:off x="3950208" y="2331720"/>
+            <a:ext cx="877824" cy="320040"/>
+          </a:xfrm>
+          <a:prstGeom prst="line">
+            <a:avLst/>
+          </a:prstGeom>
+          <a:ln w="25400">
+            <a:solidFill>
+              <a:srgbClr val="9AA3AB"/>
+            </a:solidFill>
+            <a:tailEnd type="triangle"/>
+          </a:ln>
+        </p:spPr>
+        <p:style>
+          <a:lnRef idx="2">
+            <a:schemeClr val="accent1"/>
+          </a:lnRef>
+          <a:fillRef idx="0">
+            <a:schemeClr val="accent1"/>
+          </a:fillRef>
+          <a:effectRef idx="1">
+            <a:schemeClr val="accent1"/>
+          </a:effectRef>
+          <a:fontRef idx="minor">
+            <a:schemeClr val="tx1"/>
+          </a:fontRef>
+        </p:style>
+      </p:cxnSp>
+      <p:sp>
+        <p:nvSpPr>
+          <p:cNvPr id="305" name="TextBox 304"/>
+          <p:cNvSpPr txBox="1"/>
+          <p:nvPr/>
+        </p:nvSpPr>
+        <p:spPr>
+          <a:xfrm>
+            <a:off x="3977639" y="2560320"/>
+            <a:ext cx="1097280" cy="274320"/>
+          </a:xfrm>
+          <a:prstGeom prst="rect">
+            <a:avLst/>
+          </a:prstGeom>
+          <a:noFill/>
+        </p:spPr>
+        <p:txBody>
+          <a:bodyPr wrap="square">
+            <a:spAutoFit/>
+          </a:bodyPr>
+          <a:lstStyle/>
+          <a:p>
+            <a:pPr algn="l"/>
+            <a:r>
+              <a:rPr sz="1100" b="0" i="0">
+                <a:solidFill>
+                  <a:srgbClr val="9AA3AB"/>
+                </a:solidFill>
+              </a:rPr>
+              <a:t>power pellet</a:t>
+            </a:r>
+          </a:p>
+        </p:txBody>
+      </p:sp>
+      <p:cxnSp>
+        <p:nvCxnSpPr>
+          <p:cNvPr id="306" name="Connector 305"/>
+          <p:cNvCxnSpPr/>
+          <p:nvPr/>
+        </p:nvCxnSpPr>
+        <p:spPr>
+          <a:xfrm>
+            <a:off x="6510528" y="2148840"/>
+            <a:ext cx="603504" cy="0"/>
+          </a:xfrm>
+          <a:prstGeom prst="line">
+            <a:avLst/>
+          </a:prstGeom>
+          <a:ln w="25400">
+            <a:solidFill>
+              <a:srgbClr val="9AA3AB"/>
+            </a:solidFill>
+            <a:tailEnd type="triangle"/>
+          </a:ln>
+        </p:spPr>
+        <p:style>
+          <a:lnRef idx="2">
+            <a:schemeClr val="accent1"/>
+          </a:lnRef>
+          <a:fillRef idx="0">
+            <a:schemeClr val="accent1"/>
+          </a:fillRef>
+          <a:effectRef idx="1">
+            <a:schemeClr val="accent1"/>
+          </a:effectRef>
+          <a:fontRef idx="minor">
+            <a:schemeClr val="tx1"/>
+          </a:fontRef>
+        </p:style>
+      </p:cxnSp>
+      <p:sp>
+        <p:nvSpPr>
+          <p:cNvPr id="307" name="TextBox 306"/>
+          <p:cNvSpPr txBox="1"/>
+          <p:nvPr/>
+        </p:nvSpPr>
+        <p:spPr>
+          <a:xfrm>
+            <a:off x="6327648" y="1856232"/>
+            <a:ext cx="969264" cy="274320"/>
+          </a:xfrm>
+          <a:prstGeom prst="rect">
+            <a:avLst/>
+          </a:prstGeom>
+          <a:noFill/>
+        </p:spPr>
+        <p:txBody>
+          <a:bodyPr wrap="square">
+            <a:spAutoFit/>
+          </a:bodyPr>
+          <a:lstStyle/>
+          <a:p>
+            <a:pPr algn="ctr"/>
+            <a:r>
+              <a:rPr sz="1100" b="0" i="0">
+                <a:solidFill>
+                  <a:srgbClr val="9AA3AB"/>
+                </a:solidFill>
+              </a:rPr>
+              <a:t>touched</a:t>
+            </a:r>
+          </a:p>
+        </p:txBody>
+      </p:sp>
+      <p:sp>
+        <p:nvSpPr>
+          <p:cNvPr id="308" name="TextBox 307"/>
+          <p:cNvSpPr txBox="1"/>
+          <p:nvPr/>
+        </p:nvSpPr>
+        <p:spPr>
+          <a:xfrm>
+            <a:off x="365760" y="3200400"/>
+            <a:ext cx="8229600" cy="548640"/>
+          </a:xfrm>
+          <a:prstGeom prst="rect">
+            <a:avLst/>
+          </a:prstGeom>
+          <a:noFill/>
+        </p:spPr>
+        <p:txBody>
+          <a:bodyPr wrap="square">
+            <a:spAutoFit/>
+          </a:bodyPr>
+          <a:lstStyle/>
+          <a:p>
+            <a:pPr algn="ctr"/>
+            <a:r>
+              <a:rPr sz="1500" b="1" i="0">
+                <a:solidFill>
+                  <a:srgbClr val="DEE2E6"/>
+                </a:solidFill>
+              </a:rPr>
+              <a:t>At each tile centre: never turn back, and take the direction closest to a target tile.</a:t>
+            </a:r>
+          </a:p>
+        </p:txBody>
+      </p:sp>
+    </p:spTree>
+  </p:cSld>
+  <p:clrMapOvr>
+    <a:masterClrMapping/>
+  </p:clrMapOvr>
+</p:sld>
+</file>
+
+<file path=ppt/slides/slide11.xml><?xml version="1.0" encoding="utf-8"?>
+<p:sld xmlns:a="http://schemas.openxmlformats.org/drawingml/2006/main" xmlns:p="http://schemas.openxmlformats.org/presentationml/2006/main" xmlns:r="http://schemas.openxmlformats.org/officeDocument/2006/relationships">
+  <p:cSld>
+    <p:spTree>
+      <p:nvGrpSpPr>
+        <p:cNvPr id="1" name=""/>
+        <p:cNvGrpSpPr/>
+        <p:nvPr/>
+      </p:nvGrpSpPr>
+      <p:grpSpPr/>
+      <p:sp>
+        <p:nvSpPr>
           <p:cNvPr id="140" name="Google Shape;140;p23"/>
           <p:cNvSpPr txBox="1"/>
           <p:nvPr>
@@ -7268,7 +8259,7 @@
 </p:sld>
 </file>
 
-<file path=ppt/slides/slide11.xml><?xml version="1.0" encoding="utf-8"?>
+<file path=ppt/slides/slide12.xml><?xml version="1.0" encoding="utf-8"?>
 <p:sld xmlns:a="http://schemas.openxmlformats.org/drawingml/2006/main" xmlns:p="http://schemas.openxmlformats.org/presentationml/2006/main" xmlns:r="http://schemas.openxmlformats.org/officeDocument/2006/relationships">
   <p:cSld>
     <p:spTree>
@@ -7833,7 +8824,7 @@
 </p:sld>
 </file>
 
-<file path=ppt/slides/slide12.xml><?xml version="1.0" encoding="utf-8"?>
+<file path=ppt/slides/slide13.xml><?xml version="1.0" encoding="utf-8"?>
 <p:sld xmlns:a="http://schemas.openxmlformats.org/drawingml/2006/main" xmlns:p="http://schemas.openxmlformats.org/presentationml/2006/main" xmlns:r="http://schemas.openxmlformats.org/officeDocument/2006/relationships">
   <p:cSld>
     <p:spTree>
@@ -7960,7 +8951,129 @@
 </p:sld>
 </file>
 
-<file path=ppt/slides/slide13.xml><?xml version="1.0" encoding="utf-8"?>
+<file path=ppt/slides/slide14.xml><?xml version="1.0" encoding="utf-8"?>
+<p:sld xmlns:a="http://schemas.openxmlformats.org/drawingml/2006/main" xmlns:p="http://schemas.openxmlformats.org/presentationml/2006/main" xmlns:r="http://schemas.openxmlformats.org/officeDocument/2006/relationships">
+  <p:cSld>
+    <p:spTree>
+      <p:nvGrpSpPr>
+        <p:cNvPr id="1" name=""/>
+        <p:cNvGrpSpPr/>
+        <p:nvPr/>
+      </p:nvGrpSpPr>
+      <p:grpSpPr/>
+      <p:sp>
+        <p:nvSpPr>
+          <p:cNvPr id="2" name="Title 1"/>
+          <p:cNvSpPr>
+            <a:spLocks noGrp="1"/>
+          </p:cNvSpPr>
+          <p:nvPr>
+            <p:ph type="title"/>
+          </p:nvPr>
+        </p:nvSpPr>
+        <p:spPr/>
+        <p:txBody>
+          <a:bodyPr/>
+          <a:lstStyle/>
+          <a:p>
+            <a:pPr indent="0" lvl="0" marL="0" rtl="0" algn="l">
+              <a:spcBef>
+                <a:spcPts val="0"/>
+              </a:spcBef>
+              <a:spcAft>
+                <a:spcPts val="0"/>
+              </a:spcAft>
+              <a:buNone/>
+            </a:pPr>
+            <a:r>
+              <a:rPr lang="en"/>
+              <a:t>Try It: A Frozen Mode</a:t>
+            </a:r>
+            <a:endParaRPr/>
+          </a:p>
+        </p:txBody>
+      </p:sp>
+      <p:sp>
+        <p:nvSpPr>
+          <p:cNvPr id="3" name="Text Placeholder 2"/>
+          <p:cNvSpPr>
+            <a:spLocks noGrp="1"/>
+          </p:cNvSpPr>
+          <p:nvPr>
+            <p:ph type="body" idx="1"/>
+          </p:nvPr>
+        </p:nvSpPr>
+        <p:spPr>
+          <a:xfrm>
+            <a:off x="311700" y="885950"/>
+            <a:ext cx="8520600" cy="1289304"/>
+          </a:xfrm>
+        </p:spPr>
+        <p:txBody>
+          <a:bodyPr/>
+          <a:lstStyle/>
+          <a:p>
+            <a:pPr indent="-330200" lvl="0" marL="457200" rtl="0" algn="l">
+              <a:spcBef>
+                <a:spcPts val="0"/>
+              </a:spcBef>
+              <a:spcAft>
+                <a:spcPts val="0"/>
+              </a:spcAft>
+              <a:buSzPts val="1600"/>
+              <a:buChar char="●"/>
+            </a:pPr>
+            <a:r>
+              <a:rPr lang="en"/>
+              <a:t>In Pacman1, add Frozen to GhostMode:</a:t>
+            </a:r>
+            <a:endParaRPr/>
+          </a:p>
+          <a:p>
+            <a:pPr indent="-330200" lvl="0" marL="457200" rtl="0" algn="l">
+              <a:spcBef>
+                <a:spcPts val="0"/>
+              </a:spcBef>
+              <a:spcAft>
+                <a:spcPts val="0"/>
+              </a:spcAft>
+              <a:buSzPts val="1600"/>
+              <a:buChar char="●"/>
+            </a:pPr>
+            <a:r>
+              <a:rPr lang="en"/>
+              <a:t>an eaten ghost stands still for a second first</a:t>
+            </a:r>
+            <a:endParaRPr/>
+          </a:p>
+          <a:p>
+            <a:pPr indent="-330200" lvl="0" marL="457200" rtl="0" algn="l">
+              <a:spcBef>
+                <a:spcPts val="0"/>
+              </a:spcBef>
+              <a:spcAft>
+                <a:spcPts val="0"/>
+              </a:spcAft>
+              <a:buSzPts val="1600"/>
+              <a:buChar char="●"/>
+            </a:pPr>
+            <a:r>
+              <a:rPr lang="en"/>
+              <a:t>Don’t finish it. Count the switches you would have to change</a:t>
+            </a:r>
+            <a:endParaRPr/>
+          </a:p>
+        </p:txBody>
+      </p:sp>
+    </p:spTree>
+  </p:cSld>
+  <p:clrMapOvr>
+    <a:masterClrMapping/>
+  </p:clrMapOvr>
+</p:sld>
+</file>
+
+<file path=ppt/slides/slide15.xml><?xml version="1.0" encoding="utf-8"?>
 <p:sld xmlns:a="http://schemas.openxmlformats.org/drawingml/2006/main" xmlns:p="http://schemas.openxmlformats.org/presentationml/2006/main" xmlns:r="http://schemas.openxmlformats.org/officeDocument/2006/relationships">
   <p:cSld>
     <p:spTree>
@@ -8680,7 +9793,7 @@
 </p:sld>
 </file>
 
-<file path=ppt/slides/slide14.xml><?xml version="1.0" encoding="utf-8"?>
+<file path=ppt/slides/slide16.xml><?xml version="1.0" encoding="utf-8"?>
 <p:sld xmlns:a="http://schemas.openxmlformats.org/drawingml/2006/main" xmlns:p="http://schemas.openxmlformats.org/presentationml/2006/main" xmlns:r="http://schemas.openxmlformats.org/officeDocument/2006/relationships">
   <p:cSld>
     <p:spTree>
@@ -9652,7 +10765,7 @@
 </p:sld>
 </file>
 
-<file path=ppt/slides/slide15.xml><?xml version="1.0" encoding="utf-8"?>
+<file path=ppt/slides/slide17.xml><?xml version="1.0" encoding="utf-8"?>
 <p:sld xmlns:a="http://schemas.openxmlformats.org/drawingml/2006/main" xmlns:p="http://schemas.openxmlformats.org/presentationml/2006/main" xmlns:r="http://schemas.openxmlformats.org/officeDocument/2006/relationships">
   <p:cSld>
     <p:spTree>
@@ -10010,7 +11123,7 @@
 </p:sld>
 </file>
 
-<file path=ppt/slides/slide16.xml><?xml version="1.0" encoding="utf-8"?>
+<file path=ppt/slides/slide18.xml><?xml version="1.0" encoding="utf-8"?>
 <p:sld xmlns:a="http://schemas.openxmlformats.org/drawingml/2006/main" xmlns:p="http://schemas.openxmlformats.org/presentationml/2006/main" xmlns:r="http://schemas.openxmlformats.org/officeDocument/2006/relationships">
   <p:cSld>
     <p:spTree>
@@ -10137,7 +11250,259 @@
 </p:sld>
 </file>
 
-<file path=ppt/slides/slide17.xml><?xml version="1.0" encoding="utf-8"?>
+<file path=ppt/slides/slide19.xml><?xml version="1.0" encoding="utf-8"?>
+<p:sld xmlns:a="http://schemas.openxmlformats.org/drawingml/2006/main" xmlns:p="http://schemas.openxmlformats.org/presentationml/2006/main" xmlns:r="http://schemas.openxmlformats.org/officeDocument/2006/relationships">
+  <p:cSld>
+    <p:spTree>
+      <p:nvGrpSpPr>
+        <p:cNvPr id="1" name=""/>
+        <p:cNvGrpSpPr/>
+        <p:nvPr/>
+      </p:nvGrpSpPr>
+      <p:grpSpPr/>
+      <p:sp>
+        <p:nvSpPr>
+          <p:cNvPr id="2" name="Title 1"/>
+          <p:cNvSpPr>
+            <a:spLocks noGrp="1"/>
+          </p:cNvSpPr>
+          <p:nvPr>
+            <p:ph type="title"/>
+          </p:nvPr>
+        </p:nvSpPr>
+        <p:spPr/>
+        <p:txBody>
+          <a:bodyPr/>
+          <a:lstStyle/>
+          <a:p>
+            <a:pPr indent="0" lvl="0" marL="0" rtl="0" algn="l">
+              <a:spcBef>
+                <a:spcPts val="0"/>
+              </a:spcBef>
+              <a:spcAft>
+                <a:spcPts val="0"/>
+              </a:spcAft>
+              <a:buNone/>
+            </a:pPr>
+            <a:r>
+              <a:rPr lang="en"/>
+              <a:t>Try It: The Same Change, With States</a:t>
+            </a:r>
+            <a:endParaRPr/>
+          </a:p>
+        </p:txBody>
+      </p:sp>
+      <p:sp>
+        <p:nvSpPr>
+          <p:cNvPr id="3" name="Text Placeholder 2"/>
+          <p:cNvSpPr>
+            <a:spLocks noGrp="1"/>
+          </p:cNvSpPr>
+          <p:nvPr>
+            <p:ph type="body" idx="1"/>
+          </p:nvPr>
+        </p:nvSpPr>
+        <p:spPr>
+          <a:xfrm>
+            <a:off x="311700" y="885950"/>
+            <a:ext cx="8520600" cy="1673352"/>
+          </a:xfrm>
+        </p:spPr>
+        <p:txBody>
+          <a:bodyPr/>
+          <a:lstStyle/>
+          <a:p>
+            <a:pPr indent="-330200" lvl="0" marL="457200" rtl="0" algn="l">
+              <a:spcBef>
+                <a:spcPts val="0"/>
+              </a:spcBef>
+              <a:spcAft>
+                <a:spcPts val="0"/>
+              </a:spcAft>
+              <a:buSzPts val="1600"/>
+              <a:buChar char="●"/>
+            </a:pPr>
+            <a:r>
+              <a:rPr lang="en"/>
+              <a:t>In Pacman2:</a:t>
+            </a:r>
+            <a:endParaRPr/>
+          </a:p>
+          <a:p>
+            <a:pPr indent="-330200" lvl="0" marL="457200" rtl="0" algn="l">
+              <a:spcBef>
+                <a:spcPts val="0"/>
+              </a:spcBef>
+              <a:spcAft>
+                <a:spcPts val="0"/>
+              </a:spcAft>
+              <a:buSzPts val="1600"/>
+              <a:buChar char="●"/>
+            </a:pPr>
+            <a:r>
+              <a:rPr lang="en"/>
+              <a:t>Make frightened ghosts last 3 seconds instead of 6</a:t>
+            </a:r>
+            <a:endParaRPr/>
+          </a:p>
+          <a:p>
+            <a:pPr indent="-330200" lvl="0" marL="457200" rtl="0" algn="l">
+              <a:spcBef>
+                <a:spcPts val="0"/>
+              </a:spcBef>
+              <a:spcAft>
+                <a:spcPts val="0"/>
+              </a:spcAft>
+              <a:buSzPts val="1600"/>
+              <a:buChar char="●"/>
+            </a:pPr>
+            <a:r>
+              <a:rPr lang="en"/>
+              <a:t>How many files did it take?</a:t>
+            </a:r>
+            <a:endParaRPr/>
+          </a:p>
+          <a:p>
+            <a:pPr indent="-330200" lvl="0" marL="457200" rtl="0" algn="l">
+              <a:spcBef>
+                <a:spcPts val="0"/>
+              </a:spcBef>
+              <a:spcAft>
+                <a:spcPts val="0"/>
+              </a:spcAft>
+              <a:buSzPts val="1600"/>
+              <a:buChar char="●"/>
+            </a:pPr>
+            <a:r>
+              <a:rPr lang="en"/>
+              <a:t>Where would a FrozenState go, and what would change?</a:t>
+            </a:r>
+            <a:endParaRPr/>
+          </a:p>
+        </p:txBody>
+      </p:sp>
+    </p:spTree>
+  </p:cSld>
+  <p:clrMapOvr>
+    <a:masterClrMapping/>
+  </p:clrMapOvr>
+</p:sld>
+</file>
+
+<file path=ppt/slides/slide2.xml><?xml version="1.0" encoding="utf-8"?>
+<p:sld xmlns:a="http://schemas.openxmlformats.org/drawingml/2006/main" xmlns:p="http://schemas.openxmlformats.org/presentationml/2006/main" xmlns:r="http://schemas.openxmlformats.org/officeDocument/2006/relationships">
+  <p:cSld>
+    <p:spTree>
+      <p:nvGrpSpPr>
+        <p:cNvPr id="1" name=""/>
+        <p:cNvGrpSpPr/>
+        <p:nvPr/>
+      </p:nvGrpSpPr>
+      <p:grpSpPr/>
+      <p:sp>
+        <p:nvSpPr>
+          <p:cNvPr id="2" name="Title 1"/>
+          <p:cNvSpPr>
+            <a:spLocks noGrp="1"/>
+          </p:cNvSpPr>
+          <p:nvPr>
+            <p:ph type="title"/>
+          </p:nvPr>
+        </p:nvSpPr>
+        <p:spPr>
+          <a:xfrm>
+            <a:off x="311700" y="195615"/>
+            <a:ext cx="8520600" cy="572700"/>
+          </a:xfrm>
+        </p:spPr>
+        <p:txBody>
+          <a:bodyPr/>
+          <a:lstStyle/>
+          <a:p>
+            <a:pPr indent="0" lvl="0" marL="0" rtl="0" algn="l">
+              <a:spcBef>
+                <a:spcPts val="0"/>
+              </a:spcBef>
+              <a:spcAft>
+                <a:spcPts val="0"/>
+              </a:spcAft>
+              <a:buNone/>
+            </a:pPr>
+            <a:r>
+              <a:rPr lang="en"/>
+              <a:t>Pac-Man</a:t>
+            </a:r>
+            <a:endParaRPr/>
+          </a:p>
+        </p:txBody>
+      </p:sp>
+      <p:pic>
+        <p:nvPicPr>
+          <p:cNvPr id="3" name="Picture 2" descr="pac-man.png"/>
+          <p:cNvPicPr>
+            <a:picLocks noChangeAspect="1"/>
+          </p:cNvPicPr>
+          <p:nvPr/>
+        </p:nvPicPr>
+        <p:blipFill>
+          <a:blip r:embed="rId2"/>
+          <a:stretch>
+            <a:fillRect/>
+          </a:stretch>
+        </p:blipFill>
+        <p:spPr>
+          <a:xfrm>
+            <a:off x="3149600" y="960120"/>
+            <a:ext cx="2844800" cy="3657600"/>
+          </a:xfrm>
+          <a:prstGeom prst="rect">
+            <a:avLst/>
+          </a:prstGeom>
+        </p:spPr>
+      </p:pic>
+      <p:sp>
+        <p:nvSpPr>
+          <p:cNvPr id="4" name="TextBox 3"/>
+          <p:cNvSpPr txBox="1"/>
+          <p:nvPr/>
+        </p:nvSpPr>
+        <p:spPr>
+          <a:xfrm>
+            <a:off x="457200" y="4736592"/>
+            <a:ext cx="8229600" cy="274320"/>
+          </a:xfrm>
+          <a:prstGeom prst="rect">
+            <a:avLst/>
+          </a:prstGeom>
+          <a:noFill/>
+        </p:spPr>
+        <p:txBody>
+          <a:bodyPr wrap="square">
+            <a:spAutoFit/>
+          </a:bodyPr>
+          <a:lstStyle/>
+          <a:p>
+            <a:pPr algn="ctr"/>
+            <a:r>
+              <a:rPr sz="900" b="0" i="0">
+                <a:solidFill>
+                  <a:srgbClr val="9AA3AB"/>
+                </a:solidFill>
+              </a:rPr>
+              <a:t>Pac-Man (Namco, 1980). Image: Bandai Namco Entertainment America, CC BY 3.0, via Wikimedia Commons.</a:t>
+            </a:r>
+          </a:p>
+        </p:txBody>
+      </p:sp>
+    </p:spTree>
+  </p:cSld>
+  <p:clrMapOvr>
+    <a:masterClrMapping/>
+  </p:clrMapOvr>
+</p:sld>
+</file>
+
+<file path=ppt/slides/slide20.xml><?xml version="1.0" encoding="utf-8"?>
 <p:sld xmlns:a="http://schemas.openxmlformats.org/drawingml/2006/main" xmlns:p="http://schemas.openxmlformats.org/presentationml/2006/main" xmlns:r="http://schemas.openxmlformats.org/officeDocument/2006/relationships">
   <p:cSld>
     <p:spTree>
@@ -10656,7 +12021,7 @@
 </p:sld>
 </file>
 
-<file path=ppt/slides/slide18.xml><?xml version="1.0" encoding="utf-8"?>
+<file path=ppt/slides/slide21.xml><?xml version="1.0" encoding="utf-8"?>
 <p:sld xmlns:a="http://schemas.openxmlformats.org/drawingml/2006/main" xmlns:p="http://schemas.openxmlformats.org/presentationml/2006/main" xmlns:r="http://schemas.openxmlformats.org/officeDocument/2006/relationships">
   <p:cSld>
     <p:spTree>
@@ -11566,7 +12931,7 @@
 </p:sld>
 </file>
 
-<file path=ppt/slides/slide19.xml><?xml version="1.0" encoding="utf-8"?>
+<file path=ppt/slides/slide22.xml><?xml version="1.0" encoding="utf-8"?>
 <p:sld xmlns:a="http://schemas.openxmlformats.org/drawingml/2006/main" xmlns:p="http://schemas.openxmlformats.org/presentationml/2006/main" xmlns:r="http://schemas.openxmlformats.org/officeDocument/2006/relationships">
   <p:cSld>
     <p:spTree>
@@ -11693,7 +13058,7 @@
 </p:sld>
 </file>
 
-<file path=ppt/slides/slide2.xml><?xml version="1.0" encoding="utf-8"?>
+<file path=ppt/slides/slide23.xml><?xml version="1.0" encoding="utf-8"?>
 <p:sld xmlns:a="http://schemas.openxmlformats.org/drawingml/2006/main" xmlns:p="http://schemas.openxmlformats.org/presentationml/2006/main" xmlns:r="http://schemas.openxmlformats.org/officeDocument/2006/relationships">
   <p:cSld>
     <p:spTree>
@@ -11713,88 +13078,97 @@
             <p:ph type="title"/>
           </p:nvPr>
         </p:nvSpPr>
+        <p:spPr/>
+        <p:txBody>
+          <a:bodyPr/>
+          <a:lstStyle/>
+          <a:p>
+            <a:pPr indent="0" lvl="0" marL="0" rtl="0" algn="l">
+              <a:spcBef>
+                <a:spcPts val="0"/>
+              </a:spcBef>
+              <a:spcAft>
+                <a:spcPts val="0"/>
+              </a:spcAft>
+              <a:buNone/>
+            </a:pPr>
+            <a:r>
+              <a:rPr lang="en"/>
+              <a:t>Try It: Swap a Personality</a:t>
+            </a:r>
+            <a:endParaRPr/>
+          </a:p>
+        </p:txBody>
+      </p:sp>
+      <p:sp>
+        <p:nvSpPr>
+          <p:cNvPr id="3" name="Text Placeholder 2"/>
+          <p:cNvSpPr>
+            <a:spLocks noGrp="1"/>
+          </p:cNvSpPr>
+          <p:nvPr>
+            <p:ph type="body" idx="1"/>
+          </p:nvPr>
+        </p:nvSpPr>
         <p:spPr>
           <a:xfrm>
-            <a:off x="311700" y="195615"/>
-            <a:ext cx="8520600" cy="572700"/>
+            <a:off x="311700" y="885950"/>
+            <a:ext cx="8520600" cy="1289304"/>
           </a:xfrm>
         </p:spPr>
         <p:txBody>
           <a:bodyPr/>
           <a:lstStyle/>
           <a:p>
-            <a:pPr indent="0" lvl="0" marL="0" rtl="0" algn="l">
-              <a:spcBef>
-                <a:spcPts val="0"/>
-              </a:spcBef>
-              <a:spcAft>
-                <a:spcPts val="0"/>
-              </a:spcAft>
-              <a:buNone/>
+            <a:pPr indent="-330200" lvl="0" marL="457200" rtl="0" algn="l">
+              <a:spcBef>
+                <a:spcPts val="0"/>
+              </a:spcBef>
+              <a:spcAft>
+                <a:spcPts val="0"/>
+              </a:spcAft>
+              <a:buSzPts val="1600"/>
+              <a:buChar char="●"/>
             </a:pPr>
             <a:r>
               <a:rPr lang="en"/>
-              <a:t>Pac-Man</a:t>
+              <a:t>In Pacman3’s World:</a:t>
             </a:r>
             <a:endParaRPr/>
           </a:p>
-        </p:txBody>
-      </p:sp>
-      <p:pic>
-        <p:nvPicPr>
-          <p:cNvPr id="3" name="Picture 2" descr="pac-man.png"/>
-          <p:cNvPicPr>
-            <a:picLocks noChangeAspect="1"/>
-          </p:cNvPicPr>
-          <p:nvPr/>
-        </p:nvPicPr>
-        <p:blipFill>
-          <a:blip r:embed="rId2"/>
-          <a:stretch>
-            <a:fillRect/>
-          </a:stretch>
-        </p:blipFill>
-        <p:spPr>
-          <a:xfrm>
-            <a:off x="3149600" y="960120"/>
-            <a:ext cx="2844800" cy="3657600"/>
-          </a:xfrm>
-          <a:prstGeom prst="rect">
-            <a:avLst/>
-          </a:prstGeom>
-        </p:spPr>
-      </p:pic>
-      <p:sp>
-        <p:nvSpPr>
-          <p:cNvPr id="4" name="TextBox 3"/>
-          <p:cNvSpPr txBox="1"/>
-          <p:nvPr/>
-        </p:nvSpPr>
-        <p:spPr>
-          <a:xfrm>
-            <a:off x="457200" y="4736592"/>
-            <a:ext cx="8229600" cy="274320"/>
-          </a:xfrm>
-          <a:prstGeom prst="rect">
-            <a:avLst/>
-          </a:prstGeom>
-          <a:noFill/>
-        </p:spPr>
-        <p:txBody>
-          <a:bodyPr wrap="square">
-            <a:spAutoFit/>
-          </a:bodyPr>
-          <a:lstStyle/>
-          <a:p>
-            <a:pPr algn="ctr"/>
-            <a:r>
-              <a:rPr sz="900" b="0" i="0">
-                <a:solidFill>
-                  <a:srgbClr val="9AA3AB"/>
-                </a:solidFill>
-              </a:rPr>
-              <a:t>Pac-Man (Namco, 1980). Image: Bandai Namco Entertainment America, CC BY 3.0, via Wikimedia Commons.</a:t>
-            </a:r>
+          <a:p>
+            <a:pPr indent="-330200" lvl="0" marL="457200" rtl="0" algn="l">
+              <a:spcBef>
+                <a:spcPts val="0"/>
+              </a:spcBef>
+              <a:spcAft>
+                <a:spcPts val="0"/>
+              </a:spcAft>
+              <a:buSzPts val="1600"/>
+              <a:buChar char="●"/>
+            </a:pPr>
+            <a:r>
+              <a:rPr lang="en"/>
+              <a:t>Give Clyde Blinky’s strategy</a:t>
+            </a:r>
+            <a:endParaRPr/>
+          </a:p>
+          <a:p>
+            <a:pPr indent="-330200" lvl="0" marL="457200" rtl="0" algn="l">
+              <a:spcBef>
+                <a:spcPts val="0"/>
+              </a:spcBef>
+              <a:spcAft>
+                <a:spcPts val="0"/>
+              </a:spcAft>
+              <a:buSzPts val="1600"/>
+              <a:buChar char="●"/>
+            </a:pPr>
+            <a:r>
+              <a:rPr lang="en"/>
+              <a:t>Play: how does the chase change?</a:t>
+            </a:r>
+            <a:endParaRPr/>
           </a:p>
         </p:txBody>
       </p:sp>
@@ -11806,7 +13180,7 @@
 </p:sld>
 </file>
 
-<file path=ppt/slides/slide20.xml><?xml version="1.0" encoding="utf-8"?>
+<file path=ppt/slides/slide24.xml><?xml version="1.0" encoding="utf-8"?>
 <p:sld xmlns:a="http://schemas.openxmlformats.org/drawingml/2006/main" xmlns:p="http://schemas.openxmlformats.org/presentationml/2006/main" xmlns:r="http://schemas.openxmlformats.org/officeDocument/2006/relationships">
   <p:cSld>
     <p:spTree>
@@ -12123,7 +13497,7 @@
 </p:sld>
 </file>
 
-<file path=ppt/slides/slide21.xml><?xml version="1.0" encoding="utf-8"?>
+<file path=ppt/slides/slide25.xml><?xml version="1.0" encoding="utf-8"?>
 <p:sld xmlns:a="http://schemas.openxmlformats.org/drawingml/2006/main" xmlns:p="http://schemas.openxmlformats.org/presentationml/2006/main" xmlns:r="http://schemas.openxmlformats.org/officeDocument/2006/relationships">
   <p:cSld>
     <p:spTree>
@@ -12867,7 +14241,7 @@
 </p:sld>
 </file>
 
-<file path=ppt/slides/slide22.xml><?xml version="1.0" encoding="utf-8"?>
+<file path=ppt/slides/slide26.xml><?xml version="1.0" encoding="utf-8"?>
 <p:sld xmlns:a="http://schemas.openxmlformats.org/drawingml/2006/main" xmlns:p="http://schemas.openxmlformats.org/presentationml/2006/main" xmlns:r="http://schemas.openxmlformats.org/officeDocument/2006/relationships">
   <p:cSld>
     <p:spTree>
@@ -13435,7 +14809,7 @@
 </p:sld>
 </file>
 
-<file path=ppt/slides/slide23.xml><?xml version="1.0" encoding="utf-8"?>
+<file path=ppt/slides/slide27.xml><?xml version="1.0" encoding="utf-8"?>
 <p:sld xmlns:a="http://schemas.openxmlformats.org/drawingml/2006/main" xmlns:r="http://schemas.openxmlformats.org/officeDocument/2006/relationships" xmlns:mc="http://schemas.openxmlformats.org/markup-compatibility/2006" xmlns:mv="urn:schemas-microsoft-com:mac:vml" xmlns:p="http://schemas.openxmlformats.org/presentationml/2006/main" xmlns:c="http://schemas.openxmlformats.org/drawingml/2006/chart" xmlns:dgm="http://schemas.openxmlformats.org/drawingml/2006/diagram" xmlns:o="urn:schemas-microsoft-com:office:office" xmlns:v="urn:schemas-microsoft-com:vml" xmlns:pvml="urn:schemas-microsoft-com:office:powerpoint" xmlns:com="http://schemas.openxmlformats.org/drawingml/2006/compatibility" xmlns:p14="http://schemas.microsoft.com/office/powerpoint/2010/main" xmlns:p15="http://schemas.microsoft.com/office/powerpoint/2012/main" xmlns:ahyp="http://schemas.microsoft.com/office/drawing/2018/hyperlinkcolor">
   <p:cSld>
     <p:spTree>
@@ -13569,7 +14943,7 @@
 </p:sld>
 </file>
 
-<file path=ppt/slides/slide24.xml><?xml version="1.0" encoding="utf-8"?>
+<file path=ppt/slides/slide28.xml><?xml version="1.0" encoding="utf-8"?>
 <p:sld xmlns:a="http://schemas.openxmlformats.org/drawingml/2006/main" xmlns:r="http://schemas.openxmlformats.org/officeDocument/2006/relationships" xmlns:mc="http://schemas.openxmlformats.org/markup-compatibility/2006" xmlns:mv="urn:schemas-microsoft-com:mac:vml" xmlns:p="http://schemas.openxmlformats.org/presentationml/2006/main" xmlns:c="http://schemas.openxmlformats.org/drawingml/2006/chart" xmlns:dgm="http://schemas.openxmlformats.org/drawingml/2006/diagram" xmlns:o="urn:schemas-microsoft-com:office:office" xmlns:v="urn:schemas-microsoft-com:vml" xmlns:pvml="urn:schemas-microsoft-com:office:powerpoint" xmlns:com="http://schemas.openxmlformats.org/drawingml/2006/compatibility" xmlns:p14="http://schemas.microsoft.com/office/powerpoint/2010/main" xmlns:p15="http://schemas.microsoft.com/office/powerpoint/2012/main" xmlns:ahyp="http://schemas.microsoft.com/office/drawing/2018/hyperlinkcolor">
   <p:cSld>
     <p:spTree>
@@ -14452,7 +15826,7 @@
 </p:sld>
 </file>
 
-<file path=ppt/slides/slide25.xml><?xml version="1.0" encoding="utf-8"?>
+<file path=ppt/slides/slide29.xml><?xml version="1.0" encoding="utf-8"?>
 <p:sld xmlns:a="http://schemas.openxmlformats.org/drawingml/2006/main" xmlns:r="http://schemas.openxmlformats.org/officeDocument/2006/relationships" xmlns:mc="http://schemas.openxmlformats.org/markup-compatibility/2006" xmlns:mv="urn:schemas-microsoft-com:mac:vml" xmlns:p="http://schemas.openxmlformats.org/presentationml/2006/main" xmlns:c="http://schemas.openxmlformats.org/drawingml/2006/chart" xmlns:dgm="http://schemas.openxmlformats.org/drawingml/2006/diagram" xmlns:o="urn:schemas-microsoft-com:office:office" xmlns:v="urn:schemas-microsoft-com:vml" xmlns:pvml="urn:schemas-microsoft-com:office:powerpoint" xmlns:com="http://schemas.openxmlformats.org/drawingml/2006/compatibility" xmlns:p14="http://schemas.microsoft.com/office/powerpoint/2010/main" xmlns:p15="http://schemas.microsoft.com/office/powerpoint/2012/main" xmlns:ahyp="http://schemas.microsoft.com/office/drawing/2018/hyperlinkcolor">
   <p:cSld>
     <p:spTree>
@@ -15284,7 +16658,96 @@
 </p:sld>
 </file>
 
-<file path=ppt/slides/slide26.xml><?xml version="1.0" encoding="utf-8"?>
+<file path=ppt/slides/slide3.xml><?xml version="1.0" encoding="utf-8"?>
+<p:sld xmlns:a="http://schemas.openxmlformats.org/drawingml/2006/main" xmlns:r="http://schemas.openxmlformats.org/officeDocument/2006/relationships" xmlns:mc="http://schemas.openxmlformats.org/markup-compatibility/2006" xmlns:mv="urn:schemas-microsoft-com:mac:vml" xmlns:p="http://schemas.openxmlformats.org/presentationml/2006/main" xmlns:c="http://schemas.openxmlformats.org/drawingml/2006/chart" xmlns:dgm="http://schemas.openxmlformats.org/drawingml/2006/diagram" xmlns:o="urn:schemas-microsoft-com:office:office" xmlns:v="urn:schemas-microsoft-com:vml" xmlns:pvml="urn:schemas-microsoft-com:office:powerpoint" xmlns:com="http://schemas.openxmlformats.org/drawingml/2006/compatibility" xmlns:p14="http://schemas.microsoft.com/office/powerpoint/2010/main" xmlns:p15="http://schemas.microsoft.com/office/powerpoint/2012/main" xmlns:ahyp="http://schemas.microsoft.com/office/drawing/2018/hyperlinkcolor">
+  <p:cSld>
+    <p:spTree>
+      <p:nvGrpSpPr>
+        <p:cNvPr id="44" name="Shape 44"/>
+        <p:cNvGrpSpPr/>
+        <p:nvPr/>
+      </p:nvGrpSpPr>
+      <p:grpSpPr>
+        <a:xfrm>
+          <a:off x="0" y="0"/>
+          <a:ext cx="0" cy="0"/>
+          <a:chOff x="0" y="0"/>
+          <a:chExt cx="0" cy="0"/>
+        </a:xfrm>
+      </p:grpSpPr>
+      <p:sp>
+        <p:nvSpPr>
+          <p:cNvPr id="45" name="Google Shape;45;p10"/>
+          <p:cNvSpPr txBox="1"/>
+          <p:nvPr>
+            <p:ph type="title"/>
+          </p:nvPr>
+        </p:nvSpPr>
+        <p:spPr>
+          <a:xfrm>
+            <a:off x="311700" y="195615"/>
+            <a:ext cx="8520600" cy="572700"/>
+          </a:xfrm>
+          <a:prstGeom prst="rect">
+            <a:avLst/>
+          </a:prstGeom>
+        </p:spPr>
+        <p:txBody>
+          <a:bodyPr anchorCtr="0" anchor="t" bIns="91425" lIns="91425" spcFirstLastPara="1" rIns="91425" wrap="square" tIns="91425">
+            <a:normAutofit fontScale="90000"/>
+          </a:bodyPr>
+          <a:lstStyle/>
+          <a:p>
+            <a:pPr indent="0" lvl="0" marL="0" rtl="0" algn="l">
+              <a:spcBef>
+                <a:spcPts val="0"/>
+              </a:spcBef>
+              <a:spcAft>
+                <a:spcPts val="0"/>
+              </a:spcAft>
+              <a:buNone/>
+            </a:pPr>
+            <a:r>
+              <a:rPr lang="en"/>
+              <a:t>Today’s Goal</a:t>
+            </a:r>
+            <a:endParaRPr/>
+          </a:p>
+        </p:txBody>
+      </p:sp>
+      <p:pic>
+        <p:nvPicPr>
+          <p:cNvPr id="46" name="Picture 46" descr="pacman-play.png"/>
+          <p:cNvPicPr>
+            <a:picLocks noChangeAspect="1"/>
+          </p:cNvPicPr>
+          <p:nvPr/>
+        </p:nvPicPr>
+        <p:blipFill>
+          <a:blip r:embed="rId4"/>
+          <a:stretch>
+            <a:fillRect/>
+          </a:stretch>
+        </p:blipFill>
+        <p:spPr>
+          <a:xfrm>
+            <a:off x="3101255" y="1531275"/>
+            <a:ext cx="2941489" cy="3256648"/>
+          </a:xfrm>
+          <a:prstGeom prst="rect">
+            <a:avLst/>
+          </a:prstGeom>
+        </p:spPr>
+      </p:pic>
+    </p:spTree>
+  </p:cSld>
+  <p:clrMapOvr>
+    <a:masterClrMapping/>
+  </p:clrMapOvr>
+</p:sld>
+</file>
+
+<file path=ppt/slides/slide30.xml><?xml version="1.0" encoding="utf-8"?>
 <p:sld xmlns:a="http://schemas.openxmlformats.org/drawingml/2006/main" xmlns:p="http://schemas.openxmlformats.org/presentationml/2006/main" xmlns:r="http://schemas.openxmlformats.org/officeDocument/2006/relationships">
   <p:cSld>
     <p:spTree>
@@ -15457,7 +16920,7 @@
 </p:sld>
 </file>
 
-<file path=ppt/slides/slide27.xml><?xml version="1.0" encoding="utf-8"?>
+<file path=ppt/slides/slide31.xml><?xml version="1.0" encoding="utf-8"?>
 <p:sld xmlns:a="http://schemas.openxmlformats.org/drawingml/2006/main" xmlns:r="http://schemas.openxmlformats.org/officeDocument/2006/relationships" xmlns:mc="http://schemas.openxmlformats.org/markup-compatibility/2006" xmlns:mv="urn:schemas-microsoft-com:mac:vml" xmlns:p="http://schemas.openxmlformats.org/presentationml/2006/main" xmlns:c="http://schemas.openxmlformats.org/drawingml/2006/chart" xmlns:dgm="http://schemas.openxmlformats.org/drawingml/2006/diagram" xmlns:o="urn:schemas-microsoft-com:office:office" xmlns:v="urn:schemas-microsoft-com:vml" xmlns:pvml="urn:schemas-microsoft-com:office:powerpoint" xmlns:com="http://schemas.openxmlformats.org/drawingml/2006/compatibility" xmlns:p14="http://schemas.microsoft.com/office/powerpoint/2010/main" xmlns:p15="http://schemas.microsoft.com/office/powerpoint/2012/main" xmlns:ahyp="http://schemas.microsoft.com/office/drawing/2018/hyperlinkcolor">
   <p:cSld>
     <p:spTree>
@@ -16306,7 +17769,7 @@
 </p:sld>
 </file>
 
-<file path=ppt/slides/slide28.xml><?xml version="1.0" encoding="utf-8"?>
+<file path=ppt/slides/slide32.xml><?xml version="1.0" encoding="utf-8"?>
 <p:sld xmlns:a="http://schemas.openxmlformats.org/drawingml/2006/main" xmlns:r="http://schemas.openxmlformats.org/officeDocument/2006/relationships" xmlns:mc="http://schemas.openxmlformats.org/markup-compatibility/2006" xmlns:mv="urn:schemas-microsoft-com:mac:vml" xmlns:p="http://schemas.openxmlformats.org/presentationml/2006/main" xmlns:c="http://schemas.openxmlformats.org/drawingml/2006/chart" xmlns:dgm="http://schemas.openxmlformats.org/drawingml/2006/diagram" xmlns:o="urn:schemas-microsoft-com:office:office" xmlns:v="urn:schemas-microsoft-com:vml" xmlns:pvml="urn:schemas-microsoft-com:office:powerpoint" xmlns:com="http://schemas.openxmlformats.org/drawingml/2006/compatibility" xmlns:p14="http://schemas.microsoft.com/office/powerpoint/2010/main" xmlns:p15="http://schemas.microsoft.com/office/powerpoint/2012/main" xmlns:ahyp="http://schemas.microsoft.com/office/drawing/2018/hyperlinkcolor">
   <p:cSld>
     <p:spTree>
@@ -16472,95 +17935,6 @@
           </a:p>
         </p:txBody>
       </p:sp>
-    </p:spTree>
-  </p:cSld>
-  <p:clrMapOvr>
-    <a:masterClrMapping/>
-  </p:clrMapOvr>
-</p:sld>
-</file>
-
-<file path=ppt/slides/slide3.xml><?xml version="1.0" encoding="utf-8"?>
-<p:sld xmlns:a="http://schemas.openxmlformats.org/drawingml/2006/main" xmlns:r="http://schemas.openxmlformats.org/officeDocument/2006/relationships" xmlns:mc="http://schemas.openxmlformats.org/markup-compatibility/2006" xmlns:mv="urn:schemas-microsoft-com:mac:vml" xmlns:p="http://schemas.openxmlformats.org/presentationml/2006/main" xmlns:c="http://schemas.openxmlformats.org/drawingml/2006/chart" xmlns:dgm="http://schemas.openxmlformats.org/drawingml/2006/diagram" xmlns:o="urn:schemas-microsoft-com:office:office" xmlns:v="urn:schemas-microsoft-com:vml" xmlns:pvml="urn:schemas-microsoft-com:office:powerpoint" xmlns:com="http://schemas.openxmlformats.org/drawingml/2006/compatibility" xmlns:p14="http://schemas.microsoft.com/office/powerpoint/2010/main" xmlns:p15="http://schemas.microsoft.com/office/powerpoint/2012/main" xmlns:ahyp="http://schemas.microsoft.com/office/drawing/2018/hyperlinkcolor">
-  <p:cSld>
-    <p:spTree>
-      <p:nvGrpSpPr>
-        <p:cNvPr id="44" name="Shape 44"/>
-        <p:cNvGrpSpPr/>
-        <p:nvPr/>
-      </p:nvGrpSpPr>
-      <p:grpSpPr>
-        <a:xfrm>
-          <a:off x="0" y="0"/>
-          <a:ext cx="0" cy="0"/>
-          <a:chOff x="0" y="0"/>
-          <a:chExt cx="0" cy="0"/>
-        </a:xfrm>
-      </p:grpSpPr>
-      <p:sp>
-        <p:nvSpPr>
-          <p:cNvPr id="45" name="Google Shape;45;p10"/>
-          <p:cNvSpPr txBox="1"/>
-          <p:nvPr>
-            <p:ph type="title"/>
-          </p:nvPr>
-        </p:nvSpPr>
-        <p:spPr>
-          <a:xfrm>
-            <a:off x="311700" y="195615"/>
-            <a:ext cx="8520600" cy="572700"/>
-          </a:xfrm>
-          <a:prstGeom prst="rect">
-            <a:avLst/>
-          </a:prstGeom>
-        </p:spPr>
-        <p:txBody>
-          <a:bodyPr anchorCtr="0" anchor="t" bIns="91425" lIns="91425" spcFirstLastPara="1" rIns="91425" wrap="square" tIns="91425">
-            <a:normAutofit fontScale="90000"/>
-          </a:bodyPr>
-          <a:lstStyle/>
-          <a:p>
-            <a:pPr indent="0" lvl="0" marL="0" rtl="0" algn="l">
-              <a:spcBef>
-                <a:spcPts val="0"/>
-              </a:spcBef>
-              <a:spcAft>
-                <a:spcPts val="0"/>
-              </a:spcAft>
-              <a:buNone/>
-            </a:pPr>
-            <a:r>
-              <a:rPr lang="en"/>
-              <a:t>Today’s Goal</a:t>
-            </a:r>
-            <a:endParaRPr/>
-          </a:p>
-        </p:txBody>
-      </p:sp>
-      <p:pic>
-        <p:nvPicPr>
-          <p:cNvPr id="46" name="Picture 46" descr="pacman-play.png"/>
-          <p:cNvPicPr>
-            <a:picLocks noChangeAspect="1"/>
-          </p:cNvPicPr>
-          <p:nvPr/>
-        </p:nvPicPr>
-        <p:blipFill>
-          <a:blip r:embed="rId4"/>
-          <a:stretch>
-            <a:fillRect/>
-          </a:stretch>
-        </p:blipFill>
-        <p:spPr>
-          <a:xfrm>
-            <a:off x="3101255" y="1531275"/>
-            <a:ext cx="2941489" cy="3256648"/>
-          </a:xfrm>
-          <a:prstGeom prst="rect">
-            <a:avLst/>
-          </a:prstGeom>
-        </p:spPr>
-      </p:pic>
     </p:spTree>
   </p:cSld>
   <p:clrMapOvr>
@@ -18860,25 +20234,17 @@
       <p:grpSpPr/>
       <p:sp>
         <p:nvSpPr>
-          <p:cNvPr id="293" name="Google Shape;293;p45"/>
-          <p:cNvSpPr txBox="1"/>
+          <p:cNvPr id="2" name="Title 1"/>
+          <p:cNvSpPr>
+            <a:spLocks noGrp="1"/>
+          </p:cNvSpPr>
           <p:nvPr>
             <p:ph type="title"/>
           </p:nvPr>
         </p:nvSpPr>
-        <p:spPr>
-          <a:xfrm>
-            <a:off x="311700" y="195615"/>
-            <a:ext cx="8520600" cy="572700"/>
-          </a:xfrm>
-          <a:prstGeom prst="rect">
-            <a:avLst/>
-          </a:prstGeom>
-        </p:spPr>
+        <p:spPr/>
         <p:txBody>
-          <a:bodyPr anchorCtr="0" anchor="t" bIns="91425" lIns="91425" spcFirstLastPara="1" rIns="91425" wrap="square" tIns="91425">
-            <a:normAutofit fontScale="90000"/>
-          </a:bodyPr>
+          <a:bodyPr/>
           <a:lstStyle/>
           <a:p>
             <a:pPr indent="0" lvl="0" marL="0" rtl="0" algn="l">
@@ -18891,42 +20257,31 @@
               <a:buNone/>
             </a:pPr>
             <a:r>
-              <a:rPr lang="en">
-                <a:solidFill>
-                  <a:schemeClr val="accent5"/>
-                </a:solidFill>
-              </a:rPr>
-              <a:t>Five Ghost Modes</a:t>
-            </a:r>
-            <a:endParaRPr>
-              <a:solidFill>
-                <a:schemeClr val="accent5"/>
-              </a:solidFill>
-            </a:endParaRPr>
+              <a:rPr lang="en"/>
+              <a:t>Try It: Change the Maze</a:t>
+            </a:r>
+            <a:endParaRPr/>
           </a:p>
         </p:txBody>
       </p:sp>
       <p:sp>
         <p:nvSpPr>
-          <p:cNvPr id="294" name="Google Shape;294;p45"/>
-          <p:cNvSpPr txBox="1"/>
+          <p:cNvPr id="3" name="Text Placeholder 2"/>
+          <p:cNvSpPr>
+            <a:spLocks noGrp="1"/>
+          </p:cNvSpPr>
           <p:nvPr>
-            <p:ph idx="1" type="body"/>
+            <p:ph type="body" idx="1"/>
           </p:nvPr>
         </p:nvSpPr>
         <p:spPr>
           <a:xfrm>
             <a:off x="311700" y="885950"/>
-            <a:ext cx="8520600" cy="521208"/>
+            <a:ext cx="8520600" cy="1289304"/>
           </a:xfrm>
-          <a:prstGeom prst="rect">
-            <a:avLst/>
-          </a:prstGeom>
         </p:spPr>
         <p:txBody>
-          <a:bodyPr anchorCtr="0" anchor="t" bIns="91425" lIns="91425" spcFirstLastPara="1" rIns="91425" wrap="square" tIns="91425">
-            <a:normAutofit/>
-          </a:bodyPr>
+          <a:bodyPr/>
           <a:lstStyle/>
           <a:p>
             <a:pPr indent="-330200" lvl="0" marL="457200" rtl="0" algn="l">
@@ -18941,652 +20296,43 @@
             </a:pPr>
             <a:r>
               <a:rPr lang="en"/>
-              <a:t>Every ghost is always in one of five modes. The mode decides where it heads.</a:t>
+              <a:t>In maze.txt:</a:t>
             </a:r>
             <a:endParaRPr/>
           </a:p>
-        </p:txBody>
-      </p:sp>
-      <p:sp>
-        <p:nvSpPr>
-          <p:cNvPr id="295" name="Rounded Rectangle 294"/>
-          <p:cNvSpPr/>
-          <p:nvPr/>
-        </p:nvSpPr>
-        <p:spPr>
-          <a:xfrm>
-            <a:off x="365760" y="1828800"/>
-            <a:ext cx="1463040" cy="640080"/>
-          </a:xfrm>
-          <a:prstGeom prst="roundRect">
-            <a:avLst>
-              <a:gd name="adj" fmla="val 12000"/>
-            </a:avLst>
-          </a:prstGeom>
-          <a:solidFill>
-            <a:srgbClr val="2E3338"/>
-          </a:solidFill>
-          <a:ln>
-            <a:noFill/>
-          </a:ln>
-          <a:effectLst/>
-        </p:spPr>
-        <p:style>
-          <a:lnRef idx="1">
-            <a:schemeClr val="accent1"/>
-          </a:lnRef>
-          <a:fillRef idx="3">
-            <a:schemeClr val="accent1"/>
-          </a:fillRef>
-          <a:effectRef idx="2">
-            <a:schemeClr val="accent1"/>
-          </a:effectRef>
-          <a:fontRef idx="minor">
-            <a:schemeClr val="lt1"/>
-          </a:fontRef>
-        </p:style>
-        <p:txBody>
-          <a:bodyPr rtlCol="0" anchor="ctr" wrap="square" lIns="73152" rIns="73152"/>
-          <a:lstStyle/>
-          <a:p>
-            <a:pPr algn="ctr"/>
-            <a:r>
-              <a:rPr sz="1400" b="1">
-                <a:solidFill>
-                  <a:srgbClr val="DEE2E6"/>
-                </a:solidFill>
-              </a:rPr>
-              <a:t>In the house</a:t>
-            </a:r>
-          </a:p>
-          <a:p>
-            <a:pPr algn="ctr"/>
-            <a:r>
-              <a:rPr sz="1200" b="0">
-                <a:solidFill>
-                  <a:srgbClr val="9AA3AB"/>
-                </a:solidFill>
-              </a:rPr>
-              <a:t>waits</a:t>
-            </a:r>
-          </a:p>
-        </p:txBody>
-      </p:sp>
-      <p:sp>
-        <p:nvSpPr>
-          <p:cNvPr id="296" name="Rounded Rectangle 295"/>
-          <p:cNvSpPr/>
-          <p:nvPr/>
-        </p:nvSpPr>
-        <p:spPr>
-          <a:xfrm>
-            <a:off x="2468880" y="1325880"/>
-            <a:ext cx="1463040" cy="640080"/>
-          </a:xfrm>
-          <a:prstGeom prst="roundRect">
-            <a:avLst>
-              <a:gd name="adj" fmla="val 12000"/>
-            </a:avLst>
-          </a:prstGeom>
-          <a:solidFill>
-            <a:srgbClr val="2E3338"/>
-          </a:solidFill>
-          <a:ln>
-            <a:noFill/>
-          </a:ln>
-          <a:effectLst/>
-        </p:spPr>
-        <p:style>
-          <a:lnRef idx="1">
-            <a:schemeClr val="accent1"/>
-          </a:lnRef>
-          <a:fillRef idx="3">
-            <a:schemeClr val="accent1"/>
-          </a:fillRef>
-          <a:effectRef idx="2">
-            <a:schemeClr val="accent1"/>
-          </a:effectRef>
-          <a:fontRef idx="minor">
-            <a:schemeClr val="lt1"/>
-          </a:fontRef>
-        </p:style>
-        <p:txBody>
-          <a:bodyPr rtlCol="0" anchor="ctr" wrap="square" lIns="73152" rIns="73152"/>
-          <a:lstStyle/>
-          <a:p>
-            <a:pPr algn="ctr"/>
-            <a:r>
-              <a:rPr sz="1400" b="1">
-                <a:solidFill>
-                  <a:srgbClr val="DEE2E6"/>
-                </a:solidFill>
-              </a:rPr>
-              <a:t>Scatter</a:t>
-            </a:r>
-          </a:p>
-          <a:p>
-            <a:pPr algn="ctr"/>
-            <a:r>
-              <a:rPr sz="1200" b="0">
-                <a:solidFill>
-                  <a:srgbClr val="9AA3AB"/>
-                </a:solidFill>
-              </a:rPr>
-              <a:t>its corner</a:t>
-            </a:r>
-          </a:p>
-        </p:txBody>
-      </p:sp>
-      <p:sp>
-        <p:nvSpPr>
-          <p:cNvPr id="297" name="Rounded Rectangle 296"/>
-          <p:cNvSpPr/>
-          <p:nvPr/>
-        </p:nvSpPr>
-        <p:spPr>
-          <a:xfrm>
-            <a:off x="2468880" y="2331720"/>
-            <a:ext cx="1463040" cy="640080"/>
-          </a:xfrm>
-          <a:prstGeom prst="roundRect">
-            <a:avLst>
-              <a:gd name="adj" fmla="val 12000"/>
-            </a:avLst>
-          </a:prstGeom>
-          <a:solidFill>
-            <a:srgbClr val="2E3338"/>
-          </a:solidFill>
-          <a:ln w="25400">
-            <a:solidFill>
-              <a:srgbClr val="D45D35"/>
-            </a:solidFill>
-          </a:ln>
-          <a:effectLst/>
-        </p:spPr>
-        <p:style>
-          <a:lnRef idx="1">
-            <a:schemeClr val="accent1"/>
-          </a:lnRef>
-          <a:fillRef idx="3">
-            <a:schemeClr val="accent1"/>
-          </a:fillRef>
-          <a:effectRef idx="2">
-            <a:schemeClr val="accent1"/>
-          </a:effectRef>
-          <a:fontRef idx="minor">
-            <a:schemeClr val="lt1"/>
-          </a:fontRef>
-        </p:style>
-        <p:txBody>
-          <a:bodyPr rtlCol="0" anchor="ctr" wrap="square" lIns="73152" rIns="73152"/>
-          <a:lstStyle/>
-          <a:p>
-            <a:pPr algn="ctr"/>
-            <a:r>
-              <a:rPr sz="1400" b="1">
-                <a:solidFill>
-                  <a:srgbClr val="DEE2E6"/>
-                </a:solidFill>
-              </a:rPr>
-              <a:t>Chase</a:t>
-            </a:r>
-          </a:p>
-          <a:p>
-            <a:pPr algn="ctr"/>
-            <a:r>
-              <a:rPr sz="1200" b="0">
-                <a:solidFill>
-                  <a:srgbClr val="9AA3AB"/>
-                </a:solidFill>
-              </a:rPr>
-              <a:t>Pac-Man</a:t>
-            </a:r>
-          </a:p>
-        </p:txBody>
-      </p:sp>
-      <p:sp>
-        <p:nvSpPr>
-          <p:cNvPr id="298" name="Rounded Rectangle 297"/>
-          <p:cNvSpPr/>
-          <p:nvPr/>
-        </p:nvSpPr>
-        <p:spPr>
-          <a:xfrm>
-            <a:off x="4846320" y="1828800"/>
-            <a:ext cx="1645920" cy="640080"/>
-          </a:xfrm>
-          <a:prstGeom prst="roundRect">
-            <a:avLst>
-              <a:gd name="adj" fmla="val 12000"/>
-            </a:avLst>
-          </a:prstGeom>
-          <a:solidFill>
-            <a:srgbClr val="2E3338"/>
-          </a:solidFill>
-          <a:ln>
-            <a:noFill/>
-          </a:ln>
-          <a:effectLst/>
-        </p:spPr>
-        <p:style>
-          <a:lnRef idx="1">
-            <a:schemeClr val="accent1"/>
-          </a:lnRef>
-          <a:fillRef idx="3">
-            <a:schemeClr val="accent1"/>
-          </a:fillRef>
-          <a:effectRef idx="2">
-            <a:schemeClr val="accent1"/>
-          </a:effectRef>
-          <a:fontRef idx="minor">
-            <a:schemeClr val="lt1"/>
-          </a:fontRef>
-        </p:style>
-        <p:txBody>
-          <a:bodyPr rtlCol="0" anchor="ctr" wrap="square" lIns="73152" rIns="73152"/>
-          <a:lstStyle/>
-          <a:p>
-            <a:pPr algn="ctr"/>
-            <a:r>
-              <a:rPr sz="1400" b="1">
-                <a:solidFill>
-                  <a:srgbClr val="DEE2E6"/>
-                </a:solidFill>
-              </a:rPr>
-              <a:t>Frightened</a:t>
-            </a:r>
-          </a:p>
-          <a:p>
-            <a:pPr algn="ctr"/>
-            <a:r>
-              <a:rPr sz="1200" b="0">
-                <a:solidFill>
-                  <a:srgbClr val="9AA3AB"/>
-                </a:solidFill>
-              </a:rPr>
-              <a:t>blue, random</a:t>
-            </a:r>
-          </a:p>
-        </p:txBody>
-      </p:sp>
-      <p:sp>
-        <p:nvSpPr>
-          <p:cNvPr id="299" name="Rounded Rectangle 298"/>
-          <p:cNvSpPr/>
-          <p:nvPr/>
-        </p:nvSpPr>
-        <p:spPr>
-          <a:xfrm>
-            <a:off x="7132320" y="1828800"/>
-            <a:ext cx="1463040" cy="640080"/>
-          </a:xfrm>
-          <a:prstGeom prst="roundRect">
-            <a:avLst>
-              <a:gd name="adj" fmla="val 12000"/>
-            </a:avLst>
-          </a:prstGeom>
-          <a:solidFill>
-            <a:srgbClr val="2E3338"/>
-          </a:solidFill>
-          <a:ln>
-            <a:noFill/>
-          </a:ln>
-          <a:effectLst/>
-        </p:spPr>
-        <p:style>
-          <a:lnRef idx="1">
-            <a:schemeClr val="accent1"/>
-          </a:lnRef>
-          <a:fillRef idx="3">
-            <a:schemeClr val="accent1"/>
-          </a:fillRef>
-          <a:effectRef idx="2">
-            <a:schemeClr val="accent1"/>
-          </a:effectRef>
-          <a:fontRef idx="minor">
-            <a:schemeClr val="lt1"/>
-          </a:fontRef>
-        </p:style>
-        <p:txBody>
-          <a:bodyPr rtlCol="0" anchor="ctr" wrap="square" lIns="73152" rIns="73152"/>
-          <a:lstStyle/>
-          <a:p>
-            <a:pPr algn="ctr"/>
-            <a:r>
-              <a:rPr sz="1400" b="1">
-                <a:solidFill>
-                  <a:srgbClr val="DEE2E6"/>
-                </a:solidFill>
-              </a:rPr>
-              <a:t>Eaten</a:t>
-            </a:r>
-          </a:p>
-          <a:p>
-            <a:pPr algn="ctr"/>
-            <a:r>
-              <a:rPr sz="1200" b="0">
-                <a:solidFill>
-                  <a:srgbClr val="9AA3AB"/>
-                </a:solidFill>
-              </a:rPr>
-              <a:t>eyes go home</a:t>
-            </a:r>
-          </a:p>
-        </p:txBody>
-      </p:sp>
-      <p:cxnSp>
-        <p:nvCxnSpPr>
-          <p:cNvPr id="300" name="Connector 299"/>
-          <p:cNvCxnSpPr/>
-          <p:nvPr/>
-        </p:nvCxnSpPr>
-        <p:spPr>
-          <a:xfrm flipV="1">
-            <a:off x="1847088" y="1691640"/>
-            <a:ext cx="603504" cy="320040"/>
-          </a:xfrm>
-          <a:prstGeom prst="line">
-            <a:avLst/>
-          </a:prstGeom>
-          <a:ln w="25400">
-            <a:solidFill>
-              <a:srgbClr val="9AA3AB"/>
-            </a:solidFill>
-            <a:tailEnd type="triangle"/>
-          </a:ln>
-        </p:spPr>
-        <p:style>
-          <a:lnRef idx="2">
-            <a:schemeClr val="accent1"/>
-          </a:lnRef>
-          <a:fillRef idx="0">
-            <a:schemeClr val="accent1"/>
-          </a:fillRef>
-          <a:effectRef idx="1">
-            <a:schemeClr val="accent1"/>
-          </a:effectRef>
-          <a:fontRef idx="minor">
-            <a:schemeClr val="tx1"/>
-          </a:fontRef>
-        </p:style>
-      </p:cxnSp>
-      <p:cxnSp>
-        <p:nvCxnSpPr>
-          <p:cNvPr id="301" name="Connector 300"/>
-          <p:cNvCxnSpPr/>
-          <p:nvPr/>
-        </p:nvCxnSpPr>
-        <p:spPr>
-          <a:xfrm>
-            <a:off x="3108960" y="1984248"/>
-            <a:ext cx="0" cy="329184"/>
-          </a:xfrm>
-          <a:prstGeom prst="line">
-            <a:avLst/>
-          </a:prstGeom>
-          <a:ln w="25400">
-            <a:solidFill>
-              <a:srgbClr val="9AA3AB"/>
-            </a:solidFill>
-            <a:tailEnd type="triangle"/>
-          </a:ln>
-        </p:spPr>
-        <p:style>
-          <a:lnRef idx="2">
-            <a:schemeClr val="accent1"/>
-          </a:lnRef>
-          <a:fillRef idx="0">
-            <a:schemeClr val="accent1"/>
-          </a:fillRef>
-          <a:effectRef idx="1">
-            <a:schemeClr val="accent1"/>
-          </a:effectRef>
-          <a:fontRef idx="minor">
-            <a:schemeClr val="tx1"/>
-          </a:fontRef>
-        </p:style>
-      </p:cxnSp>
-      <p:cxnSp>
-        <p:nvCxnSpPr>
-          <p:cNvPr id="302" name="Connector 301"/>
-          <p:cNvCxnSpPr/>
-          <p:nvPr/>
-        </p:nvCxnSpPr>
-        <p:spPr>
-          <a:xfrm flipV="1">
-            <a:off x="3291840" y="1984248"/>
-            <a:ext cx="0" cy="329184"/>
-          </a:xfrm>
-          <a:prstGeom prst="line">
-            <a:avLst/>
-          </a:prstGeom>
-          <a:ln w="25400">
-            <a:solidFill>
-              <a:srgbClr val="9AA3AB"/>
-            </a:solidFill>
-            <a:tailEnd type="triangle"/>
-          </a:ln>
-        </p:spPr>
-        <p:style>
-          <a:lnRef idx="2">
-            <a:schemeClr val="accent1"/>
-          </a:lnRef>
-          <a:fillRef idx="0">
-            <a:schemeClr val="accent1"/>
-          </a:fillRef>
-          <a:effectRef idx="1">
-            <a:schemeClr val="accent1"/>
-          </a:effectRef>
-          <a:fontRef idx="minor">
-            <a:schemeClr val="tx1"/>
-          </a:fontRef>
-        </p:style>
-      </p:cxnSp>
-      <p:sp>
-        <p:nvSpPr>
-          <p:cNvPr id="303" name="TextBox 302"/>
-          <p:cNvSpPr txBox="1"/>
-          <p:nvPr/>
-        </p:nvSpPr>
-        <p:spPr>
-          <a:xfrm>
-            <a:off x="3429000" y="2011680"/>
-            <a:ext cx="1097280" cy="274320"/>
-          </a:xfrm>
-          <a:prstGeom prst="rect">
-            <a:avLst/>
-          </a:prstGeom>
-          <a:noFill/>
-        </p:spPr>
-        <p:txBody>
-          <a:bodyPr wrap="square">
-            <a:spAutoFit/>
-          </a:bodyPr>
-          <a:lstStyle/>
-          <a:p>
-            <a:pPr algn="l"/>
-            <a:r>
-              <a:rPr sz="1100" b="0" i="0">
-                <a:solidFill>
-                  <a:srgbClr val="9AA3AB"/>
-                </a:solidFill>
-              </a:rPr>
-              <a:t>schedule</a:t>
-            </a:r>
-          </a:p>
-        </p:txBody>
-      </p:sp>
-      <p:cxnSp>
-        <p:nvCxnSpPr>
-          <p:cNvPr id="304" name="Connector 303"/>
-          <p:cNvCxnSpPr/>
-          <p:nvPr/>
-        </p:nvCxnSpPr>
-        <p:spPr>
-          <a:xfrm flipV="1">
-            <a:off x="3950208" y="2331720"/>
-            <a:ext cx="877824" cy="320040"/>
-          </a:xfrm>
-          <a:prstGeom prst="line">
-            <a:avLst/>
-          </a:prstGeom>
-          <a:ln w="25400">
-            <a:solidFill>
-              <a:srgbClr val="9AA3AB"/>
-            </a:solidFill>
-            <a:tailEnd type="triangle"/>
-          </a:ln>
-        </p:spPr>
-        <p:style>
-          <a:lnRef idx="2">
-            <a:schemeClr val="accent1"/>
-          </a:lnRef>
-          <a:fillRef idx="0">
-            <a:schemeClr val="accent1"/>
-          </a:fillRef>
-          <a:effectRef idx="1">
-            <a:schemeClr val="accent1"/>
-          </a:effectRef>
-          <a:fontRef idx="minor">
-            <a:schemeClr val="tx1"/>
-          </a:fontRef>
-        </p:style>
-      </p:cxnSp>
-      <p:sp>
-        <p:nvSpPr>
-          <p:cNvPr id="305" name="TextBox 304"/>
-          <p:cNvSpPr txBox="1"/>
-          <p:nvPr/>
-        </p:nvSpPr>
-        <p:spPr>
-          <a:xfrm>
-            <a:off x="3977639" y="2560320"/>
-            <a:ext cx="1097280" cy="274320"/>
-          </a:xfrm>
-          <a:prstGeom prst="rect">
-            <a:avLst/>
-          </a:prstGeom>
-          <a:noFill/>
-        </p:spPr>
-        <p:txBody>
-          <a:bodyPr wrap="square">
-            <a:spAutoFit/>
-          </a:bodyPr>
-          <a:lstStyle/>
-          <a:p>
-            <a:pPr algn="l"/>
-            <a:r>
-              <a:rPr sz="1100" b="0" i="0">
-                <a:solidFill>
-                  <a:srgbClr val="9AA3AB"/>
-                </a:solidFill>
-              </a:rPr>
-              <a:t>power pellet</a:t>
-            </a:r>
-          </a:p>
-        </p:txBody>
-      </p:sp>
-      <p:cxnSp>
-        <p:nvCxnSpPr>
-          <p:cNvPr id="306" name="Connector 305"/>
-          <p:cNvCxnSpPr/>
-          <p:nvPr/>
-        </p:nvCxnSpPr>
-        <p:spPr>
-          <a:xfrm>
-            <a:off x="6510528" y="2148840"/>
-            <a:ext cx="603504" cy="0"/>
-          </a:xfrm>
-          <a:prstGeom prst="line">
-            <a:avLst/>
-          </a:prstGeom>
-          <a:ln w="25400">
-            <a:solidFill>
-              <a:srgbClr val="9AA3AB"/>
-            </a:solidFill>
-            <a:tailEnd type="triangle"/>
-          </a:ln>
-        </p:spPr>
-        <p:style>
-          <a:lnRef idx="2">
-            <a:schemeClr val="accent1"/>
-          </a:lnRef>
-          <a:fillRef idx="0">
-            <a:schemeClr val="accent1"/>
-          </a:fillRef>
-          <a:effectRef idx="1">
-            <a:schemeClr val="accent1"/>
-          </a:effectRef>
-          <a:fontRef idx="minor">
-            <a:schemeClr val="tx1"/>
-          </a:fontRef>
-        </p:style>
-      </p:cxnSp>
-      <p:sp>
-        <p:nvSpPr>
-          <p:cNvPr id="307" name="TextBox 306"/>
-          <p:cNvSpPr txBox="1"/>
-          <p:nvPr/>
-        </p:nvSpPr>
-        <p:spPr>
-          <a:xfrm>
-            <a:off x="6327648" y="1856232"/>
-            <a:ext cx="969264" cy="274320"/>
-          </a:xfrm>
-          <a:prstGeom prst="rect">
-            <a:avLst/>
-          </a:prstGeom>
-          <a:noFill/>
-        </p:spPr>
-        <p:txBody>
-          <a:bodyPr wrap="square">
-            <a:spAutoFit/>
-          </a:bodyPr>
-          <a:lstStyle/>
-          <a:p>
-            <a:pPr algn="ctr"/>
-            <a:r>
-              <a:rPr sz="1100" b="0" i="0">
-                <a:solidFill>
-                  <a:srgbClr val="9AA3AB"/>
-                </a:solidFill>
-              </a:rPr>
-              <a:t>touched</a:t>
-            </a:r>
-          </a:p>
-        </p:txBody>
-      </p:sp>
-      <p:sp>
-        <p:nvSpPr>
-          <p:cNvPr id="308" name="TextBox 307"/>
-          <p:cNvSpPr txBox="1"/>
-          <p:nvPr/>
-        </p:nvSpPr>
-        <p:spPr>
-          <a:xfrm>
-            <a:off x="365760" y="3200400"/>
-            <a:ext cx="8229600" cy="548640"/>
-          </a:xfrm>
-          <a:prstGeom prst="rect">
-            <a:avLst/>
-          </a:prstGeom>
-          <a:noFill/>
-        </p:spPr>
-        <p:txBody>
-          <a:bodyPr wrap="square">
-            <a:spAutoFit/>
-          </a:bodyPr>
-          <a:lstStyle/>
-          <a:p>
-            <a:pPr algn="ctr"/>
-            <a:r>
-              <a:rPr sz="1500" b="1" i="0">
-                <a:solidFill>
-                  <a:srgbClr val="DEE2E6"/>
-                </a:solidFill>
-              </a:rPr>
-              <a:t>At each tile centre: never turn back, and take the direction closest to a target tile.</a:t>
-            </a:r>
+          <a:p>
+            <a:pPr indent="-330200" lvl="0" marL="457200" rtl="0" algn="l">
+              <a:spcBef>
+                <a:spcPts val="0"/>
+              </a:spcBef>
+              <a:spcAft>
+                <a:spcPts val="0"/>
+              </a:spcAft>
+              <a:buSzPts val="1600"/>
+              <a:buChar char="●"/>
+            </a:pPr>
+            <a:r>
+              <a:rPr lang="en"/>
+              <a:t>Open a new tunnel, or move Pac-Man’s start</a:t>
+            </a:r>
+            <a:endParaRPr/>
+          </a:p>
+          <a:p>
+            <a:pPr indent="-330200" lvl="0" marL="457200" rtl="0" algn="l">
+              <a:spcBef>
+                <a:spcPts val="0"/>
+              </a:spcBef>
+              <a:spcAft>
+                <a:spcPts val="0"/>
+              </a:spcAft>
+              <a:buSzPts val="1600"/>
+              <a:buChar char="●"/>
+            </a:pPr>
+            <a:r>
+              <a:rPr lang="en"/>
+              <a:t>Then press a direction just before a corner</a:t>
+            </a:r>
+            <a:endParaRPr/>
           </a:p>
         </p:txBody>
       </p:sp>

--- a/slides/05 Pac-Man.pptx
+++ b/slides/05 Pac-Man.pptx
@@ -2589,7 +2589,7 @@
           <a:lstStyle/>
           <a:p>
             <a:r>
-              <a:t>Start from Pacman4. For the new mode, ask them to compare the classes they changed with Pacman1’s enum. Test first for the new ghost.</a:t>
+              <a:t>Start from Pacman4. The new mode is the Frozen mode from the enum task, now as a state: ask them to compare the classes they changed with the seven switches. Test first for the new ghost.</a:t>
             </a:r>
           </a:p>
           <a:p>
@@ -15060,7 +15060,7 @@
             </a:pPr>
             <a:r>
               <a:rPr lang="en"/>
-              <a:t>A new mode: a short pause when a ghost is eaten</a:t>
+              <a:t>The frozen mode, for real: a FrozenState before EatenState</a:t>
             </a:r>
             <a:endParaRPr/>
           </a:p>
@@ -15077,7 +15077,7 @@
             </a:pPr>
             <a:r>
               <a:rPr lang="en"/>
-              <a:t>Which classes did you change? Compare with Pacman1’s enum</a:t>
+              <a:t>Which classes did you change? Compare with the seven switches</a:t>
             </a:r>
             <a:endParaRPr/>
           </a:p>

--- a/slides/05 Pac-Man.pptx
+++ b/slides/05 Pac-Man.pptx
@@ -16717,14 +16717,14 @@
       </p:sp>
       <p:pic>
         <p:nvPicPr>
-          <p:cNvPr id="46" name="Picture 46" descr="pacman-play.png"/>
+          <p:cNvPr id="46" name="Picture 46" descr="gif-pacman.gif"/>
           <p:cNvPicPr>
             <a:picLocks noChangeAspect="1"/>
           </p:cNvPicPr>
           <p:nvPr/>
         </p:nvPicPr>
         <p:blipFill>
-          <a:blip r:embed="rId4"/>
+          <a:blip r:embed="rId3"/>
           <a:stretch>
             <a:fillRect/>
           </a:stretch>
@@ -16732,7 +16732,7 @@
         <p:spPr>
           <a:xfrm>
             <a:off x="3101255" y="1531275"/>
-            <a:ext cx="2941489" cy="3256648"/>
+            <a:ext cx="2941488" cy="3256648"/>
           </a:xfrm>
           <a:prstGeom prst="rect">
             <a:avLst/>

--- a/slides/05 Pac-Man.pptx
+++ b/slides/05 Pac-Man.pptx
@@ -39,7 +39,6 @@
     <p:sldId id="293" r:id="rId52"/>
     <p:sldId id="314" r:id="rId41"/>
     <p:sldId id="294" r:id="rId53"/>
-    <p:sldId id="296" r:id="rId55"/>
   </p:sldIdLst>
   <p:sldSz cy="5143500" cx="9144000"/>
   <p:notesSz cx="6858000" cy="9144000"/>
@@ -1991,64 +1990,6 @@
           <a:p>
             <a:r>
               <a:t>Demo: run Pacman4 for a full life, then run dotnet test in 05-pacman and open TargetingTests.cs.</a:t>
-            </a:r>
-          </a:p>
-        </p:txBody>
-      </p:sp>
-    </p:spTree>
-  </p:cSld>
-  <p:clrMapOvr>
-    <a:masterClrMapping/>
-  </p:clrMapOvr>
-</p:notes>
-</file>
-
-<file path=ppt/notesSlides/notesSlide26.xml><?xml version="1.0" encoding="utf-8"?>
-<p:notes xmlns:a="http://schemas.openxmlformats.org/drawingml/2006/main" xmlns:p="http://schemas.openxmlformats.org/presentationml/2006/main" xmlns:r="http://schemas.openxmlformats.org/officeDocument/2006/relationships">
-  <p:cSld>
-    <p:spTree>
-      <p:nvGrpSpPr>
-        <p:cNvPr id="1" name=""/>
-        <p:cNvGrpSpPr/>
-        <p:nvPr/>
-      </p:nvGrpSpPr>
-      <p:grpSpPr>
-        <a:xfrm>
-          <a:off x="0" y="0"/>
-          <a:ext cx="0" cy="0"/>
-          <a:chOff x="0" y="0"/>
-          <a:chExt cx="0" cy="0"/>
-        </a:xfrm>
-      </p:grpSpPr>
-      <p:sp>
-        <p:nvSpPr>
-          <p:cNvPr id="2" name="Slide Image Placeholder 1"/>
-          <p:cNvSpPr>
-            <a:spLocks noGrp="1"/>
-          </p:cNvSpPr>
-          <p:nvPr>
-            <p:ph type="sldImg" idx="2"/>
-          </p:nvPr>
-        </p:nvSpPr>
-        <p:spPr/>
-      </p:sp>
-      <p:sp>
-        <p:nvSpPr>
-          <p:cNvPr id="3" name="Notes Placeholder 2"/>
-          <p:cNvSpPr>
-            <a:spLocks noGrp="1"/>
-          </p:cNvSpPr>
-          <p:nvPr>
-            <p:ph type="body" idx="1"/>
-          </p:nvPr>
-        </p:nvSpPr>
-        <p:spPr/>
-        <p:txBody>
-          <a:bodyPr/>
-          <a:lstStyle/>
-          <a:p>
-            <a:r>
-              <a:t>Next milestone by session 06: a playable core loop and a first class diagram. Look for modes in your game.</a:t>
             </a:r>
           </a:p>
         </p:txBody>
@@ -17769,180 +17710,6 @@
 </p:sld>
 </file>
 
-<file path=ppt/slides/slide32.xml><?xml version="1.0" encoding="utf-8"?>
-<p:sld xmlns:a="http://schemas.openxmlformats.org/drawingml/2006/main" xmlns:r="http://schemas.openxmlformats.org/officeDocument/2006/relationships" xmlns:mc="http://schemas.openxmlformats.org/markup-compatibility/2006" xmlns:mv="urn:schemas-microsoft-com:mac:vml" xmlns:p="http://schemas.openxmlformats.org/presentationml/2006/main" xmlns:c="http://schemas.openxmlformats.org/drawingml/2006/chart" xmlns:dgm="http://schemas.openxmlformats.org/drawingml/2006/diagram" xmlns:o="urn:schemas-microsoft-com:office:office" xmlns:v="urn:schemas-microsoft-com:vml" xmlns:pvml="urn:schemas-microsoft-com:office:powerpoint" xmlns:com="http://schemas.openxmlformats.org/drawingml/2006/compatibility" xmlns:p14="http://schemas.microsoft.com/office/powerpoint/2010/main" xmlns:p15="http://schemas.microsoft.com/office/powerpoint/2012/main" xmlns:ahyp="http://schemas.microsoft.com/office/drawing/2018/hyperlinkcolor">
-  <p:cSld>
-    <p:spTree>
-      <p:nvGrpSpPr>
-        <p:cNvPr id="56" name="Shape 56"/>
-        <p:cNvGrpSpPr/>
-        <p:nvPr/>
-      </p:nvGrpSpPr>
-      <p:grpSpPr>
-        <a:xfrm>
-          <a:off x="0" y="0"/>
-          <a:ext cx="0" cy="0"/>
-          <a:chOff x="0" y="0"/>
-          <a:chExt cx="0" cy="0"/>
-        </a:xfrm>
-      </p:grpSpPr>
-      <p:sp>
-        <p:nvSpPr>
-          <p:cNvPr id="57" name="Google Shape;57;p12"/>
-          <p:cNvSpPr txBox="1"/>
-          <p:nvPr>
-            <p:ph type="title"/>
-          </p:nvPr>
-        </p:nvSpPr>
-        <p:spPr>
-          <a:xfrm>
-            <a:off x="311700" y="195615"/>
-            <a:ext cx="8520600" cy="572700"/>
-          </a:xfrm>
-          <a:prstGeom prst="rect">
-            <a:avLst/>
-          </a:prstGeom>
-        </p:spPr>
-        <p:txBody>
-          <a:bodyPr anchorCtr="0" anchor="t" bIns="91425" lIns="91425" spcFirstLastPara="1" rIns="91425" wrap="square" tIns="91425">
-            <a:normAutofit fontScale="90000"/>
-          </a:bodyPr>
-          <a:lstStyle/>
-          <a:p>
-            <a:pPr indent="0" lvl="0" marL="0" rtl="0" algn="l">
-              <a:spcBef>
-                <a:spcPts val="0"/>
-              </a:spcBef>
-              <a:spcAft>
-                <a:spcPts val="0"/>
-              </a:spcAft>
-              <a:buNone/>
-            </a:pPr>
-            <a:r>
-              <a:rPr lang="en"/>
-              <a:t>Your Course Project</a:t>
-            </a:r>
-            <a:endParaRPr/>
-          </a:p>
-        </p:txBody>
-      </p:sp>
-      <p:sp>
-        <p:nvSpPr>
-          <p:cNvPr id="58" name="Google Shape;58;p12"/>
-          <p:cNvSpPr txBox="1"/>
-          <p:nvPr>
-            <p:ph idx="1" type="body"/>
-          </p:nvPr>
-        </p:nvSpPr>
-        <p:spPr>
-          <a:xfrm>
-            <a:off x="311700" y="885950"/>
-            <a:ext cx="8520600" cy="4023300"/>
-          </a:xfrm>
-          <a:prstGeom prst="rect">
-            <a:avLst/>
-          </a:prstGeom>
-        </p:spPr>
-        <p:txBody>
-          <a:bodyPr anchorCtr="0" anchor="t" bIns="91425" lIns="91425" spcFirstLastPara="1" rIns="91425" wrap="square" tIns="91425">
-            <a:normAutofit/>
-          </a:bodyPr>
-          <a:lstStyle/>
-          <a:p>
-            <a:pPr indent="-330200" lvl="0" marL="457200" rtl="0" algn="l">
-              <a:spcBef>
-                <a:spcPts val="0"/>
-              </a:spcBef>
-              <a:spcAft>
-                <a:spcPts val="0"/>
-              </a:spcAft>
-              <a:buSzPts val="1600"/>
-              <a:buChar char="●"/>
-            </a:pPr>
-            <a:r>
-              <a:rPr lang="en"/>
-              <a:t>Next milestone, by session 06</a:t>
-            </a:r>
-            <a:endParaRPr/>
-          </a:p>
-          <a:p>
-            <a:pPr indent="-317500" lvl="1" marL="914400" rtl="0" algn="l">
-              <a:spcBef>
-                <a:spcPts val="0"/>
-              </a:spcBef>
-              <a:spcAft>
-                <a:spcPts val="0"/>
-              </a:spcAft>
-              <a:buSzPts val="1400"/>
-              <a:buChar char="○"/>
-            </a:pPr>
-            <a:r>
-              <a:rPr lang="en"/>
-              <a:t>A playable core loop</a:t>
-            </a:r>
-            <a:endParaRPr/>
-          </a:p>
-          <a:p>
-            <a:pPr indent="-317500" lvl="1" marL="914400" rtl="0" algn="l">
-              <a:spcBef>
-                <a:spcPts val="0"/>
-              </a:spcBef>
-              <a:spcAft>
-                <a:spcPts val="0"/>
-              </a:spcAft>
-              <a:buSzPts val="1400"/>
-              <a:buChar char="○"/>
-            </a:pPr>
-            <a:r>
-              <a:rPr lang="en"/>
-              <a:t>A first class diagram</a:t>
-            </a:r>
-            <a:endParaRPr/>
-          </a:p>
-          <a:p>
-            <a:pPr indent="-330200" lvl="0" marL="457200" rtl="0" algn="l">
-              <a:spcBef>
-                <a:spcPts val="0"/>
-              </a:spcBef>
-              <a:spcAft>
-                <a:spcPts val="0"/>
-              </a:spcAft>
-              <a:buSzPts val="1600"/>
-              <a:buChar char="●"/>
-            </a:pPr>
-            <a:r>
-              <a:rPr lang="en"/>
-              <a:t>Look for modes in your game</a:t>
-            </a:r>
-            <a:endParaRPr/>
-          </a:p>
-          <a:p>
-            <a:pPr indent="-317500" lvl="1" marL="914400" rtl="0" algn="l">
-              <a:spcBef>
-                <a:spcPts val="0"/>
-              </a:spcBef>
-              <a:spcAft>
-                <a:spcPts val="0"/>
-              </a:spcAft>
-              <a:buSzPts val="1400"/>
-              <a:buChar char="○"/>
-            </a:pPr>
-            <a:r>
-              <a:rPr lang="en"/>
-              <a:t>Would they be clearer as states?</a:t>
-            </a:r>
-            <a:endParaRPr/>
-          </a:p>
-        </p:txBody>
-      </p:sp>
-    </p:spTree>
-  </p:cSld>
-  <p:clrMapOvr>
-    <a:masterClrMapping/>
-  </p:clrMapOvr>
-</p:sld>
-</file>
-
 <file path=ppt/slides/slide4.xml><?xml version="1.0" encoding="utf-8"?>
 <p:sld xmlns:a="http://schemas.openxmlformats.org/drawingml/2006/main" xmlns:r="http://schemas.openxmlformats.org/officeDocument/2006/relationships" xmlns:mc="http://schemas.openxmlformats.org/markup-compatibility/2006" xmlns:mv="urn:schemas-microsoft-com:mac:vml" xmlns:p="http://schemas.openxmlformats.org/presentationml/2006/main" xmlns:c="http://schemas.openxmlformats.org/drawingml/2006/chart" xmlns:dgm="http://schemas.openxmlformats.org/drawingml/2006/diagram" xmlns:o="urn:schemas-microsoft-com:office:office" xmlns:v="urn:schemas-microsoft-com:vml" xmlns:pvml="urn:schemas-microsoft-com:office:powerpoint" xmlns:com="http://schemas.openxmlformats.org/drawingml/2006/compatibility" xmlns:p14="http://schemas.microsoft.com/office/powerpoint/2010/main" xmlns:p15="http://schemas.microsoft.com/office/powerpoint/2012/main" xmlns:ahyp="http://schemas.microsoft.com/office/drawing/2018/hyperlinkcolor">
   <p:cSld>

--- a/slides/05 Pac-Man.pptx
+++ b/slides/05 Pac-Man.pptx
@@ -1989,7 +1989,7 @@
           <a:lstStyle/>
           <a:p>
             <a:r>
-              <a:t>Demo: run Pacman4 for a full life, then run dotnet test in 05-pacman and open TargetingTests.cs.</a:t>
+              <a:t>Demo: run Pacman4 for a full life, then run dotnet test in 05-pac-man and open TargetingTests.cs.</a:t>
             </a:r>
           </a:p>
         </p:txBody>
@@ -2624,7 +2624,7 @@
           <a:lstStyle/>
           <a:p>
             <a:r>
-              <a:t>Open gar-games/05-pacman live. Show the README: the step table, the code map, how to run a step.</a:t>
+              <a:t>Open gar-games/05-pac-man live. Show the README: the step table, the code map, how to run a step.</a:t>
             </a:r>
           </a:p>
           <a:p>
@@ -18268,7 +18268,7 @@
             </a:pPr>
             <a:r>
               <a:rPr lang="en"/>
-              <a:t>github.com/Metamate/gar-games, folder 05-pacman</a:t>
+              <a:t>github.com/Metamate/gar-games, folder 05-pac-man</a:t>
             </a:r>
             <a:endParaRPr/>
           </a:p>

--- a/slides/05 Pac-Man.pptx
+++ b/slides/05 Pac-Man.pptx
@@ -812,7 +812,7 @@
           <a:lstStyle/>
           <a:p>
             <a:r>
-              <a:t>Welcome. Today we build Pac-Man. The main topic: the State pattern.</a:t>
+              <a:t>Welcome. Today we build Pac-Man. The main topic: behaviour that changes with the situation.</a:t>
             </a:r>
           </a:p>
           <a:p>
@@ -2262,7 +2262,7 @@
           <a:lstStyle/>
           <a:p>
             <a:r>
-              <a:t>The main topic: the State pattern, through the ghosts’ modes. Then Strategy for their targeting, and how the two differ.</a:t>
+              <a:t>The main topic: behaviour that changes with the situation, with the State pattern through the ghosts’ modes. Then Strategy for their targeting, and how the two differ.</a:t>
             </a:r>
           </a:p>
         </p:txBody>
@@ -17778,7 +17778,7 @@
         <p:spPr>
           <a:xfrm>
             <a:off x="311700" y="885950"/>
-            <a:ext cx="8520600" cy="4023300"/>
+            <a:ext cx="8520600" cy="2825496"/>
           </a:xfrm>
           <a:prstGeom prst="rect">
             <a:avLst/>
@@ -17789,6 +17789,23 @@
             <a:normAutofit/>
           </a:bodyPr>
           <a:lstStyle/>
+          <a:p>
+            <a:pPr indent="-330200" lvl="0" marL="457200" rtl="0" algn="l">
+              <a:spcBef>
+                <a:spcPts val="0"/>
+              </a:spcBef>
+              <a:spcAft>
+                <a:spcPts val="0"/>
+              </a:spcAft>
+              <a:buSzPts val="1600"/>
+              <a:buChar char="●"/>
+            </a:pPr>
+            <a:r>
+              <a:rPr lang="en" b="1"/>
+              <a:t>Main topic: Behaviour that changes with the situation</a:t>
+            </a:r>
+            <a:endParaRPr/>
+          </a:p>
           <a:p>
             <a:pPr indent="-330200" lvl="0" marL="457200" rtl="0" algn="l">
               <a:spcBef>

--- a/slides/05 Pac-Man.pptx
+++ b/slides/05 Pac-Man.pptx
@@ -812,7 +812,7 @@
           <a:lstStyle/>
           <a:p>
             <a:r>
-              <a:t>Welcome. Today we build Pac-Man. The main topic: behaviour that changes with the situation.</a:t>
+              <a:t>Welcome. Today we build Pac-Man. The main topic: the State pattern.</a:t>
             </a:r>
           </a:p>
           <a:p>
@@ -2262,7 +2262,7 @@
           <a:lstStyle/>
           <a:p>
             <a:r>
-              <a:t>The main topic: behaviour that changes with the situation, with the State pattern through the ghosts’ modes. Then Strategy for their targeting, and how the two differ.</a:t>
+              <a:t>Today’s main topic is the State pattern, which we use for the ghosts’ modes. Then Strategy for how each ghost picks its target, and how the two patterns differ.</a:t>
             </a:r>
           </a:p>
         </p:txBody>
@@ -17802,7 +17802,7 @@
             </a:pPr>
             <a:r>
               <a:rPr lang="en" b="1"/>
-              <a:t>Main topic: Behaviour that changes with the situation</a:t>
+              <a:t>Main topic: The State pattern</a:t>
             </a:r>
             <a:endParaRPr/>
           </a:p>

--- a/slides/05 Pac-Man.pptx
+++ b/slides/05 Pac-Man.pptx
@@ -1086,7 +1086,7 @@
           </a:p>
           <a:p>
             <a:r>
-              <a:t>A: Usually the states themselves: a state knows which events end it, and which state comes next. The object that holds the state only forwards to it, and doesn't need to know which states exist.</a:t>
+              <a:t>A: Usually the states themselves. A state knows which events end it, and which state comes next. The object that holds the state only forwards to it, and doesn't need to know which states exist.</a:t>
             </a:r>
           </a:p>
           <a:p/>
@@ -2115,7 +2115,7 @@
           </a:p>
           <a:p>
             <a:r>
-              <a:t>Today we build the parts that matter for the architecture, not the whole game.</a:t>
+              <a:t>Today we build the parts that matter for the architecture.</a:t>
             </a:r>
           </a:p>
         </p:txBody>
@@ -18617,7 +18617,7 @@
                   <a:srgbClr val="DEE2E6"/>
                 </a:solidFill>
               </a:rPr>
-              <a:t>The walls are lines, not images</a:t>
+              <a:t>The walls are drawn as lines</a:t>
             </a:r>
             <a:endParaRPr/>
           </a:p>

--- a/slides/05 Pac-Man.pptx
+++ b/slides/05 Pac-Man.pptx
@@ -13425,7 +13425,7 @@
                   <a:srgbClr val="DEE2E6"/>
                 </a:solidFill>
               </a:rPr>
-              <a:t>Together: the state decides whether to chase, the strategy how.</a:t>
+              <a:t>The state decides whether to chase, and the strategy decides how.</a:t>
             </a:r>
           </a:p>
         </p:txBody>
@@ -14737,7 +14737,7 @@
                   <a:srgbClr val="9AA3AB"/>
                 </a:solidFill>
               </a:rPr>
-              <a:t>While Pac-Man dies, the ghosts’ states simply pause.</a:t>
+              <a:t>While Pac-Man dies, the ghosts’ states pause.</a:t>
             </a:r>
           </a:p>
         </p:txBody>

--- a/slides/05 Pac-Man.pptx
+++ b/slides/05 Pac-Man.pptx
@@ -16658,14 +16658,14 @@
       </p:sp>
       <p:pic>
         <p:nvPicPr>
-          <p:cNvPr id="46" name="Picture 46" descr="gif-pacman.gif"/>
+          <p:cNvPr id="46" name="Picture 46" descr="pac-man.gif"/>
           <p:cNvPicPr>
             <a:picLocks noChangeAspect="1"/>
           </p:cNvPicPr>
           <p:nvPr/>
         </p:nvPicPr>
         <p:blipFill>
-          <a:blip r:embed="rId3"/>
+          <a:blip r:embed="rId4"/>
           <a:stretch>
             <a:fillRect/>
           </a:stretch>
@@ -16673,7 +16673,7 @@
         <p:spPr>
           <a:xfrm>
             <a:off x="3101255" y="1531275"/>
-            <a:ext cx="2941488" cy="3256648"/>
+            <a:ext cx="2941488" cy="3256647"/>
           </a:xfrm>
           <a:prstGeom prst="rect">
             <a:avLst/>

--- a/slides/05 Pac-Man.pptx
+++ b/slides/05 Pac-Man.pptx
@@ -11544,14 +11544,14 @@
       </p:sp>
       <p:pic>
         <p:nvPicPr>
-          <p:cNvPr id="295" name="Picture 294" descr="ghost_blinky.png"/>
+          <p:cNvPr id="295" name="Picture 303" descr="ghost0.png"/>
           <p:cNvPicPr>
             <a:picLocks noChangeAspect="1"/>
           </p:cNvPicPr>
           <p:nvPr/>
         </p:nvPicPr>
         <p:blipFill>
-          <a:blip r:embed="rId3"/>
+          <a:blip r:embed="rId7"/>
           <a:stretch>
             <a:fillRect/>
           </a:stretch>
@@ -11633,14 +11633,14 @@
       </p:sp>
       <p:pic>
         <p:nvPicPr>
-          <p:cNvPr id="297" name="Picture 296" descr="ghost_pinky.png"/>
+          <p:cNvPr id="297" name="Picture 303" descr="ghost1.png"/>
           <p:cNvPicPr>
             <a:picLocks noChangeAspect="1"/>
           </p:cNvPicPr>
           <p:nvPr/>
         </p:nvPicPr>
         <p:blipFill>
-          <a:blip r:embed="rId4"/>
+          <a:blip r:embed="rId8"/>
           <a:stretch>
             <a:fillRect/>
           </a:stretch>
@@ -11722,14 +11722,14 @@
       </p:sp>
       <p:pic>
         <p:nvPicPr>
-          <p:cNvPr id="299" name="Picture 298" descr="ghost_inky.png"/>
+          <p:cNvPr id="299" name="Picture 303" descr="ghost2.png"/>
           <p:cNvPicPr>
             <a:picLocks noChangeAspect="1"/>
           </p:cNvPicPr>
           <p:nvPr/>
         </p:nvPicPr>
         <p:blipFill>
-          <a:blip r:embed="rId5"/>
+          <a:blip r:embed="rId9"/>
           <a:stretch>
             <a:fillRect/>
           </a:stretch>
@@ -11822,14 +11822,14 @@
       </p:sp>
       <p:pic>
         <p:nvPicPr>
-          <p:cNvPr id="301" name="Picture 300" descr="ghost_clyde.png"/>
+          <p:cNvPr id="301" name="Picture 303" descr="ghost3.png"/>
           <p:cNvPicPr>
             <a:picLocks noChangeAspect="1"/>
           </p:cNvPicPr>
           <p:nvPr/>
         </p:nvPicPr>
         <p:blipFill>
-          <a:blip r:embed="rId6"/>
+          <a:blip r:embed="rId10"/>
           <a:stretch>
             <a:fillRect/>
           </a:stretch>

--- a/slides/05 Pac-Man.pptx
+++ b/slides/05 Pac-Man.pptx
@@ -18668,7 +18668,7 @@
                 <a:cs typeface="Consolas"/>
                 <a:sym typeface="Consolas"/>
               </a:rPr>
-              <a:t>############################</a:t>
+              <a:t>####################################</a:t>
             </a:r>
             <a:endParaRPr sz="1000">
               <a:solidFill>
@@ -18706,7 +18706,7 @@
                 <a:cs typeface="Consolas"/>
                 <a:sym typeface="Consolas"/>
               </a:rPr>
-              <a:t>#............##............#</a:t>
+              <a:t>#..................................#</a:t>
             </a:r>
             <a:endParaRPr sz="1000">
               <a:solidFill>
@@ -18744,7 +18744,7 @@
                 <a:cs typeface="Consolas"/>
                 <a:sym typeface="Consolas"/>
               </a:rPr>
-              <a:t>#.####.#####.##.#####.####.#</a:t>
+              <a:t>#.###.#######.########.#######.###.#</a:t>
             </a:r>
             <a:endParaRPr sz="1000">
               <a:solidFill>
@@ -18782,7 +18782,7 @@
                 <a:cs typeface="Consolas"/>
                 <a:sym typeface="Consolas"/>
               </a:rPr>
-              <a:t>#o####.#####.##.#####.####o#</a:t>
+              <a:t>#.###.........########.........###.#</a:t>
             </a:r>
             <a:endParaRPr sz="1000">
               <a:solidFill>
@@ -18820,7 +18820,7 @@
                 <a:cs typeface="Consolas"/>
                 <a:sym typeface="Consolas"/>
               </a:rPr>
-              <a:t>#.####.#####.##.#####.####.#</a:t>
+              <a:t>#.###.#######.########.#######.###.#</a:t>
             </a:r>
             <a:endParaRPr sz="1000">
               <a:solidFill>
@@ -18858,7 +18858,7 @@
                 <a:cs typeface="Consolas"/>
                 <a:sym typeface="Consolas"/>
               </a:rPr>
-              <a:t>#..........................#</a:t>
+              <a:t>#..................................#</a:t>
             </a:r>
             <a:endParaRPr sz="1000">
               <a:solidFill>
@@ -18934,7 +18934,7 @@
                 <a:cs typeface="Consolas"/>
                 <a:sym typeface="Consolas"/>
               </a:rPr>
-              <a:t>######.##.###--###.##.######</a:t>
+              <a:t>#####.###.##.####--####.##.###.#####</a:t>
             </a:r>
             <a:endParaRPr sz="1000">
               <a:solidFill>
@@ -18972,7 +18972,7 @@
                 <a:cs typeface="Consolas"/>
                 <a:sym typeface="Consolas"/>
               </a:rPr>
-              <a:t>######.##.#HHHHHH#.##.######</a:t>
+              <a:t>#####.###.##.#HHHHHHHH#.##.###.#####</a:t>
             </a:r>
             <a:endParaRPr sz="1000">
               <a:solidFill>
@@ -19010,7 +19010,7 @@
                 <a:cs typeface="Consolas"/>
                 <a:sym typeface="Consolas"/>
               </a:rPr>
-              <a:t>      .   #iHpHHc#   .      </a:t>
+              <a:t>     .....##.#HiHpHHcH#.##.....     </a:t>
             </a:r>
             <a:endParaRPr sz="1000">
               <a:solidFill>
@@ -19048,7 +19048,7 @@
                 <a:cs typeface="Consolas"/>
                 <a:sym typeface="Consolas"/>
               </a:rPr>
-              <a:t>######.##.#HHHHHH#.##.######</a:t>
+              <a:t>...</a:t>
             </a:r>
             <a:endParaRPr sz="1000">
               <a:solidFill>

--- a/slides/05 Pac-Man.pptx
+++ b/slides/05 Pac-Man.pptx
@@ -32,6 +32,12 @@
     <p:sldId id="310" r:id="rId69"/>
     <p:sldId id="316" r:id="rId39"/>
     <p:sldId id="311" r:id="rId70"/>
+    <p:sldId id="320" r:id="rId35"/>
+    <p:sldId id="321" r:id="rId34"/>
+    <p:sldId id="322" r:id="rId33"/>
+    <p:sldId id="323" r:id="rId32"/>
+    <p:sldId id="324" r:id="rId31"/>
+    <p:sldId id="325" r:id="rId29"/>
     <p:sldId id="312" r:id="rId71"/>
     <p:sldId id="313" r:id="rId72"/>
     <p:sldId id="280" r:id="rId30"/>
@@ -817,7 +823,7 @@
           </a:p>
           <a:p>
             <a:r>
-              <a:t>Start by playing the finished game, Pacman4, before any code.</a:t>
+              <a:t>Start by playing the finished game, Pacman5, before any code.</a:t>
             </a:r>
           </a:p>
         </p:txBody>
@@ -1575,7 +1581,7 @@
           <a:lstStyle/>
           <a:p>
             <a:r>
-              <a:t>Run Pacman4 and play it for a minute.</a:t>
+              <a:t>Run Pacman5 and play it for a minute.</a:t>
             </a:r>
           </a:p>
           <a:p>
@@ -1903,6 +1909,11 @@
               <a:t>Work the numbers on the slide together.</a:t>
             </a:r>
           </a:p>
+          <a:p>
+            <a:r>
+              <a:t>PathfinderTests does the same for paths: count the steps on paper, and compare.</a:t>
+            </a:r>
+          </a:p>
         </p:txBody>
       </p:sp>
     </p:spTree>
@@ -1989,7 +2000,75 @@
           <a:lstStyle/>
           <a:p>
             <a:r>
-              <a:t>Demo: run Pacman4 for a full life, then run dotnet test in 05-pac-man and open TargetingTests.cs.</a:t>
+              <a:t>Demo: run Pacman5 for a full life, then run dotnet test in 05-pac-man and open TargetingTests.cs and PathfinderTests.cs.</a:t>
+            </a:r>
+          </a:p>
+        </p:txBody>
+      </p:sp>
+    </p:spTree>
+  </p:cSld>
+  <p:clrMapOvr>
+    <a:masterClrMapping/>
+  </p:clrMapOvr>
+</p:notes>
+</file>
+
+<file path=ppt/notesSlides/notesSlide26.xml><?xml version="1.0" encoding="utf-8"?>
+<p:notes xmlns:a="http://schemas.openxmlformats.org/drawingml/2006/main" xmlns:p="http://schemas.openxmlformats.org/presentationml/2006/main" xmlns:r="http://schemas.openxmlformats.org/officeDocument/2006/relationships">
+  <p:cSld>
+    <p:spTree>
+      <p:nvGrpSpPr>
+        <p:cNvPr id="1" name=""/>
+        <p:cNvGrpSpPr/>
+        <p:nvPr/>
+      </p:nvGrpSpPr>
+      <p:grpSpPr>
+        <a:xfrm>
+          <a:off x="0" y="0"/>
+          <a:ext cx="0" cy="0"/>
+          <a:chOff x="0" y="0"/>
+          <a:chExt cx="0" cy="0"/>
+        </a:xfrm>
+      </p:grpSpPr>
+      <p:sp>
+        <p:nvSpPr>
+          <p:cNvPr id="2" name="Slide Image Placeholder 1"/>
+          <p:cNvSpPr>
+            <a:spLocks noGrp="1"/>
+          </p:cNvSpPr>
+          <p:nvPr>
+            <p:ph type="sldImg" idx="2"/>
+          </p:nvPr>
+        </p:nvSpPr>
+        <p:spPr/>
+      </p:sp>
+      <p:sp>
+        <p:nvSpPr>
+          <p:cNvPr id="3" name="Notes Placeholder 2"/>
+          <p:cNvSpPr>
+            <a:spLocks noGrp="1"/>
+          </p:cNvSpPr>
+          <p:nvPr>
+            <p:ph type="body" idx="1"/>
+          </p:nvPr>
+        </p:nvSpPr>
+        <p:spPr/>
+        <p:txBody>
+          <a:bodyPr/>
+          <a:lstStyle/>
+          <a:p>
+            <a:r>
+              <a:t>G is the ghost, T its target. Count both ways with them: left is 7 steps, right is 5.</a:t>
+            </a:r>
+          </a:p>
+          <a:p>
+            <a:r>
+              <a:t>The arcade rule only compares straight-line distances from the two neighbouring tiles, so it goes left.</a:t>
+            </a:r>
+          </a:p>
+          <a:p>
+            <a:r>
+              <a:t>This is fine for the chase, where wrong turns are part of the game. For the eyes going home it looks silly.</a:t>
             </a:r>
           </a:p>
         </p:txBody>
@@ -2262,7 +2341,7 @@
           <a:lstStyle/>
           <a:p>
             <a:r>
-              <a:t>Today’s main topic is the State pattern, which we use for the ghosts’ modes. Then Strategy for how each ghost picks its target, and how the two patterns differ.</a:t>
+              <a:t>Today’s main topic is the State pattern, which we use for the ghosts’ modes. Then Strategy for how each ghost picks its target, and how the two patterns differ. Then pathfinding with A*, as a second use of Strategy.</a:t>
             </a:r>
           </a:p>
         </p:txBody>
@@ -2454,6 +2533,293 @@
 </p:notes>
 </file>
 
+<file path=ppt/notesSlides/notesSlide33.xml><?xml version="1.0" encoding="utf-8"?>
+<p:notes xmlns:a="http://schemas.openxmlformats.org/drawingml/2006/main" xmlns:p="http://schemas.openxmlformats.org/presentationml/2006/main" xmlns:r="http://schemas.openxmlformats.org/officeDocument/2006/relationships">
+  <p:cSld>
+    <p:spTree>
+      <p:nvGrpSpPr>
+        <p:cNvPr id="1" name=""/>
+        <p:cNvGrpSpPr/>
+        <p:nvPr/>
+      </p:nvGrpSpPr>
+      <p:grpSpPr>
+        <a:xfrm>
+          <a:off x="0" y="0"/>
+          <a:ext cx="0" cy="0"/>
+          <a:chOff x="0" y="0"/>
+          <a:chExt cx="0" cy="0"/>
+        </a:xfrm>
+      </p:grpSpPr>
+      <p:sp>
+        <p:nvSpPr>
+          <p:cNvPr id="2" name="Slide Image Placeholder 1"/>
+          <p:cNvSpPr>
+            <a:spLocks noGrp="1"/>
+          </p:cNvSpPr>
+          <p:nvPr>
+            <p:ph type="sldImg" idx="2"/>
+          </p:nvPr>
+        </p:nvSpPr>
+        <p:spPr/>
+      </p:sp>
+      <p:sp>
+        <p:nvSpPr>
+          <p:cNvPr id="3" name="Notes Placeholder 2"/>
+          <p:cNvSpPr>
+            <a:spLocks noGrp="1"/>
+          </p:cNvSpPr>
+          <p:nvPr>
+            <p:ph type="body" idx="1"/>
+          </p:nvPr>
+        </p:nvSpPr>
+        <p:spPr/>
+        <p:txBody>
+          <a:bodyPr/>
+          <a:lstStyle/>
+          <a:p>
+            <a:r>
+              <a:t>Do it on the board first: 0 on the ghost, 1 on its neighbours, 2 on theirs, never writing on a tile twice.</a:t>
+            </a:r>
+          </a:p>
+          <a:p>
+            <a:r>
+              <a:t>T gets a 5. The outlined tiles are the path, found by walking back from T.</a:t>
+            </a:r>
+          </a:p>
+          <a:p>
+            <a:r>
+              <a:t>Point at the numbers on the left and along the bottom: all of that work led away from the target.</a:t>
+            </a:r>
+          </a:p>
+        </p:txBody>
+      </p:sp>
+    </p:spTree>
+  </p:cSld>
+  <p:clrMapOvr>
+    <a:masterClrMapping/>
+  </p:clrMapOvr>
+</p:notes>
+</file>
+
+<file path=ppt/notesSlides/notesSlide34.xml><?xml version="1.0" encoding="utf-8"?>
+<p:notes xmlns:a="http://schemas.openxmlformats.org/drawingml/2006/main" xmlns:p="http://schemas.openxmlformats.org/presentationml/2006/main" xmlns:r="http://schemas.openxmlformats.org/officeDocument/2006/relationships">
+  <p:cSld>
+    <p:spTree>
+      <p:nvGrpSpPr>
+        <p:cNvPr id="1" name=""/>
+        <p:cNvGrpSpPr/>
+        <p:nvPr/>
+      </p:nvGrpSpPr>
+      <p:grpSpPr>
+        <a:xfrm>
+          <a:off x="0" y="0"/>
+          <a:ext cx="0" cy="0"/>
+          <a:chOff x="0" y="0"/>
+          <a:chExt cx="0" cy="0"/>
+        </a:xfrm>
+      </p:grpSpPr>
+      <p:sp>
+        <p:nvSpPr>
+          <p:cNvPr id="2" name="Slide Image Placeholder 1"/>
+          <p:cNvSpPr>
+            <a:spLocks noGrp="1"/>
+          </p:cNvSpPr>
+          <p:nvPr>
+            <p:ph type="sldImg" idx="2"/>
+          </p:nvPr>
+        </p:nvSpPr>
+        <p:spPr/>
+      </p:sp>
+      <p:sp>
+        <p:nvSpPr>
+          <p:cNvPr id="3" name="Notes Placeholder 2"/>
+          <p:cNvSpPr>
+            <a:spLocks noGrp="1"/>
+          </p:cNvSpPr>
+          <p:nvPr>
+            <p:ph type="body" idx="1"/>
+          </p:nvPr>
+        </p:nvSpPr>
+        <p:spPr/>
+        <p:txBody>
+          <a:bodyPr/>
+          <a:lstStyle/>
+          <a:p>
+            <a:r>
+              <a:t>The same search as before, with one change: a priority queue hands out the most promising tile.</a:t>
+            </a:r>
+          </a:p>
+          <a:p>
+            <a:r>
+              <a:t>The estimate (the heuristic) is the distance with no walls: steps across plus steps up or down.</a:t>
+            </a:r>
+          </a:p>
+          <a:p>
+            <a:r>
+              <a:t>The slide leaves out the loop over the neighbours; open Pathfinder.cs for the whole method.</a:t>
+            </a:r>
+          </a:p>
+          <a:p>
+            <a:r>
+              <a:t>Ask: what goes wrong with the tunnel? Two tiles at its ends are one step apart, so Estimate also counts the way round.</a:t>
+            </a:r>
+          </a:p>
+          <a:p>
+            <a:r>
+              <a:t>With an estimate of 0 everywhere, this is breadth-first search again.</a:t>
+            </a:r>
+          </a:p>
+        </p:txBody>
+      </p:sp>
+    </p:spTree>
+  </p:cSld>
+  <p:clrMapOvr>
+    <a:masterClrMapping/>
+  </p:clrMapOvr>
+</p:notes>
+</file>
+
+<file path=ppt/notesSlides/notesSlide35.xml><?xml version="1.0" encoding="utf-8"?>
+<p:notes xmlns:a="http://schemas.openxmlformats.org/drawingml/2006/main" xmlns:p="http://schemas.openxmlformats.org/presentationml/2006/main" xmlns:r="http://schemas.openxmlformats.org/officeDocument/2006/relationships">
+  <p:cSld>
+    <p:spTree>
+      <p:nvGrpSpPr>
+        <p:cNvPr id="1" name=""/>
+        <p:cNvGrpSpPr/>
+        <p:nvPr/>
+      </p:nvGrpSpPr>
+      <p:grpSpPr>
+        <a:xfrm>
+          <a:off x="0" y="0"/>
+          <a:ext cx="0" cy="0"/>
+          <a:chOff x="0" y="0"/>
+          <a:chExt cx="0" cy="0"/>
+        </a:xfrm>
+      </p:grpSpPr>
+      <p:sp>
+        <p:nvSpPr>
+          <p:cNvPr id="2" name="Slide Image Placeholder 1"/>
+          <p:cNvSpPr>
+            <a:spLocks noGrp="1"/>
+          </p:cNvSpPr>
+          <p:nvPr>
+            <p:ph type="sldImg" idx="2"/>
+          </p:nvPr>
+        </p:nvSpPr>
+        <p:spPr/>
+      </p:sp>
+      <p:sp>
+        <p:nvSpPr>
+          <p:cNvPr id="3" name="Notes Placeholder 2"/>
+          <p:cNvSpPr>
+            <a:spLocks noGrp="1"/>
+          </p:cNvSpPr>
+          <p:nvPr>
+            <p:ph type="body" idx="1"/>
+          </p:nvPr>
+        </p:nvSpPr>
+        <p:spPr/>
+        <p:txBody>
+          <a:bodyPr/>
+          <a:lstStyle/>
+          <a:p>
+            <a:r>
+              <a:t>Strategy a second time, in the same game: ITargetStrategy for where, IRouteStrategy for which way.</a:t>
+            </a:r>
+          </a:p>
+          <a:p>
+            <a:r>
+              <a:t>The chasing ghosts keep the arcade rule on purpose. Their wrong turns give the player room to escape.</a:t>
+            </a:r>
+          </a:p>
+          <a:p>
+            <a:r>
+              <a:t>EatenState always uses ShortestPath, and lost a flag (_enteringHouse) because the search finds the door.</a:t>
+            </a:r>
+          </a:p>
+        </p:txBody>
+      </p:sp>
+    </p:spTree>
+  </p:cSld>
+  <p:clrMapOvr>
+    <a:masterClrMapping/>
+  </p:clrMapOvr>
+</p:notes>
+</file>
+
+<file path=ppt/notesSlides/notesSlide36.xml><?xml version="1.0" encoding="utf-8"?>
+<p:notes xmlns:a="http://schemas.openxmlformats.org/drawingml/2006/main" xmlns:p="http://schemas.openxmlformats.org/presentationml/2006/main" xmlns:r="http://schemas.openxmlformats.org/officeDocument/2006/relationships">
+  <p:cSld>
+    <p:spTree>
+      <p:nvGrpSpPr>
+        <p:cNvPr id="1" name=""/>
+        <p:cNvGrpSpPr/>
+        <p:nvPr/>
+      </p:nvGrpSpPr>
+      <p:grpSpPr>
+        <a:xfrm>
+          <a:off x="0" y="0"/>
+          <a:ext cx="0" cy="0"/>
+          <a:chOff x="0" y="0"/>
+          <a:chExt cx="0" cy="0"/>
+        </a:xfrm>
+      </p:grpSpPr>
+      <p:sp>
+        <p:nvSpPr>
+          <p:cNvPr id="2" name="Slide Image Placeholder 1"/>
+          <p:cNvSpPr>
+            <a:spLocks noGrp="1"/>
+          </p:cNvSpPr>
+          <p:nvPr>
+            <p:ph type="sldImg" idx="2"/>
+          </p:nvPr>
+        </p:nvSpPr>
+        <p:spPr/>
+      </p:sp>
+      <p:sp>
+        <p:nvSpPr>
+          <p:cNvPr id="3" name="Notes Placeholder 2"/>
+          <p:cNvSpPr>
+            <a:spLocks noGrp="1"/>
+          </p:cNvSpPr>
+          <p:nvPr>
+            <p:ph type="body" idx="1"/>
+          </p:nvPr>
+        </p:nvSpPr>
+        <p:spPr/>
+        <p:txBody>
+          <a:bodyPr/>
+          <a:lstStyle/>
+          <a:p>
+            <a:r>
+              <a:t>Demo: open Pacman3 and Pacman4 side by side, then run Pacman4.</a:t>
+            </a:r>
+          </a:p>
+          <a:p>
+            <a:r>
+              <a:t>- Routing/: IRouteStrategy, NearestTile, ShortestPath, Pathfinder</a:t>
+            </a:r>
+          </a:p>
+          <a:p>
+            <a:r>
+              <a:t>- Ghost.Closest moved into NearestTile</a:t>
+            </a:r>
+          </a:p>
+          <a:p>
+            <a:r>
+              <a:t>- eat a ghost and watch the eyes go straight home</a:t>
+            </a:r>
+          </a:p>
+        </p:txBody>
+      </p:sp>
+    </p:spTree>
+  </p:cSld>
+  <p:clrMapOvr>
+    <a:masterClrMapping/>
+  </p:clrMapOvr>
+</p:notes>
+</file>
+
 <file path=ppt/notesSlides/notesSlide37.xml><?xml version="1.0" encoding="utf-8"?>
 <p:notes xmlns:a="http://schemas.openxmlformats.org/drawingml/2006/main" xmlns:r="http://schemas.openxmlformats.org/officeDocument/2006/relationships" xmlns:mc="http://schemas.openxmlformats.org/markup-compatibility/2006" xmlns:mv="urn:schemas-microsoft-com:mac:vml" xmlns:p="http://schemas.openxmlformats.org/presentationml/2006/main" xmlns:c="http://schemas.openxmlformats.org/drawingml/2006/chart" xmlns:dgm="http://schemas.openxmlformats.org/drawingml/2006/diagram" xmlns:o="urn:schemas-microsoft-com:office:office" xmlns:v="urn:schemas-microsoft-com:vml" xmlns:pvml="urn:schemas-microsoft-com:office:powerpoint" xmlns:com="http://schemas.openxmlformats.org/drawingml/2006/compatibility" xmlns:p14="http://schemas.microsoft.com/office/powerpoint/2010/main" xmlns:p15="http://schemas.microsoft.com/office/powerpoint/2012/main" xmlns:ahyp="http://schemas.microsoft.com/office/drawing/2018/hyperlinkcolor" showMasterPhAnim="0" showMasterSp="0">
   <p:cSld>
@@ -2530,7 +2896,7 @@
           <a:lstStyle/>
           <a:p>
             <a:r>
-              <a:t>Start from Pacman4. The new mode is the Frozen mode from the enum task, now as a state: ask them to compare the classes they changed with the seven switches. Test first for the new ghost.</a:t>
+              <a:t>Start from Pacman5. The new mode is the Frozen mode from the enum task, now as a state: ask them to compare the classes they changed with the seven switches. Test first for the new ghost.</a:t>
             </a:r>
           </a:p>
           <a:p>
@@ -2642,6 +3008,69 @@
 </p:notes>
 </file>
 
+<file path=ppt/notesSlides/notesSlide5.xml><?xml version="1.0" encoding="utf-8"?>
+<p:notes xmlns:a="http://schemas.openxmlformats.org/drawingml/2006/main" xmlns:p="http://schemas.openxmlformats.org/presentationml/2006/main" xmlns:r="http://schemas.openxmlformats.org/officeDocument/2006/relationships">
+  <p:cSld>
+    <p:spTree>
+      <p:nvGrpSpPr>
+        <p:cNvPr id="1" name=""/>
+        <p:cNvGrpSpPr/>
+        <p:nvPr/>
+      </p:nvGrpSpPr>
+      <p:grpSpPr>
+        <a:xfrm>
+          <a:off x="0" y="0"/>
+          <a:ext cx="0" cy="0"/>
+          <a:chOff x="0" y="0"/>
+          <a:chExt cx="0" cy="0"/>
+        </a:xfrm>
+      </p:grpSpPr>
+      <p:sp>
+        <p:nvSpPr>
+          <p:cNvPr id="2" name="Slide Image Placeholder 1"/>
+          <p:cNvSpPr>
+            <a:spLocks noGrp="1"/>
+          </p:cNvSpPr>
+          <p:nvPr>
+            <p:ph type="sldImg" idx="2"/>
+          </p:nvPr>
+        </p:nvSpPr>
+        <p:spPr/>
+      </p:sp>
+      <p:sp>
+        <p:nvSpPr>
+          <p:cNvPr id="3" name="Notes Placeholder 2"/>
+          <p:cNvSpPr>
+            <a:spLocks noGrp="1"/>
+          </p:cNvSpPr>
+          <p:nvPr>
+            <p:ph type="body" idx="1"/>
+          </p:nvPr>
+        </p:nvSpPr>
+        <p:spPr/>
+        <p:txBody>
+          <a:bodyPr/>
+          <a:lstStyle/>
+          <a:p>
+            <a:r>
+              <a:t>Pairs, about 5 minutes. One argument per ghost in World.</a:t>
+            </a:r>
+          </a:p>
+          <a:p>
+            <a:r>
+              <a:t>Blinky alone becomes relentless. With all four, the ghosts bunch up in the same corridors, and the game gets harder and less interesting.</a:t>
+            </a:r>
+          </a:p>
+        </p:txBody>
+      </p:sp>
+    </p:spTree>
+  </p:cSld>
+  <p:clrMapOvr>
+    <a:masterClrMapping/>
+  </p:clrMapOvr>
+</p:notes>
+</file>
+
 <file path=ppt/notesSlides/notesSlide6.xml><?xml version="1.0" encoding="utf-8"?>
 <p:notes xmlns:a="http://schemas.openxmlformats.org/drawingml/2006/main" xmlns:p="http://schemas.openxmlformats.org/presentationml/2006/main" xmlns:r="http://schemas.openxmlformats.org/officeDocument/2006/relationships">
   <p:cSld>
@@ -2688,6 +3117,11 @@
           <a:p>
             <a:r>
               <a:t>Fruit and the tunnel: the questions are about where a rule belongs. Discuss answers before code.</a:t>
+            </a:r>
+          </a:p>
+          <a:p>
+            <a:r>
+              <a:t>Breadth-first: the same loop with a plain queue. A test compares the two lengths; a counter shows A* looks at fewer tiles.</a:t>
             </a:r>
           </a:p>
         </p:txBody>
@@ -14870,7 +15304,7 @@
             </a:pPr>
             <a:r>
               <a:rPr lang="en" sz="1800"/>
-              <a:t>Pacman4 and Pacman.Tests: the whole game, and its tests</a:t>
+              <a:t>Pacman5 and Pacman.Tests: the whole game, and its tests</a:t>
             </a:r>
             <a:endParaRPr sz="1800"/>
           </a:p>
@@ -14984,7 +15418,7 @@
             </a:pPr>
             <a:r>
               <a:rPr lang="en"/>
-              <a:t>Start from Pacman4, the finished game</a:t>
+              <a:t>Start from Pacman5, the finished game</a:t>
             </a:r>
             <a:endParaRPr/>
           </a:p>
@@ -15922,6 +16356,40 @@
             </a:r>
             <a:endParaRPr/>
           </a:p>
+          <a:p>
+            <a:pPr indent="-330200" lvl="0" marL="457200" rtl="0" algn="l">
+              <a:spcBef>
+                <a:spcPts val="0"/>
+              </a:spcBef>
+              <a:spcAft>
+                <a:spcPts val="0"/>
+              </a:spcAft>
+              <a:buSzPts val="1600"/>
+              <a:buChar char="●"/>
+            </a:pPr>
+            <a:r>
+              <a:rPr lang="en"/>
+              <a:t>Breadth-first: write FindPathBreadthFirst, with a Queue</a:t>
+            </a:r>
+            <a:endParaRPr/>
+          </a:p>
+          <a:p>
+            <a:pPr indent="-317500" lvl="1" marL="914400" rtl="0" algn="l">
+              <a:spcBef>
+                <a:spcPts val="0"/>
+              </a:spcBef>
+              <a:spcAft>
+                <a:spcPts val="0"/>
+              </a:spcAft>
+              <a:buSzPts val="1400"/>
+              <a:buChar char="○"/>
+            </a:pPr>
+            <a:r>
+              <a:rPr lang="en"/>
+              <a:t>Same length as A*? How many tiles does each take out of its queue?</a:t>
+            </a:r>
+            <a:endParaRPr/>
+          </a:p>
         </p:txBody>
       </p:sp>
     </p:spTree>
@@ -16743,7 +17211,7 @@
         <p:spPr>
           <a:xfrm>
             <a:off x="311700" y="885950"/>
-            <a:ext cx="8520600" cy="1719072"/>
+            <a:ext cx="8520600" cy="2103120"/>
           </a:xfrm>
         </p:spPr>
         <p:txBody>
@@ -16761,7 +17229,7 @@
               <a:buChar char="●"/>
             </a:pPr>
             <a:r>
-              <a:rPr lang="en"/>
+              <a:rPr lang="en" b="1"/>
               <a:t>What problems does the enum version of the ghost have?</a:t>
             </a:r>
             <a:endParaRPr/>
@@ -16778,7 +17246,7 @@
               <a:buChar char="●"/>
             </a:pPr>
             <a:r>
-              <a:rPr lang="en"/>
+              <a:rPr lang="en" b="1"/>
               <a:t>In the State pattern, who decides when to change state?</a:t>
             </a:r>
             <a:endParaRPr/>
@@ -16795,7 +17263,7 @@
               <a:buChar char="●"/>
             </a:pPr>
             <a:r>
-              <a:rPr lang="en"/>
+              <a:rPr lang="en" b="1"/>
               <a:t>What are Enter and Exit for?</a:t>
             </a:r>
             <a:endParaRPr/>
@@ -16812,8 +17280,25 @@
               <a:buChar char="●"/>
             </a:pPr>
             <a:r>
-              <a:rPr lang="en"/>
+              <a:rPr lang="en" b="1"/>
               <a:t>State and Strategy have the same structure. How do they differ?</a:t>
+            </a:r>
+            <a:endParaRPr/>
+          </a:p>
+          <a:p>
+            <a:pPr indent="-330200" lvl="0" marL="457200" rtl="0" algn="l">
+              <a:spcBef>
+                <a:spcPts val="0"/>
+              </a:spcBef>
+              <a:spcAft>
+                <a:spcPts val="0"/>
+              </a:spcAft>
+              <a:buSzPts val="1600"/>
+              <a:buChar char="●"/>
+            </a:pPr>
+            <a:r>
+              <a:rPr lang="en" b="1"/>
+              <a:t>What does A* add to breadth-first search?</a:t>
             </a:r>
             <a:endParaRPr/>
           </a:p>
@@ -16827,7 +17312,7 @@
         </p:nvSpPr>
         <p:spPr>
           <a:xfrm>
-            <a:off x="457200" y="3182112"/>
+            <a:off x="457200" y="3566160"/>
             <a:ext cx="8229600" cy="457200"/>
           </a:xfrm>
           <a:prstGeom prst="rect">
@@ -17030,6 +17515,23 @@
             <a:r>
               <a:rPr lang="en"/>
               <a:t>That’s a strategy</a:t>
+            </a:r>
+            <a:endParaRPr/>
+          </a:p>
+          <a:p>
+            <a:pPr indent="-330200" lvl="0" marL="457200" rtl="0" algn="l">
+              <a:spcBef>
+                <a:spcPts val="0"/>
+              </a:spcBef>
+              <a:spcAft>
+                <a:spcPts val="0"/>
+              </a:spcAft>
+              <a:buSzPts val="1600"/>
+              <a:buChar char="●"/>
+            </a:pPr>
+            <a:r>
+              <a:rPr lang="en"/>
+              <a:t>Does anything have to find its way around obstacles?</a:t>
             </a:r>
             <a:endParaRPr/>
           </a:p>
@@ -17710,6 +18212,7897 @@
 </p:sld>
 </file>
 
+<file path=ppt/slides/slide32.xml><?xml version="1.0" encoding="utf-8"?>
+<p:sld xmlns:a="http://schemas.openxmlformats.org/drawingml/2006/main" xmlns:p="http://schemas.openxmlformats.org/presentationml/2006/main" xmlns:r="http://schemas.openxmlformats.org/officeDocument/2006/relationships">
+  <p:cSld>
+    <p:spTree>
+      <p:nvGrpSpPr>
+        <p:cNvPr id="1" name=""/>
+        <p:cNvGrpSpPr/>
+        <p:nvPr/>
+      </p:nvGrpSpPr>
+      <p:grpSpPr/>
+      <p:sp>
+        <p:nvSpPr>
+          <p:cNvPr id="2" name="Title 1"/>
+          <p:cNvSpPr>
+            <a:spLocks noGrp="1"/>
+          </p:cNvSpPr>
+          <p:nvPr>
+            <p:ph type="title"/>
+          </p:nvPr>
+        </p:nvSpPr>
+        <p:spPr/>
+        <p:txBody>
+          <a:bodyPr/>
+          <a:lstStyle/>
+          <a:p>
+            <a:pPr indent="0" lvl="0" marL="0" rtl="0" algn="l">
+              <a:spcBef>
+                <a:spcPts val="0"/>
+              </a:spcBef>
+              <a:spcAft>
+                <a:spcPts val="0"/>
+              </a:spcAft>
+              <a:buNone/>
+            </a:pPr>
+            <a:r>
+              <a:rPr lang="en"/>
+              <a:t>Finding a Path</a:t>
+            </a:r>
+            <a:endParaRPr/>
+          </a:p>
+        </p:txBody>
+      </p:sp>
+      <p:sp>
+        <p:nvSpPr>
+          <p:cNvPr id="3" name="Text Placeholder 2"/>
+          <p:cNvSpPr>
+            <a:spLocks noGrp="1"/>
+          </p:cNvSpPr>
+          <p:nvPr>
+            <p:ph type="body" idx="1"/>
+          </p:nvPr>
+        </p:nvSpPr>
+        <p:spPr>
+          <a:xfrm>
+            <a:off x="311700" y="885950"/>
+            <a:ext cx="8520600" cy="521208"/>
+          </a:xfrm>
+        </p:spPr>
+        <p:txBody>
+          <a:bodyPr/>
+          <a:lstStyle/>
+          <a:p>
+            <a:pPr indent="-330200" lvl="0" marL="457200" rtl="0" algn="l">
+              <a:spcBef>
+                <a:spcPts val="0"/>
+              </a:spcBef>
+              <a:spcAft>
+                <a:spcPts val="0"/>
+              </a:spcAft>
+              <a:buSzPts val="1600"/>
+              <a:buChar char="●"/>
+            </a:pPr>
+            <a:r>
+              <a:rPr lang="en" b="1"/>
+              <a:t>The arcade rule looks one tile ahead. A wall can send the ghost the long way round.</a:t>
+            </a:r>
+            <a:endParaRPr/>
+          </a:p>
+        </p:txBody>
+      </p:sp>
+      <p:sp>
+        <p:nvSpPr>
+          <p:cNvPr id="4" name="Rectangle 3"/>
+          <p:cNvSpPr/>
+          <p:nvPr/>
+        </p:nvSpPr>
+        <p:spPr>
+          <a:xfrm>
+            <a:off x="1956816" y="1600200"/>
+            <a:ext cx="374904" cy="374904"/>
+          </a:xfrm>
+          <a:prstGeom prst="rect">
+            <a:avLst/>
+          </a:prstGeom>
+          <a:solidFill>
+            <a:srgbClr val="4A525A"/>
+          </a:solidFill>
+          <a:ln>
+            <a:noFill/>
+          </a:ln>
+          <a:effectLst/>
+        </p:spPr>
+        <p:style>
+          <a:lnRef idx="1">
+            <a:schemeClr val="accent1"/>
+          </a:lnRef>
+          <a:fillRef idx="3">
+            <a:schemeClr val="accent1"/>
+          </a:fillRef>
+          <a:effectRef idx="2">
+            <a:schemeClr val="accent1"/>
+          </a:effectRef>
+          <a:fontRef idx="minor">
+            <a:schemeClr val="lt1"/>
+          </a:fontRef>
+        </p:style>
+        <p:txBody>
+          <a:bodyPr rtlCol="0" anchor="ctr" wrap="square" lIns="73152" rIns="73152"/>
+          <a:lstStyle/>
+          <a:p>
+            <a:pPr algn="ctr"/>
+            <a:r>
+              <a:rPr sz="1400" b="1">
+                <a:solidFill>
+                  <a:srgbClr val="9AA3AB"/>
+                </a:solidFill>
+              </a:rPr>
+              <a:t/>
+            </a:r>
+          </a:p>
+        </p:txBody>
+      </p:sp>
+      <p:sp>
+        <p:nvSpPr>
+          <p:cNvPr id="5" name="Rectangle 4"/>
+          <p:cNvSpPr/>
+          <p:nvPr/>
+        </p:nvSpPr>
+        <p:spPr>
+          <a:xfrm>
+            <a:off x="2359152" y="1600200"/>
+            <a:ext cx="374904" cy="374904"/>
+          </a:xfrm>
+          <a:prstGeom prst="rect">
+            <a:avLst/>
+          </a:prstGeom>
+          <a:solidFill>
+            <a:srgbClr val="4A525A"/>
+          </a:solidFill>
+          <a:ln>
+            <a:noFill/>
+          </a:ln>
+          <a:effectLst/>
+        </p:spPr>
+        <p:style>
+          <a:lnRef idx="1">
+            <a:schemeClr val="accent1"/>
+          </a:lnRef>
+          <a:fillRef idx="3">
+            <a:schemeClr val="accent1"/>
+          </a:fillRef>
+          <a:effectRef idx="2">
+            <a:schemeClr val="accent1"/>
+          </a:effectRef>
+          <a:fontRef idx="minor">
+            <a:schemeClr val="lt1"/>
+          </a:fontRef>
+        </p:style>
+        <p:txBody>
+          <a:bodyPr rtlCol="0" anchor="ctr" wrap="square" lIns="73152" rIns="73152"/>
+          <a:lstStyle/>
+          <a:p>
+            <a:pPr algn="ctr"/>
+            <a:r>
+              <a:rPr sz="1400" b="1">
+                <a:solidFill>
+                  <a:srgbClr val="9AA3AB"/>
+                </a:solidFill>
+              </a:rPr>
+              <a:t/>
+            </a:r>
+          </a:p>
+        </p:txBody>
+      </p:sp>
+      <p:sp>
+        <p:nvSpPr>
+          <p:cNvPr id="6" name="Rectangle 5"/>
+          <p:cNvSpPr/>
+          <p:nvPr/>
+        </p:nvSpPr>
+        <p:spPr>
+          <a:xfrm>
+            <a:off x="2761488" y="1600200"/>
+            <a:ext cx="374904" cy="374904"/>
+          </a:xfrm>
+          <a:prstGeom prst="rect">
+            <a:avLst/>
+          </a:prstGeom>
+          <a:solidFill>
+            <a:srgbClr val="4A525A"/>
+          </a:solidFill>
+          <a:ln>
+            <a:noFill/>
+          </a:ln>
+          <a:effectLst/>
+        </p:spPr>
+        <p:style>
+          <a:lnRef idx="1">
+            <a:schemeClr val="accent1"/>
+          </a:lnRef>
+          <a:fillRef idx="3">
+            <a:schemeClr val="accent1"/>
+          </a:fillRef>
+          <a:effectRef idx="2">
+            <a:schemeClr val="accent1"/>
+          </a:effectRef>
+          <a:fontRef idx="minor">
+            <a:schemeClr val="lt1"/>
+          </a:fontRef>
+        </p:style>
+        <p:txBody>
+          <a:bodyPr rtlCol="0" anchor="ctr" wrap="square" lIns="73152" rIns="73152"/>
+          <a:lstStyle/>
+          <a:p>
+            <a:pPr algn="ctr"/>
+            <a:r>
+              <a:rPr sz="1400" b="1">
+                <a:solidFill>
+                  <a:srgbClr val="9AA3AB"/>
+                </a:solidFill>
+              </a:rPr>
+              <a:t/>
+            </a:r>
+          </a:p>
+        </p:txBody>
+      </p:sp>
+      <p:sp>
+        <p:nvSpPr>
+          <p:cNvPr id="7" name="Rectangle 6"/>
+          <p:cNvSpPr/>
+          <p:nvPr/>
+        </p:nvSpPr>
+        <p:spPr>
+          <a:xfrm>
+            <a:off x="3163824" y="1600200"/>
+            <a:ext cx="374904" cy="374904"/>
+          </a:xfrm>
+          <a:prstGeom prst="rect">
+            <a:avLst/>
+          </a:prstGeom>
+          <a:solidFill>
+            <a:srgbClr val="4A525A"/>
+          </a:solidFill>
+          <a:ln>
+            <a:noFill/>
+          </a:ln>
+          <a:effectLst/>
+        </p:spPr>
+        <p:style>
+          <a:lnRef idx="1">
+            <a:schemeClr val="accent1"/>
+          </a:lnRef>
+          <a:fillRef idx="3">
+            <a:schemeClr val="accent1"/>
+          </a:fillRef>
+          <a:effectRef idx="2">
+            <a:schemeClr val="accent1"/>
+          </a:effectRef>
+          <a:fontRef idx="minor">
+            <a:schemeClr val="lt1"/>
+          </a:fontRef>
+        </p:style>
+        <p:txBody>
+          <a:bodyPr rtlCol="0" anchor="ctr" wrap="square" lIns="73152" rIns="73152"/>
+          <a:lstStyle/>
+          <a:p>
+            <a:pPr algn="ctr"/>
+            <a:r>
+              <a:rPr sz="1400" b="1">
+                <a:solidFill>
+                  <a:srgbClr val="9AA3AB"/>
+                </a:solidFill>
+              </a:rPr>
+              <a:t/>
+            </a:r>
+          </a:p>
+        </p:txBody>
+      </p:sp>
+      <p:sp>
+        <p:nvSpPr>
+          <p:cNvPr id="8" name="Rectangle 7"/>
+          <p:cNvSpPr/>
+          <p:nvPr/>
+        </p:nvSpPr>
+        <p:spPr>
+          <a:xfrm>
+            <a:off x="3566160" y="1600200"/>
+            <a:ext cx="374904" cy="374904"/>
+          </a:xfrm>
+          <a:prstGeom prst="rect">
+            <a:avLst/>
+          </a:prstGeom>
+          <a:solidFill>
+            <a:srgbClr val="4A525A"/>
+          </a:solidFill>
+          <a:ln>
+            <a:noFill/>
+          </a:ln>
+          <a:effectLst/>
+        </p:spPr>
+        <p:style>
+          <a:lnRef idx="1">
+            <a:schemeClr val="accent1"/>
+          </a:lnRef>
+          <a:fillRef idx="3">
+            <a:schemeClr val="accent1"/>
+          </a:fillRef>
+          <a:effectRef idx="2">
+            <a:schemeClr val="accent1"/>
+          </a:effectRef>
+          <a:fontRef idx="minor">
+            <a:schemeClr val="lt1"/>
+          </a:fontRef>
+        </p:style>
+        <p:txBody>
+          <a:bodyPr rtlCol="0" anchor="ctr" wrap="square" lIns="73152" rIns="73152"/>
+          <a:lstStyle/>
+          <a:p>
+            <a:pPr algn="ctr"/>
+            <a:r>
+              <a:rPr sz="1400" b="1">
+                <a:solidFill>
+                  <a:srgbClr val="9AA3AB"/>
+                </a:solidFill>
+              </a:rPr>
+              <a:t/>
+            </a:r>
+          </a:p>
+        </p:txBody>
+      </p:sp>
+      <p:sp>
+        <p:nvSpPr>
+          <p:cNvPr id="9" name="Rectangle 8"/>
+          <p:cNvSpPr/>
+          <p:nvPr/>
+        </p:nvSpPr>
+        <p:spPr>
+          <a:xfrm>
+            <a:off x="3968496" y="1600200"/>
+            <a:ext cx="374904" cy="374904"/>
+          </a:xfrm>
+          <a:prstGeom prst="rect">
+            <a:avLst/>
+          </a:prstGeom>
+          <a:solidFill>
+            <a:srgbClr val="4A525A"/>
+          </a:solidFill>
+          <a:ln>
+            <a:noFill/>
+          </a:ln>
+          <a:effectLst/>
+        </p:spPr>
+        <p:style>
+          <a:lnRef idx="1">
+            <a:schemeClr val="accent1"/>
+          </a:lnRef>
+          <a:fillRef idx="3">
+            <a:schemeClr val="accent1"/>
+          </a:fillRef>
+          <a:effectRef idx="2">
+            <a:schemeClr val="accent1"/>
+          </a:effectRef>
+          <a:fontRef idx="minor">
+            <a:schemeClr val="lt1"/>
+          </a:fontRef>
+        </p:style>
+        <p:txBody>
+          <a:bodyPr rtlCol="0" anchor="ctr" wrap="square" lIns="73152" rIns="73152"/>
+          <a:lstStyle/>
+          <a:p>
+            <a:pPr algn="ctr"/>
+            <a:r>
+              <a:rPr sz="1400" b="1">
+                <a:solidFill>
+                  <a:srgbClr val="9AA3AB"/>
+                </a:solidFill>
+              </a:rPr>
+              <a:t/>
+            </a:r>
+          </a:p>
+        </p:txBody>
+      </p:sp>
+      <p:sp>
+        <p:nvSpPr>
+          <p:cNvPr id="10" name="Rectangle 9"/>
+          <p:cNvSpPr/>
+          <p:nvPr/>
+        </p:nvSpPr>
+        <p:spPr>
+          <a:xfrm>
+            <a:off x="4370832" y="1600200"/>
+            <a:ext cx="374904" cy="374904"/>
+          </a:xfrm>
+          <a:prstGeom prst="rect">
+            <a:avLst/>
+          </a:prstGeom>
+          <a:solidFill>
+            <a:srgbClr val="4A525A"/>
+          </a:solidFill>
+          <a:ln>
+            <a:noFill/>
+          </a:ln>
+          <a:effectLst/>
+        </p:spPr>
+        <p:style>
+          <a:lnRef idx="1">
+            <a:schemeClr val="accent1"/>
+          </a:lnRef>
+          <a:fillRef idx="3">
+            <a:schemeClr val="accent1"/>
+          </a:fillRef>
+          <a:effectRef idx="2">
+            <a:schemeClr val="accent1"/>
+          </a:effectRef>
+          <a:fontRef idx="minor">
+            <a:schemeClr val="lt1"/>
+          </a:fontRef>
+        </p:style>
+        <p:txBody>
+          <a:bodyPr rtlCol="0" anchor="ctr" wrap="square" lIns="73152" rIns="73152"/>
+          <a:lstStyle/>
+          <a:p>
+            <a:pPr algn="ctr"/>
+            <a:r>
+              <a:rPr sz="1400" b="1">
+                <a:solidFill>
+                  <a:srgbClr val="9AA3AB"/>
+                </a:solidFill>
+              </a:rPr>
+              <a:t/>
+            </a:r>
+          </a:p>
+        </p:txBody>
+      </p:sp>
+      <p:sp>
+        <p:nvSpPr>
+          <p:cNvPr id="11" name="Rectangle 10"/>
+          <p:cNvSpPr/>
+          <p:nvPr/>
+        </p:nvSpPr>
+        <p:spPr>
+          <a:xfrm>
+            <a:off x="4773168" y="1600200"/>
+            <a:ext cx="374904" cy="374904"/>
+          </a:xfrm>
+          <a:prstGeom prst="rect">
+            <a:avLst/>
+          </a:prstGeom>
+          <a:solidFill>
+            <a:srgbClr val="4A525A"/>
+          </a:solidFill>
+          <a:ln>
+            <a:noFill/>
+          </a:ln>
+          <a:effectLst/>
+        </p:spPr>
+        <p:style>
+          <a:lnRef idx="1">
+            <a:schemeClr val="accent1"/>
+          </a:lnRef>
+          <a:fillRef idx="3">
+            <a:schemeClr val="accent1"/>
+          </a:fillRef>
+          <a:effectRef idx="2">
+            <a:schemeClr val="accent1"/>
+          </a:effectRef>
+          <a:fontRef idx="minor">
+            <a:schemeClr val="lt1"/>
+          </a:fontRef>
+        </p:style>
+        <p:txBody>
+          <a:bodyPr rtlCol="0" anchor="ctr" wrap="square" lIns="73152" rIns="73152"/>
+          <a:lstStyle/>
+          <a:p>
+            <a:pPr algn="ctr"/>
+            <a:r>
+              <a:rPr sz="1400" b="1">
+                <a:solidFill>
+                  <a:srgbClr val="9AA3AB"/>
+                </a:solidFill>
+              </a:rPr>
+              <a:t/>
+            </a:r>
+          </a:p>
+        </p:txBody>
+      </p:sp>
+      <p:sp>
+        <p:nvSpPr>
+          <p:cNvPr id="12" name="Rectangle 11"/>
+          <p:cNvSpPr/>
+          <p:nvPr/>
+        </p:nvSpPr>
+        <p:spPr>
+          <a:xfrm>
+            <a:off x="5175504" y="1600200"/>
+            <a:ext cx="374904" cy="374904"/>
+          </a:xfrm>
+          <a:prstGeom prst="rect">
+            <a:avLst/>
+          </a:prstGeom>
+          <a:solidFill>
+            <a:srgbClr val="4A525A"/>
+          </a:solidFill>
+          <a:ln>
+            <a:noFill/>
+          </a:ln>
+          <a:effectLst/>
+        </p:spPr>
+        <p:style>
+          <a:lnRef idx="1">
+            <a:schemeClr val="accent1"/>
+          </a:lnRef>
+          <a:fillRef idx="3">
+            <a:schemeClr val="accent1"/>
+          </a:fillRef>
+          <a:effectRef idx="2">
+            <a:schemeClr val="accent1"/>
+          </a:effectRef>
+          <a:fontRef idx="minor">
+            <a:schemeClr val="lt1"/>
+          </a:fontRef>
+        </p:style>
+        <p:txBody>
+          <a:bodyPr rtlCol="0" anchor="ctr" wrap="square" lIns="73152" rIns="73152"/>
+          <a:lstStyle/>
+          <a:p>
+            <a:pPr algn="ctr"/>
+            <a:r>
+              <a:rPr sz="1400" b="1">
+                <a:solidFill>
+                  <a:srgbClr val="9AA3AB"/>
+                </a:solidFill>
+              </a:rPr>
+              <a:t/>
+            </a:r>
+          </a:p>
+        </p:txBody>
+      </p:sp>
+      <p:sp>
+        <p:nvSpPr>
+          <p:cNvPr id="13" name="Rectangle 12"/>
+          <p:cNvSpPr/>
+          <p:nvPr/>
+        </p:nvSpPr>
+        <p:spPr>
+          <a:xfrm>
+            <a:off x="5577840" y="1600200"/>
+            <a:ext cx="374904" cy="374904"/>
+          </a:xfrm>
+          <a:prstGeom prst="rect">
+            <a:avLst/>
+          </a:prstGeom>
+          <a:solidFill>
+            <a:srgbClr val="4A525A"/>
+          </a:solidFill>
+          <a:ln>
+            <a:noFill/>
+          </a:ln>
+          <a:effectLst/>
+        </p:spPr>
+        <p:style>
+          <a:lnRef idx="1">
+            <a:schemeClr val="accent1"/>
+          </a:lnRef>
+          <a:fillRef idx="3">
+            <a:schemeClr val="accent1"/>
+          </a:fillRef>
+          <a:effectRef idx="2">
+            <a:schemeClr val="accent1"/>
+          </a:effectRef>
+          <a:fontRef idx="minor">
+            <a:schemeClr val="lt1"/>
+          </a:fontRef>
+        </p:style>
+        <p:txBody>
+          <a:bodyPr rtlCol="0" anchor="ctr" wrap="square" lIns="73152" rIns="73152"/>
+          <a:lstStyle/>
+          <a:p>
+            <a:pPr algn="ctr"/>
+            <a:r>
+              <a:rPr sz="1400" b="1">
+                <a:solidFill>
+                  <a:srgbClr val="9AA3AB"/>
+                </a:solidFill>
+              </a:rPr>
+              <a:t/>
+            </a:r>
+          </a:p>
+        </p:txBody>
+      </p:sp>
+      <p:sp>
+        <p:nvSpPr>
+          <p:cNvPr id="14" name="Rectangle 13"/>
+          <p:cNvSpPr/>
+          <p:nvPr/>
+        </p:nvSpPr>
+        <p:spPr>
+          <a:xfrm>
+            <a:off x="5980176" y="1600200"/>
+            <a:ext cx="374904" cy="374904"/>
+          </a:xfrm>
+          <a:prstGeom prst="rect">
+            <a:avLst/>
+          </a:prstGeom>
+          <a:solidFill>
+            <a:srgbClr val="4A525A"/>
+          </a:solidFill>
+          <a:ln>
+            <a:noFill/>
+          </a:ln>
+          <a:effectLst/>
+        </p:spPr>
+        <p:style>
+          <a:lnRef idx="1">
+            <a:schemeClr val="accent1"/>
+          </a:lnRef>
+          <a:fillRef idx="3">
+            <a:schemeClr val="accent1"/>
+          </a:fillRef>
+          <a:effectRef idx="2">
+            <a:schemeClr val="accent1"/>
+          </a:effectRef>
+          <a:fontRef idx="minor">
+            <a:schemeClr val="lt1"/>
+          </a:fontRef>
+        </p:style>
+        <p:txBody>
+          <a:bodyPr rtlCol="0" anchor="ctr" wrap="square" lIns="73152" rIns="73152"/>
+          <a:lstStyle/>
+          <a:p>
+            <a:pPr algn="ctr"/>
+            <a:r>
+              <a:rPr sz="1400" b="1">
+                <a:solidFill>
+                  <a:srgbClr val="9AA3AB"/>
+                </a:solidFill>
+              </a:rPr>
+              <a:t/>
+            </a:r>
+          </a:p>
+        </p:txBody>
+      </p:sp>
+      <p:sp>
+        <p:nvSpPr>
+          <p:cNvPr id="15" name="Rectangle 14"/>
+          <p:cNvSpPr/>
+          <p:nvPr/>
+        </p:nvSpPr>
+        <p:spPr>
+          <a:xfrm>
+            <a:off x="6382512" y="1600200"/>
+            <a:ext cx="374904" cy="374904"/>
+          </a:xfrm>
+          <a:prstGeom prst="rect">
+            <a:avLst/>
+          </a:prstGeom>
+          <a:solidFill>
+            <a:srgbClr val="4A525A"/>
+          </a:solidFill>
+          <a:ln>
+            <a:noFill/>
+          </a:ln>
+          <a:effectLst/>
+        </p:spPr>
+        <p:style>
+          <a:lnRef idx="1">
+            <a:schemeClr val="accent1"/>
+          </a:lnRef>
+          <a:fillRef idx="3">
+            <a:schemeClr val="accent1"/>
+          </a:fillRef>
+          <a:effectRef idx="2">
+            <a:schemeClr val="accent1"/>
+          </a:effectRef>
+          <a:fontRef idx="minor">
+            <a:schemeClr val="lt1"/>
+          </a:fontRef>
+        </p:style>
+        <p:txBody>
+          <a:bodyPr rtlCol="0" anchor="ctr" wrap="square" lIns="73152" rIns="73152"/>
+          <a:lstStyle/>
+          <a:p>
+            <a:pPr algn="ctr"/>
+            <a:r>
+              <a:rPr sz="1400" b="1">
+                <a:solidFill>
+                  <a:srgbClr val="9AA3AB"/>
+                </a:solidFill>
+              </a:rPr>
+              <a:t/>
+            </a:r>
+          </a:p>
+        </p:txBody>
+      </p:sp>
+      <p:sp>
+        <p:nvSpPr>
+          <p:cNvPr id="16" name="Rectangle 15"/>
+          <p:cNvSpPr/>
+          <p:nvPr/>
+        </p:nvSpPr>
+        <p:spPr>
+          <a:xfrm>
+            <a:off x="6784848" y="1600200"/>
+            <a:ext cx="374904" cy="374904"/>
+          </a:xfrm>
+          <a:prstGeom prst="rect">
+            <a:avLst/>
+          </a:prstGeom>
+          <a:solidFill>
+            <a:srgbClr val="4A525A"/>
+          </a:solidFill>
+          <a:ln>
+            <a:noFill/>
+          </a:ln>
+          <a:effectLst/>
+        </p:spPr>
+        <p:style>
+          <a:lnRef idx="1">
+            <a:schemeClr val="accent1"/>
+          </a:lnRef>
+          <a:fillRef idx="3">
+            <a:schemeClr val="accent1"/>
+          </a:fillRef>
+          <a:effectRef idx="2">
+            <a:schemeClr val="accent1"/>
+          </a:effectRef>
+          <a:fontRef idx="minor">
+            <a:schemeClr val="lt1"/>
+          </a:fontRef>
+        </p:style>
+        <p:txBody>
+          <a:bodyPr rtlCol="0" anchor="ctr" wrap="square" lIns="73152" rIns="73152"/>
+          <a:lstStyle/>
+          <a:p>
+            <a:pPr algn="ctr"/>
+            <a:r>
+              <a:rPr sz="1400" b="1">
+                <a:solidFill>
+                  <a:srgbClr val="9AA3AB"/>
+                </a:solidFill>
+              </a:rPr>
+              <a:t/>
+            </a:r>
+          </a:p>
+        </p:txBody>
+      </p:sp>
+      <p:sp>
+        <p:nvSpPr>
+          <p:cNvPr id="17" name="Rectangle 16"/>
+          <p:cNvSpPr/>
+          <p:nvPr/>
+        </p:nvSpPr>
+        <p:spPr>
+          <a:xfrm>
+            <a:off x="1956816" y="2002536"/>
+            <a:ext cx="374904" cy="374904"/>
+          </a:xfrm>
+          <a:prstGeom prst="rect">
+            <a:avLst/>
+          </a:prstGeom>
+          <a:solidFill>
+            <a:srgbClr val="4A525A"/>
+          </a:solidFill>
+          <a:ln>
+            <a:noFill/>
+          </a:ln>
+          <a:effectLst/>
+        </p:spPr>
+        <p:style>
+          <a:lnRef idx="1">
+            <a:schemeClr val="accent1"/>
+          </a:lnRef>
+          <a:fillRef idx="3">
+            <a:schemeClr val="accent1"/>
+          </a:fillRef>
+          <a:effectRef idx="2">
+            <a:schemeClr val="accent1"/>
+          </a:effectRef>
+          <a:fontRef idx="minor">
+            <a:schemeClr val="lt1"/>
+          </a:fontRef>
+        </p:style>
+        <p:txBody>
+          <a:bodyPr rtlCol="0" anchor="ctr" wrap="square" lIns="73152" rIns="73152"/>
+          <a:lstStyle/>
+          <a:p>
+            <a:pPr algn="ctr"/>
+            <a:r>
+              <a:rPr sz="1400" b="1">
+                <a:solidFill>
+                  <a:srgbClr val="9AA3AB"/>
+                </a:solidFill>
+              </a:rPr>
+              <a:t/>
+            </a:r>
+          </a:p>
+        </p:txBody>
+      </p:sp>
+      <p:sp>
+        <p:nvSpPr>
+          <p:cNvPr id="18" name="Rectangle 17"/>
+          <p:cNvSpPr/>
+          <p:nvPr/>
+        </p:nvSpPr>
+        <p:spPr>
+          <a:xfrm>
+            <a:off x="2359152" y="2002536"/>
+            <a:ext cx="374904" cy="374904"/>
+          </a:xfrm>
+          <a:prstGeom prst="rect">
+            <a:avLst/>
+          </a:prstGeom>
+          <a:solidFill>
+            <a:srgbClr val="17191C"/>
+          </a:solidFill>
+          <a:ln>
+            <a:noFill/>
+          </a:ln>
+          <a:effectLst/>
+        </p:spPr>
+        <p:style>
+          <a:lnRef idx="1">
+            <a:schemeClr val="accent1"/>
+          </a:lnRef>
+          <a:fillRef idx="3">
+            <a:schemeClr val="accent1"/>
+          </a:fillRef>
+          <a:effectRef idx="2">
+            <a:schemeClr val="accent1"/>
+          </a:effectRef>
+          <a:fontRef idx="minor">
+            <a:schemeClr val="lt1"/>
+          </a:fontRef>
+        </p:style>
+        <p:txBody>
+          <a:bodyPr rtlCol="0" anchor="ctr" wrap="square" lIns="73152" rIns="73152"/>
+          <a:lstStyle/>
+          <a:p>
+            <a:pPr algn="ctr"/>
+            <a:r>
+              <a:rPr sz="1400" b="1">
+                <a:solidFill>
+                  <a:srgbClr val="9AA3AB"/>
+                </a:solidFill>
+              </a:rPr>
+              <a:t/>
+            </a:r>
+          </a:p>
+        </p:txBody>
+      </p:sp>
+      <p:sp>
+        <p:nvSpPr>
+          <p:cNvPr id="19" name="Rectangle 18"/>
+          <p:cNvSpPr/>
+          <p:nvPr/>
+        </p:nvSpPr>
+        <p:spPr>
+          <a:xfrm>
+            <a:off x="2761488" y="2002536"/>
+            <a:ext cx="374904" cy="374904"/>
+          </a:xfrm>
+          <a:prstGeom prst="rect">
+            <a:avLst/>
+          </a:prstGeom>
+          <a:solidFill>
+            <a:srgbClr val="17191C"/>
+          </a:solidFill>
+          <a:ln>
+            <a:noFill/>
+          </a:ln>
+          <a:effectLst/>
+        </p:spPr>
+        <p:style>
+          <a:lnRef idx="1">
+            <a:schemeClr val="accent1"/>
+          </a:lnRef>
+          <a:fillRef idx="3">
+            <a:schemeClr val="accent1"/>
+          </a:fillRef>
+          <a:effectRef idx="2">
+            <a:schemeClr val="accent1"/>
+          </a:effectRef>
+          <a:fontRef idx="minor">
+            <a:schemeClr val="lt1"/>
+          </a:fontRef>
+        </p:style>
+        <p:txBody>
+          <a:bodyPr rtlCol="0" anchor="ctr" wrap="square" lIns="73152" rIns="73152"/>
+          <a:lstStyle/>
+          <a:p>
+            <a:pPr algn="ctr"/>
+            <a:r>
+              <a:rPr sz="1400" b="1">
+                <a:solidFill>
+                  <a:srgbClr val="9AA3AB"/>
+                </a:solidFill>
+              </a:rPr>
+              <a:t/>
+            </a:r>
+          </a:p>
+        </p:txBody>
+      </p:sp>
+      <p:sp>
+        <p:nvSpPr>
+          <p:cNvPr id="20" name="Rectangle 19"/>
+          <p:cNvSpPr/>
+          <p:nvPr/>
+        </p:nvSpPr>
+        <p:spPr>
+          <a:xfrm>
+            <a:off x="3163824" y="2002536"/>
+            <a:ext cx="374904" cy="374904"/>
+          </a:xfrm>
+          <a:prstGeom prst="rect">
+            <a:avLst/>
+          </a:prstGeom>
+          <a:solidFill>
+            <a:srgbClr val="1E9BA5"/>
+          </a:solidFill>
+          <a:ln>
+            <a:noFill/>
+          </a:ln>
+          <a:effectLst/>
+        </p:spPr>
+        <p:style>
+          <a:lnRef idx="1">
+            <a:schemeClr val="accent1"/>
+          </a:lnRef>
+          <a:fillRef idx="3">
+            <a:schemeClr val="accent1"/>
+          </a:fillRef>
+          <a:effectRef idx="2">
+            <a:schemeClr val="accent1"/>
+          </a:effectRef>
+          <a:fontRef idx="minor">
+            <a:schemeClr val="lt1"/>
+          </a:fontRef>
+        </p:style>
+        <p:txBody>
+          <a:bodyPr rtlCol="0" anchor="ctr" wrap="square" lIns="73152" rIns="73152"/>
+          <a:lstStyle/>
+          <a:p>
+            <a:pPr algn="ctr"/>
+            <a:r>
+              <a:rPr sz="1400" b="1">
+                <a:solidFill>
+                  <a:srgbClr val="DEE2E6"/>
+                </a:solidFill>
+              </a:rPr>
+              <a:t>T</a:t>
+            </a:r>
+          </a:p>
+        </p:txBody>
+      </p:sp>
+      <p:sp>
+        <p:nvSpPr>
+          <p:cNvPr id="21" name="Rectangle 20"/>
+          <p:cNvSpPr/>
+          <p:nvPr/>
+        </p:nvSpPr>
+        <p:spPr>
+          <a:xfrm>
+            <a:off x="3566160" y="2002536"/>
+            <a:ext cx="374904" cy="374904"/>
+          </a:xfrm>
+          <a:prstGeom prst="rect">
+            <a:avLst/>
+          </a:prstGeom>
+          <a:solidFill>
+            <a:srgbClr val="17191C"/>
+          </a:solidFill>
+          <a:ln>
+            <a:noFill/>
+          </a:ln>
+          <a:effectLst/>
+        </p:spPr>
+        <p:style>
+          <a:lnRef idx="1">
+            <a:schemeClr val="accent1"/>
+          </a:lnRef>
+          <a:fillRef idx="3">
+            <a:schemeClr val="accent1"/>
+          </a:fillRef>
+          <a:effectRef idx="2">
+            <a:schemeClr val="accent1"/>
+          </a:effectRef>
+          <a:fontRef idx="minor">
+            <a:schemeClr val="lt1"/>
+          </a:fontRef>
+        </p:style>
+        <p:txBody>
+          <a:bodyPr rtlCol="0" anchor="ctr" wrap="square" lIns="73152" rIns="73152"/>
+          <a:lstStyle/>
+          <a:p>
+            <a:pPr algn="ctr"/>
+            <a:r>
+              <a:rPr sz="1400" b="1">
+                <a:solidFill>
+                  <a:srgbClr val="9AA3AB"/>
+                </a:solidFill>
+              </a:rPr>
+              <a:t/>
+            </a:r>
+          </a:p>
+        </p:txBody>
+      </p:sp>
+      <p:sp>
+        <p:nvSpPr>
+          <p:cNvPr id="22" name="Rectangle 21"/>
+          <p:cNvSpPr/>
+          <p:nvPr/>
+        </p:nvSpPr>
+        <p:spPr>
+          <a:xfrm>
+            <a:off x="3968496" y="2002536"/>
+            <a:ext cx="374904" cy="374904"/>
+          </a:xfrm>
+          <a:prstGeom prst="rect">
+            <a:avLst/>
+          </a:prstGeom>
+          <a:solidFill>
+            <a:srgbClr val="17191C"/>
+          </a:solidFill>
+          <a:ln>
+            <a:noFill/>
+          </a:ln>
+          <a:effectLst/>
+        </p:spPr>
+        <p:style>
+          <a:lnRef idx="1">
+            <a:schemeClr val="accent1"/>
+          </a:lnRef>
+          <a:fillRef idx="3">
+            <a:schemeClr val="accent1"/>
+          </a:fillRef>
+          <a:effectRef idx="2">
+            <a:schemeClr val="accent1"/>
+          </a:effectRef>
+          <a:fontRef idx="minor">
+            <a:schemeClr val="lt1"/>
+          </a:fontRef>
+        </p:style>
+        <p:txBody>
+          <a:bodyPr rtlCol="0" anchor="ctr" wrap="square" lIns="73152" rIns="73152"/>
+          <a:lstStyle/>
+          <a:p>
+            <a:pPr algn="ctr"/>
+            <a:r>
+              <a:rPr sz="1400" b="1">
+                <a:solidFill>
+                  <a:srgbClr val="9AA3AB"/>
+                </a:solidFill>
+              </a:rPr>
+              <a:t/>
+            </a:r>
+          </a:p>
+        </p:txBody>
+      </p:sp>
+      <p:sp>
+        <p:nvSpPr>
+          <p:cNvPr id="23" name="Rectangle 22"/>
+          <p:cNvSpPr/>
+          <p:nvPr/>
+        </p:nvSpPr>
+        <p:spPr>
+          <a:xfrm>
+            <a:off x="4370832" y="2002536"/>
+            <a:ext cx="374904" cy="374904"/>
+          </a:xfrm>
+          <a:prstGeom prst="rect">
+            <a:avLst/>
+          </a:prstGeom>
+          <a:solidFill>
+            <a:srgbClr val="17191C"/>
+          </a:solidFill>
+          <a:ln>
+            <a:noFill/>
+          </a:ln>
+          <a:effectLst/>
+        </p:spPr>
+        <p:style>
+          <a:lnRef idx="1">
+            <a:schemeClr val="accent1"/>
+          </a:lnRef>
+          <a:fillRef idx="3">
+            <a:schemeClr val="accent1"/>
+          </a:fillRef>
+          <a:effectRef idx="2">
+            <a:schemeClr val="accent1"/>
+          </a:effectRef>
+          <a:fontRef idx="minor">
+            <a:schemeClr val="lt1"/>
+          </a:fontRef>
+        </p:style>
+        <p:txBody>
+          <a:bodyPr rtlCol="0" anchor="ctr" wrap="square" lIns="73152" rIns="73152"/>
+          <a:lstStyle/>
+          <a:p>
+            <a:pPr algn="ctr"/>
+            <a:r>
+              <a:rPr sz="1400" b="1">
+                <a:solidFill>
+                  <a:srgbClr val="9AA3AB"/>
+                </a:solidFill>
+              </a:rPr>
+              <a:t/>
+            </a:r>
+          </a:p>
+        </p:txBody>
+      </p:sp>
+      <p:sp>
+        <p:nvSpPr>
+          <p:cNvPr id="24" name="Rectangle 23"/>
+          <p:cNvSpPr/>
+          <p:nvPr/>
+        </p:nvSpPr>
+        <p:spPr>
+          <a:xfrm>
+            <a:off x="4773168" y="2002536"/>
+            <a:ext cx="374904" cy="374904"/>
+          </a:xfrm>
+          <a:prstGeom prst="rect">
+            <a:avLst/>
+          </a:prstGeom>
+          <a:solidFill>
+            <a:srgbClr val="17191C"/>
+          </a:solidFill>
+          <a:ln>
+            <a:noFill/>
+          </a:ln>
+          <a:effectLst/>
+        </p:spPr>
+        <p:style>
+          <a:lnRef idx="1">
+            <a:schemeClr val="accent1"/>
+          </a:lnRef>
+          <a:fillRef idx="3">
+            <a:schemeClr val="accent1"/>
+          </a:fillRef>
+          <a:effectRef idx="2">
+            <a:schemeClr val="accent1"/>
+          </a:effectRef>
+          <a:fontRef idx="minor">
+            <a:schemeClr val="lt1"/>
+          </a:fontRef>
+        </p:style>
+        <p:txBody>
+          <a:bodyPr rtlCol="0" anchor="ctr" wrap="square" lIns="73152" rIns="73152"/>
+          <a:lstStyle/>
+          <a:p>
+            <a:pPr algn="ctr"/>
+            <a:r>
+              <a:rPr sz="1400" b="1">
+                <a:solidFill>
+                  <a:srgbClr val="9AA3AB"/>
+                </a:solidFill>
+              </a:rPr>
+              <a:t/>
+            </a:r>
+          </a:p>
+        </p:txBody>
+      </p:sp>
+      <p:sp>
+        <p:nvSpPr>
+          <p:cNvPr id="25" name="Rectangle 24"/>
+          <p:cNvSpPr/>
+          <p:nvPr/>
+        </p:nvSpPr>
+        <p:spPr>
+          <a:xfrm>
+            <a:off x="5175504" y="2002536"/>
+            <a:ext cx="374904" cy="374904"/>
+          </a:xfrm>
+          <a:prstGeom prst="rect">
+            <a:avLst/>
+          </a:prstGeom>
+          <a:solidFill>
+            <a:srgbClr val="17191C"/>
+          </a:solidFill>
+          <a:ln>
+            <a:noFill/>
+          </a:ln>
+          <a:effectLst/>
+        </p:spPr>
+        <p:style>
+          <a:lnRef idx="1">
+            <a:schemeClr val="accent1"/>
+          </a:lnRef>
+          <a:fillRef idx="3">
+            <a:schemeClr val="accent1"/>
+          </a:fillRef>
+          <a:effectRef idx="2">
+            <a:schemeClr val="accent1"/>
+          </a:effectRef>
+          <a:fontRef idx="minor">
+            <a:schemeClr val="lt1"/>
+          </a:fontRef>
+        </p:style>
+        <p:txBody>
+          <a:bodyPr rtlCol="0" anchor="ctr" wrap="square" lIns="73152" rIns="73152"/>
+          <a:lstStyle/>
+          <a:p>
+            <a:pPr algn="ctr"/>
+            <a:r>
+              <a:rPr sz="1400" b="1">
+                <a:solidFill>
+                  <a:srgbClr val="9AA3AB"/>
+                </a:solidFill>
+              </a:rPr>
+              <a:t/>
+            </a:r>
+          </a:p>
+        </p:txBody>
+      </p:sp>
+      <p:sp>
+        <p:nvSpPr>
+          <p:cNvPr id="26" name="Rectangle 25"/>
+          <p:cNvSpPr/>
+          <p:nvPr/>
+        </p:nvSpPr>
+        <p:spPr>
+          <a:xfrm>
+            <a:off x="5577840" y="2002536"/>
+            <a:ext cx="374904" cy="374904"/>
+          </a:xfrm>
+          <a:prstGeom prst="rect">
+            <a:avLst/>
+          </a:prstGeom>
+          <a:solidFill>
+            <a:srgbClr val="17191C"/>
+          </a:solidFill>
+          <a:ln>
+            <a:noFill/>
+          </a:ln>
+          <a:effectLst/>
+        </p:spPr>
+        <p:style>
+          <a:lnRef idx="1">
+            <a:schemeClr val="accent1"/>
+          </a:lnRef>
+          <a:fillRef idx="3">
+            <a:schemeClr val="accent1"/>
+          </a:fillRef>
+          <a:effectRef idx="2">
+            <a:schemeClr val="accent1"/>
+          </a:effectRef>
+          <a:fontRef idx="minor">
+            <a:schemeClr val="lt1"/>
+          </a:fontRef>
+        </p:style>
+        <p:txBody>
+          <a:bodyPr rtlCol="0" anchor="ctr" wrap="square" lIns="73152" rIns="73152"/>
+          <a:lstStyle/>
+          <a:p>
+            <a:pPr algn="ctr"/>
+            <a:r>
+              <a:rPr sz="1400" b="1">
+                <a:solidFill>
+                  <a:srgbClr val="9AA3AB"/>
+                </a:solidFill>
+              </a:rPr>
+              <a:t/>
+            </a:r>
+          </a:p>
+        </p:txBody>
+      </p:sp>
+      <p:sp>
+        <p:nvSpPr>
+          <p:cNvPr id="27" name="Rectangle 26"/>
+          <p:cNvSpPr/>
+          <p:nvPr/>
+        </p:nvSpPr>
+        <p:spPr>
+          <a:xfrm>
+            <a:off x="5980176" y="2002536"/>
+            <a:ext cx="374904" cy="374904"/>
+          </a:xfrm>
+          <a:prstGeom prst="rect">
+            <a:avLst/>
+          </a:prstGeom>
+          <a:solidFill>
+            <a:srgbClr val="17191C"/>
+          </a:solidFill>
+          <a:ln>
+            <a:noFill/>
+          </a:ln>
+          <a:effectLst/>
+        </p:spPr>
+        <p:style>
+          <a:lnRef idx="1">
+            <a:schemeClr val="accent1"/>
+          </a:lnRef>
+          <a:fillRef idx="3">
+            <a:schemeClr val="accent1"/>
+          </a:fillRef>
+          <a:effectRef idx="2">
+            <a:schemeClr val="accent1"/>
+          </a:effectRef>
+          <a:fontRef idx="minor">
+            <a:schemeClr val="lt1"/>
+          </a:fontRef>
+        </p:style>
+        <p:txBody>
+          <a:bodyPr rtlCol="0" anchor="ctr" wrap="square" lIns="73152" rIns="73152"/>
+          <a:lstStyle/>
+          <a:p>
+            <a:pPr algn="ctr"/>
+            <a:r>
+              <a:rPr sz="1400" b="1">
+                <a:solidFill>
+                  <a:srgbClr val="9AA3AB"/>
+                </a:solidFill>
+              </a:rPr>
+              <a:t/>
+            </a:r>
+          </a:p>
+        </p:txBody>
+      </p:sp>
+      <p:sp>
+        <p:nvSpPr>
+          <p:cNvPr id="28" name="Rectangle 27"/>
+          <p:cNvSpPr/>
+          <p:nvPr/>
+        </p:nvSpPr>
+        <p:spPr>
+          <a:xfrm>
+            <a:off x="6382512" y="2002536"/>
+            <a:ext cx="374904" cy="374904"/>
+          </a:xfrm>
+          <a:prstGeom prst="rect">
+            <a:avLst/>
+          </a:prstGeom>
+          <a:solidFill>
+            <a:srgbClr val="17191C"/>
+          </a:solidFill>
+          <a:ln>
+            <a:noFill/>
+          </a:ln>
+          <a:effectLst/>
+        </p:spPr>
+        <p:style>
+          <a:lnRef idx="1">
+            <a:schemeClr val="accent1"/>
+          </a:lnRef>
+          <a:fillRef idx="3">
+            <a:schemeClr val="accent1"/>
+          </a:fillRef>
+          <a:effectRef idx="2">
+            <a:schemeClr val="accent1"/>
+          </a:effectRef>
+          <a:fontRef idx="minor">
+            <a:schemeClr val="lt1"/>
+          </a:fontRef>
+        </p:style>
+        <p:txBody>
+          <a:bodyPr rtlCol="0" anchor="ctr" wrap="square" lIns="73152" rIns="73152"/>
+          <a:lstStyle/>
+          <a:p>
+            <a:pPr algn="ctr"/>
+            <a:r>
+              <a:rPr sz="1400" b="1">
+                <a:solidFill>
+                  <a:srgbClr val="9AA3AB"/>
+                </a:solidFill>
+              </a:rPr>
+              <a:t/>
+            </a:r>
+          </a:p>
+        </p:txBody>
+      </p:sp>
+      <p:sp>
+        <p:nvSpPr>
+          <p:cNvPr id="29" name="Rectangle 28"/>
+          <p:cNvSpPr/>
+          <p:nvPr/>
+        </p:nvSpPr>
+        <p:spPr>
+          <a:xfrm>
+            <a:off x="6784848" y="2002536"/>
+            <a:ext cx="374904" cy="374904"/>
+          </a:xfrm>
+          <a:prstGeom prst="rect">
+            <a:avLst/>
+          </a:prstGeom>
+          <a:solidFill>
+            <a:srgbClr val="4A525A"/>
+          </a:solidFill>
+          <a:ln>
+            <a:noFill/>
+          </a:ln>
+          <a:effectLst/>
+        </p:spPr>
+        <p:style>
+          <a:lnRef idx="1">
+            <a:schemeClr val="accent1"/>
+          </a:lnRef>
+          <a:fillRef idx="3">
+            <a:schemeClr val="accent1"/>
+          </a:fillRef>
+          <a:effectRef idx="2">
+            <a:schemeClr val="accent1"/>
+          </a:effectRef>
+          <a:fontRef idx="minor">
+            <a:schemeClr val="lt1"/>
+          </a:fontRef>
+        </p:style>
+        <p:txBody>
+          <a:bodyPr rtlCol="0" anchor="ctr" wrap="square" lIns="73152" rIns="73152"/>
+          <a:lstStyle/>
+          <a:p>
+            <a:pPr algn="ctr"/>
+            <a:r>
+              <a:rPr sz="1400" b="1">
+                <a:solidFill>
+                  <a:srgbClr val="9AA3AB"/>
+                </a:solidFill>
+              </a:rPr>
+              <a:t/>
+            </a:r>
+          </a:p>
+        </p:txBody>
+      </p:sp>
+      <p:sp>
+        <p:nvSpPr>
+          <p:cNvPr id="30" name="Rectangle 29"/>
+          <p:cNvSpPr/>
+          <p:nvPr/>
+        </p:nvSpPr>
+        <p:spPr>
+          <a:xfrm>
+            <a:off x="1956816" y="2404872"/>
+            <a:ext cx="374904" cy="374904"/>
+          </a:xfrm>
+          <a:prstGeom prst="rect">
+            <a:avLst/>
+          </a:prstGeom>
+          <a:solidFill>
+            <a:srgbClr val="4A525A"/>
+          </a:solidFill>
+          <a:ln>
+            <a:noFill/>
+          </a:ln>
+          <a:effectLst/>
+        </p:spPr>
+        <p:style>
+          <a:lnRef idx="1">
+            <a:schemeClr val="accent1"/>
+          </a:lnRef>
+          <a:fillRef idx="3">
+            <a:schemeClr val="accent1"/>
+          </a:fillRef>
+          <a:effectRef idx="2">
+            <a:schemeClr val="accent1"/>
+          </a:effectRef>
+          <a:fontRef idx="minor">
+            <a:schemeClr val="lt1"/>
+          </a:fontRef>
+        </p:style>
+        <p:txBody>
+          <a:bodyPr rtlCol="0" anchor="ctr" wrap="square" lIns="73152" rIns="73152"/>
+          <a:lstStyle/>
+          <a:p>
+            <a:pPr algn="ctr"/>
+            <a:r>
+              <a:rPr sz="1400" b="1">
+                <a:solidFill>
+                  <a:srgbClr val="9AA3AB"/>
+                </a:solidFill>
+              </a:rPr>
+              <a:t/>
+            </a:r>
+          </a:p>
+        </p:txBody>
+      </p:sp>
+      <p:sp>
+        <p:nvSpPr>
+          <p:cNvPr id="31" name="Rectangle 30"/>
+          <p:cNvSpPr/>
+          <p:nvPr/>
+        </p:nvSpPr>
+        <p:spPr>
+          <a:xfrm>
+            <a:off x="2359152" y="2404872"/>
+            <a:ext cx="374904" cy="374904"/>
+          </a:xfrm>
+          <a:prstGeom prst="rect">
+            <a:avLst/>
+          </a:prstGeom>
+          <a:solidFill>
+            <a:srgbClr val="17191C"/>
+          </a:solidFill>
+          <a:ln>
+            <a:noFill/>
+          </a:ln>
+          <a:effectLst/>
+        </p:spPr>
+        <p:style>
+          <a:lnRef idx="1">
+            <a:schemeClr val="accent1"/>
+          </a:lnRef>
+          <a:fillRef idx="3">
+            <a:schemeClr val="accent1"/>
+          </a:fillRef>
+          <a:effectRef idx="2">
+            <a:schemeClr val="accent1"/>
+          </a:effectRef>
+          <a:fontRef idx="minor">
+            <a:schemeClr val="lt1"/>
+          </a:fontRef>
+        </p:style>
+        <p:txBody>
+          <a:bodyPr rtlCol="0" anchor="ctr" wrap="square" lIns="73152" rIns="73152"/>
+          <a:lstStyle/>
+          <a:p>
+            <a:pPr algn="ctr"/>
+            <a:r>
+              <a:rPr sz="1400" b="1">
+                <a:solidFill>
+                  <a:srgbClr val="9AA3AB"/>
+                </a:solidFill>
+              </a:rPr>
+              <a:t/>
+            </a:r>
+          </a:p>
+        </p:txBody>
+      </p:sp>
+      <p:sp>
+        <p:nvSpPr>
+          <p:cNvPr id="32" name="Rectangle 31"/>
+          <p:cNvSpPr/>
+          <p:nvPr/>
+        </p:nvSpPr>
+        <p:spPr>
+          <a:xfrm>
+            <a:off x="2761488" y="2404872"/>
+            <a:ext cx="374904" cy="374904"/>
+          </a:xfrm>
+          <a:prstGeom prst="rect">
+            <a:avLst/>
+          </a:prstGeom>
+          <a:solidFill>
+            <a:srgbClr val="4A525A"/>
+          </a:solidFill>
+          <a:ln>
+            <a:noFill/>
+          </a:ln>
+          <a:effectLst/>
+        </p:spPr>
+        <p:style>
+          <a:lnRef idx="1">
+            <a:schemeClr val="accent1"/>
+          </a:lnRef>
+          <a:fillRef idx="3">
+            <a:schemeClr val="accent1"/>
+          </a:fillRef>
+          <a:effectRef idx="2">
+            <a:schemeClr val="accent1"/>
+          </a:effectRef>
+          <a:fontRef idx="minor">
+            <a:schemeClr val="lt1"/>
+          </a:fontRef>
+        </p:style>
+        <p:txBody>
+          <a:bodyPr rtlCol="0" anchor="ctr" wrap="square" lIns="73152" rIns="73152"/>
+          <a:lstStyle/>
+          <a:p>
+            <a:pPr algn="ctr"/>
+            <a:r>
+              <a:rPr sz="1400" b="1">
+                <a:solidFill>
+                  <a:srgbClr val="9AA3AB"/>
+                </a:solidFill>
+              </a:rPr>
+              <a:t/>
+            </a:r>
+          </a:p>
+        </p:txBody>
+      </p:sp>
+      <p:sp>
+        <p:nvSpPr>
+          <p:cNvPr id="33" name="Rectangle 32"/>
+          <p:cNvSpPr/>
+          <p:nvPr/>
+        </p:nvSpPr>
+        <p:spPr>
+          <a:xfrm>
+            <a:off x="3163824" y="2404872"/>
+            <a:ext cx="374904" cy="374904"/>
+          </a:xfrm>
+          <a:prstGeom prst="rect">
+            <a:avLst/>
+          </a:prstGeom>
+          <a:solidFill>
+            <a:srgbClr val="4A525A"/>
+          </a:solidFill>
+          <a:ln>
+            <a:noFill/>
+          </a:ln>
+          <a:effectLst/>
+        </p:spPr>
+        <p:style>
+          <a:lnRef idx="1">
+            <a:schemeClr val="accent1"/>
+          </a:lnRef>
+          <a:fillRef idx="3">
+            <a:schemeClr val="accent1"/>
+          </a:fillRef>
+          <a:effectRef idx="2">
+            <a:schemeClr val="accent1"/>
+          </a:effectRef>
+          <a:fontRef idx="minor">
+            <a:schemeClr val="lt1"/>
+          </a:fontRef>
+        </p:style>
+        <p:txBody>
+          <a:bodyPr rtlCol="0" anchor="ctr" wrap="square" lIns="73152" rIns="73152"/>
+          <a:lstStyle/>
+          <a:p>
+            <a:pPr algn="ctr"/>
+            <a:r>
+              <a:rPr sz="1400" b="1">
+                <a:solidFill>
+                  <a:srgbClr val="9AA3AB"/>
+                </a:solidFill>
+              </a:rPr>
+              <a:t/>
+            </a:r>
+          </a:p>
+        </p:txBody>
+      </p:sp>
+      <p:sp>
+        <p:nvSpPr>
+          <p:cNvPr id="34" name="Rectangle 33"/>
+          <p:cNvSpPr/>
+          <p:nvPr/>
+        </p:nvSpPr>
+        <p:spPr>
+          <a:xfrm>
+            <a:off x="3566160" y="2404872"/>
+            <a:ext cx="374904" cy="374904"/>
+          </a:xfrm>
+          <a:prstGeom prst="rect">
+            <a:avLst/>
+          </a:prstGeom>
+          <a:solidFill>
+            <a:srgbClr val="4A525A"/>
+          </a:solidFill>
+          <a:ln>
+            <a:noFill/>
+          </a:ln>
+          <a:effectLst/>
+        </p:spPr>
+        <p:style>
+          <a:lnRef idx="1">
+            <a:schemeClr val="accent1"/>
+          </a:lnRef>
+          <a:fillRef idx="3">
+            <a:schemeClr val="accent1"/>
+          </a:fillRef>
+          <a:effectRef idx="2">
+            <a:schemeClr val="accent1"/>
+          </a:effectRef>
+          <a:fontRef idx="minor">
+            <a:schemeClr val="lt1"/>
+          </a:fontRef>
+        </p:style>
+        <p:txBody>
+          <a:bodyPr rtlCol="0" anchor="ctr" wrap="square" lIns="73152" rIns="73152"/>
+          <a:lstStyle/>
+          <a:p>
+            <a:pPr algn="ctr"/>
+            <a:r>
+              <a:rPr sz="1400" b="1">
+                <a:solidFill>
+                  <a:srgbClr val="9AA3AB"/>
+                </a:solidFill>
+              </a:rPr>
+              <a:t/>
+            </a:r>
+          </a:p>
+        </p:txBody>
+      </p:sp>
+      <p:sp>
+        <p:nvSpPr>
+          <p:cNvPr id="35" name="Rectangle 34"/>
+          <p:cNvSpPr/>
+          <p:nvPr/>
+        </p:nvSpPr>
+        <p:spPr>
+          <a:xfrm>
+            <a:off x="3968496" y="2404872"/>
+            <a:ext cx="374904" cy="374904"/>
+          </a:xfrm>
+          <a:prstGeom prst="rect">
+            <a:avLst/>
+          </a:prstGeom>
+          <a:solidFill>
+            <a:srgbClr val="17191C"/>
+          </a:solidFill>
+          <a:ln>
+            <a:noFill/>
+          </a:ln>
+          <a:effectLst/>
+        </p:spPr>
+        <p:style>
+          <a:lnRef idx="1">
+            <a:schemeClr val="accent1"/>
+          </a:lnRef>
+          <a:fillRef idx="3">
+            <a:schemeClr val="accent1"/>
+          </a:fillRef>
+          <a:effectRef idx="2">
+            <a:schemeClr val="accent1"/>
+          </a:effectRef>
+          <a:fontRef idx="minor">
+            <a:schemeClr val="lt1"/>
+          </a:fontRef>
+        </p:style>
+        <p:txBody>
+          <a:bodyPr rtlCol="0" anchor="ctr" wrap="square" lIns="73152" rIns="73152"/>
+          <a:lstStyle/>
+          <a:p>
+            <a:pPr algn="ctr"/>
+            <a:r>
+              <a:rPr sz="1400" b="1">
+                <a:solidFill>
+                  <a:srgbClr val="9AA3AB"/>
+                </a:solidFill>
+              </a:rPr>
+              <a:t/>
+            </a:r>
+          </a:p>
+        </p:txBody>
+      </p:sp>
+      <p:sp>
+        <p:nvSpPr>
+          <p:cNvPr id="36" name="Rectangle 35"/>
+          <p:cNvSpPr/>
+          <p:nvPr/>
+        </p:nvSpPr>
+        <p:spPr>
+          <a:xfrm>
+            <a:off x="4370832" y="2404872"/>
+            <a:ext cx="374904" cy="374904"/>
+          </a:xfrm>
+          <a:prstGeom prst="rect">
+            <a:avLst/>
+          </a:prstGeom>
+          <a:solidFill>
+            <a:srgbClr val="4A525A"/>
+          </a:solidFill>
+          <a:ln>
+            <a:noFill/>
+          </a:ln>
+          <a:effectLst/>
+        </p:spPr>
+        <p:style>
+          <a:lnRef idx="1">
+            <a:schemeClr val="accent1"/>
+          </a:lnRef>
+          <a:fillRef idx="3">
+            <a:schemeClr val="accent1"/>
+          </a:fillRef>
+          <a:effectRef idx="2">
+            <a:schemeClr val="accent1"/>
+          </a:effectRef>
+          <a:fontRef idx="minor">
+            <a:schemeClr val="lt1"/>
+          </a:fontRef>
+        </p:style>
+        <p:txBody>
+          <a:bodyPr rtlCol="0" anchor="ctr" wrap="square" lIns="73152" rIns="73152"/>
+          <a:lstStyle/>
+          <a:p>
+            <a:pPr algn="ctr"/>
+            <a:r>
+              <a:rPr sz="1400" b="1">
+                <a:solidFill>
+                  <a:srgbClr val="9AA3AB"/>
+                </a:solidFill>
+              </a:rPr>
+              <a:t/>
+            </a:r>
+          </a:p>
+        </p:txBody>
+      </p:sp>
+      <p:sp>
+        <p:nvSpPr>
+          <p:cNvPr id="37" name="Rectangle 36"/>
+          <p:cNvSpPr/>
+          <p:nvPr/>
+        </p:nvSpPr>
+        <p:spPr>
+          <a:xfrm>
+            <a:off x="4773168" y="2404872"/>
+            <a:ext cx="374904" cy="374904"/>
+          </a:xfrm>
+          <a:prstGeom prst="rect">
+            <a:avLst/>
+          </a:prstGeom>
+          <a:solidFill>
+            <a:srgbClr val="17191C"/>
+          </a:solidFill>
+          <a:ln>
+            <a:noFill/>
+          </a:ln>
+          <a:effectLst/>
+        </p:spPr>
+        <p:style>
+          <a:lnRef idx="1">
+            <a:schemeClr val="accent1"/>
+          </a:lnRef>
+          <a:fillRef idx="3">
+            <a:schemeClr val="accent1"/>
+          </a:fillRef>
+          <a:effectRef idx="2">
+            <a:schemeClr val="accent1"/>
+          </a:effectRef>
+          <a:fontRef idx="minor">
+            <a:schemeClr val="lt1"/>
+          </a:fontRef>
+        </p:style>
+        <p:txBody>
+          <a:bodyPr rtlCol="0" anchor="ctr" wrap="square" lIns="73152" rIns="73152"/>
+          <a:lstStyle/>
+          <a:p>
+            <a:pPr algn="ctr"/>
+            <a:r>
+              <a:rPr sz="1400" b="1">
+                <a:solidFill>
+                  <a:srgbClr val="9AA3AB"/>
+                </a:solidFill>
+              </a:rPr>
+              <a:t/>
+            </a:r>
+          </a:p>
+        </p:txBody>
+      </p:sp>
+      <p:sp>
+        <p:nvSpPr>
+          <p:cNvPr id="38" name="Rectangle 37"/>
+          <p:cNvSpPr/>
+          <p:nvPr/>
+        </p:nvSpPr>
+        <p:spPr>
+          <a:xfrm>
+            <a:off x="5175504" y="2404872"/>
+            <a:ext cx="374904" cy="374904"/>
+          </a:xfrm>
+          <a:prstGeom prst="rect">
+            <a:avLst/>
+          </a:prstGeom>
+          <a:solidFill>
+            <a:srgbClr val="4A525A"/>
+          </a:solidFill>
+          <a:ln>
+            <a:noFill/>
+          </a:ln>
+          <a:effectLst/>
+        </p:spPr>
+        <p:style>
+          <a:lnRef idx="1">
+            <a:schemeClr val="accent1"/>
+          </a:lnRef>
+          <a:fillRef idx="3">
+            <a:schemeClr val="accent1"/>
+          </a:fillRef>
+          <a:effectRef idx="2">
+            <a:schemeClr val="accent1"/>
+          </a:effectRef>
+          <a:fontRef idx="minor">
+            <a:schemeClr val="lt1"/>
+          </a:fontRef>
+        </p:style>
+        <p:txBody>
+          <a:bodyPr rtlCol="0" anchor="ctr" wrap="square" lIns="73152" rIns="73152"/>
+          <a:lstStyle/>
+          <a:p>
+            <a:pPr algn="ctr"/>
+            <a:r>
+              <a:rPr sz="1400" b="1">
+                <a:solidFill>
+                  <a:srgbClr val="9AA3AB"/>
+                </a:solidFill>
+              </a:rPr>
+              <a:t/>
+            </a:r>
+          </a:p>
+        </p:txBody>
+      </p:sp>
+      <p:sp>
+        <p:nvSpPr>
+          <p:cNvPr id="39" name="Rectangle 38"/>
+          <p:cNvSpPr/>
+          <p:nvPr/>
+        </p:nvSpPr>
+        <p:spPr>
+          <a:xfrm>
+            <a:off x="5577840" y="2404872"/>
+            <a:ext cx="374904" cy="374904"/>
+          </a:xfrm>
+          <a:prstGeom prst="rect">
+            <a:avLst/>
+          </a:prstGeom>
+          <a:solidFill>
+            <a:srgbClr val="4A525A"/>
+          </a:solidFill>
+          <a:ln>
+            <a:noFill/>
+          </a:ln>
+          <a:effectLst/>
+        </p:spPr>
+        <p:style>
+          <a:lnRef idx="1">
+            <a:schemeClr val="accent1"/>
+          </a:lnRef>
+          <a:fillRef idx="3">
+            <a:schemeClr val="accent1"/>
+          </a:fillRef>
+          <a:effectRef idx="2">
+            <a:schemeClr val="accent1"/>
+          </a:effectRef>
+          <a:fontRef idx="minor">
+            <a:schemeClr val="lt1"/>
+          </a:fontRef>
+        </p:style>
+        <p:txBody>
+          <a:bodyPr rtlCol="0" anchor="ctr" wrap="square" lIns="73152" rIns="73152"/>
+          <a:lstStyle/>
+          <a:p>
+            <a:pPr algn="ctr"/>
+            <a:r>
+              <a:rPr sz="1400" b="1">
+                <a:solidFill>
+                  <a:srgbClr val="9AA3AB"/>
+                </a:solidFill>
+              </a:rPr>
+              <a:t/>
+            </a:r>
+          </a:p>
+        </p:txBody>
+      </p:sp>
+      <p:sp>
+        <p:nvSpPr>
+          <p:cNvPr id="40" name="Rectangle 39"/>
+          <p:cNvSpPr/>
+          <p:nvPr/>
+        </p:nvSpPr>
+        <p:spPr>
+          <a:xfrm>
+            <a:off x="5980176" y="2404872"/>
+            <a:ext cx="374904" cy="374904"/>
+          </a:xfrm>
+          <a:prstGeom prst="rect">
+            <a:avLst/>
+          </a:prstGeom>
+          <a:solidFill>
+            <a:srgbClr val="4A525A"/>
+          </a:solidFill>
+          <a:ln>
+            <a:noFill/>
+          </a:ln>
+          <a:effectLst/>
+        </p:spPr>
+        <p:style>
+          <a:lnRef idx="1">
+            <a:schemeClr val="accent1"/>
+          </a:lnRef>
+          <a:fillRef idx="3">
+            <a:schemeClr val="accent1"/>
+          </a:fillRef>
+          <a:effectRef idx="2">
+            <a:schemeClr val="accent1"/>
+          </a:effectRef>
+          <a:fontRef idx="minor">
+            <a:schemeClr val="lt1"/>
+          </a:fontRef>
+        </p:style>
+        <p:txBody>
+          <a:bodyPr rtlCol="0" anchor="ctr" wrap="square" lIns="73152" rIns="73152"/>
+          <a:lstStyle/>
+          <a:p>
+            <a:pPr algn="ctr"/>
+            <a:r>
+              <a:rPr sz="1400" b="1">
+                <a:solidFill>
+                  <a:srgbClr val="9AA3AB"/>
+                </a:solidFill>
+              </a:rPr>
+              <a:t/>
+            </a:r>
+          </a:p>
+        </p:txBody>
+      </p:sp>
+      <p:sp>
+        <p:nvSpPr>
+          <p:cNvPr id="41" name="Rectangle 40"/>
+          <p:cNvSpPr/>
+          <p:nvPr/>
+        </p:nvSpPr>
+        <p:spPr>
+          <a:xfrm>
+            <a:off x="6382512" y="2404872"/>
+            <a:ext cx="374904" cy="374904"/>
+          </a:xfrm>
+          <a:prstGeom prst="rect">
+            <a:avLst/>
+          </a:prstGeom>
+          <a:solidFill>
+            <a:srgbClr val="17191C"/>
+          </a:solidFill>
+          <a:ln>
+            <a:noFill/>
+          </a:ln>
+          <a:effectLst/>
+        </p:spPr>
+        <p:style>
+          <a:lnRef idx="1">
+            <a:schemeClr val="accent1"/>
+          </a:lnRef>
+          <a:fillRef idx="3">
+            <a:schemeClr val="accent1"/>
+          </a:fillRef>
+          <a:effectRef idx="2">
+            <a:schemeClr val="accent1"/>
+          </a:effectRef>
+          <a:fontRef idx="minor">
+            <a:schemeClr val="lt1"/>
+          </a:fontRef>
+        </p:style>
+        <p:txBody>
+          <a:bodyPr rtlCol="0" anchor="ctr" wrap="square" lIns="73152" rIns="73152"/>
+          <a:lstStyle/>
+          <a:p>
+            <a:pPr algn="ctr"/>
+            <a:r>
+              <a:rPr sz="1400" b="1">
+                <a:solidFill>
+                  <a:srgbClr val="9AA3AB"/>
+                </a:solidFill>
+              </a:rPr>
+              <a:t/>
+            </a:r>
+          </a:p>
+        </p:txBody>
+      </p:sp>
+      <p:sp>
+        <p:nvSpPr>
+          <p:cNvPr id="42" name="Rectangle 41"/>
+          <p:cNvSpPr/>
+          <p:nvPr/>
+        </p:nvSpPr>
+        <p:spPr>
+          <a:xfrm>
+            <a:off x="6784848" y="2404872"/>
+            <a:ext cx="374904" cy="374904"/>
+          </a:xfrm>
+          <a:prstGeom prst="rect">
+            <a:avLst/>
+          </a:prstGeom>
+          <a:solidFill>
+            <a:srgbClr val="4A525A"/>
+          </a:solidFill>
+          <a:ln>
+            <a:noFill/>
+          </a:ln>
+          <a:effectLst/>
+        </p:spPr>
+        <p:style>
+          <a:lnRef idx="1">
+            <a:schemeClr val="accent1"/>
+          </a:lnRef>
+          <a:fillRef idx="3">
+            <a:schemeClr val="accent1"/>
+          </a:fillRef>
+          <a:effectRef idx="2">
+            <a:schemeClr val="accent1"/>
+          </a:effectRef>
+          <a:fontRef idx="minor">
+            <a:schemeClr val="lt1"/>
+          </a:fontRef>
+        </p:style>
+        <p:txBody>
+          <a:bodyPr rtlCol="0" anchor="ctr" wrap="square" lIns="73152" rIns="73152"/>
+          <a:lstStyle/>
+          <a:p>
+            <a:pPr algn="ctr"/>
+            <a:r>
+              <a:rPr sz="1400" b="1">
+                <a:solidFill>
+                  <a:srgbClr val="9AA3AB"/>
+                </a:solidFill>
+              </a:rPr>
+              <a:t/>
+            </a:r>
+          </a:p>
+        </p:txBody>
+      </p:sp>
+      <p:sp>
+        <p:nvSpPr>
+          <p:cNvPr id="43" name="Rectangle 42"/>
+          <p:cNvSpPr/>
+          <p:nvPr/>
+        </p:nvSpPr>
+        <p:spPr>
+          <a:xfrm>
+            <a:off x="1956816" y="2807208"/>
+            <a:ext cx="374904" cy="374904"/>
+          </a:xfrm>
+          <a:prstGeom prst="rect">
+            <a:avLst/>
+          </a:prstGeom>
+          <a:solidFill>
+            <a:srgbClr val="4A525A"/>
+          </a:solidFill>
+          <a:ln>
+            <a:noFill/>
+          </a:ln>
+          <a:effectLst/>
+        </p:spPr>
+        <p:style>
+          <a:lnRef idx="1">
+            <a:schemeClr val="accent1"/>
+          </a:lnRef>
+          <a:fillRef idx="3">
+            <a:schemeClr val="accent1"/>
+          </a:fillRef>
+          <a:effectRef idx="2">
+            <a:schemeClr val="accent1"/>
+          </a:effectRef>
+          <a:fontRef idx="minor">
+            <a:schemeClr val="lt1"/>
+          </a:fontRef>
+        </p:style>
+        <p:txBody>
+          <a:bodyPr rtlCol="0" anchor="ctr" wrap="square" lIns="73152" rIns="73152"/>
+          <a:lstStyle/>
+          <a:p>
+            <a:pPr algn="ctr"/>
+            <a:r>
+              <a:rPr sz="1400" b="1">
+                <a:solidFill>
+                  <a:srgbClr val="9AA3AB"/>
+                </a:solidFill>
+              </a:rPr>
+              <a:t/>
+            </a:r>
+          </a:p>
+        </p:txBody>
+      </p:sp>
+      <p:sp>
+        <p:nvSpPr>
+          <p:cNvPr id="44" name="Rectangle 43"/>
+          <p:cNvSpPr/>
+          <p:nvPr/>
+        </p:nvSpPr>
+        <p:spPr>
+          <a:xfrm>
+            <a:off x="2359152" y="2807208"/>
+            <a:ext cx="374904" cy="374904"/>
+          </a:xfrm>
+          <a:prstGeom prst="rect">
+            <a:avLst/>
+          </a:prstGeom>
+          <a:solidFill>
+            <a:srgbClr val="17191C"/>
+          </a:solidFill>
+          <a:ln>
+            <a:noFill/>
+          </a:ln>
+          <a:effectLst/>
+        </p:spPr>
+        <p:style>
+          <a:lnRef idx="1">
+            <a:schemeClr val="accent1"/>
+          </a:lnRef>
+          <a:fillRef idx="3">
+            <a:schemeClr val="accent1"/>
+          </a:fillRef>
+          <a:effectRef idx="2">
+            <a:schemeClr val="accent1"/>
+          </a:effectRef>
+          <a:fontRef idx="minor">
+            <a:schemeClr val="lt1"/>
+          </a:fontRef>
+        </p:style>
+        <p:txBody>
+          <a:bodyPr rtlCol="0" anchor="ctr" wrap="square" lIns="73152" rIns="73152"/>
+          <a:lstStyle/>
+          <a:p>
+            <a:pPr algn="ctr"/>
+            <a:r>
+              <a:rPr sz="1400" b="1">
+                <a:solidFill>
+                  <a:srgbClr val="9AA3AB"/>
+                </a:solidFill>
+              </a:rPr>
+              <a:t/>
+            </a:r>
+          </a:p>
+        </p:txBody>
+      </p:sp>
+      <p:sp>
+        <p:nvSpPr>
+          <p:cNvPr id="45" name="Rectangle 44"/>
+          <p:cNvSpPr/>
+          <p:nvPr/>
+        </p:nvSpPr>
+        <p:spPr>
+          <a:xfrm>
+            <a:off x="2761488" y="2807208"/>
+            <a:ext cx="374904" cy="374904"/>
+          </a:xfrm>
+          <a:prstGeom prst="rect">
+            <a:avLst/>
+          </a:prstGeom>
+          <a:solidFill>
+            <a:srgbClr val="17191C"/>
+          </a:solidFill>
+          <a:ln>
+            <a:noFill/>
+          </a:ln>
+          <a:effectLst/>
+        </p:spPr>
+        <p:style>
+          <a:lnRef idx="1">
+            <a:schemeClr val="accent1"/>
+          </a:lnRef>
+          <a:fillRef idx="3">
+            <a:schemeClr val="accent1"/>
+          </a:fillRef>
+          <a:effectRef idx="2">
+            <a:schemeClr val="accent1"/>
+          </a:effectRef>
+          <a:fontRef idx="minor">
+            <a:schemeClr val="lt1"/>
+          </a:fontRef>
+        </p:style>
+        <p:txBody>
+          <a:bodyPr rtlCol="0" anchor="ctr" wrap="square" lIns="73152" rIns="73152"/>
+          <a:lstStyle/>
+          <a:p>
+            <a:pPr algn="ctr"/>
+            <a:r>
+              <a:rPr sz="1400" b="1">
+                <a:solidFill>
+                  <a:srgbClr val="9AA3AB"/>
+                </a:solidFill>
+              </a:rPr>
+              <a:t/>
+            </a:r>
+          </a:p>
+        </p:txBody>
+      </p:sp>
+      <p:sp>
+        <p:nvSpPr>
+          <p:cNvPr id="46" name="Rectangle 45"/>
+          <p:cNvSpPr/>
+          <p:nvPr/>
+        </p:nvSpPr>
+        <p:spPr>
+          <a:xfrm>
+            <a:off x="3163824" y="2807208"/>
+            <a:ext cx="374904" cy="374904"/>
+          </a:xfrm>
+          <a:prstGeom prst="rect">
+            <a:avLst/>
+          </a:prstGeom>
+          <a:solidFill>
+            <a:srgbClr val="17191C"/>
+          </a:solidFill>
+          <a:ln>
+            <a:noFill/>
+          </a:ln>
+          <a:effectLst/>
+        </p:spPr>
+        <p:style>
+          <a:lnRef idx="1">
+            <a:schemeClr val="accent1"/>
+          </a:lnRef>
+          <a:fillRef idx="3">
+            <a:schemeClr val="accent1"/>
+          </a:fillRef>
+          <a:effectRef idx="2">
+            <a:schemeClr val="accent1"/>
+          </a:effectRef>
+          <a:fontRef idx="minor">
+            <a:schemeClr val="lt1"/>
+          </a:fontRef>
+        </p:style>
+        <p:txBody>
+          <a:bodyPr rtlCol="0" anchor="ctr" wrap="square" lIns="73152" rIns="73152"/>
+          <a:lstStyle/>
+          <a:p>
+            <a:pPr algn="ctr"/>
+            <a:r>
+              <a:rPr sz="1400" b="1">
+                <a:solidFill>
+                  <a:srgbClr val="9AA3AB"/>
+                </a:solidFill>
+              </a:rPr>
+              <a:t/>
+            </a:r>
+          </a:p>
+        </p:txBody>
+      </p:sp>
+      <p:sp>
+        <p:nvSpPr>
+          <p:cNvPr id="47" name="Rectangle 46"/>
+          <p:cNvSpPr/>
+          <p:nvPr/>
+        </p:nvSpPr>
+        <p:spPr>
+          <a:xfrm>
+            <a:off x="3566160" y="2807208"/>
+            <a:ext cx="374904" cy="374904"/>
+          </a:xfrm>
+          <a:prstGeom prst="rect">
+            <a:avLst/>
+          </a:prstGeom>
+          <a:solidFill>
+            <a:srgbClr val="D45D35"/>
+          </a:solidFill>
+          <a:ln>
+            <a:noFill/>
+          </a:ln>
+          <a:effectLst/>
+        </p:spPr>
+        <p:style>
+          <a:lnRef idx="1">
+            <a:schemeClr val="accent1"/>
+          </a:lnRef>
+          <a:fillRef idx="3">
+            <a:schemeClr val="accent1"/>
+          </a:fillRef>
+          <a:effectRef idx="2">
+            <a:schemeClr val="accent1"/>
+          </a:effectRef>
+          <a:fontRef idx="minor">
+            <a:schemeClr val="lt1"/>
+          </a:fontRef>
+        </p:style>
+        <p:txBody>
+          <a:bodyPr rtlCol="0" anchor="ctr" wrap="square" lIns="73152" rIns="73152"/>
+          <a:lstStyle/>
+          <a:p>
+            <a:pPr algn="ctr"/>
+            <a:r>
+              <a:rPr sz="1400" b="1">
+                <a:solidFill>
+                  <a:srgbClr val="DEE2E6"/>
+                </a:solidFill>
+              </a:rPr>
+              <a:t>G</a:t>
+            </a:r>
+          </a:p>
+        </p:txBody>
+      </p:sp>
+      <p:sp>
+        <p:nvSpPr>
+          <p:cNvPr id="48" name="Rectangle 47"/>
+          <p:cNvSpPr/>
+          <p:nvPr/>
+        </p:nvSpPr>
+        <p:spPr>
+          <a:xfrm>
+            <a:off x="3968496" y="2807208"/>
+            <a:ext cx="374904" cy="374904"/>
+          </a:xfrm>
+          <a:prstGeom prst="rect">
+            <a:avLst/>
+          </a:prstGeom>
+          <a:solidFill>
+            <a:srgbClr val="17191C"/>
+          </a:solidFill>
+          <a:ln>
+            <a:noFill/>
+          </a:ln>
+          <a:effectLst/>
+        </p:spPr>
+        <p:style>
+          <a:lnRef idx="1">
+            <a:schemeClr val="accent1"/>
+          </a:lnRef>
+          <a:fillRef idx="3">
+            <a:schemeClr val="accent1"/>
+          </a:fillRef>
+          <a:effectRef idx="2">
+            <a:schemeClr val="accent1"/>
+          </a:effectRef>
+          <a:fontRef idx="minor">
+            <a:schemeClr val="lt1"/>
+          </a:fontRef>
+        </p:style>
+        <p:txBody>
+          <a:bodyPr rtlCol="0" anchor="ctr" wrap="square" lIns="73152" rIns="73152"/>
+          <a:lstStyle/>
+          <a:p>
+            <a:pPr algn="ctr"/>
+            <a:r>
+              <a:rPr sz="1400" b="1">
+                <a:solidFill>
+                  <a:srgbClr val="9AA3AB"/>
+                </a:solidFill>
+              </a:rPr>
+              <a:t/>
+            </a:r>
+          </a:p>
+        </p:txBody>
+      </p:sp>
+      <p:sp>
+        <p:nvSpPr>
+          <p:cNvPr id="49" name="Rectangle 48"/>
+          <p:cNvSpPr/>
+          <p:nvPr/>
+        </p:nvSpPr>
+        <p:spPr>
+          <a:xfrm>
+            <a:off x="4370832" y="2807208"/>
+            <a:ext cx="374904" cy="374904"/>
+          </a:xfrm>
+          <a:prstGeom prst="rect">
+            <a:avLst/>
+          </a:prstGeom>
+          <a:solidFill>
+            <a:srgbClr val="17191C"/>
+          </a:solidFill>
+          <a:ln>
+            <a:noFill/>
+          </a:ln>
+          <a:effectLst/>
+        </p:spPr>
+        <p:style>
+          <a:lnRef idx="1">
+            <a:schemeClr val="accent1"/>
+          </a:lnRef>
+          <a:fillRef idx="3">
+            <a:schemeClr val="accent1"/>
+          </a:fillRef>
+          <a:effectRef idx="2">
+            <a:schemeClr val="accent1"/>
+          </a:effectRef>
+          <a:fontRef idx="minor">
+            <a:schemeClr val="lt1"/>
+          </a:fontRef>
+        </p:style>
+        <p:txBody>
+          <a:bodyPr rtlCol="0" anchor="ctr" wrap="square" lIns="73152" rIns="73152"/>
+          <a:lstStyle/>
+          <a:p>
+            <a:pPr algn="ctr"/>
+            <a:r>
+              <a:rPr sz="1400" b="1">
+                <a:solidFill>
+                  <a:srgbClr val="9AA3AB"/>
+                </a:solidFill>
+              </a:rPr>
+              <a:t/>
+            </a:r>
+          </a:p>
+        </p:txBody>
+      </p:sp>
+      <p:sp>
+        <p:nvSpPr>
+          <p:cNvPr id="50" name="Rectangle 49"/>
+          <p:cNvSpPr/>
+          <p:nvPr/>
+        </p:nvSpPr>
+        <p:spPr>
+          <a:xfrm>
+            <a:off x="4773168" y="2807208"/>
+            <a:ext cx="374904" cy="374904"/>
+          </a:xfrm>
+          <a:prstGeom prst="rect">
+            <a:avLst/>
+          </a:prstGeom>
+          <a:solidFill>
+            <a:srgbClr val="17191C"/>
+          </a:solidFill>
+          <a:ln>
+            <a:noFill/>
+          </a:ln>
+          <a:effectLst/>
+        </p:spPr>
+        <p:style>
+          <a:lnRef idx="1">
+            <a:schemeClr val="accent1"/>
+          </a:lnRef>
+          <a:fillRef idx="3">
+            <a:schemeClr val="accent1"/>
+          </a:fillRef>
+          <a:effectRef idx="2">
+            <a:schemeClr val="accent1"/>
+          </a:effectRef>
+          <a:fontRef idx="minor">
+            <a:schemeClr val="lt1"/>
+          </a:fontRef>
+        </p:style>
+        <p:txBody>
+          <a:bodyPr rtlCol="0" anchor="ctr" wrap="square" lIns="73152" rIns="73152"/>
+          <a:lstStyle/>
+          <a:p>
+            <a:pPr algn="ctr"/>
+            <a:r>
+              <a:rPr sz="1400" b="1">
+                <a:solidFill>
+                  <a:srgbClr val="9AA3AB"/>
+                </a:solidFill>
+              </a:rPr>
+              <a:t/>
+            </a:r>
+          </a:p>
+        </p:txBody>
+      </p:sp>
+      <p:sp>
+        <p:nvSpPr>
+          <p:cNvPr id="51" name="Rectangle 50"/>
+          <p:cNvSpPr/>
+          <p:nvPr/>
+        </p:nvSpPr>
+        <p:spPr>
+          <a:xfrm>
+            <a:off x="5175504" y="2807208"/>
+            <a:ext cx="374904" cy="374904"/>
+          </a:xfrm>
+          <a:prstGeom prst="rect">
+            <a:avLst/>
+          </a:prstGeom>
+          <a:solidFill>
+            <a:srgbClr val="17191C"/>
+          </a:solidFill>
+          <a:ln>
+            <a:noFill/>
+          </a:ln>
+          <a:effectLst/>
+        </p:spPr>
+        <p:style>
+          <a:lnRef idx="1">
+            <a:schemeClr val="accent1"/>
+          </a:lnRef>
+          <a:fillRef idx="3">
+            <a:schemeClr val="accent1"/>
+          </a:fillRef>
+          <a:effectRef idx="2">
+            <a:schemeClr val="accent1"/>
+          </a:effectRef>
+          <a:fontRef idx="minor">
+            <a:schemeClr val="lt1"/>
+          </a:fontRef>
+        </p:style>
+        <p:txBody>
+          <a:bodyPr rtlCol="0" anchor="ctr" wrap="square" lIns="73152" rIns="73152"/>
+          <a:lstStyle/>
+          <a:p>
+            <a:pPr algn="ctr"/>
+            <a:r>
+              <a:rPr sz="1400" b="1">
+                <a:solidFill>
+                  <a:srgbClr val="9AA3AB"/>
+                </a:solidFill>
+              </a:rPr>
+              <a:t/>
+            </a:r>
+          </a:p>
+        </p:txBody>
+      </p:sp>
+      <p:sp>
+        <p:nvSpPr>
+          <p:cNvPr id="52" name="Rectangle 51"/>
+          <p:cNvSpPr/>
+          <p:nvPr/>
+        </p:nvSpPr>
+        <p:spPr>
+          <a:xfrm>
+            <a:off x="5577840" y="2807208"/>
+            <a:ext cx="374904" cy="374904"/>
+          </a:xfrm>
+          <a:prstGeom prst="rect">
+            <a:avLst/>
+          </a:prstGeom>
+          <a:solidFill>
+            <a:srgbClr val="17191C"/>
+          </a:solidFill>
+          <a:ln>
+            <a:noFill/>
+          </a:ln>
+          <a:effectLst/>
+        </p:spPr>
+        <p:style>
+          <a:lnRef idx="1">
+            <a:schemeClr val="accent1"/>
+          </a:lnRef>
+          <a:fillRef idx="3">
+            <a:schemeClr val="accent1"/>
+          </a:fillRef>
+          <a:effectRef idx="2">
+            <a:schemeClr val="accent1"/>
+          </a:effectRef>
+          <a:fontRef idx="minor">
+            <a:schemeClr val="lt1"/>
+          </a:fontRef>
+        </p:style>
+        <p:txBody>
+          <a:bodyPr rtlCol="0" anchor="ctr" wrap="square" lIns="73152" rIns="73152"/>
+          <a:lstStyle/>
+          <a:p>
+            <a:pPr algn="ctr"/>
+            <a:r>
+              <a:rPr sz="1400" b="1">
+                <a:solidFill>
+                  <a:srgbClr val="9AA3AB"/>
+                </a:solidFill>
+              </a:rPr>
+              <a:t/>
+            </a:r>
+          </a:p>
+        </p:txBody>
+      </p:sp>
+      <p:sp>
+        <p:nvSpPr>
+          <p:cNvPr id="53" name="Rectangle 52"/>
+          <p:cNvSpPr/>
+          <p:nvPr/>
+        </p:nvSpPr>
+        <p:spPr>
+          <a:xfrm>
+            <a:off x="5980176" y="2807208"/>
+            <a:ext cx="374904" cy="374904"/>
+          </a:xfrm>
+          <a:prstGeom prst="rect">
+            <a:avLst/>
+          </a:prstGeom>
+          <a:solidFill>
+            <a:srgbClr val="17191C"/>
+          </a:solidFill>
+          <a:ln>
+            <a:noFill/>
+          </a:ln>
+          <a:effectLst/>
+        </p:spPr>
+        <p:style>
+          <a:lnRef idx="1">
+            <a:schemeClr val="accent1"/>
+          </a:lnRef>
+          <a:fillRef idx="3">
+            <a:schemeClr val="accent1"/>
+          </a:fillRef>
+          <a:effectRef idx="2">
+            <a:schemeClr val="accent1"/>
+          </a:effectRef>
+          <a:fontRef idx="minor">
+            <a:schemeClr val="lt1"/>
+          </a:fontRef>
+        </p:style>
+        <p:txBody>
+          <a:bodyPr rtlCol="0" anchor="ctr" wrap="square" lIns="73152" rIns="73152"/>
+          <a:lstStyle/>
+          <a:p>
+            <a:pPr algn="ctr"/>
+            <a:r>
+              <a:rPr sz="1400" b="1">
+                <a:solidFill>
+                  <a:srgbClr val="9AA3AB"/>
+                </a:solidFill>
+              </a:rPr>
+              <a:t/>
+            </a:r>
+          </a:p>
+        </p:txBody>
+      </p:sp>
+      <p:sp>
+        <p:nvSpPr>
+          <p:cNvPr id="54" name="Rectangle 53"/>
+          <p:cNvSpPr/>
+          <p:nvPr/>
+        </p:nvSpPr>
+        <p:spPr>
+          <a:xfrm>
+            <a:off x="6382512" y="2807208"/>
+            <a:ext cx="374904" cy="374904"/>
+          </a:xfrm>
+          <a:prstGeom prst="rect">
+            <a:avLst/>
+          </a:prstGeom>
+          <a:solidFill>
+            <a:srgbClr val="17191C"/>
+          </a:solidFill>
+          <a:ln>
+            <a:noFill/>
+          </a:ln>
+          <a:effectLst/>
+        </p:spPr>
+        <p:style>
+          <a:lnRef idx="1">
+            <a:schemeClr val="accent1"/>
+          </a:lnRef>
+          <a:fillRef idx="3">
+            <a:schemeClr val="accent1"/>
+          </a:fillRef>
+          <a:effectRef idx="2">
+            <a:schemeClr val="accent1"/>
+          </a:effectRef>
+          <a:fontRef idx="minor">
+            <a:schemeClr val="lt1"/>
+          </a:fontRef>
+        </p:style>
+        <p:txBody>
+          <a:bodyPr rtlCol="0" anchor="ctr" wrap="square" lIns="73152" rIns="73152"/>
+          <a:lstStyle/>
+          <a:p>
+            <a:pPr algn="ctr"/>
+            <a:r>
+              <a:rPr sz="1400" b="1">
+                <a:solidFill>
+                  <a:srgbClr val="9AA3AB"/>
+                </a:solidFill>
+              </a:rPr>
+              <a:t/>
+            </a:r>
+          </a:p>
+        </p:txBody>
+      </p:sp>
+      <p:sp>
+        <p:nvSpPr>
+          <p:cNvPr id="55" name="Rectangle 54"/>
+          <p:cNvSpPr/>
+          <p:nvPr/>
+        </p:nvSpPr>
+        <p:spPr>
+          <a:xfrm>
+            <a:off x="6784848" y="2807208"/>
+            <a:ext cx="374904" cy="374904"/>
+          </a:xfrm>
+          <a:prstGeom prst="rect">
+            <a:avLst/>
+          </a:prstGeom>
+          <a:solidFill>
+            <a:srgbClr val="4A525A"/>
+          </a:solidFill>
+          <a:ln>
+            <a:noFill/>
+          </a:ln>
+          <a:effectLst/>
+        </p:spPr>
+        <p:style>
+          <a:lnRef idx="1">
+            <a:schemeClr val="accent1"/>
+          </a:lnRef>
+          <a:fillRef idx="3">
+            <a:schemeClr val="accent1"/>
+          </a:fillRef>
+          <a:effectRef idx="2">
+            <a:schemeClr val="accent1"/>
+          </a:effectRef>
+          <a:fontRef idx="minor">
+            <a:schemeClr val="lt1"/>
+          </a:fontRef>
+        </p:style>
+        <p:txBody>
+          <a:bodyPr rtlCol="0" anchor="ctr" wrap="square" lIns="73152" rIns="73152"/>
+          <a:lstStyle/>
+          <a:p>
+            <a:pPr algn="ctr"/>
+            <a:r>
+              <a:rPr sz="1400" b="1">
+                <a:solidFill>
+                  <a:srgbClr val="9AA3AB"/>
+                </a:solidFill>
+              </a:rPr>
+              <a:t/>
+            </a:r>
+          </a:p>
+        </p:txBody>
+      </p:sp>
+      <p:sp>
+        <p:nvSpPr>
+          <p:cNvPr id="56" name="Rectangle 55"/>
+          <p:cNvSpPr/>
+          <p:nvPr/>
+        </p:nvSpPr>
+        <p:spPr>
+          <a:xfrm>
+            <a:off x="1956816" y="3209544"/>
+            <a:ext cx="374904" cy="374904"/>
+          </a:xfrm>
+          <a:prstGeom prst="rect">
+            <a:avLst/>
+          </a:prstGeom>
+          <a:solidFill>
+            <a:srgbClr val="4A525A"/>
+          </a:solidFill>
+          <a:ln>
+            <a:noFill/>
+          </a:ln>
+          <a:effectLst/>
+        </p:spPr>
+        <p:style>
+          <a:lnRef idx="1">
+            <a:schemeClr val="accent1"/>
+          </a:lnRef>
+          <a:fillRef idx="3">
+            <a:schemeClr val="accent1"/>
+          </a:fillRef>
+          <a:effectRef idx="2">
+            <a:schemeClr val="accent1"/>
+          </a:effectRef>
+          <a:fontRef idx="minor">
+            <a:schemeClr val="lt1"/>
+          </a:fontRef>
+        </p:style>
+        <p:txBody>
+          <a:bodyPr rtlCol="0" anchor="ctr" wrap="square" lIns="73152" rIns="73152"/>
+          <a:lstStyle/>
+          <a:p>
+            <a:pPr algn="ctr"/>
+            <a:r>
+              <a:rPr sz="1400" b="1">
+                <a:solidFill>
+                  <a:srgbClr val="9AA3AB"/>
+                </a:solidFill>
+              </a:rPr>
+              <a:t/>
+            </a:r>
+          </a:p>
+        </p:txBody>
+      </p:sp>
+      <p:sp>
+        <p:nvSpPr>
+          <p:cNvPr id="57" name="Rectangle 56"/>
+          <p:cNvSpPr/>
+          <p:nvPr/>
+        </p:nvSpPr>
+        <p:spPr>
+          <a:xfrm>
+            <a:off x="2359152" y="3209544"/>
+            <a:ext cx="374904" cy="374904"/>
+          </a:xfrm>
+          <a:prstGeom prst="rect">
+            <a:avLst/>
+          </a:prstGeom>
+          <a:solidFill>
+            <a:srgbClr val="4A525A"/>
+          </a:solidFill>
+          <a:ln>
+            <a:noFill/>
+          </a:ln>
+          <a:effectLst/>
+        </p:spPr>
+        <p:style>
+          <a:lnRef idx="1">
+            <a:schemeClr val="accent1"/>
+          </a:lnRef>
+          <a:fillRef idx="3">
+            <a:schemeClr val="accent1"/>
+          </a:fillRef>
+          <a:effectRef idx="2">
+            <a:schemeClr val="accent1"/>
+          </a:effectRef>
+          <a:fontRef idx="minor">
+            <a:schemeClr val="lt1"/>
+          </a:fontRef>
+        </p:style>
+        <p:txBody>
+          <a:bodyPr rtlCol="0" anchor="ctr" wrap="square" lIns="73152" rIns="73152"/>
+          <a:lstStyle/>
+          <a:p>
+            <a:pPr algn="ctr"/>
+            <a:r>
+              <a:rPr sz="1400" b="1">
+                <a:solidFill>
+                  <a:srgbClr val="9AA3AB"/>
+                </a:solidFill>
+              </a:rPr>
+              <a:t/>
+            </a:r>
+          </a:p>
+        </p:txBody>
+      </p:sp>
+      <p:sp>
+        <p:nvSpPr>
+          <p:cNvPr id="58" name="Rectangle 57"/>
+          <p:cNvSpPr/>
+          <p:nvPr/>
+        </p:nvSpPr>
+        <p:spPr>
+          <a:xfrm>
+            <a:off x="2761488" y="3209544"/>
+            <a:ext cx="374904" cy="374904"/>
+          </a:xfrm>
+          <a:prstGeom prst="rect">
+            <a:avLst/>
+          </a:prstGeom>
+          <a:solidFill>
+            <a:srgbClr val="4A525A"/>
+          </a:solidFill>
+          <a:ln>
+            <a:noFill/>
+          </a:ln>
+          <a:effectLst/>
+        </p:spPr>
+        <p:style>
+          <a:lnRef idx="1">
+            <a:schemeClr val="accent1"/>
+          </a:lnRef>
+          <a:fillRef idx="3">
+            <a:schemeClr val="accent1"/>
+          </a:fillRef>
+          <a:effectRef idx="2">
+            <a:schemeClr val="accent1"/>
+          </a:effectRef>
+          <a:fontRef idx="minor">
+            <a:schemeClr val="lt1"/>
+          </a:fontRef>
+        </p:style>
+        <p:txBody>
+          <a:bodyPr rtlCol="0" anchor="ctr" wrap="square" lIns="73152" rIns="73152"/>
+          <a:lstStyle/>
+          <a:p>
+            <a:pPr algn="ctr"/>
+            <a:r>
+              <a:rPr sz="1400" b="1">
+                <a:solidFill>
+                  <a:srgbClr val="9AA3AB"/>
+                </a:solidFill>
+              </a:rPr>
+              <a:t/>
+            </a:r>
+          </a:p>
+        </p:txBody>
+      </p:sp>
+      <p:sp>
+        <p:nvSpPr>
+          <p:cNvPr id="59" name="Rectangle 58"/>
+          <p:cNvSpPr/>
+          <p:nvPr/>
+        </p:nvSpPr>
+        <p:spPr>
+          <a:xfrm>
+            <a:off x="3163824" y="3209544"/>
+            <a:ext cx="374904" cy="374904"/>
+          </a:xfrm>
+          <a:prstGeom prst="rect">
+            <a:avLst/>
+          </a:prstGeom>
+          <a:solidFill>
+            <a:srgbClr val="4A525A"/>
+          </a:solidFill>
+          <a:ln>
+            <a:noFill/>
+          </a:ln>
+          <a:effectLst/>
+        </p:spPr>
+        <p:style>
+          <a:lnRef idx="1">
+            <a:schemeClr val="accent1"/>
+          </a:lnRef>
+          <a:fillRef idx="3">
+            <a:schemeClr val="accent1"/>
+          </a:fillRef>
+          <a:effectRef idx="2">
+            <a:schemeClr val="accent1"/>
+          </a:effectRef>
+          <a:fontRef idx="minor">
+            <a:schemeClr val="lt1"/>
+          </a:fontRef>
+        </p:style>
+        <p:txBody>
+          <a:bodyPr rtlCol="0" anchor="ctr" wrap="square" lIns="73152" rIns="73152"/>
+          <a:lstStyle/>
+          <a:p>
+            <a:pPr algn="ctr"/>
+            <a:r>
+              <a:rPr sz="1400" b="1">
+                <a:solidFill>
+                  <a:srgbClr val="9AA3AB"/>
+                </a:solidFill>
+              </a:rPr>
+              <a:t/>
+            </a:r>
+          </a:p>
+        </p:txBody>
+      </p:sp>
+      <p:sp>
+        <p:nvSpPr>
+          <p:cNvPr id="60" name="Rectangle 59"/>
+          <p:cNvSpPr/>
+          <p:nvPr/>
+        </p:nvSpPr>
+        <p:spPr>
+          <a:xfrm>
+            <a:off x="3566160" y="3209544"/>
+            <a:ext cx="374904" cy="374904"/>
+          </a:xfrm>
+          <a:prstGeom prst="rect">
+            <a:avLst/>
+          </a:prstGeom>
+          <a:solidFill>
+            <a:srgbClr val="4A525A"/>
+          </a:solidFill>
+          <a:ln>
+            <a:noFill/>
+          </a:ln>
+          <a:effectLst/>
+        </p:spPr>
+        <p:style>
+          <a:lnRef idx="1">
+            <a:schemeClr val="accent1"/>
+          </a:lnRef>
+          <a:fillRef idx="3">
+            <a:schemeClr val="accent1"/>
+          </a:fillRef>
+          <a:effectRef idx="2">
+            <a:schemeClr val="accent1"/>
+          </a:effectRef>
+          <a:fontRef idx="minor">
+            <a:schemeClr val="lt1"/>
+          </a:fontRef>
+        </p:style>
+        <p:txBody>
+          <a:bodyPr rtlCol="0" anchor="ctr" wrap="square" lIns="73152" rIns="73152"/>
+          <a:lstStyle/>
+          <a:p>
+            <a:pPr algn="ctr"/>
+            <a:r>
+              <a:rPr sz="1400" b="1">
+                <a:solidFill>
+                  <a:srgbClr val="9AA3AB"/>
+                </a:solidFill>
+              </a:rPr>
+              <a:t/>
+            </a:r>
+          </a:p>
+        </p:txBody>
+      </p:sp>
+      <p:sp>
+        <p:nvSpPr>
+          <p:cNvPr id="61" name="Rectangle 60"/>
+          <p:cNvSpPr/>
+          <p:nvPr/>
+        </p:nvSpPr>
+        <p:spPr>
+          <a:xfrm>
+            <a:off x="3968496" y="3209544"/>
+            <a:ext cx="374904" cy="374904"/>
+          </a:xfrm>
+          <a:prstGeom prst="rect">
+            <a:avLst/>
+          </a:prstGeom>
+          <a:solidFill>
+            <a:srgbClr val="4A525A"/>
+          </a:solidFill>
+          <a:ln>
+            <a:noFill/>
+          </a:ln>
+          <a:effectLst/>
+        </p:spPr>
+        <p:style>
+          <a:lnRef idx="1">
+            <a:schemeClr val="accent1"/>
+          </a:lnRef>
+          <a:fillRef idx="3">
+            <a:schemeClr val="accent1"/>
+          </a:fillRef>
+          <a:effectRef idx="2">
+            <a:schemeClr val="accent1"/>
+          </a:effectRef>
+          <a:fontRef idx="minor">
+            <a:schemeClr val="lt1"/>
+          </a:fontRef>
+        </p:style>
+        <p:txBody>
+          <a:bodyPr rtlCol="0" anchor="ctr" wrap="square" lIns="73152" rIns="73152"/>
+          <a:lstStyle/>
+          <a:p>
+            <a:pPr algn="ctr"/>
+            <a:r>
+              <a:rPr sz="1400" b="1">
+                <a:solidFill>
+                  <a:srgbClr val="9AA3AB"/>
+                </a:solidFill>
+              </a:rPr>
+              <a:t/>
+            </a:r>
+          </a:p>
+        </p:txBody>
+      </p:sp>
+      <p:sp>
+        <p:nvSpPr>
+          <p:cNvPr id="62" name="Rectangle 61"/>
+          <p:cNvSpPr/>
+          <p:nvPr/>
+        </p:nvSpPr>
+        <p:spPr>
+          <a:xfrm>
+            <a:off x="4370832" y="3209544"/>
+            <a:ext cx="374904" cy="374904"/>
+          </a:xfrm>
+          <a:prstGeom prst="rect">
+            <a:avLst/>
+          </a:prstGeom>
+          <a:solidFill>
+            <a:srgbClr val="4A525A"/>
+          </a:solidFill>
+          <a:ln>
+            <a:noFill/>
+          </a:ln>
+          <a:effectLst/>
+        </p:spPr>
+        <p:style>
+          <a:lnRef idx="1">
+            <a:schemeClr val="accent1"/>
+          </a:lnRef>
+          <a:fillRef idx="3">
+            <a:schemeClr val="accent1"/>
+          </a:fillRef>
+          <a:effectRef idx="2">
+            <a:schemeClr val="accent1"/>
+          </a:effectRef>
+          <a:fontRef idx="minor">
+            <a:schemeClr val="lt1"/>
+          </a:fontRef>
+        </p:style>
+        <p:txBody>
+          <a:bodyPr rtlCol="0" anchor="ctr" wrap="square" lIns="73152" rIns="73152"/>
+          <a:lstStyle/>
+          <a:p>
+            <a:pPr algn="ctr"/>
+            <a:r>
+              <a:rPr sz="1400" b="1">
+                <a:solidFill>
+                  <a:srgbClr val="9AA3AB"/>
+                </a:solidFill>
+              </a:rPr>
+              <a:t/>
+            </a:r>
+          </a:p>
+        </p:txBody>
+      </p:sp>
+      <p:sp>
+        <p:nvSpPr>
+          <p:cNvPr id="63" name="Rectangle 62"/>
+          <p:cNvSpPr/>
+          <p:nvPr/>
+        </p:nvSpPr>
+        <p:spPr>
+          <a:xfrm>
+            <a:off x="4773168" y="3209544"/>
+            <a:ext cx="374904" cy="374904"/>
+          </a:xfrm>
+          <a:prstGeom prst="rect">
+            <a:avLst/>
+          </a:prstGeom>
+          <a:solidFill>
+            <a:srgbClr val="4A525A"/>
+          </a:solidFill>
+          <a:ln>
+            <a:noFill/>
+          </a:ln>
+          <a:effectLst/>
+        </p:spPr>
+        <p:style>
+          <a:lnRef idx="1">
+            <a:schemeClr val="accent1"/>
+          </a:lnRef>
+          <a:fillRef idx="3">
+            <a:schemeClr val="accent1"/>
+          </a:fillRef>
+          <a:effectRef idx="2">
+            <a:schemeClr val="accent1"/>
+          </a:effectRef>
+          <a:fontRef idx="minor">
+            <a:schemeClr val="lt1"/>
+          </a:fontRef>
+        </p:style>
+        <p:txBody>
+          <a:bodyPr rtlCol="0" anchor="ctr" wrap="square" lIns="73152" rIns="73152"/>
+          <a:lstStyle/>
+          <a:p>
+            <a:pPr algn="ctr"/>
+            <a:r>
+              <a:rPr sz="1400" b="1">
+                <a:solidFill>
+                  <a:srgbClr val="9AA3AB"/>
+                </a:solidFill>
+              </a:rPr>
+              <a:t/>
+            </a:r>
+          </a:p>
+        </p:txBody>
+      </p:sp>
+      <p:sp>
+        <p:nvSpPr>
+          <p:cNvPr id="64" name="Rectangle 63"/>
+          <p:cNvSpPr/>
+          <p:nvPr/>
+        </p:nvSpPr>
+        <p:spPr>
+          <a:xfrm>
+            <a:off x="5175504" y="3209544"/>
+            <a:ext cx="374904" cy="374904"/>
+          </a:xfrm>
+          <a:prstGeom prst="rect">
+            <a:avLst/>
+          </a:prstGeom>
+          <a:solidFill>
+            <a:srgbClr val="4A525A"/>
+          </a:solidFill>
+          <a:ln>
+            <a:noFill/>
+          </a:ln>
+          <a:effectLst/>
+        </p:spPr>
+        <p:style>
+          <a:lnRef idx="1">
+            <a:schemeClr val="accent1"/>
+          </a:lnRef>
+          <a:fillRef idx="3">
+            <a:schemeClr val="accent1"/>
+          </a:fillRef>
+          <a:effectRef idx="2">
+            <a:schemeClr val="accent1"/>
+          </a:effectRef>
+          <a:fontRef idx="minor">
+            <a:schemeClr val="lt1"/>
+          </a:fontRef>
+        </p:style>
+        <p:txBody>
+          <a:bodyPr rtlCol="0" anchor="ctr" wrap="square" lIns="73152" rIns="73152"/>
+          <a:lstStyle/>
+          <a:p>
+            <a:pPr algn="ctr"/>
+            <a:r>
+              <a:rPr sz="1400" b="1">
+                <a:solidFill>
+                  <a:srgbClr val="9AA3AB"/>
+                </a:solidFill>
+              </a:rPr>
+              <a:t/>
+            </a:r>
+          </a:p>
+        </p:txBody>
+      </p:sp>
+      <p:sp>
+        <p:nvSpPr>
+          <p:cNvPr id="65" name="Rectangle 64"/>
+          <p:cNvSpPr/>
+          <p:nvPr/>
+        </p:nvSpPr>
+        <p:spPr>
+          <a:xfrm>
+            <a:off x="5577840" y="3209544"/>
+            <a:ext cx="374904" cy="374904"/>
+          </a:xfrm>
+          <a:prstGeom prst="rect">
+            <a:avLst/>
+          </a:prstGeom>
+          <a:solidFill>
+            <a:srgbClr val="4A525A"/>
+          </a:solidFill>
+          <a:ln>
+            <a:noFill/>
+          </a:ln>
+          <a:effectLst/>
+        </p:spPr>
+        <p:style>
+          <a:lnRef idx="1">
+            <a:schemeClr val="accent1"/>
+          </a:lnRef>
+          <a:fillRef idx="3">
+            <a:schemeClr val="accent1"/>
+          </a:fillRef>
+          <a:effectRef idx="2">
+            <a:schemeClr val="accent1"/>
+          </a:effectRef>
+          <a:fontRef idx="minor">
+            <a:schemeClr val="lt1"/>
+          </a:fontRef>
+        </p:style>
+        <p:txBody>
+          <a:bodyPr rtlCol="0" anchor="ctr" wrap="square" lIns="73152" rIns="73152"/>
+          <a:lstStyle/>
+          <a:p>
+            <a:pPr algn="ctr"/>
+            <a:r>
+              <a:rPr sz="1400" b="1">
+                <a:solidFill>
+                  <a:srgbClr val="9AA3AB"/>
+                </a:solidFill>
+              </a:rPr>
+              <a:t/>
+            </a:r>
+          </a:p>
+        </p:txBody>
+      </p:sp>
+      <p:sp>
+        <p:nvSpPr>
+          <p:cNvPr id="66" name="Rectangle 65"/>
+          <p:cNvSpPr/>
+          <p:nvPr/>
+        </p:nvSpPr>
+        <p:spPr>
+          <a:xfrm>
+            <a:off x="5980176" y="3209544"/>
+            <a:ext cx="374904" cy="374904"/>
+          </a:xfrm>
+          <a:prstGeom prst="rect">
+            <a:avLst/>
+          </a:prstGeom>
+          <a:solidFill>
+            <a:srgbClr val="4A525A"/>
+          </a:solidFill>
+          <a:ln>
+            <a:noFill/>
+          </a:ln>
+          <a:effectLst/>
+        </p:spPr>
+        <p:style>
+          <a:lnRef idx="1">
+            <a:schemeClr val="accent1"/>
+          </a:lnRef>
+          <a:fillRef idx="3">
+            <a:schemeClr val="accent1"/>
+          </a:fillRef>
+          <a:effectRef idx="2">
+            <a:schemeClr val="accent1"/>
+          </a:effectRef>
+          <a:fontRef idx="minor">
+            <a:schemeClr val="lt1"/>
+          </a:fontRef>
+        </p:style>
+        <p:txBody>
+          <a:bodyPr rtlCol="0" anchor="ctr" wrap="square" lIns="73152" rIns="73152"/>
+          <a:lstStyle/>
+          <a:p>
+            <a:pPr algn="ctr"/>
+            <a:r>
+              <a:rPr sz="1400" b="1">
+                <a:solidFill>
+                  <a:srgbClr val="9AA3AB"/>
+                </a:solidFill>
+              </a:rPr>
+              <a:t/>
+            </a:r>
+          </a:p>
+        </p:txBody>
+      </p:sp>
+      <p:sp>
+        <p:nvSpPr>
+          <p:cNvPr id="67" name="Rectangle 66"/>
+          <p:cNvSpPr/>
+          <p:nvPr/>
+        </p:nvSpPr>
+        <p:spPr>
+          <a:xfrm>
+            <a:off x="6382512" y="3209544"/>
+            <a:ext cx="374904" cy="374904"/>
+          </a:xfrm>
+          <a:prstGeom prst="rect">
+            <a:avLst/>
+          </a:prstGeom>
+          <a:solidFill>
+            <a:srgbClr val="4A525A"/>
+          </a:solidFill>
+          <a:ln>
+            <a:noFill/>
+          </a:ln>
+          <a:effectLst/>
+        </p:spPr>
+        <p:style>
+          <a:lnRef idx="1">
+            <a:schemeClr val="accent1"/>
+          </a:lnRef>
+          <a:fillRef idx="3">
+            <a:schemeClr val="accent1"/>
+          </a:fillRef>
+          <a:effectRef idx="2">
+            <a:schemeClr val="accent1"/>
+          </a:effectRef>
+          <a:fontRef idx="minor">
+            <a:schemeClr val="lt1"/>
+          </a:fontRef>
+        </p:style>
+        <p:txBody>
+          <a:bodyPr rtlCol="0" anchor="ctr" wrap="square" lIns="73152" rIns="73152"/>
+          <a:lstStyle/>
+          <a:p>
+            <a:pPr algn="ctr"/>
+            <a:r>
+              <a:rPr sz="1400" b="1">
+                <a:solidFill>
+                  <a:srgbClr val="9AA3AB"/>
+                </a:solidFill>
+              </a:rPr>
+              <a:t/>
+            </a:r>
+          </a:p>
+        </p:txBody>
+      </p:sp>
+      <p:sp>
+        <p:nvSpPr>
+          <p:cNvPr id="68" name="Rectangle 67"/>
+          <p:cNvSpPr/>
+          <p:nvPr/>
+        </p:nvSpPr>
+        <p:spPr>
+          <a:xfrm>
+            <a:off x="6784848" y="3209544"/>
+            <a:ext cx="374904" cy="374904"/>
+          </a:xfrm>
+          <a:prstGeom prst="rect">
+            <a:avLst/>
+          </a:prstGeom>
+          <a:solidFill>
+            <a:srgbClr val="4A525A"/>
+          </a:solidFill>
+          <a:ln>
+            <a:noFill/>
+          </a:ln>
+          <a:effectLst/>
+        </p:spPr>
+        <p:style>
+          <a:lnRef idx="1">
+            <a:schemeClr val="accent1"/>
+          </a:lnRef>
+          <a:fillRef idx="3">
+            <a:schemeClr val="accent1"/>
+          </a:fillRef>
+          <a:effectRef idx="2">
+            <a:schemeClr val="accent1"/>
+          </a:effectRef>
+          <a:fontRef idx="minor">
+            <a:schemeClr val="lt1"/>
+          </a:fontRef>
+        </p:style>
+        <p:txBody>
+          <a:bodyPr rtlCol="0" anchor="ctr" wrap="square" lIns="73152" rIns="73152"/>
+          <a:lstStyle/>
+          <a:p>
+            <a:pPr algn="ctr"/>
+            <a:r>
+              <a:rPr sz="1400" b="1">
+                <a:solidFill>
+                  <a:srgbClr val="9AA3AB"/>
+                </a:solidFill>
+              </a:rPr>
+              <a:t/>
+            </a:r>
+          </a:p>
+        </p:txBody>
+      </p:sp>
+      <p:sp>
+        <p:nvSpPr>
+          <p:cNvPr id="69" name="TextBox 68"/>
+          <p:cNvSpPr txBox="1"/>
+          <p:nvPr/>
+        </p:nvSpPr>
+        <p:spPr>
+          <a:xfrm>
+            <a:off x="457200" y="3685032"/>
+            <a:ext cx="8229600" cy="365760"/>
+          </a:xfrm>
+          <a:prstGeom prst="rect">
+            <a:avLst/>
+          </a:prstGeom>
+          <a:noFill/>
+        </p:spPr>
+        <p:txBody>
+          <a:bodyPr wrap="square">
+            <a:spAutoFit/>
+          </a:bodyPr>
+          <a:lstStyle/>
+          <a:p>
+            <a:pPr algn="ctr"/>
+            <a:r>
+              <a:rPr sz="1400" b="0" i="0">
+                <a:solidFill>
+                  <a:srgbClr val="9AA3AB"/>
+                </a:solidFill>
+              </a:rPr>
+              <a:t>The tile to the left of G is closer to T. That way is 7 steps, and going right is 5.</a:t>
+            </a:r>
+          </a:p>
+        </p:txBody>
+      </p:sp>
+      <p:sp>
+        <p:nvSpPr>
+          <p:cNvPr id="70" name="TextBox 69"/>
+          <p:cNvSpPr txBox="1"/>
+          <p:nvPr/>
+        </p:nvSpPr>
+        <p:spPr>
+          <a:xfrm>
+            <a:off x="457200" y="4160520"/>
+            <a:ext cx="8229600" cy="731520"/>
+          </a:xfrm>
+          <a:prstGeom prst="rect">
+            <a:avLst/>
+          </a:prstGeom>
+          <a:noFill/>
+        </p:spPr>
+        <p:txBody>
+          <a:bodyPr wrap="square">
+            <a:spAutoFit/>
+          </a:bodyPr>
+          <a:lstStyle/>
+          <a:p>
+            <a:pPr algn="ctr"/>
+            <a:r>
+              <a:rPr sz="1800" b="1" i="0">
+                <a:solidFill>
+                  <a:srgbClr val="DEE2E6"/>
+                </a:solidFill>
+              </a:rPr>
+              <a:t>How does a ghost find the shortest way?</a:t>
+            </a:r>
+          </a:p>
+        </p:txBody>
+      </p:sp>
+    </p:spTree>
+  </p:cSld>
+  <p:clrMapOvr>
+    <a:masterClrMapping/>
+  </p:clrMapOvr>
+</p:sld>
+</file>
+
+<file path=ppt/slides/slide33.xml><?xml version="1.0" encoding="utf-8"?>
+<p:sld xmlns:a="http://schemas.openxmlformats.org/drawingml/2006/main" xmlns:p="http://schemas.openxmlformats.org/presentationml/2006/main" xmlns:r="http://schemas.openxmlformats.org/officeDocument/2006/relationships">
+  <p:cSld>
+    <p:spTree>
+      <p:nvGrpSpPr>
+        <p:cNvPr id="1" name=""/>
+        <p:cNvGrpSpPr/>
+        <p:nvPr/>
+      </p:nvGrpSpPr>
+      <p:grpSpPr/>
+      <p:sp>
+        <p:nvSpPr>
+          <p:cNvPr id="2" name="Title 1"/>
+          <p:cNvSpPr>
+            <a:spLocks noGrp="1"/>
+          </p:cNvSpPr>
+          <p:nvPr>
+            <p:ph type="title"/>
+          </p:nvPr>
+        </p:nvSpPr>
+        <p:spPr/>
+        <p:txBody>
+          <a:bodyPr/>
+          <a:lstStyle/>
+          <a:p>
+            <a:pPr indent="0" lvl="0" marL="0" rtl="0" algn="l">
+              <a:spcBef>
+                <a:spcPts val="0"/>
+              </a:spcBef>
+              <a:spcAft>
+                <a:spcPts val="0"/>
+              </a:spcAft>
+              <a:buNone/>
+            </a:pPr>
+            <a:r>
+              <a:rPr lang="en"/>
+              <a:t>Breadth-First Search</a:t>
+            </a:r>
+            <a:endParaRPr/>
+          </a:p>
+        </p:txBody>
+      </p:sp>
+      <p:sp>
+        <p:nvSpPr>
+          <p:cNvPr id="3" name="Text Placeholder 2"/>
+          <p:cNvSpPr>
+            <a:spLocks noGrp="1"/>
+          </p:cNvSpPr>
+          <p:nvPr>
+            <p:ph type="body" idx="1"/>
+          </p:nvPr>
+        </p:nvSpPr>
+        <p:spPr>
+          <a:xfrm>
+            <a:off x="311700" y="885950"/>
+            <a:ext cx="8520600" cy="521208"/>
+          </a:xfrm>
+        </p:spPr>
+        <p:txBody>
+          <a:bodyPr/>
+          <a:lstStyle/>
+          <a:p>
+            <a:pPr indent="-330200" lvl="0" marL="457200" rtl="0" algn="l">
+              <a:spcBef>
+                <a:spcPts val="0"/>
+              </a:spcBef>
+              <a:spcAft>
+                <a:spcPts val="0"/>
+              </a:spcAft>
+              <a:buSzPts val="1600"/>
+              <a:buChar char="●"/>
+            </a:pPr>
+            <a:r>
+              <a:rPr lang="en" b="1"/>
+              <a:t>Number the tiles outwards from the ghost, one step at a time.</a:t>
+            </a:r>
+            <a:endParaRPr/>
+          </a:p>
+        </p:txBody>
+      </p:sp>
+      <p:sp>
+        <p:nvSpPr>
+          <p:cNvPr id="4" name="Rectangle 3"/>
+          <p:cNvSpPr/>
+          <p:nvPr/>
+        </p:nvSpPr>
+        <p:spPr>
+          <a:xfrm>
+            <a:off x="1956816" y="1600200"/>
+            <a:ext cx="374904" cy="374904"/>
+          </a:xfrm>
+          <a:prstGeom prst="rect">
+            <a:avLst/>
+          </a:prstGeom>
+          <a:solidFill>
+            <a:srgbClr val="4A525A"/>
+          </a:solidFill>
+          <a:ln>
+            <a:noFill/>
+          </a:ln>
+          <a:effectLst/>
+        </p:spPr>
+        <p:style>
+          <a:lnRef idx="1">
+            <a:schemeClr val="accent1"/>
+          </a:lnRef>
+          <a:fillRef idx="3">
+            <a:schemeClr val="accent1"/>
+          </a:fillRef>
+          <a:effectRef idx="2">
+            <a:schemeClr val="accent1"/>
+          </a:effectRef>
+          <a:fontRef idx="minor">
+            <a:schemeClr val="lt1"/>
+          </a:fontRef>
+        </p:style>
+        <p:txBody>
+          <a:bodyPr rtlCol="0" anchor="ctr" wrap="square" lIns="73152" rIns="73152"/>
+          <a:lstStyle/>
+          <a:p>
+            <a:pPr algn="ctr"/>
+            <a:r>
+              <a:rPr sz="1400" b="1">
+                <a:solidFill>
+                  <a:srgbClr val="9AA3AB"/>
+                </a:solidFill>
+              </a:rPr>
+              <a:t/>
+            </a:r>
+          </a:p>
+        </p:txBody>
+      </p:sp>
+      <p:sp>
+        <p:nvSpPr>
+          <p:cNvPr id="5" name="Rectangle 4"/>
+          <p:cNvSpPr/>
+          <p:nvPr/>
+        </p:nvSpPr>
+        <p:spPr>
+          <a:xfrm>
+            <a:off x="2359152" y="1600200"/>
+            <a:ext cx="374904" cy="374904"/>
+          </a:xfrm>
+          <a:prstGeom prst="rect">
+            <a:avLst/>
+          </a:prstGeom>
+          <a:solidFill>
+            <a:srgbClr val="4A525A"/>
+          </a:solidFill>
+          <a:ln>
+            <a:noFill/>
+          </a:ln>
+          <a:effectLst/>
+        </p:spPr>
+        <p:style>
+          <a:lnRef idx="1">
+            <a:schemeClr val="accent1"/>
+          </a:lnRef>
+          <a:fillRef idx="3">
+            <a:schemeClr val="accent1"/>
+          </a:fillRef>
+          <a:effectRef idx="2">
+            <a:schemeClr val="accent1"/>
+          </a:effectRef>
+          <a:fontRef idx="minor">
+            <a:schemeClr val="lt1"/>
+          </a:fontRef>
+        </p:style>
+        <p:txBody>
+          <a:bodyPr rtlCol="0" anchor="ctr" wrap="square" lIns="73152" rIns="73152"/>
+          <a:lstStyle/>
+          <a:p>
+            <a:pPr algn="ctr"/>
+            <a:r>
+              <a:rPr sz="1400" b="1">
+                <a:solidFill>
+                  <a:srgbClr val="9AA3AB"/>
+                </a:solidFill>
+              </a:rPr>
+              <a:t/>
+            </a:r>
+          </a:p>
+        </p:txBody>
+      </p:sp>
+      <p:sp>
+        <p:nvSpPr>
+          <p:cNvPr id="6" name="Rectangle 5"/>
+          <p:cNvSpPr/>
+          <p:nvPr/>
+        </p:nvSpPr>
+        <p:spPr>
+          <a:xfrm>
+            <a:off x="2761488" y="1600200"/>
+            <a:ext cx="374904" cy="374904"/>
+          </a:xfrm>
+          <a:prstGeom prst="rect">
+            <a:avLst/>
+          </a:prstGeom>
+          <a:solidFill>
+            <a:srgbClr val="4A525A"/>
+          </a:solidFill>
+          <a:ln>
+            <a:noFill/>
+          </a:ln>
+          <a:effectLst/>
+        </p:spPr>
+        <p:style>
+          <a:lnRef idx="1">
+            <a:schemeClr val="accent1"/>
+          </a:lnRef>
+          <a:fillRef idx="3">
+            <a:schemeClr val="accent1"/>
+          </a:fillRef>
+          <a:effectRef idx="2">
+            <a:schemeClr val="accent1"/>
+          </a:effectRef>
+          <a:fontRef idx="minor">
+            <a:schemeClr val="lt1"/>
+          </a:fontRef>
+        </p:style>
+        <p:txBody>
+          <a:bodyPr rtlCol="0" anchor="ctr" wrap="square" lIns="73152" rIns="73152"/>
+          <a:lstStyle/>
+          <a:p>
+            <a:pPr algn="ctr"/>
+            <a:r>
+              <a:rPr sz="1400" b="1">
+                <a:solidFill>
+                  <a:srgbClr val="9AA3AB"/>
+                </a:solidFill>
+              </a:rPr>
+              <a:t/>
+            </a:r>
+          </a:p>
+        </p:txBody>
+      </p:sp>
+      <p:sp>
+        <p:nvSpPr>
+          <p:cNvPr id="7" name="Rectangle 6"/>
+          <p:cNvSpPr/>
+          <p:nvPr/>
+        </p:nvSpPr>
+        <p:spPr>
+          <a:xfrm>
+            <a:off x="3163824" y="1600200"/>
+            <a:ext cx="374904" cy="374904"/>
+          </a:xfrm>
+          <a:prstGeom prst="rect">
+            <a:avLst/>
+          </a:prstGeom>
+          <a:solidFill>
+            <a:srgbClr val="4A525A"/>
+          </a:solidFill>
+          <a:ln>
+            <a:noFill/>
+          </a:ln>
+          <a:effectLst/>
+        </p:spPr>
+        <p:style>
+          <a:lnRef idx="1">
+            <a:schemeClr val="accent1"/>
+          </a:lnRef>
+          <a:fillRef idx="3">
+            <a:schemeClr val="accent1"/>
+          </a:fillRef>
+          <a:effectRef idx="2">
+            <a:schemeClr val="accent1"/>
+          </a:effectRef>
+          <a:fontRef idx="minor">
+            <a:schemeClr val="lt1"/>
+          </a:fontRef>
+        </p:style>
+        <p:txBody>
+          <a:bodyPr rtlCol="0" anchor="ctr" wrap="square" lIns="73152" rIns="73152"/>
+          <a:lstStyle/>
+          <a:p>
+            <a:pPr algn="ctr"/>
+            <a:r>
+              <a:rPr sz="1400" b="1">
+                <a:solidFill>
+                  <a:srgbClr val="9AA3AB"/>
+                </a:solidFill>
+              </a:rPr>
+              <a:t/>
+            </a:r>
+          </a:p>
+        </p:txBody>
+      </p:sp>
+      <p:sp>
+        <p:nvSpPr>
+          <p:cNvPr id="8" name="Rectangle 7"/>
+          <p:cNvSpPr/>
+          <p:nvPr/>
+        </p:nvSpPr>
+        <p:spPr>
+          <a:xfrm>
+            <a:off x="3566160" y="1600200"/>
+            <a:ext cx="374904" cy="374904"/>
+          </a:xfrm>
+          <a:prstGeom prst="rect">
+            <a:avLst/>
+          </a:prstGeom>
+          <a:solidFill>
+            <a:srgbClr val="4A525A"/>
+          </a:solidFill>
+          <a:ln>
+            <a:noFill/>
+          </a:ln>
+          <a:effectLst/>
+        </p:spPr>
+        <p:style>
+          <a:lnRef idx="1">
+            <a:schemeClr val="accent1"/>
+          </a:lnRef>
+          <a:fillRef idx="3">
+            <a:schemeClr val="accent1"/>
+          </a:fillRef>
+          <a:effectRef idx="2">
+            <a:schemeClr val="accent1"/>
+          </a:effectRef>
+          <a:fontRef idx="minor">
+            <a:schemeClr val="lt1"/>
+          </a:fontRef>
+        </p:style>
+        <p:txBody>
+          <a:bodyPr rtlCol="0" anchor="ctr" wrap="square" lIns="73152" rIns="73152"/>
+          <a:lstStyle/>
+          <a:p>
+            <a:pPr algn="ctr"/>
+            <a:r>
+              <a:rPr sz="1400" b="1">
+                <a:solidFill>
+                  <a:srgbClr val="9AA3AB"/>
+                </a:solidFill>
+              </a:rPr>
+              <a:t/>
+            </a:r>
+          </a:p>
+        </p:txBody>
+      </p:sp>
+      <p:sp>
+        <p:nvSpPr>
+          <p:cNvPr id="9" name="Rectangle 8"/>
+          <p:cNvSpPr/>
+          <p:nvPr/>
+        </p:nvSpPr>
+        <p:spPr>
+          <a:xfrm>
+            <a:off x="3968496" y="1600200"/>
+            <a:ext cx="374904" cy="374904"/>
+          </a:xfrm>
+          <a:prstGeom prst="rect">
+            <a:avLst/>
+          </a:prstGeom>
+          <a:solidFill>
+            <a:srgbClr val="4A525A"/>
+          </a:solidFill>
+          <a:ln>
+            <a:noFill/>
+          </a:ln>
+          <a:effectLst/>
+        </p:spPr>
+        <p:style>
+          <a:lnRef idx="1">
+            <a:schemeClr val="accent1"/>
+          </a:lnRef>
+          <a:fillRef idx="3">
+            <a:schemeClr val="accent1"/>
+          </a:fillRef>
+          <a:effectRef idx="2">
+            <a:schemeClr val="accent1"/>
+          </a:effectRef>
+          <a:fontRef idx="minor">
+            <a:schemeClr val="lt1"/>
+          </a:fontRef>
+        </p:style>
+        <p:txBody>
+          <a:bodyPr rtlCol="0" anchor="ctr" wrap="square" lIns="73152" rIns="73152"/>
+          <a:lstStyle/>
+          <a:p>
+            <a:pPr algn="ctr"/>
+            <a:r>
+              <a:rPr sz="1400" b="1">
+                <a:solidFill>
+                  <a:srgbClr val="9AA3AB"/>
+                </a:solidFill>
+              </a:rPr>
+              <a:t/>
+            </a:r>
+          </a:p>
+        </p:txBody>
+      </p:sp>
+      <p:sp>
+        <p:nvSpPr>
+          <p:cNvPr id="10" name="Rectangle 9"/>
+          <p:cNvSpPr/>
+          <p:nvPr/>
+        </p:nvSpPr>
+        <p:spPr>
+          <a:xfrm>
+            <a:off x="4370832" y="1600200"/>
+            <a:ext cx="374904" cy="374904"/>
+          </a:xfrm>
+          <a:prstGeom prst="rect">
+            <a:avLst/>
+          </a:prstGeom>
+          <a:solidFill>
+            <a:srgbClr val="4A525A"/>
+          </a:solidFill>
+          <a:ln>
+            <a:noFill/>
+          </a:ln>
+          <a:effectLst/>
+        </p:spPr>
+        <p:style>
+          <a:lnRef idx="1">
+            <a:schemeClr val="accent1"/>
+          </a:lnRef>
+          <a:fillRef idx="3">
+            <a:schemeClr val="accent1"/>
+          </a:fillRef>
+          <a:effectRef idx="2">
+            <a:schemeClr val="accent1"/>
+          </a:effectRef>
+          <a:fontRef idx="minor">
+            <a:schemeClr val="lt1"/>
+          </a:fontRef>
+        </p:style>
+        <p:txBody>
+          <a:bodyPr rtlCol="0" anchor="ctr" wrap="square" lIns="73152" rIns="73152"/>
+          <a:lstStyle/>
+          <a:p>
+            <a:pPr algn="ctr"/>
+            <a:r>
+              <a:rPr sz="1400" b="1">
+                <a:solidFill>
+                  <a:srgbClr val="9AA3AB"/>
+                </a:solidFill>
+              </a:rPr>
+              <a:t/>
+            </a:r>
+          </a:p>
+        </p:txBody>
+      </p:sp>
+      <p:sp>
+        <p:nvSpPr>
+          <p:cNvPr id="11" name="Rectangle 10"/>
+          <p:cNvSpPr/>
+          <p:nvPr/>
+        </p:nvSpPr>
+        <p:spPr>
+          <a:xfrm>
+            <a:off x="4773168" y="1600200"/>
+            <a:ext cx="374904" cy="374904"/>
+          </a:xfrm>
+          <a:prstGeom prst="rect">
+            <a:avLst/>
+          </a:prstGeom>
+          <a:solidFill>
+            <a:srgbClr val="4A525A"/>
+          </a:solidFill>
+          <a:ln>
+            <a:noFill/>
+          </a:ln>
+          <a:effectLst/>
+        </p:spPr>
+        <p:style>
+          <a:lnRef idx="1">
+            <a:schemeClr val="accent1"/>
+          </a:lnRef>
+          <a:fillRef idx="3">
+            <a:schemeClr val="accent1"/>
+          </a:fillRef>
+          <a:effectRef idx="2">
+            <a:schemeClr val="accent1"/>
+          </a:effectRef>
+          <a:fontRef idx="minor">
+            <a:schemeClr val="lt1"/>
+          </a:fontRef>
+        </p:style>
+        <p:txBody>
+          <a:bodyPr rtlCol="0" anchor="ctr" wrap="square" lIns="73152" rIns="73152"/>
+          <a:lstStyle/>
+          <a:p>
+            <a:pPr algn="ctr"/>
+            <a:r>
+              <a:rPr sz="1400" b="1">
+                <a:solidFill>
+                  <a:srgbClr val="9AA3AB"/>
+                </a:solidFill>
+              </a:rPr>
+              <a:t/>
+            </a:r>
+          </a:p>
+        </p:txBody>
+      </p:sp>
+      <p:sp>
+        <p:nvSpPr>
+          <p:cNvPr id="12" name="Rectangle 11"/>
+          <p:cNvSpPr/>
+          <p:nvPr/>
+        </p:nvSpPr>
+        <p:spPr>
+          <a:xfrm>
+            <a:off x="5175504" y="1600200"/>
+            <a:ext cx="374904" cy="374904"/>
+          </a:xfrm>
+          <a:prstGeom prst="rect">
+            <a:avLst/>
+          </a:prstGeom>
+          <a:solidFill>
+            <a:srgbClr val="4A525A"/>
+          </a:solidFill>
+          <a:ln>
+            <a:noFill/>
+          </a:ln>
+          <a:effectLst/>
+        </p:spPr>
+        <p:style>
+          <a:lnRef idx="1">
+            <a:schemeClr val="accent1"/>
+          </a:lnRef>
+          <a:fillRef idx="3">
+            <a:schemeClr val="accent1"/>
+          </a:fillRef>
+          <a:effectRef idx="2">
+            <a:schemeClr val="accent1"/>
+          </a:effectRef>
+          <a:fontRef idx="minor">
+            <a:schemeClr val="lt1"/>
+          </a:fontRef>
+        </p:style>
+        <p:txBody>
+          <a:bodyPr rtlCol="0" anchor="ctr" wrap="square" lIns="73152" rIns="73152"/>
+          <a:lstStyle/>
+          <a:p>
+            <a:pPr algn="ctr"/>
+            <a:r>
+              <a:rPr sz="1400" b="1">
+                <a:solidFill>
+                  <a:srgbClr val="9AA3AB"/>
+                </a:solidFill>
+              </a:rPr>
+              <a:t/>
+            </a:r>
+          </a:p>
+        </p:txBody>
+      </p:sp>
+      <p:sp>
+        <p:nvSpPr>
+          <p:cNvPr id="13" name="Rectangle 12"/>
+          <p:cNvSpPr/>
+          <p:nvPr/>
+        </p:nvSpPr>
+        <p:spPr>
+          <a:xfrm>
+            <a:off x="5577840" y="1600200"/>
+            <a:ext cx="374904" cy="374904"/>
+          </a:xfrm>
+          <a:prstGeom prst="rect">
+            <a:avLst/>
+          </a:prstGeom>
+          <a:solidFill>
+            <a:srgbClr val="4A525A"/>
+          </a:solidFill>
+          <a:ln>
+            <a:noFill/>
+          </a:ln>
+          <a:effectLst/>
+        </p:spPr>
+        <p:style>
+          <a:lnRef idx="1">
+            <a:schemeClr val="accent1"/>
+          </a:lnRef>
+          <a:fillRef idx="3">
+            <a:schemeClr val="accent1"/>
+          </a:fillRef>
+          <a:effectRef idx="2">
+            <a:schemeClr val="accent1"/>
+          </a:effectRef>
+          <a:fontRef idx="minor">
+            <a:schemeClr val="lt1"/>
+          </a:fontRef>
+        </p:style>
+        <p:txBody>
+          <a:bodyPr rtlCol="0" anchor="ctr" wrap="square" lIns="73152" rIns="73152"/>
+          <a:lstStyle/>
+          <a:p>
+            <a:pPr algn="ctr"/>
+            <a:r>
+              <a:rPr sz="1400" b="1">
+                <a:solidFill>
+                  <a:srgbClr val="9AA3AB"/>
+                </a:solidFill>
+              </a:rPr>
+              <a:t/>
+            </a:r>
+          </a:p>
+        </p:txBody>
+      </p:sp>
+      <p:sp>
+        <p:nvSpPr>
+          <p:cNvPr id="14" name="Rectangle 13"/>
+          <p:cNvSpPr/>
+          <p:nvPr/>
+        </p:nvSpPr>
+        <p:spPr>
+          <a:xfrm>
+            <a:off x="5980176" y="1600200"/>
+            <a:ext cx="374904" cy="374904"/>
+          </a:xfrm>
+          <a:prstGeom prst="rect">
+            <a:avLst/>
+          </a:prstGeom>
+          <a:solidFill>
+            <a:srgbClr val="4A525A"/>
+          </a:solidFill>
+          <a:ln>
+            <a:noFill/>
+          </a:ln>
+          <a:effectLst/>
+        </p:spPr>
+        <p:style>
+          <a:lnRef idx="1">
+            <a:schemeClr val="accent1"/>
+          </a:lnRef>
+          <a:fillRef idx="3">
+            <a:schemeClr val="accent1"/>
+          </a:fillRef>
+          <a:effectRef idx="2">
+            <a:schemeClr val="accent1"/>
+          </a:effectRef>
+          <a:fontRef idx="minor">
+            <a:schemeClr val="lt1"/>
+          </a:fontRef>
+        </p:style>
+        <p:txBody>
+          <a:bodyPr rtlCol="0" anchor="ctr" wrap="square" lIns="73152" rIns="73152"/>
+          <a:lstStyle/>
+          <a:p>
+            <a:pPr algn="ctr"/>
+            <a:r>
+              <a:rPr sz="1400" b="1">
+                <a:solidFill>
+                  <a:srgbClr val="9AA3AB"/>
+                </a:solidFill>
+              </a:rPr>
+              <a:t/>
+            </a:r>
+          </a:p>
+        </p:txBody>
+      </p:sp>
+      <p:sp>
+        <p:nvSpPr>
+          <p:cNvPr id="15" name="Rectangle 14"/>
+          <p:cNvSpPr/>
+          <p:nvPr/>
+        </p:nvSpPr>
+        <p:spPr>
+          <a:xfrm>
+            <a:off x="6382512" y="1600200"/>
+            <a:ext cx="374904" cy="374904"/>
+          </a:xfrm>
+          <a:prstGeom prst="rect">
+            <a:avLst/>
+          </a:prstGeom>
+          <a:solidFill>
+            <a:srgbClr val="4A525A"/>
+          </a:solidFill>
+          <a:ln>
+            <a:noFill/>
+          </a:ln>
+          <a:effectLst/>
+        </p:spPr>
+        <p:style>
+          <a:lnRef idx="1">
+            <a:schemeClr val="accent1"/>
+          </a:lnRef>
+          <a:fillRef idx="3">
+            <a:schemeClr val="accent1"/>
+          </a:fillRef>
+          <a:effectRef idx="2">
+            <a:schemeClr val="accent1"/>
+          </a:effectRef>
+          <a:fontRef idx="minor">
+            <a:schemeClr val="lt1"/>
+          </a:fontRef>
+        </p:style>
+        <p:txBody>
+          <a:bodyPr rtlCol="0" anchor="ctr" wrap="square" lIns="73152" rIns="73152"/>
+          <a:lstStyle/>
+          <a:p>
+            <a:pPr algn="ctr"/>
+            <a:r>
+              <a:rPr sz="1400" b="1">
+                <a:solidFill>
+                  <a:srgbClr val="9AA3AB"/>
+                </a:solidFill>
+              </a:rPr>
+              <a:t/>
+            </a:r>
+          </a:p>
+        </p:txBody>
+      </p:sp>
+      <p:sp>
+        <p:nvSpPr>
+          <p:cNvPr id="16" name="Rectangle 15"/>
+          <p:cNvSpPr/>
+          <p:nvPr/>
+        </p:nvSpPr>
+        <p:spPr>
+          <a:xfrm>
+            <a:off x="6784848" y="1600200"/>
+            <a:ext cx="374904" cy="374904"/>
+          </a:xfrm>
+          <a:prstGeom prst="rect">
+            <a:avLst/>
+          </a:prstGeom>
+          <a:solidFill>
+            <a:srgbClr val="4A525A"/>
+          </a:solidFill>
+          <a:ln>
+            <a:noFill/>
+          </a:ln>
+          <a:effectLst/>
+        </p:spPr>
+        <p:style>
+          <a:lnRef idx="1">
+            <a:schemeClr val="accent1"/>
+          </a:lnRef>
+          <a:fillRef idx="3">
+            <a:schemeClr val="accent1"/>
+          </a:fillRef>
+          <a:effectRef idx="2">
+            <a:schemeClr val="accent1"/>
+          </a:effectRef>
+          <a:fontRef idx="minor">
+            <a:schemeClr val="lt1"/>
+          </a:fontRef>
+        </p:style>
+        <p:txBody>
+          <a:bodyPr rtlCol="0" anchor="ctr" wrap="square" lIns="73152" rIns="73152"/>
+          <a:lstStyle/>
+          <a:p>
+            <a:pPr algn="ctr"/>
+            <a:r>
+              <a:rPr sz="1400" b="1">
+                <a:solidFill>
+                  <a:srgbClr val="9AA3AB"/>
+                </a:solidFill>
+              </a:rPr>
+              <a:t/>
+            </a:r>
+          </a:p>
+        </p:txBody>
+      </p:sp>
+      <p:sp>
+        <p:nvSpPr>
+          <p:cNvPr id="17" name="Rectangle 16"/>
+          <p:cNvSpPr/>
+          <p:nvPr/>
+        </p:nvSpPr>
+        <p:spPr>
+          <a:xfrm>
+            <a:off x="1956816" y="2002536"/>
+            <a:ext cx="374904" cy="374904"/>
+          </a:xfrm>
+          <a:prstGeom prst="rect">
+            <a:avLst/>
+          </a:prstGeom>
+          <a:solidFill>
+            <a:srgbClr val="4A525A"/>
+          </a:solidFill>
+          <a:ln>
+            <a:noFill/>
+          </a:ln>
+          <a:effectLst/>
+        </p:spPr>
+        <p:style>
+          <a:lnRef idx="1">
+            <a:schemeClr val="accent1"/>
+          </a:lnRef>
+          <a:fillRef idx="3">
+            <a:schemeClr val="accent1"/>
+          </a:fillRef>
+          <a:effectRef idx="2">
+            <a:schemeClr val="accent1"/>
+          </a:effectRef>
+          <a:fontRef idx="minor">
+            <a:schemeClr val="lt1"/>
+          </a:fontRef>
+        </p:style>
+        <p:txBody>
+          <a:bodyPr rtlCol="0" anchor="ctr" wrap="square" lIns="73152" rIns="73152"/>
+          <a:lstStyle/>
+          <a:p>
+            <a:pPr algn="ctr"/>
+            <a:r>
+              <a:rPr sz="1400" b="1">
+                <a:solidFill>
+                  <a:srgbClr val="9AA3AB"/>
+                </a:solidFill>
+              </a:rPr>
+              <a:t/>
+            </a:r>
+          </a:p>
+        </p:txBody>
+      </p:sp>
+      <p:sp>
+        <p:nvSpPr>
+          <p:cNvPr id="18" name="Rectangle 17"/>
+          <p:cNvSpPr/>
+          <p:nvPr/>
+        </p:nvSpPr>
+        <p:spPr>
+          <a:xfrm>
+            <a:off x="2359152" y="2002536"/>
+            <a:ext cx="374904" cy="374904"/>
+          </a:xfrm>
+          <a:prstGeom prst="rect">
+            <a:avLst/>
+          </a:prstGeom>
+          <a:solidFill>
+            <a:srgbClr val="17191C"/>
+          </a:solidFill>
+          <a:ln>
+            <a:noFill/>
+          </a:ln>
+          <a:effectLst/>
+        </p:spPr>
+        <p:style>
+          <a:lnRef idx="1">
+            <a:schemeClr val="accent1"/>
+          </a:lnRef>
+          <a:fillRef idx="3">
+            <a:schemeClr val="accent1"/>
+          </a:fillRef>
+          <a:effectRef idx="2">
+            <a:schemeClr val="accent1"/>
+          </a:effectRef>
+          <a:fontRef idx="minor">
+            <a:schemeClr val="lt1"/>
+          </a:fontRef>
+        </p:style>
+        <p:txBody>
+          <a:bodyPr rtlCol="0" anchor="ctr" wrap="square" lIns="73152" rIns="73152"/>
+          <a:lstStyle/>
+          <a:p>
+            <a:pPr algn="ctr"/>
+            <a:r>
+              <a:rPr sz="1400" b="1">
+                <a:solidFill>
+                  <a:srgbClr val="DEE2E6"/>
+                </a:solidFill>
+              </a:rPr>
+              <a:t>5</a:t>
+            </a:r>
+          </a:p>
+        </p:txBody>
+      </p:sp>
+      <p:sp>
+        <p:nvSpPr>
+          <p:cNvPr id="19" name="Rectangle 18"/>
+          <p:cNvSpPr/>
+          <p:nvPr/>
+        </p:nvSpPr>
+        <p:spPr>
+          <a:xfrm>
+            <a:off x="2761488" y="2002536"/>
+            <a:ext cx="374904" cy="374904"/>
+          </a:xfrm>
+          <a:prstGeom prst="rect">
+            <a:avLst/>
+          </a:prstGeom>
+          <a:solidFill>
+            <a:srgbClr val="17191C"/>
+          </a:solidFill>
+          <a:ln>
+            <a:noFill/>
+          </a:ln>
+          <a:effectLst/>
+        </p:spPr>
+        <p:style>
+          <a:lnRef idx="1">
+            <a:schemeClr val="accent1"/>
+          </a:lnRef>
+          <a:fillRef idx="3">
+            <a:schemeClr val="accent1"/>
+          </a:fillRef>
+          <a:effectRef idx="2">
+            <a:schemeClr val="accent1"/>
+          </a:effectRef>
+          <a:fontRef idx="minor">
+            <a:schemeClr val="lt1"/>
+          </a:fontRef>
+        </p:style>
+        <p:txBody>
+          <a:bodyPr rtlCol="0" anchor="ctr" wrap="square" lIns="73152" rIns="73152"/>
+          <a:lstStyle/>
+          <a:p>
+            <a:pPr algn="ctr"/>
+            <a:r>
+              <a:rPr sz="1400" b="1">
+                <a:solidFill>
+                  <a:srgbClr val="9AA3AB"/>
+                </a:solidFill>
+              </a:rPr>
+              <a:t/>
+            </a:r>
+          </a:p>
+        </p:txBody>
+      </p:sp>
+      <p:sp>
+        <p:nvSpPr>
+          <p:cNvPr id="20" name="Rectangle 19"/>
+          <p:cNvSpPr/>
+          <p:nvPr/>
+        </p:nvSpPr>
+        <p:spPr>
+          <a:xfrm>
+            <a:off x="3163824" y="2002536"/>
+            <a:ext cx="374904" cy="374904"/>
+          </a:xfrm>
+          <a:prstGeom prst="rect">
+            <a:avLst/>
+          </a:prstGeom>
+          <a:solidFill>
+            <a:srgbClr val="1E9BA5"/>
+          </a:solidFill>
+          <a:ln>
+            <a:noFill/>
+          </a:ln>
+          <a:effectLst/>
+        </p:spPr>
+        <p:style>
+          <a:lnRef idx="1">
+            <a:schemeClr val="accent1"/>
+          </a:lnRef>
+          <a:fillRef idx="3">
+            <a:schemeClr val="accent1"/>
+          </a:fillRef>
+          <a:effectRef idx="2">
+            <a:schemeClr val="accent1"/>
+          </a:effectRef>
+          <a:fontRef idx="minor">
+            <a:schemeClr val="lt1"/>
+          </a:fontRef>
+        </p:style>
+        <p:txBody>
+          <a:bodyPr rtlCol="0" anchor="ctr" wrap="square" lIns="73152" rIns="73152"/>
+          <a:lstStyle/>
+          <a:p>
+            <a:pPr algn="ctr"/>
+            <a:r>
+              <a:rPr sz="1400" b="1">
+                <a:solidFill>
+                  <a:srgbClr val="DEE2E6"/>
+                </a:solidFill>
+              </a:rPr>
+              <a:t>T</a:t>
+            </a:r>
+          </a:p>
+        </p:txBody>
+      </p:sp>
+      <p:sp>
+        <p:nvSpPr>
+          <p:cNvPr id="21" name="Rectangle 20"/>
+          <p:cNvSpPr/>
+          <p:nvPr/>
+        </p:nvSpPr>
+        <p:spPr>
+          <a:xfrm>
+            <a:off x="3566160" y="2002536"/>
+            <a:ext cx="374904" cy="374904"/>
+          </a:xfrm>
+          <a:prstGeom prst="rect">
+            <a:avLst/>
+          </a:prstGeom>
+          <a:solidFill>
+            <a:srgbClr val="17191C"/>
+          </a:solidFill>
+          <a:ln w="25400">
+            <a:solidFill>
+              <a:srgbClr val="D45D35"/>
+            </a:solidFill>
+          </a:ln>
+          <a:effectLst/>
+        </p:spPr>
+        <p:style>
+          <a:lnRef idx="1">
+            <a:schemeClr val="accent1"/>
+          </a:lnRef>
+          <a:fillRef idx="3">
+            <a:schemeClr val="accent1"/>
+          </a:fillRef>
+          <a:effectRef idx="2">
+            <a:schemeClr val="accent1"/>
+          </a:effectRef>
+          <a:fontRef idx="minor">
+            <a:schemeClr val="lt1"/>
+          </a:fontRef>
+        </p:style>
+        <p:txBody>
+          <a:bodyPr rtlCol="0" anchor="ctr" wrap="square" lIns="73152" rIns="73152"/>
+          <a:lstStyle/>
+          <a:p>
+            <a:pPr algn="ctr"/>
+            <a:r>
+              <a:rPr sz="1400" b="1">
+                <a:solidFill>
+                  <a:srgbClr val="DEE2E6"/>
+                </a:solidFill>
+              </a:rPr>
+              <a:t>4</a:t>
+            </a:r>
+          </a:p>
+        </p:txBody>
+      </p:sp>
+      <p:sp>
+        <p:nvSpPr>
+          <p:cNvPr id="22" name="Rectangle 21"/>
+          <p:cNvSpPr/>
+          <p:nvPr/>
+        </p:nvSpPr>
+        <p:spPr>
+          <a:xfrm>
+            <a:off x="3968496" y="2002536"/>
+            <a:ext cx="374904" cy="374904"/>
+          </a:xfrm>
+          <a:prstGeom prst="rect">
+            <a:avLst/>
+          </a:prstGeom>
+          <a:solidFill>
+            <a:srgbClr val="17191C"/>
+          </a:solidFill>
+          <a:ln w="25400">
+            <a:solidFill>
+              <a:srgbClr val="D45D35"/>
+            </a:solidFill>
+          </a:ln>
+          <a:effectLst/>
+        </p:spPr>
+        <p:style>
+          <a:lnRef idx="1">
+            <a:schemeClr val="accent1"/>
+          </a:lnRef>
+          <a:fillRef idx="3">
+            <a:schemeClr val="accent1"/>
+          </a:fillRef>
+          <a:effectRef idx="2">
+            <a:schemeClr val="accent1"/>
+          </a:effectRef>
+          <a:fontRef idx="minor">
+            <a:schemeClr val="lt1"/>
+          </a:fontRef>
+        </p:style>
+        <p:txBody>
+          <a:bodyPr rtlCol="0" anchor="ctr" wrap="square" lIns="73152" rIns="73152"/>
+          <a:lstStyle/>
+          <a:p>
+            <a:pPr algn="ctr"/>
+            <a:r>
+              <a:rPr sz="1400" b="1">
+                <a:solidFill>
+                  <a:srgbClr val="DEE2E6"/>
+                </a:solidFill>
+              </a:rPr>
+              <a:t>3</a:t>
+            </a:r>
+          </a:p>
+        </p:txBody>
+      </p:sp>
+      <p:sp>
+        <p:nvSpPr>
+          <p:cNvPr id="23" name="Rectangle 22"/>
+          <p:cNvSpPr/>
+          <p:nvPr/>
+        </p:nvSpPr>
+        <p:spPr>
+          <a:xfrm>
+            <a:off x="4370832" y="2002536"/>
+            <a:ext cx="374904" cy="374904"/>
+          </a:xfrm>
+          <a:prstGeom prst="rect">
+            <a:avLst/>
+          </a:prstGeom>
+          <a:solidFill>
+            <a:srgbClr val="17191C"/>
+          </a:solidFill>
+          <a:ln>
+            <a:noFill/>
+          </a:ln>
+          <a:effectLst/>
+        </p:spPr>
+        <p:style>
+          <a:lnRef idx="1">
+            <a:schemeClr val="accent1"/>
+          </a:lnRef>
+          <a:fillRef idx="3">
+            <a:schemeClr val="accent1"/>
+          </a:fillRef>
+          <a:effectRef idx="2">
+            <a:schemeClr val="accent1"/>
+          </a:effectRef>
+          <a:fontRef idx="minor">
+            <a:schemeClr val="lt1"/>
+          </a:fontRef>
+        </p:style>
+        <p:txBody>
+          <a:bodyPr rtlCol="0" anchor="ctr" wrap="square" lIns="73152" rIns="73152"/>
+          <a:lstStyle/>
+          <a:p>
+            <a:pPr algn="ctr"/>
+            <a:r>
+              <a:rPr sz="1400" b="1">
+                <a:solidFill>
+                  <a:srgbClr val="DEE2E6"/>
+                </a:solidFill>
+              </a:rPr>
+              <a:t>4</a:t>
+            </a:r>
+          </a:p>
+        </p:txBody>
+      </p:sp>
+      <p:sp>
+        <p:nvSpPr>
+          <p:cNvPr id="24" name="Rectangle 23"/>
+          <p:cNvSpPr/>
+          <p:nvPr/>
+        </p:nvSpPr>
+        <p:spPr>
+          <a:xfrm>
+            <a:off x="4773168" y="2002536"/>
+            <a:ext cx="374904" cy="374904"/>
+          </a:xfrm>
+          <a:prstGeom prst="rect">
+            <a:avLst/>
+          </a:prstGeom>
+          <a:solidFill>
+            <a:srgbClr val="17191C"/>
+          </a:solidFill>
+          <a:ln>
+            <a:noFill/>
+          </a:ln>
+          <a:effectLst/>
+        </p:spPr>
+        <p:style>
+          <a:lnRef idx="1">
+            <a:schemeClr val="accent1"/>
+          </a:lnRef>
+          <a:fillRef idx="3">
+            <a:schemeClr val="accent1"/>
+          </a:fillRef>
+          <a:effectRef idx="2">
+            <a:schemeClr val="accent1"/>
+          </a:effectRef>
+          <a:fontRef idx="minor">
+            <a:schemeClr val="lt1"/>
+          </a:fontRef>
+        </p:style>
+        <p:txBody>
+          <a:bodyPr rtlCol="0" anchor="ctr" wrap="square" lIns="73152" rIns="73152"/>
+          <a:lstStyle/>
+          <a:p>
+            <a:pPr algn="ctr"/>
+            <a:r>
+              <a:rPr sz="1400" b="1">
+                <a:solidFill>
+                  <a:srgbClr val="DEE2E6"/>
+                </a:solidFill>
+              </a:rPr>
+              <a:t>5</a:t>
+            </a:r>
+          </a:p>
+        </p:txBody>
+      </p:sp>
+      <p:sp>
+        <p:nvSpPr>
+          <p:cNvPr id="25" name="Rectangle 24"/>
+          <p:cNvSpPr/>
+          <p:nvPr/>
+        </p:nvSpPr>
+        <p:spPr>
+          <a:xfrm>
+            <a:off x="5175504" y="2002536"/>
+            <a:ext cx="374904" cy="374904"/>
+          </a:xfrm>
+          <a:prstGeom prst="rect">
+            <a:avLst/>
+          </a:prstGeom>
+          <a:solidFill>
+            <a:srgbClr val="17191C"/>
+          </a:solidFill>
+          <a:ln>
+            <a:noFill/>
+          </a:ln>
+          <a:effectLst/>
+        </p:spPr>
+        <p:style>
+          <a:lnRef idx="1">
+            <a:schemeClr val="accent1"/>
+          </a:lnRef>
+          <a:fillRef idx="3">
+            <a:schemeClr val="accent1"/>
+          </a:fillRef>
+          <a:effectRef idx="2">
+            <a:schemeClr val="accent1"/>
+          </a:effectRef>
+          <a:fontRef idx="minor">
+            <a:schemeClr val="lt1"/>
+          </a:fontRef>
+        </p:style>
+        <p:txBody>
+          <a:bodyPr rtlCol="0" anchor="ctr" wrap="square" lIns="73152" rIns="73152"/>
+          <a:lstStyle/>
+          <a:p>
+            <a:pPr algn="ctr"/>
+            <a:r>
+              <a:rPr sz="1400" b="1">
+                <a:solidFill>
+                  <a:srgbClr val="9AA3AB"/>
+                </a:solidFill>
+              </a:rPr>
+              <a:t/>
+            </a:r>
+          </a:p>
+        </p:txBody>
+      </p:sp>
+      <p:sp>
+        <p:nvSpPr>
+          <p:cNvPr id="26" name="Rectangle 25"/>
+          <p:cNvSpPr/>
+          <p:nvPr/>
+        </p:nvSpPr>
+        <p:spPr>
+          <a:xfrm>
+            <a:off x="5577840" y="2002536"/>
+            <a:ext cx="374904" cy="374904"/>
+          </a:xfrm>
+          <a:prstGeom prst="rect">
+            <a:avLst/>
+          </a:prstGeom>
+          <a:solidFill>
+            <a:srgbClr val="17191C"/>
+          </a:solidFill>
+          <a:ln>
+            <a:noFill/>
+          </a:ln>
+          <a:effectLst/>
+        </p:spPr>
+        <p:style>
+          <a:lnRef idx="1">
+            <a:schemeClr val="accent1"/>
+          </a:lnRef>
+          <a:fillRef idx="3">
+            <a:schemeClr val="accent1"/>
+          </a:fillRef>
+          <a:effectRef idx="2">
+            <a:schemeClr val="accent1"/>
+          </a:effectRef>
+          <a:fontRef idx="minor">
+            <a:schemeClr val="lt1"/>
+          </a:fontRef>
+        </p:style>
+        <p:txBody>
+          <a:bodyPr rtlCol="0" anchor="ctr" wrap="square" lIns="73152" rIns="73152"/>
+          <a:lstStyle/>
+          <a:p>
+            <a:pPr algn="ctr"/>
+            <a:r>
+              <a:rPr sz="1400" b="1">
+                <a:solidFill>
+                  <a:srgbClr val="9AA3AB"/>
+                </a:solidFill>
+              </a:rPr>
+              <a:t/>
+            </a:r>
+          </a:p>
+        </p:txBody>
+      </p:sp>
+      <p:sp>
+        <p:nvSpPr>
+          <p:cNvPr id="27" name="Rectangle 26"/>
+          <p:cNvSpPr/>
+          <p:nvPr/>
+        </p:nvSpPr>
+        <p:spPr>
+          <a:xfrm>
+            <a:off x="5980176" y="2002536"/>
+            <a:ext cx="374904" cy="374904"/>
+          </a:xfrm>
+          <a:prstGeom prst="rect">
+            <a:avLst/>
+          </a:prstGeom>
+          <a:solidFill>
+            <a:srgbClr val="17191C"/>
+          </a:solidFill>
+          <a:ln>
+            <a:noFill/>
+          </a:ln>
+          <a:effectLst/>
+        </p:spPr>
+        <p:style>
+          <a:lnRef idx="1">
+            <a:schemeClr val="accent1"/>
+          </a:lnRef>
+          <a:fillRef idx="3">
+            <a:schemeClr val="accent1"/>
+          </a:fillRef>
+          <a:effectRef idx="2">
+            <a:schemeClr val="accent1"/>
+          </a:effectRef>
+          <a:fontRef idx="minor">
+            <a:schemeClr val="lt1"/>
+          </a:fontRef>
+        </p:style>
+        <p:txBody>
+          <a:bodyPr rtlCol="0" anchor="ctr" wrap="square" lIns="73152" rIns="73152"/>
+          <a:lstStyle/>
+          <a:p>
+            <a:pPr algn="ctr"/>
+            <a:r>
+              <a:rPr sz="1400" b="1">
+                <a:solidFill>
+                  <a:srgbClr val="9AA3AB"/>
+                </a:solidFill>
+              </a:rPr>
+              <a:t/>
+            </a:r>
+          </a:p>
+        </p:txBody>
+      </p:sp>
+      <p:sp>
+        <p:nvSpPr>
+          <p:cNvPr id="28" name="Rectangle 27"/>
+          <p:cNvSpPr/>
+          <p:nvPr/>
+        </p:nvSpPr>
+        <p:spPr>
+          <a:xfrm>
+            <a:off x="6382512" y="2002536"/>
+            <a:ext cx="374904" cy="374904"/>
+          </a:xfrm>
+          <a:prstGeom prst="rect">
+            <a:avLst/>
+          </a:prstGeom>
+          <a:solidFill>
+            <a:srgbClr val="17191C"/>
+          </a:solidFill>
+          <a:ln>
+            <a:noFill/>
+          </a:ln>
+          <a:effectLst/>
+        </p:spPr>
+        <p:style>
+          <a:lnRef idx="1">
+            <a:schemeClr val="accent1"/>
+          </a:lnRef>
+          <a:fillRef idx="3">
+            <a:schemeClr val="accent1"/>
+          </a:fillRef>
+          <a:effectRef idx="2">
+            <a:schemeClr val="accent1"/>
+          </a:effectRef>
+          <a:fontRef idx="minor">
+            <a:schemeClr val="lt1"/>
+          </a:fontRef>
+        </p:style>
+        <p:txBody>
+          <a:bodyPr rtlCol="0" anchor="ctr" wrap="square" lIns="73152" rIns="73152"/>
+          <a:lstStyle/>
+          <a:p>
+            <a:pPr algn="ctr"/>
+            <a:r>
+              <a:rPr sz="1400" b="1">
+                <a:solidFill>
+                  <a:srgbClr val="9AA3AB"/>
+                </a:solidFill>
+              </a:rPr>
+              <a:t/>
+            </a:r>
+          </a:p>
+        </p:txBody>
+      </p:sp>
+      <p:sp>
+        <p:nvSpPr>
+          <p:cNvPr id="29" name="Rectangle 28"/>
+          <p:cNvSpPr/>
+          <p:nvPr/>
+        </p:nvSpPr>
+        <p:spPr>
+          <a:xfrm>
+            <a:off x="6784848" y="2002536"/>
+            <a:ext cx="374904" cy="374904"/>
+          </a:xfrm>
+          <a:prstGeom prst="rect">
+            <a:avLst/>
+          </a:prstGeom>
+          <a:solidFill>
+            <a:srgbClr val="4A525A"/>
+          </a:solidFill>
+          <a:ln>
+            <a:noFill/>
+          </a:ln>
+          <a:effectLst/>
+        </p:spPr>
+        <p:style>
+          <a:lnRef idx="1">
+            <a:schemeClr val="accent1"/>
+          </a:lnRef>
+          <a:fillRef idx="3">
+            <a:schemeClr val="accent1"/>
+          </a:fillRef>
+          <a:effectRef idx="2">
+            <a:schemeClr val="accent1"/>
+          </a:effectRef>
+          <a:fontRef idx="minor">
+            <a:schemeClr val="lt1"/>
+          </a:fontRef>
+        </p:style>
+        <p:txBody>
+          <a:bodyPr rtlCol="0" anchor="ctr" wrap="square" lIns="73152" rIns="73152"/>
+          <a:lstStyle/>
+          <a:p>
+            <a:pPr algn="ctr"/>
+            <a:r>
+              <a:rPr sz="1400" b="1">
+                <a:solidFill>
+                  <a:srgbClr val="9AA3AB"/>
+                </a:solidFill>
+              </a:rPr>
+              <a:t/>
+            </a:r>
+          </a:p>
+        </p:txBody>
+      </p:sp>
+      <p:sp>
+        <p:nvSpPr>
+          <p:cNvPr id="30" name="Rectangle 29"/>
+          <p:cNvSpPr/>
+          <p:nvPr/>
+        </p:nvSpPr>
+        <p:spPr>
+          <a:xfrm>
+            <a:off x="1956816" y="2404872"/>
+            <a:ext cx="374904" cy="374904"/>
+          </a:xfrm>
+          <a:prstGeom prst="rect">
+            <a:avLst/>
+          </a:prstGeom>
+          <a:solidFill>
+            <a:srgbClr val="4A525A"/>
+          </a:solidFill>
+          <a:ln>
+            <a:noFill/>
+          </a:ln>
+          <a:effectLst/>
+        </p:spPr>
+        <p:style>
+          <a:lnRef idx="1">
+            <a:schemeClr val="accent1"/>
+          </a:lnRef>
+          <a:fillRef idx="3">
+            <a:schemeClr val="accent1"/>
+          </a:fillRef>
+          <a:effectRef idx="2">
+            <a:schemeClr val="accent1"/>
+          </a:effectRef>
+          <a:fontRef idx="minor">
+            <a:schemeClr val="lt1"/>
+          </a:fontRef>
+        </p:style>
+        <p:txBody>
+          <a:bodyPr rtlCol="0" anchor="ctr" wrap="square" lIns="73152" rIns="73152"/>
+          <a:lstStyle/>
+          <a:p>
+            <a:pPr algn="ctr"/>
+            <a:r>
+              <a:rPr sz="1400" b="1">
+                <a:solidFill>
+                  <a:srgbClr val="9AA3AB"/>
+                </a:solidFill>
+              </a:rPr>
+              <a:t/>
+            </a:r>
+          </a:p>
+        </p:txBody>
+      </p:sp>
+      <p:sp>
+        <p:nvSpPr>
+          <p:cNvPr id="31" name="Rectangle 30"/>
+          <p:cNvSpPr/>
+          <p:nvPr/>
+        </p:nvSpPr>
+        <p:spPr>
+          <a:xfrm>
+            <a:off x="2359152" y="2404872"/>
+            <a:ext cx="374904" cy="374904"/>
+          </a:xfrm>
+          <a:prstGeom prst="rect">
+            <a:avLst/>
+          </a:prstGeom>
+          <a:solidFill>
+            <a:srgbClr val="17191C"/>
+          </a:solidFill>
+          <a:ln>
+            <a:noFill/>
+          </a:ln>
+          <a:effectLst/>
+        </p:spPr>
+        <p:style>
+          <a:lnRef idx="1">
+            <a:schemeClr val="accent1"/>
+          </a:lnRef>
+          <a:fillRef idx="3">
+            <a:schemeClr val="accent1"/>
+          </a:fillRef>
+          <a:effectRef idx="2">
+            <a:schemeClr val="accent1"/>
+          </a:effectRef>
+          <a:fontRef idx="minor">
+            <a:schemeClr val="lt1"/>
+          </a:fontRef>
+        </p:style>
+        <p:txBody>
+          <a:bodyPr rtlCol="0" anchor="ctr" wrap="square" lIns="73152" rIns="73152"/>
+          <a:lstStyle/>
+          <a:p>
+            <a:pPr algn="ctr"/>
+            <a:r>
+              <a:rPr sz="1400" b="1">
+                <a:solidFill>
+                  <a:srgbClr val="DEE2E6"/>
+                </a:solidFill>
+              </a:rPr>
+              <a:t>4</a:t>
+            </a:r>
+          </a:p>
+        </p:txBody>
+      </p:sp>
+      <p:sp>
+        <p:nvSpPr>
+          <p:cNvPr id="32" name="Rectangle 31"/>
+          <p:cNvSpPr/>
+          <p:nvPr/>
+        </p:nvSpPr>
+        <p:spPr>
+          <a:xfrm>
+            <a:off x="2761488" y="2404872"/>
+            <a:ext cx="374904" cy="374904"/>
+          </a:xfrm>
+          <a:prstGeom prst="rect">
+            <a:avLst/>
+          </a:prstGeom>
+          <a:solidFill>
+            <a:srgbClr val="4A525A"/>
+          </a:solidFill>
+          <a:ln>
+            <a:noFill/>
+          </a:ln>
+          <a:effectLst/>
+        </p:spPr>
+        <p:style>
+          <a:lnRef idx="1">
+            <a:schemeClr val="accent1"/>
+          </a:lnRef>
+          <a:fillRef idx="3">
+            <a:schemeClr val="accent1"/>
+          </a:fillRef>
+          <a:effectRef idx="2">
+            <a:schemeClr val="accent1"/>
+          </a:effectRef>
+          <a:fontRef idx="minor">
+            <a:schemeClr val="lt1"/>
+          </a:fontRef>
+        </p:style>
+        <p:txBody>
+          <a:bodyPr rtlCol="0" anchor="ctr" wrap="square" lIns="73152" rIns="73152"/>
+          <a:lstStyle/>
+          <a:p>
+            <a:pPr algn="ctr"/>
+            <a:r>
+              <a:rPr sz="1400" b="1">
+                <a:solidFill>
+                  <a:srgbClr val="9AA3AB"/>
+                </a:solidFill>
+              </a:rPr>
+              <a:t/>
+            </a:r>
+          </a:p>
+        </p:txBody>
+      </p:sp>
+      <p:sp>
+        <p:nvSpPr>
+          <p:cNvPr id="33" name="Rectangle 32"/>
+          <p:cNvSpPr/>
+          <p:nvPr/>
+        </p:nvSpPr>
+        <p:spPr>
+          <a:xfrm>
+            <a:off x="3163824" y="2404872"/>
+            <a:ext cx="374904" cy="374904"/>
+          </a:xfrm>
+          <a:prstGeom prst="rect">
+            <a:avLst/>
+          </a:prstGeom>
+          <a:solidFill>
+            <a:srgbClr val="4A525A"/>
+          </a:solidFill>
+          <a:ln>
+            <a:noFill/>
+          </a:ln>
+          <a:effectLst/>
+        </p:spPr>
+        <p:style>
+          <a:lnRef idx="1">
+            <a:schemeClr val="accent1"/>
+          </a:lnRef>
+          <a:fillRef idx="3">
+            <a:schemeClr val="accent1"/>
+          </a:fillRef>
+          <a:effectRef idx="2">
+            <a:schemeClr val="accent1"/>
+          </a:effectRef>
+          <a:fontRef idx="minor">
+            <a:schemeClr val="lt1"/>
+          </a:fontRef>
+        </p:style>
+        <p:txBody>
+          <a:bodyPr rtlCol="0" anchor="ctr" wrap="square" lIns="73152" rIns="73152"/>
+          <a:lstStyle/>
+          <a:p>
+            <a:pPr algn="ctr"/>
+            <a:r>
+              <a:rPr sz="1400" b="1">
+                <a:solidFill>
+                  <a:srgbClr val="9AA3AB"/>
+                </a:solidFill>
+              </a:rPr>
+              <a:t/>
+            </a:r>
+          </a:p>
+        </p:txBody>
+      </p:sp>
+      <p:sp>
+        <p:nvSpPr>
+          <p:cNvPr id="34" name="Rectangle 33"/>
+          <p:cNvSpPr/>
+          <p:nvPr/>
+        </p:nvSpPr>
+        <p:spPr>
+          <a:xfrm>
+            <a:off x="3566160" y="2404872"/>
+            <a:ext cx="374904" cy="374904"/>
+          </a:xfrm>
+          <a:prstGeom prst="rect">
+            <a:avLst/>
+          </a:prstGeom>
+          <a:solidFill>
+            <a:srgbClr val="4A525A"/>
+          </a:solidFill>
+          <a:ln>
+            <a:noFill/>
+          </a:ln>
+          <a:effectLst/>
+        </p:spPr>
+        <p:style>
+          <a:lnRef idx="1">
+            <a:schemeClr val="accent1"/>
+          </a:lnRef>
+          <a:fillRef idx="3">
+            <a:schemeClr val="accent1"/>
+          </a:fillRef>
+          <a:effectRef idx="2">
+            <a:schemeClr val="accent1"/>
+          </a:effectRef>
+          <a:fontRef idx="minor">
+            <a:schemeClr val="lt1"/>
+          </a:fontRef>
+        </p:style>
+        <p:txBody>
+          <a:bodyPr rtlCol="0" anchor="ctr" wrap="square" lIns="73152" rIns="73152"/>
+          <a:lstStyle/>
+          <a:p>
+            <a:pPr algn="ctr"/>
+            <a:r>
+              <a:rPr sz="1400" b="1">
+                <a:solidFill>
+                  <a:srgbClr val="9AA3AB"/>
+                </a:solidFill>
+              </a:rPr>
+              <a:t/>
+            </a:r>
+          </a:p>
+        </p:txBody>
+      </p:sp>
+      <p:sp>
+        <p:nvSpPr>
+          <p:cNvPr id="35" name="Rectangle 34"/>
+          <p:cNvSpPr/>
+          <p:nvPr/>
+        </p:nvSpPr>
+        <p:spPr>
+          <a:xfrm>
+            <a:off x="3968496" y="2404872"/>
+            <a:ext cx="374904" cy="374904"/>
+          </a:xfrm>
+          <a:prstGeom prst="rect">
+            <a:avLst/>
+          </a:prstGeom>
+          <a:solidFill>
+            <a:srgbClr val="17191C"/>
+          </a:solidFill>
+          <a:ln w="25400">
+            <a:solidFill>
+              <a:srgbClr val="D45D35"/>
+            </a:solidFill>
+          </a:ln>
+          <a:effectLst/>
+        </p:spPr>
+        <p:style>
+          <a:lnRef idx="1">
+            <a:schemeClr val="accent1"/>
+          </a:lnRef>
+          <a:fillRef idx="3">
+            <a:schemeClr val="accent1"/>
+          </a:fillRef>
+          <a:effectRef idx="2">
+            <a:schemeClr val="accent1"/>
+          </a:effectRef>
+          <a:fontRef idx="minor">
+            <a:schemeClr val="lt1"/>
+          </a:fontRef>
+        </p:style>
+        <p:txBody>
+          <a:bodyPr rtlCol="0" anchor="ctr" wrap="square" lIns="73152" rIns="73152"/>
+          <a:lstStyle/>
+          <a:p>
+            <a:pPr algn="ctr"/>
+            <a:r>
+              <a:rPr sz="1400" b="1">
+                <a:solidFill>
+                  <a:srgbClr val="DEE2E6"/>
+                </a:solidFill>
+              </a:rPr>
+              <a:t>2</a:t>
+            </a:r>
+          </a:p>
+        </p:txBody>
+      </p:sp>
+      <p:sp>
+        <p:nvSpPr>
+          <p:cNvPr id="36" name="Rectangle 35"/>
+          <p:cNvSpPr/>
+          <p:nvPr/>
+        </p:nvSpPr>
+        <p:spPr>
+          <a:xfrm>
+            <a:off x="4370832" y="2404872"/>
+            <a:ext cx="374904" cy="374904"/>
+          </a:xfrm>
+          <a:prstGeom prst="rect">
+            <a:avLst/>
+          </a:prstGeom>
+          <a:solidFill>
+            <a:srgbClr val="4A525A"/>
+          </a:solidFill>
+          <a:ln>
+            <a:noFill/>
+          </a:ln>
+          <a:effectLst/>
+        </p:spPr>
+        <p:style>
+          <a:lnRef idx="1">
+            <a:schemeClr val="accent1"/>
+          </a:lnRef>
+          <a:fillRef idx="3">
+            <a:schemeClr val="accent1"/>
+          </a:fillRef>
+          <a:effectRef idx="2">
+            <a:schemeClr val="accent1"/>
+          </a:effectRef>
+          <a:fontRef idx="minor">
+            <a:schemeClr val="lt1"/>
+          </a:fontRef>
+        </p:style>
+        <p:txBody>
+          <a:bodyPr rtlCol="0" anchor="ctr" wrap="square" lIns="73152" rIns="73152"/>
+          <a:lstStyle/>
+          <a:p>
+            <a:pPr algn="ctr"/>
+            <a:r>
+              <a:rPr sz="1400" b="1">
+                <a:solidFill>
+                  <a:srgbClr val="9AA3AB"/>
+                </a:solidFill>
+              </a:rPr>
+              <a:t/>
+            </a:r>
+          </a:p>
+        </p:txBody>
+      </p:sp>
+      <p:sp>
+        <p:nvSpPr>
+          <p:cNvPr id="37" name="Rectangle 36"/>
+          <p:cNvSpPr/>
+          <p:nvPr/>
+        </p:nvSpPr>
+        <p:spPr>
+          <a:xfrm>
+            <a:off x="4773168" y="2404872"/>
+            <a:ext cx="374904" cy="374904"/>
+          </a:xfrm>
+          <a:prstGeom prst="rect">
+            <a:avLst/>
+          </a:prstGeom>
+          <a:solidFill>
+            <a:srgbClr val="17191C"/>
+          </a:solidFill>
+          <a:ln>
+            <a:noFill/>
+          </a:ln>
+          <a:effectLst/>
+        </p:spPr>
+        <p:style>
+          <a:lnRef idx="1">
+            <a:schemeClr val="accent1"/>
+          </a:lnRef>
+          <a:fillRef idx="3">
+            <a:schemeClr val="accent1"/>
+          </a:fillRef>
+          <a:effectRef idx="2">
+            <a:schemeClr val="accent1"/>
+          </a:effectRef>
+          <a:fontRef idx="minor">
+            <a:schemeClr val="lt1"/>
+          </a:fontRef>
+        </p:style>
+        <p:txBody>
+          <a:bodyPr rtlCol="0" anchor="ctr" wrap="square" lIns="73152" rIns="73152"/>
+          <a:lstStyle/>
+          <a:p>
+            <a:pPr algn="ctr"/>
+            <a:r>
+              <a:rPr sz="1400" b="1">
+                <a:solidFill>
+                  <a:srgbClr val="DEE2E6"/>
+                </a:solidFill>
+              </a:rPr>
+              <a:t>4</a:t>
+            </a:r>
+          </a:p>
+        </p:txBody>
+      </p:sp>
+      <p:sp>
+        <p:nvSpPr>
+          <p:cNvPr id="38" name="Rectangle 37"/>
+          <p:cNvSpPr/>
+          <p:nvPr/>
+        </p:nvSpPr>
+        <p:spPr>
+          <a:xfrm>
+            <a:off x="5175504" y="2404872"/>
+            <a:ext cx="374904" cy="374904"/>
+          </a:xfrm>
+          <a:prstGeom prst="rect">
+            <a:avLst/>
+          </a:prstGeom>
+          <a:solidFill>
+            <a:srgbClr val="4A525A"/>
+          </a:solidFill>
+          <a:ln>
+            <a:noFill/>
+          </a:ln>
+          <a:effectLst/>
+        </p:spPr>
+        <p:style>
+          <a:lnRef idx="1">
+            <a:schemeClr val="accent1"/>
+          </a:lnRef>
+          <a:fillRef idx="3">
+            <a:schemeClr val="accent1"/>
+          </a:fillRef>
+          <a:effectRef idx="2">
+            <a:schemeClr val="accent1"/>
+          </a:effectRef>
+          <a:fontRef idx="minor">
+            <a:schemeClr val="lt1"/>
+          </a:fontRef>
+        </p:style>
+        <p:txBody>
+          <a:bodyPr rtlCol="0" anchor="ctr" wrap="square" lIns="73152" rIns="73152"/>
+          <a:lstStyle/>
+          <a:p>
+            <a:pPr algn="ctr"/>
+            <a:r>
+              <a:rPr sz="1400" b="1">
+                <a:solidFill>
+                  <a:srgbClr val="9AA3AB"/>
+                </a:solidFill>
+              </a:rPr>
+              <a:t/>
+            </a:r>
+          </a:p>
+        </p:txBody>
+      </p:sp>
+      <p:sp>
+        <p:nvSpPr>
+          <p:cNvPr id="39" name="Rectangle 38"/>
+          <p:cNvSpPr/>
+          <p:nvPr/>
+        </p:nvSpPr>
+        <p:spPr>
+          <a:xfrm>
+            <a:off x="5577840" y="2404872"/>
+            <a:ext cx="374904" cy="374904"/>
+          </a:xfrm>
+          <a:prstGeom prst="rect">
+            <a:avLst/>
+          </a:prstGeom>
+          <a:solidFill>
+            <a:srgbClr val="4A525A"/>
+          </a:solidFill>
+          <a:ln>
+            <a:noFill/>
+          </a:ln>
+          <a:effectLst/>
+        </p:spPr>
+        <p:style>
+          <a:lnRef idx="1">
+            <a:schemeClr val="accent1"/>
+          </a:lnRef>
+          <a:fillRef idx="3">
+            <a:schemeClr val="accent1"/>
+          </a:fillRef>
+          <a:effectRef idx="2">
+            <a:schemeClr val="accent1"/>
+          </a:effectRef>
+          <a:fontRef idx="minor">
+            <a:schemeClr val="lt1"/>
+          </a:fontRef>
+        </p:style>
+        <p:txBody>
+          <a:bodyPr rtlCol="0" anchor="ctr" wrap="square" lIns="73152" rIns="73152"/>
+          <a:lstStyle/>
+          <a:p>
+            <a:pPr algn="ctr"/>
+            <a:r>
+              <a:rPr sz="1400" b="1">
+                <a:solidFill>
+                  <a:srgbClr val="9AA3AB"/>
+                </a:solidFill>
+              </a:rPr>
+              <a:t/>
+            </a:r>
+          </a:p>
+        </p:txBody>
+      </p:sp>
+      <p:sp>
+        <p:nvSpPr>
+          <p:cNvPr id="40" name="Rectangle 39"/>
+          <p:cNvSpPr/>
+          <p:nvPr/>
+        </p:nvSpPr>
+        <p:spPr>
+          <a:xfrm>
+            <a:off x="5980176" y="2404872"/>
+            <a:ext cx="374904" cy="374904"/>
+          </a:xfrm>
+          <a:prstGeom prst="rect">
+            <a:avLst/>
+          </a:prstGeom>
+          <a:solidFill>
+            <a:srgbClr val="4A525A"/>
+          </a:solidFill>
+          <a:ln>
+            <a:noFill/>
+          </a:ln>
+          <a:effectLst/>
+        </p:spPr>
+        <p:style>
+          <a:lnRef idx="1">
+            <a:schemeClr val="accent1"/>
+          </a:lnRef>
+          <a:fillRef idx="3">
+            <a:schemeClr val="accent1"/>
+          </a:fillRef>
+          <a:effectRef idx="2">
+            <a:schemeClr val="accent1"/>
+          </a:effectRef>
+          <a:fontRef idx="minor">
+            <a:schemeClr val="lt1"/>
+          </a:fontRef>
+        </p:style>
+        <p:txBody>
+          <a:bodyPr rtlCol="0" anchor="ctr" wrap="square" lIns="73152" rIns="73152"/>
+          <a:lstStyle/>
+          <a:p>
+            <a:pPr algn="ctr"/>
+            <a:r>
+              <a:rPr sz="1400" b="1">
+                <a:solidFill>
+                  <a:srgbClr val="9AA3AB"/>
+                </a:solidFill>
+              </a:rPr>
+              <a:t/>
+            </a:r>
+          </a:p>
+        </p:txBody>
+      </p:sp>
+      <p:sp>
+        <p:nvSpPr>
+          <p:cNvPr id="41" name="Rectangle 40"/>
+          <p:cNvSpPr/>
+          <p:nvPr/>
+        </p:nvSpPr>
+        <p:spPr>
+          <a:xfrm>
+            <a:off x="6382512" y="2404872"/>
+            <a:ext cx="374904" cy="374904"/>
+          </a:xfrm>
+          <a:prstGeom prst="rect">
+            <a:avLst/>
+          </a:prstGeom>
+          <a:solidFill>
+            <a:srgbClr val="17191C"/>
+          </a:solidFill>
+          <a:ln>
+            <a:noFill/>
+          </a:ln>
+          <a:effectLst/>
+        </p:spPr>
+        <p:style>
+          <a:lnRef idx="1">
+            <a:schemeClr val="accent1"/>
+          </a:lnRef>
+          <a:fillRef idx="3">
+            <a:schemeClr val="accent1"/>
+          </a:fillRef>
+          <a:effectRef idx="2">
+            <a:schemeClr val="accent1"/>
+          </a:effectRef>
+          <a:fontRef idx="minor">
+            <a:schemeClr val="lt1"/>
+          </a:fontRef>
+        </p:style>
+        <p:txBody>
+          <a:bodyPr rtlCol="0" anchor="ctr" wrap="square" lIns="73152" rIns="73152"/>
+          <a:lstStyle/>
+          <a:p>
+            <a:pPr algn="ctr"/>
+            <a:r>
+              <a:rPr sz="1400" b="1">
+                <a:solidFill>
+                  <a:srgbClr val="9AA3AB"/>
+                </a:solidFill>
+              </a:rPr>
+              <a:t/>
+            </a:r>
+          </a:p>
+        </p:txBody>
+      </p:sp>
+      <p:sp>
+        <p:nvSpPr>
+          <p:cNvPr id="42" name="Rectangle 41"/>
+          <p:cNvSpPr/>
+          <p:nvPr/>
+        </p:nvSpPr>
+        <p:spPr>
+          <a:xfrm>
+            <a:off x="6784848" y="2404872"/>
+            <a:ext cx="374904" cy="374904"/>
+          </a:xfrm>
+          <a:prstGeom prst="rect">
+            <a:avLst/>
+          </a:prstGeom>
+          <a:solidFill>
+            <a:srgbClr val="4A525A"/>
+          </a:solidFill>
+          <a:ln>
+            <a:noFill/>
+          </a:ln>
+          <a:effectLst/>
+        </p:spPr>
+        <p:style>
+          <a:lnRef idx="1">
+            <a:schemeClr val="accent1"/>
+          </a:lnRef>
+          <a:fillRef idx="3">
+            <a:schemeClr val="accent1"/>
+          </a:fillRef>
+          <a:effectRef idx="2">
+            <a:schemeClr val="accent1"/>
+          </a:effectRef>
+          <a:fontRef idx="minor">
+            <a:schemeClr val="lt1"/>
+          </a:fontRef>
+        </p:style>
+        <p:txBody>
+          <a:bodyPr rtlCol="0" anchor="ctr" wrap="square" lIns="73152" rIns="73152"/>
+          <a:lstStyle/>
+          <a:p>
+            <a:pPr algn="ctr"/>
+            <a:r>
+              <a:rPr sz="1400" b="1">
+                <a:solidFill>
+                  <a:srgbClr val="9AA3AB"/>
+                </a:solidFill>
+              </a:rPr>
+              <a:t/>
+            </a:r>
+          </a:p>
+        </p:txBody>
+      </p:sp>
+      <p:sp>
+        <p:nvSpPr>
+          <p:cNvPr id="43" name="Rectangle 42"/>
+          <p:cNvSpPr/>
+          <p:nvPr/>
+        </p:nvSpPr>
+        <p:spPr>
+          <a:xfrm>
+            <a:off x="1956816" y="2807208"/>
+            <a:ext cx="374904" cy="374904"/>
+          </a:xfrm>
+          <a:prstGeom prst="rect">
+            <a:avLst/>
+          </a:prstGeom>
+          <a:solidFill>
+            <a:srgbClr val="4A525A"/>
+          </a:solidFill>
+          <a:ln>
+            <a:noFill/>
+          </a:ln>
+          <a:effectLst/>
+        </p:spPr>
+        <p:style>
+          <a:lnRef idx="1">
+            <a:schemeClr val="accent1"/>
+          </a:lnRef>
+          <a:fillRef idx="3">
+            <a:schemeClr val="accent1"/>
+          </a:fillRef>
+          <a:effectRef idx="2">
+            <a:schemeClr val="accent1"/>
+          </a:effectRef>
+          <a:fontRef idx="minor">
+            <a:schemeClr val="lt1"/>
+          </a:fontRef>
+        </p:style>
+        <p:txBody>
+          <a:bodyPr rtlCol="0" anchor="ctr" wrap="square" lIns="73152" rIns="73152"/>
+          <a:lstStyle/>
+          <a:p>
+            <a:pPr algn="ctr"/>
+            <a:r>
+              <a:rPr sz="1400" b="1">
+                <a:solidFill>
+                  <a:srgbClr val="9AA3AB"/>
+                </a:solidFill>
+              </a:rPr>
+              <a:t/>
+            </a:r>
+          </a:p>
+        </p:txBody>
+      </p:sp>
+      <p:sp>
+        <p:nvSpPr>
+          <p:cNvPr id="44" name="Rectangle 43"/>
+          <p:cNvSpPr/>
+          <p:nvPr/>
+        </p:nvSpPr>
+        <p:spPr>
+          <a:xfrm>
+            <a:off x="2359152" y="2807208"/>
+            <a:ext cx="374904" cy="374904"/>
+          </a:xfrm>
+          <a:prstGeom prst="rect">
+            <a:avLst/>
+          </a:prstGeom>
+          <a:solidFill>
+            <a:srgbClr val="17191C"/>
+          </a:solidFill>
+          <a:ln>
+            <a:noFill/>
+          </a:ln>
+          <a:effectLst/>
+        </p:spPr>
+        <p:style>
+          <a:lnRef idx="1">
+            <a:schemeClr val="accent1"/>
+          </a:lnRef>
+          <a:fillRef idx="3">
+            <a:schemeClr val="accent1"/>
+          </a:fillRef>
+          <a:effectRef idx="2">
+            <a:schemeClr val="accent1"/>
+          </a:effectRef>
+          <a:fontRef idx="minor">
+            <a:schemeClr val="lt1"/>
+          </a:fontRef>
+        </p:style>
+        <p:txBody>
+          <a:bodyPr rtlCol="0" anchor="ctr" wrap="square" lIns="73152" rIns="73152"/>
+          <a:lstStyle/>
+          <a:p>
+            <a:pPr algn="ctr"/>
+            <a:r>
+              <a:rPr sz="1400" b="1">
+                <a:solidFill>
+                  <a:srgbClr val="DEE2E6"/>
+                </a:solidFill>
+              </a:rPr>
+              <a:t>3</a:t>
+            </a:r>
+          </a:p>
+        </p:txBody>
+      </p:sp>
+      <p:sp>
+        <p:nvSpPr>
+          <p:cNvPr id="45" name="Rectangle 44"/>
+          <p:cNvSpPr/>
+          <p:nvPr/>
+        </p:nvSpPr>
+        <p:spPr>
+          <a:xfrm>
+            <a:off x="2761488" y="2807208"/>
+            <a:ext cx="374904" cy="374904"/>
+          </a:xfrm>
+          <a:prstGeom prst="rect">
+            <a:avLst/>
+          </a:prstGeom>
+          <a:solidFill>
+            <a:srgbClr val="17191C"/>
+          </a:solidFill>
+          <a:ln>
+            <a:noFill/>
+          </a:ln>
+          <a:effectLst/>
+        </p:spPr>
+        <p:style>
+          <a:lnRef idx="1">
+            <a:schemeClr val="accent1"/>
+          </a:lnRef>
+          <a:fillRef idx="3">
+            <a:schemeClr val="accent1"/>
+          </a:fillRef>
+          <a:effectRef idx="2">
+            <a:schemeClr val="accent1"/>
+          </a:effectRef>
+          <a:fontRef idx="minor">
+            <a:schemeClr val="lt1"/>
+          </a:fontRef>
+        </p:style>
+        <p:txBody>
+          <a:bodyPr rtlCol="0" anchor="ctr" wrap="square" lIns="73152" rIns="73152"/>
+          <a:lstStyle/>
+          <a:p>
+            <a:pPr algn="ctr"/>
+            <a:r>
+              <a:rPr sz="1400" b="1">
+                <a:solidFill>
+                  <a:srgbClr val="DEE2E6"/>
+                </a:solidFill>
+              </a:rPr>
+              <a:t>2</a:t>
+            </a:r>
+          </a:p>
+        </p:txBody>
+      </p:sp>
+      <p:sp>
+        <p:nvSpPr>
+          <p:cNvPr id="46" name="Rectangle 45"/>
+          <p:cNvSpPr/>
+          <p:nvPr/>
+        </p:nvSpPr>
+        <p:spPr>
+          <a:xfrm>
+            <a:off x="3163824" y="2807208"/>
+            <a:ext cx="374904" cy="374904"/>
+          </a:xfrm>
+          <a:prstGeom prst="rect">
+            <a:avLst/>
+          </a:prstGeom>
+          <a:solidFill>
+            <a:srgbClr val="17191C"/>
+          </a:solidFill>
+          <a:ln>
+            <a:noFill/>
+          </a:ln>
+          <a:effectLst/>
+        </p:spPr>
+        <p:style>
+          <a:lnRef idx="1">
+            <a:schemeClr val="accent1"/>
+          </a:lnRef>
+          <a:fillRef idx="3">
+            <a:schemeClr val="accent1"/>
+          </a:fillRef>
+          <a:effectRef idx="2">
+            <a:schemeClr val="accent1"/>
+          </a:effectRef>
+          <a:fontRef idx="minor">
+            <a:schemeClr val="lt1"/>
+          </a:fontRef>
+        </p:style>
+        <p:txBody>
+          <a:bodyPr rtlCol="0" anchor="ctr" wrap="square" lIns="73152" rIns="73152"/>
+          <a:lstStyle/>
+          <a:p>
+            <a:pPr algn="ctr"/>
+            <a:r>
+              <a:rPr sz="1400" b="1">
+                <a:solidFill>
+                  <a:srgbClr val="DEE2E6"/>
+                </a:solidFill>
+              </a:rPr>
+              <a:t>1</a:t>
+            </a:r>
+          </a:p>
+        </p:txBody>
+      </p:sp>
+      <p:sp>
+        <p:nvSpPr>
+          <p:cNvPr id="47" name="Rectangle 46"/>
+          <p:cNvSpPr/>
+          <p:nvPr/>
+        </p:nvSpPr>
+        <p:spPr>
+          <a:xfrm>
+            <a:off x="3566160" y="2807208"/>
+            <a:ext cx="374904" cy="374904"/>
+          </a:xfrm>
+          <a:prstGeom prst="rect">
+            <a:avLst/>
+          </a:prstGeom>
+          <a:solidFill>
+            <a:srgbClr val="D45D35"/>
+          </a:solidFill>
+          <a:ln>
+            <a:noFill/>
+          </a:ln>
+          <a:effectLst/>
+        </p:spPr>
+        <p:style>
+          <a:lnRef idx="1">
+            <a:schemeClr val="accent1"/>
+          </a:lnRef>
+          <a:fillRef idx="3">
+            <a:schemeClr val="accent1"/>
+          </a:fillRef>
+          <a:effectRef idx="2">
+            <a:schemeClr val="accent1"/>
+          </a:effectRef>
+          <a:fontRef idx="minor">
+            <a:schemeClr val="lt1"/>
+          </a:fontRef>
+        </p:style>
+        <p:txBody>
+          <a:bodyPr rtlCol="0" anchor="ctr" wrap="square" lIns="73152" rIns="73152"/>
+          <a:lstStyle/>
+          <a:p>
+            <a:pPr algn="ctr"/>
+            <a:r>
+              <a:rPr sz="1400" b="1">
+                <a:solidFill>
+                  <a:srgbClr val="DEE2E6"/>
+                </a:solidFill>
+              </a:rPr>
+              <a:t>G</a:t>
+            </a:r>
+          </a:p>
+        </p:txBody>
+      </p:sp>
+      <p:sp>
+        <p:nvSpPr>
+          <p:cNvPr id="48" name="Rectangle 47"/>
+          <p:cNvSpPr/>
+          <p:nvPr/>
+        </p:nvSpPr>
+        <p:spPr>
+          <a:xfrm>
+            <a:off x="3968496" y="2807208"/>
+            <a:ext cx="374904" cy="374904"/>
+          </a:xfrm>
+          <a:prstGeom prst="rect">
+            <a:avLst/>
+          </a:prstGeom>
+          <a:solidFill>
+            <a:srgbClr val="17191C"/>
+          </a:solidFill>
+          <a:ln w="25400">
+            <a:solidFill>
+              <a:srgbClr val="D45D35"/>
+            </a:solidFill>
+          </a:ln>
+          <a:effectLst/>
+        </p:spPr>
+        <p:style>
+          <a:lnRef idx="1">
+            <a:schemeClr val="accent1"/>
+          </a:lnRef>
+          <a:fillRef idx="3">
+            <a:schemeClr val="accent1"/>
+          </a:fillRef>
+          <a:effectRef idx="2">
+            <a:schemeClr val="accent1"/>
+          </a:effectRef>
+          <a:fontRef idx="minor">
+            <a:schemeClr val="lt1"/>
+          </a:fontRef>
+        </p:style>
+        <p:txBody>
+          <a:bodyPr rtlCol="0" anchor="ctr" wrap="square" lIns="73152" rIns="73152"/>
+          <a:lstStyle/>
+          <a:p>
+            <a:pPr algn="ctr"/>
+            <a:r>
+              <a:rPr sz="1400" b="1">
+                <a:solidFill>
+                  <a:srgbClr val="DEE2E6"/>
+                </a:solidFill>
+              </a:rPr>
+              <a:t>1</a:t>
+            </a:r>
+          </a:p>
+        </p:txBody>
+      </p:sp>
+      <p:sp>
+        <p:nvSpPr>
+          <p:cNvPr id="49" name="Rectangle 48"/>
+          <p:cNvSpPr/>
+          <p:nvPr/>
+        </p:nvSpPr>
+        <p:spPr>
+          <a:xfrm>
+            <a:off x="4370832" y="2807208"/>
+            <a:ext cx="374904" cy="374904"/>
+          </a:xfrm>
+          <a:prstGeom prst="rect">
+            <a:avLst/>
+          </a:prstGeom>
+          <a:solidFill>
+            <a:srgbClr val="17191C"/>
+          </a:solidFill>
+          <a:ln>
+            <a:noFill/>
+          </a:ln>
+          <a:effectLst/>
+        </p:spPr>
+        <p:style>
+          <a:lnRef idx="1">
+            <a:schemeClr val="accent1"/>
+          </a:lnRef>
+          <a:fillRef idx="3">
+            <a:schemeClr val="accent1"/>
+          </a:fillRef>
+          <a:effectRef idx="2">
+            <a:schemeClr val="accent1"/>
+          </a:effectRef>
+          <a:fontRef idx="minor">
+            <a:schemeClr val="lt1"/>
+          </a:fontRef>
+        </p:style>
+        <p:txBody>
+          <a:bodyPr rtlCol="0" anchor="ctr" wrap="square" lIns="73152" rIns="73152"/>
+          <a:lstStyle/>
+          <a:p>
+            <a:pPr algn="ctr"/>
+            <a:r>
+              <a:rPr sz="1400" b="1">
+                <a:solidFill>
+                  <a:srgbClr val="DEE2E6"/>
+                </a:solidFill>
+              </a:rPr>
+              <a:t>2</a:t>
+            </a:r>
+          </a:p>
+        </p:txBody>
+      </p:sp>
+      <p:sp>
+        <p:nvSpPr>
+          <p:cNvPr id="50" name="Rectangle 49"/>
+          <p:cNvSpPr/>
+          <p:nvPr/>
+        </p:nvSpPr>
+        <p:spPr>
+          <a:xfrm>
+            <a:off x="4773168" y="2807208"/>
+            <a:ext cx="374904" cy="374904"/>
+          </a:xfrm>
+          <a:prstGeom prst="rect">
+            <a:avLst/>
+          </a:prstGeom>
+          <a:solidFill>
+            <a:srgbClr val="17191C"/>
+          </a:solidFill>
+          <a:ln>
+            <a:noFill/>
+          </a:ln>
+          <a:effectLst/>
+        </p:spPr>
+        <p:style>
+          <a:lnRef idx="1">
+            <a:schemeClr val="accent1"/>
+          </a:lnRef>
+          <a:fillRef idx="3">
+            <a:schemeClr val="accent1"/>
+          </a:fillRef>
+          <a:effectRef idx="2">
+            <a:schemeClr val="accent1"/>
+          </a:effectRef>
+          <a:fontRef idx="minor">
+            <a:schemeClr val="lt1"/>
+          </a:fontRef>
+        </p:style>
+        <p:txBody>
+          <a:bodyPr rtlCol="0" anchor="ctr" wrap="square" lIns="73152" rIns="73152"/>
+          <a:lstStyle/>
+          <a:p>
+            <a:pPr algn="ctr"/>
+            <a:r>
+              <a:rPr sz="1400" b="1">
+                <a:solidFill>
+                  <a:srgbClr val="DEE2E6"/>
+                </a:solidFill>
+              </a:rPr>
+              <a:t>3</a:t>
+            </a:r>
+          </a:p>
+        </p:txBody>
+      </p:sp>
+      <p:sp>
+        <p:nvSpPr>
+          <p:cNvPr id="51" name="Rectangle 50"/>
+          <p:cNvSpPr/>
+          <p:nvPr/>
+        </p:nvSpPr>
+        <p:spPr>
+          <a:xfrm>
+            <a:off x="5175504" y="2807208"/>
+            <a:ext cx="374904" cy="374904"/>
+          </a:xfrm>
+          <a:prstGeom prst="rect">
+            <a:avLst/>
+          </a:prstGeom>
+          <a:solidFill>
+            <a:srgbClr val="17191C"/>
+          </a:solidFill>
+          <a:ln>
+            <a:noFill/>
+          </a:ln>
+          <a:effectLst/>
+        </p:spPr>
+        <p:style>
+          <a:lnRef idx="1">
+            <a:schemeClr val="accent1"/>
+          </a:lnRef>
+          <a:fillRef idx="3">
+            <a:schemeClr val="accent1"/>
+          </a:fillRef>
+          <a:effectRef idx="2">
+            <a:schemeClr val="accent1"/>
+          </a:effectRef>
+          <a:fontRef idx="minor">
+            <a:schemeClr val="lt1"/>
+          </a:fontRef>
+        </p:style>
+        <p:txBody>
+          <a:bodyPr rtlCol="0" anchor="ctr" wrap="square" lIns="73152" rIns="73152"/>
+          <a:lstStyle/>
+          <a:p>
+            <a:pPr algn="ctr"/>
+            <a:r>
+              <a:rPr sz="1400" b="1">
+                <a:solidFill>
+                  <a:srgbClr val="DEE2E6"/>
+                </a:solidFill>
+              </a:rPr>
+              <a:t>4</a:t>
+            </a:r>
+          </a:p>
+        </p:txBody>
+      </p:sp>
+      <p:sp>
+        <p:nvSpPr>
+          <p:cNvPr id="52" name="Rectangle 51"/>
+          <p:cNvSpPr/>
+          <p:nvPr/>
+        </p:nvSpPr>
+        <p:spPr>
+          <a:xfrm>
+            <a:off x="5577840" y="2807208"/>
+            <a:ext cx="374904" cy="374904"/>
+          </a:xfrm>
+          <a:prstGeom prst="rect">
+            <a:avLst/>
+          </a:prstGeom>
+          <a:solidFill>
+            <a:srgbClr val="17191C"/>
+          </a:solidFill>
+          <a:ln>
+            <a:noFill/>
+          </a:ln>
+          <a:effectLst/>
+        </p:spPr>
+        <p:style>
+          <a:lnRef idx="1">
+            <a:schemeClr val="accent1"/>
+          </a:lnRef>
+          <a:fillRef idx="3">
+            <a:schemeClr val="accent1"/>
+          </a:fillRef>
+          <a:effectRef idx="2">
+            <a:schemeClr val="accent1"/>
+          </a:effectRef>
+          <a:fontRef idx="minor">
+            <a:schemeClr val="lt1"/>
+          </a:fontRef>
+        </p:style>
+        <p:txBody>
+          <a:bodyPr rtlCol="0" anchor="ctr" wrap="square" lIns="73152" rIns="73152"/>
+          <a:lstStyle/>
+          <a:p>
+            <a:pPr algn="ctr"/>
+            <a:r>
+              <a:rPr sz="1400" b="1">
+                <a:solidFill>
+                  <a:srgbClr val="DEE2E6"/>
+                </a:solidFill>
+              </a:rPr>
+              <a:t>5</a:t>
+            </a:r>
+          </a:p>
+        </p:txBody>
+      </p:sp>
+      <p:sp>
+        <p:nvSpPr>
+          <p:cNvPr id="53" name="Rectangle 52"/>
+          <p:cNvSpPr/>
+          <p:nvPr/>
+        </p:nvSpPr>
+        <p:spPr>
+          <a:xfrm>
+            <a:off x="5980176" y="2807208"/>
+            <a:ext cx="374904" cy="374904"/>
+          </a:xfrm>
+          <a:prstGeom prst="rect">
+            <a:avLst/>
+          </a:prstGeom>
+          <a:solidFill>
+            <a:srgbClr val="17191C"/>
+          </a:solidFill>
+          <a:ln>
+            <a:noFill/>
+          </a:ln>
+          <a:effectLst/>
+        </p:spPr>
+        <p:style>
+          <a:lnRef idx="1">
+            <a:schemeClr val="accent1"/>
+          </a:lnRef>
+          <a:fillRef idx="3">
+            <a:schemeClr val="accent1"/>
+          </a:fillRef>
+          <a:effectRef idx="2">
+            <a:schemeClr val="accent1"/>
+          </a:effectRef>
+          <a:fontRef idx="minor">
+            <a:schemeClr val="lt1"/>
+          </a:fontRef>
+        </p:style>
+        <p:txBody>
+          <a:bodyPr rtlCol="0" anchor="ctr" wrap="square" lIns="73152" rIns="73152"/>
+          <a:lstStyle/>
+          <a:p>
+            <a:pPr algn="ctr"/>
+            <a:r>
+              <a:rPr sz="1400" b="1">
+                <a:solidFill>
+                  <a:srgbClr val="9AA3AB"/>
+                </a:solidFill>
+              </a:rPr>
+              <a:t/>
+            </a:r>
+          </a:p>
+        </p:txBody>
+      </p:sp>
+      <p:sp>
+        <p:nvSpPr>
+          <p:cNvPr id="54" name="Rectangle 53"/>
+          <p:cNvSpPr/>
+          <p:nvPr/>
+        </p:nvSpPr>
+        <p:spPr>
+          <a:xfrm>
+            <a:off x="6382512" y="2807208"/>
+            <a:ext cx="374904" cy="374904"/>
+          </a:xfrm>
+          <a:prstGeom prst="rect">
+            <a:avLst/>
+          </a:prstGeom>
+          <a:solidFill>
+            <a:srgbClr val="17191C"/>
+          </a:solidFill>
+          <a:ln>
+            <a:noFill/>
+          </a:ln>
+          <a:effectLst/>
+        </p:spPr>
+        <p:style>
+          <a:lnRef idx="1">
+            <a:schemeClr val="accent1"/>
+          </a:lnRef>
+          <a:fillRef idx="3">
+            <a:schemeClr val="accent1"/>
+          </a:fillRef>
+          <a:effectRef idx="2">
+            <a:schemeClr val="accent1"/>
+          </a:effectRef>
+          <a:fontRef idx="minor">
+            <a:schemeClr val="lt1"/>
+          </a:fontRef>
+        </p:style>
+        <p:txBody>
+          <a:bodyPr rtlCol="0" anchor="ctr" wrap="square" lIns="73152" rIns="73152"/>
+          <a:lstStyle/>
+          <a:p>
+            <a:pPr algn="ctr"/>
+            <a:r>
+              <a:rPr sz="1400" b="1">
+                <a:solidFill>
+                  <a:srgbClr val="9AA3AB"/>
+                </a:solidFill>
+              </a:rPr>
+              <a:t/>
+            </a:r>
+          </a:p>
+        </p:txBody>
+      </p:sp>
+      <p:sp>
+        <p:nvSpPr>
+          <p:cNvPr id="55" name="Rectangle 54"/>
+          <p:cNvSpPr/>
+          <p:nvPr/>
+        </p:nvSpPr>
+        <p:spPr>
+          <a:xfrm>
+            <a:off x="6784848" y="2807208"/>
+            <a:ext cx="374904" cy="374904"/>
+          </a:xfrm>
+          <a:prstGeom prst="rect">
+            <a:avLst/>
+          </a:prstGeom>
+          <a:solidFill>
+            <a:srgbClr val="4A525A"/>
+          </a:solidFill>
+          <a:ln>
+            <a:noFill/>
+          </a:ln>
+          <a:effectLst/>
+        </p:spPr>
+        <p:style>
+          <a:lnRef idx="1">
+            <a:schemeClr val="accent1"/>
+          </a:lnRef>
+          <a:fillRef idx="3">
+            <a:schemeClr val="accent1"/>
+          </a:fillRef>
+          <a:effectRef idx="2">
+            <a:schemeClr val="accent1"/>
+          </a:effectRef>
+          <a:fontRef idx="minor">
+            <a:schemeClr val="lt1"/>
+          </a:fontRef>
+        </p:style>
+        <p:txBody>
+          <a:bodyPr rtlCol="0" anchor="ctr" wrap="square" lIns="73152" rIns="73152"/>
+          <a:lstStyle/>
+          <a:p>
+            <a:pPr algn="ctr"/>
+            <a:r>
+              <a:rPr sz="1400" b="1">
+                <a:solidFill>
+                  <a:srgbClr val="9AA3AB"/>
+                </a:solidFill>
+              </a:rPr>
+              <a:t/>
+            </a:r>
+          </a:p>
+        </p:txBody>
+      </p:sp>
+      <p:sp>
+        <p:nvSpPr>
+          <p:cNvPr id="56" name="Rectangle 55"/>
+          <p:cNvSpPr/>
+          <p:nvPr/>
+        </p:nvSpPr>
+        <p:spPr>
+          <a:xfrm>
+            <a:off x="1956816" y="3209544"/>
+            <a:ext cx="374904" cy="374904"/>
+          </a:xfrm>
+          <a:prstGeom prst="rect">
+            <a:avLst/>
+          </a:prstGeom>
+          <a:solidFill>
+            <a:srgbClr val="4A525A"/>
+          </a:solidFill>
+          <a:ln>
+            <a:noFill/>
+          </a:ln>
+          <a:effectLst/>
+        </p:spPr>
+        <p:style>
+          <a:lnRef idx="1">
+            <a:schemeClr val="accent1"/>
+          </a:lnRef>
+          <a:fillRef idx="3">
+            <a:schemeClr val="accent1"/>
+          </a:fillRef>
+          <a:effectRef idx="2">
+            <a:schemeClr val="accent1"/>
+          </a:effectRef>
+          <a:fontRef idx="minor">
+            <a:schemeClr val="lt1"/>
+          </a:fontRef>
+        </p:style>
+        <p:txBody>
+          <a:bodyPr rtlCol="0" anchor="ctr" wrap="square" lIns="73152" rIns="73152"/>
+          <a:lstStyle/>
+          <a:p>
+            <a:pPr algn="ctr"/>
+            <a:r>
+              <a:rPr sz="1400" b="1">
+                <a:solidFill>
+                  <a:srgbClr val="9AA3AB"/>
+                </a:solidFill>
+              </a:rPr>
+              <a:t/>
+            </a:r>
+          </a:p>
+        </p:txBody>
+      </p:sp>
+      <p:sp>
+        <p:nvSpPr>
+          <p:cNvPr id="57" name="Rectangle 56"/>
+          <p:cNvSpPr/>
+          <p:nvPr/>
+        </p:nvSpPr>
+        <p:spPr>
+          <a:xfrm>
+            <a:off x="2359152" y="3209544"/>
+            <a:ext cx="374904" cy="374904"/>
+          </a:xfrm>
+          <a:prstGeom prst="rect">
+            <a:avLst/>
+          </a:prstGeom>
+          <a:solidFill>
+            <a:srgbClr val="4A525A"/>
+          </a:solidFill>
+          <a:ln>
+            <a:noFill/>
+          </a:ln>
+          <a:effectLst/>
+        </p:spPr>
+        <p:style>
+          <a:lnRef idx="1">
+            <a:schemeClr val="accent1"/>
+          </a:lnRef>
+          <a:fillRef idx="3">
+            <a:schemeClr val="accent1"/>
+          </a:fillRef>
+          <a:effectRef idx="2">
+            <a:schemeClr val="accent1"/>
+          </a:effectRef>
+          <a:fontRef idx="minor">
+            <a:schemeClr val="lt1"/>
+          </a:fontRef>
+        </p:style>
+        <p:txBody>
+          <a:bodyPr rtlCol="0" anchor="ctr" wrap="square" lIns="73152" rIns="73152"/>
+          <a:lstStyle/>
+          <a:p>
+            <a:pPr algn="ctr"/>
+            <a:r>
+              <a:rPr sz="1400" b="1">
+                <a:solidFill>
+                  <a:srgbClr val="9AA3AB"/>
+                </a:solidFill>
+              </a:rPr>
+              <a:t/>
+            </a:r>
+          </a:p>
+        </p:txBody>
+      </p:sp>
+      <p:sp>
+        <p:nvSpPr>
+          <p:cNvPr id="58" name="Rectangle 57"/>
+          <p:cNvSpPr/>
+          <p:nvPr/>
+        </p:nvSpPr>
+        <p:spPr>
+          <a:xfrm>
+            <a:off x="2761488" y="3209544"/>
+            <a:ext cx="374904" cy="374904"/>
+          </a:xfrm>
+          <a:prstGeom prst="rect">
+            <a:avLst/>
+          </a:prstGeom>
+          <a:solidFill>
+            <a:srgbClr val="4A525A"/>
+          </a:solidFill>
+          <a:ln>
+            <a:noFill/>
+          </a:ln>
+          <a:effectLst/>
+        </p:spPr>
+        <p:style>
+          <a:lnRef idx="1">
+            <a:schemeClr val="accent1"/>
+          </a:lnRef>
+          <a:fillRef idx="3">
+            <a:schemeClr val="accent1"/>
+          </a:fillRef>
+          <a:effectRef idx="2">
+            <a:schemeClr val="accent1"/>
+          </a:effectRef>
+          <a:fontRef idx="minor">
+            <a:schemeClr val="lt1"/>
+          </a:fontRef>
+        </p:style>
+        <p:txBody>
+          <a:bodyPr rtlCol="0" anchor="ctr" wrap="square" lIns="73152" rIns="73152"/>
+          <a:lstStyle/>
+          <a:p>
+            <a:pPr algn="ctr"/>
+            <a:r>
+              <a:rPr sz="1400" b="1">
+                <a:solidFill>
+                  <a:srgbClr val="9AA3AB"/>
+                </a:solidFill>
+              </a:rPr>
+              <a:t/>
+            </a:r>
+          </a:p>
+        </p:txBody>
+      </p:sp>
+      <p:sp>
+        <p:nvSpPr>
+          <p:cNvPr id="59" name="Rectangle 58"/>
+          <p:cNvSpPr/>
+          <p:nvPr/>
+        </p:nvSpPr>
+        <p:spPr>
+          <a:xfrm>
+            <a:off x="3163824" y="3209544"/>
+            <a:ext cx="374904" cy="374904"/>
+          </a:xfrm>
+          <a:prstGeom prst="rect">
+            <a:avLst/>
+          </a:prstGeom>
+          <a:solidFill>
+            <a:srgbClr val="4A525A"/>
+          </a:solidFill>
+          <a:ln>
+            <a:noFill/>
+          </a:ln>
+          <a:effectLst/>
+        </p:spPr>
+        <p:style>
+          <a:lnRef idx="1">
+            <a:schemeClr val="accent1"/>
+          </a:lnRef>
+          <a:fillRef idx="3">
+            <a:schemeClr val="accent1"/>
+          </a:fillRef>
+          <a:effectRef idx="2">
+            <a:schemeClr val="accent1"/>
+          </a:effectRef>
+          <a:fontRef idx="minor">
+            <a:schemeClr val="lt1"/>
+          </a:fontRef>
+        </p:style>
+        <p:txBody>
+          <a:bodyPr rtlCol="0" anchor="ctr" wrap="square" lIns="73152" rIns="73152"/>
+          <a:lstStyle/>
+          <a:p>
+            <a:pPr algn="ctr"/>
+            <a:r>
+              <a:rPr sz="1400" b="1">
+                <a:solidFill>
+                  <a:srgbClr val="9AA3AB"/>
+                </a:solidFill>
+              </a:rPr>
+              <a:t/>
+            </a:r>
+          </a:p>
+        </p:txBody>
+      </p:sp>
+      <p:sp>
+        <p:nvSpPr>
+          <p:cNvPr id="60" name="Rectangle 59"/>
+          <p:cNvSpPr/>
+          <p:nvPr/>
+        </p:nvSpPr>
+        <p:spPr>
+          <a:xfrm>
+            <a:off x="3566160" y="3209544"/>
+            <a:ext cx="374904" cy="374904"/>
+          </a:xfrm>
+          <a:prstGeom prst="rect">
+            <a:avLst/>
+          </a:prstGeom>
+          <a:solidFill>
+            <a:srgbClr val="4A525A"/>
+          </a:solidFill>
+          <a:ln>
+            <a:noFill/>
+          </a:ln>
+          <a:effectLst/>
+        </p:spPr>
+        <p:style>
+          <a:lnRef idx="1">
+            <a:schemeClr val="accent1"/>
+          </a:lnRef>
+          <a:fillRef idx="3">
+            <a:schemeClr val="accent1"/>
+          </a:fillRef>
+          <a:effectRef idx="2">
+            <a:schemeClr val="accent1"/>
+          </a:effectRef>
+          <a:fontRef idx="minor">
+            <a:schemeClr val="lt1"/>
+          </a:fontRef>
+        </p:style>
+        <p:txBody>
+          <a:bodyPr rtlCol="0" anchor="ctr" wrap="square" lIns="73152" rIns="73152"/>
+          <a:lstStyle/>
+          <a:p>
+            <a:pPr algn="ctr"/>
+            <a:r>
+              <a:rPr sz="1400" b="1">
+                <a:solidFill>
+                  <a:srgbClr val="9AA3AB"/>
+                </a:solidFill>
+              </a:rPr>
+              <a:t/>
+            </a:r>
+          </a:p>
+        </p:txBody>
+      </p:sp>
+      <p:sp>
+        <p:nvSpPr>
+          <p:cNvPr id="61" name="Rectangle 60"/>
+          <p:cNvSpPr/>
+          <p:nvPr/>
+        </p:nvSpPr>
+        <p:spPr>
+          <a:xfrm>
+            <a:off x="3968496" y="3209544"/>
+            <a:ext cx="374904" cy="374904"/>
+          </a:xfrm>
+          <a:prstGeom prst="rect">
+            <a:avLst/>
+          </a:prstGeom>
+          <a:solidFill>
+            <a:srgbClr val="4A525A"/>
+          </a:solidFill>
+          <a:ln>
+            <a:noFill/>
+          </a:ln>
+          <a:effectLst/>
+        </p:spPr>
+        <p:style>
+          <a:lnRef idx="1">
+            <a:schemeClr val="accent1"/>
+          </a:lnRef>
+          <a:fillRef idx="3">
+            <a:schemeClr val="accent1"/>
+          </a:fillRef>
+          <a:effectRef idx="2">
+            <a:schemeClr val="accent1"/>
+          </a:effectRef>
+          <a:fontRef idx="minor">
+            <a:schemeClr val="lt1"/>
+          </a:fontRef>
+        </p:style>
+        <p:txBody>
+          <a:bodyPr rtlCol="0" anchor="ctr" wrap="square" lIns="73152" rIns="73152"/>
+          <a:lstStyle/>
+          <a:p>
+            <a:pPr algn="ctr"/>
+            <a:r>
+              <a:rPr sz="1400" b="1">
+                <a:solidFill>
+                  <a:srgbClr val="9AA3AB"/>
+                </a:solidFill>
+              </a:rPr>
+              <a:t/>
+            </a:r>
+          </a:p>
+        </p:txBody>
+      </p:sp>
+      <p:sp>
+        <p:nvSpPr>
+          <p:cNvPr id="62" name="Rectangle 61"/>
+          <p:cNvSpPr/>
+          <p:nvPr/>
+        </p:nvSpPr>
+        <p:spPr>
+          <a:xfrm>
+            <a:off x="4370832" y="3209544"/>
+            <a:ext cx="374904" cy="374904"/>
+          </a:xfrm>
+          <a:prstGeom prst="rect">
+            <a:avLst/>
+          </a:prstGeom>
+          <a:solidFill>
+            <a:srgbClr val="4A525A"/>
+          </a:solidFill>
+          <a:ln>
+            <a:noFill/>
+          </a:ln>
+          <a:effectLst/>
+        </p:spPr>
+        <p:style>
+          <a:lnRef idx="1">
+            <a:schemeClr val="accent1"/>
+          </a:lnRef>
+          <a:fillRef idx="3">
+            <a:schemeClr val="accent1"/>
+          </a:fillRef>
+          <a:effectRef idx="2">
+            <a:schemeClr val="accent1"/>
+          </a:effectRef>
+          <a:fontRef idx="minor">
+            <a:schemeClr val="lt1"/>
+          </a:fontRef>
+        </p:style>
+        <p:txBody>
+          <a:bodyPr rtlCol="0" anchor="ctr" wrap="square" lIns="73152" rIns="73152"/>
+          <a:lstStyle/>
+          <a:p>
+            <a:pPr algn="ctr"/>
+            <a:r>
+              <a:rPr sz="1400" b="1">
+                <a:solidFill>
+                  <a:srgbClr val="9AA3AB"/>
+                </a:solidFill>
+              </a:rPr>
+              <a:t/>
+            </a:r>
+          </a:p>
+        </p:txBody>
+      </p:sp>
+      <p:sp>
+        <p:nvSpPr>
+          <p:cNvPr id="63" name="Rectangle 62"/>
+          <p:cNvSpPr/>
+          <p:nvPr/>
+        </p:nvSpPr>
+        <p:spPr>
+          <a:xfrm>
+            <a:off x="4773168" y="3209544"/>
+            <a:ext cx="374904" cy="374904"/>
+          </a:xfrm>
+          <a:prstGeom prst="rect">
+            <a:avLst/>
+          </a:prstGeom>
+          <a:solidFill>
+            <a:srgbClr val="4A525A"/>
+          </a:solidFill>
+          <a:ln>
+            <a:noFill/>
+          </a:ln>
+          <a:effectLst/>
+        </p:spPr>
+        <p:style>
+          <a:lnRef idx="1">
+            <a:schemeClr val="accent1"/>
+          </a:lnRef>
+          <a:fillRef idx="3">
+            <a:schemeClr val="accent1"/>
+          </a:fillRef>
+          <a:effectRef idx="2">
+            <a:schemeClr val="accent1"/>
+          </a:effectRef>
+          <a:fontRef idx="minor">
+            <a:schemeClr val="lt1"/>
+          </a:fontRef>
+        </p:style>
+        <p:txBody>
+          <a:bodyPr rtlCol="0" anchor="ctr" wrap="square" lIns="73152" rIns="73152"/>
+          <a:lstStyle/>
+          <a:p>
+            <a:pPr algn="ctr"/>
+            <a:r>
+              <a:rPr sz="1400" b="1">
+                <a:solidFill>
+                  <a:srgbClr val="9AA3AB"/>
+                </a:solidFill>
+              </a:rPr>
+              <a:t/>
+            </a:r>
+          </a:p>
+        </p:txBody>
+      </p:sp>
+      <p:sp>
+        <p:nvSpPr>
+          <p:cNvPr id="64" name="Rectangle 63"/>
+          <p:cNvSpPr/>
+          <p:nvPr/>
+        </p:nvSpPr>
+        <p:spPr>
+          <a:xfrm>
+            <a:off x="5175504" y="3209544"/>
+            <a:ext cx="374904" cy="374904"/>
+          </a:xfrm>
+          <a:prstGeom prst="rect">
+            <a:avLst/>
+          </a:prstGeom>
+          <a:solidFill>
+            <a:srgbClr val="4A525A"/>
+          </a:solidFill>
+          <a:ln>
+            <a:noFill/>
+          </a:ln>
+          <a:effectLst/>
+        </p:spPr>
+        <p:style>
+          <a:lnRef idx="1">
+            <a:schemeClr val="accent1"/>
+          </a:lnRef>
+          <a:fillRef idx="3">
+            <a:schemeClr val="accent1"/>
+          </a:fillRef>
+          <a:effectRef idx="2">
+            <a:schemeClr val="accent1"/>
+          </a:effectRef>
+          <a:fontRef idx="minor">
+            <a:schemeClr val="lt1"/>
+          </a:fontRef>
+        </p:style>
+        <p:txBody>
+          <a:bodyPr rtlCol="0" anchor="ctr" wrap="square" lIns="73152" rIns="73152"/>
+          <a:lstStyle/>
+          <a:p>
+            <a:pPr algn="ctr"/>
+            <a:r>
+              <a:rPr sz="1400" b="1">
+                <a:solidFill>
+                  <a:srgbClr val="9AA3AB"/>
+                </a:solidFill>
+              </a:rPr>
+              <a:t/>
+            </a:r>
+          </a:p>
+        </p:txBody>
+      </p:sp>
+      <p:sp>
+        <p:nvSpPr>
+          <p:cNvPr id="65" name="Rectangle 64"/>
+          <p:cNvSpPr/>
+          <p:nvPr/>
+        </p:nvSpPr>
+        <p:spPr>
+          <a:xfrm>
+            <a:off x="5577840" y="3209544"/>
+            <a:ext cx="374904" cy="374904"/>
+          </a:xfrm>
+          <a:prstGeom prst="rect">
+            <a:avLst/>
+          </a:prstGeom>
+          <a:solidFill>
+            <a:srgbClr val="4A525A"/>
+          </a:solidFill>
+          <a:ln>
+            <a:noFill/>
+          </a:ln>
+          <a:effectLst/>
+        </p:spPr>
+        <p:style>
+          <a:lnRef idx="1">
+            <a:schemeClr val="accent1"/>
+          </a:lnRef>
+          <a:fillRef idx="3">
+            <a:schemeClr val="accent1"/>
+          </a:fillRef>
+          <a:effectRef idx="2">
+            <a:schemeClr val="accent1"/>
+          </a:effectRef>
+          <a:fontRef idx="minor">
+            <a:schemeClr val="lt1"/>
+          </a:fontRef>
+        </p:style>
+        <p:txBody>
+          <a:bodyPr rtlCol="0" anchor="ctr" wrap="square" lIns="73152" rIns="73152"/>
+          <a:lstStyle/>
+          <a:p>
+            <a:pPr algn="ctr"/>
+            <a:r>
+              <a:rPr sz="1400" b="1">
+                <a:solidFill>
+                  <a:srgbClr val="9AA3AB"/>
+                </a:solidFill>
+              </a:rPr>
+              <a:t/>
+            </a:r>
+          </a:p>
+        </p:txBody>
+      </p:sp>
+      <p:sp>
+        <p:nvSpPr>
+          <p:cNvPr id="66" name="Rectangle 65"/>
+          <p:cNvSpPr/>
+          <p:nvPr/>
+        </p:nvSpPr>
+        <p:spPr>
+          <a:xfrm>
+            <a:off x="5980176" y="3209544"/>
+            <a:ext cx="374904" cy="374904"/>
+          </a:xfrm>
+          <a:prstGeom prst="rect">
+            <a:avLst/>
+          </a:prstGeom>
+          <a:solidFill>
+            <a:srgbClr val="4A525A"/>
+          </a:solidFill>
+          <a:ln>
+            <a:noFill/>
+          </a:ln>
+          <a:effectLst/>
+        </p:spPr>
+        <p:style>
+          <a:lnRef idx="1">
+            <a:schemeClr val="accent1"/>
+          </a:lnRef>
+          <a:fillRef idx="3">
+            <a:schemeClr val="accent1"/>
+          </a:fillRef>
+          <a:effectRef idx="2">
+            <a:schemeClr val="accent1"/>
+          </a:effectRef>
+          <a:fontRef idx="minor">
+            <a:schemeClr val="lt1"/>
+          </a:fontRef>
+        </p:style>
+        <p:txBody>
+          <a:bodyPr rtlCol="0" anchor="ctr" wrap="square" lIns="73152" rIns="73152"/>
+          <a:lstStyle/>
+          <a:p>
+            <a:pPr algn="ctr"/>
+            <a:r>
+              <a:rPr sz="1400" b="1">
+                <a:solidFill>
+                  <a:srgbClr val="9AA3AB"/>
+                </a:solidFill>
+              </a:rPr>
+              <a:t/>
+            </a:r>
+          </a:p>
+        </p:txBody>
+      </p:sp>
+      <p:sp>
+        <p:nvSpPr>
+          <p:cNvPr id="67" name="Rectangle 66"/>
+          <p:cNvSpPr/>
+          <p:nvPr/>
+        </p:nvSpPr>
+        <p:spPr>
+          <a:xfrm>
+            <a:off x="6382512" y="3209544"/>
+            <a:ext cx="374904" cy="374904"/>
+          </a:xfrm>
+          <a:prstGeom prst="rect">
+            <a:avLst/>
+          </a:prstGeom>
+          <a:solidFill>
+            <a:srgbClr val="4A525A"/>
+          </a:solidFill>
+          <a:ln>
+            <a:noFill/>
+          </a:ln>
+          <a:effectLst/>
+        </p:spPr>
+        <p:style>
+          <a:lnRef idx="1">
+            <a:schemeClr val="accent1"/>
+          </a:lnRef>
+          <a:fillRef idx="3">
+            <a:schemeClr val="accent1"/>
+          </a:fillRef>
+          <a:effectRef idx="2">
+            <a:schemeClr val="accent1"/>
+          </a:effectRef>
+          <a:fontRef idx="minor">
+            <a:schemeClr val="lt1"/>
+          </a:fontRef>
+        </p:style>
+        <p:txBody>
+          <a:bodyPr rtlCol="0" anchor="ctr" wrap="square" lIns="73152" rIns="73152"/>
+          <a:lstStyle/>
+          <a:p>
+            <a:pPr algn="ctr"/>
+            <a:r>
+              <a:rPr sz="1400" b="1">
+                <a:solidFill>
+                  <a:srgbClr val="9AA3AB"/>
+                </a:solidFill>
+              </a:rPr>
+              <a:t/>
+            </a:r>
+          </a:p>
+        </p:txBody>
+      </p:sp>
+      <p:sp>
+        <p:nvSpPr>
+          <p:cNvPr id="68" name="Rectangle 67"/>
+          <p:cNvSpPr/>
+          <p:nvPr/>
+        </p:nvSpPr>
+        <p:spPr>
+          <a:xfrm>
+            <a:off x="6784848" y="3209544"/>
+            <a:ext cx="374904" cy="374904"/>
+          </a:xfrm>
+          <a:prstGeom prst="rect">
+            <a:avLst/>
+          </a:prstGeom>
+          <a:solidFill>
+            <a:srgbClr val="4A525A"/>
+          </a:solidFill>
+          <a:ln>
+            <a:noFill/>
+          </a:ln>
+          <a:effectLst/>
+        </p:spPr>
+        <p:style>
+          <a:lnRef idx="1">
+            <a:schemeClr val="accent1"/>
+          </a:lnRef>
+          <a:fillRef idx="3">
+            <a:schemeClr val="accent1"/>
+          </a:fillRef>
+          <a:effectRef idx="2">
+            <a:schemeClr val="accent1"/>
+          </a:effectRef>
+          <a:fontRef idx="minor">
+            <a:schemeClr val="lt1"/>
+          </a:fontRef>
+        </p:style>
+        <p:txBody>
+          <a:bodyPr rtlCol="0" anchor="ctr" wrap="square" lIns="73152" rIns="73152"/>
+          <a:lstStyle/>
+          <a:p>
+            <a:pPr algn="ctr"/>
+            <a:r>
+              <a:rPr sz="1400" b="1">
+                <a:solidFill>
+                  <a:srgbClr val="9AA3AB"/>
+                </a:solidFill>
+              </a:rPr>
+              <a:t/>
+            </a:r>
+          </a:p>
+        </p:txBody>
+      </p:sp>
+      <p:sp>
+        <p:nvSpPr>
+          <p:cNvPr id="69" name="TextBox 68"/>
+          <p:cNvSpPr txBox="1"/>
+          <p:nvPr/>
+        </p:nvSpPr>
+        <p:spPr>
+          <a:xfrm>
+            <a:off x="457200" y="3685032"/>
+            <a:ext cx="8229600" cy="365760"/>
+          </a:xfrm>
+          <a:prstGeom prst="rect">
+            <a:avLst/>
+          </a:prstGeom>
+          <a:noFill/>
+        </p:spPr>
+        <p:txBody>
+          <a:bodyPr wrap="square">
+            <a:spAutoFit/>
+          </a:bodyPr>
+          <a:lstStyle/>
+          <a:p>
+            <a:pPr algn="ctr"/>
+            <a:r>
+              <a:rPr sz="1400" b="0" i="0">
+                <a:solidFill>
+                  <a:srgbClr val="9AA3AB"/>
+                </a:solidFill>
+              </a:rPr>
+              <a:t>Each tile remembers where it was reached from. Follow that back from T for the path.</a:t>
+            </a:r>
+          </a:p>
+        </p:txBody>
+      </p:sp>
+      <p:sp>
+        <p:nvSpPr>
+          <p:cNvPr id="70" name="TextBox 69"/>
+          <p:cNvSpPr txBox="1"/>
+          <p:nvPr/>
+        </p:nvSpPr>
+        <p:spPr>
+          <a:xfrm>
+            <a:off x="457200" y="4160520"/>
+            <a:ext cx="8229600" cy="731520"/>
+          </a:xfrm>
+          <a:prstGeom prst="rect">
+            <a:avLst/>
+          </a:prstGeom>
+          <a:noFill/>
+        </p:spPr>
+        <p:txBody>
+          <a:bodyPr wrap="square">
+            <a:spAutoFit/>
+          </a:bodyPr>
+          <a:lstStyle/>
+          <a:p>
+            <a:pPr algn="ctr"/>
+            <a:r>
+              <a:rPr sz="1800" b="1" i="0">
+                <a:solidFill>
+                  <a:srgbClr val="DEE2E6"/>
+                </a:solidFill>
+              </a:rPr>
+              <a:t>Always the shortest path, but it searches in every direction.</a:t>
+            </a:r>
+          </a:p>
+        </p:txBody>
+      </p:sp>
+    </p:spTree>
+  </p:cSld>
+  <p:clrMapOvr>
+    <a:masterClrMapping/>
+  </p:clrMapOvr>
+</p:sld>
+</file>
+
+<file path=ppt/slides/slide34.xml><?xml version="1.0" encoding="utf-8"?>
+<p:sld xmlns:a="http://schemas.openxmlformats.org/drawingml/2006/main" xmlns:p="http://schemas.openxmlformats.org/presentationml/2006/main" xmlns:r="http://schemas.openxmlformats.org/officeDocument/2006/relationships">
+  <p:cSld>
+    <p:spTree>
+      <p:nvGrpSpPr>
+        <p:cNvPr id="1" name=""/>
+        <p:cNvGrpSpPr/>
+        <p:nvPr/>
+      </p:nvGrpSpPr>
+      <p:grpSpPr/>
+      <p:sp>
+        <p:nvSpPr>
+          <p:cNvPr id="2" name="Title 1"/>
+          <p:cNvSpPr>
+            <a:spLocks noGrp="1"/>
+          </p:cNvSpPr>
+          <p:nvPr>
+            <p:ph type="title"/>
+          </p:nvPr>
+        </p:nvSpPr>
+        <p:spPr/>
+        <p:txBody>
+          <a:bodyPr/>
+          <a:lstStyle/>
+          <a:p>
+            <a:pPr indent="0" lvl="0" marL="0" rtl="0" algn="l">
+              <a:spcBef>
+                <a:spcPts val="0"/>
+              </a:spcBef>
+              <a:spcAft>
+                <a:spcPts val="0"/>
+              </a:spcAft>
+              <a:buNone/>
+            </a:pPr>
+            <a:r>
+              <a:rPr lang="en"/>
+              <a:t>A*</a:t>
+            </a:r>
+            <a:endParaRPr/>
+          </a:p>
+        </p:txBody>
+      </p:sp>
+      <p:sp>
+        <p:nvSpPr>
+          <p:cNvPr id="3" name="Text Placeholder 2"/>
+          <p:cNvSpPr>
+            <a:spLocks noGrp="1"/>
+          </p:cNvSpPr>
+          <p:nvPr>
+            <p:ph type="body" idx="1"/>
+          </p:nvPr>
+        </p:nvSpPr>
+        <p:spPr>
+          <a:xfrm>
+            <a:off x="311700" y="885950"/>
+            <a:ext cx="8520600" cy="521208"/>
+          </a:xfrm>
+        </p:spPr>
+        <p:txBody>
+          <a:bodyPr/>
+          <a:lstStyle/>
+          <a:p>
+            <a:pPr indent="-330200" lvl="0" marL="457200" rtl="0" algn="l">
+              <a:spcBef>
+                <a:spcPts val="0"/>
+              </a:spcBef>
+              <a:spcAft>
+                <a:spcPts val="0"/>
+              </a:spcAft>
+              <a:buSzPts val="1600"/>
+              <a:buChar char="●"/>
+            </a:pPr>
+            <a:r>
+              <a:rPr lang="en" b="1"/>
+              <a:t>Continue from the tile where steps so far + estimated steps left is lowest.</a:t>
+            </a:r>
+            <a:endParaRPr/>
+          </a:p>
+        </p:txBody>
+      </p:sp>
+      <p:sp>
+        <p:nvSpPr>
+          <p:cNvPr id="4" name="Rectangle 3"/>
+          <p:cNvSpPr/>
+          <p:nvPr/>
+        </p:nvSpPr>
+        <p:spPr>
+          <a:xfrm>
+            <a:off x="548640" y="1600200"/>
+            <a:ext cx="8046720" cy="2514600"/>
+          </a:xfrm>
+          <a:prstGeom prst="rect">
+            <a:avLst/>
+          </a:prstGeom>
+          <a:solidFill>
+            <a:srgbClr val="17191C"/>
+          </a:solidFill>
+          <a:ln>
+            <a:noFill/>
+          </a:ln>
+          <a:effectLst/>
+        </p:spPr>
+        <p:style>
+          <a:lnRef idx="1">
+            <a:schemeClr val="accent1"/>
+          </a:lnRef>
+          <a:fillRef idx="3">
+            <a:schemeClr val="accent1"/>
+          </a:fillRef>
+          <a:effectRef idx="2">
+            <a:schemeClr val="accent1"/>
+          </a:effectRef>
+          <a:fontRef idx="minor">
+            <a:schemeClr val="lt1"/>
+          </a:fontRef>
+        </p:style>
+        <p:txBody>
+          <a:bodyPr rtlCol="0" anchor="ctr" wrap="square" lIns="164592" rIns="73152"/>
+          <a:lstStyle/>
+          <a:p>
+            <a:pPr algn="l"/>
+            <a:r>
+              <a:rPr sz="1400" b="0">
+                <a:solidFill>
+                  <a:srgbClr val="DEE2E6"/>
+                </a:solidFill>
+              </a:rPr>
+              <a:t/>
+            </a:r>
+            <a:r>
+              <a:rPr sz="1200">
+                <a:solidFill>
+                  <a:srgbClr val="DEE2E6"/>
+                </a:solidFill>
+                <a:latin typeface="Consolas"/>
+              </a:rPr>
+              <a:t>while (open.Count &gt; 0)</a:t>
+            </a:r>
+          </a:p>
+          <a:p>
+            <a:pPr algn="l"/>
+            <a:r>
+              <a:rPr sz="1200">
+                <a:solidFill>
+                  <a:srgbClr val="DEE2E6"/>
+                </a:solidFill>
+                <a:latin typeface="Consolas"/>
+              </a:rPr>
+              <a:t>{</a:t>
+            </a:r>
+          </a:p>
+          <a:p>
+            <a:pPr algn="l"/>
+            <a:r>
+              <a:rPr sz="1200">
+                <a:solidFill>
+                  <a:srgbClr val="DEE2E6"/>
+                </a:solidFill>
+                <a:latin typeface="Consolas"/>
+              </a:rPr>
+              <a:t>    Point tile = open.Dequeue();            // the lowest steps + estimate</a:t>
+            </a:r>
+          </a:p>
+          <a:p>
+            <a:pPr algn="l"/>
+            <a:r>
+              <a:rPr sz="1200">
+                <a:solidFill>
+                  <a:srgbClr val="DEE2E6"/>
+                </a:solidFill>
+                <a:latin typeface="Consolas"/>
+              </a:rPr>
+              <a:t>    if (tile == goal)</a:t>
+            </a:r>
+          </a:p>
+          <a:p>
+            <a:pPr algn="l"/>
+            <a:r>
+              <a:rPr sz="1200">
+                <a:solidFill>
+                  <a:srgbClr val="DEE2E6"/>
+                </a:solidFill>
+                <a:latin typeface="Consolas"/>
+              </a:rPr>
+              <a:t>        return Walk(cameFrom, start, goal);</a:t>
+            </a:r>
+          </a:p>
+          <a:p>
+            <a:pPr algn="l"/>
+            <a:r>
+              <a:rPr sz="1200">
+                <a:solidFill>
+                  <a:srgbClr val="DEE2E6"/>
+                </a:solidFill>
+                <a:latin typeface="Consolas"/>
+              </a:rPr>
+              <a:t> </a:t>
+            </a:r>
+          </a:p>
+          <a:p>
+            <a:pPr algn="l"/>
+            <a:r>
+              <a:rPr sz="1200">
+                <a:solidFill>
+                  <a:srgbClr val="9AA3AB"/>
+                </a:solidFill>
+                <a:latin typeface="Consolas"/>
+              </a:rPr>
+              <a:t>    // for every open neighbour that this is the quickest way to:</a:t>
+            </a:r>
+          </a:p>
+          <a:p>
+            <a:pPr algn="l"/>
+            <a:r>
+              <a:rPr sz="1200">
+                <a:solidFill>
+                  <a:srgbClr val="DEE2E6"/>
+                </a:solidFill>
+                <a:latin typeface="Consolas"/>
+              </a:rPr>
+              <a:t>    steps[next] = steps[tile] + 1;</a:t>
+            </a:r>
+          </a:p>
+          <a:p>
+            <a:pPr algn="l"/>
+            <a:r>
+              <a:rPr sz="1200">
+                <a:solidFill>
+                  <a:srgbClr val="DEE2E6"/>
+                </a:solidFill>
+                <a:latin typeface="Consolas"/>
+              </a:rPr>
+              <a:t>    cameFrom[next] = tile;</a:t>
+            </a:r>
+          </a:p>
+          <a:p>
+            <a:pPr algn="l"/>
+            <a:r>
+              <a:rPr sz="1200">
+                <a:solidFill>
+                  <a:srgbClr val="DEE2E6"/>
+                </a:solidFill>
+                <a:latin typeface="Consolas"/>
+              </a:rPr>
+              <a:t>    open.Enqueue(next, steps[next] + Estimate(maze, next, goal));</a:t>
+            </a:r>
+          </a:p>
+          <a:p>
+            <a:pPr algn="l"/>
+            <a:r>
+              <a:rPr sz="1200">
+                <a:solidFill>
+                  <a:srgbClr val="DEE2E6"/>
+                </a:solidFill>
+                <a:latin typeface="Consolas"/>
+              </a:rPr>
+              <a:t>}</a:t>
+            </a:r>
+          </a:p>
+        </p:txBody>
+      </p:sp>
+      <p:sp>
+        <p:nvSpPr>
+          <p:cNvPr id="5" name="TextBox 4"/>
+          <p:cNvSpPr txBox="1"/>
+          <p:nvPr/>
+        </p:nvSpPr>
+        <p:spPr>
+          <a:xfrm>
+            <a:off x="457200" y="4251960"/>
+            <a:ext cx="8229600" cy="731520"/>
+          </a:xfrm>
+          <a:prstGeom prst="rect">
+            <a:avLst/>
+          </a:prstGeom>
+          <a:noFill/>
+        </p:spPr>
+        <p:txBody>
+          <a:bodyPr wrap="square">
+            <a:spAutoFit/>
+          </a:bodyPr>
+          <a:lstStyle/>
+          <a:p>
+            <a:pPr algn="ctr"/>
+            <a:r>
+              <a:rPr sz="1600" b="1" i="0">
+                <a:solidFill>
+                  <a:srgbClr val="DEE2E6"/>
+                </a:solidFill>
+              </a:rPr>
+              <a:t>The estimate must never be higher than the real distance.</a:t>
+            </a:r>
+          </a:p>
+        </p:txBody>
+      </p:sp>
+    </p:spTree>
+  </p:cSld>
+  <p:clrMapOvr>
+    <a:masterClrMapping/>
+  </p:clrMapOvr>
+</p:sld>
+</file>
+
+<file path=ppt/slides/slide35.xml><?xml version="1.0" encoding="utf-8"?>
+<p:sld xmlns:a="http://schemas.openxmlformats.org/drawingml/2006/main" xmlns:p="http://schemas.openxmlformats.org/presentationml/2006/main" xmlns:r="http://schemas.openxmlformats.org/officeDocument/2006/relationships">
+  <p:cSld>
+    <p:spTree>
+      <p:nvGrpSpPr>
+        <p:cNvPr id="1" name=""/>
+        <p:cNvGrpSpPr/>
+        <p:nvPr/>
+      </p:nvGrpSpPr>
+      <p:grpSpPr/>
+      <p:sp>
+        <p:nvSpPr>
+          <p:cNvPr id="2" name="Title 1"/>
+          <p:cNvSpPr>
+            <a:spLocks noGrp="1"/>
+          </p:cNvSpPr>
+          <p:nvPr>
+            <p:ph type="title"/>
+          </p:nvPr>
+        </p:nvSpPr>
+        <p:spPr/>
+        <p:txBody>
+          <a:bodyPr/>
+          <a:lstStyle/>
+          <a:p>
+            <a:pPr indent="0" lvl="0" marL="0" rtl="0" algn="l">
+              <a:spcBef>
+                <a:spcPts val="0"/>
+              </a:spcBef>
+              <a:spcAft>
+                <a:spcPts val="0"/>
+              </a:spcAft>
+              <a:buNone/>
+            </a:pPr>
+            <a:r>
+              <a:rPr lang="en"/>
+              <a:t>Routing as a Strategy</a:t>
+            </a:r>
+            <a:endParaRPr/>
+          </a:p>
+        </p:txBody>
+      </p:sp>
+      <p:sp>
+        <p:nvSpPr>
+          <p:cNvPr id="3" name="Text Placeholder 2"/>
+          <p:cNvSpPr>
+            <a:spLocks noGrp="1"/>
+          </p:cNvSpPr>
+          <p:nvPr>
+            <p:ph type="body" idx="1"/>
+          </p:nvPr>
+        </p:nvSpPr>
+        <p:spPr>
+          <a:xfrm>
+            <a:off x="311700" y="885950"/>
+            <a:ext cx="8520600" cy="521208"/>
+          </a:xfrm>
+        </p:spPr>
+        <p:txBody>
+          <a:bodyPr/>
+          <a:lstStyle/>
+          <a:p>
+            <a:pPr indent="-330200" lvl="0" marL="457200" rtl="0" algn="l">
+              <a:spcBef>
+                <a:spcPts val="0"/>
+              </a:spcBef>
+              <a:spcAft>
+                <a:spcPts val="0"/>
+              </a:spcAft>
+              <a:buSzPts val="1600"/>
+              <a:buChar char="●"/>
+            </a:pPr>
+            <a:r>
+              <a:rPr lang="en" b="1"/>
+              <a:t>Targeting says where a ghost wants to go. Routing says which way it turns to get there.</a:t>
+            </a:r>
+            <a:endParaRPr/>
+          </a:p>
+        </p:txBody>
+      </p:sp>
+      <p:sp>
+        <p:nvSpPr>
+          <p:cNvPr id="4" name="Rounded Rectangle 3"/>
+          <p:cNvSpPr/>
+          <p:nvPr/>
+        </p:nvSpPr>
+        <p:spPr>
+          <a:xfrm>
+            <a:off x="548640" y="1737360"/>
+            <a:ext cx="3840480" cy="1371600"/>
+          </a:xfrm>
+          <a:prstGeom prst="roundRect">
+            <a:avLst>
+              <a:gd name="adj" fmla="val 12000"/>
+            </a:avLst>
+          </a:prstGeom>
+          <a:solidFill>
+            <a:srgbClr val="2E3338"/>
+          </a:solidFill>
+          <a:ln>
+            <a:noFill/>
+          </a:ln>
+          <a:effectLst/>
+        </p:spPr>
+        <p:style>
+          <a:lnRef idx="1">
+            <a:schemeClr val="accent1"/>
+          </a:lnRef>
+          <a:fillRef idx="3">
+            <a:schemeClr val="accent1"/>
+          </a:fillRef>
+          <a:effectRef idx="2">
+            <a:schemeClr val="accent1"/>
+          </a:effectRef>
+          <a:fontRef idx="minor">
+            <a:schemeClr val="lt1"/>
+          </a:fontRef>
+        </p:style>
+        <p:txBody>
+          <a:bodyPr rtlCol="0" anchor="ctr" wrap="square" lIns="73152" rIns="73152"/>
+          <a:lstStyle/>
+          <a:p>
+            <a:pPr algn="ctr"/>
+            <a:r>
+              <a:rPr sz="1500" b="1">
+                <a:solidFill>
+                  <a:srgbClr val="DEE2E6"/>
+                </a:solidFill>
+              </a:rPr>
+              <a:t>NearestTile</a:t>
+            </a:r>
+          </a:p>
+          <a:p>
+            <a:pPr algn="ctr"/>
+            <a:r>
+              <a:rPr sz="1300" b="0">
+                <a:solidFill>
+                  <a:srgbClr val="9AA3AB"/>
+                </a:solidFill>
+              </a:rPr>
+              <a:t>the arcade rule</a:t>
+            </a:r>
+          </a:p>
+          <a:p>
+            <a:pPr algn="ctr"/>
+            <a:r>
+              <a:rPr sz="1300" b="0">
+                <a:solidFill>
+                  <a:srgbClr val="9AA3AB"/>
+                </a:solidFill>
+              </a:rPr>
+              <a:t>the four ghosts, in scatter and chase</a:t>
+            </a:r>
+          </a:p>
+        </p:txBody>
+      </p:sp>
+      <p:sp>
+        <p:nvSpPr>
+          <p:cNvPr id="5" name="Rounded Rectangle 4"/>
+          <p:cNvSpPr/>
+          <p:nvPr/>
+        </p:nvSpPr>
+        <p:spPr>
+          <a:xfrm>
+            <a:off x="4754880" y="1737360"/>
+            <a:ext cx="3840480" cy="1371600"/>
+          </a:xfrm>
+          <a:prstGeom prst="roundRect">
+            <a:avLst>
+              <a:gd name="adj" fmla="val 12000"/>
+            </a:avLst>
+          </a:prstGeom>
+          <a:solidFill>
+            <a:srgbClr val="2E3338"/>
+          </a:solidFill>
+          <a:ln w="25400">
+            <a:solidFill>
+              <a:srgbClr val="D45D35"/>
+            </a:solidFill>
+          </a:ln>
+          <a:effectLst/>
+        </p:spPr>
+        <p:style>
+          <a:lnRef idx="1">
+            <a:schemeClr val="accent1"/>
+          </a:lnRef>
+          <a:fillRef idx="3">
+            <a:schemeClr val="accent1"/>
+          </a:fillRef>
+          <a:effectRef idx="2">
+            <a:schemeClr val="accent1"/>
+          </a:effectRef>
+          <a:fontRef idx="minor">
+            <a:schemeClr val="lt1"/>
+          </a:fontRef>
+        </p:style>
+        <p:txBody>
+          <a:bodyPr rtlCol="0" anchor="ctr" wrap="square" lIns="73152" rIns="73152"/>
+          <a:lstStyle/>
+          <a:p>
+            <a:pPr algn="ctr"/>
+            <a:r>
+              <a:rPr sz="1500" b="1">
+                <a:solidFill>
+                  <a:srgbClr val="DEE2E6"/>
+                </a:solidFill>
+              </a:rPr>
+              <a:t>ShortestPath</a:t>
+            </a:r>
+          </a:p>
+          <a:p>
+            <a:pPr algn="ctr"/>
+            <a:r>
+              <a:rPr sz="1300" b="0">
+                <a:solidFill>
+                  <a:srgbClr val="9AA3AB"/>
+                </a:solidFill>
+              </a:rPr>
+              <a:t>the first step of the path A* finds</a:t>
+            </a:r>
+          </a:p>
+          <a:p>
+            <a:pPr algn="ctr"/>
+            <a:r>
+              <a:rPr sz="1300" b="0">
+                <a:solidFill>
+                  <a:srgbClr val="9AA3AB"/>
+                </a:solidFill>
+              </a:rPr>
+              <a:t>the eyes, on their way home</a:t>
+            </a:r>
+          </a:p>
+        </p:txBody>
+      </p:sp>
+      <p:sp>
+        <p:nvSpPr>
+          <p:cNvPr id="6" name="TextBox 5"/>
+          <p:cNvSpPr txBox="1"/>
+          <p:nvPr/>
+        </p:nvSpPr>
+        <p:spPr>
+          <a:xfrm>
+            <a:off x="457200" y="3520440"/>
+            <a:ext cx="8229600" cy="731520"/>
+          </a:xfrm>
+          <a:prstGeom prst="rect">
+            <a:avLst/>
+          </a:prstGeom>
+          <a:noFill/>
+        </p:spPr>
+        <p:txBody>
+          <a:bodyPr wrap="square">
+            <a:spAutoFit/>
+          </a:bodyPr>
+          <a:lstStyle/>
+          <a:p>
+            <a:pPr algn="ctr"/>
+            <a:r>
+              <a:rPr sz="1800" b="1" i="0">
+                <a:solidFill>
+                  <a:srgbClr val="DEE2E6"/>
+                </a:solidFill>
+              </a:rPr>
+              <a:t>Both are an IRouteStrategy. Which one a ghost gets is one argument in World.</a:t>
+            </a:r>
+          </a:p>
+        </p:txBody>
+      </p:sp>
+    </p:spTree>
+  </p:cSld>
+  <p:clrMapOvr>
+    <a:masterClrMapping/>
+  </p:clrMapOvr>
+</p:sld>
+</file>
+
+<file path=ppt/slides/slide36.xml><?xml version="1.0" encoding="utf-8"?>
+<p:sld xmlns:a="http://schemas.openxmlformats.org/drawingml/2006/main" xmlns:p="http://schemas.openxmlformats.org/presentationml/2006/main" xmlns:r="http://schemas.openxmlformats.org/officeDocument/2006/relationships">
+  <p:cSld>
+    <p:spTree>
+      <p:nvGrpSpPr>
+        <p:cNvPr id="1" name=""/>
+        <p:cNvGrpSpPr/>
+        <p:nvPr/>
+      </p:nvGrpSpPr>
+      <p:grpSpPr/>
+      <p:sp>
+        <p:nvSpPr>
+          <p:cNvPr id="2" name="Title 1"/>
+          <p:cNvSpPr>
+            <a:spLocks noGrp="1"/>
+          </p:cNvSpPr>
+          <p:nvPr>
+            <p:ph type="title"/>
+          </p:nvPr>
+        </p:nvSpPr>
+        <p:spPr/>
+        <p:txBody>
+          <a:bodyPr/>
+          <a:lstStyle/>
+          <a:p>
+            <a:pPr indent="0" lvl="0" marL="0" rtl="0" algn="l">
+              <a:spcBef>
+                <a:spcPts val="0"/>
+              </a:spcBef>
+              <a:spcAft>
+                <a:spcPts val="0"/>
+              </a:spcAft>
+              <a:buNone/>
+            </a:pPr>
+            <a:r>
+              <a:rPr lang="en"/>
+              <a:t>Pathfinding Implementation</a:t>
+            </a:r>
+            <a:endParaRPr/>
+          </a:p>
+        </p:txBody>
+      </p:sp>
+      <p:sp>
+        <p:nvSpPr>
+          <p:cNvPr id="3" name="Text Placeholder 2"/>
+          <p:cNvSpPr>
+            <a:spLocks noGrp="1"/>
+          </p:cNvSpPr>
+          <p:nvPr>
+            <p:ph type="body" idx="1"/>
+          </p:nvPr>
+        </p:nvSpPr>
+        <p:spPr>
+          <a:xfrm>
+            <a:off x="311700" y="885950"/>
+            <a:ext cx="8520600" cy="4023300"/>
+          </a:xfrm>
+        </p:spPr>
+        <p:txBody>
+          <a:bodyPr anchorCtr="0" anchor="ctr" bIns="91425" lIns="91425" spcFirstLastPara="1" rIns="91425" wrap="square" tIns="91425">
+            <a:normAutofit/>
+          </a:bodyPr>
+          <a:lstStyle/>
+          <a:p>
+            <a:pPr indent="0" lvl="0" marL="0" rtl="0" algn="ctr">
+              <a:spcBef>
+                <a:spcPts val="0"/>
+              </a:spcBef>
+              <a:spcAft>
+                <a:spcPts val="1200"/>
+              </a:spcAft>
+              <a:buNone/>
+            </a:pPr>
+            <a:r>
+              <a:rPr lang="en" sz="2900">
+                <a:latin typeface="VT323"/>
+                <a:ea typeface="VT323"/>
+                <a:cs typeface="VT323"/>
+                <a:sym typeface="VT323"/>
+              </a:rPr>
+              <a:t>DEMO!</a:t>
+            </a:r>
+            <a:endParaRPr/>
+          </a:p>
+          <a:p>
+            <a:pPr indent="0" lvl="0" marL="0" rtl="0" algn="ctr">
+              <a:spcBef>
+                <a:spcPts val="0"/>
+              </a:spcBef>
+              <a:spcAft>
+                <a:spcPts val="0"/>
+              </a:spcAft>
+              <a:buNone/>
+            </a:pPr>
+            <a:r>
+              <a:rPr lang="en" sz="1800"/>
+              <a:t>Pacman4: routing strategies, and A* for the eyes</a:t>
+            </a:r>
+            <a:endParaRPr sz="1800"/>
+          </a:p>
+        </p:txBody>
+      </p:sp>
+    </p:spTree>
+  </p:cSld>
+  <p:clrMapOvr>
+    <a:masterClrMapping/>
+  </p:clrMapOvr>
+</p:sld>
+</file>
+
+<file path=ppt/slides/slide37.xml><?xml version="1.0" encoding="utf-8"?>
+<p:sld xmlns:a="http://schemas.openxmlformats.org/drawingml/2006/main" xmlns:p="http://schemas.openxmlformats.org/presentationml/2006/main" xmlns:r="http://schemas.openxmlformats.org/officeDocument/2006/relationships">
+  <p:cSld>
+    <p:spTree>
+      <p:nvGrpSpPr>
+        <p:cNvPr id="1" name=""/>
+        <p:cNvGrpSpPr/>
+        <p:nvPr/>
+      </p:nvGrpSpPr>
+      <p:grpSpPr/>
+      <p:sp>
+        <p:nvSpPr>
+          <p:cNvPr id="2" name="Title 1"/>
+          <p:cNvSpPr>
+            <a:spLocks noGrp="1"/>
+          </p:cNvSpPr>
+          <p:nvPr>
+            <p:ph type="title"/>
+          </p:nvPr>
+        </p:nvSpPr>
+        <p:spPr/>
+        <p:txBody>
+          <a:bodyPr/>
+          <a:lstStyle/>
+          <a:p>
+            <a:pPr indent="0" lvl="0" marL="0" rtl="0" algn="l">
+              <a:spcBef>
+                <a:spcPts val="0"/>
+              </a:spcBef>
+              <a:spcAft>
+                <a:spcPts val="0"/>
+              </a:spcAft>
+              <a:buNone/>
+            </a:pPr>
+            <a:r>
+              <a:rPr lang="en"/>
+              <a:t>Try It: The Shortest Path</a:t>
+            </a:r>
+            <a:endParaRPr/>
+          </a:p>
+        </p:txBody>
+      </p:sp>
+      <p:sp>
+        <p:nvSpPr>
+          <p:cNvPr id="3" name="Text Placeholder 2"/>
+          <p:cNvSpPr>
+            <a:spLocks noGrp="1"/>
+          </p:cNvSpPr>
+          <p:nvPr>
+            <p:ph type="body" idx="1"/>
+          </p:nvPr>
+        </p:nvSpPr>
+        <p:spPr>
+          <a:xfrm>
+            <a:off x="311700" y="885950"/>
+            <a:ext cx="8520600" cy="1289304"/>
+          </a:xfrm>
+        </p:spPr>
+        <p:txBody>
+          <a:bodyPr/>
+          <a:lstStyle/>
+          <a:p>
+            <a:pPr indent="-330200" lvl="0" marL="457200" rtl="0" algn="l">
+              <a:spcBef>
+                <a:spcPts val="0"/>
+              </a:spcBef>
+              <a:spcAft>
+                <a:spcPts val="0"/>
+              </a:spcAft>
+              <a:buSzPts val="1600"/>
+              <a:buChar char="●"/>
+            </a:pPr>
+            <a:r>
+              <a:rPr lang="en"/>
+              <a:t>In Pacman4’s World:</a:t>
+            </a:r>
+            <a:endParaRPr/>
+          </a:p>
+          <a:p>
+            <a:pPr indent="-330200" lvl="0" marL="457200" rtl="0" algn="l">
+              <a:spcBef>
+                <a:spcPts val="0"/>
+              </a:spcBef>
+              <a:spcAft>
+                <a:spcPts val="0"/>
+              </a:spcAft>
+              <a:buSzPts val="1600"/>
+              <a:buChar char="●"/>
+            </a:pPr>
+            <a:r>
+              <a:rPr lang="en"/>
+              <a:t>Give Blinky new ShortestPath()</a:t>
+            </a:r>
+            <a:endParaRPr/>
+          </a:p>
+          <a:p>
+            <a:pPr indent="-330200" lvl="0" marL="457200" rtl="0" algn="l">
+              <a:spcBef>
+                <a:spcPts val="0"/>
+              </a:spcBef>
+              <a:spcAft>
+                <a:spcPts val="0"/>
+              </a:spcAft>
+              <a:buSzPts val="1600"/>
+              <a:buChar char="●"/>
+            </a:pPr>
+            <a:r>
+              <a:rPr lang="en"/>
+              <a:t>Then give it to all four: what happens to the game?</a:t>
+            </a:r>
+            <a:endParaRPr/>
+          </a:p>
+        </p:txBody>
+      </p:sp>
+    </p:spTree>
+  </p:cSld>
+  <p:clrMapOvr>
+    <a:masterClrMapping/>
+  </p:clrMapOvr>
+</p:sld>
+</file>
+
 <file path=ppt/slides/slide4.xml><?xml version="1.0" encoding="utf-8"?>
 <p:sld xmlns:a="http://schemas.openxmlformats.org/drawingml/2006/main" xmlns:r="http://schemas.openxmlformats.org/officeDocument/2006/relationships" xmlns:mc="http://schemas.openxmlformats.org/markup-compatibility/2006" xmlns:mv="urn:schemas-microsoft-com:mac:vml" xmlns:p="http://schemas.openxmlformats.org/presentationml/2006/main" xmlns:c="http://schemas.openxmlformats.org/drawingml/2006/chart" xmlns:dgm="http://schemas.openxmlformats.org/drawingml/2006/diagram" xmlns:o="urn:schemas-microsoft-com:office:office" xmlns:v="urn:schemas-microsoft-com:vml" xmlns:pvml="urn:schemas-microsoft-com:office:powerpoint" xmlns:com="http://schemas.openxmlformats.org/drawingml/2006/compatibility" xmlns:p14="http://schemas.microsoft.com/office/powerpoint/2010/main" xmlns:p15="http://schemas.microsoft.com/office/powerpoint/2012/main" xmlns:ahyp="http://schemas.microsoft.com/office/drawing/2018/hyperlinkcolor">
   <p:cSld>
@@ -17888,6 +26281,23 @@
             <a:r>
               <a:rPr lang="en"/>
               <a:t>State vs. Strategy</a:t>
+            </a:r>
+            <a:endParaRPr/>
+          </a:p>
+          <a:p>
+            <a:pPr indent="-330200" lvl="0" marL="457200" rtl="0" algn="l">
+              <a:spcBef>
+                <a:spcPts val="0"/>
+              </a:spcBef>
+              <a:spcAft>
+                <a:spcPts val="0"/>
+              </a:spcAft>
+              <a:buSzPts val="1600"/>
+              <a:buChar char="●"/>
+            </a:pPr>
+            <a:r>
+              <a:rPr lang="en"/>
+              <a:t>Finding a Path</a:t>
             </a:r>
             <a:endParaRPr/>
           </a:p>
@@ -18302,7 +26712,7 @@
             </a:pPr>
             <a:r>
               <a:rPr lang="en"/>
-              <a:t>Its README: the steps (Pacman0 to Pacman4, and Pacman.Tests), where things are in the code, how to run it</a:t>
+              <a:t>Its README: the steps (Pacman0 to Pacman5, and Pacman.Tests), where things are in the code, how to run it</a:t>
             </a:r>
             <a:endParaRPr/>
           </a:p>

--- a/slides/05 Pac-Man.pptx
+++ b/slides/05 Pac-Man.pptx
@@ -33,8 +33,6 @@
     <p:sldId id="316" r:id="rId39"/>
     <p:sldId id="311" r:id="rId70"/>
     <p:sldId id="320" r:id="rId35"/>
-    <p:sldId id="321" r:id="rId34"/>
-    <p:sldId id="322" r:id="rId33"/>
     <p:sldId id="323" r:id="rId32"/>
     <p:sldId id="324" r:id="rId31"/>
     <p:sldId id="325" r:id="rId29"/>
@@ -1117,6 +1115,17 @@
               <a:t>A: A state changes during the object's life, often chosen by the states themselves. A strategy is chosen from outside, usually once, and strategies don't know about each other.</a:t>
             </a:r>
           </a:p>
+          <a:p/>
+          <a:p>
+            <a:r>
+              <a:t>Q: Why do the chasing ghosts keep the arcade rule, when the shortest path is better?</a:t>
+            </a:r>
+          </a:p>
+          <a:p>
+            <a:r>
+              <a:t>A: Better pathfinding makes a harder game, which isn't the same as a better one. The ghosts' wrong turns give the player room to escape, and with the shortest path all four would end up in the same corridors. Because routing is a strategy, the choice is one argument in World.</a:t>
+            </a:r>
+          </a:p>
         </p:txBody>
       </p:sp>
     </p:spTree>
@@ -2341,7 +2350,7 @@
           <a:lstStyle/>
           <a:p>
             <a:r>
-              <a:t>Today’s main topic is the State pattern, which we use for the ghosts’ modes. Then Strategy for how each ghost picks its target, and how the two patterns differ. Then pathfinding with A*, as a second use of Strategy.</a:t>
+              <a:t>Today’s main topic is the State pattern, which we use for the ghosts’ modes. Then Strategy for how each ghost picks its target, and how the two patterns differ. Then Strategy a second time, for how a ghost finds its way.</a:t>
             </a:r>
           </a:p>
         </p:txBody>
@@ -2533,152 +2542,6 @@
 </p:notes>
 </file>
 
-<file path=ppt/notesSlides/notesSlide33.xml><?xml version="1.0" encoding="utf-8"?>
-<p:notes xmlns:a="http://schemas.openxmlformats.org/drawingml/2006/main" xmlns:p="http://schemas.openxmlformats.org/presentationml/2006/main" xmlns:r="http://schemas.openxmlformats.org/officeDocument/2006/relationships">
-  <p:cSld>
-    <p:spTree>
-      <p:nvGrpSpPr>
-        <p:cNvPr id="1" name=""/>
-        <p:cNvGrpSpPr/>
-        <p:nvPr/>
-      </p:nvGrpSpPr>
-      <p:grpSpPr>
-        <a:xfrm>
-          <a:off x="0" y="0"/>
-          <a:ext cx="0" cy="0"/>
-          <a:chOff x="0" y="0"/>
-          <a:chExt cx="0" cy="0"/>
-        </a:xfrm>
-      </p:grpSpPr>
-      <p:sp>
-        <p:nvSpPr>
-          <p:cNvPr id="2" name="Slide Image Placeholder 1"/>
-          <p:cNvSpPr>
-            <a:spLocks noGrp="1"/>
-          </p:cNvSpPr>
-          <p:nvPr>
-            <p:ph type="sldImg" idx="2"/>
-          </p:nvPr>
-        </p:nvSpPr>
-        <p:spPr/>
-      </p:sp>
-      <p:sp>
-        <p:nvSpPr>
-          <p:cNvPr id="3" name="Notes Placeholder 2"/>
-          <p:cNvSpPr>
-            <a:spLocks noGrp="1"/>
-          </p:cNvSpPr>
-          <p:nvPr>
-            <p:ph type="body" idx="1"/>
-          </p:nvPr>
-        </p:nvSpPr>
-        <p:spPr/>
-        <p:txBody>
-          <a:bodyPr/>
-          <a:lstStyle/>
-          <a:p>
-            <a:r>
-              <a:t>Do it on the board first: 0 on the ghost, 1 on its neighbours, 2 on theirs, never writing on a tile twice.</a:t>
-            </a:r>
-          </a:p>
-          <a:p>
-            <a:r>
-              <a:t>T gets a 5. The outlined tiles are the path, found by walking back from T.</a:t>
-            </a:r>
-          </a:p>
-          <a:p>
-            <a:r>
-              <a:t>Point at the numbers on the left and along the bottom: all of that work led away from the target.</a:t>
-            </a:r>
-          </a:p>
-        </p:txBody>
-      </p:sp>
-    </p:spTree>
-  </p:cSld>
-  <p:clrMapOvr>
-    <a:masterClrMapping/>
-  </p:clrMapOvr>
-</p:notes>
-</file>
-
-<file path=ppt/notesSlides/notesSlide34.xml><?xml version="1.0" encoding="utf-8"?>
-<p:notes xmlns:a="http://schemas.openxmlformats.org/drawingml/2006/main" xmlns:p="http://schemas.openxmlformats.org/presentationml/2006/main" xmlns:r="http://schemas.openxmlformats.org/officeDocument/2006/relationships">
-  <p:cSld>
-    <p:spTree>
-      <p:nvGrpSpPr>
-        <p:cNvPr id="1" name=""/>
-        <p:cNvGrpSpPr/>
-        <p:nvPr/>
-      </p:nvGrpSpPr>
-      <p:grpSpPr>
-        <a:xfrm>
-          <a:off x="0" y="0"/>
-          <a:ext cx="0" cy="0"/>
-          <a:chOff x="0" y="0"/>
-          <a:chExt cx="0" cy="0"/>
-        </a:xfrm>
-      </p:grpSpPr>
-      <p:sp>
-        <p:nvSpPr>
-          <p:cNvPr id="2" name="Slide Image Placeholder 1"/>
-          <p:cNvSpPr>
-            <a:spLocks noGrp="1"/>
-          </p:cNvSpPr>
-          <p:nvPr>
-            <p:ph type="sldImg" idx="2"/>
-          </p:nvPr>
-        </p:nvSpPr>
-        <p:spPr/>
-      </p:sp>
-      <p:sp>
-        <p:nvSpPr>
-          <p:cNvPr id="3" name="Notes Placeholder 2"/>
-          <p:cNvSpPr>
-            <a:spLocks noGrp="1"/>
-          </p:cNvSpPr>
-          <p:nvPr>
-            <p:ph type="body" idx="1"/>
-          </p:nvPr>
-        </p:nvSpPr>
-        <p:spPr/>
-        <p:txBody>
-          <a:bodyPr/>
-          <a:lstStyle/>
-          <a:p>
-            <a:r>
-              <a:t>The same search as before, with one change: a priority queue hands out the most promising tile.</a:t>
-            </a:r>
-          </a:p>
-          <a:p>
-            <a:r>
-              <a:t>The estimate (the heuristic) is the distance with no walls: steps across plus steps up or down.</a:t>
-            </a:r>
-          </a:p>
-          <a:p>
-            <a:r>
-              <a:t>The slide leaves out the loop over the neighbours; open Pathfinder.cs for the whole method.</a:t>
-            </a:r>
-          </a:p>
-          <a:p>
-            <a:r>
-              <a:t>Ask: what goes wrong with the tunnel? Two tiles at its ends are one step apart, so Estimate also counts the way round.</a:t>
-            </a:r>
-          </a:p>
-          <a:p>
-            <a:r>
-              <a:t>With an estimate of 0 everywhere, this is breadth-first search again.</a:t>
-            </a:r>
-          </a:p>
-        </p:txBody>
-      </p:sp>
-    </p:spTree>
-  </p:cSld>
-  <p:clrMapOvr>
-    <a:masterClrMapping/>
-  </p:clrMapOvr>
-</p:notes>
-</file>
-
 <file path=ppt/notesSlides/notesSlide35.xml><?xml version="1.0" encoding="utf-8"?>
 <p:notes xmlns:a="http://schemas.openxmlformats.org/drawingml/2006/main" xmlns:p="http://schemas.openxmlformats.org/presentationml/2006/main" xmlns:r="http://schemas.openxmlformats.org/officeDocument/2006/relationships">
   <p:cSld>
@@ -2734,7 +2597,7 @@
           </a:p>
           <a:p>
             <a:r>
-              <a:t>EatenState always uses ShortestPath, and lost a flag (_enteringHouse) because the search finds the door.</a:t>
+              <a:t>EatenState always uses ShortestPath, and lost a flag (_enteringHouse) because the search finds the door. The search is A*, in Pathfinder.cs. How it works is optional reading; here it is one method behind a strategy.</a:t>
             </a:r>
           </a:p>
         </p:txBody>
@@ -3117,11 +2980,6 @@
           <a:p>
             <a:r>
               <a:t>Fruit and the tunnel: the questions are about where a rule belongs. Discuss answers before code.</a:t>
-            </a:r>
-          </a:p>
-          <a:p>
-            <a:r>
-              <a:t>Breadth-first: the same loop with a plain queue. A test compares the two lengths; a counter shows A* looks at fewer tiles.</a:t>
             </a:r>
           </a:p>
         </p:txBody>
@@ -13908,7 +13766,7 @@
             </a:pPr>
             <a:r>
               <a:rPr lang="en"/>
-              <a:t>Finding a Path</a:t>
+              <a:t>A Second Strategy: Routing</a:t>
             </a:r>
             <a:endParaRPr/>
           </a:p>
@@ -17395,7 +17253,7 @@
                   <a:srgbClr val="DEE2E6"/>
                 </a:solidFill>
               </a:rPr>
-              <a:t>How does a ghost find the shortest way?</a:t>
+              <a:t>Finding the way can be done in more than one way. That makes it a strategy.</a:t>
             </a:r>
           </a:p>
         </p:txBody>
@@ -17409,3853 +17267,6 @@
 </file>
 
 <file path=ppt/slides/slide26.xml><?xml version="1.0" encoding="utf-8"?>
-<p:sld xmlns:a="http://schemas.openxmlformats.org/drawingml/2006/main" xmlns:p="http://schemas.openxmlformats.org/presentationml/2006/main" xmlns:r="http://schemas.openxmlformats.org/officeDocument/2006/relationships">
-  <p:cSld>
-    <p:spTree>
-      <p:nvGrpSpPr>
-        <p:cNvPr id="1" name=""/>
-        <p:cNvGrpSpPr/>
-        <p:nvPr/>
-      </p:nvGrpSpPr>
-      <p:grpSpPr/>
-      <p:sp>
-        <p:nvSpPr>
-          <p:cNvPr id="2" name="Title 1"/>
-          <p:cNvSpPr>
-            <a:spLocks noGrp="1"/>
-          </p:cNvSpPr>
-          <p:nvPr>
-            <p:ph type="title"/>
-          </p:nvPr>
-        </p:nvSpPr>
-        <p:spPr/>
-        <p:txBody>
-          <a:bodyPr/>
-          <a:lstStyle/>
-          <a:p>
-            <a:pPr indent="0" lvl="0" marL="0" rtl="0" algn="l">
-              <a:spcBef>
-                <a:spcPts val="0"/>
-              </a:spcBef>
-              <a:spcAft>
-                <a:spcPts val="0"/>
-              </a:spcAft>
-              <a:buNone/>
-            </a:pPr>
-            <a:r>
-              <a:rPr lang="en"/>
-              <a:t>Breadth-First Search</a:t>
-            </a:r>
-            <a:endParaRPr/>
-          </a:p>
-        </p:txBody>
-      </p:sp>
-      <p:sp>
-        <p:nvSpPr>
-          <p:cNvPr id="3" name="Text Placeholder 2"/>
-          <p:cNvSpPr>
-            <a:spLocks noGrp="1"/>
-          </p:cNvSpPr>
-          <p:nvPr>
-            <p:ph type="body" idx="1"/>
-          </p:nvPr>
-        </p:nvSpPr>
-        <p:spPr>
-          <a:xfrm>
-            <a:off x="311700" y="885950"/>
-            <a:ext cx="8520600" cy="521208"/>
-          </a:xfrm>
-        </p:spPr>
-        <p:txBody>
-          <a:bodyPr/>
-          <a:lstStyle/>
-          <a:p>
-            <a:pPr indent="-330200" lvl="0" marL="457200" rtl="0" algn="l">
-              <a:spcBef>
-                <a:spcPts val="0"/>
-              </a:spcBef>
-              <a:spcAft>
-                <a:spcPts val="0"/>
-              </a:spcAft>
-              <a:buSzPts val="1600"/>
-              <a:buChar char="●"/>
-            </a:pPr>
-            <a:r>
-              <a:rPr lang="en" b="1"/>
-              <a:t>Number the tiles outwards from the ghost, one step at a time.</a:t>
-            </a:r>
-            <a:endParaRPr/>
-          </a:p>
-        </p:txBody>
-      </p:sp>
-      <p:sp>
-        <p:nvSpPr>
-          <p:cNvPr id="4" name="Rectangle 3"/>
-          <p:cNvSpPr/>
-          <p:nvPr/>
-        </p:nvSpPr>
-        <p:spPr>
-          <a:xfrm>
-            <a:off x="1956816" y="1600200"/>
-            <a:ext cx="374904" cy="374904"/>
-          </a:xfrm>
-          <a:prstGeom prst="rect">
-            <a:avLst/>
-          </a:prstGeom>
-          <a:solidFill>
-            <a:srgbClr val="4A525A"/>
-          </a:solidFill>
-          <a:ln>
-            <a:noFill/>
-          </a:ln>
-          <a:effectLst/>
-        </p:spPr>
-        <p:style>
-          <a:lnRef idx="1">
-            <a:schemeClr val="accent1"/>
-          </a:lnRef>
-          <a:fillRef idx="3">
-            <a:schemeClr val="accent1"/>
-          </a:fillRef>
-          <a:effectRef idx="2">
-            <a:schemeClr val="accent1"/>
-          </a:effectRef>
-          <a:fontRef idx="minor">
-            <a:schemeClr val="lt1"/>
-          </a:fontRef>
-        </p:style>
-        <p:txBody>
-          <a:bodyPr rtlCol="0" anchor="ctr" wrap="square" lIns="73152" rIns="73152"/>
-          <a:lstStyle/>
-          <a:p>
-            <a:pPr algn="ctr"/>
-            <a:r>
-              <a:rPr sz="1400" b="1">
-                <a:solidFill>
-                  <a:srgbClr val="9AA3AB"/>
-                </a:solidFill>
-              </a:rPr>
-              <a:t/>
-            </a:r>
-          </a:p>
-        </p:txBody>
-      </p:sp>
-      <p:sp>
-        <p:nvSpPr>
-          <p:cNvPr id="5" name="Rectangle 4"/>
-          <p:cNvSpPr/>
-          <p:nvPr/>
-        </p:nvSpPr>
-        <p:spPr>
-          <a:xfrm>
-            <a:off x="2359152" y="1600200"/>
-            <a:ext cx="374904" cy="374904"/>
-          </a:xfrm>
-          <a:prstGeom prst="rect">
-            <a:avLst/>
-          </a:prstGeom>
-          <a:solidFill>
-            <a:srgbClr val="4A525A"/>
-          </a:solidFill>
-          <a:ln>
-            <a:noFill/>
-          </a:ln>
-          <a:effectLst/>
-        </p:spPr>
-        <p:style>
-          <a:lnRef idx="1">
-            <a:schemeClr val="accent1"/>
-          </a:lnRef>
-          <a:fillRef idx="3">
-            <a:schemeClr val="accent1"/>
-          </a:fillRef>
-          <a:effectRef idx="2">
-            <a:schemeClr val="accent1"/>
-          </a:effectRef>
-          <a:fontRef idx="minor">
-            <a:schemeClr val="lt1"/>
-          </a:fontRef>
-        </p:style>
-        <p:txBody>
-          <a:bodyPr rtlCol="0" anchor="ctr" wrap="square" lIns="73152" rIns="73152"/>
-          <a:lstStyle/>
-          <a:p>
-            <a:pPr algn="ctr"/>
-            <a:r>
-              <a:rPr sz="1400" b="1">
-                <a:solidFill>
-                  <a:srgbClr val="9AA3AB"/>
-                </a:solidFill>
-              </a:rPr>
-              <a:t/>
-            </a:r>
-          </a:p>
-        </p:txBody>
-      </p:sp>
-      <p:sp>
-        <p:nvSpPr>
-          <p:cNvPr id="6" name="Rectangle 5"/>
-          <p:cNvSpPr/>
-          <p:nvPr/>
-        </p:nvSpPr>
-        <p:spPr>
-          <a:xfrm>
-            <a:off x="2761488" y="1600200"/>
-            <a:ext cx="374904" cy="374904"/>
-          </a:xfrm>
-          <a:prstGeom prst="rect">
-            <a:avLst/>
-          </a:prstGeom>
-          <a:solidFill>
-            <a:srgbClr val="4A525A"/>
-          </a:solidFill>
-          <a:ln>
-            <a:noFill/>
-          </a:ln>
-          <a:effectLst/>
-        </p:spPr>
-        <p:style>
-          <a:lnRef idx="1">
-            <a:schemeClr val="accent1"/>
-          </a:lnRef>
-          <a:fillRef idx="3">
-            <a:schemeClr val="accent1"/>
-          </a:fillRef>
-          <a:effectRef idx="2">
-            <a:schemeClr val="accent1"/>
-          </a:effectRef>
-          <a:fontRef idx="minor">
-            <a:schemeClr val="lt1"/>
-          </a:fontRef>
-        </p:style>
-        <p:txBody>
-          <a:bodyPr rtlCol="0" anchor="ctr" wrap="square" lIns="73152" rIns="73152"/>
-          <a:lstStyle/>
-          <a:p>
-            <a:pPr algn="ctr"/>
-            <a:r>
-              <a:rPr sz="1400" b="1">
-                <a:solidFill>
-                  <a:srgbClr val="9AA3AB"/>
-                </a:solidFill>
-              </a:rPr>
-              <a:t/>
-            </a:r>
-          </a:p>
-        </p:txBody>
-      </p:sp>
-      <p:sp>
-        <p:nvSpPr>
-          <p:cNvPr id="7" name="Rectangle 6"/>
-          <p:cNvSpPr/>
-          <p:nvPr/>
-        </p:nvSpPr>
-        <p:spPr>
-          <a:xfrm>
-            <a:off x="3163824" y="1600200"/>
-            <a:ext cx="374904" cy="374904"/>
-          </a:xfrm>
-          <a:prstGeom prst="rect">
-            <a:avLst/>
-          </a:prstGeom>
-          <a:solidFill>
-            <a:srgbClr val="4A525A"/>
-          </a:solidFill>
-          <a:ln>
-            <a:noFill/>
-          </a:ln>
-          <a:effectLst/>
-        </p:spPr>
-        <p:style>
-          <a:lnRef idx="1">
-            <a:schemeClr val="accent1"/>
-          </a:lnRef>
-          <a:fillRef idx="3">
-            <a:schemeClr val="accent1"/>
-          </a:fillRef>
-          <a:effectRef idx="2">
-            <a:schemeClr val="accent1"/>
-          </a:effectRef>
-          <a:fontRef idx="minor">
-            <a:schemeClr val="lt1"/>
-          </a:fontRef>
-        </p:style>
-        <p:txBody>
-          <a:bodyPr rtlCol="0" anchor="ctr" wrap="square" lIns="73152" rIns="73152"/>
-          <a:lstStyle/>
-          <a:p>
-            <a:pPr algn="ctr"/>
-            <a:r>
-              <a:rPr sz="1400" b="1">
-                <a:solidFill>
-                  <a:srgbClr val="9AA3AB"/>
-                </a:solidFill>
-              </a:rPr>
-              <a:t/>
-            </a:r>
-          </a:p>
-        </p:txBody>
-      </p:sp>
-      <p:sp>
-        <p:nvSpPr>
-          <p:cNvPr id="8" name="Rectangle 7"/>
-          <p:cNvSpPr/>
-          <p:nvPr/>
-        </p:nvSpPr>
-        <p:spPr>
-          <a:xfrm>
-            <a:off x="3566160" y="1600200"/>
-            <a:ext cx="374904" cy="374904"/>
-          </a:xfrm>
-          <a:prstGeom prst="rect">
-            <a:avLst/>
-          </a:prstGeom>
-          <a:solidFill>
-            <a:srgbClr val="4A525A"/>
-          </a:solidFill>
-          <a:ln>
-            <a:noFill/>
-          </a:ln>
-          <a:effectLst/>
-        </p:spPr>
-        <p:style>
-          <a:lnRef idx="1">
-            <a:schemeClr val="accent1"/>
-          </a:lnRef>
-          <a:fillRef idx="3">
-            <a:schemeClr val="accent1"/>
-          </a:fillRef>
-          <a:effectRef idx="2">
-            <a:schemeClr val="accent1"/>
-          </a:effectRef>
-          <a:fontRef idx="minor">
-            <a:schemeClr val="lt1"/>
-          </a:fontRef>
-        </p:style>
-        <p:txBody>
-          <a:bodyPr rtlCol="0" anchor="ctr" wrap="square" lIns="73152" rIns="73152"/>
-          <a:lstStyle/>
-          <a:p>
-            <a:pPr algn="ctr"/>
-            <a:r>
-              <a:rPr sz="1400" b="1">
-                <a:solidFill>
-                  <a:srgbClr val="9AA3AB"/>
-                </a:solidFill>
-              </a:rPr>
-              <a:t/>
-            </a:r>
-          </a:p>
-        </p:txBody>
-      </p:sp>
-      <p:sp>
-        <p:nvSpPr>
-          <p:cNvPr id="9" name="Rectangle 8"/>
-          <p:cNvSpPr/>
-          <p:nvPr/>
-        </p:nvSpPr>
-        <p:spPr>
-          <a:xfrm>
-            <a:off x="3968496" y="1600200"/>
-            <a:ext cx="374904" cy="374904"/>
-          </a:xfrm>
-          <a:prstGeom prst="rect">
-            <a:avLst/>
-          </a:prstGeom>
-          <a:solidFill>
-            <a:srgbClr val="4A525A"/>
-          </a:solidFill>
-          <a:ln>
-            <a:noFill/>
-          </a:ln>
-          <a:effectLst/>
-        </p:spPr>
-        <p:style>
-          <a:lnRef idx="1">
-            <a:schemeClr val="accent1"/>
-          </a:lnRef>
-          <a:fillRef idx="3">
-            <a:schemeClr val="accent1"/>
-          </a:fillRef>
-          <a:effectRef idx="2">
-            <a:schemeClr val="accent1"/>
-          </a:effectRef>
-          <a:fontRef idx="minor">
-            <a:schemeClr val="lt1"/>
-          </a:fontRef>
-        </p:style>
-        <p:txBody>
-          <a:bodyPr rtlCol="0" anchor="ctr" wrap="square" lIns="73152" rIns="73152"/>
-          <a:lstStyle/>
-          <a:p>
-            <a:pPr algn="ctr"/>
-            <a:r>
-              <a:rPr sz="1400" b="1">
-                <a:solidFill>
-                  <a:srgbClr val="9AA3AB"/>
-                </a:solidFill>
-              </a:rPr>
-              <a:t/>
-            </a:r>
-          </a:p>
-        </p:txBody>
-      </p:sp>
-      <p:sp>
-        <p:nvSpPr>
-          <p:cNvPr id="10" name="Rectangle 9"/>
-          <p:cNvSpPr/>
-          <p:nvPr/>
-        </p:nvSpPr>
-        <p:spPr>
-          <a:xfrm>
-            <a:off x="4370832" y="1600200"/>
-            <a:ext cx="374904" cy="374904"/>
-          </a:xfrm>
-          <a:prstGeom prst="rect">
-            <a:avLst/>
-          </a:prstGeom>
-          <a:solidFill>
-            <a:srgbClr val="4A525A"/>
-          </a:solidFill>
-          <a:ln>
-            <a:noFill/>
-          </a:ln>
-          <a:effectLst/>
-        </p:spPr>
-        <p:style>
-          <a:lnRef idx="1">
-            <a:schemeClr val="accent1"/>
-          </a:lnRef>
-          <a:fillRef idx="3">
-            <a:schemeClr val="accent1"/>
-          </a:fillRef>
-          <a:effectRef idx="2">
-            <a:schemeClr val="accent1"/>
-          </a:effectRef>
-          <a:fontRef idx="minor">
-            <a:schemeClr val="lt1"/>
-          </a:fontRef>
-        </p:style>
-        <p:txBody>
-          <a:bodyPr rtlCol="0" anchor="ctr" wrap="square" lIns="73152" rIns="73152"/>
-          <a:lstStyle/>
-          <a:p>
-            <a:pPr algn="ctr"/>
-            <a:r>
-              <a:rPr sz="1400" b="1">
-                <a:solidFill>
-                  <a:srgbClr val="9AA3AB"/>
-                </a:solidFill>
-              </a:rPr>
-              <a:t/>
-            </a:r>
-          </a:p>
-        </p:txBody>
-      </p:sp>
-      <p:sp>
-        <p:nvSpPr>
-          <p:cNvPr id="11" name="Rectangle 10"/>
-          <p:cNvSpPr/>
-          <p:nvPr/>
-        </p:nvSpPr>
-        <p:spPr>
-          <a:xfrm>
-            <a:off x="4773168" y="1600200"/>
-            <a:ext cx="374904" cy="374904"/>
-          </a:xfrm>
-          <a:prstGeom prst="rect">
-            <a:avLst/>
-          </a:prstGeom>
-          <a:solidFill>
-            <a:srgbClr val="4A525A"/>
-          </a:solidFill>
-          <a:ln>
-            <a:noFill/>
-          </a:ln>
-          <a:effectLst/>
-        </p:spPr>
-        <p:style>
-          <a:lnRef idx="1">
-            <a:schemeClr val="accent1"/>
-          </a:lnRef>
-          <a:fillRef idx="3">
-            <a:schemeClr val="accent1"/>
-          </a:fillRef>
-          <a:effectRef idx="2">
-            <a:schemeClr val="accent1"/>
-          </a:effectRef>
-          <a:fontRef idx="minor">
-            <a:schemeClr val="lt1"/>
-          </a:fontRef>
-        </p:style>
-        <p:txBody>
-          <a:bodyPr rtlCol="0" anchor="ctr" wrap="square" lIns="73152" rIns="73152"/>
-          <a:lstStyle/>
-          <a:p>
-            <a:pPr algn="ctr"/>
-            <a:r>
-              <a:rPr sz="1400" b="1">
-                <a:solidFill>
-                  <a:srgbClr val="9AA3AB"/>
-                </a:solidFill>
-              </a:rPr>
-              <a:t/>
-            </a:r>
-          </a:p>
-        </p:txBody>
-      </p:sp>
-      <p:sp>
-        <p:nvSpPr>
-          <p:cNvPr id="12" name="Rectangle 11"/>
-          <p:cNvSpPr/>
-          <p:nvPr/>
-        </p:nvSpPr>
-        <p:spPr>
-          <a:xfrm>
-            <a:off x="5175504" y="1600200"/>
-            <a:ext cx="374904" cy="374904"/>
-          </a:xfrm>
-          <a:prstGeom prst="rect">
-            <a:avLst/>
-          </a:prstGeom>
-          <a:solidFill>
-            <a:srgbClr val="4A525A"/>
-          </a:solidFill>
-          <a:ln>
-            <a:noFill/>
-          </a:ln>
-          <a:effectLst/>
-        </p:spPr>
-        <p:style>
-          <a:lnRef idx="1">
-            <a:schemeClr val="accent1"/>
-          </a:lnRef>
-          <a:fillRef idx="3">
-            <a:schemeClr val="accent1"/>
-          </a:fillRef>
-          <a:effectRef idx="2">
-            <a:schemeClr val="accent1"/>
-          </a:effectRef>
-          <a:fontRef idx="minor">
-            <a:schemeClr val="lt1"/>
-          </a:fontRef>
-        </p:style>
-        <p:txBody>
-          <a:bodyPr rtlCol="0" anchor="ctr" wrap="square" lIns="73152" rIns="73152"/>
-          <a:lstStyle/>
-          <a:p>
-            <a:pPr algn="ctr"/>
-            <a:r>
-              <a:rPr sz="1400" b="1">
-                <a:solidFill>
-                  <a:srgbClr val="9AA3AB"/>
-                </a:solidFill>
-              </a:rPr>
-              <a:t/>
-            </a:r>
-          </a:p>
-        </p:txBody>
-      </p:sp>
-      <p:sp>
-        <p:nvSpPr>
-          <p:cNvPr id="13" name="Rectangle 12"/>
-          <p:cNvSpPr/>
-          <p:nvPr/>
-        </p:nvSpPr>
-        <p:spPr>
-          <a:xfrm>
-            <a:off x="5577840" y="1600200"/>
-            <a:ext cx="374904" cy="374904"/>
-          </a:xfrm>
-          <a:prstGeom prst="rect">
-            <a:avLst/>
-          </a:prstGeom>
-          <a:solidFill>
-            <a:srgbClr val="4A525A"/>
-          </a:solidFill>
-          <a:ln>
-            <a:noFill/>
-          </a:ln>
-          <a:effectLst/>
-        </p:spPr>
-        <p:style>
-          <a:lnRef idx="1">
-            <a:schemeClr val="accent1"/>
-          </a:lnRef>
-          <a:fillRef idx="3">
-            <a:schemeClr val="accent1"/>
-          </a:fillRef>
-          <a:effectRef idx="2">
-            <a:schemeClr val="accent1"/>
-          </a:effectRef>
-          <a:fontRef idx="minor">
-            <a:schemeClr val="lt1"/>
-          </a:fontRef>
-        </p:style>
-        <p:txBody>
-          <a:bodyPr rtlCol="0" anchor="ctr" wrap="square" lIns="73152" rIns="73152"/>
-          <a:lstStyle/>
-          <a:p>
-            <a:pPr algn="ctr"/>
-            <a:r>
-              <a:rPr sz="1400" b="1">
-                <a:solidFill>
-                  <a:srgbClr val="9AA3AB"/>
-                </a:solidFill>
-              </a:rPr>
-              <a:t/>
-            </a:r>
-          </a:p>
-        </p:txBody>
-      </p:sp>
-      <p:sp>
-        <p:nvSpPr>
-          <p:cNvPr id="14" name="Rectangle 13"/>
-          <p:cNvSpPr/>
-          <p:nvPr/>
-        </p:nvSpPr>
-        <p:spPr>
-          <a:xfrm>
-            <a:off x="5980176" y="1600200"/>
-            <a:ext cx="374904" cy="374904"/>
-          </a:xfrm>
-          <a:prstGeom prst="rect">
-            <a:avLst/>
-          </a:prstGeom>
-          <a:solidFill>
-            <a:srgbClr val="4A525A"/>
-          </a:solidFill>
-          <a:ln>
-            <a:noFill/>
-          </a:ln>
-          <a:effectLst/>
-        </p:spPr>
-        <p:style>
-          <a:lnRef idx="1">
-            <a:schemeClr val="accent1"/>
-          </a:lnRef>
-          <a:fillRef idx="3">
-            <a:schemeClr val="accent1"/>
-          </a:fillRef>
-          <a:effectRef idx="2">
-            <a:schemeClr val="accent1"/>
-          </a:effectRef>
-          <a:fontRef idx="minor">
-            <a:schemeClr val="lt1"/>
-          </a:fontRef>
-        </p:style>
-        <p:txBody>
-          <a:bodyPr rtlCol="0" anchor="ctr" wrap="square" lIns="73152" rIns="73152"/>
-          <a:lstStyle/>
-          <a:p>
-            <a:pPr algn="ctr"/>
-            <a:r>
-              <a:rPr sz="1400" b="1">
-                <a:solidFill>
-                  <a:srgbClr val="9AA3AB"/>
-                </a:solidFill>
-              </a:rPr>
-              <a:t/>
-            </a:r>
-          </a:p>
-        </p:txBody>
-      </p:sp>
-      <p:sp>
-        <p:nvSpPr>
-          <p:cNvPr id="15" name="Rectangle 14"/>
-          <p:cNvSpPr/>
-          <p:nvPr/>
-        </p:nvSpPr>
-        <p:spPr>
-          <a:xfrm>
-            <a:off x="6382512" y="1600200"/>
-            <a:ext cx="374904" cy="374904"/>
-          </a:xfrm>
-          <a:prstGeom prst="rect">
-            <a:avLst/>
-          </a:prstGeom>
-          <a:solidFill>
-            <a:srgbClr val="4A525A"/>
-          </a:solidFill>
-          <a:ln>
-            <a:noFill/>
-          </a:ln>
-          <a:effectLst/>
-        </p:spPr>
-        <p:style>
-          <a:lnRef idx="1">
-            <a:schemeClr val="accent1"/>
-          </a:lnRef>
-          <a:fillRef idx="3">
-            <a:schemeClr val="accent1"/>
-          </a:fillRef>
-          <a:effectRef idx="2">
-            <a:schemeClr val="accent1"/>
-          </a:effectRef>
-          <a:fontRef idx="minor">
-            <a:schemeClr val="lt1"/>
-          </a:fontRef>
-        </p:style>
-        <p:txBody>
-          <a:bodyPr rtlCol="0" anchor="ctr" wrap="square" lIns="73152" rIns="73152"/>
-          <a:lstStyle/>
-          <a:p>
-            <a:pPr algn="ctr"/>
-            <a:r>
-              <a:rPr sz="1400" b="1">
-                <a:solidFill>
-                  <a:srgbClr val="9AA3AB"/>
-                </a:solidFill>
-              </a:rPr>
-              <a:t/>
-            </a:r>
-          </a:p>
-        </p:txBody>
-      </p:sp>
-      <p:sp>
-        <p:nvSpPr>
-          <p:cNvPr id="16" name="Rectangle 15"/>
-          <p:cNvSpPr/>
-          <p:nvPr/>
-        </p:nvSpPr>
-        <p:spPr>
-          <a:xfrm>
-            <a:off x="6784848" y="1600200"/>
-            <a:ext cx="374904" cy="374904"/>
-          </a:xfrm>
-          <a:prstGeom prst="rect">
-            <a:avLst/>
-          </a:prstGeom>
-          <a:solidFill>
-            <a:srgbClr val="4A525A"/>
-          </a:solidFill>
-          <a:ln>
-            <a:noFill/>
-          </a:ln>
-          <a:effectLst/>
-        </p:spPr>
-        <p:style>
-          <a:lnRef idx="1">
-            <a:schemeClr val="accent1"/>
-          </a:lnRef>
-          <a:fillRef idx="3">
-            <a:schemeClr val="accent1"/>
-          </a:fillRef>
-          <a:effectRef idx="2">
-            <a:schemeClr val="accent1"/>
-          </a:effectRef>
-          <a:fontRef idx="minor">
-            <a:schemeClr val="lt1"/>
-          </a:fontRef>
-        </p:style>
-        <p:txBody>
-          <a:bodyPr rtlCol="0" anchor="ctr" wrap="square" lIns="73152" rIns="73152"/>
-          <a:lstStyle/>
-          <a:p>
-            <a:pPr algn="ctr"/>
-            <a:r>
-              <a:rPr sz="1400" b="1">
-                <a:solidFill>
-                  <a:srgbClr val="9AA3AB"/>
-                </a:solidFill>
-              </a:rPr>
-              <a:t/>
-            </a:r>
-          </a:p>
-        </p:txBody>
-      </p:sp>
-      <p:sp>
-        <p:nvSpPr>
-          <p:cNvPr id="17" name="Rectangle 16"/>
-          <p:cNvSpPr/>
-          <p:nvPr/>
-        </p:nvSpPr>
-        <p:spPr>
-          <a:xfrm>
-            <a:off x="1956816" y="2002536"/>
-            <a:ext cx="374904" cy="374904"/>
-          </a:xfrm>
-          <a:prstGeom prst="rect">
-            <a:avLst/>
-          </a:prstGeom>
-          <a:solidFill>
-            <a:srgbClr val="4A525A"/>
-          </a:solidFill>
-          <a:ln>
-            <a:noFill/>
-          </a:ln>
-          <a:effectLst/>
-        </p:spPr>
-        <p:style>
-          <a:lnRef idx="1">
-            <a:schemeClr val="accent1"/>
-          </a:lnRef>
-          <a:fillRef idx="3">
-            <a:schemeClr val="accent1"/>
-          </a:fillRef>
-          <a:effectRef idx="2">
-            <a:schemeClr val="accent1"/>
-          </a:effectRef>
-          <a:fontRef idx="minor">
-            <a:schemeClr val="lt1"/>
-          </a:fontRef>
-        </p:style>
-        <p:txBody>
-          <a:bodyPr rtlCol="0" anchor="ctr" wrap="square" lIns="73152" rIns="73152"/>
-          <a:lstStyle/>
-          <a:p>
-            <a:pPr algn="ctr"/>
-            <a:r>
-              <a:rPr sz="1400" b="1">
-                <a:solidFill>
-                  <a:srgbClr val="9AA3AB"/>
-                </a:solidFill>
-              </a:rPr>
-              <a:t/>
-            </a:r>
-          </a:p>
-        </p:txBody>
-      </p:sp>
-      <p:sp>
-        <p:nvSpPr>
-          <p:cNvPr id="18" name="Rectangle 17"/>
-          <p:cNvSpPr/>
-          <p:nvPr/>
-        </p:nvSpPr>
-        <p:spPr>
-          <a:xfrm>
-            <a:off x="2359152" y="2002536"/>
-            <a:ext cx="374904" cy="374904"/>
-          </a:xfrm>
-          <a:prstGeom prst="rect">
-            <a:avLst/>
-          </a:prstGeom>
-          <a:solidFill>
-            <a:srgbClr val="17191C"/>
-          </a:solidFill>
-          <a:ln>
-            <a:noFill/>
-          </a:ln>
-          <a:effectLst/>
-        </p:spPr>
-        <p:style>
-          <a:lnRef idx="1">
-            <a:schemeClr val="accent1"/>
-          </a:lnRef>
-          <a:fillRef idx="3">
-            <a:schemeClr val="accent1"/>
-          </a:fillRef>
-          <a:effectRef idx="2">
-            <a:schemeClr val="accent1"/>
-          </a:effectRef>
-          <a:fontRef idx="minor">
-            <a:schemeClr val="lt1"/>
-          </a:fontRef>
-        </p:style>
-        <p:txBody>
-          <a:bodyPr rtlCol="0" anchor="ctr" wrap="square" lIns="73152" rIns="73152"/>
-          <a:lstStyle/>
-          <a:p>
-            <a:pPr algn="ctr"/>
-            <a:r>
-              <a:rPr sz="1400" b="1">
-                <a:solidFill>
-                  <a:srgbClr val="DEE2E6"/>
-                </a:solidFill>
-              </a:rPr>
-              <a:t>5</a:t>
-            </a:r>
-          </a:p>
-        </p:txBody>
-      </p:sp>
-      <p:sp>
-        <p:nvSpPr>
-          <p:cNvPr id="19" name="Rectangle 18"/>
-          <p:cNvSpPr/>
-          <p:nvPr/>
-        </p:nvSpPr>
-        <p:spPr>
-          <a:xfrm>
-            <a:off x="2761488" y="2002536"/>
-            <a:ext cx="374904" cy="374904"/>
-          </a:xfrm>
-          <a:prstGeom prst="rect">
-            <a:avLst/>
-          </a:prstGeom>
-          <a:solidFill>
-            <a:srgbClr val="17191C"/>
-          </a:solidFill>
-          <a:ln>
-            <a:noFill/>
-          </a:ln>
-          <a:effectLst/>
-        </p:spPr>
-        <p:style>
-          <a:lnRef idx="1">
-            <a:schemeClr val="accent1"/>
-          </a:lnRef>
-          <a:fillRef idx="3">
-            <a:schemeClr val="accent1"/>
-          </a:fillRef>
-          <a:effectRef idx="2">
-            <a:schemeClr val="accent1"/>
-          </a:effectRef>
-          <a:fontRef idx="minor">
-            <a:schemeClr val="lt1"/>
-          </a:fontRef>
-        </p:style>
-        <p:txBody>
-          <a:bodyPr rtlCol="0" anchor="ctr" wrap="square" lIns="73152" rIns="73152"/>
-          <a:lstStyle/>
-          <a:p>
-            <a:pPr algn="ctr"/>
-            <a:r>
-              <a:rPr sz="1400" b="1">
-                <a:solidFill>
-                  <a:srgbClr val="9AA3AB"/>
-                </a:solidFill>
-              </a:rPr>
-              <a:t/>
-            </a:r>
-          </a:p>
-        </p:txBody>
-      </p:sp>
-      <p:sp>
-        <p:nvSpPr>
-          <p:cNvPr id="20" name="Rectangle 19"/>
-          <p:cNvSpPr/>
-          <p:nvPr/>
-        </p:nvSpPr>
-        <p:spPr>
-          <a:xfrm>
-            <a:off x="3163824" y="2002536"/>
-            <a:ext cx="374904" cy="374904"/>
-          </a:xfrm>
-          <a:prstGeom prst="rect">
-            <a:avLst/>
-          </a:prstGeom>
-          <a:solidFill>
-            <a:srgbClr val="1E9BA5"/>
-          </a:solidFill>
-          <a:ln>
-            <a:noFill/>
-          </a:ln>
-          <a:effectLst/>
-        </p:spPr>
-        <p:style>
-          <a:lnRef idx="1">
-            <a:schemeClr val="accent1"/>
-          </a:lnRef>
-          <a:fillRef idx="3">
-            <a:schemeClr val="accent1"/>
-          </a:fillRef>
-          <a:effectRef idx="2">
-            <a:schemeClr val="accent1"/>
-          </a:effectRef>
-          <a:fontRef idx="minor">
-            <a:schemeClr val="lt1"/>
-          </a:fontRef>
-        </p:style>
-        <p:txBody>
-          <a:bodyPr rtlCol="0" anchor="ctr" wrap="square" lIns="73152" rIns="73152"/>
-          <a:lstStyle/>
-          <a:p>
-            <a:pPr algn="ctr"/>
-            <a:r>
-              <a:rPr sz="1400" b="1">
-                <a:solidFill>
-                  <a:srgbClr val="DEE2E6"/>
-                </a:solidFill>
-              </a:rPr>
-              <a:t>T</a:t>
-            </a:r>
-          </a:p>
-        </p:txBody>
-      </p:sp>
-      <p:sp>
-        <p:nvSpPr>
-          <p:cNvPr id="21" name="Rectangle 20"/>
-          <p:cNvSpPr/>
-          <p:nvPr/>
-        </p:nvSpPr>
-        <p:spPr>
-          <a:xfrm>
-            <a:off x="3566160" y="2002536"/>
-            <a:ext cx="374904" cy="374904"/>
-          </a:xfrm>
-          <a:prstGeom prst="rect">
-            <a:avLst/>
-          </a:prstGeom>
-          <a:solidFill>
-            <a:srgbClr val="17191C"/>
-          </a:solidFill>
-          <a:ln w="25400">
-            <a:solidFill>
-              <a:srgbClr val="D45D35"/>
-            </a:solidFill>
-          </a:ln>
-          <a:effectLst/>
-        </p:spPr>
-        <p:style>
-          <a:lnRef idx="1">
-            <a:schemeClr val="accent1"/>
-          </a:lnRef>
-          <a:fillRef idx="3">
-            <a:schemeClr val="accent1"/>
-          </a:fillRef>
-          <a:effectRef idx="2">
-            <a:schemeClr val="accent1"/>
-          </a:effectRef>
-          <a:fontRef idx="minor">
-            <a:schemeClr val="lt1"/>
-          </a:fontRef>
-        </p:style>
-        <p:txBody>
-          <a:bodyPr rtlCol="0" anchor="ctr" wrap="square" lIns="73152" rIns="73152"/>
-          <a:lstStyle/>
-          <a:p>
-            <a:pPr algn="ctr"/>
-            <a:r>
-              <a:rPr sz="1400" b="1">
-                <a:solidFill>
-                  <a:srgbClr val="DEE2E6"/>
-                </a:solidFill>
-              </a:rPr>
-              <a:t>4</a:t>
-            </a:r>
-          </a:p>
-        </p:txBody>
-      </p:sp>
-      <p:sp>
-        <p:nvSpPr>
-          <p:cNvPr id="22" name="Rectangle 21"/>
-          <p:cNvSpPr/>
-          <p:nvPr/>
-        </p:nvSpPr>
-        <p:spPr>
-          <a:xfrm>
-            <a:off x="3968496" y="2002536"/>
-            <a:ext cx="374904" cy="374904"/>
-          </a:xfrm>
-          <a:prstGeom prst="rect">
-            <a:avLst/>
-          </a:prstGeom>
-          <a:solidFill>
-            <a:srgbClr val="17191C"/>
-          </a:solidFill>
-          <a:ln w="25400">
-            <a:solidFill>
-              <a:srgbClr val="D45D35"/>
-            </a:solidFill>
-          </a:ln>
-          <a:effectLst/>
-        </p:spPr>
-        <p:style>
-          <a:lnRef idx="1">
-            <a:schemeClr val="accent1"/>
-          </a:lnRef>
-          <a:fillRef idx="3">
-            <a:schemeClr val="accent1"/>
-          </a:fillRef>
-          <a:effectRef idx="2">
-            <a:schemeClr val="accent1"/>
-          </a:effectRef>
-          <a:fontRef idx="minor">
-            <a:schemeClr val="lt1"/>
-          </a:fontRef>
-        </p:style>
-        <p:txBody>
-          <a:bodyPr rtlCol="0" anchor="ctr" wrap="square" lIns="73152" rIns="73152"/>
-          <a:lstStyle/>
-          <a:p>
-            <a:pPr algn="ctr"/>
-            <a:r>
-              <a:rPr sz="1400" b="1">
-                <a:solidFill>
-                  <a:srgbClr val="DEE2E6"/>
-                </a:solidFill>
-              </a:rPr>
-              <a:t>3</a:t>
-            </a:r>
-          </a:p>
-        </p:txBody>
-      </p:sp>
-      <p:sp>
-        <p:nvSpPr>
-          <p:cNvPr id="23" name="Rectangle 22"/>
-          <p:cNvSpPr/>
-          <p:nvPr/>
-        </p:nvSpPr>
-        <p:spPr>
-          <a:xfrm>
-            <a:off x="4370832" y="2002536"/>
-            <a:ext cx="374904" cy="374904"/>
-          </a:xfrm>
-          <a:prstGeom prst="rect">
-            <a:avLst/>
-          </a:prstGeom>
-          <a:solidFill>
-            <a:srgbClr val="17191C"/>
-          </a:solidFill>
-          <a:ln>
-            <a:noFill/>
-          </a:ln>
-          <a:effectLst/>
-        </p:spPr>
-        <p:style>
-          <a:lnRef idx="1">
-            <a:schemeClr val="accent1"/>
-          </a:lnRef>
-          <a:fillRef idx="3">
-            <a:schemeClr val="accent1"/>
-          </a:fillRef>
-          <a:effectRef idx="2">
-            <a:schemeClr val="accent1"/>
-          </a:effectRef>
-          <a:fontRef idx="minor">
-            <a:schemeClr val="lt1"/>
-          </a:fontRef>
-        </p:style>
-        <p:txBody>
-          <a:bodyPr rtlCol="0" anchor="ctr" wrap="square" lIns="73152" rIns="73152"/>
-          <a:lstStyle/>
-          <a:p>
-            <a:pPr algn="ctr"/>
-            <a:r>
-              <a:rPr sz="1400" b="1">
-                <a:solidFill>
-                  <a:srgbClr val="DEE2E6"/>
-                </a:solidFill>
-              </a:rPr>
-              <a:t>4</a:t>
-            </a:r>
-          </a:p>
-        </p:txBody>
-      </p:sp>
-      <p:sp>
-        <p:nvSpPr>
-          <p:cNvPr id="24" name="Rectangle 23"/>
-          <p:cNvSpPr/>
-          <p:nvPr/>
-        </p:nvSpPr>
-        <p:spPr>
-          <a:xfrm>
-            <a:off x="4773168" y="2002536"/>
-            <a:ext cx="374904" cy="374904"/>
-          </a:xfrm>
-          <a:prstGeom prst="rect">
-            <a:avLst/>
-          </a:prstGeom>
-          <a:solidFill>
-            <a:srgbClr val="17191C"/>
-          </a:solidFill>
-          <a:ln>
-            <a:noFill/>
-          </a:ln>
-          <a:effectLst/>
-        </p:spPr>
-        <p:style>
-          <a:lnRef idx="1">
-            <a:schemeClr val="accent1"/>
-          </a:lnRef>
-          <a:fillRef idx="3">
-            <a:schemeClr val="accent1"/>
-          </a:fillRef>
-          <a:effectRef idx="2">
-            <a:schemeClr val="accent1"/>
-          </a:effectRef>
-          <a:fontRef idx="minor">
-            <a:schemeClr val="lt1"/>
-          </a:fontRef>
-        </p:style>
-        <p:txBody>
-          <a:bodyPr rtlCol="0" anchor="ctr" wrap="square" lIns="73152" rIns="73152"/>
-          <a:lstStyle/>
-          <a:p>
-            <a:pPr algn="ctr"/>
-            <a:r>
-              <a:rPr sz="1400" b="1">
-                <a:solidFill>
-                  <a:srgbClr val="DEE2E6"/>
-                </a:solidFill>
-              </a:rPr>
-              <a:t>5</a:t>
-            </a:r>
-          </a:p>
-        </p:txBody>
-      </p:sp>
-      <p:sp>
-        <p:nvSpPr>
-          <p:cNvPr id="25" name="Rectangle 24"/>
-          <p:cNvSpPr/>
-          <p:nvPr/>
-        </p:nvSpPr>
-        <p:spPr>
-          <a:xfrm>
-            <a:off x="5175504" y="2002536"/>
-            <a:ext cx="374904" cy="374904"/>
-          </a:xfrm>
-          <a:prstGeom prst="rect">
-            <a:avLst/>
-          </a:prstGeom>
-          <a:solidFill>
-            <a:srgbClr val="17191C"/>
-          </a:solidFill>
-          <a:ln>
-            <a:noFill/>
-          </a:ln>
-          <a:effectLst/>
-        </p:spPr>
-        <p:style>
-          <a:lnRef idx="1">
-            <a:schemeClr val="accent1"/>
-          </a:lnRef>
-          <a:fillRef idx="3">
-            <a:schemeClr val="accent1"/>
-          </a:fillRef>
-          <a:effectRef idx="2">
-            <a:schemeClr val="accent1"/>
-          </a:effectRef>
-          <a:fontRef idx="minor">
-            <a:schemeClr val="lt1"/>
-          </a:fontRef>
-        </p:style>
-        <p:txBody>
-          <a:bodyPr rtlCol="0" anchor="ctr" wrap="square" lIns="73152" rIns="73152"/>
-          <a:lstStyle/>
-          <a:p>
-            <a:pPr algn="ctr"/>
-            <a:r>
-              <a:rPr sz="1400" b="1">
-                <a:solidFill>
-                  <a:srgbClr val="9AA3AB"/>
-                </a:solidFill>
-              </a:rPr>
-              <a:t/>
-            </a:r>
-          </a:p>
-        </p:txBody>
-      </p:sp>
-      <p:sp>
-        <p:nvSpPr>
-          <p:cNvPr id="26" name="Rectangle 25"/>
-          <p:cNvSpPr/>
-          <p:nvPr/>
-        </p:nvSpPr>
-        <p:spPr>
-          <a:xfrm>
-            <a:off x="5577840" y="2002536"/>
-            <a:ext cx="374904" cy="374904"/>
-          </a:xfrm>
-          <a:prstGeom prst="rect">
-            <a:avLst/>
-          </a:prstGeom>
-          <a:solidFill>
-            <a:srgbClr val="17191C"/>
-          </a:solidFill>
-          <a:ln>
-            <a:noFill/>
-          </a:ln>
-          <a:effectLst/>
-        </p:spPr>
-        <p:style>
-          <a:lnRef idx="1">
-            <a:schemeClr val="accent1"/>
-          </a:lnRef>
-          <a:fillRef idx="3">
-            <a:schemeClr val="accent1"/>
-          </a:fillRef>
-          <a:effectRef idx="2">
-            <a:schemeClr val="accent1"/>
-          </a:effectRef>
-          <a:fontRef idx="minor">
-            <a:schemeClr val="lt1"/>
-          </a:fontRef>
-        </p:style>
-        <p:txBody>
-          <a:bodyPr rtlCol="0" anchor="ctr" wrap="square" lIns="73152" rIns="73152"/>
-          <a:lstStyle/>
-          <a:p>
-            <a:pPr algn="ctr"/>
-            <a:r>
-              <a:rPr sz="1400" b="1">
-                <a:solidFill>
-                  <a:srgbClr val="9AA3AB"/>
-                </a:solidFill>
-              </a:rPr>
-              <a:t/>
-            </a:r>
-          </a:p>
-        </p:txBody>
-      </p:sp>
-      <p:sp>
-        <p:nvSpPr>
-          <p:cNvPr id="27" name="Rectangle 26"/>
-          <p:cNvSpPr/>
-          <p:nvPr/>
-        </p:nvSpPr>
-        <p:spPr>
-          <a:xfrm>
-            <a:off x="5980176" y="2002536"/>
-            <a:ext cx="374904" cy="374904"/>
-          </a:xfrm>
-          <a:prstGeom prst="rect">
-            <a:avLst/>
-          </a:prstGeom>
-          <a:solidFill>
-            <a:srgbClr val="17191C"/>
-          </a:solidFill>
-          <a:ln>
-            <a:noFill/>
-          </a:ln>
-          <a:effectLst/>
-        </p:spPr>
-        <p:style>
-          <a:lnRef idx="1">
-            <a:schemeClr val="accent1"/>
-          </a:lnRef>
-          <a:fillRef idx="3">
-            <a:schemeClr val="accent1"/>
-          </a:fillRef>
-          <a:effectRef idx="2">
-            <a:schemeClr val="accent1"/>
-          </a:effectRef>
-          <a:fontRef idx="minor">
-            <a:schemeClr val="lt1"/>
-          </a:fontRef>
-        </p:style>
-        <p:txBody>
-          <a:bodyPr rtlCol="0" anchor="ctr" wrap="square" lIns="73152" rIns="73152"/>
-          <a:lstStyle/>
-          <a:p>
-            <a:pPr algn="ctr"/>
-            <a:r>
-              <a:rPr sz="1400" b="1">
-                <a:solidFill>
-                  <a:srgbClr val="9AA3AB"/>
-                </a:solidFill>
-              </a:rPr>
-              <a:t/>
-            </a:r>
-          </a:p>
-        </p:txBody>
-      </p:sp>
-      <p:sp>
-        <p:nvSpPr>
-          <p:cNvPr id="28" name="Rectangle 27"/>
-          <p:cNvSpPr/>
-          <p:nvPr/>
-        </p:nvSpPr>
-        <p:spPr>
-          <a:xfrm>
-            <a:off x="6382512" y="2002536"/>
-            <a:ext cx="374904" cy="374904"/>
-          </a:xfrm>
-          <a:prstGeom prst="rect">
-            <a:avLst/>
-          </a:prstGeom>
-          <a:solidFill>
-            <a:srgbClr val="17191C"/>
-          </a:solidFill>
-          <a:ln>
-            <a:noFill/>
-          </a:ln>
-          <a:effectLst/>
-        </p:spPr>
-        <p:style>
-          <a:lnRef idx="1">
-            <a:schemeClr val="accent1"/>
-          </a:lnRef>
-          <a:fillRef idx="3">
-            <a:schemeClr val="accent1"/>
-          </a:fillRef>
-          <a:effectRef idx="2">
-            <a:schemeClr val="accent1"/>
-          </a:effectRef>
-          <a:fontRef idx="minor">
-            <a:schemeClr val="lt1"/>
-          </a:fontRef>
-        </p:style>
-        <p:txBody>
-          <a:bodyPr rtlCol="0" anchor="ctr" wrap="square" lIns="73152" rIns="73152"/>
-          <a:lstStyle/>
-          <a:p>
-            <a:pPr algn="ctr"/>
-            <a:r>
-              <a:rPr sz="1400" b="1">
-                <a:solidFill>
-                  <a:srgbClr val="9AA3AB"/>
-                </a:solidFill>
-              </a:rPr>
-              <a:t/>
-            </a:r>
-          </a:p>
-        </p:txBody>
-      </p:sp>
-      <p:sp>
-        <p:nvSpPr>
-          <p:cNvPr id="29" name="Rectangle 28"/>
-          <p:cNvSpPr/>
-          <p:nvPr/>
-        </p:nvSpPr>
-        <p:spPr>
-          <a:xfrm>
-            <a:off x="6784848" y="2002536"/>
-            <a:ext cx="374904" cy="374904"/>
-          </a:xfrm>
-          <a:prstGeom prst="rect">
-            <a:avLst/>
-          </a:prstGeom>
-          <a:solidFill>
-            <a:srgbClr val="4A525A"/>
-          </a:solidFill>
-          <a:ln>
-            <a:noFill/>
-          </a:ln>
-          <a:effectLst/>
-        </p:spPr>
-        <p:style>
-          <a:lnRef idx="1">
-            <a:schemeClr val="accent1"/>
-          </a:lnRef>
-          <a:fillRef idx="3">
-            <a:schemeClr val="accent1"/>
-          </a:fillRef>
-          <a:effectRef idx="2">
-            <a:schemeClr val="accent1"/>
-          </a:effectRef>
-          <a:fontRef idx="minor">
-            <a:schemeClr val="lt1"/>
-          </a:fontRef>
-        </p:style>
-        <p:txBody>
-          <a:bodyPr rtlCol="0" anchor="ctr" wrap="square" lIns="73152" rIns="73152"/>
-          <a:lstStyle/>
-          <a:p>
-            <a:pPr algn="ctr"/>
-            <a:r>
-              <a:rPr sz="1400" b="1">
-                <a:solidFill>
-                  <a:srgbClr val="9AA3AB"/>
-                </a:solidFill>
-              </a:rPr>
-              <a:t/>
-            </a:r>
-          </a:p>
-        </p:txBody>
-      </p:sp>
-      <p:sp>
-        <p:nvSpPr>
-          <p:cNvPr id="30" name="Rectangle 29"/>
-          <p:cNvSpPr/>
-          <p:nvPr/>
-        </p:nvSpPr>
-        <p:spPr>
-          <a:xfrm>
-            <a:off x="1956816" y="2404872"/>
-            <a:ext cx="374904" cy="374904"/>
-          </a:xfrm>
-          <a:prstGeom prst="rect">
-            <a:avLst/>
-          </a:prstGeom>
-          <a:solidFill>
-            <a:srgbClr val="4A525A"/>
-          </a:solidFill>
-          <a:ln>
-            <a:noFill/>
-          </a:ln>
-          <a:effectLst/>
-        </p:spPr>
-        <p:style>
-          <a:lnRef idx="1">
-            <a:schemeClr val="accent1"/>
-          </a:lnRef>
-          <a:fillRef idx="3">
-            <a:schemeClr val="accent1"/>
-          </a:fillRef>
-          <a:effectRef idx="2">
-            <a:schemeClr val="accent1"/>
-          </a:effectRef>
-          <a:fontRef idx="minor">
-            <a:schemeClr val="lt1"/>
-          </a:fontRef>
-        </p:style>
-        <p:txBody>
-          <a:bodyPr rtlCol="0" anchor="ctr" wrap="square" lIns="73152" rIns="73152"/>
-          <a:lstStyle/>
-          <a:p>
-            <a:pPr algn="ctr"/>
-            <a:r>
-              <a:rPr sz="1400" b="1">
-                <a:solidFill>
-                  <a:srgbClr val="9AA3AB"/>
-                </a:solidFill>
-              </a:rPr>
-              <a:t/>
-            </a:r>
-          </a:p>
-        </p:txBody>
-      </p:sp>
-      <p:sp>
-        <p:nvSpPr>
-          <p:cNvPr id="31" name="Rectangle 30"/>
-          <p:cNvSpPr/>
-          <p:nvPr/>
-        </p:nvSpPr>
-        <p:spPr>
-          <a:xfrm>
-            <a:off x="2359152" y="2404872"/>
-            <a:ext cx="374904" cy="374904"/>
-          </a:xfrm>
-          <a:prstGeom prst="rect">
-            <a:avLst/>
-          </a:prstGeom>
-          <a:solidFill>
-            <a:srgbClr val="17191C"/>
-          </a:solidFill>
-          <a:ln>
-            <a:noFill/>
-          </a:ln>
-          <a:effectLst/>
-        </p:spPr>
-        <p:style>
-          <a:lnRef idx="1">
-            <a:schemeClr val="accent1"/>
-          </a:lnRef>
-          <a:fillRef idx="3">
-            <a:schemeClr val="accent1"/>
-          </a:fillRef>
-          <a:effectRef idx="2">
-            <a:schemeClr val="accent1"/>
-          </a:effectRef>
-          <a:fontRef idx="minor">
-            <a:schemeClr val="lt1"/>
-          </a:fontRef>
-        </p:style>
-        <p:txBody>
-          <a:bodyPr rtlCol="0" anchor="ctr" wrap="square" lIns="73152" rIns="73152"/>
-          <a:lstStyle/>
-          <a:p>
-            <a:pPr algn="ctr"/>
-            <a:r>
-              <a:rPr sz="1400" b="1">
-                <a:solidFill>
-                  <a:srgbClr val="DEE2E6"/>
-                </a:solidFill>
-              </a:rPr>
-              <a:t>4</a:t>
-            </a:r>
-          </a:p>
-        </p:txBody>
-      </p:sp>
-      <p:sp>
-        <p:nvSpPr>
-          <p:cNvPr id="32" name="Rectangle 31"/>
-          <p:cNvSpPr/>
-          <p:nvPr/>
-        </p:nvSpPr>
-        <p:spPr>
-          <a:xfrm>
-            <a:off x="2761488" y="2404872"/>
-            <a:ext cx="374904" cy="374904"/>
-          </a:xfrm>
-          <a:prstGeom prst="rect">
-            <a:avLst/>
-          </a:prstGeom>
-          <a:solidFill>
-            <a:srgbClr val="4A525A"/>
-          </a:solidFill>
-          <a:ln>
-            <a:noFill/>
-          </a:ln>
-          <a:effectLst/>
-        </p:spPr>
-        <p:style>
-          <a:lnRef idx="1">
-            <a:schemeClr val="accent1"/>
-          </a:lnRef>
-          <a:fillRef idx="3">
-            <a:schemeClr val="accent1"/>
-          </a:fillRef>
-          <a:effectRef idx="2">
-            <a:schemeClr val="accent1"/>
-          </a:effectRef>
-          <a:fontRef idx="minor">
-            <a:schemeClr val="lt1"/>
-          </a:fontRef>
-        </p:style>
-        <p:txBody>
-          <a:bodyPr rtlCol="0" anchor="ctr" wrap="square" lIns="73152" rIns="73152"/>
-          <a:lstStyle/>
-          <a:p>
-            <a:pPr algn="ctr"/>
-            <a:r>
-              <a:rPr sz="1400" b="1">
-                <a:solidFill>
-                  <a:srgbClr val="9AA3AB"/>
-                </a:solidFill>
-              </a:rPr>
-              <a:t/>
-            </a:r>
-          </a:p>
-        </p:txBody>
-      </p:sp>
-      <p:sp>
-        <p:nvSpPr>
-          <p:cNvPr id="33" name="Rectangle 32"/>
-          <p:cNvSpPr/>
-          <p:nvPr/>
-        </p:nvSpPr>
-        <p:spPr>
-          <a:xfrm>
-            <a:off x="3163824" y="2404872"/>
-            <a:ext cx="374904" cy="374904"/>
-          </a:xfrm>
-          <a:prstGeom prst="rect">
-            <a:avLst/>
-          </a:prstGeom>
-          <a:solidFill>
-            <a:srgbClr val="4A525A"/>
-          </a:solidFill>
-          <a:ln>
-            <a:noFill/>
-          </a:ln>
-          <a:effectLst/>
-        </p:spPr>
-        <p:style>
-          <a:lnRef idx="1">
-            <a:schemeClr val="accent1"/>
-          </a:lnRef>
-          <a:fillRef idx="3">
-            <a:schemeClr val="accent1"/>
-          </a:fillRef>
-          <a:effectRef idx="2">
-            <a:schemeClr val="accent1"/>
-          </a:effectRef>
-          <a:fontRef idx="minor">
-            <a:schemeClr val="lt1"/>
-          </a:fontRef>
-        </p:style>
-        <p:txBody>
-          <a:bodyPr rtlCol="0" anchor="ctr" wrap="square" lIns="73152" rIns="73152"/>
-          <a:lstStyle/>
-          <a:p>
-            <a:pPr algn="ctr"/>
-            <a:r>
-              <a:rPr sz="1400" b="1">
-                <a:solidFill>
-                  <a:srgbClr val="9AA3AB"/>
-                </a:solidFill>
-              </a:rPr>
-              <a:t/>
-            </a:r>
-          </a:p>
-        </p:txBody>
-      </p:sp>
-      <p:sp>
-        <p:nvSpPr>
-          <p:cNvPr id="34" name="Rectangle 33"/>
-          <p:cNvSpPr/>
-          <p:nvPr/>
-        </p:nvSpPr>
-        <p:spPr>
-          <a:xfrm>
-            <a:off x="3566160" y="2404872"/>
-            <a:ext cx="374904" cy="374904"/>
-          </a:xfrm>
-          <a:prstGeom prst="rect">
-            <a:avLst/>
-          </a:prstGeom>
-          <a:solidFill>
-            <a:srgbClr val="4A525A"/>
-          </a:solidFill>
-          <a:ln>
-            <a:noFill/>
-          </a:ln>
-          <a:effectLst/>
-        </p:spPr>
-        <p:style>
-          <a:lnRef idx="1">
-            <a:schemeClr val="accent1"/>
-          </a:lnRef>
-          <a:fillRef idx="3">
-            <a:schemeClr val="accent1"/>
-          </a:fillRef>
-          <a:effectRef idx="2">
-            <a:schemeClr val="accent1"/>
-          </a:effectRef>
-          <a:fontRef idx="minor">
-            <a:schemeClr val="lt1"/>
-          </a:fontRef>
-        </p:style>
-        <p:txBody>
-          <a:bodyPr rtlCol="0" anchor="ctr" wrap="square" lIns="73152" rIns="73152"/>
-          <a:lstStyle/>
-          <a:p>
-            <a:pPr algn="ctr"/>
-            <a:r>
-              <a:rPr sz="1400" b="1">
-                <a:solidFill>
-                  <a:srgbClr val="9AA3AB"/>
-                </a:solidFill>
-              </a:rPr>
-              <a:t/>
-            </a:r>
-          </a:p>
-        </p:txBody>
-      </p:sp>
-      <p:sp>
-        <p:nvSpPr>
-          <p:cNvPr id="35" name="Rectangle 34"/>
-          <p:cNvSpPr/>
-          <p:nvPr/>
-        </p:nvSpPr>
-        <p:spPr>
-          <a:xfrm>
-            <a:off x="3968496" y="2404872"/>
-            <a:ext cx="374904" cy="374904"/>
-          </a:xfrm>
-          <a:prstGeom prst="rect">
-            <a:avLst/>
-          </a:prstGeom>
-          <a:solidFill>
-            <a:srgbClr val="17191C"/>
-          </a:solidFill>
-          <a:ln w="25400">
-            <a:solidFill>
-              <a:srgbClr val="D45D35"/>
-            </a:solidFill>
-          </a:ln>
-          <a:effectLst/>
-        </p:spPr>
-        <p:style>
-          <a:lnRef idx="1">
-            <a:schemeClr val="accent1"/>
-          </a:lnRef>
-          <a:fillRef idx="3">
-            <a:schemeClr val="accent1"/>
-          </a:fillRef>
-          <a:effectRef idx="2">
-            <a:schemeClr val="accent1"/>
-          </a:effectRef>
-          <a:fontRef idx="minor">
-            <a:schemeClr val="lt1"/>
-          </a:fontRef>
-        </p:style>
-        <p:txBody>
-          <a:bodyPr rtlCol="0" anchor="ctr" wrap="square" lIns="73152" rIns="73152"/>
-          <a:lstStyle/>
-          <a:p>
-            <a:pPr algn="ctr"/>
-            <a:r>
-              <a:rPr sz="1400" b="1">
-                <a:solidFill>
-                  <a:srgbClr val="DEE2E6"/>
-                </a:solidFill>
-              </a:rPr>
-              <a:t>2</a:t>
-            </a:r>
-          </a:p>
-        </p:txBody>
-      </p:sp>
-      <p:sp>
-        <p:nvSpPr>
-          <p:cNvPr id="36" name="Rectangle 35"/>
-          <p:cNvSpPr/>
-          <p:nvPr/>
-        </p:nvSpPr>
-        <p:spPr>
-          <a:xfrm>
-            <a:off x="4370832" y="2404872"/>
-            <a:ext cx="374904" cy="374904"/>
-          </a:xfrm>
-          <a:prstGeom prst="rect">
-            <a:avLst/>
-          </a:prstGeom>
-          <a:solidFill>
-            <a:srgbClr val="4A525A"/>
-          </a:solidFill>
-          <a:ln>
-            <a:noFill/>
-          </a:ln>
-          <a:effectLst/>
-        </p:spPr>
-        <p:style>
-          <a:lnRef idx="1">
-            <a:schemeClr val="accent1"/>
-          </a:lnRef>
-          <a:fillRef idx="3">
-            <a:schemeClr val="accent1"/>
-          </a:fillRef>
-          <a:effectRef idx="2">
-            <a:schemeClr val="accent1"/>
-          </a:effectRef>
-          <a:fontRef idx="minor">
-            <a:schemeClr val="lt1"/>
-          </a:fontRef>
-        </p:style>
-        <p:txBody>
-          <a:bodyPr rtlCol="0" anchor="ctr" wrap="square" lIns="73152" rIns="73152"/>
-          <a:lstStyle/>
-          <a:p>
-            <a:pPr algn="ctr"/>
-            <a:r>
-              <a:rPr sz="1400" b="1">
-                <a:solidFill>
-                  <a:srgbClr val="9AA3AB"/>
-                </a:solidFill>
-              </a:rPr>
-              <a:t/>
-            </a:r>
-          </a:p>
-        </p:txBody>
-      </p:sp>
-      <p:sp>
-        <p:nvSpPr>
-          <p:cNvPr id="37" name="Rectangle 36"/>
-          <p:cNvSpPr/>
-          <p:nvPr/>
-        </p:nvSpPr>
-        <p:spPr>
-          <a:xfrm>
-            <a:off x="4773168" y="2404872"/>
-            <a:ext cx="374904" cy="374904"/>
-          </a:xfrm>
-          <a:prstGeom prst="rect">
-            <a:avLst/>
-          </a:prstGeom>
-          <a:solidFill>
-            <a:srgbClr val="17191C"/>
-          </a:solidFill>
-          <a:ln>
-            <a:noFill/>
-          </a:ln>
-          <a:effectLst/>
-        </p:spPr>
-        <p:style>
-          <a:lnRef idx="1">
-            <a:schemeClr val="accent1"/>
-          </a:lnRef>
-          <a:fillRef idx="3">
-            <a:schemeClr val="accent1"/>
-          </a:fillRef>
-          <a:effectRef idx="2">
-            <a:schemeClr val="accent1"/>
-          </a:effectRef>
-          <a:fontRef idx="minor">
-            <a:schemeClr val="lt1"/>
-          </a:fontRef>
-        </p:style>
-        <p:txBody>
-          <a:bodyPr rtlCol="0" anchor="ctr" wrap="square" lIns="73152" rIns="73152"/>
-          <a:lstStyle/>
-          <a:p>
-            <a:pPr algn="ctr"/>
-            <a:r>
-              <a:rPr sz="1400" b="1">
-                <a:solidFill>
-                  <a:srgbClr val="DEE2E6"/>
-                </a:solidFill>
-              </a:rPr>
-              <a:t>4</a:t>
-            </a:r>
-          </a:p>
-        </p:txBody>
-      </p:sp>
-      <p:sp>
-        <p:nvSpPr>
-          <p:cNvPr id="38" name="Rectangle 37"/>
-          <p:cNvSpPr/>
-          <p:nvPr/>
-        </p:nvSpPr>
-        <p:spPr>
-          <a:xfrm>
-            <a:off x="5175504" y="2404872"/>
-            <a:ext cx="374904" cy="374904"/>
-          </a:xfrm>
-          <a:prstGeom prst="rect">
-            <a:avLst/>
-          </a:prstGeom>
-          <a:solidFill>
-            <a:srgbClr val="4A525A"/>
-          </a:solidFill>
-          <a:ln>
-            <a:noFill/>
-          </a:ln>
-          <a:effectLst/>
-        </p:spPr>
-        <p:style>
-          <a:lnRef idx="1">
-            <a:schemeClr val="accent1"/>
-          </a:lnRef>
-          <a:fillRef idx="3">
-            <a:schemeClr val="accent1"/>
-          </a:fillRef>
-          <a:effectRef idx="2">
-            <a:schemeClr val="accent1"/>
-          </a:effectRef>
-          <a:fontRef idx="minor">
-            <a:schemeClr val="lt1"/>
-          </a:fontRef>
-        </p:style>
-        <p:txBody>
-          <a:bodyPr rtlCol="0" anchor="ctr" wrap="square" lIns="73152" rIns="73152"/>
-          <a:lstStyle/>
-          <a:p>
-            <a:pPr algn="ctr"/>
-            <a:r>
-              <a:rPr sz="1400" b="1">
-                <a:solidFill>
-                  <a:srgbClr val="9AA3AB"/>
-                </a:solidFill>
-              </a:rPr>
-              <a:t/>
-            </a:r>
-          </a:p>
-        </p:txBody>
-      </p:sp>
-      <p:sp>
-        <p:nvSpPr>
-          <p:cNvPr id="39" name="Rectangle 38"/>
-          <p:cNvSpPr/>
-          <p:nvPr/>
-        </p:nvSpPr>
-        <p:spPr>
-          <a:xfrm>
-            <a:off x="5577840" y="2404872"/>
-            <a:ext cx="374904" cy="374904"/>
-          </a:xfrm>
-          <a:prstGeom prst="rect">
-            <a:avLst/>
-          </a:prstGeom>
-          <a:solidFill>
-            <a:srgbClr val="4A525A"/>
-          </a:solidFill>
-          <a:ln>
-            <a:noFill/>
-          </a:ln>
-          <a:effectLst/>
-        </p:spPr>
-        <p:style>
-          <a:lnRef idx="1">
-            <a:schemeClr val="accent1"/>
-          </a:lnRef>
-          <a:fillRef idx="3">
-            <a:schemeClr val="accent1"/>
-          </a:fillRef>
-          <a:effectRef idx="2">
-            <a:schemeClr val="accent1"/>
-          </a:effectRef>
-          <a:fontRef idx="minor">
-            <a:schemeClr val="lt1"/>
-          </a:fontRef>
-        </p:style>
-        <p:txBody>
-          <a:bodyPr rtlCol="0" anchor="ctr" wrap="square" lIns="73152" rIns="73152"/>
-          <a:lstStyle/>
-          <a:p>
-            <a:pPr algn="ctr"/>
-            <a:r>
-              <a:rPr sz="1400" b="1">
-                <a:solidFill>
-                  <a:srgbClr val="9AA3AB"/>
-                </a:solidFill>
-              </a:rPr>
-              <a:t/>
-            </a:r>
-          </a:p>
-        </p:txBody>
-      </p:sp>
-      <p:sp>
-        <p:nvSpPr>
-          <p:cNvPr id="40" name="Rectangle 39"/>
-          <p:cNvSpPr/>
-          <p:nvPr/>
-        </p:nvSpPr>
-        <p:spPr>
-          <a:xfrm>
-            <a:off x="5980176" y="2404872"/>
-            <a:ext cx="374904" cy="374904"/>
-          </a:xfrm>
-          <a:prstGeom prst="rect">
-            <a:avLst/>
-          </a:prstGeom>
-          <a:solidFill>
-            <a:srgbClr val="4A525A"/>
-          </a:solidFill>
-          <a:ln>
-            <a:noFill/>
-          </a:ln>
-          <a:effectLst/>
-        </p:spPr>
-        <p:style>
-          <a:lnRef idx="1">
-            <a:schemeClr val="accent1"/>
-          </a:lnRef>
-          <a:fillRef idx="3">
-            <a:schemeClr val="accent1"/>
-          </a:fillRef>
-          <a:effectRef idx="2">
-            <a:schemeClr val="accent1"/>
-          </a:effectRef>
-          <a:fontRef idx="minor">
-            <a:schemeClr val="lt1"/>
-          </a:fontRef>
-        </p:style>
-        <p:txBody>
-          <a:bodyPr rtlCol="0" anchor="ctr" wrap="square" lIns="73152" rIns="73152"/>
-          <a:lstStyle/>
-          <a:p>
-            <a:pPr algn="ctr"/>
-            <a:r>
-              <a:rPr sz="1400" b="1">
-                <a:solidFill>
-                  <a:srgbClr val="9AA3AB"/>
-                </a:solidFill>
-              </a:rPr>
-              <a:t/>
-            </a:r>
-          </a:p>
-        </p:txBody>
-      </p:sp>
-      <p:sp>
-        <p:nvSpPr>
-          <p:cNvPr id="41" name="Rectangle 40"/>
-          <p:cNvSpPr/>
-          <p:nvPr/>
-        </p:nvSpPr>
-        <p:spPr>
-          <a:xfrm>
-            <a:off x="6382512" y="2404872"/>
-            <a:ext cx="374904" cy="374904"/>
-          </a:xfrm>
-          <a:prstGeom prst="rect">
-            <a:avLst/>
-          </a:prstGeom>
-          <a:solidFill>
-            <a:srgbClr val="17191C"/>
-          </a:solidFill>
-          <a:ln>
-            <a:noFill/>
-          </a:ln>
-          <a:effectLst/>
-        </p:spPr>
-        <p:style>
-          <a:lnRef idx="1">
-            <a:schemeClr val="accent1"/>
-          </a:lnRef>
-          <a:fillRef idx="3">
-            <a:schemeClr val="accent1"/>
-          </a:fillRef>
-          <a:effectRef idx="2">
-            <a:schemeClr val="accent1"/>
-          </a:effectRef>
-          <a:fontRef idx="minor">
-            <a:schemeClr val="lt1"/>
-          </a:fontRef>
-        </p:style>
-        <p:txBody>
-          <a:bodyPr rtlCol="0" anchor="ctr" wrap="square" lIns="73152" rIns="73152"/>
-          <a:lstStyle/>
-          <a:p>
-            <a:pPr algn="ctr"/>
-            <a:r>
-              <a:rPr sz="1400" b="1">
-                <a:solidFill>
-                  <a:srgbClr val="9AA3AB"/>
-                </a:solidFill>
-              </a:rPr>
-              <a:t/>
-            </a:r>
-          </a:p>
-        </p:txBody>
-      </p:sp>
-      <p:sp>
-        <p:nvSpPr>
-          <p:cNvPr id="42" name="Rectangle 41"/>
-          <p:cNvSpPr/>
-          <p:nvPr/>
-        </p:nvSpPr>
-        <p:spPr>
-          <a:xfrm>
-            <a:off x="6784848" y="2404872"/>
-            <a:ext cx="374904" cy="374904"/>
-          </a:xfrm>
-          <a:prstGeom prst="rect">
-            <a:avLst/>
-          </a:prstGeom>
-          <a:solidFill>
-            <a:srgbClr val="4A525A"/>
-          </a:solidFill>
-          <a:ln>
-            <a:noFill/>
-          </a:ln>
-          <a:effectLst/>
-        </p:spPr>
-        <p:style>
-          <a:lnRef idx="1">
-            <a:schemeClr val="accent1"/>
-          </a:lnRef>
-          <a:fillRef idx="3">
-            <a:schemeClr val="accent1"/>
-          </a:fillRef>
-          <a:effectRef idx="2">
-            <a:schemeClr val="accent1"/>
-          </a:effectRef>
-          <a:fontRef idx="minor">
-            <a:schemeClr val="lt1"/>
-          </a:fontRef>
-        </p:style>
-        <p:txBody>
-          <a:bodyPr rtlCol="0" anchor="ctr" wrap="square" lIns="73152" rIns="73152"/>
-          <a:lstStyle/>
-          <a:p>
-            <a:pPr algn="ctr"/>
-            <a:r>
-              <a:rPr sz="1400" b="1">
-                <a:solidFill>
-                  <a:srgbClr val="9AA3AB"/>
-                </a:solidFill>
-              </a:rPr>
-              <a:t/>
-            </a:r>
-          </a:p>
-        </p:txBody>
-      </p:sp>
-      <p:sp>
-        <p:nvSpPr>
-          <p:cNvPr id="43" name="Rectangle 42"/>
-          <p:cNvSpPr/>
-          <p:nvPr/>
-        </p:nvSpPr>
-        <p:spPr>
-          <a:xfrm>
-            <a:off x="1956816" y="2807208"/>
-            <a:ext cx="374904" cy="374904"/>
-          </a:xfrm>
-          <a:prstGeom prst="rect">
-            <a:avLst/>
-          </a:prstGeom>
-          <a:solidFill>
-            <a:srgbClr val="4A525A"/>
-          </a:solidFill>
-          <a:ln>
-            <a:noFill/>
-          </a:ln>
-          <a:effectLst/>
-        </p:spPr>
-        <p:style>
-          <a:lnRef idx="1">
-            <a:schemeClr val="accent1"/>
-          </a:lnRef>
-          <a:fillRef idx="3">
-            <a:schemeClr val="accent1"/>
-          </a:fillRef>
-          <a:effectRef idx="2">
-            <a:schemeClr val="accent1"/>
-          </a:effectRef>
-          <a:fontRef idx="minor">
-            <a:schemeClr val="lt1"/>
-          </a:fontRef>
-        </p:style>
-        <p:txBody>
-          <a:bodyPr rtlCol="0" anchor="ctr" wrap="square" lIns="73152" rIns="73152"/>
-          <a:lstStyle/>
-          <a:p>
-            <a:pPr algn="ctr"/>
-            <a:r>
-              <a:rPr sz="1400" b="1">
-                <a:solidFill>
-                  <a:srgbClr val="9AA3AB"/>
-                </a:solidFill>
-              </a:rPr>
-              <a:t/>
-            </a:r>
-          </a:p>
-        </p:txBody>
-      </p:sp>
-      <p:sp>
-        <p:nvSpPr>
-          <p:cNvPr id="44" name="Rectangle 43"/>
-          <p:cNvSpPr/>
-          <p:nvPr/>
-        </p:nvSpPr>
-        <p:spPr>
-          <a:xfrm>
-            <a:off x="2359152" y="2807208"/>
-            <a:ext cx="374904" cy="374904"/>
-          </a:xfrm>
-          <a:prstGeom prst="rect">
-            <a:avLst/>
-          </a:prstGeom>
-          <a:solidFill>
-            <a:srgbClr val="17191C"/>
-          </a:solidFill>
-          <a:ln>
-            <a:noFill/>
-          </a:ln>
-          <a:effectLst/>
-        </p:spPr>
-        <p:style>
-          <a:lnRef idx="1">
-            <a:schemeClr val="accent1"/>
-          </a:lnRef>
-          <a:fillRef idx="3">
-            <a:schemeClr val="accent1"/>
-          </a:fillRef>
-          <a:effectRef idx="2">
-            <a:schemeClr val="accent1"/>
-          </a:effectRef>
-          <a:fontRef idx="minor">
-            <a:schemeClr val="lt1"/>
-          </a:fontRef>
-        </p:style>
-        <p:txBody>
-          <a:bodyPr rtlCol="0" anchor="ctr" wrap="square" lIns="73152" rIns="73152"/>
-          <a:lstStyle/>
-          <a:p>
-            <a:pPr algn="ctr"/>
-            <a:r>
-              <a:rPr sz="1400" b="1">
-                <a:solidFill>
-                  <a:srgbClr val="DEE2E6"/>
-                </a:solidFill>
-              </a:rPr>
-              <a:t>3</a:t>
-            </a:r>
-          </a:p>
-        </p:txBody>
-      </p:sp>
-      <p:sp>
-        <p:nvSpPr>
-          <p:cNvPr id="45" name="Rectangle 44"/>
-          <p:cNvSpPr/>
-          <p:nvPr/>
-        </p:nvSpPr>
-        <p:spPr>
-          <a:xfrm>
-            <a:off x="2761488" y="2807208"/>
-            <a:ext cx="374904" cy="374904"/>
-          </a:xfrm>
-          <a:prstGeom prst="rect">
-            <a:avLst/>
-          </a:prstGeom>
-          <a:solidFill>
-            <a:srgbClr val="17191C"/>
-          </a:solidFill>
-          <a:ln>
-            <a:noFill/>
-          </a:ln>
-          <a:effectLst/>
-        </p:spPr>
-        <p:style>
-          <a:lnRef idx="1">
-            <a:schemeClr val="accent1"/>
-          </a:lnRef>
-          <a:fillRef idx="3">
-            <a:schemeClr val="accent1"/>
-          </a:fillRef>
-          <a:effectRef idx="2">
-            <a:schemeClr val="accent1"/>
-          </a:effectRef>
-          <a:fontRef idx="minor">
-            <a:schemeClr val="lt1"/>
-          </a:fontRef>
-        </p:style>
-        <p:txBody>
-          <a:bodyPr rtlCol="0" anchor="ctr" wrap="square" lIns="73152" rIns="73152"/>
-          <a:lstStyle/>
-          <a:p>
-            <a:pPr algn="ctr"/>
-            <a:r>
-              <a:rPr sz="1400" b="1">
-                <a:solidFill>
-                  <a:srgbClr val="DEE2E6"/>
-                </a:solidFill>
-              </a:rPr>
-              <a:t>2</a:t>
-            </a:r>
-          </a:p>
-        </p:txBody>
-      </p:sp>
-      <p:sp>
-        <p:nvSpPr>
-          <p:cNvPr id="46" name="Rectangle 45"/>
-          <p:cNvSpPr/>
-          <p:nvPr/>
-        </p:nvSpPr>
-        <p:spPr>
-          <a:xfrm>
-            <a:off x="3163824" y="2807208"/>
-            <a:ext cx="374904" cy="374904"/>
-          </a:xfrm>
-          <a:prstGeom prst="rect">
-            <a:avLst/>
-          </a:prstGeom>
-          <a:solidFill>
-            <a:srgbClr val="17191C"/>
-          </a:solidFill>
-          <a:ln>
-            <a:noFill/>
-          </a:ln>
-          <a:effectLst/>
-        </p:spPr>
-        <p:style>
-          <a:lnRef idx="1">
-            <a:schemeClr val="accent1"/>
-          </a:lnRef>
-          <a:fillRef idx="3">
-            <a:schemeClr val="accent1"/>
-          </a:fillRef>
-          <a:effectRef idx="2">
-            <a:schemeClr val="accent1"/>
-          </a:effectRef>
-          <a:fontRef idx="minor">
-            <a:schemeClr val="lt1"/>
-          </a:fontRef>
-        </p:style>
-        <p:txBody>
-          <a:bodyPr rtlCol="0" anchor="ctr" wrap="square" lIns="73152" rIns="73152"/>
-          <a:lstStyle/>
-          <a:p>
-            <a:pPr algn="ctr"/>
-            <a:r>
-              <a:rPr sz="1400" b="1">
-                <a:solidFill>
-                  <a:srgbClr val="DEE2E6"/>
-                </a:solidFill>
-              </a:rPr>
-              <a:t>1</a:t>
-            </a:r>
-          </a:p>
-        </p:txBody>
-      </p:sp>
-      <p:sp>
-        <p:nvSpPr>
-          <p:cNvPr id="47" name="Rectangle 46"/>
-          <p:cNvSpPr/>
-          <p:nvPr/>
-        </p:nvSpPr>
-        <p:spPr>
-          <a:xfrm>
-            <a:off x="3566160" y="2807208"/>
-            <a:ext cx="374904" cy="374904"/>
-          </a:xfrm>
-          <a:prstGeom prst="rect">
-            <a:avLst/>
-          </a:prstGeom>
-          <a:solidFill>
-            <a:srgbClr val="D45D35"/>
-          </a:solidFill>
-          <a:ln>
-            <a:noFill/>
-          </a:ln>
-          <a:effectLst/>
-        </p:spPr>
-        <p:style>
-          <a:lnRef idx="1">
-            <a:schemeClr val="accent1"/>
-          </a:lnRef>
-          <a:fillRef idx="3">
-            <a:schemeClr val="accent1"/>
-          </a:fillRef>
-          <a:effectRef idx="2">
-            <a:schemeClr val="accent1"/>
-          </a:effectRef>
-          <a:fontRef idx="minor">
-            <a:schemeClr val="lt1"/>
-          </a:fontRef>
-        </p:style>
-        <p:txBody>
-          <a:bodyPr rtlCol="0" anchor="ctr" wrap="square" lIns="73152" rIns="73152"/>
-          <a:lstStyle/>
-          <a:p>
-            <a:pPr algn="ctr"/>
-            <a:r>
-              <a:rPr sz="1400" b="1">
-                <a:solidFill>
-                  <a:srgbClr val="DEE2E6"/>
-                </a:solidFill>
-              </a:rPr>
-              <a:t>G</a:t>
-            </a:r>
-          </a:p>
-        </p:txBody>
-      </p:sp>
-      <p:sp>
-        <p:nvSpPr>
-          <p:cNvPr id="48" name="Rectangle 47"/>
-          <p:cNvSpPr/>
-          <p:nvPr/>
-        </p:nvSpPr>
-        <p:spPr>
-          <a:xfrm>
-            <a:off x="3968496" y="2807208"/>
-            <a:ext cx="374904" cy="374904"/>
-          </a:xfrm>
-          <a:prstGeom prst="rect">
-            <a:avLst/>
-          </a:prstGeom>
-          <a:solidFill>
-            <a:srgbClr val="17191C"/>
-          </a:solidFill>
-          <a:ln w="25400">
-            <a:solidFill>
-              <a:srgbClr val="D45D35"/>
-            </a:solidFill>
-          </a:ln>
-          <a:effectLst/>
-        </p:spPr>
-        <p:style>
-          <a:lnRef idx="1">
-            <a:schemeClr val="accent1"/>
-          </a:lnRef>
-          <a:fillRef idx="3">
-            <a:schemeClr val="accent1"/>
-          </a:fillRef>
-          <a:effectRef idx="2">
-            <a:schemeClr val="accent1"/>
-          </a:effectRef>
-          <a:fontRef idx="minor">
-            <a:schemeClr val="lt1"/>
-          </a:fontRef>
-        </p:style>
-        <p:txBody>
-          <a:bodyPr rtlCol="0" anchor="ctr" wrap="square" lIns="73152" rIns="73152"/>
-          <a:lstStyle/>
-          <a:p>
-            <a:pPr algn="ctr"/>
-            <a:r>
-              <a:rPr sz="1400" b="1">
-                <a:solidFill>
-                  <a:srgbClr val="DEE2E6"/>
-                </a:solidFill>
-              </a:rPr>
-              <a:t>1</a:t>
-            </a:r>
-          </a:p>
-        </p:txBody>
-      </p:sp>
-      <p:sp>
-        <p:nvSpPr>
-          <p:cNvPr id="49" name="Rectangle 48"/>
-          <p:cNvSpPr/>
-          <p:nvPr/>
-        </p:nvSpPr>
-        <p:spPr>
-          <a:xfrm>
-            <a:off x="4370832" y="2807208"/>
-            <a:ext cx="374904" cy="374904"/>
-          </a:xfrm>
-          <a:prstGeom prst="rect">
-            <a:avLst/>
-          </a:prstGeom>
-          <a:solidFill>
-            <a:srgbClr val="17191C"/>
-          </a:solidFill>
-          <a:ln>
-            <a:noFill/>
-          </a:ln>
-          <a:effectLst/>
-        </p:spPr>
-        <p:style>
-          <a:lnRef idx="1">
-            <a:schemeClr val="accent1"/>
-          </a:lnRef>
-          <a:fillRef idx="3">
-            <a:schemeClr val="accent1"/>
-          </a:fillRef>
-          <a:effectRef idx="2">
-            <a:schemeClr val="accent1"/>
-          </a:effectRef>
-          <a:fontRef idx="minor">
-            <a:schemeClr val="lt1"/>
-          </a:fontRef>
-        </p:style>
-        <p:txBody>
-          <a:bodyPr rtlCol="0" anchor="ctr" wrap="square" lIns="73152" rIns="73152"/>
-          <a:lstStyle/>
-          <a:p>
-            <a:pPr algn="ctr"/>
-            <a:r>
-              <a:rPr sz="1400" b="1">
-                <a:solidFill>
-                  <a:srgbClr val="DEE2E6"/>
-                </a:solidFill>
-              </a:rPr>
-              <a:t>2</a:t>
-            </a:r>
-          </a:p>
-        </p:txBody>
-      </p:sp>
-      <p:sp>
-        <p:nvSpPr>
-          <p:cNvPr id="50" name="Rectangle 49"/>
-          <p:cNvSpPr/>
-          <p:nvPr/>
-        </p:nvSpPr>
-        <p:spPr>
-          <a:xfrm>
-            <a:off x="4773168" y="2807208"/>
-            <a:ext cx="374904" cy="374904"/>
-          </a:xfrm>
-          <a:prstGeom prst="rect">
-            <a:avLst/>
-          </a:prstGeom>
-          <a:solidFill>
-            <a:srgbClr val="17191C"/>
-          </a:solidFill>
-          <a:ln>
-            <a:noFill/>
-          </a:ln>
-          <a:effectLst/>
-        </p:spPr>
-        <p:style>
-          <a:lnRef idx="1">
-            <a:schemeClr val="accent1"/>
-          </a:lnRef>
-          <a:fillRef idx="3">
-            <a:schemeClr val="accent1"/>
-          </a:fillRef>
-          <a:effectRef idx="2">
-            <a:schemeClr val="accent1"/>
-          </a:effectRef>
-          <a:fontRef idx="minor">
-            <a:schemeClr val="lt1"/>
-          </a:fontRef>
-        </p:style>
-        <p:txBody>
-          <a:bodyPr rtlCol="0" anchor="ctr" wrap="square" lIns="73152" rIns="73152"/>
-          <a:lstStyle/>
-          <a:p>
-            <a:pPr algn="ctr"/>
-            <a:r>
-              <a:rPr sz="1400" b="1">
-                <a:solidFill>
-                  <a:srgbClr val="DEE2E6"/>
-                </a:solidFill>
-              </a:rPr>
-              <a:t>3</a:t>
-            </a:r>
-          </a:p>
-        </p:txBody>
-      </p:sp>
-      <p:sp>
-        <p:nvSpPr>
-          <p:cNvPr id="51" name="Rectangle 50"/>
-          <p:cNvSpPr/>
-          <p:nvPr/>
-        </p:nvSpPr>
-        <p:spPr>
-          <a:xfrm>
-            <a:off x="5175504" y="2807208"/>
-            <a:ext cx="374904" cy="374904"/>
-          </a:xfrm>
-          <a:prstGeom prst="rect">
-            <a:avLst/>
-          </a:prstGeom>
-          <a:solidFill>
-            <a:srgbClr val="17191C"/>
-          </a:solidFill>
-          <a:ln>
-            <a:noFill/>
-          </a:ln>
-          <a:effectLst/>
-        </p:spPr>
-        <p:style>
-          <a:lnRef idx="1">
-            <a:schemeClr val="accent1"/>
-          </a:lnRef>
-          <a:fillRef idx="3">
-            <a:schemeClr val="accent1"/>
-          </a:fillRef>
-          <a:effectRef idx="2">
-            <a:schemeClr val="accent1"/>
-          </a:effectRef>
-          <a:fontRef idx="minor">
-            <a:schemeClr val="lt1"/>
-          </a:fontRef>
-        </p:style>
-        <p:txBody>
-          <a:bodyPr rtlCol="0" anchor="ctr" wrap="square" lIns="73152" rIns="73152"/>
-          <a:lstStyle/>
-          <a:p>
-            <a:pPr algn="ctr"/>
-            <a:r>
-              <a:rPr sz="1400" b="1">
-                <a:solidFill>
-                  <a:srgbClr val="DEE2E6"/>
-                </a:solidFill>
-              </a:rPr>
-              <a:t>4</a:t>
-            </a:r>
-          </a:p>
-        </p:txBody>
-      </p:sp>
-      <p:sp>
-        <p:nvSpPr>
-          <p:cNvPr id="52" name="Rectangle 51"/>
-          <p:cNvSpPr/>
-          <p:nvPr/>
-        </p:nvSpPr>
-        <p:spPr>
-          <a:xfrm>
-            <a:off x="5577840" y="2807208"/>
-            <a:ext cx="374904" cy="374904"/>
-          </a:xfrm>
-          <a:prstGeom prst="rect">
-            <a:avLst/>
-          </a:prstGeom>
-          <a:solidFill>
-            <a:srgbClr val="17191C"/>
-          </a:solidFill>
-          <a:ln>
-            <a:noFill/>
-          </a:ln>
-          <a:effectLst/>
-        </p:spPr>
-        <p:style>
-          <a:lnRef idx="1">
-            <a:schemeClr val="accent1"/>
-          </a:lnRef>
-          <a:fillRef idx="3">
-            <a:schemeClr val="accent1"/>
-          </a:fillRef>
-          <a:effectRef idx="2">
-            <a:schemeClr val="accent1"/>
-          </a:effectRef>
-          <a:fontRef idx="minor">
-            <a:schemeClr val="lt1"/>
-          </a:fontRef>
-        </p:style>
-        <p:txBody>
-          <a:bodyPr rtlCol="0" anchor="ctr" wrap="square" lIns="73152" rIns="73152"/>
-          <a:lstStyle/>
-          <a:p>
-            <a:pPr algn="ctr"/>
-            <a:r>
-              <a:rPr sz="1400" b="1">
-                <a:solidFill>
-                  <a:srgbClr val="DEE2E6"/>
-                </a:solidFill>
-              </a:rPr>
-              <a:t>5</a:t>
-            </a:r>
-          </a:p>
-        </p:txBody>
-      </p:sp>
-      <p:sp>
-        <p:nvSpPr>
-          <p:cNvPr id="53" name="Rectangle 52"/>
-          <p:cNvSpPr/>
-          <p:nvPr/>
-        </p:nvSpPr>
-        <p:spPr>
-          <a:xfrm>
-            <a:off x="5980176" y="2807208"/>
-            <a:ext cx="374904" cy="374904"/>
-          </a:xfrm>
-          <a:prstGeom prst="rect">
-            <a:avLst/>
-          </a:prstGeom>
-          <a:solidFill>
-            <a:srgbClr val="17191C"/>
-          </a:solidFill>
-          <a:ln>
-            <a:noFill/>
-          </a:ln>
-          <a:effectLst/>
-        </p:spPr>
-        <p:style>
-          <a:lnRef idx="1">
-            <a:schemeClr val="accent1"/>
-          </a:lnRef>
-          <a:fillRef idx="3">
-            <a:schemeClr val="accent1"/>
-          </a:fillRef>
-          <a:effectRef idx="2">
-            <a:schemeClr val="accent1"/>
-          </a:effectRef>
-          <a:fontRef idx="minor">
-            <a:schemeClr val="lt1"/>
-          </a:fontRef>
-        </p:style>
-        <p:txBody>
-          <a:bodyPr rtlCol="0" anchor="ctr" wrap="square" lIns="73152" rIns="73152"/>
-          <a:lstStyle/>
-          <a:p>
-            <a:pPr algn="ctr"/>
-            <a:r>
-              <a:rPr sz="1400" b="1">
-                <a:solidFill>
-                  <a:srgbClr val="9AA3AB"/>
-                </a:solidFill>
-              </a:rPr>
-              <a:t/>
-            </a:r>
-          </a:p>
-        </p:txBody>
-      </p:sp>
-      <p:sp>
-        <p:nvSpPr>
-          <p:cNvPr id="54" name="Rectangle 53"/>
-          <p:cNvSpPr/>
-          <p:nvPr/>
-        </p:nvSpPr>
-        <p:spPr>
-          <a:xfrm>
-            <a:off x="6382512" y="2807208"/>
-            <a:ext cx="374904" cy="374904"/>
-          </a:xfrm>
-          <a:prstGeom prst="rect">
-            <a:avLst/>
-          </a:prstGeom>
-          <a:solidFill>
-            <a:srgbClr val="17191C"/>
-          </a:solidFill>
-          <a:ln>
-            <a:noFill/>
-          </a:ln>
-          <a:effectLst/>
-        </p:spPr>
-        <p:style>
-          <a:lnRef idx="1">
-            <a:schemeClr val="accent1"/>
-          </a:lnRef>
-          <a:fillRef idx="3">
-            <a:schemeClr val="accent1"/>
-          </a:fillRef>
-          <a:effectRef idx="2">
-            <a:schemeClr val="accent1"/>
-          </a:effectRef>
-          <a:fontRef idx="minor">
-            <a:schemeClr val="lt1"/>
-          </a:fontRef>
-        </p:style>
-        <p:txBody>
-          <a:bodyPr rtlCol="0" anchor="ctr" wrap="square" lIns="73152" rIns="73152"/>
-          <a:lstStyle/>
-          <a:p>
-            <a:pPr algn="ctr"/>
-            <a:r>
-              <a:rPr sz="1400" b="1">
-                <a:solidFill>
-                  <a:srgbClr val="9AA3AB"/>
-                </a:solidFill>
-              </a:rPr>
-              <a:t/>
-            </a:r>
-          </a:p>
-        </p:txBody>
-      </p:sp>
-      <p:sp>
-        <p:nvSpPr>
-          <p:cNvPr id="55" name="Rectangle 54"/>
-          <p:cNvSpPr/>
-          <p:nvPr/>
-        </p:nvSpPr>
-        <p:spPr>
-          <a:xfrm>
-            <a:off x="6784848" y="2807208"/>
-            <a:ext cx="374904" cy="374904"/>
-          </a:xfrm>
-          <a:prstGeom prst="rect">
-            <a:avLst/>
-          </a:prstGeom>
-          <a:solidFill>
-            <a:srgbClr val="4A525A"/>
-          </a:solidFill>
-          <a:ln>
-            <a:noFill/>
-          </a:ln>
-          <a:effectLst/>
-        </p:spPr>
-        <p:style>
-          <a:lnRef idx="1">
-            <a:schemeClr val="accent1"/>
-          </a:lnRef>
-          <a:fillRef idx="3">
-            <a:schemeClr val="accent1"/>
-          </a:fillRef>
-          <a:effectRef idx="2">
-            <a:schemeClr val="accent1"/>
-          </a:effectRef>
-          <a:fontRef idx="minor">
-            <a:schemeClr val="lt1"/>
-          </a:fontRef>
-        </p:style>
-        <p:txBody>
-          <a:bodyPr rtlCol="0" anchor="ctr" wrap="square" lIns="73152" rIns="73152"/>
-          <a:lstStyle/>
-          <a:p>
-            <a:pPr algn="ctr"/>
-            <a:r>
-              <a:rPr sz="1400" b="1">
-                <a:solidFill>
-                  <a:srgbClr val="9AA3AB"/>
-                </a:solidFill>
-              </a:rPr>
-              <a:t/>
-            </a:r>
-          </a:p>
-        </p:txBody>
-      </p:sp>
-      <p:sp>
-        <p:nvSpPr>
-          <p:cNvPr id="56" name="Rectangle 55"/>
-          <p:cNvSpPr/>
-          <p:nvPr/>
-        </p:nvSpPr>
-        <p:spPr>
-          <a:xfrm>
-            <a:off x="1956816" y="3209544"/>
-            <a:ext cx="374904" cy="374904"/>
-          </a:xfrm>
-          <a:prstGeom prst="rect">
-            <a:avLst/>
-          </a:prstGeom>
-          <a:solidFill>
-            <a:srgbClr val="4A525A"/>
-          </a:solidFill>
-          <a:ln>
-            <a:noFill/>
-          </a:ln>
-          <a:effectLst/>
-        </p:spPr>
-        <p:style>
-          <a:lnRef idx="1">
-            <a:schemeClr val="accent1"/>
-          </a:lnRef>
-          <a:fillRef idx="3">
-            <a:schemeClr val="accent1"/>
-          </a:fillRef>
-          <a:effectRef idx="2">
-            <a:schemeClr val="accent1"/>
-          </a:effectRef>
-          <a:fontRef idx="minor">
-            <a:schemeClr val="lt1"/>
-          </a:fontRef>
-        </p:style>
-        <p:txBody>
-          <a:bodyPr rtlCol="0" anchor="ctr" wrap="square" lIns="73152" rIns="73152"/>
-          <a:lstStyle/>
-          <a:p>
-            <a:pPr algn="ctr"/>
-            <a:r>
-              <a:rPr sz="1400" b="1">
-                <a:solidFill>
-                  <a:srgbClr val="9AA3AB"/>
-                </a:solidFill>
-              </a:rPr>
-              <a:t/>
-            </a:r>
-          </a:p>
-        </p:txBody>
-      </p:sp>
-      <p:sp>
-        <p:nvSpPr>
-          <p:cNvPr id="57" name="Rectangle 56"/>
-          <p:cNvSpPr/>
-          <p:nvPr/>
-        </p:nvSpPr>
-        <p:spPr>
-          <a:xfrm>
-            <a:off x="2359152" y="3209544"/>
-            <a:ext cx="374904" cy="374904"/>
-          </a:xfrm>
-          <a:prstGeom prst="rect">
-            <a:avLst/>
-          </a:prstGeom>
-          <a:solidFill>
-            <a:srgbClr val="4A525A"/>
-          </a:solidFill>
-          <a:ln>
-            <a:noFill/>
-          </a:ln>
-          <a:effectLst/>
-        </p:spPr>
-        <p:style>
-          <a:lnRef idx="1">
-            <a:schemeClr val="accent1"/>
-          </a:lnRef>
-          <a:fillRef idx="3">
-            <a:schemeClr val="accent1"/>
-          </a:fillRef>
-          <a:effectRef idx="2">
-            <a:schemeClr val="accent1"/>
-          </a:effectRef>
-          <a:fontRef idx="minor">
-            <a:schemeClr val="lt1"/>
-          </a:fontRef>
-        </p:style>
-        <p:txBody>
-          <a:bodyPr rtlCol="0" anchor="ctr" wrap="square" lIns="73152" rIns="73152"/>
-          <a:lstStyle/>
-          <a:p>
-            <a:pPr algn="ctr"/>
-            <a:r>
-              <a:rPr sz="1400" b="1">
-                <a:solidFill>
-                  <a:srgbClr val="9AA3AB"/>
-                </a:solidFill>
-              </a:rPr>
-              <a:t/>
-            </a:r>
-          </a:p>
-        </p:txBody>
-      </p:sp>
-      <p:sp>
-        <p:nvSpPr>
-          <p:cNvPr id="58" name="Rectangle 57"/>
-          <p:cNvSpPr/>
-          <p:nvPr/>
-        </p:nvSpPr>
-        <p:spPr>
-          <a:xfrm>
-            <a:off x="2761488" y="3209544"/>
-            <a:ext cx="374904" cy="374904"/>
-          </a:xfrm>
-          <a:prstGeom prst="rect">
-            <a:avLst/>
-          </a:prstGeom>
-          <a:solidFill>
-            <a:srgbClr val="4A525A"/>
-          </a:solidFill>
-          <a:ln>
-            <a:noFill/>
-          </a:ln>
-          <a:effectLst/>
-        </p:spPr>
-        <p:style>
-          <a:lnRef idx="1">
-            <a:schemeClr val="accent1"/>
-          </a:lnRef>
-          <a:fillRef idx="3">
-            <a:schemeClr val="accent1"/>
-          </a:fillRef>
-          <a:effectRef idx="2">
-            <a:schemeClr val="accent1"/>
-          </a:effectRef>
-          <a:fontRef idx="minor">
-            <a:schemeClr val="lt1"/>
-          </a:fontRef>
-        </p:style>
-        <p:txBody>
-          <a:bodyPr rtlCol="0" anchor="ctr" wrap="square" lIns="73152" rIns="73152"/>
-          <a:lstStyle/>
-          <a:p>
-            <a:pPr algn="ctr"/>
-            <a:r>
-              <a:rPr sz="1400" b="1">
-                <a:solidFill>
-                  <a:srgbClr val="9AA3AB"/>
-                </a:solidFill>
-              </a:rPr>
-              <a:t/>
-            </a:r>
-          </a:p>
-        </p:txBody>
-      </p:sp>
-      <p:sp>
-        <p:nvSpPr>
-          <p:cNvPr id="59" name="Rectangle 58"/>
-          <p:cNvSpPr/>
-          <p:nvPr/>
-        </p:nvSpPr>
-        <p:spPr>
-          <a:xfrm>
-            <a:off x="3163824" y="3209544"/>
-            <a:ext cx="374904" cy="374904"/>
-          </a:xfrm>
-          <a:prstGeom prst="rect">
-            <a:avLst/>
-          </a:prstGeom>
-          <a:solidFill>
-            <a:srgbClr val="4A525A"/>
-          </a:solidFill>
-          <a:ln>
-            <a:noFill/>
-          </a:ln>
-          <a:effectLst/>
-        </p:spPr>
-        <p:style>
-          <a:lnRef idx="1">
-            <a:schemeClr val="accent1"/>
-          </a:lnRef>
-          <a:fillRef idx="3">
-            <a:schemeClr val="accent1"/>
-          </a:fillRef>
-          <a:effectRef idx="2">
-            <a:schemeClr val="accent1"/>
-          </a:effectRef>
-          <a:fontRef idx="minor">
-            <a:schemeClr val="lt1"/>
-          </a:fontRef>
-        </p:style>
-        <p:txBody>
-          <a:bodyPr rtlCol="0" anchor="ctr" wrap="square" lIns="73152" rIns="73152"/>
-          <a:lstStyle/>
-          <a:p>
-            <a:pPr algn="ctr"/>
-            <a:r>
-              <a:rPr sz="1400" b="1">
-                <a:solidFill>
-                  <a:srgbClr val="9AA3AB"/>
-                </a:solidFill>
-              </a:rPr>
-              <a:t/>
-            </a:r>
-          </a:p>
-        </p:txBody>
-      </p:sp>
-      <p:sp>
-        <p:nvSpPr>
-          <p:cNvPr id="60" name="Rectangle 59"/>
-          <p:cNvSpPr/>
-          <p:nvPr/>
-        </p:nvSpPr>
-        <p:spPr>
-          <a:xfrm>
-            <a:off x="3566160" y="3209544"/>
-            <a:ext cx="374904" cy="374904"/>
-          </a:xfrm>
-          <a:prstGeom prst="rect">
-            <a:avLst/>
-          </a:prstGeom>
-          <a:solidFill>
-            <a:srgbClr val="4A525A"/>
-          </a:solidFill>
-          <a:ln>
-            <a:noFill/>
-          </a:ln>
-          <a:effectLst/>
-        </p:spPr>
-        <p:style>
-          <a:lnRef idx="1">
-            <a:schemeClr val="accent1"/>
-          </a:lnRef>
-          <a:fillRef idx="3">
-            <a:schemeClr val="accent1"/>
-          </a:fillRef>
-          <a:effectRef idx="2">
-            <a:schemeClr val="accent1"/>
-          </a:effectRef>
-          <a:fontRef idx="minor">
-            <a:schemeClr val="lt1"/>
-          </a:fontRef>
-        </p:style>
-        <p:txBody>
-          <a:bodyPr rtlCol="0" anchor="ctr" wrap="square" lIns="73152" rIns="73152"/>
-          <a:lstStyle/>
-          <a:p>
-            <a:pPr algn="ctr"/>
-            <a:r>
-              <a:rPr sz="1400" b="1">
-                <a:solidFill>
-                  <a:srgbClr val="9AA3AB"/>
-                </a:solidFill>
-              </a:rPr>
-              <a:t/>
-            </a:r>
-          </a:p>
-        </p:txBody>
-      </p:sp>
-      <p:sp>
-        <p:nvSpPr>
-          <p:cNvPr id="61" name="Rectangle 60"/>
-          <p:cNvSpPr/>
-          <p:nvPr/>
-        </p:nvSpPr>
-        <p:spPr>
-          <a:xfrm>
-            <a:off x="3968496" y="3209544"/>
-            <a:ext cx="374904" cy="374904"/>
-          </a:xfrm>
-          <a:prstGeom prst="rect">
-            <a:avLst/>
-          </a:prstGeom>
-          <a:solidFill>
-            <a:srgbClr val="4A525A"/>
-          </a:solidFill>
-          <a:ln>
-            <a:noFill/>
-          </a:ln>
-          <a:effectLst/>
-        </p:spPr>
-        <p:style>
-          <a:lnRef idx="1">
-            <a:schemeClr val="accent1"/>
-          </a:lnRef>
-          <a:fillRef idx="3">
-            <a:schemeClr val="accent1"/>
-          </a:fillRef>
-          <a:effectRef idx="2">
-            <a:schemeClr val="accent1"/>
-          </a:effectRef>
-          <a:fontRef idx="minor">
-            <a:schemeClr val="lt1"/>
-          </a:fontRef>
-        </p:style>
-        <p:txBody>
-          <a:bodyPr rtlCol="0" anchor="ctr" wrap="square" lIns="73152" rIns="73152"/>
-          <a:lstStyle/>
-          <a:p>
-            <a:pPr algn="ctr"/>
-            <a:r>
-              <a:rPr sz="1400" b="1">
-                <a:solidFill>
-                  <a:srgbClr val="9AA3AB"/>
-                </a:solidFill>
-              </a:rPr>
-              <a:t/>
-            </a:r>
-          </a:p>
-        </p:txBody>
-      </p:sp>
-      <p:sp>
-        <p:nvSpPr>
-          <p:cNvPr id="62" name="Rectangle 61"/>
-          <p:cNvSpPr/>
-          <p:nvPr/>
-        </p:nvSpPr>
-        <p:spPr>
-          <a:xfrm>
-            <a:off x="4370832" y="3209544"/>
-            <a:ext cx="374904" cy="374904"/>
-          </a:xfrm>
-          <a:prstGeom prst="rect">
-            <a:avLst/>
-          </a:prstGeom>
-          <a:solidFill>
-            <a:srgbClr val="4A525A"/>
-          </a:solidFill>
-          <a:ln>
-            <a:noFill/>
-          </a:ln>
-          <a:effectLst/>
-        </p:spPr>
-        <p:style>
-          <a:lnRef idx="1">
-            <a:schemeClr val="accent1"/>
-          </a:lnRef>
-          <a:fillRef idx="3">
-            <a:schemeClr val="accent1"/>
-          </a:fillRef>
-          <a:effectRef idx="2">
-            <a:schemeClr val="accent1"/>
-          </a:effectRef>
-          <a:fontRef idx="minor">
-            <a:schemeClr val="lt1"/>
-          </a:fontRef>
-        </p:style>
-        <p:txBody>
-          <a:bodyPr rtlCol="0" anchor="ctr" wrap="square" lIns="73152" rIns="73152"/>
-          <a:lstStyle/>
-          <a:p>
-            <a:pPr algn="ctr"/>
-            <a:r>
-              <a:rPr sz="1400" b="1">
-                <a:solidFill>
-                  <a:srgbClr val="9AA3AB"/>
-                </a:solidFill>
-              </a:rPr>
-              <a:t/>
-            </a:r>
-          </a:p>
-        </p:txBody>
-      </p:sp>
-      <p:sp>
-        <p:nvSpPr>
-          <p:cNvPr id="63" name="Rectangle 62"/>
-          <p:cNvSpPr/>
-          <p:nvPr/>
-        </p:nvSpPr>
-        <p:spPr>
-          <a:xfrm>
-            <a:off x="4773168" y="3209544"/>
-            <a:ext cx="374904" cy="374904"/>
-          </a:xfrm>
-          <a:prstGeom prst="rect">
-            <a:avLst/>
-          </a:prstGeom>
-          <a:solidFill>
-            <a:srgbClr val="4A525A"/>
-          </a:solidFill>
-          <a:ln>
-            <a:noFill/>
-          </a:ln>
-          <a:effectLst/>
-        </p:spPr>
-        <p:style>
-          <a:lnRef idx="1">
-            <a:schemeClr val="accent1"/>
-          </a:lnRef>
-          <a:fillRef idx="3">
-            <a:schemeClr val="accent1"/>
-          </a:fillRef>
-          <a:effectRef idx="2">
-            <a:schemeClr val="accent1"/>
-          </a:effectRef>
-          <a:fontRef idx="minor">
-            <a:schemeClr val="lt1"/>
-          </a:fontRef>
-        </p:style>
-        <p:txBody>
-          <a:bodyPr rtlCol="0" anchor="ctr" wrap="square" lIns="73152" rIns="73152"/>
-          <a:lstStyle/>
-          <a:p>
-            <a:pPr algn="ctr"/>
-            <a:r>
-              <a:rPr sz="1400" b="1">
-                <a:solidFill>
-                  <a:srgbClr val="9AA3AB"/>
-                </a:solidFill>
-              </a:rPr>
-              <a:t/>
-            </a:r>
-          </a:p>
-        </p:txBody>
-      </p:sp>
-      <p:sp>
-        <p:nvSpPr>
-          <p:cNvPr id="64" name="Rectangle 63"/>
-          <p:cNvSpPr/>
-          <p:nvPr/>
-        </p:nvSpPr>
-        <p:spPr>
-          <a:xfrm>
-            <a:off x="5175504" y="3209544"/>
-            <a:ext cx="374904" cy="374904"/>
-          </a:xfrm>
-          <a:prstGeom prst="rect">
-            <a:avLst/>
-          </a:prstGeom>
-          <a:solidFill>
-            <a:srgbClr val="4A525A"/>
-          </a:solidFill>
-          <a:ln>
-            <a:noFill/>
-          </a:ln>
-          <a:effectLst/>
-        </p:spPr>
-        <p:style>
-          <a:lnRef idx="1">
-            <a:schemeClr val="accent1"/>
-          </a:lnRef>
-          <a:fillRef idx="3">
-            <a:schemeClr val="accent1"/>
-          </a:fillRef>
-          <a:effectRef idx="2">
-            <a:schemeClr val="accent1"/>
-          </a:effectRef>
-          <a:fontRef idx="minor">
-            <a:schemeClr val="lt1"/>
-          </a:fontRef>
-        </p:style>
-        <p:txBody>
-          <a:bodyPr rtlCol="0" anchor="ctr" wrap="square" lIns="73152" rIns="73152"/>
-          <a:lstStyle/>
-          <a:p>
-            <a:pPr algn="ctr"/>
-            <a:r>
-              <a:rPr sz="1400" b="1">
-                <a:solidFill>
-                  <a:srgbClr val="9AA3AB"/>
-                </a:solidFill>
-              </a:rPr>
-              <a:t/>
-            </a:r>
-          </a:p>
-        </p:txBody>
-      </p:sp>
-      <p:sp>
-        <p:nvSpPr>
-          <p:cNvPr id="65" name="Rectangle 64"/>
-          <p:cNvSpPr/>
-          <p:nvPr/>
-        </p:nvSpPr>
-        <p:spPr>
-          <a:xfrm>
-            <a:off x="5577840" y="3209544"/>
-            <a:ext cx="374904" cy="374904"/>
-          </a:xfrm>
-          <a:prstGeom prst="rect">
-            <a:avLst/>
-          </a:prstGeom>
-          <a:solidFill>
-            <a:srgbClr val="4A525A"/>
-          </a:solidFill>
-          <a:ln>
-            <a:noFill/>
-          </a:ln>
-          <a:effectLst/>
-        </p:spPr>
-        <p:style>
-          <a:lnRef idx="1">
-            <a:schemeClr val="accent1"/>
-          </a:lnRef>
-          <a:fillRef idx="3">
-            <a:schemeClr val="accent1"/>
-          </a:fillRef>
-          <a:effectRef idx="2">
-            <a:schemeClr val="accent1"/>
-          </a:effectRef>
-          <a:fontRef idx="minor">
-            <a:schemeClr val="lt1"/>
-          </a:fontRef>
-        </p:style>
-        <p:txBody>
-          <a:bodyPr rtlCol="0" anchor="ctr" wrap="square" lIns="73152" rIns="73152"/>
-          <a:lstStyle/>
-          <a:p>
-            <a:pPr algn="ctr"/>
-            <a:r>
-              <a:rPr sz="1400" b="1">
-                <a:solidFill>
-                  <a:srgbClr val="9AA3AB"/>
-                </a:solidFill>
-              </a:rPr>
-              <a:t/>
-            </a:r>
-          </a:p>
-        </p:txBody>
-      </p:sp>
-      <p:sp>
-        <p:nvSpPr>
-          <p:cNvPr id="66" name="Rectangle 65"/>
-          <p:cNvSpPr/>
-          <p:nvPr/>
-        </p:nvSpPr>
-        <p:spPr>
-          <a:xfrm>
-            <a:off x="5980176" y="3209544"/>
-            <a:ext cx="374904" cy="374904"/>
-          </a:xfrm>
-          <a:prstGeom prst="rect">
-            <a:avLst/>
-          </a:prstGeom>
-          <a:solidFill>
-            <a:srgbClr val="4A525A"/>
-          </a:solidFill>
-          <a:ln>
-            <a:noFill/>
-          </a:ln>
-          <a:effectLst/>
-        </p:spPr>
-        <p:style>
-          <a:lnRef idx="1">
-            <a:schemeClr val="accent1"/>
-          </a:lnRef>
-          <a:fillRef idx="3">
-            <a:schemeClr val="accent1"/>
-          </a:fillRef>
-          <a:effectRef idx="2">
-            <a:schemeClr val="accent1"/>
-          </a:effectRef>
-          <a:fontRef idx="minor">
-            <a:schemeClr val="lt1"/>
-          </a:fontRef>
-        </p:style>
-        <p:txBody>
-          <a:bodyPr rtlCol="0" anchor="ctr" wrap="square" lIns="73152" rIns="73152"/>
-          <a:lstStyle/>
-          <a:p>
-            <a:pPr algn="ctr"/>
-            <a:r>
-              <a:rPr sz="1400" b="1">
-                <a:solidFill>
-                  <a:srgbClr val="9AA3AB"/>
-                </a:solidFill>
-              </a:rPr>
-              <a:t/>
-            </a:r>
-          </a:p>
-        </p:txBody>
-      </p:sp>
-      <p:sp>
-        <p:nvSpPr>
-          <p:cNvPr id="67" name="Rectangle 66"/>
-          <p:cNvSpPr/>
-          <p:nvPr/>
-        </p:nvSpPr>
-        <p:spPr>
-          <a:xfrm>
-            <a:off x="6382512" y="3209544"/>
-            <a:ext cx="374904" cy="374904"/>
-          </a:xfrm>
-          <a:prstGeom prst="rect">
-            <a:avLst/>
-          </a:prstGeom>
-          <a:solidFill>
-            <a:srgbClr val="4A525A"/>
-          </a:solidFill>
-          <a:ln>
-            <a:noFill/>
-          </a:ln>
-          <a:effectLst/>
-        </p:spPr>
-        <p:style>
-          <a:lnRef idx="1">
-            <a:schemeClr val="accent1"/>
-          </a:lnRef>
-          <a:fillRef idx="3">
-            <a:schemeClr val="accent1"/>
-          </a:fillRef>
-          <a:effectRef idx="2">
-            <a:schemeClr val="accent1"/>
-          </a:effectRef>
-          <a:fontRef idx="minor">
-            <a:schemeClr val="lt1"/>
-          </a:fontRef>
-        </p:style>
-        <p:txBody>
-          <a:bodyPr rtlCol="0" anchor="ctr" wrap="square" lIns="73152" rIns="73152"/>
-          <a:lstStyle/>
-          <a:p>
-            <a:pPr algn="ctr"/>
-            <a:r>
-              <a:rPr sz="1400" b="1">
-                <a:solidFill>
-                  <a:srgbClr val="9AA3AB"/>
-                </a:solidFill>
-              </a:rPr>
-              <a:t/>
-            </a:r>
-          </a:p>
-        </p:txBody>
-      </p:sp>
-      <p:sp>
-        <p:nvSpPr>
-          <p:cNvPr id="68" name="Rectangle 67"/>
-          <p:cNvSpPr/>
-          <p:nvPr/>
-        </p:nvSpPr>
-        <p:spPr>
-          <a:xfrm>
-            <a:off x="6784848" y="3209544"/>
-            <a:ext cx="374904" cy="374904"/>
-          </a:xfrm>
-          <a:prstGeom prst="rect">
-            <a:avLst/>
-          </a:prstGeom>
-          <a:solidFill>
-            <a:srgbClr val="4A525A"/>
-          </a:solidFill>
-          <a:ln>
-            <a:noFill/>
-          </a:ln>
-          <a:effectLst/>
-        </p:spPr>
-        <p:style>
-          <a:lnRef idx="1">
-            <a:schemeClr val="accent1"/>
-          </a:lnRef>
-          <a:fillRef idx="3">
-            <a:schemeClr val="accent1"/>
-          </a:fillRef>
-          <a:effectRef idx="2">
-            <a:schemeClr val="accent1"/>
-          </a:effectRef>
-          <a:fontRef idx="minor">
-            <a:schemeClr val="lt1"/>
-          </a:fontRef>
-        </p:style>
-        <p:txBody>
-          <a:bodyPr rtlCol="0" anchor="ctr" wrap="square" lIns="73152" rIns="73152"/>
-          <a:lstStyle/>
-          <a:p>
-            <a:pPr algn="ctr"/>
-            <a:r>
-              <a:rPr sz="1400" b="1">
-                <a:solidFill>
-                  <a:srgbClr val="9AA3AB"/>
-                </a:solidFill>
-              </a:rPr>
-              <a:t/>
-            </a:r>
-          </a:p>
-        </p:txBody>
-      </p:sp>
-      <p:sp>
-        <p:nvSpPr>
-          <p:cNvPr id="69" name="TextBox 68"/>
-          <p:cNvSpPr txBox="1"/>
-          <p:nvPr/>
-        </p:nvSpPr>
-        <p:spPr>
-          <a:xfrm>
-            <a:off x="457200" y="3685032"/>
-            <a:ext cx="8229600" cy="365760"/>
-          </a:xfrm>
-          <a:prstGeom prst="rect">
-            <a:avLst/>
-          </a:prstGeom>
-          <a:noFill/>
-        </p:spPr>
-        <p:txBody>
-          <a:bodyPr wrap="square">
-            <a:spAutoFit/>
-          </a:bodyPr>
-          <a:lstStyle/>
-          <a:p>
-            <a:pPr algn="ctr"/>
-            <a:r>
-              <a:rPr sz="1400" b="0" i="0">
-                <a:solidFill>
-                  <a:srgbClr val="9AA3AB"/>
-                </a:solidFill>
-              </a:rPr>
-              <a:t>Each tile remembers where it was reached from. Follow that back from T for the path.</a:t>
-            </a:r>
-          </a:p>
-        </p:txBody>
-      </p:sp>
-      <p:sp>
-        <p:nvSpPr>
-          <p:cNvPr id="70" name="TextBox 69"/>
-          <p:cNvSpPr txBox="1"/>
-          <p:nvPr/>
-        </p:nvSpPr>
-        <p:spPr>
-          <a:xfrm>
-            <a:off x="457200" y="4160520"/>
-            <a:ext cx="8229600" cy="731520"/>
-          </a:xfrm>
-          <a:prstGeom prst="rect">
-            <a:avLst/>
-          </a:prstGeom>
-          <a:noFill/>
-        </p:spPr>
-        <p:txBody>
-          <a:bodyPr wrap="square">
-            <a:spAutoFit/>
-          </a:bodyPr>
-          <a:lstStyle/>
-          <a:p>
-            <a:pPr algn="ctr"/>
-            <a:r>
-              <a:rPr sz="1800" b="1" i="0">
-                <a:solidFill>
-                  <a:srgbClr val="DEE2E6"/>
-                </a:solidFill>
-              </a:rPr>
-              <a:t>Always the shortest path, but it searches in every direction.</a:t>
-            </a:r>
-          </a:p>
-        </p:txBody>
-      </p:sp>
-    </p:spTree>
-  </p:cSld>
-  <p:clrMapOvr>
-    <a:masterClrMapping/>
-  </p:clrMapOvr>
-</p:sld>
-</file>
-
-<file path=ppt/slides/slide27.xml><?xml version="1.0" encoding="utf-8"?>
-<p:sld xmlns:a="http://schemas.openxmlformats.org/drawingml/2006/main" xmlns:p="http://schemas.openxmlformats.org/presentationml/2006/main" xmlns:r="http://schemas.openxmlformats.org/officeDocument/2006/relationships">
-  <p:cSld>
-    <p:spTree>
-      <p:nvGrpSpPr>
-        <p:cNvPr id="1" name=""/>
-        <p:cNvGrpSpPr/>
-        <p:nvPr/>
-      </p:nvGrpSpPr>
-      <p:grpSpPr/>
-      <p:sp>
-        <p:nvSpPr>
-          <p:cNvPr id="2" name="Title 1"/>
-          <p:cNvSpPr>
-            <a:spLocks noGrp="1"/>
-          </p:cNvSpPr>
-          <p:nvPr>
-            <p:ph type="title"/>
-          </p:nvPr>
-        </p:nvSpPr>
-        <p:spPr/>
-        <p:txBody>
-          <a:bodyPr/>
-          <a:lstStyle/>
-          <a:p>
-            <a:pPr indent="0" lvl="0" marL="0" rtl="0" algn="l">
-              <a:spcBef>
-                <a:spcPts val="0"/>
-              </a:spcBef>
-              <a:spcAft>
-                <a:spcPts val="0"/>
-              </a:spcAft>
-              <a:buNone/>
-            </a:pPr>
-            <a:r>
-              <a:rPr lang="en"/>
-              <a:t>A*</a:t>
-            </a:r>
-            <a:endParaRPr/>
-          </a:p>
-        </p:txBody>
-      </p:sp>
-      <p:sp>
-        <p:nvSpPr>
-          <p:cNvPr id="3" name="Text Placeholder 2"/>
-          <p:cNvSpPr>
-            <a:spLocks noGrp="1"/>
-          </p:cNvSpPr>
-          <p:nvPr>
-            <p:ph type="body" idx="1"/>
-          </p:nvPr>
-        </p:nvSpPr>
-        <p:spPr>
-          <a:xfrm>
-            <a:off x="311700" y="885950"/>
-            <a:ext cx="8520600" cy="521208"/>
-          </a:xfrm>
-        </p:spPr>
-        <p:txBody>
-          <a:bodyPr/>
-          <a:lstStyle/>
-          <a:p>
-            <a:pPr indent="-330200" lvl="0" marL="457200" rtl="0" algn="l">
-              <a:spcBef>
-                <a:spcPts val="0"/>
-              </a:spcBef>
-              <a:spcAft>
-                <a:spcPts val="0"/>
-              </a:spcAft>
-              <a:buSzPts val="1600"/>
-              <a:buChar char="●"/>
-            </a:pPr>
-            <a:r>
-              <a:rPr lang="en" b="1"/>
-              <a:t>Continue from the tile where steps so far + estimated steps left is lowest.</a:t>
-            </a:r>
-            <a:endParaRPr/>
-          </a:p>
-        </p:txBody>
-      </p:sp>
-      <p:sp>
-        <p:nvSpPr>
-          <p:cNvPr id="4" name="Rectangle 3"/>
-          <p:cNvSpPr/>
-          <p:nvPr/>
-        </p:nvSpPr>
-        <p:spPr>
-          <a:xfrm>
-            <a:off x="548640" y="1600200"/>
-            <a:ext cx="8046720" cy="2514600"/>
-          </a:xfrm>
-          <a:prstGeom prst="rect">
-            <a:avLst/>
-          </a:prstGeom>
-          <a:solidFill>
-            <a:srgbClr val="17191C"/>
-          </a:solidFill>
-          <a:ln>
-            <a:noFill/>
-          </a:ln>
-          <a:effectLst/>
-        </p:spPr>
-        <p:style>
-          <a:lnRef idx="1">
-            <a:schemeClr val="accent1"/>
-          </a:lnRef>
-          <a:fillRef idx="3">
-            <a:schemeClr val="accent1"/>
-          </a:fillRef>
-          <a:effectRef idx="2">
-            <a:schemeClr val="accent1"/>
-          </a:effectRef>
-          <a:fontRef idx="minor">
-            <a:schemeClr val="lt1"/>
-          </a:fontRef>
-        </p:style>
-        <p:txBody>
-          <a:bodyPr rtlCol="0" anchor="ctr" wrap="square" lIns="164592" rIns="73152"/>
-          <a:lstStyle/>
-          <a:p>
-            <a:pPr algn="l"/>
-            <a:r>
-              <a:rPr sz="1400" b="0">
-                <a:solidFill>
-                  <a:srgbClr val="DEE2E6"/>
-                </a:solidFill>
-              </a:rPr>
-              <a:t/>
-            </a:r>
-            <a:r>
-              <a:rPr sz="1200">
-                <a:solidFill>
-                  <a:srgbClr val="DEE2E6"/>
-                </a:solidFill>
-                <a:latin typeface="Consolas"/>
-              </a:rPr>
-              <a:t>while (open.Count &gt; 0)</a:t>
-            </a:r>
-          </a:p>
-          <a:p>
-            <a:pPr algn="l"/>
-            <a:r>
-              <a:rPr sz="1200">
-                <a:solidFill>
-                  <a:srgbClr val="DEE2E6"/>
-                </a:solidFill>
-                <a:latin typeface="Consolas"/>
-              </a:rPr>
-              <a:t>{</a:t>
-            </a:r>
-          </a:p>
-          <a:p>
-            <a:pPr algn="l"/>
-            <a:r>
-              <a:rPr sz="1200">
-                <a:solidFill>
-                  <a:srgbClr val="DEE2E6"/>
-                </a:solidFill>
-                <a:latin typeface="Consolas"/>
-              </a:rPr>
-              <a:t>    Point tile = open.Dequeue();            // the lowest steps + estimate</a:t>
-            </a:r>
-          </a:p>
-          <a:p>
-            <a:pPr algn="l"/>
-            <a:r>
-              <a:rPr sz="1200">
-                <a:solidFill>
-                  <a:srgbClr val="DEE2E6"/>
-                </a:solidFill>
-                <a:latin typeface="Consolas"/>
-              </a:rPr>
-              <a:t>    if (tile == goal)</a:t>
-            </a:r>
-          </a:p>
-          <a:p>
-            <a:pPr algn="l"/>
-            <a:r>
-              <a:rPr sz="1200">
-                <a:solidFill>
-                  <a:srgbClr val="DEE2E6"/>
-                </a:solidFill>
-                <a:latin typeface="Consolas"/>
-              </a:rPr>
-              <a:t>        return Walk(cameFrom, start, goal);</a:t>
-            </a:r>
-          </a:p>
-          <a:p>
-            <a:pPr algn="l"/>
-            <a:r>
-              <a:rPr sz="1200">
-                <a:solidFill>
-                  <a:srgbClr val="DEE2E6"/>
-                </a:solidFill>
-                <a:latin typeface="Consolas"/>
-              </a:rPr>
-              <a:t> </a:t>
-            </a:r>
-          </a:p>
-          <a:p>
-            <a:pPr algn="l"/>
-            <a:r>
-              <a:rPr sz="1200">
-                <a:solidFill>
-                  <a:srgbClr val="9AA3AB"/>
-                </a:solidFill>
-                <a:latin typeface="Consolas"/>
-              </a:rPr>
-              <a:t>    // for every open neighbour that this is the quickest way to:</a:t>
-            </a:r>
-          </a:p>
-          <a:p>
-            <a:pPr algn="l"/>
-            <a:r>
-              <a:rPr sz="1200">
-                <a:solidFill>
-                  <a:srgbClr val="DEE2E6"/>
-                </a:solidFill>
-                <a:latin typeface="Consolas"/>
-              </a:rPr>
-              <a:t>    steps[next] = steps[tile] + 1;</a:t>
-            </a:r>
-          </a:p>
-          <a:p>
-            <a:pPr algn="l"/>
-            <a:r>
-              <a:rPr sz="1200">
-                <a:solidFill>
-                  <a:srgbClr val="DEE2E6"/>
-                </a:solidFill>
-                <a:latin typeface="Consolas"/>
-              </a:rPr>
-              <a:t>    cameFrom[next] = tile;</a:t>
-            </a:r>
-          </a:p>
-          <a:p>
-            <a:pPr algn="l"/>
-            <a:r>
-              <a:rPr sz="1200">
-                <a:solidFill>
-                  <a:srgbClr val="DEE2E6"/>
-                </a:solidFill>
-                <a:latin typeface="Consolas"/>
-              </a:rPr>
-              <a:t>    open.Enqueue(next, steps[next] + Estimate(maze, next, goal));</a:t>
-            </a:r>
-          </a:p>
-          <a:p>
-            <a:pPr algn="l"/>
-            <a:r>
-              <a:rPr sz="1200">
-                <a:solidFill>
-                  <a:srgbClr val="DEE2E6"/>
-                </a:solidFill>
-                <a:latin typeface="Consolas"/>
-              </a:rPr>
-              <a:t>}</a:t>
-            </a:r>
-          </a:p>
-        </p:txBody>
-      </p:sp>
-      <p:sp>
-        <p:nvSpPr>
-          <p:cNvPr id="5" name="TextBox 4"/>
-          <p:cNvSpPr txBox="1"/>
-          <p:nvPr/>
-        </p:nvSpPr>
-        <p:spPr>
-          <a:xfrm>
-            <a:off x="457200" y="4251960"/>
-            <a:ext cx="8229600" cy="731520"/>
-          </a:xfrm>
-          <a:prstGeom prst="rect">
-            <a:avLst/>
-          </a:prstGeom>
-          <a:noFill/>
-        </p:spPr>
-        <p:txBody>
-          <a:bodyPr wrap="square">
-            <a:spAutoFit/>
-          </a:bodyPr>
-          <a:lstStyle/>
-          <a:p>
-            <a:pPr algn="ctr"/>
-            <a:r>
-              <a:rPr sz="1600" b="1" i="0">
-                <a:solidFill>
-                  <a:srgbClr val="DEE2E6"/>
-                </a:solidFill>
-              </a:rPr>
-              <a:t>The estimate must never be higher than the real distance.</a:t>
-            </a:r>
-          </a:p>
-        </p:txBody>
-      </p:sp>
-    </p:spTree>
-  </p:cSld>
-  <p:clrMapOvr>
-    <a:masterClrMapping/>
-  </p:clrMapOvr>
-</p:sld>
-</file>
-
-<file path=ppt/slides/slide28.xml><?xml version="1.0" encoding="utf-8"?>
 <p:sld xmlns:a="http://schemas.openxmlformats.org/drawingml/2006/main" xmlns:p="http://schemas.openxmlformats.org/presentationml/2006/main" xmlns:r="http://schemas.openxmlformats.org/officeDocument/2006/relationships">
   <p:cSld>
     <p:spTree>
@@ -21473,7 +17484,7 @@
                   <a:srgbClr val="9AA3AB"/>
                 </a:solidFill>
               </a:rPr>
-              <a:t>the first step of the path A* finds</a:t>
+              <a:t>the first step of the shortest path</a:t>
             </a:r>
           </a:p>
           <a:p>
@@ -21520,6 +17531,238 @@
               </a:rPr>
               <a:t>Both are an IRouteStrategy. Which one a ghost gets is one argument in World.</a:t>
             </a:r>
+          </a:p>
+        </p:txBody>
+      </p:sp>
+    </p:spTree>
+  </p:cSld>
+  <p:clrMapOvr>
+    <a:masterClrMapping/>
+  </p:clrMapOvr>
+</p:sld>
+</file>
+
+<file path=ppt/slides/slide27.xml><?xml version="1.0" encoding="utf-8"?>
+<p:sld xmlns:a="http://schemas.openxmlformats.org/drawingml/2006/main" xmlns:p="http://schemas.openxmlformats.org/presentationml/2006/main" xmlns:r="http://schemas.openxmlformats.org/officeDocument/2006/relationships">
+  <p:cSld>
+    <p:spTree>
+      <p:nvGrpSpPr>
+        <p:cNvPr id="1" name=""/>
+        <p:cNvGrpSpPr/>
+        <p:nvPr/>
+      </p:nvGrpSpPr>
+      <p:grpSpPr/>
+      <p:sp>
+        <p:nvSpPr>
+          <p:cNvPr id="2" name="Title 1"/>
+          <p:cNvSpPr>
+            <a:spLocks noGrp="1"/>
+          </p:cNvSpPr>
+          <p:nvPr>
+            <p:ph type="title"/>
+          </p:nvPr>
+        </p:nvSpPr>
+        <p:spPr/>
+        <p:txBody>
+          <a:bodyPr/>
+          <a:lstStyle/>
+          <a:p>
+            <a:pPr indent="0" lvl="0" marL="0" rtl="0" algn="l">
+              <a:spcBef>
+                <a:spcPts val="0"/>
+              </a:spcBef>
+              <a:spcAft>
+                <a:spcPts val="0"/>
+              </a:spcAft>
+              <a:buNone/>
+            </a:pPr>
+            <a:r>
+              <a:rPr lang="en"/>
+              <a:t>Pathfinding Implementation</a:t>
+            </a:r>
+            <a:endParaRPr/>
+          </a:p>
+        </p:txBody>
+      </p:sp>
+      <p:sp>
+        <p:nvSpPr>
+          <p:cNvPr id="3" name="Text Placeholder 2"/>
+          <p:cNvSpPr>
+            <a:spLocks noGrp="1"/>
+          </p:cNvSpPr>
+          <p:nvPr>
+            <p:ph type="body" idx="1"/>
+          </p:nvPr>
+        </p:nvSpPr>
+        <p:spPr>
+          <a:xfrm>
+            <a:off x="311700" y="885950"/>
+            <a:ext cx="8520600" cy="4023300"/>
+          </a:xfrm>
+        </p:spPr>
+        <p:txBody>
+          <a:bodyPr anchorCtr="0" anchor="ctr" bIns="91425" lIns="91425" spcFirstLastPara="1" rIns="91425" wrap="square" tIns="91425">
+            <a:normAutofit/>
+          </a:bodyPr>
+          <a:lstStyle/>
+          <a:p>
+            <a:pPr indent="0" lvl="0" marL="0" rtl="0" algn="ctr">
+              <a:spcBef>
+                <a:spcPts val="0"/>
+              </a:spcBef>
+              <a:spcAft>
+                <a:spcPts val="1200"/>
+              </a:spcAft>
+              <a:buNone/>
+            </a:pPr>
+            <a:r>
+              <a:rPr lang="en" sz="2900">
+                <a:latin typeface="VT323"/>
+                <a:ea typeface="VT323"/>
+                <a:cs typeface="VT323"/>
+                <a:sym typeface="VT323"/>
+              </a:rPr>
+              <a:t>DEMO!</a:t>
+            </a:r>
+            <a:endParaRPr/>
+          </a:p>
+          <a:p>
+            <a:pPr indent="0" lvl="0" marL="0" rtl="0" algn="ctr">
+              <a:spcBef>
+                <a:spcPts val="0"/>
+              </a:spcBef>
+              <a:spcAft>
+                <a:spcPts val="0"/>
+              </a:spcAft>
+              <a:buNone/>
+            </a:pPr>
+            <a:r>
+              <a:rPr lang="en" sz="1800"/>
+              <a:t>Pacman4: routing strategies, and the shortest path for the eyes</a:t>
+            </a:r>
+            <a:endParaRPr sz="1800"/>
+          </a:p>
+        </p:txBody>
+      </p:sp>
+    </p:spTree>
+  </p:cSld>
+  <p:clrMapOvr>
+    <a:masterClrMapping/>
+  </p:clrMapOvr>
+</p:sld>
+</file>
+
+<file path=ppt/slides/slide28.xml><?xml version="1.0" encoding="utf-8"?>
+<p:sld xmlns:a="http://schemas.openxmlformats.org/drawingml/2006/main" xmlns:p="http://schemas.openxmlformats.org/presentationml/2006/main" xmlns:r="http://schemas.openxmlformats.org/officeDocument/2006/relationships">
+  <p:cSld>
+    <p:spTree>
+      <p:nvGrpSpPr>
+        <p:cNvPr id="1" name=""/>
+        <p:cNvGrpSpPr/>
+        <p:nvPr/>
+      </p:nvGrpSpPr>
+      <p:grpSpPr/>
+      <p:sp>
+        <p:nvSpPr>
+          <p:cNvPr id="2" name="Title 1"/>
+          <p:cNvSpPr>
+            <a:spLocks noGrp="1"/>
+          </p:cNvSpPr>
+          <p:nvPr>
+            <p:ph type="title"/>
+          </p:nvPr>
+        </p:nvSpPr>
+        <p:spPr/>
+        <p:txBody>
+          <a:bodyPr/>
+          <a:lstStyle/>
+          <a:p>
+            <a:pPr indent="0" lvl="0" marL="0" rtl="0" algn="l">
+              <a:spcBef>
+                <a:spcPts val="0"/>
+              </a:spcBef>
+              <a:spcAft>
+                <a:spcPts val="0"/>
+              </a:spcAft>
+              <a:buNone/>
+            </a:pPr>
+            <a:r>
+              <a:rPr lang="en"/>
+              <a:t>Try It: The Shortest Path</a:t>
+            </a:r>
+            <a:endParaRPr/>
+          </a:p>
+        </p:txBody>
+      </p:sp>
+      <p:sp>
+        <p:nvSpPr>
+          <p:cNvPr id="3" name="Text Placeholder 2"/>
+          <p:cNvSpPr>
+            <a:spLocks noGrp="1"/>
+          </p:cNvSpPr>
+          <p:nvPr>
+            <p:ph type="body" idx="1"/>
+          </p:nvPr>
+        </p:nvSpPr>
+        <p:spPr>
+          <a:xfrm>
+            <a:off x="311700" y="885950"/>
+            <a:ext cx="8520600" cy="1289304"/>
+          </a:xfrm>
+        </p:spPr>
+        <p:txBody>
+          <a:bodyPr/>
+          <a:lstStyle/>
+          <a:p>
+            <a:pPr indent="-330200" lvl="0" marL="457200" rtl="0" algn="l">
+              <a:spcBef>
+                <a:spcPts val="0"/>
+              </a:spcBef>
+              <a:spcAft>
+                <a:spcPts val="0"/>
+              </a:spcAft>
+              <a:buSzPts val="1600"/>
+              <a:buChar char="●"/>
+            </a:pPr>
+            <a:r>
+              <a:rPr lang="en"/>
+              <a:t>In Pacman4’s World:</a:t>
+            </a:r>
+            <a:endParaRPr/>
+          </a:p>
+          <a:p>
+            <a:pPr indent="-330200" lvl="0" marL="457200" rtl="0" algn="l">
+              <a:spcBef>
+                <a:spcPts val="0"/>
+              </a:spcBef>
+              <a:spcAft>
+                <a:spcPts val="0"/>
+              </a:spcAft>
+              <a:buSzPts val="1600"/>
+              <a:buChar char="●"/>
+            </a:pPr>
+            <a:r>
+              <a:rPr lang="en"/>
+              <a:t>Give Blinky new ShortestPath()</a:t>
+            </a:r>
+            <a:endParaRPr/>
+          </a:p>
+          <a:p>
+            <a:pPr indent="-330200" lvl="0" marL="457200" rtl="0" algn="l">
+              <a:spcBef>
+                <a:spcPts val="0"/>
+              </a:spcBef>
+              <a:spcAft>
+                <a:spcPts val="0"/>
+              </a:spcAft>
+              <a:buSzPts val="1600"/>
+              <a:buChar char="●"/>
+            </a:pPr>
+            <a:r>
+              <a:rPr lang="en"/>
+              <a:t>Then give it to all four: what happens to the game?</a:t>
+            </a:r>
+            <a:endParaRPr/>
           </a:p>
         </p:txBody>
       </p:sp>
@@ -21543,93 +17786,727 @@
       <p:grpSpPr/>
       <p:sp>
         <p:nvSpPr>
-          <p:cNvPr id="2" name="Title 1"/>
-          <p:cNvSpPr>
-            <a:spLocks noGrp="1"/>
-          </p:cNvSpPr>
+          <p:cNvPr id="140" name="Google Shape;140;p23"/>
+          <p:cNvSpPr txBox="1"/>
           <p:nvPr>
             <p:ph type="title"/>
           </p:nvPr>
         </p:nvSpPr>
-        <p:spPr/>
-        <p:txBody>
-          <a:bodyPr/>
-          <a:lstStyle/>
-          <a:p>
-            <a:pPr indent="0" lvl="0" marL="0" rtl="0" algn="l">
-              <a:spcBef>
-                <a:spcPts val="0"/>
-              </a:spcBef>
-              <a:spcAft>
-                <a:spcPts val="0"/>
-              </a:spcAft>
-              <a:buNone/>
-            </a:pPr>
-            <a:r>
-              <a:rPr lang="en"/>
-              <a:t>Pathfinding Implementation</a:t>
-            </a:r>
-            <a:endParaRPr/>
-          </a:p>
-        </p:txBody>
-      </p:sp>
-      <p:sp>
-        <p:nvSpPr>
-          <p:cNvPr id="3" name="Text Placeholder 2"/>
-          <p:cNvSpPr>
-            <a:spLocks noGrp="1"/>
-          </p:cNvSpPr>
-          <p:nvPr>
-            <p:ph type="body" idx="1"/>
-          </p:nvPr>
-        </p:nvSpPr>
         <p:spPr>
           <a:xfrm>
-            <a:off x="311700" y="885950"/>
-            <a:ext cx="8520600" cy="4023300"/>
+            <a:off x="311700" y="195615"/>
+            <a:ext cx="8520600" cy="572700"/>
           </a:xfrm>
+          <a:prstGeom prst="rect">
+            <a:avLst/>
+          </a:prstGeom>
         </p:spPr>
         <p:txBody>
-          <a:bodyPr anchorCtr="0" anchor="ctr" bIns="91425" lIns="91425" spcFirstLastPara="1" rIns="91425" wrap="square" tIns="91425">
-            <a:normAutofit/>
+          <a:bodyPr anchorCtr="0" anchor="t" bIns="91425" lIns="91425" spcFirstLastPara="1" rIns="91425" wrap="square" tIns="91425">
+            <a:normAutofit fontScale="90000"/>
           </a:bodyPr>
           <a:lstStyle/>
           <a:p>
-            <a:pPr indent="0" lvl="0" marL="0" rtl="0" algn="ctr">
-              <a:spcBef>
-                <a:spcPts val="0"/>
-              </a:spcBef>
-              <a:spcAft>
-                <a:spcPts val="1200"/>
-              </a:spcAft>
-              <a:buNone/>
-            </a:pPr>
-            <a:r>
-              <a:rPr lang="en" sz="2900">
-                <a:latin typeface="VT323"/>
-                <a:ea typeface="VT323"/>
-                <a:cs typeface="VT323"/>
-                <a:sym typeface="VT323"/>
-              </a:rPr>
-              <a:t>DEMO!</a:t>
+            <a:pPr indent="0" lvl="0" marL="0" rtl="0" algn="l">
+              <a:spcBef>
+                <a:spcPts val="0"/>
+              </a:spcBef>
+              <a:spcAft>
+                <a:spcPts val="0"/>
+              </a:spcAft>
+              <a:buNone/>
+            </a:pPr>
+            <a:r>
+              <a:rPr lang="en"/>
+              <a:t>Testing the Ghosts</a:t>
             </a:r>
             <a:endParaRPr/>
           </a:p>
-          <a:p>
-            <a:pPr indent="0" lvl="0" marL="0" rtl="0" algn="ctr">
-              <a:spcBef>
-                <a:spcPts val="0"/>
-              </a:spcBef>
-              <a:spcAft>
-                <a:spcPts val="0"/>
-              </a:spcAft>
-              <a:buNone/>
-            </a:pPr>
-            <a:r>
-              <a:rPr lang="en" sz="1800"/>
-              <a:t>Pacman4: routing strategies, and A* for the eyes</a:t>
-            </a:r>
-            <a:endParaRPr sz="1800"/>
+        </p:txBody>
+      </p:sp>
+      <p:sp>
+        <p:nvSpPr>
+          <p:cNvPr id="293" name="Google Shape;293;p45"/>
+          <p:cNvSpPr txBox="1"/>
+          <p:nvPr>
+            <p:ph type="title"/>
+          </p:nvPr>
+        </p:nvSpPr>
+        <p:spPr>
+          <a:xfrm>
+            <a:off x="311700" y="1152475"/>
+            <a:ext cx="3700000" cy="3500000"/>
+          </a:xfrm>
+          <a:prstGeom prst="rect">
+            <a:avLst/>
+          </a:prstGeom>
+        </p:spPr>
+        <p:txBody>
+          <a:bodyPr anchorCtr="0" anchor="t" bIns="91425" lIns="91425" spcFirstLastPara="1" rIns="91425" wrap="square" tIns="91425">
+            <a:normAutofit fontScale="90000"/>
+          </a:bodyPr>
+          <a:lstStyle/>
+          <a:p>
+            <a:pPr indent="-330200" lvl="0" marL="457200" rtl="0" algn="l">
+              <a:buClr>
+                <a:srgbClr val="DEE2E6"/>
+              </a:buClr>
+              <a:spcBef>
+                <a:spcPts val="0"/>
+              </a:spcBef>
+              <a:spcAft>
+                <a:spcPts val="0"/>
+              </a:spcAft>
+              <a:buSzPts val="1600"/>
+              <a:buChar char="●"/>
+            </a:pPr>
+            <a:r>
+              <a:rPr lang="en" sz="1600">
+                <a:solidFill>
+                  <a:srgbClr val="DEE2E6"/>
+                </a:solidFill>
+              </a:rPr>
+              <a:t>A strategy: one small class, one method</a:t>
+            </a:r>
+            <a:endParaRPr/>
+          </a:p>
+          <a:p>
+            <a:pPr indent="-317500" lvl="1" marL="914400" rtl="0" algn="l">
+              <a:buClr>
+                <a:srgbClr val="6C757D"/>
+              </a:buClr>
+              <a:spcBef>
+                <a:spcPts val="0"/>
+              </a:spcBef>
+              <a:spcAft>
+                <a:spcPts val="0"/>
+              </a:spcAft>
+              <a:buSzPts val="1400"/>
+              <a:buChar char="○"/>
+            </a:pPr>
+            <a:r>
+              <a:rPr lang="en" sz="1400">
+                <a:solidFill>
+                  <a:srgbClr val="6C757D"/>
+                </a:solidFill>
+              </a:rPr>
+              <a:t>Put Pac-Man somewhere, check the target</a:t>
+            </a:r>
+            <a:endParaRPr/>
+          </a:p>
+          <a:p>
+            <a:pPr indent="-330200" lvl="0" marL="457200" rtl="0" algn="l">
+              <a:buClr>
+                <a:srgbClr val="DEE2E6"/>
+              </a:buClr>
+              <a:spcBef>
+                <a:spcPts val="0"/>
+              </a:spcBef>
+              <a:spcAft>
+                <a:spcPts val="0"/>
+              </a:spcAft>
+              <a:buSzPts val="1600"/>
+              <a:buChar char="●"/>
+            </a:pPr>
+            <a:r>
+              <a:rPr lang="en" sz="1600">
+                <a:solidFill>
+                  <a:srgbClr val="DEE2E6"/>
+                </a:solidFill>
+              </a:rPr>
+              <a:t>Inky’s target is invisible when playing</a:t>
+            </a:r>
+            <a:endParaRPr/>
+          </a:p>
+          <a:p>
+            <a:pPr indent="-317500" lvl="1" marL="914400" rtl="0" algn="l">
+              <a:buClr>
+                <a:srgbClr val="6C757D"/>
+              </a:buClr>
+              <a:spcBef>
+                <a:spcPts val="0"/>
+              </a:spcBef>
+              <a:spcAft>
+                <a:spcPts val="0"/>
+              </a:spcAft>
+              <a:buSzPts val="1400"/>
+              <a:buChar char="○"/>
+            </a:pPr>
+            <a:r>
+              <a:rPr lang="en" sz="1400">
+                <a:solidFill>
+                  <a:srgbClr val="6C757D"/>
+                </a:solidFill>
+              </a:rPr>
+              <a:t>The test checks it with numbers you can work out on paper</a:t>
+            </a:r>
+            <a:endParaRPr/>
+          </a:p>
+          <a:p>
+            <a:pPr indent="-330200" lvl="0" marL="457200" rtl="0" algn="l">
+              <a:buClr>
+                <a:srgbClr val="DEE2E6"/>
+              </a:buClr>
+              <a:spcBef>
+                <a:spcPts val="0"/>
+              </a:spcBef>
+              <a:spcAft>
+                <a:spcPts val="0"/>
+              </a:spcAft>
+              <a:buSzPts val="1600"/>
+              <a:buChar char="●"/>
+            </a:pPr>
+            <a:r>
+              <a:rPr lang="en" sz="1600">
+                <a:solidFill>
+                  <a:srgbClr val="DEE2E6"/>
+                </a:solidFill>
+              </a:rPr>
+              <a:t>The states: put a ghost in a state, make something happen, check the state after</a:t>
+            </a:r>
+            <a:endParaRPr/>
+          </a:p>
+          <a:p>
+            <a:pPr indent="-330200" lvl="0" marL="457200" rtl="0" algn="l">
+              <a:buClr>
+                <a:srgbClr val="DEE2E6"/>
+              </a:buClr>
+              <a:spcBef>
+                <a:spcPts val="0"/>
+              </a:spcBef>
+              <a:spcAft>
+                <a:spcPts val="0"/>
+              </a:spcAft>
+              <a:buSzPts val="1600"/>
+              <a:buChar char="●"/>
+            </a:pPr>
+            <a:r>
+              <a:rPr lang="en" sz="1600">
+                <a:solidFill>
+                  <a:srgbClr val="DEE2E6"/>
+                </a:solidFill>
+              </a:rPr>
+              <a:t>A small test maze, and a seeded Random</a:t>
+            </a:r>
+            <a:endParaRPr/>
+          </a:p>
+        </p:txBody>
+      </p:sp>
+      <p:sp>
+        <p:nvSpPr>
+          <p:cNvPr id="141" name="Google Shape;141;p23"/>
+          <p:cNvSpPr txBox="1"/>
+          <p:nvPr>
+            <p:ph idx="2" type="body"/>
+          </p:nvPr>
+        </p:nvSpPr>
+        <p:spPr>
+          <a:xfrm>
+            <a:off x="4150000" y="1152475"/>
+            <a:ext cx="4750000" cy="3600000"/>
+          </a:xfrm>
+          <a:prstGeom prst="rect">
+            <a:avLst/>
+          </a:prstGeom>
+        </p:spPr>
+        <p:txBody>
+          <a:bodyPr anchorCtr="0" anchor="t" bIns="91425" lIns="91425" spcFirstLastPara="1" rIns="91425" wrap="square" tIns="91425">
+            <a:noAutofit/>
+          </a:bodyPr>
+          <a:lstStyle/>
+          <a:p>
+            <a:pPr indent="0" lvl="0" marL="0" rtl="0" algn="l">
+              <a:lnSpc>
+                <a:spcPct val="115000"/>
+              </a:lnSpc>
+              <a:spcBef>
+                <a:spcPts val="0"/>
+              </a:spcBef>
+              <a:spcAft>
+                <a:spcPts val="0"/>
+              </a:spcAft>
+              <a:buNone/>
+            </a:pPr>
+            <a:r>
+              <a:rPr lang="en" sz="1000">
+                <a:highlight>
+                  <a:schemeClr val="dk2"/>
+                </a:highlight>
+                <a:latin typeface="Consolas"/>
+                <a:ea typeface="Consolas"/>
+                <a:cs typeface="Consolas"/>
+                <a:sym typeface="Consolas"/>
+              </a:rPr>
+              <a:t>[Fact]</a:t>
+            </a:r>
+            <a:endParaRPr sz="1000">
+              <a:solidFill>
+                <a:srgbClr val="CCCCCC"/>
+              </a:solidFill>
+              <a:highlight>
+                <a:schemeClr val="dk2"/>
+              </a:highlight>
+              <a:latin typeface="Consolas"/>
+              <a:ea typeface="Consolas"/>
+              <a:cs typeface="Consolas"/>
+              <a:sym typeface="Consolas"/>
+            </a:endParaRPr>
+          </a:p>
+          <a:p>
+            <a:pPr indent="0" lvl="0" marL="0" rtl="0" algn="l">
+              <a:lnSpc>
+                <a:spcPct val="115000"/>
+              </a:lnSpc>
+              <a:spcBef>
+                <a:spcPts val="0"/>
+              </a:spcBef>
+              <a:spcAft>
+                <a:spcPts val="0"/>
+              </a:spcAft>
+              <a:buNone/>
+            </a:pPr>
+            <a:r>
+              <a:rPr lang="en" sz="1000">
+                <a:highlight>
+                  <a:schemeClr val="dk2"/>
+                </a:highlight>
+                <a:latin typeface="Consolas"/>
+                <a:ea typeface="Consolas"/>
+                <a:cs typeface="Consolas"/>
+                <a:sym typeface="Consolas"/>
+              </a:rPr>
+              <a:t>public void Inky_doubles_the_line_from_Blinky()</a:t>
+            </a:r>
+            <a:endParaRPr sz="1000">
+              <a:solidFill>
+                <a:srgbClr val="CCCCCC"/>
+              </a:solidFill>
+              <a:highlight>
+                <a:schemeClr val="dk2"/>
+              </a:highlight>
+              <a:latin typeface="Consolas"/>
+              <a:ea typeface="Consolas"/>
+              <a:cs typeface="Consolas"/>
+              <a:sym typeface="Consolas"/>
+            </a:endParaRPr>
+          </a:p>
+          <a:p>
+            <a:pPr indent="0" lvl="0" marL="0" rtl="0" algn="l">
+              <a:lnSpc>
+                <a:spcPct val="115000"/>
+              </a:lnSpc>
+              <a:spcBef>
+                <a:spcPts val="0"/>
+              </a:spcBef>
+              <a:spcAft>
+                <a:spcPts val="0"/>
+              </a:spcAft>
+              <a:buNone/>
+            </a:pPr>
+            <a:r>
+              <a:rPr lang="en" sz="1000">
+                <a:highlight>
+                  <a:schemeClr val="dk2"/>
+                </a:highlight>
+                <a:latin typeface="Consolas"/>
+                <a:ea typeface="Consolas"/>
+                <a:cs typeface="Consolas"/>
+                <a:sym typeface="Consolas"/>
+              </a:rPr>
+              <a:t>{</a:t>
+            </a:r>
+            <a:endParaRPr sz="1000">
+              <a:solidFill>
+                <a:srgbClr val="CCCCCC"/>
+              </a:solidFill>
+              <a:highlight>
+                <a:schemeClr val="dk2"/>
+              </a:highlight>
+              <a:latin typeface="Consolas"/>
+              <a:ea typeface="Consolas"/>
+              <a:cs typeface="Consolas"/>
+              <a:sym typeface="Consolas"/>
+            </a:endParaRPr>
+          </a:p>
+          <a:p>
+            <a:pPr indent="0" lvl="0" marL="0" rtl="0" algn="l">
+              <a:lnSpc>
+                <a:spcPct val="115000"/>
+              </a:lnSpc>
+              <a:spcBef>
+                <a:spcPts val="0"/>
+              </a:spcBef>
+              <a:spcAft>
+                <a:spcPts val="0"/>
+              </a:spcAft>
+              <a:buNone/>
+            </a:pPr>
+            <a:r>
+              <a:rPr lang="en" sz="1000">
+                <a:highlight>
+                  <a:schemeClr val="dk2"/>
+                </a:highlight>
+                <a:latin typeface="Consolas"/>
+                <a:ea typeface="Consolas"/>
+                <a:cs typeface="Consolas"/>
+                <a:sym typeface="Consolas"/>
+              </a:rPr>
+              <a:t>    _world.PacMan.Place(</a:t>
+            </a:r>
+            <a:endParaRPr sz="1000">
+              <a:solidFill>
+                <a:srgbClr val="CCCCCC"/>
+              </a:solidFill>
+              <a:highlight>
+                <a:schemeClr val="dk2"/>
+              </a:highlight>
+              <a:latin typeface="Consolas"/>
+              <a:ea typeface="Consolas"/>
+              <a:cs typeface="Consolas"/>
+              <a:sym typeface="Consolas"/>
+            </a:endParaRPr>
+          </a:p>
+          <a:p>
+            <a:pPr indent="0" lvl="0" marL="0" rtl="0" algn="l">
+              <a:lnSpc>
+                <a:spcPct val="115000"/>
+              </a:lnSpc>
+              <a:spcBef>
+                <a:spcPts val="0"/>
+              </a:spcBef>
+              <a:spcAft>
+                <a:spcPts val="0"/>
+              </a:spcAft>
+              <a:buNone/>
+            </a:pPr>
+            <a:r>
+              <a:rPr lang="en" sz="1000">
+                <a:highlight>
+                  <a:schemeClr val="dk2"/>
+                </a:highlight>
+                <a:latin typeface="Consolas"/>
+                <a:ea typeface="Consolas"/>
+                <a:cs typeface="Consolas"/>
+                <a:sym typeface="Consolas"/>
+              </a:rPr>
+              <a:t>        new Point(5, 1), Direction.Right);</a:t>
+            </a:r>
+            <a:endParaRPr sz="1000">
+              <a:solidFill>
+                <a:srgbClr val="CCCCCC"/>
+              </a:solidFill>
+              <a:highlight>
+                <a:schemeClr val="dk2"/>
+              </a:highlight>
+              <a:latin typeface="Consolas"/>
+              <a:ea typeface="Consolas"/>
+              <a:cs typeface="Consolas"/>
+              <a:sym typeface="Consolas"/>
+            </a:endParaRPr>
+          </a:p>
+          <a:p>
+            <a:pPr indent="0" lvl="0" marL="0" rtl="0" algn="l">
+              <a:lnSpc>
+                <a:spcPct val="115000"/>
+              </a:lnSpc>
+              <a:spcBef>
+                <a:spcPts val="0"/>
+              </a:spcBef>
+              <a:spcAft>
+                <a:spcPts val="0"/>
+              </a:spcAft>
+              <a:buNone/>
+            </a:pPr>
+            <a:r>
+              <a:rPr lang="en" sz="1000">
+                <a:highlight>
+                  <a:schemeClr val="dk2"/>
+                </a:highlight>
+                <a:latin typeface="Consolas"/>
+                <a:ea typeface="Consolas"/>
+                <a:cs typeface="Consolas"/>
+                <a:sym typeface="Consolas"/>
+              </a:rPr>
+              <a:t>    _world.Blinky.Place(</a:t>
+            </a:r>
+            <a:endParaRPr sz="1000">
+              <a:solidFill>
+                <a:srgbClr val="CCCCCC"/>
+              </a:solidFill>
+              <a:highlight>
+                <a:schemeClr val="dk2"/>
+              </a:highlight>
+              <a:latin typeface="Consolas"/>
+              <a:ea typeface="Consolas"/>
+              <a:cs typeface="Consolas"/>
+              <a:sym typeface="Consolas"/>
+            </a:endParaRPr>
+          </a:p>
+          <a:p>
+            <a:pPr indent="0" lvl="0" marL="0" rtl="0" algn="l">
+              <a:lnSpc>
+                <a:spcPct val="115000"/>
+              </a:lnSpc>
+              <a:spcBef>
+                <a:spcPts val="0"/>
+              </a:spcBef>
+              <a:spcAft>
+                <a:spcPts val="0"/>
+              </a:spcAft>
+              <a:buNone/>
+            </a:pPr>
+            <a:r>
+              <a:rPr lang="en" sz="1000">
+                <a:highlight>
+                  <a:schemeClr val="dk2"/>
+                </a:highlight>
+                <a:latin typeface="Consolas"/>
+                <a:ea typeface="Consolas"/>
+                <a:cs typeface="Consolas"/>
+                <a:sym typeface="Consolas"/>
+              </a:rPr>
+              <a:t>        new Point(3, 3), Direction.Left);</a:t>
+            </a:r>
+            <a:endParaRPr sz="1000">
+              <a:solidFill>
+                <a:srgbClr val="CCCCCC"/>
+              </a:solidFill>
+              <a:highlight>
+                <a:schemeClr val="dk2"/>
+              </a:highlight>
+              <a:latin typeface="Consolas"/>
+              <a:ea typeface="Consolas"/>
+              <a:cs typeface="Consolas"/>
+              <a:sym typeface="Consolas"/>
+            </a:endParaRPr>
+          </a:p>
+          <a:p>
+            <a:pPr indent="0" lvl="0" marL="0" rtl="0" algn="l">
+              <a:lnSpc>
+                <a:spcPct val="115000"/>
+              </a:lnSpc>
+              <a:spcBef>
+                <a:spcPts val="0"/>
+              </a:spcBef>
+              <a:spcAft>
+                <a:spcPts val="0"/>
+              </a:spcAft>
+              <a:buNone/>
+            </a:pPr>
+            <a:r>
+              <a:rPr lang="en" sz="1000">
+                <a:highlight>
+                  <a:schemeClr val="dk2"/>
+                </a:highlight>
+                <a:latin typeface="Consolas"/>
+                <a:ea typeface="Consolas"/>
+                <a:cs typeface="Consolas"/>
+                <a:sym typeface="Consolas"/>
+              </a:rPr>
+              <a:t/>
+            </a:r>
+            <a:endParaRPr sz="1000">
+              <a:solidFill>
+                <a:srgbClr val="CCCCCC"/>
+              </a:solidFill>
+              <a:highlight>
+                <a:schemeClr val="dk2"/>
+              </a:highlight>
+              <a:latin typeface="Consolas"/>
+              <a:ea typeface="Consolas"/>
+              <a:cs typeface="Consolas"/>
+              <a:sym typeface="Consolas"/>
+            </a:endParaRPr>
+          </a:p>
+          <a:p>
+            <a:pPr indent="0" lvl="0" marL="0" rtl="0" algn="l">
+              <a:lnSpc>
+                <a:spcPct val="115000"/>
+              </a:lnSpc>
+              <a:spcBef>
+                <a:spcPts val="0"/>
+              </a:spcBef>
+              <a:spcAft>
+                <a:spcPts val="0"/>
+              </a:spcAft>
+              <a:buNone/>
+            </a:pPr>
+            <a:r>
+              <a:rPr lang="en" sz="1000">
+                <a:highlight>
+                  <a:schemeClr val="dk2"/>
+                </a:highlight>
+                <a:latin typeface="Consolas"/>
+                <a:ea typeface="Consolas"/>
+                <a:cs typeface="Consolas"/>
+                <a:sym typeface="Consolas"/>
+              </a:rPr>
+              <a:t>    // Two ahead of Pac-Man: (7, 1).</a:t>
+            </a:r>
+            <a:endParaRPr sz="1000">
+              <a:solidFill>
+                <a:srgbClr val="CCCCCC"/>
+              </a:solidFill>
+              <a:highlight>
+                <a:schemeClr val="dk2"/>
+              </a:highlight>
+              <a:latin typeface="Consolas"/>
+              <a:ea typeface="Consolas"/>
+              <a:cs typeface="Consolas"/>
+              <a:sym typeface="Consolas"/>
+            </a:endParaRPr>
+          </a:p>
+          <a:p>
+            <a:pPr indent="0" lvl="0" marL="0" rtl="0" algn="l">
+              <a:lnSpc>
+                <a:spcPct val="115000"/>
+              </a:lnSpc>
+              <a:spcBef>
+                <a:spcPts val="0"/>
+              </a:spcBef>
+              <a:spcAft>
+                <a:spcPts val="0"/>
+              </a:spcAft>
+              <a:buNone/>
+            </a:pPr>
+            <a:r>
+              <a:rPr lang="en" sz="1000">
+                <a:highlight>
+                  <a:schemeClr val="dk2"/>
+                </a:highlight>
+                <a:latin typeface="Consolas"/>
+                <a:ea typeface="Consolas"/>
+                <a:cs typeface="Consolas"/>
+                <a:sym typeface="Consolas"/>
+              </a:rPr>
+              <a:t>    // From Blinky: (+4, -2), doubled.</a:t>
+            </a:r>
+            <a:endParaRPr sz="1000">
+              <a:solidFill>
+                <a:srgbClr val="CCCCCC"/>
+              </a:solidFill>
+              <a:highlight>
+                <a:schemeClr val="dk2"/>
+              </a:highlight>
+              <a:latin typeface="Consolas"/>
+              <a:ea typeface="Consolas"/>
+              <a:cs typeface="Consolas"/>
+              <a:sym typeface="Consolas"/>
+            </a:endParaRPr>
+          </a:p>
+          <a:p>
+            <a:pPr indent="0" lvl="0" marL="0" rtl="0" algn="l">
+              <a:lnSpc>
+                <a:spcPct val="115000"/>
+              </a:lnSpc>
+              <a:spcBef>
+                <a:spcPts val="0"/>
+              </a:spcBef>
+              <a:spcAft>
+                <a:spcPts val="0"/>
+              </a:spcAft>
+              <a:buNone/>
+            </a:pPr>
+            <a:r>
+              <a:rPr lang="en" sz="1000">
+                <a:highlight>
+                  <a:schemeClr val="dk2"/>
+                </a:highlight>
+                <a:latin typeface="Consolas"/>
+                <a:ea typeface="Consolas"/>
+                <a:cs typeface="Consolas"/>
+                <a:sym typeface="Consolas"/>
+              </a:rPr>
+              <a:t>    Assert.Equal(new Point(11, -1),</a:t>
+            </a:r>
+            <a:endParaRPr sz="1000">
+              <a:solidFill>
+                <a:srgbClr val="CCCCCC"/>
+              </a:solidFill>
+              <a:highlight>
+                <a:schemeClr val="dk2"/>
+              </a:highlight>
+              <a:latin typeface="Consolas"/>
+              <a:ea typeface="Consolas"/>
+              <a:cs typeface="Consolas"/>
+              <a:sym typeface="Consolas"/>
+            </a:endParaRPr>
+          </a:p>
+          <a:p>
+            <a:pPr indent="0" lvl="0" marL="0" rtl="0" algn="l">
+              <a:lnSpc>
+                <a:spcPct val="115000"/>
+              </a:lnSpc>
+              <a:spcBef>
+                <a:spcPts val="0"/>
+              </a:spcBef>
+              <a:spcAft>
+                <a:spcPts val="0"/>
+              </a:spcAft>
+              <a:buNone/>
+            </a:pPr>
+            <a:r>
+              <a:rPr lang="en" sz="1000">
+                <a:highlight>
+                  <a:schemeClr val="dk2"/>
+                </a:highlight>
+                <a:latin typeface="Consolas"/>
+                <a:ea typeface="Consolas"/>
+                <a:cs typeface="Consolas"/>
+                <a:sym typeface="Consolas"/>
+              </a:rPr>
+              <a:t>        TargetOf(_world.Inky));</a:t>
+            </a:r>
+            <a:endParaRPr sz="1000">
+              <a:solidFill>
+                <a:srgbClr val="CCCCCC"/>
+              </a:solidFill>
+              <a:highlight>
+                <a:schemeClr val="dk2"/>
+              </a:highlight>
+              <a:latin typeface="Consolas"/>
+              <a:ea typeface="Consolas"/>
+              <a:cs typeface="Consolas"/>
+              <a:sym typeface="Consolas"/>
+            </a:endParaRPr>
+          </a:p>
+          <a:p>
+            <a:pPr indent="0" lvl="0" marL="0" rtl="0" algn="l">
+              <a:lnSpc>
+                <a:spcPct val="115000"/>
+              </a:lnSpc>
+              <a:spcBef>
+                <a:spcPts val="0"/>
+              </a:spcBef>
+              <a:spcAft>
+                <a:spcPts val="0"/>
+              </a:spcAft>
+              <a:buNone/>
+            </a:pPr>
+            <a:r>
+              <a:rPr lang="en" sz="1000">
+                <a:highlight>
+                  <a:schemeClr val="dk2"/>
+                </a:highlight>
+                <a:latin typeface="Consolas"/>
+                <a:ea typeface="Consolas"/>
+                <a:cs typeface="Consolas"/>
+                <a:sym typeface="Consolas"/>
+              </a:rPr>
+              <a:t>}</a:t>
+            </a:r>
+            <a:endParaRPr sz="1000">
+              <a:solidFill>
+                <a:srgbClr val="CCCCCC"/>
+              </a:solidFill>
+              <a:highlight>
+                <a:schemeClr val="dk2"/>
+              </a:highlight>
+              <a:latin typeface="Consolas"/>
+              <a:ea typeface="Consolas"/>
+              <a:cs typeface="Consolas"/>
+              <a:sym typeface="Consolas"/>
+            </a:endParaRPr>
           </a:p>
         </p:txBody>
       </p:sp>
@@ -21742,872 +18619,6 @@
       <p:grpSpPr/>
       <p:sp>
         <p:nvSpPr>
-          <p:cNvPr id="2" name="Title 1"/>
-          <p:cNvSpPr>
-            <a:spLocks noGrp="1"/>
-          </p:cNvSpPr>
-          <p:nvPr>
-            <p:ph type="title"/>
-          </p:nvPr>
-        </p:nvSpPr>
-        <p:spPr/>
-        <p:txBody>
-          <a:bodyPr/>
-          <a:lstStyle/>
-          <a:p>
-            <a:pPr indent="0" lvl="0" marL="0" rtl="0" algn="l">
-              <a:spcBef>
-                <a:spcPts val="0"/>
-              </a:spcBef>
-              <a:spcAft>
-                <a:spcPts val="0"/>
-              </a:spcAft>
-              <a:buNone/>
-            </a:pPr>
-            <a:r>
-              <a:rPr lang="en"/>
-              <a:t>Try It: The Shortest Path</a:t>
-            </a:r>
-            <a:endParaRPr/>
-          </a:p>
-        </p:txBody>
-      </p:sp>
-      <p:sp>
-        <p:nvSpPr>
-          <p:cNvPr id="3" name="Text Placeholder 2"/>
-          <p:cNvSpPr>
-            <a:spLocks noGrp="1"/>
-          </p:cNvSpPr>
-          <p:nvPr>
-            <p:ph type="body" idx="1"/>
-          </p:nvPr>
-        </p:nvSpPr>
-        <p:spPr>
-          <a:xfrm>
-            <a:off x="311700" y="885950"/>
-            <a:ext cx="8520600" cy="1289304"/>
-          </a:xfrm>
-        </p:spPr>
-        <p:txBody>
-          <a:bodyPr/>
-          <a:lstStyle/>
-          <a:p>
-            <a:pPr indent="-330200" lvl="0" marL="457200" rtl="0" algn="l">
-              <a:spcBef>
-                <a:spcPts val="0"/>
-              </a:spcBef>
-              <a:spcAft>
-                <a:spcPts val="0"/>
-              </a:spcAft>
-              <a:buSzPts val="1600"/>
-              <a:buChar char="●"/>
-            </a:pPr>
-            <a:r>
-              <a:rPr lang="en"/>
-              <a:t>In Pacman4’s World:</a:t>
-            </a:r>
-            <a:endParaRPr/>
-          </a:p>
-          <a:p>
-            <a:pPr indent="-330200" lvl="0" marL="457200" rtl="0" algn="l">
-              <a:spcBef>
-                <a:spcPts val="0"/>
-              </a:spcBef>
-              <a:spcAft>
-                <a:spcPts val="0"/>
-              </a:spcAft>
-              <a:buSzPts val="1600"/>
-              <a:buChar char="●"/>
-            </a:pPr>
-            <a:r>
-              <a:rPr lang="en"/>
-              <a:t>Give Blinky new ShortestPath()</a:t>
-            </a:r>
-            <a:endParaRPr/>
-          </a:p>
-          <a:p>
-            <a:pPr indent="-330200" lvl="0" marL="457200" rtl="0" algn="l">
-              <a:spcBef>
-                <a:spcPts val="0"/>
-              </a:spcBef>
-              <a:spcAft>
-                <a:spcPts val="0"/>
-              </a:spcAft>
-              <a:buSzPts val="1600"/>
-              <a:buChar char="●"/>
-            </a:pPr>
-            <a:r>
-              <a:rPr lang="en"/>
-              <a:t>Then give it to all four: what happens to the game?</a:t>
-            </a:r>
-            <a:endParaRPr/>
-          </a:p>
-        </p:txBody>
-      </p:sp>
-    </p:spTree>
-  </p:cSld>
-  <p:clrMapOvr>
-    <a:masterClrMapping/>
-  </p:clrMapOvr>
-</p:sld>
-</file>
-
-<file path=ppt/slides/slide31.xml><?xml version="1.0" encoding="utf-8"?>
-<p:sld xmlns:a="http://schemas.openxmlformats.org/drawingml/2006/main" xmlns:p="http://schemas.openxmlformats.org/presentationml/2006/main" xmlns:r="http://schemas.openxmlformats.org/officeDocument/2006/relationships">
-  <p:cSld>
-    <p:spTree>
-      <p:nvGrpSpPr>
-        <p:cNvPr id="1" name=""/>
-        <p:cNvGrpSpPr/>
-        <p:nvPr/>
-      </p:nvGrpSpPr>
-      <p:grpSpPr/>
-      <p:sp>
-        <p:nvSpPr>
-          <p:cNvPr id="140" name="Google Shape;140;p23"/>
-          <p:cNvSpPr txBox="1"/>
-          <p:nvPr>
-            <p:ph type="title"/>
-          </p:nvPr>
-        </p:nvSpPr>
-        <p:spPr>
-          <a:xfrm>
-            <a:off x="311700" y="195615"/>
-            <a:ext cx="8520600" cy="572700"/>
-          </a:xfrm>
-          <a:prstGeom prst="rect">
-            <a:avLst/>
-          </a:prstGeom>
-        </p:spPr>
-        <p:txBody>
-          <a:bodyPr anchorCtr="0" anchor="t" bIns="91425" lIns="91425" spcFirstLastPara="1" rIns="91425" wrap="square" tIns="91425">
-            <a:normAutofit fontScale="90000"/>
-          </a:bodyPr>
-          <a:lstStyle/>
-          <a:p>
-            <a:pPr indent="0" lvl="0" marL="0" rtl="0" algn="l">
-              <a:spcBef>
-                <a:spcPts val="0"/>
-              </a:spcBef>
-              <a:spcAft>
-                <a:spcPts val="0"/>
-              </a:spcAft>
-              <a:buNone/>
-            </a:pPr>
-            <a:r>
-              <a:rPr lang="en"/>
-              <a:t>Testing the Ghosts</a:t>
-            </a:r>
-            <a:endParaRPr/>
-          </a:p>
-        </p:txBody>
-      </p:sp>
-      <p:sp>
-        <p:nvSpPr>
-          <p:cNvPr id="293" name="Google Shape;293;p45"/>
-          <p:cNvSpPr txBox="1"/>
-          <p:nvPr>
-            <p:ph type="title"/>
-          </p:nvPr>
-        </p:nvSpPr>
-        <p:spPr>
-          <a:xfrm>
-            <a:off x="311700" y="1152475"/>
-            <a:ext cx="3700000" cy="3500000"/>
-          </a:xfrm>
-          <a:prstGeom prst="rect">
-            <a:avLst/>
-          </a:prstGeom>
-        </p:spPr>
-        <p:txBody>
-          <a:bodyPr anchorCtr="0" anchor="t" bIns="91425" lIns="91425" spcFirstLastPara="1" rIns="91425" wrap="square" tIns="91425">
-            <a:normAutofit fontScale="90000"/>
-          </a:bodyPr>
-          <a:lstStyle/>
-          <a:p>
-            <a:pPr indent="-330200" lvl="0" marL="457200" rtl="0" algn="l">
-              <a:buClr>
-                <a:srgbClr val="DEE2E6"/>
-              </a:buClr>
-              <a:spcBef>
-                <a:spcPts val="0"/>
-              </a:spcBef>
-              <a:spcAft>
-                <a:spcPts val="0"/>
-              </a:spcAft>
-              <a:buSzPts val="1600"/>
-              <a:buChar char="●"/>
-            </a:pPr>
-            <a:r>
-              <a:rPr lang="en" sz="1600">
-                <a:solidFill>
-                  <a:srgbClr val="DEE2E6"/>
-                </a:solidFill>
-              </a:rPr>
-              <a:t>A strategy: one small class, one method</a:t>
-            </a:r>
-            <a:endParaRPr/>
-          </a:p>
-          <a:p>
-            <a:pPr indent="-317500" lvl="1" marL="914400" rtl="0" algn="l">
-              <a:buClr>
-                <a:srgbClr val="6C757D"/>
-              </a:buClr>
-              <a:spcBef>
-                <a:spcPts val="0"/>
-              </a:spcBef>
-              <a:spcAft>
-                <a:spcPts val="0"/>
-              </a:spcAft>
-              <a:buSzPts val="1400"/>
-              <a:buChar char="○"/>
-            </a:pPr>
-            <a:r>
-              <a:rPr lang="en" sz="1400">
-                <a:solidFill>
-                  <a:srgbClr val="6C757D"/>
-                </a:solidFill>
-              </a:rPr>
-              <a:t>Put Pac-Man somewhere, check the target</a:t>
-            </a:r>
-            <a:endParaRPr/>
-          </a:p>
-          <a:p>
-            <a:pPr indent="-330200" lvl="0" marL="457200" rtl="0" algn="l">
-              <a:buClr>
-                <a:srgbClr val="DEE2E6"/>
-              </a:buClr>
-              <a:spcBef>
-                <a:spcPts val="0"/>
-              </a:spcBef>
-              <a:spcAft>
-                <a:spcPts val="0"/>
-              </a:spcAft>
-              <a:buSzPts val="1600"/>
-              <a:buChar char="●"/>
-            </a:pPr>
-            <a:r>
-              <a:rPr lang="en" sz="1600">
-                <a:solidFill>
-                  <a:srgbClr val="DEE2E6"/>
-                </a:solidFill>
-              </a:rPr>
-              <a:t>Inky’s target is invisible when playing</a:t>
-            </a:r>
-            <a:endParaRPr/>
-          </a:p>
-          <a:p>
-            <a:pPr indent="-317500" lvl="1" marL="914400" rtl="0" algn="l">
-              <a:buClr>
-                <a:srgbClr val="6C757D"/>
-              </a:buClr>
-              <a:spcBef>
-                <a:spcPts val="0"/>
-              </a:spcBef>
-              <a:spcAft>
-                <a:spcPts val="0"/>
-              </a:spcAft>
-              <a:buSzPts val="1400"/>
-              <a:buChar char="○"/>
-            </a:pPr>
-            <a:r>
-              <a:rPr lang="en" sz="1400">
-                <a:solidFill>
-                  <a:srgbClr val="6C757D"/>
-                </a:solidFill>
-              </a:rPr>
-              <a:t>The test checks it with numbers you can work out on paper</a:t>
-            </a:r>
-            <a:endParaRPr/>
-          </a:p>
-          <a:p>
-            <a:pPr indent="-330200" lvl="0" marL="457200" rtl="0" algn="l">
-              <a:buClr>
-                <a:srgbClr val="DEE2E6"/>
-              </a:buClr>
-              <a:spcBef>
-                <a:spcPts val="0"/>
-              </a:spcBef>
-              <a:spcAft>
-                <a:spcPts val="0"/>
-              </a:spcAft>
-              <a:buSzPts val="1600"/>
-              <a:buChar char="●"/>
-            </a:pPr>
-            <a:r>
-              <a:rPr lang="en" sz="1600">
-                <a:solidFill>
-                  <a:srgbClr val="DEE2E6"/>
-                </a:solidFill>
-              </a:rPr>
-              <a:t>The states: put a ghost in a state, make something happen, check the state after</a:t>
-            </a:r>
-            <a:endParaRPr/>
-          </a:p>
-          <a:p>
-            <a:pPr indent="-330200" lvl="0" marL="457200" rtl="0" algn="l">
-              <a:buClr>
-                <a:srgbClr val="DEE2E6"/>
-              </a:buClr>
-              <a:spcBef>
-                <a:spcPts val="0"/>
-              </a:spcBef>
-              <a:spcAft>
-                <a:spcPts val="0"/>
-              </a:spcAft>
-              <a:buSzPts val="1600"/>
-              <a:buChar char="●"/>
-            </a:pPr>
-            <a:r>
-              <a:rPr lang="en" sz="1600">
-                <a:solidFill>
-                  <a:srgbClr val="DEE2E6"/>
-                </a:solidFill>
-              </a:rPr>
-              <a:t>A small test maze, and a seeded Random</a:t>
-            </a:r>
-            <a:endParaRPr/>
-          </a:p>
-        </p:txBody>
-      </p:sp>
-      <p:sp>
-        <p:nvSpPr>
-          <p:cNvPr id="141" name="Google Shape;141;p23"/>
-          <p:cNvSpPr txBox="1"/>
-          <p:nvPr>
-            <p:ph idx="2" type="body"/>
-          </p:nvPr>
-        </p:nvSpPr>
-        <p:spPr>
-          <a:xfrm>
-            <a:off x="4150000" y="1152475"/>
-            <a:ext cx="4750000" cy="3600000"/>
-          </a:xfrm>
-          <a:prstGeom prst="rect">
-            <a:avLst/>
-          </a:prstGeom>
-        </p:spPr>
-        <p:txBody>
-          <a:bodyPr anchorCtr="0" anchor="t" bIns="91425" lIns="91425" spcFirstLastPara="1" rIns="91425" wrap="square" tIns="91425">
-            <a:noAutofit/>
-          </a:bodyPr>
-          <a:lstStyle/>
-          <a:p>
-            <a:pPr indent="0" lvl="0" marL="0" rtl="0" algn="l">
-              <a:lnSpc>
-                <a:spcPct val="115000"/>
-              </a:lnSpc>
-              <a:spcBef>
-                <a:spcPts val="0"/>
-              </a:spcBef>
-              <a:spcAft>
-                <a:spcPts val="0"/>
-              </a:spcAft>
-              <a:buNone/>
-            </a:pPr>
-            <a:r>
-              <a:rPr lang="en" sz="1000">
-                <a:highlight>
-                  <a:schemeClr val="dk2"/>
-                </a:highlight>
-                <a:latin typeface="Consolas"/>
-                <a:ea typeface="Consolas"/>
-                <a:cs typeface="Consolas"/>
-                <a:sym typeface="Consolas"/>
-              </a:rPr>
-              <a:t>[Fact]</a:t>
-            </a:r>
-            <a:endParaRPr sz="1000">
-              <a:solidFill>
-                <a:srgbClr val="CCCCCC"/>
-              </a:solidFill>
-              <a:highlight>
-                <a:schemeClr val="dk2"/>
-              </a:highlight>
-              <a:latin typeface="Consolas"/>
-              <a:ea typeface="Consolas"/>
-              <a:cs typeface="Consolas"/>
-              <a:sym typeface="Consolas"/>
-            </a:endParaRPr>
-          </a:p>
-          <a:p>
-            <a:pPr indent="0" lvl="0" marL="0" rtl="0" algn="l">
-              <a:lnSpc>
-                <a:spcPct val="115000"/>
-              </a:lnSpc>
-              <a:spcBef>
-                <a:spcPts val="0"/>
-              </a:spcBef>
-              <a:spcAft>
-                <a:spcPts val="0"/>
-              </a:spcAft>
-              <a:buNone/>
-            </a:pPr>
-            <a:r>
-              <a:rPr lang="en" sz="1000">
-                <a:highlight>
-                  <a:schemeClr val="dk2"/>
-                </a:highlight>
-                <a:latin typeface="Consolas"/>
-                <a:ea typeface="Consolas"/>
-                <a:cs typeface="Consolas"/>
-                <a:sym typeface="Consolas"/>
-              </a:rPr>
-              <a:t>public void Inky_doubles_the_line_from_Blinky()</a:t>
-            </a:r>
-            <a:endParaRPr sz="1000">
-              <a:solidFill>
-                <a:srgbClr val="CCCCCC"/>
-              </a:solidFill>
-              <a:highlight>
-                <a:schemeClr val="dk2"/>
-              </a:highlight>
-              <a:latin typeface="Consolas"/>
-              <a:ea typeface="Consolas"/>
-              <a:cs typeface="Consolas"/>
-              <a:sym typeface="Consolas"/>
-            </a:endParaRPr>
-          </a:p>
-          <a:p>
-            <a:pPr indent="0" lvl="0" marL="0" rtl="0" algn="l">
-              <a:lnSpc>
-                <a:spcPct val="115000"/>
-              </a:lnSpc>
-              <a:spcBef>
-                <a:spcPts val="0"/>
-              </a:spcBef>
-              <a:spcAft>
-                <a:spcPts val="0"/>
-              </a:spcAft>
-              <a:buNone/>
-            </a:pPr>
-            <a:r>
-              <a:rPr lang="en" sz="1000">
-                <a:highlight>
-                  <a:schemeClr val="dk2"/>
-                </a:highlight>
-                <a:latin typeface="Consolas"/>
-                <a:ea typeface="Consolas"/>
-                <a:cs typeface="Consolas"/>
-                <a:sym typeface="Consolas"/>
-              </a:rPr>
-              <a:t>{</a:t>
-            </a:r>
-            <a:endParaRPr sz="1000">
-              <a:solidFill>
-                <a:srgbClr val="CCCCCC"/>
-              </a:solidFill>
-              <a:highlight>
-                <a:schemeClr val="dk2"/>
-              </a:highlight>
-              <a:latin typeface="Consolas"/>
-              <a:ea typeface="Consolas"/>
-              <a:cs typeface="Consolas"/>
-              <a:sym typeface="Consolas"/>
-            </a:endParaRPr>
-          </a:p>
-          <a:p>
-            <a:pPr indent="0" lvl="0" marL="0" rtl="0" algn="l">
-              <a:lnSpc>
-                <a:spcPct val="115000"/>
-              </a:lnSpc>
-              <a:spcBef>
-                <a:spcPts val="0"/>
-              </a:spcBef>
-              <a:spcAft>
-                <a:spcPts val="0"/>
-              </a:spcAft>
-              <a:buNone/>
-            </a:pPr>
-            <a:r>
-              <a:rPr lang="en" sz="1000">
-                <a:highlight>
-                  <a:schemeClr val="dk2"/>
-                </a:highlight>
-                <a:latin typeface="Consolas"/>
-                <a:ea typeface="Consolas"/>
-                <a:cs typeface="Consolas"/>
-                <a:sym typeface="Consolas"/>
-              </a:rPr>
-              <a:t>    _world.PacMan.Place(</a:t>
-            </a:r>
-            <a:endParaRPr sz="1000">
-              <a:solidFill>
-                <a:srgbClr val="CCCCCC"/>
-              </a:solidFill>
-              <a:highlight>
-                <a:schemeClr val="dk2"/>
-              </a:highlight>
-              <a:latin typeface="Consolas"/>
-              <a:ea typeface="Consolas"/>
-              <a:cs typeface="Consolas"/>
-              <a:sym typeface="Consolas"/>
-            </a:endParaRPr>
-          </a:p>
-          <a:p>
-            <a:pPr indent="0" lvl="0" marL="0" rtl="0" algn="l">
-              <a:lnSpc>
-                <a:spcPct val="115000"/>
-              </a:lnSpc>
-              <a:spcBef>
-                <a:spcPts val="0"/>
-              </a:spcBef>
-              <a:spcAft>
-                <a:spcPts val="0"/>
-              </a:spcAft>
-              <a:buNone/>
-            </a:pPr>
-            <a:r>
-              <a:rPr lang="en" sz="1000">
-                <a:highlight>
-                  <a:schemeClr val="dk2"/>
-                </a:highlight>
-                <a:latin typeface="Consolas"/>
-                <a:ea typeface="Consolas"/>
-                <a:cs typeface="Consolas"/>
-                <a:sym typeface="Consolas"/>
-              </a:rPr>
-              <a:t>        new Point(5, 1), Direction.Right);</a:t>
-            </a:r>
-            <a:endParaRPr sz="1000">
-              <a:solidFill>
-                <a:srgbClr val="CCCCCC"/>
-              </a:solidFill>
-              <a:highlight>
-                <a:schemeClr val="dk2"/>
-              </a:highlight>
-              <a:latin typeface="Consolas"/>
-              <a:ea typeface="Consolas"/>
-              <a:cs typeface="Consolas"/>
-              <a:sym typeface="Consolas"/>
-            </a:endParaRPr>
-          </a:p>
-          <a:p>
-            <a:pPr indent="0" lvl="0" marL="0" rtl="0" algn="l">
-              <a:lnSpc>
-                <a:spcPct val="115000"/>
-              </a:lnSpc>
-              <a:spcBef>
-                <a:spcPts val="0"/>
-              </a:spcBef>
-              <a:spcAft>
-                <a:spcPts val="0"/>
-              </a:spcAft>
-              <a:buNone/>
-            </a:pPr>
-            <a:r>
-              <a:rPr lang="en" sz="1000">
-                <a:highlight>
-                  <a:schemeClr val="dk2"/>
-                </a:highlight>
-                <a:latin typeface="Consolas"/>
-                <a:ea typeface="Consolas"/>
-                <a:cs typeface="Consolas"/>
-                <a:sym typeface="Consolas"/>
-              </a:rPr>
-              <a:t>    _world.Blinky.Place(</a:t>
-            </a:r>
-            <a:endParaRPr sz="1000">
-              <a:solidFill>
-                <a:srgbClr val="CCCCCC"/>
-              </a:solidFill>
-              <a:highlight>
-                <a:schemeClr val="dk2"/>
-              </a:highlight>
-              <a:latin typeface="Consolas"/>
-              <a:ea typeface="Consolas"/>
-              <a:cs typeface="Consolas"/>
-              <a:sym typeface="Consolas"/>
-            </a:endParaRPr>
-          </a:p>
-          <a:p>
-            <a:pPr indent="0" lvl="0" marL="0" rtl="0" algn="l">
-              <a:lnSpc>
-                <a:spcPct val="115000"/>
-              </a:lnSpc>
-              <a:spcBef>
-                <a:spcPts val="0"/>
-              </a:spcBef>
-              <a:spcAft>
-                <a:spcPts val="0"/>
-              </a:spcAft>
-              <a:buNone/>
-            </a:pPr>
-            <a:r>
-              <a:rPr lang="en" sz="1000">
-                <a:highlight>
-                  <a:schemeClr val="dk2"/>
-                </a:highlight>
-                <a:latin typeface="Consolas"/>
-                <a:ea typeface="Consolas"/>
-                <a:cs typeface="Consolas"/>
-                <a:sym typeface="Consolas"/>
-              </a:rPr>
-              <a:t>        new Point(3, 3), Direction.Left);</a:t>
-            </a:r>
-            <a:endParaRPr sz="1000">
-              <a:solidFill>
-                <a:srgbClr val="CCCCCC"/>
-              </a:solidFill>
-              <a:highlight>
-                <a:schemeClr val="dk2"/>
-              </a:highlight>
-              <a:latin typeface="Consolas"/>
-              <a:ea typeface="Consolas"/>
-              <a:cs typeface="Consolas"/>
-              <a:sym typeface="Consolas"/>
-            </a:endParaRPr>
-          </a:p>
-          <a:p>
-            <a:pPr indent="0" lvl="0" marL="0" rtl="0" algn="l">
-              <a:lnSpc>
-                <a:spcPct val="115000"/>
-              </a:lnSpc>
-              <a:spcBef>
-                <a:spcPts val="0"/>
-              </a:spcBef>
-              <a:spcAft>
-                <a:spcPts val="0"/>
-              </a:spcAft>
-              <a:buNone/>
-            </a:pPr>
-            <a:r>
-              <a:rPr lang="en" sz="1000">
-                <a:highlight>
-                  <a:schemeClr val="dk2"/>
-                </a:highlight>
-                <a:latin typeface="Consolas"/>
-                <a:ea typeface="Consolas"/>
-                <a:cs typeface="Consolas"/>
-                <a:sym typeface="Consolas"/>
-              </a:rPr>
-              <a:t/>
-            </a:r>
-            <a:endParaRPr sz="1000">
-              <a:solidFill>
-                <a:srgbClr val="CCCCCC"/>
-              </a:solidFill>
-              <a:highlight>
-                <a:schemeClr val="dk2"/>
-              </a:highlight>
-              <a:latin typeface="Consolas"/>
-              <a:ea typeface="Consolas"/>
-              <a:cs typeface="Consolas"/>
-              <a:sym typeface="Consolas"/>
-            </a:endParaRPr>
-          </a:p>
-          <a:p>
-            <a:pPr indent="0" lvl="0" marL="0" rtl="0" algn="l">
-              <a:lnSpc>
-                <a:spcPct val="115000"/>
-              </a:lnSpc>
-              <a:spcBef>
-                <a:spcPts val="0"/>
-              </a:spcBef>
-              <a:spcAft>
-                <a:spcPts val="0"/>
-              </a:spcAft>
-              <a:buNone/>
-            </a:pPr>
-            <a:r>
-              <a:rPr lang="en" sz="1000">
-                <a:highlight>
-                  <a:schemeClr val="dk2"/>
-                </a:highlight>
-                <a:latin typeface="Consolas"/>
-                <a:ea typeface="Consolas"/>
-                <a:cs typeface="Consolas"/>
-                <a:sym typeface="Consolas"/>
-              </a:rPr>
-              <a:t>    // Two ahead of Pac-Man: (7, 1).</a:t>
-            </a:r>
-            <a:endParaRPr sz="1000">
-              <a:solidFill>
-                <a:srgbClr val="CCCCCC"/>
-              </a:solidFill>
-              <a:highlight>
-                <a:schemeClr val="dk2"/>
-              </a:highlight>
-              <a:latin typeface="Consolas"/>
-              <a:ea typeface="Consolas"/>
-              <a:cs typeface="Consolas"/>
-              <a:sym typeface="Consolas"/>
-            </a:endParaRPr>
-          </a:p>
-          <a:p>
-            <a:pPr indent="0" lvl="0" marL="0" rtl="0" algn="l">
-              <a:lnSpc>
-                <a:spcPct val="115000"/>
-              </a:lnSpc>
-              <a:spcBef>
-                <a:spcPts val="0"/>
-              </a:spcBef>
-              <a:spcAft>
-                <a:spcPts val="0"/>
-              </a:spcAft>
-              <a:buNone/>
-            </a:pPr>
-            <a:r>
-              <a:rPr lang="en" sz="1000">
-                <a:highlight>
-                  <a:schemeClr val="dk2"/>
-                </a:highlight>
-                <a:latin typeface="Consolas"/>
-                <a:ea typeface="Consolas"/>
-                <a:cs typeface="Consolas"/>
-                <a:sym typeface="Consolas"/>
-              </a:rPr>
-              <a:t>    // From Blinky: (+4, -2), doubled.</a:t>
-            </a:r>
-            <a:endParaRPr sz="1000">
-              <a:solidFill>
-                <a:srgbClr val="CCCCCC"/>
-              </a:solidFill>
-              <a:highlight>
-                <a:schemeClr val="dk2"/>
-              </a:highlight>
-              <a:latin typeface="Consolas"/>
-              <a:ea typeface="Consolas"/>
-              <a:cs typeface="Consolas"/>
-              <a:sym typeface="Consolas"/>
-            </a:endParaRPr>
-          </a:p>
-          <a:p>
-            <a:pPr indent="0" lvl="0" marL="0" rtl="0" algn="l">
-              <a:lnSpc>
-                <a:spcPct val="115000"/>
-              </a:lnSpc>
-              <a:spcBef>
-                <a:spcPts val="0"/>
-              </a:spcBef>
-              <a:spcAft>
-                <a:spcPts val="0"/>
-              </a:spcAft>
-              <a:buNone/>
-            </a:pPr>
-            <a:r>
-              <a:rPr lang="en" sz="1000">
-                <a:highlight>
-                  <a:schemeClr val="dk2"/>
-                </a:highlight>
-                <a:latin typeface="Consolas"/>
-                <a:ea typeface="Consolas"/>
-                <a:cs typeface="Consolas"/>
-                <a:sym typeface="Consolas"/>
-              </a:rPr>
-              <a:t>    Assert.Equal(new Point(11, -1),</a:t>
-            </a:r>
-            <a:endParaRPr sz="1000">
-              <a:solidFill>
-                <a:srgbClr val="CCCCCC"/>
-              </a:solidFill>
-              <a:highlight>
-                <a:schemeClr val="dk2"/>
-              </a:highlight>
-              <a:latin typeface="Consolas"/>
-              <a:ea typeface="Consolas"/>
-              <a:cs typeface="Consolas"/>
-              <a:sym typeface="Consolas"/>
-            </a:endParaRPr>
-          </a:p>
-          <a:p>
-            <a:pPr indent="0" lvl="0" marL="0" rtl="0" algn="l">
-              <a:lnSpc>
-                <a:spcPct val="115000"/>
-              </a:lnSpc>
-              <a:spcBef>
-                <a:spcPts val="0"/>
-              </a:spcBef>
-              <a:spcAft>
-                <a:spcPts val="0"/>
-              </a:spcAft>
-              <a:buNone/>
-            </a:pPr>
-            <a:r>
-              <a:rPr lang="en" sz="1000">
-                <a:highlight>
-                  <a:schemeClr val="dk2"/>
-                </a:highlight>
-                <a:latin typeface="Consolas"/>
-                <a:ea typeface="Consolas"/>
-                <a:cs typeface="Consolas"/>
-                <a:sym typeface="Consolas"/>
-              </a:rPr>
-              <a:t>        TargetOf(_world.Inky));</a:t>
-            </a:r>
-            <a:endParaRPr sz="1000">
-              <a:solidFill>
-                <a:srgbClr val="CCCCCC"/>
-              </a:solidFill>
-              <a:highlight>
-                <a:schemeClr val="dk2"/>
-              </a:highlight>
-              <a:latin typeface="Consolas"/>
-              <a:ea typeface="Consolas"/>
-              <a:cs typeface="Consolas"/>
-              <a:sym typeface="Consolas"/>
-            </a:endParaRPr>
-          </a:p>
-          <a:p>
-            <a:pPr indent="0" lvl="0" marL="0" rtl="0" algn="l">
-              <a:lnSpc>
-                <a:spcPct val="115000"/>
-              </a:lnSpc>
-              <a:spcBef>
-                <a:spcPts val="0"/>
-              </a:spcBef>
-              <a:spcAft>
-                <a:spcPts val="0"/>
-              </a:spcAft>
-              <a:buNone/>
-            </a:pPr>
-            <a:r>
-              <a:rPr lang="en" sz="1000">
-                <a:highlight>
-                  <a:schemeClr val="dk2"/>
-                </a:highlight>
-                <a:latin typeface="Consolas"/>
-                <a:ea typeface="Consolas"/>
-                <a:cs typeface="Consolas"/>
-                <a:sym typeface="Consolas"/>
-              </a:rPr>
-              <a:t>}</a:t>
-            </a:r>
-            <a:endParaRPr sz="1000">
-              <a:solidFill>
-                <a:srgbClr val="CCCCCC"/>
-              </a:solidFill>
-              <a:highlight>
-                <a:schemeClr val="dk2"/>
-              </a:highlight>
-              <a:latin typeface="Consolas"/>
-              <a:ea typeface="Consolas"/>
-              <a:cs typeface="Consolas"/>
-              <a:sym typeface="Consolas"/>
-            </a:endParaRPr>
-          </a:p>
-        </p:txBody>
-      </p:sp>
-    </p:spTree>
-  </p:cSld>
-  <p:clrMapOvr>
-    <a:masterClrMapping/>
-  </p:clrMapOvr>
-</p:sld>
-</file>
-
-<file path=ppt/slides/slide32.xml><?xml version="1.0" encoding="utf-8"?>
-<p:sld xmlns:a="http://schemas.openxmlformats.org/drawingml/2006/main" xmlns:p="http://schemas.openxmlformats.org/presentationml/2006/main" xmlns:r="http://schemas.openxmlformats.org/officeDocument/2006/relationships">
-  <p:cSld>
-    <p:spTree>
-      <p:nvGrpSpPr>
-        <p:cNvPr id="1" name=""/>
-        <p:cNvGrpSpPr/>
-        <p:nvPr/>
-      </p:nvGrpSpPr>
-      <p:grpSpPr/>
-      <p:sp>
-        <p:nvSpPr>
           <p:cNvPr id="293" name="Google Shape;293;p45"/>
           <p:cNvSpPr txBox="1"/>
           <p:nvPr>
@@ -23164,7 +19175,7 @@
 </p:sld>
 </file>
 
-<file path=ppt/slides/slide33.xml><?xml version="1.0" encoding="utf-8"?>
+<file path=ppt/slides/slide31.xml><?xml version="1.0" encoding="utf-8"?>
 <p:sld xmlns:a="http://schemas.openxmlformats.org/drawingml/2006/main" xmlns:r="http://schemas.openxmlformats.org/officeDocument/2006/relationships" xmlns:mc="http://schemas.openxmlformats.org/markup-compatibility/2006" xmlns:mv="urn:schemas-microsoft-com:mac:vml" xmlns:p="http://schemas.openxmlformats.org/presentationml/2006/main" xmlns:c="http://schemas.openxmlformats.org/drawingml/2006/chart" xmlns:dgm="http://schemas.openxmlformats.org/drawingml/2006/diagram" xmlns:o="urn:schemas-microsoft-com:office:office" xmlns:v="urn:schemas-microsoft-com:vml" xmlns:pvml="urn:schemas-microsoft-com:office:powerpoint" xmlns:com="http://schemas.openxmlformats.org/drawingml/2006/compatibility" xmlns:p14="http://schemas.microsoft.com/office/powerpoint/2010/main" xmlns:p15="http://schemas.microsoft.com/office/powerpoint/2012/main" xmlns:ahyp="http://schemas.microsoft.com/office/drawing/2018/hyperlinkcolor">
   <p:cSld>
     <p:spTree>
@@ -23298,7 +19309,7 @@
 </p:sld>
 </file>
 
-<file path=ppt/slides/slide34.xml><?xml version="1.0" encoding="utf-8"?>
+<file path=ppt/slides/slide32.xml><?xml version="1.0" encoding="utf-8"?>
 <p:sld xmlns:a="http://schemas.openxmlformats.org/drawingml/2006/main" xmlns:r="http://schemas.openxmlformats.org/officeDocument/2006/relationships" xmlns:mc="http://schemas.openxmlformats.org/markup-compatibility/2006" xmlns:mv="urn:schemas-microsoft-com:mac:vml" xmlns:p="http://schemas.openxmlformats.org/presentationml/2006/main" xmlns:c="http://schemas.openxmlformats.org/drawingml/2006/chart" xmlns:dgm="http://schemas.openxmlformats.org/drawingml/2006/diagram" xmlns:o="urn:schemas-microsoft-com:office:office" xmlns:v="urn:schemas-microsoft-com:vml" xmlns:pvml="urn:schemas-microsoft-com:office:powerpoint" xmlns:com="http://schemas.openxmlformats.org/drawingml/2006/compatibility" xmlns:p14="http://schemas.microsoft.com/office/powerpoint/2010/main" xmlns:p15="http://schemas.microsoft.com/office/powerpoint/2012/main" xmlns:ahyp="http://schemas.microsoft.com/office/drawing/2018/hyperlinkcolor">
   <p:cSld>
     <p:spTree>
@@ -24181,7 +20192,7 @@
 </p:sld>
 </file>
 
-<file path=ppt/slides/slide35.xml><?xml version="1.0" encoding="utf-8"?>
+<file path=ppt/slides/slide33.xml><?xml version="1.0" encoding="utf-8"?>
 <p:sld xmlns:a="http://schemas.openxmlformats.org/drawingml/2006/main" xmlns:r="http://schemas.openxmlformats.org/officeDocument/2006/relationships" xmlns:mc="http://schemas.openxmlformats.org/markup-compatibility/2006" xmlns:mv="urn:schemas-microsoft-com:mac:vml" xmlns:p="http://schemas.openxmlformats.org/presentationml/2006/main" xmlns:c="http://schemas.openxmlformats.org/drawingml/2006/chart" xmlns:dgm="http://schemas.openxmlformats.org/drawingml/2006/diagram" xmlns:o="urn:schemas-microsoft-com:office:office" xmlns:v="urn:schemas-microsoft-com:vml" xmlns:pvml="urn:schemas-microsoft-com:office:powerpoint" xmlns:com="http://schemas.openxmlformats.org/drawingml/2006/compatibility" xmlns:p14="http://schemas.microsoft.com/office/powerpoint/2010/main" xmlns:p15="http://schemas.microsoft.com/office/powerpoint/2012/main" xmlns:ahyp="http://schemas.microsoft.com/office/drawing/2018/hyperlinkcolor">
   <p:cSld>
     <p:spTree>
@@ -24333,40 +20344,6 @@
             <a:r>
               <a:rPr lang="en"/>
               <a:t>Which class knows the ghost is in the tunnel, and which how fast to go?</a:t>
-            </a:r>
-            <a:endParaRPr/>
-          </a:p>
-          <a:p>
-            <a:pPr indent="-330200" lvl="0" marL="457200" rtl="0" algn="l">
-              <a:spcBef>
-                <a:spcPts val="0"/>
-              </a:spcBef>
-              <a:spcAft>
-                <a:spcPts val="0"/>
-              </a:spcAft>
-              <a:buSzPts val="1600"/>
-              <a:buChar char="●"/>
-            </a:pPr>
-            <a:r>
-              <a:rPr lang="en"/>
-              <a:t>Breadth-first: write FindPathBreadthFirst, with a Queue</a:t>
-            </a:r>
-            <a:endParaRPr/>
-          </a:p>
-          <a:p>
-            <a:pPr indent="-317500" lvl="1" marL="914400" rtl="0" algn="l">
-              <a:spcBef>
-                <a:spcPts val="0"/>
-              </a:spcBef>
-              <a:spcAft>
-                <a:spcPts val="0"/>
-              </a:spcAft>
-              <a:buSzPts val="1400"/>
-              <a:buChar char="○"/>
-            </a:pPr>
-            <a:r>
-              <a:rPr lang="en"/>
-              <a:t>Same length as A*? How many tiles does each take out of its queue?</a:t>
             </a:r>
             <a:endParaRPr/>
           </a:p>
@@ -25047,7 +21024,7 @@
 </p:sld>
 </file>
 
-<file path=ppt/slides/slide36.xml><?xml version="1.0" encoding="utf-8"?>
+<file path=ppt/slides/slide34.xml><?xml version="1.0" encoding="utf-8"?>
 <p:sld xmlns:a="http://schemas.openxmlformats.org/drawingml/2006/main" xmlns:p="http://schemas.openxmlformats.org/presentationml/2006/main" xmlns:r="http://schemas.openxmlformats.org/officeDocument/2006/relationships">
   <p:cSld>
     <p:spTree>
@@ -25189,7 +21166,7 @@
             </a:pPr>
             <a:r>
               <a:rPr lang="en" b="1"/>
-              <a:t>What does A* add to breadth-first search?</a:t>
+              <a:t>Why do the chasing ghosts keep the arcade rule?</a:t>
             </a:r>
             <a:endParaRPr/>
           </a:p>
@@ -25237,7 +21214,7 @@
 </p:sld>
 </file>
 
-<file path=ppt/slides/slide37.xml><?xml version="1.0" encoding="utf-8"?>
+<file path=ppt/slides/slide35.xml><?xml version="1.0" encoding="utf-8"?>
 <p:sld xmlns:a="http://schemas.openxmlformats.org/drawingml/2006/main" xmlns:r="http://schemas.openxmlformats.org/officeDocument/2006/relationships" xmlns:mc="http://schemas.openxmlformats.org/markup-compatibility/2006" xmlns:mv="urn:schemas-microsoft-com:mac:vml" xmlns:p="http://schemas.openxmlformats.org/presentationml/2006/main" xmlns:c="http://schemas.openxmlformats.org/drawingml/2006/chart" xmlns:dgm="http://schemas.openxmlformats.org/drawingml/2006/diagram" xmlns:o="urn:schemas-microsoft-com:office:office" xmlns:v="urn:schemas-microsoft-com:vml" xmlns:pvml="urn:schemas-microsoft-com:office:powerpoint" xmlns:com="http://schemas.openxmlformats.org/drawingml/2006/compatibility" xmlns:p14="http://schemas.microsoft.com/office/powerpoint/2010/main" xmlns:p15="http://schemas.microsoft.com/office/powerpoint/2012/main" xmlns:ahyp="http://schemas.microsoft.com/office/drawing/2018/hyperlinkcolor">
   <p:cSld>
     <p:spTree>
@@ -25406,23 +21383,6 @@
             <a:r>
               <a:rPr lang="en"/>
               <a:t>That’s a strategy</a:t>
-            </a:r>
-            <a:endParaRPr/>
-          </a:p>
-          <a:p>
-            <a:pPr indent="-330200" lvl="0" marL="457200" rtl="0" algn="l">
-              <a:spcBef>
-                <a:spcPts val="0"/>
-              </a:spcBef>
-              <a:spcAft>
-                <a:spcPts val="0"/>
-              </a:spcAft>
-              <a:buSzPts val="1600"/>
-              <a:buChar char="●"/>
-            </a:pPr>
-            <a:r>
-              <a:rPr lang="en"/>
-              <a:t>Does anything have to find its way around obstacles?</a:t>
             </a:r>
             <a:endParaRPr/>
           </a:p>
@@ -26297,7 +22257,7 @@
             </a:pPr>
             <a:r>
               <a:rPr lang="en"/>
-              <a:t>Finding a Path</a:t>
+              <a:t>A Second Strategy: Routing</a:t>
             </a:r>
             <a:endParaRPr/>
           </a:p>

--- a/slides/05 Pac-Man.pptx
+++ b/slides/05 Pac-Man.pptx
@@ -2764,7 +2764,7 @@
           </a:p>
           <a:p>
             <a:r>
-              <a:t>The fifth ghost (green) and a cherry are drawn in sprites.png but not in the XML: describing them is part of the exercise.</a:t>
+              <a:t>The fifth ghost (purple) and a cherry are drawn in sprites.png but not in the XML: describing them is part of the exercise.</a:t>
             </a:r>
           </a:p>
         </p:txBody>

--- a/slides/05 Pac-Man.pptx
+++ b/slides/05 Pac-Man.pptx
@@ -18,6 +18,8 @@
     <p:sldId id="299" r:id="rId58"/>
     <p:sldId id="319" r:id="rId36"/>
     <p:sldId id="300" r:id="rId59"/>
+    <p:sldId id="327" r:id="rId33"/>
+    <p:sldId id="326" r:id="rId34"/>
     <p:sldId id="301" r:id="rId60"/>
     <p:sldId id="302" r:id="rId61"/>
     <p:sldId id="303" r:id="rId62"/>
@@ -887,6 +889,36 @@
               <a:t>Ask the question at the bottom before the next slide: where does each ghost’s targeting code go?</a:t>
             </a:r>
           </a:p>
+          <a:p>
+            <a:r>
+              <a:t>Pac-Man’s tile</a:t>
+            </a:r>
+          </a:p>
+          <a:p>
+            <a:r>
+              <a:t>4 tiles ahead of him</a:t>
+            </a:r>
+          </a:p>
+          <a:p>
+            <a:r>
+              <a:t>2 ahead, doubled</a:t>
+            </a:r>
+          </a:p>
+          <a:p>
+            <a:r>
+              <a:t>Pac-Man, until</a:t>
+            </a:r>
+          </a:p>
+          <a:p>
+            <a:r>
+              <a:t>close: then his corner</a:t>
+            </a:r>
+          </a:p>
+          <a:p>
+            <a:r>
+              <a:t>Where does the targeting code go, so every ghost can have its own?</a:t>
+            </a:r>
+          </a:p>
         </p:txBody>
       </p:sp>
     </p:spTree>
@@ -2530,6 +2562,132 @@
           <a:p>
             <a:r>
               <a:t>The early press shows the buffered turn: he turns when he reaches the corner.</a:t>
+            </a:r>
+          </a:p>
+        </p:txBody>
+      </p:sp>
+    </p:spTree>
+  </p:cSld>
+  <p:clrMapOvr>
+    <a:masterClrMapping/>
+  </p:clrMapOvr>
+</p:notes>
+</file>
+
+<file path=ppt/notesSlides/notesSlide33.xml><?xml version="1.0" encoding="utf-8"?>
+<p:notes xmlns:a="http://schemas.openxmlformats.org/drawingml/2006/main" xmlns:p="http://schemas.openxmlformats.org/presentationml/2006/main" xmlns:r="http://schemas.openxmlformats.org/officeDocument/2006/relationships">
+  <p:cSld>
+    <p:spTree>
+      <p:nvGrpSpPr>
+        <p:cNvPr id="1" name=""/>
+        <p:cNvGrpSpPr/>
+        <p:nvPr/>
+      </p:nvGrpSpPr>
+      <p:grpSpPr>
+        <a:xfrm>
+          <a:off x="0" y="0"/>
+          <a:ext cx="0" cy="0"/>
+          <a:chOff x="0" y="0"/>
+          <a:chExt cx="0" cy="0"/>
+        </a:xfrm>
+      </p:grpSpPr>
+      <p:sp>
+        <p:nvSpPr>
+          <p:cNvPr id="2" name="Slide Image Placeholder 1"/>
+          <p:cNvSpPr>
+            <a:spLocks noGrp="1"/>
+          </p:cNvSpPr>
+          <p:nvPr>
+            <p:ph type="sldImg" idx="2"/>
+          </p:nvPr>
+        </p:nvSpPr>
+        <p:spPr/>
+      </p:sp>
+      <p:sp>
+        <p:nvSpPr>
+          <p:cNvPr id="3" name="Notes Placeholder 2"/>
+          <p:cNvSpPr>
+            <a:spLocks noGrp="1"/>
+          </p:cNvSpPr>
+          <p:nvPr>
+            <p:ph type="body" idx="1"/>
+          </p:nvPr>
+        </p:nvSpPr>
+        <p:spPr/>
+        <p:txBody>
+          <a:bodyPr/>
+          <a:lstStyle/>
+          <a:p>
+            <a:r>
+              <a:t>Scatter and chase take turns on a fixed schedule. This is why the ghosts sometimes seem to give up.</a:t>
+            </a:r>
+          </a:p>
+          <a:p>
+            <a:r>
+              <a:t>Ask: why have scatter at all? Answer: without it the game is too hard; the player needs room to breathe.</a:t>
+            </a:r>
+          </a:p>
+        </p:txBody>
+      </p:sp>
+    </p:spTree>
+  </p:cSld>
+  <p:clrMapOvr>
+    <a:masterClrMapping/>
+  </p:clrMapOvr>
+</p:notes>
+</file>
+
+<file path=ppt/notesSlides/notesSlide34.xml><?xml version="1.0" encoding="utf-8"?>
+<p:notes xmlns:a="http://schemas.openxmlformats.org/drawingml/2006/main" xmlns:p="http://schemas.openxmlformats.org/presentationml/2006/main" xmlns:r="http://schemas.openxmlformats.org/officeDocument/2006/relationships">
+  <p:cSld>
+    <p:spTree>
+      <p:nvGrpSpPr>
+        <p:cNvPr id="1" name=""/>
+        <p:cNvGrpSpPr/>
+        <p:nvPr/>
+      </p:nvGrpSpPr>
+      <p:grpSpPr>
+        <a:xfrm>
+          <a:off x="0" y="0"/>
+          <a:ext cx="0" cy="0"/>
+          <a:chOff x="0" y="0"/>
+          <a:chExt cx="0" cy="0"/>
+        </a:xfrm>
+      </p:grpSpPr>
+      <p:sp>
+        <p:nvSpPr>
+          <p:cNvPr id="2" name="Slide Image Placeholder 1"/>
+          <p:cNvSpPr>
+            <a:spLocks noGrp="1"/>
+          </p:cNvSpPr>
+          <p:nvPr>
+            <p:ph type="sldImg" idx="2"/>
+          </p:nvPr>
+        </p:nvSpPr>
+        <p:spPr/>
+      </p:sp>
+      <p:sp>
+        <p:nvSpPr>
+          <p:cNvPr id="3" name="Notes Placeholder 2"/>
+          <p:cNvSpPr>
+            <a:spLocks noGrp="1"/>
+          </p:cNvSpPr>
+          <p:nvPr>
+            <p:ph type="body" idx="1"/>
+          </p:nvPr>
+        </p:nvSpPr>
+        <p:spPr/>
+        <p:txBody>
+          <a:bodyPr/>
+          <a:lstStyle/>
+          <a:p>
+            <a:r>
+              <a:t>Every ghost decides the same way at a tile centre: never back, and of the rest, the direction whose next tile is closest to the target, in a straight line.</a:t>
+            </a:r>
+          </a:p>
+          <a:p>
+            <a:r>
+              <a:t>The mode only decides what the target is.</a:t>
             </a:r>
           </a:p>
         </p:txBody>
@@ -11803,8 +11961,8 @@
         </p:nvSpPr>
         <p:spPr>
           <a:xfrm>
-            <a:off x="311700" y="885950"/>
-            <a:ext cx="8520600" cy="521208"/>
+            <a:off x="311700" y="886968"/>
+            <a:ext cx="8520600" cy="457200"/>
           </a:xfrm>
           <a:prstGeom prst="rect">
             <a:avLst/>
@@ -11836,416 +11994,28 @@
       </p:sp>
       <p:pic>
         <p:nvPicPr>
-          <p:cNvPr id="295" name="Picture 303" descr="ghost0.png"/>
+          <p:cNvPr id="295" name="Picture 294" descr="targets.png"/>
           <p:cNvPicPr>
             <a:picLocks noChangeAspect="1"/>
           </p:cNvPicPr>
           <p:nvPr/>
         </p:nvPicPr>
         <p:blipFill>
-          <a:blip r:embed="rId7"/>
+          <a:blip r:embed="rId6"/>
           <a:stretch>
             <a:fillRect/>
           </a:stretch>
         </p:blipFill>
         <p:spPr>
           <a:xfrm>
-            <a:off x="1005840" y="1417320"/>
-            <a:ext cx="822960" cy="822960"/>
+            <a:off x="1280160" y="1371600"/>
+            <a:ext cx="6583680" cy="3657600"/>
           </a:xfrm>
           <a:prstGeom prst="rect">
             <a:avLst/>
           </a:prstGeom>
         </p:spPr>
       </p:pic>
-      <p:sp>
-        <p:nvSpPr>
-          <p:cNvPr id="296" name="Rounded Rectangle 295"/>
-          <p:cNvSpPr/>
-          <p:nvPr/>
-        </p:nvSpPr>
-        <p:spPr>
-          <a:xfrm>
-            <a:off x="502920" y="2331720"/>
-            <a:ext cx="1828800" cy="914400"/>
-          </a:xfrm>
-          <a:prstGeom prst="roundRect">
-            <a:avLst>
-              <a:gd name="adj" fmla="val 12000"/>
-            </a:avLst>
-          </a:prstGeom>
-          <a:solidFill>
-            <a:srgbClr val="2E3338"/>
-          </a:solidFill>
-          <a:ln>
-            <a:noFill/>
-          </a:ln>
-          <a:effectLst/>
-        </p:spPr>
-        <p:style>
-          <a:lnRef idx="1">
-            <a:schemeClr val="accent1"/>
-          </a:lnRef>
-          <a:fillRef idx="3">
-            <a:schemeClr val="accent1"/>
-          </a:fillRef>
-          <a:effectRef idx="2">
-            <a:schemeClr val="accent1"/>
-          </a:effectRef>
-          <a:fontRef idx="minor">
-            <a:schemeClr val="lt1"/>
-          </a:fontRef>
-        </p:style>
-        <p:txBody>
-          <a:bodyPr rtlCol="0" anchor="ctr" wrap="square" lIns="73152" rIns="73152"/>
-          <a:lstStyle/>
-          <a:p>
-            <a:pPr algn="ctr"/>
-            <a:r>
-              <a:rPr sz="1500" b="1">
-                <a:solidFill>
-                  <a:srgbClr val="DEE2E6"/>
-                </a:solidFill>
-              </a:rPr>
-              <a:t>Blinky</a:t>
-            </a:r>
-          </a:p>
-          <a:p>
-            <a:pPr algn="ctr"/>
-            <a:r>
-              <a:rPr sz="1300" b="0">
-                <a:solidFill>
-                  <a:srgbClr val="9AA3AB"/>
-                </a:solidFill>
-              </a:rPr>
-              <a:t>Pac-Man’s tile</a:t>
-            </a:r>
-          </a:p>
-        </p:txBody>
-      </p:sp>
-      <p:pic>
-        <p:nvPicPr>
-          <p:cNvPr id="297" name="Picture 303" descr="ghost1.png"/>
-          <p:cNvPicPr>
-            <a:picLocks noChangeAspect="1"/>
-          </p:cNvPicPr>
-          <p:nvPr/>
-        </p:nvPicPr>
-        <p:blipFill>
-          <a:blip r:embed="rId8"/>
-          <a:stretch>
-            <a:fillRect/>
-          </a:stretch>
-        </p:blipFill>
-        <p:spPr>
-          <a:xfrm>
-            <a:off x="3108959" y="1417320"/>
-            <a:ext cx="822960" cy="822960"/>
-          </a:xfrm>
-          <a:prstGeom prst="rect">
-            <a:avLst/>
-          </a:prstGeom>
-        </p:spPr>
-      </p:pic>
-      <p:sp>
-        <p:nvSpPr>
-          <p:cNvPr id="298" name="Rounded Rectangle 297"/>
-          <p:cNvSpPr/>
-          <p:nvPr/>
-        </p:nvSpPr>
-        <p:spPr>
-          <a:xfrm>
-            <a:off x="2606039" y="2331720"/>
-            <a:ext cx="1828800" cy="914400"/>
-          </a:xfrm>
-          <a:prstGeom prst="roundRect">
-            <a:avLst>
-              <a:gd name="adj" fmla="val 12000"/>
-            </a:avLst>
-          </a:prstGeom>
-          <a:solidFill>
-            <a:srgbClr val="2E3338"/>
-          </a:solidFill>
-          <a:ln>
-            <a:noFill/>
-          </a:ln>
-          <a:effectLst/>
-        </p:spPr>
-        <p:style>
-          <a:lnRef idx="1">
-            <a:schemeClr val="accent1"/>
-          </a:lnRef>
-          <a:fillRef idx="3">
-            <a:schemeClr val="accent1"/>
-          </a:fillRef>
-          <a:effectRef idx="2">
-            <a:schemeClr val="accent1"/>
-          </a:effectRef>
-          <a:fontRef idx="minor">
-            <a:schemeClr val="lt1"/>
-          </a:fontRef>
-        </p:style>
-        <p:txBody>
-          <a:bodyPr rtlCol="0" anchor="ctr" wrap="square" lIns="73152" rIns="73152"/>
-          <a:lstStyle/>
-          <a:p>
-            <a:pPr algn="ctr"/>
-            <a:r>
-              <a:rPr sz="1500" b="1">
-                <a:solidFill>
-                  <a:srgbClr val="DEE2E6"/>
-                </a:solidFill>
-              </a:rPr>
-              <a:t>Pinky</a:t>
-            </a:r>
-          </a:p>
-          <a:p>
-            <a:pPr algn="ctr"/>
-            <a:r>
-              <a:rPr sz="1300" b="0">
-                <a:solidFill>
-                  <a:srgbClr val="9AA3AB"/>
-                </a:solidFill>
-              </a:rPr>
-              <a:t>4 tiles ahead of him</a:t>
-            </a:r>
-          </a:p>
-        </p:txBody>
-      </p:sp>
-      <p:pic>
-        <p:nvPicPr>
-          <p:cNvPr id="299" name="Picture 303" descr="ghost2.png"/>
-          <p:cNvPicPr>
-            <a:picLocks noChangeAspect="1"/>
-          </p:cNvPicPr>
-          <p:nvPr/>
-        </p:nvPicPr>
-        <p:blipFill>
-          <a:blip r:embed="rId9"/>
-          <a:stretch>
-            <a:fillRect/>
-          </a:stretch>
-        </p:blipFill>
-        <p:spPr>
-          <a:xfrm>
-            <a:off x="5212079" y="1417320"/>
-            <a:ext cx="822960" cy="822960"/>
-          </a:xfrm>
-          <a:prstGeom prst="rect">
-            <a:avLst/>
-          </a:prstGeom>
-        </p:spPr>
-      </p:pic>
-      <p:sp>
-        <p:nvSpPr>
-          <p:cNvPr id="300" name="Rounded Rectangle 299"/>
-          <p:cNvSpPr/>
-          <p:nvPr/>
-        </p:nvSpPr>
-        <p:spPr>
-          <a:xfrm>
-            <a:off x="4709159" y="2331720"/>
-            <a:ext cx="1828800" cy="914400"/>
-          </a:xfrm>
-          <a:prstGeom prst="roundRect">
-            <a:avLst>
-              <a:gd name="adj" fmla="val 12000"/>
-            </a:avLst>
-          </a:prstGeom>
-          <a:solidFill>
-            <a:srgbClr val="2E3338"/>
-          </a:solidFill>
-          <a:ln>
-            <a:noFill/>
-          </a:ln>
-          <a:effectLst/>
-        </p:spPr>
-        <p:style>
-          <a:lnRef idx="1">
-            <a:schemeClr val="accent1"/>
-          </a:lnRef>
-          <a:fillRef idx="3">
-            <a:schemeClr val="accent1"/>
-          </a:fillRef>
-          <a:effectRef idx="2">
-            <a:schemeClr val="accent1"/>
-          </a:effectRef>
-          <a:fontRef idx="minor">
-            <a:schemeClr val="lt1"/>
-          </a:fontRef>
-        </p:style>
-        <p:txBody>
-          <a:bodyPr rtlCol="0" anchor="ctr" wrap="square" lIns="73152" rIns="73152"/>
-          <a:lstStyle/>
-          <a:p>
-            <a:pPr algn="ctr"/>
-            <a:r>
-              <a:rPr sz="1500" b="1">
-                <a:solidFill>
-                  <a:srgbClr val="DEE2E6"/>
-                </a:solidFill>
-              </a:rPr>
-              <a:t>Inky</a:t>
-            </a:r>
-          </a:p>
-          <a:p>
-            <a:pPr algn="ctr"/>
-            <a:r>
-              <a:rPr sz="1300" b="0">
-                <a:solidFill>
-                  <a:srgbClr val="9AA3AB"/>
-                </a:solidFill>
-              </a:rPr>
-              <a:t>2 ahead, doubled</a:t>
-            </a:r>
-          </a:p>
-          <a:p>
-            <a:pPr algn="ctr"/>
-            <a:r>
-              <a:rPr sz="1300" b="0">
-                <a:solidFill>
-                  <a:srgbClr val="9AA3AB"/>
-                </a:solidFill>
-              </a:rPr>
-              <a:t>from Blinky</a:t>
-            </a:r>
-          </a:p>
-        </p:txBody>
-      </p:sp>
-      <p:pic>
-        <p:nvPicPr>
-          <p:cNvPr id="301" name="Picture 303" descr="ghost3.png"/>
-          <p:cNvPicPr>
-            <a:picLocks noChangeAspect="1"/>
-          </p:cNvPicPr>
-          <p:nvPr/>
-        </p:nvPicPr>
-        <p:blipFill>
-          <a:blip r:embed="rId10"/>
-          <a:stretch>
-            <a:fillRect/>
-          </a:stretch>
-        </p:blipFill>
-        <p:spPr>
-          <a:xfrm>
-            <a:off x="7315199" y="1417320"/>
-            <a:ext cx="822960" cy="822960"/>
-          </a:xfrm>
-          <a:prstGeom prst="rect">
-            <a:avLst/>
-          </a:prstGeom>
-        </p:spPr>
-      </p:pic>
-      <p:sp>
-        <p:nvSpPr>
-          <p:cNvPr id="302" name="Rounded Rectangle 301"/>
-          <p:cNvSpPr/>
-          <p:nvPr/>
-        </p:nvSpPr>
-        <p:spPr>
-          <a:xfrm>
-            <a:off x="6812279" y="2331720"/>
-            <a:ext cx="1828800" cy="914400"/>
-          </a:xfrm>
-          <a:prstGeom prst="roundRect">
-            <a:avLst>
-              <a:gd name="adj" fmla="val 12000"/>
-            </a:avLst>
-          </a:prstGeom>
-          <a:solidFill>
-            <a:srgbClr val="2E3338"/>
-          </a:solidFill>
-          <a:ln>
-            <a:noFill/>
-          </a:ln>
-          <a:effectLst/>
-        </p:spPr>
-        <p:style>
-          <a:lnRef idx="1">
-            <a:schemeClr val="accent1"/>
-          </a:lnRef>
-          <a:fillRef idx="3">
-            <a:schemeClr val="accent1"/>
-          </a:fillRef>
-          <a:effectRef idx="2">
-            <a:schemeClr val="accent1"/>
-          </a:effectRef>
-          <a:fontRef idx="minor">
-            <a:schemeClr val="lt1"/>
-          </a:fontRef>
-        </p:style>
-        <p:txBody>
-          <a:bodyPr rtlCol="0" anchor="ctr" wrap="square" lIns="73152" rIns="73152"/>
-          <a:lstStyle/>
-          <a:p>
-            <a:pPr algn="ctr"/>
-            <a:r>
-              <a:rPr sz="1500" b="1">
-                <a:solidFill>
-                  <a:srgbClr val="DEE2E6"/>
-                </a:solidFill>
-              </a:rPr>
-              <a:t>Clyde</a:t>
-            </a:r>
-          </a:p>
-          <a:p>
-            <a:pPr algn="ctr"/>
-            <a:r>
-              <a:rPr sz="1300" b="0">
-                <a:solidFill>
-                  <a:srgbClr val="9AA3AB"/>
-                </a:solidFill>
-              </a:rPr>
-              <a:t>Pac-Man, until</a:t>
-            </a:r>
-          </a:p>
-          <a:p>
-            <a:pPr algn="ctr"/>
-            <a:r>
-              <a:rPr sz="1300" b="0">
-                <a:solidFill>
-                  <a:srgbClr val="9AA3AB"/>
-                </a:solidFill>
-              </a:rPr>
-              <a:t>close: then his corner</a:t>
-            </a:r>
-          </a:p>
-        </p:txBody>
-      </p:sp>
-      <p:sp>
-        <p:nvSpPr>
-          <p:cNvPr id="303" name="TextBox 302"/>
-          <p:cNvSpPr txBox="1"/>
-          <p:nvPr/>
-        </p:nvSpPr>
-        <p:spPr>
-          <a:xfrm>
-            <a:off x="457200" y="3520440"/>
-            <a:ext cx="8229600" cy="731520"/>
-          </a:xfrm>
-          <a:prstGeom prst="rect">
-            <a:avLst/>
-          </a:prstGeom>
-          <a:noFill/>
-        </p:spPr>
-        <p:txBody>
-          <a:bodyPr wrap="square">
-            <a:spAutoFit/>
-          </a:bodyPr>
-          <a:lstStyle/>
-          <a:p>
-            <a:pPr algn="ctr"/>
-            <a:r>
-              <a:rPr sz="1600" b="1" i="0">
-                <a:solidFill>
-                  <a:srgbClr val="DEE2E6"/>
-                </a:solidFill>
-              </a:rPr>
-              <a:t>Where does the targeting code go, so every ghost can have its own?</a:t>
-            </a:r>
-          </a:p>
-        </p:txBody>
-      </p:sp>
     </p:spTree>
   </p:cSld>
   <p:clrMapOvr>
@@ -22063,6 +21833,154 @@
 </p:sld>
 </file>
 
+<file path=ppt/slides/slide36.xml><?xml version="1.0" encoding="utf-8"?>
+<p:sld xmlns:a="http://schemas.openxmlformats.org/drawingml/2006/main" xmlns:p="http://schemas.openxmlformats.org/presentationml/2006/main" xmlns:r="http://schemas.openxmlformats.org/officeDocument/2006/relationships">
+  <p:cSld>
+    <p:spTree>
+      <p:nvGrpSpPr>
+        <p:cNvPr id="1" name=""/>
+        <p:cNvGrpSpPr/>
+        <p:nvPr/>
+      </p:nvGrpSpPr>
+      <p:grpSpPr/>
+      <p:sp>
+        <p:nvSpPr>
+          <p:cNvPr id="2" name="Title 1"/>
+          <p:cNvSpPr>
+            <a:spLocks noGrp="1"/>
+          </p:cNvSpPr>
+          <p:nvPr>
+            <p:ph type="title"/>
+          </p:nvPr>
+        </p:nvSpPr>
+        <p:spPr/>
+        <p:txBody>
+          <a:bodyPr/>
+          <a:lstStyle/>
+          <a:p>
+            <a:pPr indent="0" lvl="0" marL="0" rtl="0" algn="l">
+              <a:spcBef>
+                <a:spcPts val="0"/>
+              </a:spcBef>
+              <a:spcAft>
+                <a:spcPts val="0"/>
+              </a:spcAft>
+              <a:buNone/>
+            </a:pPr>
+            <a:r>
+              <a:rPr lang="en"/>
+              <a:t>Choosing a Direction</a:t>
+            </a:r>
+            <a:endParaRPr/>
+          </a:p>
+        </p:txBody>
+      </p:sp>
+      <p:pic>
+        <p:nvPicPr>
+          <p:cNvPr id="3" name="Picture 2" descr="junction.png"/>
+          <p:cNvPicPr>
+            <a:picLocks noChangeAspect="1"/>
+          </p:cNvPicPr>
+          <p:nvPr/>
+        </p:nvPicPr>
+        <p:blipFill>
+          <a:blip r:embed="rId2"/>
+          <a:stretch>
+            <a:fillRect/>
+          </a:stretch>
+        </p:blipFill>
+        <p:spPr>
+          <a:xfrm>
+            <a:off x="594360" y="1051560"/>
+            <a:ext cx="7955279" cy="3977639"/>
+          </a:xfrm>
+          <a:prstGeom prst="rect">
+            <a:avLst/>
+          </a:prstGeom>
+        </p:spPr>
+      </p:pic>
+    </p:spTree>
+  </p:cSld>
+  <p:clrMapOvr>
+    <a:masterClrMapping/>
+  </p:clrMapOvr>
+</p:sld>
+</file>
+
+<file path=ppt/slides/slide37.xml><?xml version="1.0" encoding="utf-8"?>
+<p:sld xmlns:a="http://schemas.openxmlformats.org/drawingml/2006/main" xmlns:p="http://schemas.openxmlformats.org/presentationml/2006/main" xmlns:r="http://schemas.openxmlformats.org/officeDocument/2006/relationships">
+  <p:cSld>
+    <p:spTree>
+      <p:nvGrpSpPr>
+        <p:cNvPr id="1" name=""/>
+        <p:cNvGrpSpPr/>
+        <p:nvPr/>
+      </p:nvGrpSpPr>
+      <p:grpSpPr/>
+      <p:sp>
+        <p:nvSpPr>
+          <p:cNvPr id="2" name="Title 1"/>
+          <p:cNvSpPr>
+            <a:spLocks noGrp="1"/>
+          </p:cNvSpPr>
+          <p:nvPr>
+            <p:ph type="title"/>
+          </p:nvPr>
+        </p:nvSpPr>
+        <p:spPr/>
+        <p:txBody>
+          <a:bodyPr/>
+          <a:lstStyle/>
+          <a:p>
+            <a:pPr indent="0" lvl="0" marL="0" rtl="0" algn="l">
+              <a:spcBef>
+                <a:spcPts val="0"/>
+              </a:spcBef>
+              <a:spcAft>
+                <a:spcPts val="0"/>
+              </a:spcAft>
+              <a:buNone/>
+            </a:pPr>
+            <a:r>
+              <a:rPr lang="en"/>
+              <a:t>Scatter and Chase</a:t>
+            </a:r>
+            <a:endParaRPr/>
+          </a:p>
+        </p:txBody>
+      </p:sp>
+      <p:pic>
+        <p:nvPicPr>
+          <p:cNvPr id="3" name="Picture 2" descr="schedule.png"/>
+          <p:cNvPicPr>
+            <a:picLocks noChangeAspect="1"/>
+          </p:cNvPicPr>
+          <p:nvPr/>
+        </p:nvPicPr>
+        <p:blipFill>
+          <a:blip r:embed="rId2"/>
+          <a:stretch>
+            <a:fillRect/>
+          </a:stretch>
+        </p:blipFill>
+        <p:spPr>
+          <a:xfrm>
+            <a:off x="320039" y="1051560"/>
+            <a:ext cx="8503920" cy="2598420"/>
+          </a:xfrm>
+          <a:prstGeom prst="rect">
+            <a:avLst/>
+          </a:prstGeom>
+        </p:spPr>
+      </p:pic>
+    </p:spTree>
+  </p:cSld>
+  <p:clrMapOvr>
+    <a:masterClrMapping/>
+  </p:clrMapOvr>
+</p:sld>
+</file>
+
 <file path=ppt/slides/slide4.xml><?xml version="1.0" encoding="utf-8"?>
 <p:sld xmlns:a="http://schemas.openxmlformats.org/drawingml/2006/main" xmlns:r="http://schemas.openxmlformats.org/officeDocument/2006/relationships" xmlns:mc="http://schemas.openxmlformats.org/markup-compatibility/2006" xmlns:mv="urn:schemas-microsoft-com:mac:vml" xmlns:p="http://schemas.openxmlformats.org/presentationml/2006/main" xmlns:c="http://schemas.openxmlformats.org/drawingml/2006/chart" xmlns:dgm="http://schemas.openxmlformats.org/drawingml/2006/diagram" xmlns:o="urn:schemas-microsoft-com:office:office" xmlns:v="urn:schemas-microsoft-com:vml" xmlns:pvml="urn:schemas-microsoft-com:office:powerpoint" xmlns:com="http://schemas.openxmlformats.org/drawingml/2006/compatibility" xmlns:p14="http://schemas.microsoft.com/office/powerpoint/2010/main" xmlns:p15="http://schemas.microsoft.com/office/powerpoint/2012/main" xmlns:ahyp="http://schemas.microsoft.com/office/drawing/2018/hyperlinkcolor">
   <p:cSld>

--- a/slides/05 Pac-Man.pptx
+++ b/slides/05 Pac-Man.pptx
@@ -7762,6 +7762,154 @@
       <p:grpSpPr/>
       <p:sp>
         <p:nvSpPr>
+          <p:cNvPr id="2" name="Title 1"/>
+          <p:cNvSpPr>
+            <a:spLocks noGrp="1"/>
+          </p:cNvSpPr>
+          <p:nvPr>
+            <p:ph type="title"/>
+          </p:nvPr>
+        </p:nvSpPr>
+        <p:spPr/>
+        <p:txBody>
+          <a:bodyPr/>
+          <a:lstStyle/>
+          <a:p>
+            <a:pPr indent="0" lvl="0" marL="0" rtl="0" algn="l">
+              <a:spcBef>
+                <a:spcPts val="0"/>
+              </a:spcBef>
+              <a:spcAft>
+                <a:spcPts val="0"/>
+              </a:spcAft>
+              <a:buNone/>
+            </a:pPr>
+            <a:r>
+              <a:rPr lang="en"/>
+              <a:t>Scatter and Chase</a:t>
+            </a:r>
+            <a:endParaRPr/>
+          </a:p>
+        </p:txBody>
+      </p:sp>
+      <p:pic>
+        <p:nvPicPr>
+          <p:cNvPr id="3" name="Picture 2" descr="schedule.png"/>
+          <p:cNvPicPr>
+            <a:picLocks noChangeAspect="1"/>
+          </p:cNvPicPr>
+          <p:nvPr/>
+        </p:nvPicPr>
+        <p:blipFill>
+          <a:blip r:embed="rId4"/>
+          <a:stretch>
+            <a:fillRect/>
+          </a:stretch>
+        </p:blipFill>
+        <p:spPr>
+          <a:xfrm>
+            <a:off x="320039" y="1051560"/>
+            <a:ext cx="8503920" cy="2598420"/>
+          </a:xfrm>
+          <a:prstGeom prst="rect">
+            <a:avLst/>
+          </a:prstGeom>
+        </p:spPr>
+      </p:pic>
+    </p:spTree>
+  </p:cSld>
+  <p:clrMapOvr>
+    <a:masterClrMapping/>
+  </p:clrMapOvr>
+</p:sld>
+</file>
+
+<file path=ppt/slides/slide12.xml><?xml version="1.0" encoding="utf-8"?>
+<p:sld xmlns:a="http://schemas.openxmlformats.org/drawingml/2006/main" xmlns:p="http://schemas.openxmlformats.org/presentationml/2006/main" xmlns:r="http://schemas.openxmlformats.org/officeDocument/2006/relationships">
+  <p:cSld>
+    <p:spTree>
+      <p:nvGrpSpPr>
+        <p:cNvPr id="1" name=""/>
+        <p:cNvGrpSpPr/>
+        <p:nvPr/>
+      </p:nvGrpSpPr>
+      <p:grpSpPr/>
+      <p:sp>
+        <p:nvSpPr>
+          <p:cNvPr id="2" name="Title 1"/>
+          <p:cNvSpPr>
+            <a:spLocks noGrp="1"/>
+          </p:cNvSpPr>
+          <p:nvPr>
+            <p:ph type="title"/>
+          </p:nvPr>
+        </p:nvSpPr>
+        <p:spPr/>
+        <p:txBody>
+          <a:bodyPr/>
+          <a:lstStyle/>
+          <a:p>
+            <a:pPr indent="0" lvl="0" marL="0" rtl="0" algn="l">
+              <a:spcBef>
+                <a:spcPts val="0"/>
+              </a:spcBef>
+              <a:spcAft>
+                <a:spcPts val="0"/>
+              </a:spcAft>
+              <a:buNone/>
+            </a:pPr>
+            <a:r>
+              <a:rPr lang="en"/>
+              <a:t>Choosing a Direction</a:t>
+            </a:r>
+            <a:endParaRPr/>
+          </a:p>
+        </p:txBody>
+      </p:sp>
+      <p:pic>
+        <p:nvPicPr>
+          <p:cNvPr id="3" name="Picture 2" descr="junction.png"/>
+          <p:cNvPicPr>
+            <a:picLocks noChangeAspect="1"/>
+          </p:cNvPicPr>
+          <p:nvPr/>
+        </p:nvPicPr>
+        <p:blipFill>
+          <a:blip r:embed="rId4"/>
+          <a:stretch>
+            <a:fillRect/>
+          </a:stretch>
+        </p:blipFill>
+        <p:spPr>
+          <a:xfrm>
+            <a:off x="594360" y="1051560"/>
+            <a:ext cx="7955279" cy="3977639"/>
+          </a:xfrm>
+          <a:prstGeom prst="rect">
+            <a:avLst/>
+          </a:prstGeom>
+        </p:spPr>
+      </p:pic>
+    </p:spTree>
+  </p:cSld>
+  <p:clrMapOvr>
+    <a:masterClrMapping/>
+  </p:clrMapOvr>
+</p:sld>
+</file>
+
+<file path=ppt/slides/slide13.xml><?xml version="1.0" encoding="utf-8"?>
+<p:sld xmlns:a="http://schemas.openxmlformats.org/drawingml/2006/main" xmlns:p="http://schemas.openxmlformats.org/presentationml/2006/main" xmlns:r="http://schemas.openxmlformats.org/officeDocument/2006/relationships">
+  <p:cSld>
+    <p:spTree>
+      <p:nvGrpSpPr>
+        <p:cNvPr id="1" name=""/>
+        <p:cNvGrpSpPr/>
+        <p:nvPr/>
+      </p:nvGrpSpPr>
+      <p:grpSpPr/>
+      <p:sp>
+        <p:nvSpPr>
           <p:cNvPr id="140" name="Google Shape;140;p23"/>
           <p:cNvSpPr txBox="1"/>
           <p:nvPr>
@@ -8650,7 +8798,7 @@
 </p:sld>
 </file>
 
-<file path=ppt/slides/slide12.xml><?xml version="1.0" encoding="utf-8"?>
+<file path=ppt/slides/slide14.xml><?xml version="1.0" encoding="utf-8"?>
 <p:sld xmlns:a="http://schemas.openxmlformats.org/drawingml/2006/main" xmlns:p="http://schemas.openxmlformats.org/presentationml/2006/main" xmlns:r="http://schemas.openxmlformats.org/officeDocument/2006/relationships">
   <p:cSld>
     <p:spTree>
@@ -9215,7 +9363,7 @@
 </p:sld>
 </file>
 
-<file path=ppt/slides/slide13.xml><?xml version="1.0" encoding="utf-8"?>
+<file path=ppt/slides/slide15.xml><?xml version="1.0" encoding="utf-8"?>
 <p:sld xmlns:a="http://schemas.openxmlformats.org/drawingml/2006/main" xmlns:p="http://schemas.openxmlformats.org/presentationml/2006/main" xmlns:r="http://schemas.openxmlformats.org/officeDocument/2006/relationships">
   <p:cSld>
     <p:spTree>
@@ -9331,848 +9479,6 @@
               <a:t>Pacman1: four ghosts, their modes as an enum</a:t>
             </a:r>
             <a:endParaRPr sz="1800"/>
-          </a:p>
-        </p:txBody>
-      </p:sp>
-    </p:spTree>
-  </p:cSld>
-  <p:clrMapOvr>
-    <a:masterClrMapping/>
-  </p:clrMapOvr>
-</p:sld>
-</file>
-
-<file path=ppt/slides/slide14.xml><?xml version="1.0" encoding="utf-8"?>
-<p:sld xmlns:a="http://schemas.openxmlformats.org/drawingml/2006/main" xmlns:p="http://schemas.openxmlformats.org/presentationml/2006/main" xmlns:r="http://schemas.openxmlformats.org/officeDocument/2006/relationships">
-  <p:cSld>
-    <p:spTree>
-      <p:nvGrpSpPr>
-        <p:cNvPr id="1" name=""/>
-        <p:cNvGrpSpPr/>
-        <p:nvPr/>
-      </p:nvGrpSpPr>
-      <p:grpSpPr/>
-      <p:sp>
-        <p:nvSpPr>
-          <p:cNvPr id="2" name="Title 1"/>
-          <p:cNvSpPr>
-            <a:spLocks noGrp="1"/>
-          </p:cNvSpPr>
-          <p:nvPr>
-            <p:ph type="title"/>
-          </p:nvPr>
-        </p:nvSpPr>
-        <p:spPr/>
-        <p:txBody>
-          <a:bodyPr/>
-          <a:lstStyle/>
-          <a:p>
-            <a:pPr indent="0" lvl="0" marL="0" rtl="0" algn="l">
-              <a:spcBef>
-                <a:spcPts val="0"/>
-              </a:spcBef>
-              <a:spcAft>
-                <a:spcPts val="0"/>
-              </a:spcAft>
-              <a:buNone/>
-            </a:pPr>
-            <a:r>
-              <a:rPr lang="en"/>
-              <a:t>Try It: A Frozen Mode</a:t>
-            </a:r>
-            <a:endParaRPr/>
-          </a:p>
-        </p:txBody>
-      </p:sp>
-      <p:sp>
-        <p:nvSpPr>
-          <p:cNvPr id="3" name="Text Placeholder 2"/>
-          <p:cNvSpPr>
-            <a:spLocks noGrp="1"/>
-          </p:cNvSpPr>
-          <p:nvPr>
-            <p:ph type="body" idx="1"/>
-          </p:nvPr>
-        </p:nvSpPr>
-        <p:spPr>
-          <a:xfrm>
-            <a:off x="311700" y="885950"/>
-            <a:ext cx="8520600" cy="1289304"/>
-          </a:xfrm>
-        </p:spPr>
-        <p:txBody>
-          <a:bodyPr/>
-          <a:lstStyle/>
-          <a:p>
-            <a:pPr indent="-330200" lvl="0" marL="457200" rtl="0" algn="l">
-              <a:spcBef>
-                <a:spcPts val="0"/>
-              </a:spcBef>
-              <a:spcAft>
-                <a:spcPts val="0"/>
-              </a:spcAft>
-              <a:buSzPts val="1600"/>
-              <a:buChar char="●"/>
-            </a:pPr>
-            <a:r>
-              <a:rPr lang="en"/>
-              <a:t>In Pacman1, add Frozen to GhostMode:</a:t>
-            </a:r>
-            <a:endParaRPr/>
-          </a:p>
-          <a:p>
-            <a:pPr indent="-330200" lvl="0" marL="457200" rtl="0" algn="l">
-              <a:spcBef>
-                <a:spcPts val="0"/>
-              </a:spcBef>
-              <a:spcAft>
-                <a:spcPts val="0"/>
-              </a:spcAft>
-              <a:buSzPts val="1600"/>
-              <a:buChar char="●"/>
-            </a:pPr>
-            <a:r>
-              <a:rPr lang="en"/>
-              <a:t>an eaten ghost stands still for a second first</a:t>
-            </a:r>
-            <a:endParaRPr/>
-          </a:p>
-          <a:p>
-            <a:pPr indent="-330200" lvl="0" marL="457200" rtl="0" algn="l">
-              <a:spcBef>
-                <a:spcPts val="0"/>
-              </a:spcBef>
-              <a:spcAft>
-                <a:spcPts val="0"/>
-              </a:spcAft>
-              <a:buSzPts val="1600"/>
-              <a:buChar char="●"/>
-            </a:pPr>
-            <a:r>
-              <a:rPr lang="en"/>
-              <a:t>Don’t finish it. Count the switches you would have to change</a:t>
-            </a:r>
-            <a:endParaRPr/>
-          </a:p>
-        </p:txBody>
-      </p:sp>
-    </p:spTree>
-  </p:cSld>
-  <p:clrMapOvr>
-    <a:masterClrMapping/>
-  </p:clrMapOvr>
-</p:sld>
-</file>
-
-<file path=ppt/slides/slide15.xml><?xml version="1.0" encoding="utf-8"?>
-<p:sld xmlns:a="http://schemas.openxmlformats.org/drawingml/2006/main" xmlns:p="http://schemas.openxmlformats.org/presentationml/2006/main" xmlns:r="http://schemas.openxmlformats.org/officeDocument/2006/relationships">
-  <p:cSld>
-    <p:spTree>
-      <p:nvGrpSpPr>
-        <p:cNvPr id="1" name=""/>
-        <p:cNvGrpSpPr/>
-        <p:nvPr/>
-      </p:nvGrpSpPr>
-      <p:grpSpPr/>
-      <p:sp>
-        <p:nvSpPr>
-          <p:cNvPr id="140" name="Google Shape;140;p23"/>
-          <p:cNvSpPr txBox="1"/>
-          <p:nvPr>
-            <p:ph type="title"/>
-          </p:nvPr>
-        </p:nvSpPr>
-        <p:spPr>
-          <a:xfrm>
-            <a:off x="311700" y="195615"/>
-            <a:ext cx="8520600" cy="572700"/>
-          </a:xfrm>
-          <a:prstGeom prst="rect">
-            <a:avLst/>
-          </a:prstGeom>
-        </p:spPr>
-        <p:txBody>
-          <a:bodyPr anchorCtr="0" anchor="t" bIns="91425" lIns="91425" spcFirstLastPara="1" rIns="91425" wrap="square" tIns="91425">
-            <a:normAutofit fontScale="90000"/>
-          </a:bodyPr>
-          <a:lstStyle/>
-          <a:p>
-            <a:pPr indent="0" lvl="0" marL="0" rtl="0" algn="l">
-              <a:spcBef>
-                <a:spcPts val="0"/>
-              </a:spcBef>
-              <a:spcAft>
-                <a:spcPts val="0"/>
-              </a:spcAft>
-              <a:buNone/>
-            </a:pPr>
-            <a:r>
-              <a:rPr lang="en"/>
-              <a:t>The State Pattern</a:t>
-            </a:r>
-            <a:endParaRPr/>
-          </a:p>
-        </p:txBody>
-      </p:sp>
-      <p:sp>
-        <p:nvSpPr>
-          <p:cNvPr id="293" name="Google Shape;293;p45"/>
-          <p:cNvSpPr txBox="1"/>
-          <p:nvPr>
-            <p:ph type="title"/>
-          </p:nvPr>
-        </p:nvSpPr>
-        <p:spPr>
-          <a:xfrm>
-            <a:off x="311700" y="1152475"/>
-            <a:ext cx="3700000" cy="3500000"/>
-          </a:xfrm>
-          <a:prstGeom prst="rect">
-            <a:avLst/>
-          </a:prstGeom>
-        </p:spPr>
-        <p:txBody>
-          <a:bodyPr anchorCtr="0" anchor="t" bIns="91425" lIns="91425" spcFirstLastPara="1" rIns="91425" wrap="square" tIns="91425">
-            <a:normAutofit fontScale="90000"/>
-          </a:bodyPr>
-          <a:lstStyle/>
-          <a:p>
-            <a:pPr indent="-330200" lvl="0" marL="457200" rtl="0" algn="l">
-              <a:buClr>
-                <a:srgbClr val="DEE2E6"/>
-              </a:buClr>
-              <a:spcBef>
-                <a:spcPts val="0"/>
-              </a:spcBef>
-              <a:spcAft>
-                <a:spcPts val="0"/>
-              </a:spcAft>
-              <a:buSzPts val="1600"/>
-              <a:buChar char="●"/>
-            </a:pPr>
-            <a:r>
-              <a:rPr lang="en" sz="1600">
-                <a:solidFill>
-                  <a:srgbClr val="DEE2E6"/>
-                </a:solidFill>
-              </a:rPr>
-              <a:t>“Allow an object to alter its behavior when its internal state changes.”</a:t>
-            </a:r>
-            <a:endParaRPr/>
-          </a:p>
-          <a:p>
-            <a:pPr indent="-330200" lvl="0" marL="457200" rtl="0" algn="l">
-              <a:buClr>
-                <a:srgbClr val="DEE2E6"/>
-              </a:buClr>
-              <a:spcBef>
-                <a:spcPts val="0"/>
-              </a:spcBef>
-              <a:spcAft>
-                <a:spcPts val="0"/>
-              </a:spcAft>
-              <a:buSzPts val="1600"/>
-              <a:buChar char="●"/>
-            </a:pPr>
-            <a:r>
-              <a:rPr lang="en" sz="1600">
-                <a:solidFill>
-                  <a:srgbClr val="DEE2E6"/>
-                </a:solidFill>
-              </a:rPr>
-              <a:t>Each mode becomes a class</a:t>
-            </a:r>
-            <a:endParaRPr/>
-          </a:p>
-          <a:p>
-            <a:pPr indent="-317500" lvl="1" marL="914400" rtl="0" algn="l">
-              <a:buClr>
-                <a:srgbClr val="6C757D"/>
-              </a:buClr>
-              <a:spcBef>
-                <a:spcPts val="0"/>
-              </a:spcBef>
-              <a:spcAft>
-                <a:spcPts val="0"/>
-              </a:spcAft>
-              <a:buSzPts val="1400"/>
-              <a:buChar char="○"/>
-            </a:pPr>
-            <a:r>
-              <a:rPr lang="en" sz="1400">
-                <a:solidFill>
-                  <a:srgbClr val="6C757D"/>
-                </a:solidFill>
-              </a:rPr>
-              <a:t>InHouseState, ScatterState, ChaseState, FrightenedState, EatenState</a:t>
-            </a:r>
-            <a:endParaRPr/>
-          </a:p>
-          <a:p>
-            <a:pPr indent="-330200" lvl="0" marL="457200" rtl="0" algn="l">
-              <a:buClr>
-                <a:srgbClr val="DEE2E6"/>
-              </a:buClr>
-              <a:spcBef>
-                <a:spcPts val="0"/>
-              </a:spcBef>
-              <a:spcAft>
-                <a:spcPts val="0"/>
-              </a:spcAft>
-              <a:buSzPts val="1600"/>
-              <a:buChar char="●"/>
-            </a:pPr>
-            <a:r>
-              <a:rPr lang="en" sz="1600">
-                <a:solidFill>
-                  <a:srgbClr val="DEE2E6"/>
-                </a:solidFill>
-              </a:rPr>
-              <a:t>The ghost forwards to its current state</a:t>
-            </a:r>
-            <a:endParaRPr/>
-          </a:p>
-          <a:p>
-            <a:pPr indent="-330200" lvl="0" marL="457200" rtl="0" algn="l">
-              <a:buClr>
-                <a:srgbClr val="DEE2E6"/>
-              </a:buClr>
-              <a:spcBef>
-                <a:spcPts val="0"/>
-              </a:spcBef>
-              <a:spcAft>
-                <a:spcPts val="0"/>
-              </a:spcAft>
-              <a:buSzPts val="1600"/>
-              <a:buChar char="●"/>
-            </a:pPr>
-            <a:r>
-              <a:rPr lang="en" sz="1600">
-                <a:solidFill>
-                  <a:srgbClr val="DEE2E6"/>
-                </a:solidFill>
-              </a:rPr>
-              <a:t>Flappy Bird did this for the game; now for an object in it</a:t>
-            </a:r>
-            <a:endParaRPr/>
-          </a:p>
-        </p:txBody>
-      </p:sp>
-      <p:sp>
-        <p:nvSpPr>
-          <p:cNvPr id="141" name="Google Shape;141;p23"/>
-          <p:cNvSpPr txBox="1"/>
-          <p:nvPr>
-            <p:ph idx="2" type="body"/>
-          </p:nvPr>
-        </p:nvSpPr>
-        <p:spPr>
-          <a:xfrm>
-            <a:off x="4150000" y="1152475"/>
-            <a:ext cx="4750000" cy="3600000"/>
-          </a:xfrm>
-          <a:prstGeom prst="rect">
-            <a:avLst/>
-          </a:prstGeom>
-        </p:spPr>
-        <p:txBody>
-          <a:bodyPr anchorCtr="0" anchor="t" bIns="91425" lIns="91425" spcFirstLastPara="1" rIns="91425" wrap="square" tIns="91425">
-            <a:noAutofit/>
-          </a:bodyPr>
-          <a:lstStyle/>
-          <a:p>
-            <a:pPr indent="0" lvl="0" marL="0" rtl="0" algn="l">
-              <a:lnSpc>
-                <a:spcPct val="115000"/>
-              </a:lnSpc>
-              <a:spcBef>
-                <a:spcPts val="0"/>
-              </a:spcBef>
-              <a:spcAft>
-                <a:spcPts val="0"/>
-              </a:spcAft>
-              <a:buNone/>
-            </a:pPr>
-            <a:r>
-              <a:rPr lang="en" sz="1000">
-                <a:highlight>
-                  <a:schemeClr val="dk2"/>
-                </a:highlight>
-                <a:latin typeface="Consolas"/>
-                <a:ea typeface="Consolas"/>
-                <a:cs typeface="Consolas"/>
-                <a:sym typeface="Consolas"/>
-              </a:rPr>
-              <a:t>public void ChangeState(GhostState state)</a:t>
-            </a:r>
-            <a:endParaRPr sz="1000">
-              <a:solidFill>
-                <a:srgbClr val="CCCCCC"/>
-              </a:solidFill>
-              <a:highlight>
-                <a:schemeClr val="dk2"/>
-              </a:highlight>
-              <a:latin typeface="Consolas"/>
-              <a:ea typeface="Consolas"/>
-              <a:cs typeface="Consolas"/>
-              <a:sym typeface="Consolas"/>
-            </a:endParaRPr>
-          </a:p>
-          <a:p>
-            <a:pPr indent="0" lvl="0" marL="0" rtl="0" algn="l">
-              <a:lnSpc>
-                <a:spcPct val="115000"/>
-              </a:lnSpc>
-              <a:spcBef>
-                <a:spcPts val="0"/>
-              </a:spcBef>
-              <a:spcAft>
-                <a:spcPts val="0"/>
-              </a:spcAft>
-              <a:buNone/>
-            </a:pPr>
-            <a:r>
-              <a:rPr lang="en" sz="1000">
-                <a:highlight>
-                  <a:schemeClr val="dk2"/>
-                </a:highlight>
-                <a:latin typeface="Consolas"/>
-                <a:ea typeface="Consolas"/>
-                <a:cs typeface="Consolas"/>
-                <a:sym typeface="Consolas"/>
-              </a:rPr>
-              <a:t>{</a:t>
-            </a:r>
-            <a:endParaRPr sz="1000">
-              <a:solidFill>
-                <a:srgbClr val="CCCCCC"/>
-              </a:solidFill>
-              <a:highlight>
-                <a:schemeClr val="dk2"/>
-              </a:highlight>
-              <a:latin typeface="Consolas"/>
-              <a:ea typeface="Consolas"/>
-              <a:cs typeface="Consolas"/>
-              <a:sym typeface="Consolas"/>
-            </a:endParaRPr>
-          </a:p>
-          <a:p>
-            <a:pPr indent="0" lvl="0" marL="0" rtl="0" algn="l">
-              <a:lnSpc>
-                <a:spcPct val="115000"/>
-              </a:lnSpc>
-              <a:spcBef>
-                <a:spcPts val="0"/>
-              </a:spcBef>
-              <a:spcAft>
-                <a:spcPts val="0"/>
-              </a:spcAft>
-              <a:buNone/>
-            </a:pPr>
-            <a:r>
-              <a:rPr lang="en" sz="1000">
-                <a:highlight>
-                  <a:schemeClr val="dk2"/>
-                </a:highlight>
-                <a:latin typeface="Consolas"/>
-                <a:ea typeface="Consolas"/>
-                <a:cs typeface="Consolas"/>
-                <a:sym typeface="Consolas"/>
-              </a:rPr>
-              <a:t>    State?.Exit(this);</a:t>
-            </a:r>
-            <a:endParaRPr sz="1000">
-              <a:solidFill>
-                <a:srgbClr val="CCCCCC"/>
-              </a:solidFill>
-              <a:highlight>
-                <a:schemeClr val="dk2"/>
-              </a:highlight>
-              <a:latin typeface="Consolas"/>
-              <a:ea typeface="Consolas"/>
-              <a:cs typeface="Consolas"/>
-              <a:sym typeface="Consolas"/>
-            </a:endParaRPr>
-          </a:p>
-          <a:p>
-            <a:pPr indent="0" lvl="0" marL="0" rtl="0" algn="l">
-              <a:lnSpc>
-                <a:spcPct val="115000"/>
-              </a:lnSpc>
-              <a:spcBef>
-                <a:spcPts val="0"/>
-              </a:spcBef>
-              <a:spcAft>
-                <a:spcPts val="0"/>
-              </a:spcAft>
-              <a:buNone/>
-            </a:pPr>
-            <a:r>
-              <a:rPr lang="en" sz="1000">
-                <a:highlight>
-                  <a:schemeClr val="dk2"/>
-                </a:highlight>
-                <a:latin typeface="Consolas"/>
-                <a:ea typeface="Consolas"/>
-                <a:cs typeface="Consolas"/>
-                <a:sym typeface="Consolas"/>
-              </a:rPr>
-              <a:t>    State = state;</a:t>
-            </a:r>
-            <a:endParaRPr sz="1000">
-              <a:solidFill>
-                <a:srgbClr val="CCCCCC"/>
-              </a:solidFill>
-              <a:highlight>
-                <a:schemeClr val="dk2"/>
-              </a:highlight>
-              <a:latin typeface="Consolas"/>
-              <a:ea typeface="Consolas"/>
-              <a:cs typeface="Consolas"/>
-              <a:sym typeface="Consolas"/>
-            </a:endParaRPr>
-          </a:p>
-          <a:p>
-            <a:pPr indent="0" lvl="0" marL="0" rtl="0" algn="l">
-              <a:lnSpc>
-                <a:spcPct val="115000"/>
-              </a:lnSpc>
-              <a:spcBef>
-                <a:spcPts val="0"/>
-              </a:spcBef>
-              <a:spcAft>
-                <a:spcPts val="0"/>
-              </a:spcAft>
-              <a:buNone/>
-            </a:pPr>
-            <a:r>
-              <a:rPr lang="en" sz="1000">
-                <a:highlight>
-                  <a:schemeClr val="dk2"/>
-                </a:highlight>
-                <a:latin typeface="Consolas"/>
-                <a:ea typeface="Consolas"/>
-                <a:cs typeface="Consolas"/>
-                <a:sym typeface="Consolas"/>
-              </a:rPr>
-              <a:t>    State.Enter(this);</a:t>
-            </a:r>
-            <a:endParaRPr sz="1000">
-              <a:solidFill>
-                <a:srgbClr val="CCCCCC"/>
-              </a:solidFill>
-              <a:highlight>
-                <a:schemeClr val="dk2"/>
-              </a:highlight>
-              <a:latin typeface="Consolas"/>
-              <a:ea typeface="Consolas"/>
-              <a:cs typeface="Consolas"/>
-              <a:sym typeface="Consolas"/>
-            </a:endParaRPr>
-          </a:p>
-          <a:p>
-            <a:pPr indent="0" lvl="0" marL="0" rtl="0" algn="l">
-              <a:lnSpc>
-                <a:spcPct val="115000"/>
-              </a:lnSpc>
-              <a:spcBef>
-                <a:spcPts val="0"/>
-              </a:spcBef>
-              <a:spcAft>
-                <a:spcPts val="0"/>
-              </a:spcAft>
-              <a:buNone/>
-            </a:pPr>
-            <a:r>
-              <a:rPr lang="en" sz="1000">
-                <a:highlight>
-                  <a:schemeClr val="dk2"/>
-                </a:highlight>
-                <a:latin typeface="Consolas"/>
-                <a:ea typeface="Consolas"/>
-                <a:cs typeface="Consolas"/>
-                <a:sym typeface="Consolas"/>
-              </a:rPr>
-              <a:t>}</a:t>
-            </a:r>
-            <a:endParaRPr sz="1000">
-              <a:solidFill>
-                <a:srgbClr val="CCCCCC"/>
-              </a:solidFill>
-              <a:highlight>
-                <a:schemeClr val="dk2"/>
-              </a:highlight>
-              <a:latin typeface="Consolas"/>
-              <a:ea typeface="Consolas"/>
-              <a:cs typeface="Consolas"/>
-              <a:sym typeface="Consolas"/>
-            </a:endParaRPr>
-          </a:p>
-          <a:p>
-            <a:pPr indent="0" lvl="0" marL="0" rtl="0" algn="l">
-              <a:lnSpc>
-                <a:spcPct val="115000"/>
-              </a:lnSpc>
-              <a:spcBef>
-                <a:spcPts val="0"/>
-              </a:spcBef>
-              <a:spcAft>
-                <a:spcPts val="0"/>
-              </a:spcAft>
-              <a:buNone/>
-            </a:pPr>
-            <a:r>
-              <a:rPr lang="en" sz="1000">
-                <a:highlight>
-                  <a:schemeClr val="dk2"/>
-                </a:highlight>
-                <a:latin typeface="Consolas"/>
-                <a:ea typeface="Consolas"/>
-                <a:cs typeface="Consolas"/>
-                <a:sym typeface="Consolas"/>
-              </a:rPr>
-              <a:t/>
-            </a:r>
-            <a:endParaRPr sz="1000">
-              <a:solidFill>
-                <a:srgbClr val="CCCCCC"/>
-              </a:solidFill>
-              <a:highlight>
-                <a:schemeClr val="dk2"/>
-              </a:highlight>
-              <a:latin typeface="Consolas"/>
-              <a:ea typeface="Consolas"/>
-              <a:cs typeface="Consolas"/>
-              <a:sym typeface="Consolas"/>
-            </a:endParaRPr>
-          </a:p>
-          <a:p>
-            <a:pPr indent="0" lvl="0" marL="0" rtl="0" algn="l">
-              <a:lnSpc>
-                <a:spcPct val="115000"/>
-              </a:lnSpc>
-              <a:spcBef>
-                <a:spcPts val="0"/>
-              </a:spcBef>
-              <a:spcAft>
-                <a:spcPts val="0"/>
-              </a:spcAft>
-              <a:buNone/>
-            </a:pPr>
-            <a:r>
-              <a:rPr lang="en" sz="1000">
-                <a:highlight>
-                  <a:schemeClr val="dk2"/>
-                </a:highlight>
-                <a:latin typeface="Consolas"/>
-                <a:ea typeface="Consolas"/>
-                <a:cs typeface="Consolas"/>
-                <a:sym typeface="Consolas"/>
-              </a:rPr>
-              <a:t>public void Update(float deltaSeconds) =&gt;</a:t>
-            </a:r>
-            <a:endParaRPr sz="1000">
-              <a:solidFill>
-                <a:srgbClr val="CCCCCC"/>
-              </a:solidFill>
-              <a:highlight>
-                <a:schemeClr val="dk2"/>
-              </a:highlight>
-              <a:latin typeface="Consolas"/>
-              <a:ea typeface="Consolas"/>
-              <a:cs typeface="Consolas"/>
-              <a:sym typeface="Consolas"/>
-            </a:endParaRPr>
-          </a:p>
-          <a:p>
-            <a:pPr indent="0" lvl="0" marL="0" rtl="0" algn="l">
-              <a:lnSpc>
-                <a:spcPct val="115000"/>
-              </a:lnSpc>
-              <a:spcBef>
-                <a:spcPts val="0"/>
-              </a:spcBef>
-              <a:spcAft>
-                <a:spcPts val="0"/>
-              </a:spcAft>
-              <a:buNone/>
-            </a:pPr>
-            <a:r>
-              <a:rPr lang="en" sz="1000">
-                <a:highlight>
-                  <a:schemeClr val="dk2"/>
-                </a:highlight>
-                <a:latin typeface="Consolas"/>
-                <a:ea typeface="Consolas"/>
-                <a:cs typeface="Consolas"/>
-                <a:sym typeface="Consolas"/>
-              </a:rPr>
-              <a:t>    State.Update(this, deltaSeconds);</a:t>
-            </a:r>
-            <a:endParaRPr sz="1000">
-              <a:solidFill>
-                <a:srgbClr val="CCCCCC"/>
-              </a:solidFill>
-              <a:highlight>
-                <a:schemeClr val="dk2"/>
-              </a:highlight>
-              <a:latin typeface="Consolas"/>
-              <a:ea typeface="Consolas"/>
-              <a:cs typeface="Consolas"/>
-              <a:sym typeface="Consolas"/>
-            </a:endParaRPr>
-          </a:p>
-          <a:p>
-            <a:pPr indent="0" lvl="0" marL="0" rtl="0" algn="l">
-              <a:lnSpc>
-                <a:spcPct val="115000"/>
-              </a:lnSpc>
-              <a:spcBef>
-                <a:spcPts val="0"/>
-              </a:spcBef>
-              <a:spcAft>
-                <a:spcPts val="0"/>
-              </a:spcAft>
-              <a:buNone/>
-            </a:pPr>
-            <a:r>
-              <a:rPr lang="en" sz="1000">
-                <a:highlight>
-                  <a:schemeClr val="dk2"/>
-                </a:highlight>
-                <a:latin typeface="Consolas"/>
-                <a:ea typeface="Consolas"/>
-                <a:cs typeface="Consolas"/>
-                <a:sym typeface="Consolas"/>
-              </a:rPr>
-              <a:t>public void OnPowerPellet() =&gt;</a:t>
-            </a:r>
-            <a:endParaRPr sz="1000">
-              <a:solidFill>
-                <a:srgbClr val="CCCCCC"/>
-              </a:solidFill>
-              <a:highlight>
-                <a:schemeClr val="dk2"/>
-              </a:highlight>
-              <a:latin typeface="Consolas"/>
-              <a:ea typeface="Consolas"/>
-              <a:cs typeface="Consolas"/>
-              <a:sym typeface="Consolas"/>
-            </a:endParaRPr>
-          </a:p>
-          <a:p>
-            <a:pPr indent="0" lvl="0" marL="0" rtl="0" algn="l">
-              <a:lnSpc>
-                <a:spcPct val="115000"/>
-              </a:lnSpc>
-              <a:spcBef>
-                <a:spcPts val="0"/>
-              </a:spcBef>
-              <a:spcAft>
-                <a:spcPts val="0"/>
-              </a:spcAft>
-              <a:buNone/>
-            </a:pPr>
-            <a:r>
-              <a:rPr lang="en" sz="1000">
-                <a:highlight>
-                  <a:schemeClr val="dk2"/>
-                </a:highlight>
-                <a:latin typeface="Consolas"/>
-                <a:ea typeface="Consolas"/>
-                <a:cs typeface="Consolas"/>
-                <a:sym typeface="Consolas"/>
-              </a:rPr>
-              <a:t>    State.OnPowerPellet(this);</a:t>
-            </a:r>
-            <a:endParaRPr sz="1000">
-              <a:solidFill>
-                <a:srgbClr val="CCCCCC"/>
-              </a:solidFill>
-              <a:highlight>
-                <a:schemeClr val="dk2"/>
-              </a:highlight>
-              <a:latin typeface="Consolas"/>
-              <a:ea typeface="Consolas"/>
-              <a:cs typeface="Consolas"/>
-              <a:sym typeface="Consolas"/>
-            </a:endParaRPr>
-          </a:p>
-          <a:p>
-            <a:pPr indent="0" lvl="0" marL="0" rtl="0" algn="l">
-              <a:lnSpc>
-                <a:spcPct val="115000"/>
-              </a:lnSpc>
-              <a:spcBef>
-                <a:spcPts val="0"/>
-              </a:spcBef>
-              <a:spcAft>
-                <a:spcPts val="0"/>
-              </a:spcAft>
-              <a:buNone/>
-            </a:pPr>
-            <a:r>
-              <a:rPr lang="en" sz="1000">
-                <a:highlight>
-                  <a:schemeClr val="dk2"/>
-                </a:highlight>
-                <a:latin typeface="Consolas"/>
-                <a:ea typeface="Consolas"/>
-                <a:cs typeface="Consolas"/>
-                <a:sym typeface="Consolas"/>
-              </a:rPr>
-              <a:t>public TouchResult Touch() =&gt;</a:t>
-            </a:r>
-            <a:endParaRPr sz="1000">
-              <a:solidFill>
-                <a:srgbClr val="CCCCCC"/>
-              </a:solidFill>
-              <a:highlight>
-                <a:schemeClr val="dk2"/>
-              </a:highlight>
-              <a:latin typeface="Consolas"/>
-              <a:ea typeface="Consolas"/>
-              <a:cs typeface="Consolas"/>
-              <a:sym typeface="Consolas"/>
-            </a:endParaRPr>
-          </a:p>
-          <a:p>
-            <a:pPr indent="0" lvl="0" marL="0" rtl="0" algn="l">
-              <a:lnSpc>
-                <a:spcPct val="115000"/>
-              </a:lnSpc>
-              <a:spcBef>
-                <a:spcPts val="0"/>
-              </a:spcBef>
-              <a:spcAft>
-                <a:spcPts val="0"/>
-              </a:spcAft>
-              <a:buNone/>
-            </a:pPr>
-            <a:r>
-              <a:rPr lang="en" sz="1000">
-                <a:highlight>
-                  <a:schemeClr val="dk2"/>
-                </a:highlight>
-                <a:latin typeface="Consolas"/>
-                <a:ea typeface="Consolas"/>
-                <a:cs typeface="Consolas"/>
-                <a:sym typeface="Consolas"/>
-              </a:rPr>
-              <a:t>    State.OnTouch(this);</a:t>
-            </a:r>
-            <a:endParaRPr sz="1000">
-              <a:solidFill>
-                <a:srgbClr val="CCCCCC"/>
-              </a:solidFill>
-              <a:highlight>
-                <a:schemeClr val="dk2"/>
-              </a:highlight>
-              <a:latin typeface="Consolas"/>
-              <a:ea typeface="Consolas"/>
-              <a:cs typeface="Consolas"/>
-              <a:sym typeface="Consolas"/>
-            </a:endParaRPr>
           </a:p>
         </p:txBody>
       </p:sp>
@@ -10196,6 +9502,128 @@
       <p:grpSpPr/>
       <p:sp>
         <p:nvSpPr>
+          <p:cNvPr id="2" name="Title 1"/>
+          <p:cNvSpPr>
+            <a:spLocks noGrp="1"/>
+          </p:cNvSpPr>
+          <p:nvPr>
+            <p:ph type="title"/>
+          </p:nvPr>
+        </p:nvSpPr>
+        <p:spPr/>
+        <p:txBody>
+          <a:bodyPr/>
+          <a:lstStyle/>
+          <a:p>
+            <a:pPr indent="0" lvl="0" marL="0" rtl="0" algn="l">
+              <a:spcBef>
+                <a:spcPts val="0"/>
+              </a:spcBef>
+              <a:spcAft>
+                <a:spcPts val="0"/>
+              </a:spcAft>
+              <a:buNone/>
+            </a:pPr>
+            <a:r>
+              <a:rPr lang="en"/>
+              <a:t>Try It: A Frozen Mode</a:t>
+            </a:r>
+            <a:endParaRPr/>
+          </a:p>
+        </p:txBody>
+      </p:sp>
+      <p:sp>
+        <p:nvSpPr>
+          <p:cNvPr id="3" name="Text Placeholder 2"/>
+          <p:cNvSpPr>
+            <a:spLocks noGrp="1"/>
+          </p:cNvSpPr>
+          <p:nvPr>
+            <p:ph type="body" idx="1"/>
+          </p:nvPr>
+        </p:nvSpPr>
+        <p:spPr>
+          <a:xfrm>
+            <a:off x="311700" y="885950"/>
+            <a:ext cx="8520600" cy="1289304"/>
+          </a:xfrm>
+        </p:spPr>
+        <p:txBody>
+          <a:bodyPr/>
+          <a:lstStyle/>
+          <a:p>
+            <a:pPr indent="-330200" lvl="0" marL="457200" rtl="0" algn="l">
+              <a:spcBef>
+                <a:spcPts val="0"/>
+              </a:spcBef>
+              <a:spcAft>
+                <a:spcPts val="0"/>
+              </a:spcAft>
+              <a:buSzPts val="1600"/>
+              <a:buChar char="●"/>
+            </a:pPr>
+            <a:r>
+              <a:rPr lang="en"/>
+              <a:t>In Pacman1, add Frozen to GhostMode:</a:t>
+            </a:r>
+            <a:endParaRPr/>
+          </a:p>
+          <a:p>
+            <a:pPr indent="-330200" lvl="0" marL="457200" rtl="0" algn="l">
+              <a:spcBef>
+                <a:spcPts val="0"/>
+              </a:spcBef>
+              <a:spcAft>
+                <a:spcPts val="0"/>
+              </a:spcAft>
+              <a:buSzPts val="1600"/>
+              <a:buChar char="●"/>
+            </a:pPr>
+            <a:r>
+              <a:rPr lang="en"/>
+              <a:t>an eaten ghost stands still for a second first</a:t>
+            </a:r>
+            <a:endParaRPr/>
+          </a:p>
+          <a:p>
+            <a:pPr indent="-330200" lvl="0" marL="457200" rtl="0" algn="l">
+              <a:spcBef>
+                <a:spcPts val="0"/>
+              </a:spcBef>
+              <a:spcAft>
+                <a:spcPts val="0"/>
+              </a:spcAft>
+              <a:buSzPts val="1600"/>
+              <a:buChar char="●"/>
+            </a:pPr>
+            <a:r>
+              <a:rPr lang="en"/>
+              <a:t>Don’t finish it. Count the switches you would have to change</a:t>
+            </a:r>
+            <a:endParaRPr/>
+          </a:p>
+        </p:txBody>
+      </p:sp>
+    </p:spTree>
+  </p:cSld>
+  <p:clrMapOvr>
+    <a:masterClrMapping/>
+  </p:clrMapOvr>
+</p:sld>
+</file>
+
+<file path=ppt/slides/slide17.xml><?xml version="1.0" encoding="utf-8"?>
+<p:sld xmlns:a="http://schemas.openxmlformats.org/drawingml/2006/main" xmlns:p="http://schemas.openxmlformats.org/presentationml/2006/main" xmlns:r="http://schemas.openxmlformats.org/officeDocument/2006/relationships">
+  <p:cSld>
+    <p:spTree>
+      <p:nvGrpSpPr>
+        <p:cNvPr id="1" name=""/>
+        <p:cNvGrpSpPr/>
+        <p:nvPr/>
+      </p:nvGrpSpPr>
+      <p:grpSpPr/>
+      <p:sp>
+        <p:nvSpPr>
           <p:cNvPr id="140" name="Google Shape;140;p23"/>
           <p:cNvSpPr txBox="1"/>
           <p:nvPr>
@@ -10228,7 +9656,7 @@
             </a:pPr>
             <a:r>
               <a:rPr lang="en"/>
-              <a:t>A State: Frightened</a:t>
+              <a:t>The State Pattern</a:t>
             </a:r>
             <a:endParaRPr/>
           </a:p>
@@ -10276,7 +9704,31 @@
                   <a:srgbClr val="DEE2E6"/>
                 </a:solidFill>
               </a:rPr>
-              <a:t>Everything about being frightened, in one class</a:t>
+              <a:t>“Allow an object to alter its behavior when its internal state changes.”</a:t>
+            </a:r>
+            <a:endParaRPr/>
+          </a:p>
+          <a:p>
+            <a:pPr indent="-330200" lvl="0" marL="457200" rtl="0" algn="l">
+              <a:buClr>
+                <a:srgbClr val="DEE2E6"/>
+              </a:buClr>
+              <a:spcBef>
+                <a:spcPts val="0"/>
+              </a:spcBef>
+              <a:spcAft>
+                <a:spcPts val="0"/>
+              </a:spcAft>
+              <a:buSzPts val="1600"/>
+              <a:buChar char="●"/>
+            </a:pPr>
+            <a:r>
+              <a:rPr lang="en" sz="1600">
+                <a:solidFill>
+                  <a:srgbClr val="DEE2E6"/>
+                </a:solidFill>
+              </a:rPr>
+              <a:t>Each mode becomes a class</a:t>
             </a:r>
             <a:endParaRPr/>
           </a:p>
@@ -10300,7 +9752,7 @@
                   <a:srgbClr val="6C757D"/>
                 </a:solidFill>
               </a:rPr>
-              <a:t>Including its own timer</a:t>
+              <a:t>InHouseState, ScatterState, ChaseState, FrightenedState, EatenState</a:t>
             </a:r>
             <a:endParaRPr/>
           </a:p>
@@ -10324,7 +9776,7 @@
                   <a:srgbClr val="DEE2E6"/>
                 </a:solidFill>
               </a:rPr>
-              <a:t>Enter: turn around</a:t>
+              <a:t>The ghost forwards to its current state</a:t>
             </a:r>
             <a:endParaRPr/>
           </a:p>
@@ -10348,55 +9800,7 @@
                   <a:srgbClr val="DEE2E6"/>
                 </a:solidFill>
               </a:rPr>
-              <a:t>The state decides the transitions</a:t>
-            </a:r>
-            <a:endParaRPr/>
-          </a:p>
-          <a:p>
-            <a:pPr indent="-317500" lvl="1" marL="914400" rtl="0" algn="l">
-              <a:buClr>
-                <a:srgbClr val="6C757D"/>
-              </a:buClr>
-              <a:spcBef>
-                <a:spcPts val="0"/>
-              </a:spcBef>
-              <a:spcAft>
-                <a:spcPts val="0"/>
-              </a:spcAft>
-              <a:buSzPts val="1400"/>
-              <a:buChar char="○"/>
-            </a:pPr>
-            <a:r>
-              <a:rPr lang="en" sz="1400">
-                <a:solidFill>
-                  <a:srgbClr val="6C757D"/>
-                </a:solidFill>
-              </a:rPr>
-              <a:t>Time’s up: back to the schedule</a:t>
-            </a:r>
-            <a:endParaRPr/>
-          </a:p>
-          <a:p>
-            <a:pPr indent="-317500" lvl="1" marL="914400" rtl="0" algn="l">
-              <a:buClr>
-                <a:srgbClr val="6C757D"/>
-              </a:buClr>
-              <a:spcBef>
-                <a:spcPts val="0"/>
-              </a:spcBef>
-              <a:spcAft>
-                <a:spcPts val="0"/>
-              </a:spcAft>
-              <a:buSzPts val="1400"/>
-              <a:buChar char="○"/>
-            </a:pPr>
-            <a:r>
-              <a:rPr lang="en" sz="1400">
-                <a:solidFill>
-                  <a:srgbClr val="6C757D"/>
-                </a:solidFill>
-              </a:rPr>
-              <a:t>Touched: eaten</a:t>
+              <a:t>Flappy Bird did this for the game; now for an object in it</a:t>
             </a:r>
             <a:endParaRPr/>
           </a:p>
@@ -10447,7 +9851,7 @@
                 <a:cs typeface="Consolas"/>
                 <a:sym typeface="Consolas"/>
               </a:rPr>
-              <a:t>public class FrightenedState : GhostState</a:t>
+              <a:t>public void ChangeState(GhostState state)</a:t>
             </a:r>
             <a:endParaRPr sz="1000">
               <a:solidFill>
@@ -10523,7 +9927,7 @@
                 <a:cs typeface="Consolas"/>
                 <a:sym typeface="Consolas"/>
               </a:rPr>
-              <a:t>    private float _elapsed;</a:t>
+              <a:t>    State?.Exit(this);</a:t>
             </a:r>
             <a:endParaRPr sz="1000">
               <a:solidFill>
@@ -10561,7 +9965,7 @@
                 <a:cs typeface="Consolas"/>
                 <a:sym typeface="Consolas"/>
               </a:rPr>
-              <a:t>    public override void Enter(Ghost ghost) =&gt;</a:t>
+              <a:t>    State = state;</a:t>
             </a:r>
             <a:endParaRPr sz="1000">
               <a:solidFill>
@@ -10599,7 +10003,7 @@
                 <a:cs typeface="Consolas"/>
                 <a:sym typeface="Consolas"/>
               </a:rPr>
-              <a:t>        ghost.Reverse();</a:t>
+              <a:t>    State.Enter(this);</a:t>
             </a:r>
             <a:endParaRPr sz="1000">
               <a:solidFill>
@@ -10637,7 +10041,7 @@
                 <a:cs typeface="Consolas"/>
                 <a:sym typeface="Consolas"/>
               </a:rPr>
-              <a:t>    public override void Update(Ghost ghost, float dt)</a:t>
+              <a:t>}</a:t>
             </a:r>
             <a:endParaRPr sz="1000">
               <a:solidFill>
@@ -10675,7 +10079,7 @@
                 <a:cs typeface="Consolas"/>
                 <a:sym typeface="Consolas"/>
               </a:rPr>
-              <a:t>    {</a:t>
+              <a:t/>
             </a:r>
             <a:endParaRPr sz="1000">
               <a:solidFill>
@@ -10713,7 +10117,7 @@
                 <a:cs typeface="Consolas"/>
                 <a:sym typeface="Consolas"/>
               </a:rPr>
-              <a:t>        _elapsed += dt;</a:t>
+              <a:t>public void Update(float deltaSeconds) =&gt;</a:t>
             </a:r>
             <a:endParaRPr sz="1000">
               <a:solidFill>
@@ -10751,7 +10155,7 @@
                 <a:cs typeface="Consolas"/>
                 <a:sym typeface="Consolas"/>
               </a:rPr>
-              <a:t>        ghost.Move(Speed * dt);</a:t>
+              <a:t>    State.Update(this, deltaSeconds);</a:t>
             </a:r>
             <a:endParaRPr sz="1000">
               <a:solidFill>
@@ -10789,7 +10193,7 @@
                 <a:cs typeface="Consolas"/>
                 <a:sym typeface="Consolas"/>
               </a:rPr>
-              <a:t>        if (_elapsed &gt;= Seconds)</a:t>
+              <a:t>public void OnPowerPellet() =&gt;</a:t>
             </a:r>
             <a:endParaRPr sz="1000">
               <a:solidFill>
@@ -10827,7 +10231,7 @@
                 <a:cs typeface="Consolas"/>
                 <a:sym typeface="Consolas"/>
               </a:rPr>
-              <a:t>            ghost.ChangeState(ghost.ScheduledState());</a:t>
+              <a:t>    State.OnPowerPellet(this);</a:t>
             </a:r>
             <a:endParaRPr sz="1000">
               <a:solidFill>
@@ -10865,7 +10269,7 @@
                 <a:cs typeface="Consolas"/>
                 <a:sym typeface="Consolas"/>
               </a:rPr>
-              <a:t>    }</a:t>
+              <a:t>public TouchResult Touch() =&gt;</a:t>
             </a:r>
             <a:endParaRPr sz="1000">
               <a:solidFill>
@@ -10903,7 +10307,7 @@
                 <a:cs typeface="Consolas"/>
                 <a:sym typeface="Consolas"/>
               </a:rPr>
-              <a:t/>
+              <a:t>    State.OnTouch(this);</a:t>
             </a:r>
             <a:endParaRPr sz="1000">
               <a:solidFill>
@@ -10918,6 +10322,256 @@
               <a:sym typeface="Consolas"/>
             </a:endParaRPr>
           </a:p>
+        </p:txBody>
+      </p:sp>
+    </p:spTree>
+  </p:cSld>
+  <p:clrMapOvr>
+    <a:masterClrMapping/>
+  </p:clrMapOvr>
+</p:sld>
+</file>
+
+<file path=ppt/slides/slide18.xml><?xml version="1.0" encoding="utf-8"?>
+<p:sld xmlns:a="http://schemas.openxmlformats.org/drawingml/2006/main" xmlns:p="http://schemas.openxmlformats.org/presentationml/2006/main" xmlns:r="http://schemas.openxmlformats.org/officeDocument/2006/relationships">
+  <p:cSld>
+    <p:spTree>
+      <p:nvGrpSpPr>
+        <p:cNvPr id="1" name=""/>
+        <p:cNvGrpSpPr/>
+        <p:nvPr/>
+      </p:nvGrpSpPr>
+      <p:grpSpPr/>
+      <p:sp>
+        <p:nvSpPr>
+          <p:cNvPr id="140" name="Google Shape;140;p23"/>
+          <p:cNvSpPr txBox="1"/>
+          <p:nvPr>
+            <p:ph type="title"/>
+          </p:nvPr>
+        </p:nvSpPr>
+        <p:spPr>
+          <a:xfrm>
+            <a:off x="311700" y="195615"/>
+            <a:ext cx="8520600" cy="572700"/>
+          </a:xfrm>
+          <a:prstGeom prst="rect">
+            <a:avLst/>
+          </a:prstGeom>
+        </p:spPr>
+        <p:txBody>
+          <a:bodyPr anchorCtr="0" anchor="t" bIns="91425" lIns="91425" spcFirstLastPara="1" rIns="91425" wrap="square" tIns="91425">
+            <a:normAutofit fontScale="90000"/>
+          </a:bodyPr>
+          <a:lstStyle/>
+          <a:p>
+            <a:pPr indent="0" lvl="0" marL="0" rtl="0" algn="l">
+              <a:spcBef>
+                <a:spcPts val="0"/>
+              </a:spcBef>
+              <a:spcAft>
+                <a:spcPts val="0"/>
+              </a:spcAft>
+              <a:buNone/>
+            </a:pPr>
+            <a:r>
+              <a:rPr lang="en"/>
+              <a:t>A State: Frightened</a:t>
+            </a:r>
+            <a:endParaRPr/>
+          </a:p>
+        </p:txBody>
+      </p:sp>
+      <p:sp>
+        <p:nvSpPr>
+          <p:cNvPr id="293" name="Google Shape;293;p45"/>
+          <p:cNvSpPr txBox="1"/>
+          <p:nvPr>
+            <p:ph type="title"/>
+          </p:nvPr>
+        </p:nvSpPr>
+        <p:spPr>
+          <a:xfrm>
+            <a:off x="311700" y="1152475"/>
+            <a:ext cx="3700000" cy="3500000"/>
+          </a:xfrm>
+          <a:prstGeom prst="rect">
+            <a:avLst/>
+          </a:prstGeom>
+        </p:spPr>
+        <p:txBody>
+          <a:bodyPr anchorCtr="0" anchor="t" bIns="91425" lIns="91425" spcFirstLastPara="1" rIns="91425" wrap="square" tIns="91425">
+            <a:normAutofit fontScale="90000"/>
+          </a:bodyPr>
+          <a:lstStyle/>
+          <a:p>
+            <a:pPr indent="-330200" lvl="0" marL="457200" rtl="0" algn="l">
+              <a:buClr>
+                <a:srgbClr val="DEE2E6"/>
+              </a:buClr>
+              <a:spcBef>
+                <a:spcPts val="0"/>
+              </a:spcBef>
+              <a:spcAft>
+                <a:spcPts val="0"/>
+              </a:spcAft>
+              <a:buSzPts val="1600"/>
+              <a:buChar char="●"/>
+            </a:pPr>
+            <a:r>
+              <a:rPr lang="en" sz="1600">
+                <a:solidFill>
+                  <a:srgbClr val="DEE2E6"/>
+                </a:solidFill>
+              </a:rPr>
+              <a:t>Everything about being frightened, in one class</a:t>
+            </a:r>
+            <a:endParaRPr/>
+          </a:p>
+          <a:p>
+            <a:pPr indent="-317500" lvl="1" marL="914400" rtl="0" algn="l">
+              <a:buClr>
+                <a:srgbClr val="6C757D"/>
+              </a:buClr>
+              <a:spcBef>
+                <a:spcPts val="0"/>
+              </a:spcBef>
+              <a:spcAft>
+                <a:spcPts val="0"/>
+              </a:spcAft>
+              <a:buSzPts val="1400"/>
+              <a:buChar char="○"/>
+            </a:pPr>
+            <a:r>
+              <a:rPr lang="en" sz="1400">
+                <a:solidFill>
+                  <a:srgbClr val="6C757D"/>
+                </a:solidFill>
+              </a:rPr>
+              <a:t>Including its own timer</a:t>
+            </a:r>
+            <a:endParaRPr/>
+          </a:p>
+          <a:p>
+            <a:pPr indent="-330200" lvl="0" marL="457200" rtl="0" algn="l">
+              <a:buClr>
+                <a:srgbClr val="DEE2E6"/>
+              </a:buClr>
+              <a:spcBef>
+                <a:spcPts val="0"/>
+              </a:spcBef>
+              <a:spcAft>
+                <a:spcPts val="0"/>
+              </a:spcAft>
+              <a:buSzPts val="1600"/>
+              <a:buChar char="●"/>
+            </a:pPr>
+            <a:r>
+              <a:rPr lang="en" sz="1600">
+                <a:solidFill>
+                  <a:srgbClr val="DEE2E6"/>
+                </a:solidFill>
+              </a:rPr>
+              <a:t>Enter: turn around</a:t>
+            </a:r>
+            <a:endParaRPr/>
+          </a:p>
+          <a:p>
+            <a:pPr indent="-330200" lvl="0" marL="457200" rtl="0" algn="l">
+              <a:buClr>
+                <a:srgbClr val="DEE2E6"/>
+              </a:buClr>
+              <a:spcBef>
+                <a:spcPts val="0"/>
+              </a:spcBef>
+              <a:spcAft>
+                <a:spcPts val="0"/>
+              </a:spcAft>
+              <a:buSzPts val="1600"/>
+              <a:buChar char="●"/>
+            </a:pPr>
+            <a:r>
+              <a:rPr lang="en" sz="1600">
+                <a:solidFill>
+                  <a:srgbClr val="DEE2E6"/>
+                </a:solidFill>
+              </a:rPr>
+              <a:t>The state decides the transitions</a:t>
+            </a:r>
+            <a:endParaRPr/>
+          </a:p>
+          <a:p>
+            <a:pPr indent="-317500" lvl="1" marL="914400" rtl="0" algn="l">
+              <a:buClr>
+                <a:srgbClr val="6C757D"/>
+              </a:buClr>
+              <a:spcBef>
+                <a:spcPts val="0"/>
+              </a:spcBef>
+              <a:spcAft>
+                <a:spcPts val="0"/>
+              </a:spcAft>
+              <a:buSzPts val="1400"/>
+              <a:buChar char="○"/>
+            </a:pPr>
+            <a:r>
+              <a:rPr lang="en" sz="1400">
+                <a:solidFill>
+                  <a:srgbClr val="6C757D"/>
+                </a:solidFill>
+              </a:rPr>
+              <a:t>Time’s up: back to the schedule</a:t>
+            </a:r>
+            <a:endParaRPr/>
+          </a:p>
+          <a:p>
+            <a:pPr indent="-317500" lvl="1" marL="914400" rtl="0" algn="l">
+              <a:buClr>
+                <a:srgbClr val="6C757D"/>
+              </a:buClr>
+              <a:spcBef>
+                <a:spcPts val="0"/>
+              </a:spcBef>
+              <a:spcAft>
+                <a:spcPts val="0"/>
+              </a:spcAft>
+              <a:buSzPts val="1400"/>
+              <a:buChar char="○"/>
+            </a:pPr>
+            <a:r>
+              <a:rPr lang="en" sz="1400">
+                <a:solidFill>
+                  <a:srgbClr val="6C757D"/>
+                </a:solidFill>
+              </a:rPr>
+              <a:t>Touched: eaten</a:t>
+            </a:r>
+            <a:endParaRPr/>
+          </a:p>
+        </p:txBody>
+      </p:sp>
+      <p:sp>
+        <p:nvSpPr>
+          <p:cNvPr id="141" name="Google Shape;141;p23"/>
+          <p:cNvSpPr txBox="1"/>
+          <p:nvPr>
+            <p:ph idx="2" type="body"/>
+          </p:nvPr>
+        </p:nvSpPr>
+        <p:spPr>
+          <a:xfrm>
+            <a:off x="4150000" y="1152475"/>
+            <a:ext cx="4750000" cy="3600000"/>
+          </a:xfrm>
+          <a:prstGeom prst="rect">
+            <a:avLst/>
+          </a:prstGeom>
+        </p:spPr>
+        <p:txBody>
+          <a:bodyPr anchorCtr="0" anchor="t" bIns="91425" lIns="91425" spcFirstLastPara="1" rIns="91425" wrap="square" tIns="91425">
+            <a:noAutofit/>
+          </a:bodyPr>
+          <a:lstStyle/>
           <a:p>
             <a:pPr indent="0" lvl="0" marL="0" rtl="0" algn="l">
               <a:lnSpc>
@@ -10941,7 +10595,7 @@
                 <a:cs typeface="Consolas"/>
                 <a:sym typeface="Consolas"/>
               </a:rPr>
-              <a:t>    public override TouchResult OnTouch(Ghost ghost)</a:t>
+              <a:t>public class FrightenedState : GhostState</a:t>
             </a:r>
             <a:endParaRPr sz="1000">
               <a:solidFill>
@@ -10979,7 +10633,7 @@
                 <a:cs typeface="Consolas"/>
                 <a:sym typeface="Consolas"/>
               </a:rPr>
-              <a:t>    {</a:t>
+              <a:t>{</a:t>
             </a:r>
             <a:endParaRPr sz="1000">
               <a:solidFill>
@@ -11017,7 +10671,7 @@
                 <a:cs typeface="Consolas"/>
                 <a:sym typeface="Consolas"/>
               </a:rPr>
-              <a:t>        ghost.ChangeState(new EatenState());</a:t>
+              <a:t>    private float _elapsed;</a:t>
             </a:r>
             <a:endParaRPr sz="1000">
               <a:solidFill>
@@ -11055,7 +10709,7 @@
                 <a:cs typeface="Consolas"/>
                 <a:sym typeface="Consolas"/>
               </a:rPr>
-              <a:t>        return TouchResult.GhostEaten;</a:t>
+              <a:t>    public override void Enter(Ghost ghost) =&gt;</a:t>
             </a:r>
             <a:endParaRPr sz="1000">
               <a:solidFill>
@@ -11093,7 +10747,7 @@
                 <a:cs typeface="Consolas"/>
                 <a:sym typeface="Consolas"/>
               </a:rPr>
-              <a:t>    }</a:t>
+              <a:t>        ghost.Reverse();</a:t>
             </a:r>
             <a:endParaRPr sz="1000">
               <a:solidFill>
@@ -11131,7 +10785,7 @@
                 <a:cs typeface="Consolas"/>
                 <a:sym typeface="Consolas"/>
               </a:rPr>
-              <a:t>}</a:t>
+              <a:t>    public override void Update(Ghost ghost, float dt)</a:t>
             </a:r>
             <a:endParaRPr sz="1000">
               <a:solidFill>
@@ -11146,6 +10800,500 @@
               <a:sym typeface="Consolas"/>
             </a:endParaRPr>
           </a:p>
+          <a:p>
+            <a:pPr indent="0" lvl="0" marL="0" rtl="0" algn="l">
+              <a:lnSpc>
+                <a:spcPct val="115000"/>
+              </a:lnSpc>
+              <a:spcBef>
+                <a:spcPts val="0"/>
+              </a:spcBef>
+              <a:spcAft>
+                <a:spcPts val="0"/>
+              </a:spcAft>
+              <a:buNone/>
+            </a:pPr>
+            <a:r>
+              <a:rPr lang="en" sz="1000">
+                <a:highlight>
+                  <a:schemeClr val="dk2"/>
+                </a:highlight>
+                <a:latin typeface="Consolas"/>
+                <a:ea typeface="Consolas"/>
+                <a:cs typeface="Consolas"/>
+                <a:sym typeface="Consolas"/>
+              </a:rPr>
+              <a:t>    {</a:t>
+            </a:r>
+            <a:endParaRPr sz="1000">
+              <a:solidFill>
+                <a:srgbClr val="CCCCCC"/>
+              </a:solidFill>
+              <a:highlight>
+                <a:schemeClr val="dk2"/>
+              </a:highlight>
+              <a:latin typeface="Consolas"/>
+              <a:ea typeface="Consolas"/>
+              <a:cs typeface="Consolas"/>
+              <a:sym typeface="Consolas"/>
+            </a:endParaRPr>
+          </a:p>
+          <a:p>
+            <a:pPr indent="0" lvl="0" marL="0" rtl="0" algn="l">
+              <a:lnSpc>
+                <a:spcPct val="115000"/>
+              </a:lnSpc>
+              <a:spcBef>
+                <a:spcPts val="0"/>
+              </a:spcBef>
+              <a:spcAft>
+                <a:spcPts val="0"/>
+              </a:spcAft>
+              <a:buNone/>
+            </a:pPr>
+            <a:r>
+              <a:rPr lang="en" sz="1000">
+                <a:highlight>
+                  <a:schemeClr val="dk2"/>
+                </a:highlight>
+                <a:latin typeface="Consolas"/>
+                <a:ea typeface="Consolas"/>
+                <a:cs typeface="Consolas"/>
+                <a:sym typeface="Consolas"/>
+              </a:rPr>
+              <a:t>        _elapsed += dt;</a:t>
+            </a:r>
+            <a:endParaRPr sz="1000">
+              <a:solidFill>
+                <a:srgbClr val="CCCCCC"/>
+              </a:solidFill>
+              <a:highlight>
+                <a:schemeClr val="dk2"/>
+              </a:highlight>
+              <a:latin typeface="Consolas"/>
+              <a:ea typeface="Consolas"/>
+              <a:cs typeface="Consolas"/>
+              <a:sym typeface="Consolas"/>
+            </a:endParaRPr>
+          </a:p>
+          <a:p>
+            <a:pPr indent="0" lvl="0" marL="0" rtl="0" algn="l">
+              <a:lnSpc>
+                <a:spcPct val="115000"/>
+              </a:lnSpc>
+              <a:spcBef>
+                <a:spcPts val="0"/>
+              </a:spcBef>
+              <a:spcAft>
+                <a:spcPts val="0"/>
+              </a:spcAft>
+              <a:buNone/>
+            </a:pPr>
+            <a:r>
+              <a:rPr lang="en" sz="1000">
+                <a:highlight>
+                  <a:schemeClr val="dk2"/>
+                </a:highlight>
+                <a:latin typeface="Consolas"/>
+                <a:ea typeface="Consolas"/>
+                <a:cs typeface="Consolas"/>
+                <a:sym typeface="Consolas"/>
+              </a:rPr>
+              <a:t>        ghost.Move(Speed * dt);</a:t>
+            </a:r>
+            <a:endParaRPr sz="1000">
+              <a:solidFill>
+                <a:srgbClr val="CCCCCC"/>
+              </a:solidFill>
+              <a:highlight>
+                <a:schemeClr val="dk2"/>
+              </a:highlight>
+              <a:latin typeface="Consolas"/>
+              <a:ea typeface="Consolas"/>
+              <a:cs typeface="Consolas"/>
+              <a:sym typeface="Consolas"/>
+            </a:endParaRPr>
+          </a:p>
+          <a:p>
+            <a:pPr indent="0" lvl="0" marL="0" rtl="0" algn="l">
+              <a:lnSpc>
+                <a:spcPct val="115000"/>
+              </a:lnSpc>
+              <a:spcBef>
+                <a:spcPts val="0"/>
+              </a:spcBef>
+              <a:spcAft>
+                <a:spcPts val="0"/>
+              </a:spcAft>
+              <a:buNone/>
+            </a:pPr>
+            <a:r>
+              <a:rPr lang="en" sz="1000">
+                <a:highlight>
+                  <a:schemeClr val="dk2"/>
+                </a:highlight>
+                <a:latin typeface="Consolas"/>
+                <a:ea typeface="Consolas"/>
+                <a:cs typeface="Consolas"/>
+                <a:sym typeface="Consolas"/>
+              </a:rPr>
+              <a:t>        if (_elapsed &gt;= Seconds)</a:t>
+            </a:r>
+            <a:endParaRPr sz="1000">
+              <a:solidFill>
+                <a:srgbClr val="CCCCCC"/>
+              </a:solidFill>
+              <a:highlight>
+                <a:schemeClr val="dk2"/>
+              </a:highlight>
+              <a:latin typeface="Consolas"/>
+              <a:ea typeface="Consolas"/>
+              <a:cs typeface="Consolas"/>
+              <a:sym typeface="Consolas"/>
+            </a:endParaRPr>
+          </a:p>
+          <a:p>
+            <a:pPr indent="0" lvl="0" marL="0" rtl="0" algn="l">
+              <a:lnSpc>
+                <a:spcPct val="115000"/>
+              </a:lnSpc>
+              <a:spcBef>
+                <a:spcPts val="0"/>
+              </a:spcBef>
+              <a:spcAft>
+                <a:spcPts val="0"/>
+              </a:spcAft>
+              <a:buNone/>
+            </a:pPr>
+            <a:r>
+              <a:rPr lang="en" sz="1000">
+                <a:highlight>
+                  <a:schemeClr val="dk2"/>
+                </a:highlight>
+                <a:latin typeface="Consolas"/>
+                <a:ea typeface="Consolas"/>
+                <a:cs typeface="Consolas"/>
+                <a:sym typeface="Consolas"/>
+              </a:rPr>
+              <a:t>            ghost.ChangeState(ghost.ScheduledState());</a:t>
+            </a:r>
+            <a:endParaRPr sz="1000">
+              <a:solidFill>
+                <a:srgbClr val="CCCCCC"/>
+              </a:solidFill>
+              <a:highlight>
+                <a:schemeClr val="dk2"/>
+              </a:highlight>
+              <a:latin typeface="Consolas"/>
+              <a:ea typeface="Consolas"/>
+              <a:cs typeface="Consolas"/>
+              <a:sym typeface="Consolas"/>
+            </a:endParaRPr>
+          </a:p>
+          <a:p>
+            <a:pPr indent="0" lvl="0" marL="0" rtl="0" algn="l">
+              <a:lnSpc>
+                <a:spcPct val="115000"/>
+              </a:lnSpc>
+              <a:spcBef>
+                <a:spcPts val="0"/>
+              </a:spcBef>
+              <a:spcAft>
+                <a:spcPts val="0"/>
+              </a:spcAft>
+              <a:buNone/>
+            </a:pPr>
+            <a:r>
+              <a:rPr lang="en" sz="1000">
+                <a:highlight>
+                  <a:schemeClr val="dk2"/>
+                </a:highlight>
+                <a:latin typeface="Consolas"/>
+                <a:ea typeface="Consolas"/>
+                <a:cs typeface="Consolas"/>
+                <a:sym typeface="Consolas"/>
+              </a:rPr>
+              <a:t>    }</a:t>
+            </a:r>
+            <a:endParaRPr sz="1000">
+              <a:solidFill>
+                <a:srgbClr val="CCCCCC"/>
+              </a:solidFill>
+              <a:highlight>
+                <a:schemeClr val="dk2"/>
+              </a:highlight>
+              <a:latin typeface="Consolas"/>
+              <a:ea typeface="Consolas"/>
+              <a:cs typeface="Consolas"/>
+              <a:sym typeface="Consolas"/>
+            </a:endParaRPr>
+          </a:p>
+          <a:p>
+            <a:pPr indent="0" lvl="0" marL="0" rtl="0" algn="l">
+              <a:lnSpc>
+                <a:spcPct val="115000"/>
+              </a:lnSpc>
+              <a:spcBef>
+                <a:spcPts val="0"/>
+              </a:spcBef>
+              <a:spcAft>
+                <a:spcPts val="0"/>
+              </a:spcAft>
+              <a:buNone/>
+            </a:pPr>
+            <a:r>
+              <a:rPr lang="en" sz="1000">
+                <a:highlight>
+                  <a:schemeClr val="dk2"/>
+                </a:highlight>
+                <a:latin typeface="Consolas"/>
+                <a:ea typeface="Consolas"/>
+                <a:cs typeface="Consolas"/>
+                <a:sym typeface="Consolas"/>
+              </a:rPr>
+              <a:t/>
+            </a:r>
+            <a:endParaRPr sz="1000">
+              <a:solidFill>
+                <a:srgbClr val="CCCCCC"/>
+              </a:solidFill>
+              <a:highlight>
+                <a:schemeClr val="dk2"/>
+              </a:highlight>
+              <a:latin typeface="Consolas"/>
+              <a:ea typeface="Consolas"/>
+              <a:cs typeface="Consolas"/>
+              <a:sym typeface="Consolas"/>
+            </a:endParaRPr>
+          </a:p>
+          <a:p>
+            <a:pPr indent="0" lvl="0" marL="0" rtl="0" algn="l">
+              <a:lnSpc>
+                <a:spcPct val="115000"/>
+              </a:lnSpc>
+              <a:spcBef>
+                <a:spcPts val="0"/>
+              </a:spcBef>
+              <a:spcAft>
+                <a:spcPts val="0"/>
+              </a:spcAft>
+              <a:buNone/>
+            </a:pPr>
+            <a:r>
+              <a:rPr lang="en" sz="1000">
+                <a:highlight>
+                  <a:schemeClr val="dk2"/>
+                </a:highlight>
+                <a:latin typeface="Consolas"/>
+                <a:ea typeface="Consolas"/>
+                <a:cs typeface="Consolas"/>
+                <a:sym typeface="Consolas"/>
+              </a:rPr>
+              <a:t>    public override TouchResult OnTouch(Ghost ghost)</a:t>
+            </a:r>
+            <a:endParaRPr sz="1000">
+              <a:solidFill>
+                <a:srgbClr val="CCCCCC"/>
+              </a:solidFill>
+              <a:highlight>
+                <a:schemeClr val="dk2"/>
+              </a:highlight>
+              <a:latin typeface="Consolas"/>
+              <a:ea typeface="Consolas"/>
+              <a:cs typeface="Consolas"/>
+              <a:sym typeface="Consolas"/>
+            </a:endParaRPr>
+          </a:p>
+          <a:p>
+            <a:pPr indent="0" lvl="0" marL="0" rtl="0" algn="l">
+              <a:lnSpc>
+                <a:spcPct val="115000"/>
+              </a:lnSpc>
+              <a:spcBef>
+                <a:spcPts val="0"/>
+              </a:spcBef>
+              <a:spcAft>
+                <a:spcPts val="0"/>
+              </a:spcAft>
+              <a:buNone/>
+            </a:pPr>
+            <a:r>
+              <a:rPr lang="en" sz="1000">
+                <a:highlight>
+                  <a:schemeClr val="dk2"/>
+                </a:highlight>
+                <a:latin typeface="Consolas"/>
+                <a:ea typeface="Consolas"/>
+                <a:cs typeface="Consolas"/>
+                <a:sym typeface="Consolas"/>
+              </a:rPr>
+              <a:t>    {</a:t>
+            </a:r>
+            <a:endParaRPr sz="1000">
+              <a:solidFill>
+                <a:srgbClr val="CCCCCC"/>
+              </a:solidFill>
+              <a:highlight>
+                <a:schemeClr val="dk2"/>
+              </a:highlight>
+              <a:latin typeface="Consolas"/>
+              <a:ea typeface="Consolas"/>
+              <a:cs typeface="Consolas"/>
+              <a:sym typeface="Consolas"/>
+            </a:endParaRPr>
+          </a:p>
+          <a:p>
+            <a:pPr indent="0" lvl="0" marL="0" rtl="0" algn="l">
+              <a:lnSpc>
+                <a:spcPct val="115000"/>
+              </a:lnSpc>
+              <a:spcBef>
+                <a:spcPts val="0"/>
+              </a:spcBef>
+              <a:spcAft>
+                <a:spcPts val="0"/>
+              </a:spcAft>
+              <a:buNone/>
+            </a:pPr>
+            <a:r>
+              <a:rPr lang="en" sz="1000">
+                <a:highlight>
+                  <a:schemeClr val="dk2"/>
+                </a:highlight>
+                <a:latin typeface="Consolas"/>
+                <a:ea typeface="Consolas"/>
+                <a:cs typeface="Consolas"/>
+                <a:sym typeface="Consolas"/>
+              </a:rPr>
+              <a:t>        ghost.ChangeState(new EatenState());</a:t>
+            </a:r>
+            <a:endParaRPr sz="1000">
+              <a:solidFill>
+                <a:srgbClr val="CCCCCC"/>
+              </a:solidFill>
+              <a:highlight>
+                <a:schemeClr val="dk2"/>
+              </a:highlight>
+              <a:latin typeface="Consolas"/>
+              <a:ea typeface="Consolas"/>
+              <a:cs typeface="Consolas"/>
+              <a:sym typeface="Consolas"/>
+            </a:endParaRPr>
+          </a:p>
+          <a:p>
+            <a:pPr indent="0" lvl="0" marL="0" rtl="0" algn="l">
+              <a:lnSpc>
+                <a:spcPct val="115000"/>
+              </a:lnSpc>
+              <a:spcBef>
+                <a:spcPts val="0"/>
+              </a:spcBef>
+              <a:spcAft>
+                <a:spcPts val="0"/>
+              </a:spcAft>
+              <a:buNone/>
+            </a:pPr>
+            <a:r>
+              <a:rPr lang="en" sz="1000">
+                <a:highlight>
+                  <a:schemeClr val="dk2"/>
+                </a:highlight>
+                <a:latin typeface="Consolas"/>
+                <a:ea typeface="Consolas"/>
+                <a:cs typeface="Consolas"/>
+                <a:sym typeface="Consolas"/>
+              </a:rPr>
+              <a:t>        return TouchResult.GhostEaten;</a:t>
+            </a:r>
+            <a:endParaRPr sz="1000">
+              <a:solidFill>
+                <a:srgbClr val="CCCCCC"/>
+              </a:solidFill>
+              <a:highlight>
+                <a:schemeClr val="dk2"/>
+              </a:highlight>
+              <a:latin typeface="Consolas"/>
+              <a:ea typeface="Consolas"/>
+              <a:cs typeface="Consolas"/>
+              <a:sym typeface="Consolas"/>
+            </a:endParaRPr>
+          </a:p>
+          <a:p>
+            <a:pPr indent="0" lvl="0" marL="0" rtl="0" algn="l">
+              <a:lnSpc>
+                <a:spcPct val="115000"/>
+              </a:lnSpc>
+              <a:spcBef>
+                <a:spcPts val="0"/>
+              </a:spcBef>
+              <a:spcAft>
+                <a:spcPts val="0"/>
+              </a:spcAft>
+              <a:buNone/>
+            </a:pPr>
+            <a:r>
+              <a:rPr lang="en" sz="1000">
+                <a:highlight>
+                  <a:schemeClr val="dk2"/>
+                </a:highlight>
+                <a:latin typeface="Consolas"/>
+                <a:ea typeface="Consolas"/>
+                <a:cs typeface="Consolas"/>
+                <a:sym typeface="Consolas"/>
+              </a:rPr>
+              <a:t>    }</a:t>
+            </a:r>
+            <a:endParaRPr sz="1000">
+              <a:solidFill>
+                <a:srgbClr val="CCCCCC"/>
+              </a:solidFill>
+              <a:highlight>
+                <a:schemeClr val="dk2"/>
+              </a:highlight>
+              <a:latin typeface="Consolas"/>
+              <a:ea typeface="Consolas"/>
+              <a:cs typeface="Consolas"/>
+              <a:sym typeface="Consolas"/>
+            </a:endParaRPr>
+          </a:p>
+          <a:p>
+            <a:pPr indent="0" lvl="0" marL="0" rtl="0" algn="l">
+              <a:lnSpc>
+                <a:spcPct val="115000"/>
+              </a:lnSpc>
+              <a:spcBef>
+                <a:spcPts val="0"/>
+              </a:spcBef>
+              <a:spcAft>
+                <a:spcPts val="0"/>
+              </a:spcAft>
+              <a:buNone/>
+            </a:pPr>
+            <a:r>
+              <a:rPr lang="en" sz="1000">
+                <a:highlight>
+                  <a:schemeClr val="dk2"/>
+                </a:highlight>
+                <a:latin typeface="Consolas"/>
+                <a:ea typeface="Consolas"/>
+                <a:cs typeface="Consolas"/>
+                <a:sym typeface="Consolas"/>
+              </a:rPr>
+              <a:t>}</a:t>
+            </a:r>
+            <a:endParaRPr sz="1000">
+              <a:solidFill>
+                <a:srgbClr val="CCCCCC"/>
+              </a:solidFill>
+              <a:highlight>
+                <a:schemeClr val="dk2"/>
+              </a:highlight>
+              <a:latin typeface="Consolas"/>
+              <a:ea typeface="Consolas"/>
+              <a:cs typeface="Consolas"/>
+              <a:sym typeface="Consolas"/>
+            </a:endParaRPr>
+          </a:p>
         </p:txBody>
       </p:sp>
     </p:spTree>
@@ -11156,7 +11304,7 @@
 </p:sld>
 </file>
 
-<file path=ppt/slides/slide17.xml><?xml version="1.0" encoding="utf-8"?>
+<file path=ppt/slides/slide19.xml><?xml version="1.0" encoding="utf-8"?>
 <p:sld xmlns:a="http://schemas.openxmlformats.org/drawingml/2006/main" xmlns:p="http://schemas.openxmlformats.org/presentationml/2006/main" xmlns:r="http://schemas.openxmlformats.org/officeDocument/2006/relationships">
   <p:cSld>
     <p:spTree>
@@ -11503,272 +11651,6 @@
               </a:rPr>
               <a:t>Pacman1 → Pacman2: World didn’t change at all.</a:t>
             </a:r>
-          </a:p>
-        </p:txBody>
-      </p:sp>
-    </p:spTree>
-  </p:cSld>
-  <p:clrMapOvr>
-    <a:masterClrMapping/>
-  </p:clrMapOvr>
-</p:sld>
-</file>
-
-<file path=ppt/slides/slide18.xml><?xml version="1.0" encoding="utf-8"?>
-<p:sld xmlns:a="http://schemas.openxmlformats.org/drawingml/2006/main" xmlns:p="http://schemas.openxmlformats.org/presentationml/2006/main" xmlns:r="http://schemas.openxmlformats.org/officeDocument/2006/relationships">
-  <p:cSld>
-    <p:spTree>
-      <p:nvGrpSpPr>
-        <p:cNvPr id="1" name=""/>
-        <p:cNvGrpSpPr/>
-        <p:nvPr/>
-      </p:nvGrpSpPr>
-      <p:grpSpPr/>
-      <p:sp>
-        <p:nvSpPr>
-          <p:cNvPr id="128" name="Google Shape;128;p21"/>
-          <p:cNvSpPr txBox="1"/>
-          <p:nvPr>
-            <p:ph type="title"/>
-          </p:nvPr>
-        </p:nvSpPr>
-        <p:spPr>
-          <a:xfrm>
-            <a:off x="311700" y="195615"/>
-            <a:ext cx="8520600" cy="572700"/>
-          </a:xfrm>
-          <a:prstGeom prst="rect">
-            <a:avLst/>
-          </a:prstGeom>
-        </p:spPr>
-        <p:txBody>
-          <a:bodyPr anchorCtr="0" anchor="t" bIns="91425" lIns="91425" spcFirstLastPara="1" rIns="91425" wrap="square" tIns="91425">
-            <a:normAutofit fontScale="90000"/>
-          </a:bodyPr>
-          <a:lstStyle/>
-          <a:p>
-            <a:pPr indent="0" lvl="0" marL="0" rtl="0" algn="l">
-              <a:spcBef>
-                <a:spcPts val="0"/>
-              </a:spcBef>
-              <a:spcAft>
-                <a:spcPts val="0"/>
-              </a:spcAft>
-              <a:buNone/>
-            </a:pPr>
-            <a:r>
-              <a:rPr lang="en">
-                <a:solidFill>
-                  <a:schemeClr val="accent5"/>
-                </a:solidFill>
-              </a:rPr>
-              <a:t>State Implementation</a:t>
-            </a:r>
-            <a:endParaRPr>
-              <a:solidFill>
-                <a:schemeClr val="accent5"/>
-              </a:solidFill>
-            </a:endParaRPr>
-          </a:p>
-        </p:txBody>
-      </p:sp>
-      <p:sp>
-        <p:nvSpPr>
-          <p:cNvPr id="129" name="Google Shape;129;p21"/>
-          <p:cNvSpPr txBox="1"/>
-          <p:nvPr>
-            <p:ph idx="1" type="body"/>
-          </p:nvPr>
-        </p:nvSpPr>
-        <p:spPr>
-          <a:xfrm>
-            <a:off x="311700" y="885950"/>
-            <a:ext cx="8520600" cy="4023300"/>
-          </a:xfrm>
-          <a:prstGeom prst="rect">
-            <a:avLst/>
-          </a:prstGeom>
-        </p:spPr>
-        <p:txBody>
-          <a:bodyPr anchorCtr="0" anchor="ctr" bIns="91425" lIns="91425" spcFirstLastPara="1" rIns="91425" wrap="square" tIns="91425">
-            <a:normAutofit/>
-          </a:bodyPr>
-          <a:lstStyle/>
-          <a:p>
-            <a:pPr indent="0" lvl="0" marL="0" rtl="0" algn="ctr">
-              <a:spcBef>
-                <a:spcPts val="0"/>
-              </a:spcBef>
-              <a:spcAft>
-                <a:spcPts val="1200"/>
-              </a:spcAft>
-              <a:buNone/>
-            </a:pPr>
-            <a:r>
-              <a:rPr lang="en" sz="2900">
-                <a:latin typeface="VT323"/>
-                <a:ea typeface="VT323"/>
-                <a:cs typeface="VT323"/>
-                <a:sym typeface="VT323"/>
-              </a:rPr>
-              <a:t>DEMO!</a:t>
-            </a:r>
-            <a:endParaRPr/>
-          </a:p>
-          <a:p>
-            <a:pPr indent="0" lvl="0" marL="0" rtl="0" algn="ctr">
-              <a:spcBef>
-                <a:spcPts val="0"/>
-              </a:spcBef>
-              <a:spcAft>
-                <a:spcPts val="0"/>
-              </a:spcAft>
-              <a:buNone/>
-            </a:pPr>
-            <a:r>
-              <a:rPr lang="en" sz="1800"/>
-              <a:t>Pacman1 → Pacman2: from an enum to state classes</a:t>
-            </a:r>
-            <a:endParaRPr sz="1800"/>
-          </a:p>
-        </p:txBody>
-      </p:sp>
-    </p:spTree>
-  </p:cSld>
-  <p:clrMapOvr>
-    <a:masterClrMapping/>
-  </p:clrMapOvr>
-</p:sld>
-</file>
-
-<file path=ppt/slides/slide19.xml><?xml version="1.0" encoding="utf-8"?>
-<p:sld xmlns:a="http://schemas.openxmlformats.org/drawingml/2006/main" xmlns:p="http://schemas.openxmlformats.org/presentationml/2006/main" xmlns:r="http://schemas.openxmlformats.org/officeDocument/2006/relationships">
-  <p:cSld>
-    <p:spTree>
-      <p:nvGrpSpPr>
-        <p:cNvPr id="1" name=""/>
-        <p:cNvGrpSpPr/>
-        <p:nvPr/>
-      </p:nvGrpSpPr>
-      <p:grpSpPr/>
-      <p:sp>
-        <p:nvSpPr>
-          <p:cNvPr id="2" name="Title 1"/>
-          <p:cNvSpPr>
-            <a:spLocks noGrp="1"/>
-          </p:cNvSpPr>
-          <p:nvPr>
-            <p:ph type="title"/>
-          </p:nvPr>
-        </p:nvSpPr>
-        <p:spPr/>
-        <p:txBody>
-          <a:bodyPr/>
-          <a:lstStyle/>
-          <a:p>
-            <a:pPr indent="0" lvl="0" marL="0" rtl="0" algn="l">
-              <a:spcBef>
-                <a:spcPts val="0"/>
-              </a:spcBef>
-              <a:spcAft>
-                <a:spcPts val="0"/>
-              </a:spcAft>
-              <a:buNone/>
-            </a:pPr>
-            <a:r>
-              <a:rPr lang="en"/>
-              <a:t>Try It: The Same Change, With States</a:t>
-            </a:r>
-            <a:endParaRPr/>
-          </a:p>
-        </p:txBody>
-      </p:sp>
-      <p:sp>
-        <p:nvSpPr>
-          <p:cNvPr id="3" name="Text Placeholder 2"/>
-          <p:cNvSpPr>
-            <a:spLocks noGrp="1"/>
-          </p:cNvSpPr>
-          <p:nvPr>
-            <p:ph type="body" idx="1"/>
-          </p:nvPr>
-        </p:nvSpPr>
-        <p:spPr>
-          <a:xfrm>
-            <a:off x="311700" y="885950"/>
-            <a:ext cx="8520600" cy="1673352"/>
-          </a:xfrm>
-        </p:spPr>
-        <p:txBody>
-          <a:bodyPr/>
-          <a:lstStyle/>
-          <a:p>
-            <a:pPr indent="-330200" lvl="0" marL="457200" rtl="0" algn="l">
-              <a:spcBef>
-                <a:spcPts val="0"/>
-              </a:spcBef>
-              <a:spcAft>
-                <a:spcPts val="0"/>
-              </a:spcAft>
-              <a:buSzPts val="1600"/>
-              <a:buChar char="●"/>
-            </a:pPr>
-            <a:r>
-              <a:rPr lang="en"/>
-              <a:t>In Pacman2:</a:t>
-            </a:r>
-            <a:endParaRPr/>
-          </a:p>
-          <a:p>
-            <a:pPr indent="-330200" lvl="0" marL="457200" rtl="0" algn="l">
-              <a:spcBef>
-                <a:spcPts val="0"/>
-              </a:spcBef>
-              <a:spcAft>
-                <a:spcPts val="0"/>
-              </a:spcAft>
-              <a:buSzPts val="1600"/>
-              <a:buChar char="●"/>
-            </a:pPr>
-            <a:r>
-              <a:rPr lang="en"/>
-              <a:t>Make frightened ghosts last 3 seconds instead of 6</a:t>
-            </a:r>
-            <a:endParaRPr/>
-          </a:p>
-          <a:p>
-            <a:pPr indent="-330200" lvl="0" marL="457200" rtl="0" algn="l">
-              <a:spcBef>
-                <a:spcPts val="0"/>
-              </a:spcBef>
-              <a:spcAft>
-                <a:spcPts val="0"/>
-              </a:spcAft>
-              <a:buSzPts val="1600"/>
-              <a:buChar char="●"/>
-            </a:pPr>
-            <a:r>
-              <a:rPr lang="en"/>
-              <a:t>How many files did it take?</a:t>
-            </a:r>
-            <a:endParaRPr/>
-          </a:p>
-          <a:p>
-            <a:pPr indent="-330200" lvl="0" marL="457200" rtl="0" algn="l">
-              <a:spcBef>
-                <a:spcPts val="0"/>
-              </a:spcBef>
-              <a:spcAft>
-                <a:spcPts val="0"/>
-              </a:spcAft>
-              <a:buSzPts val="1600"/>
-              <a:buChar char="●"/>
-            </a:pPr>
-            <a:r>
-              <a:rPr lang="en"/>
-              <a:t>Where would a FrozenState go, and what would change?</a:t>
-            </a:r>
-            <a:endParaRPr/>
           </a:p>
         </p:txBody>
       </p:sp>
@@ -11894,6 +11776,272 @@
 </file>
 
 <file path=ppt/slides/slide20.xml><?xml version="1.0" encoding="utf-8"?>
+<p:sld xmlns:a="http://schemas.openxmlformats.org/drawingml/2006/main" xmlns:p="http://schemas.openxmlformats.org/presentationml/2006/main" xmlns:r="http://schemas.openxmlformats.org/officeDocument/2006/relationships">
+  <p:cSld>
+    <p:spTree>
+      <p:nvGrpSpPr>
+        <p:cNvPr id="1" name=""/>
+        <p:cNvGrpSpPr/>
+        <p:nvPr/>
+      </p:nvGrpSpPr>
+      <p:grpSpPr/>
+      <p:sp>
+        <p:nvSpPr>
+          <p:cNvPr id="128" name="Google Shape;128;p21"/>
+          <p:cNvSpPr txBox="1"/>
+          <p:nvPr>
+            <p:ph type="title"/>
+          </p:nvPr>
+        </p:nvSpPr>
+        <p:spPr>
+          <a:xfrm>
+            <a:off x="311700" y="195615"/>
+            <a:ext cx="8520600" cy="572700"/>
+          </a:xfrm>
+          <a:prstGeom prst="rect">
+            <a:avLst/>
+          </a:prstGeom>
+        </p:spPr>
+        <p:txBody>
+          <a:bodyPr anchorCtr="0" anchor="t" bIns="91425" lIns="91425" spcFirstLastPara="1" rIns="91425" wrap="square" tIns="91425">
+            <a:normAutofit fontScale="90000"/>
+          </a:bodyPr>
+          <a:lstStyle/>
+          <a:p>
+            <a:pPr indent="0" lvl="0" marL="0" rtl="0" algn="l">
+              <a:spcBef>
+                <a:spcPts val="0"/>
+              </a:spcBef>
+              <a:spcAft>
+                <a:spcPts val="0"/>
+              </a:spcAft>
+              <a:buNone/>
+            </a:pPr>
+            <a:r>
+              <a:rPr lang="en">
+                <a:solidFill>
+                  <a:schemeClr val="accent5"/>
+                </a:solidFill>
+              </a:rPr>
+              <a:t>State Implementation</a:t>
+            </a:r>
+            <a:endParaRPr>
+              <a:solidFill>
+                <a:schemeClr val="accent5"/>
+              </a:solidFill>
+            </a:endParaRPr>
+          </a:p>
+        </p:txBody>
+      </p:sp>
+      <p:sp>
+        <p:nvSpPr>
+          <p:cNvPr id="129" name="Google Shape;129;p21"/>
+          <p:cNvSpPr txBox="1"/>
+          <p:nvPr>
+            <p:ph idx="1" type="body"/>
+          </p:nvPr>
+        </p:nvSpPr>
+        <p:spPr>
+          <a:xfrm>
+            <a:off x="311700" y="885950"/>
+            <a:ext cx="8520600" cy="4023300"/>
+          </a:xfrm>
+          <a:prstGeom prst="rect">
+            <a:avLst/>
+          </a:prstGeom>
+        </p:spPr>
+        <p:txBody>
+          <a:bodyPr anchorCtr="0" anchor="ctr" bIns="91425" lIns="91425" spcFirstLastPara="1" rIns="91425" wrap="square" tIns="91425">
+            <a:normAutofit/>
+          </a:bodyPr>
+          <a:lstStyle/>
+          <a:p>
+            <a:pPr indent="0" lvl="0" marL="0" rtl="0" algn="ctr">
+              <a:spcBef>
+                <a:spcPts val="0"/>
+              </a:spcBef>
+              <a:spcAft>
+                <a:spcPts val="1200"/>
+              </a:spcAft>
+              <a:buNone/>
+            </a:pPr>
+            <a:r>
+              <a:rPr lang="en" sz="2900">
+                <a:latin typeface="VT323"/>
+                <a:ea typeface="VT323"/>
+                <a:cs typeface="VT323"/>
+                <a:sym typeface="VT323"/>
+              </a:rPr>
+              <a:t>DEMO!</a:t>
+            </a:r>
+            <a:endParaRPr/>
+          </a:p>
+          <a:p>
+            <a:pPr indent="0" lvl="0" marL="0" rtl="0" algn="ctr">
+              <a:spcBef>
+                <a:spcPts val="0"/>
+              </a:spcBef>
+              <a:spcAft>
+                <a:spcPts val="0"/>
+              </a:spcAft>
+              <a:buNone/>
+            </a:pPr>
+            <a:r>
+              <a:rPr lang="en" sz="1800"/>
+              <a:t>Pacman1 → Pacman2: from an enum to state classes</a:t>
+            </a:r>
+            <a:endParaRPr sz="1800"/>
+          </a:p>
+        </p:txBody>
+      </p:sp>
+    </p:spTree>
+  </p:cSld>
+  <p:clrMapOvr>
+    <a:masterClrMapping/>
+  </p:clrMapOvr>
+</p:sld>
+</file>
+
+<file path=ppt/slides/slide21.xml><?xml version="1.0" encoding="utf-8"?>
+<p:sld xmlns:a="http://schemas.openxmlformats.org/drawingml/2006/main" xmlns:p="http://schemas.openxmlformats.org/presentationml/2006/main" xmlns:r="http://schemas.openxmlformats.org/officeDocument/2006/relationships">
+  <p:cSld>
+    <p:spTree>
+      <p:nvGrpSpPr>
+        <p:cNvPr id="1" name=""/>
+        <p:cNvGrpSpPr/>
+        <p:nvPr/>
+      </p:nvGrpSpPr>
+      <p:grpSpPr/>
+      <p:sp>
+        <p:nvSpPr>
+          <p:cNvPr id="2" name="Title 1"/>
+          <p:cNvSpPr>
+            <a:spLocks noGrp="1"/>
+          </p:cNvSpPr>
+          <p:nvPr>
+            <p:ph type="title"/>
+          </p:nvPr>
+        </p:nvSpPr>
+        <p:spPr/>
+        <p:txBody>
+          <a:bodyPr/>
+          <a:lstStyle/>
+          <a:p>
+            <a:pPr indent="0" lvl="0" marL="0" rtl="0" algn="l">
+              <a:spcBef>
+                <a:spcPts val="0"/>
+              </a:spcBef>
+              <a:spcAft>
+                <a:spcPts val="0"/>
+              </a:spcAft>
+              <a:buNone/>
+            </a:pPr>
+            <a:r>
+              <a:rPr lang="en"/>
+              <a:t>Try It: The Same Change, With States</a:t>
+            </a:r>
+            <a:endParaRPr/>
+          </a:p>
+        </p:txBody>
+      </p:sp>
+      <p:sp>
+        <p:nvSpPr>
+          <p:cNvPr id="3" name="Text Placeholder 2"/>
+          <p:cNvSpPr>
+            <a:spLocks noGrp="1"/>
+          </p:cNvSpPr>
+          <p:nvPr>
+            <p:ph type="body" idx="1"/>
+          </p:nvPr>
+        </p:nvSpPr>
+        <p:spPr>
+          <a:xfrm>
+            <a:off x="311700" y="885950"/>
+            <a:ext cx="8520600" cy="1673352"/>
+          </a:xfrm>
+        </p:spPr>
+        <p:txBody>
+          <a:bodyPr/>
+          <a:lstStyle/>
+          <a:p>
+            <a:pPr indent="-330200" lvl="0" marL="457200" rtl="0" algn="l">
+              <a:spcBef>
+                <a:spcPts val="0"/>
+              </a:spcBef>
+              <a:spcAft>
+                <a:spcPts val="0"/>
+              </a:spcAft>
+              <a:buSzPts val="1600"/>
+              <a:buChar char="●"/>
+            </a:pPr>
+            <a:r>
+              <a:rPr lang="en"/>
+              <a:t>In Pacman2:</a:t>
+            </a:r>
+            <a:endParaRPr/>
+          </a:p>
+          <a:p>
+            <a:pPr indent="-330200" lvl="0" marL="457200" rtl="0" algn="l">
+              <a:spcBef>
+                <a:spcPts val="0"/>
+              </a:spcBef>
+              <a:spcAft>
+                <a:spcPts val="0"/>
+              </a:spcAft>
+              <a:buSzPts val="1600"/>
+              <a:buChar char="●"/>
+            </a:pPr>
+            <a:r>
+              <a:rPr lang="en"/>
+              <a:t>Make frightened ghosts last 3 seconds instead of 6</a:t>
+            </a:r>
+            <a:endParaRPr/>
+          </a:p>
+          <a:p>
+            <a:pPr indent="-330200" lvl="0" marL="457200" rtl="0" algn="l">
+              <a:spcBef>
+                <a:spcPts val="0"/>
+              </a:spcBef>
+              <a:spcAft>
+                <a:spcPts val="0"/>
+              </a:spcAft>
+              <a:buSzPts val="1600"/>
+              <a:buChar char="●"/>
+            </a:pPr>
+            <a:r>
+              <a:rPr lang="en"/>
+              <a:t>How many files did it take?</a:t>
+            </a:r>
+            <a:endParaRPr/>
+          </a:p>
+          <a:p>
+            <a:pPr indent="-330200" lvl="0" marL="457200" rtl="0" algn="l">
+              <a:spcBef>
+                <a:spcPts val="0"/>
+              </a:spcBef>
+              <a:spcAft>
+                <a:spcPts val="0"/>
+              </a:spcAft>
+              <a:buSzPts val="1600"/>
+              <a:buChar char="●"/>
+            </a:pPr>
+            <a:r>
+              <a:rPr lang="en"/>
+              <a:t>Where would a FrozenState go, and what would change?</a:t>
+            </a:r>
+            <a:endParaRPr/>
+          </a:p>
+        </p:txBody>
+      </p:sp>
+    </p:spTree>
+  </p:cSld>
+  <p:clrMapOvr>
+    <a:masterClrMapping/>
+  </p:clrMapOvr>
+</p:sld>
+</file>
+
+<file path=ppt/slides/slide22.xml><?xml version="1.0" encoding="utf-8"?>
 <p:sld xmlns:a="http://schemas.openxmlformats.org/drawingml/2006/main" xmlns:p="http://schemas.openxmlformats.org/presentationml/2006/main" xmlns:r="http://schemas.openxmlformats.org/officeDocument/2006/relationships">
   <p:cSld>
     <p:spTree>
@@ -12024,7 +12172,7 @@
 </p:sld>
 </file>
 
-<file path=ppt/slides/slide21.xml><?xml version="1.0" encoding="utf-8"?>
+<file path=ppt/slides/slide23.xml><?xml version="1.0" encoding="utf-8"?>
 <p:sld xmlns:a="http://schemas.openxmlformats.org/drawingml/2006/main" xmlns:p="http://schemas.openxmlformats.org/presentationml/2006/main" xmlns:r="http://schemas.openxmlformats.org/officeDocument/2006/relationships">
   <p:cSld>
     <p:spTree>
@@ -12934,7 +13082,7 @@
 </p:sld>
 </file>
 
-<file path=ppt/slides/slide22.xml><?xml version="1.0" encoding="utf-8"?>
+<file path=ppt/slides/slide24.xml><?xml version="1.0" encoding="utf-8"?>
 <p:sld xmlns:a="http://schemas.openxmlformats.org/drawingml/2006/main" xmlns:p="http://schemas.openxmlformats.org/presentationml/2006/main" xmlns:r="http://schemas.openxmlformats.org/officeDocument/2006/relationships">
   <p:cSld>
     <p:spTree>
@@ -13061,7 +13209,7 @@
 </p:sld>
 </file>
 
-<file path=ppt/slides/slide23.xml><?xml version="1.0" encoding="utf-8"?>
+<file path=ppt/slides/slide25.xml><?xml version="1.0" encoding="utf-8"?>
 <p:sld xmlns:a="http://schemas.openxmlformats.org/drawingml/2006/main" xmlns:p="http://schemas.openxmlformats.org/presentationml/2006/main" xmlns:r="http://schemas.openxmlformats.org/officeDocument/2006/relationships">
   <p:cSld>
     <p:spTree>
@@ -13183,7 +13331,7 @@
 </p:sld>
 </file>
 
-<file path=ppt/slides/slide24.xml><?xml version="1.0" encoding="utf-8"?>
+<file path=ppt/slides/slide26.xml><?xml version="1.0" encoding="utf-8"?>
 <p:sld xmlns:a="http://schemas.openxmlformats.org/drawingml/2006/main" xmlns:p="http://schemas.openxmlformats.org/presentationml/2006/main" xmlns:r="http://schemas.openxmlformats.org/officeDocument/2006/relationships">
   <p:cSld>
     <p:spTree>
@@ -13500,7 +13648,7 @@
 </p:sld>
 </file>
 
-<file path=ppt/slides/slide25.xml><?xml version="1.0" encoding="utf-8"?>
+<file path=ppt/slides/slide27.xml><?xml version="1.0" encoding="utf-8"?>
 <p:sld xmlns:a="http://schemas.openxmlformats.org/drawingml/2006/main" xmlns:p="http://schemas.openxmlformats.org/presentationml/2006/main" xmlns:r="http://schemas.openxmlformats.org/officeDocument/2006/relationships">
   <p:cSld>
     <p:spTree>
@@ -17036,7 +17184,7 @@
 </p:sld>
 </file>
 
-<file path=ppt/slides/slide26.xml><?xml version="1.0" encoding="utf-8"?>
+<file path=ppt/slides/slide28.xml><?xml version="1.0" encoding="utf-8"?>
 <p:sld xmlns:a="http://schemas.openxmlformats.org/drawingml/2006/main" xmlns:p="http://schemas.openxmlformats.org/presentationml/2006/main" xmlns:r="http://schemas.openxmlformats.org/officeDocument/2006/relationships">
   <p:cSld>
     <p:spTree>
@@ -17312,7 +17460,7 @@
 </p:sld>
 </file>
 
-<file path=ppt/slides/slide27.xml><?xml version="1.0" encoding="utf-8"?>
+<file path=ppt/slides/slide29.xml><?xml version="1.0" encoding="utf-8"?>
 <p:sld xmlns:a="http://schemas.openxmlformats.org/drawingml/2006/main" xmlns:p="http://schemas.openxmlformats.org/presentationml/2006/main" xmlns:r="http://schemas.openxmlformats.org/officeDocument/2006/relationships">
   <p:cSld>
     <p:spTree>
@@ -17411,872 +17559,6 @@
               <a:t>Pacman4: routing strategies, and the shortest path for the eyes</a:t>
             </a:r>
             <a:endParaRPr sz="1800"/>
-          </a:p>
-        </p:txBody>
-      </p:sp>
-    </p:spTree>
-  </p:cSld>
-  <p:clrMapOvr>
-    <a:masterClrMapping/>
-  </p:clrMapOvr>
-</p:sld>
-</file>
-
-<file path=ppt/slides/slide28.xml><?xml version="1.0" encoding="utf-8"?>
-<p:sld xmlns:a="http://schemas.openxmlformats.org/drawingml/2006/main" xmlns:p="http://schemas.openxmlformats.org/presentationml/2006/main" xmlns:r="http://schemas.openxmlformats.org/officeDocument/2006/relationships">
-  <p:cSld>
-    <p:spTree>
-      <p:nvGrpSpPr>
-        <p:cNvPr id="1" name=""/>
-        <p:cNvGrpSpPr/>
-        <p:nvPr/>
-      </p:nvGrpSpPr>
-      <p:grpSpPr/>
-      <p:sp>
-        <p:nvSpPr>
-          <p:cNvPr id="2" name="Title 1"/>
-          <p:cNvSpPr>
-            <a:spLocks noGrp="1"/>
-          </p:cNvSpPr>
-          <p:nvPr>
-            <p:ph type="title"/>
-          </p:nvPr>
-        </p:nvSpPr>
-        <p:spPr/>
-        <p:txBody>
-          <a:bodyPr/>
-          <a:lstStyle/>
-          <a:p>
-            <a:pPr indent="0" lvl="0" marL="0" rtl="0" algn="l">
-              <a:spcBef>
-                <a:spcPts val="0"/>
-              </a:spcBef>
-              <a:spcAft>
-                <a:spcPts val="0"/>
-              </a:spcAft>
-              <a:buNone/>
-            </a:pPr>
-            <a:r>
-              <a:rPr lang="en"/>
-              <a:t>Try It: The Shortest Path</a:t>
-            </a:r>
-            <a:endParaRPr/>
-          </a:p>
-        </p:txBody>
-      </p:sp>
-      <p:sp>
-        <p:nvSpPr>
-          <p:cNvPr id="3" name="Text Placeholder 2"/>
-          <p:cNvSpPr>
-            <a:spLocks noGrp="1"/>
-          </p:cNvSpPr>
-          <p:nvPr>
-            <p:ph type="body" idx="1"/>
-          </p:nvPr>
-        </p:nvSpPr>
-        <p:spPr>
-          <a:xfrm>
-            <a:off x="311700" y="885950"/>
-            <a:ext cx="8520600" cy="1289304"/>
-          </a:xfrm>
-        </p:spPr>
-        <p:txBody>
-          <a:bodyPr/>
-          <a:lstStyle/>
-          <a:p>
-            <a:pPr indent="-330200" lvl="0" marL="457200" rtl="0" algn="l">
-              <a:spcBef>
-                <a:spcPts val="0"/>
-              </a:spcBef>
-              <a:spcAft>
-                <a:spcPts val="0"/>
-              </a:spcAft>
-              <a:buSzPts val="1600"/>
-              <a:buChar char="●"/>
-            </a:pPr>
-            <a:r>
-              <a:rPr lang="en"/>
-              <a:t>In Pacman4’s World:</a:t>
-            </a:r>
-            <a:endParaRPr/>
-          </a:p>
-          <a:p>
-            <a:pPr indent="-330200" lvl="0" marL="457200" rtl="0" algn="l">
-              <a:spcBef>
-                <a:spcPts val="0"/>
-              </a:spcBef>
-              <a:spcAft>
-                <a:spcPts val="0"/>
-              </a:spcAft>
-              <a:buSzPts val="1600"/>
-              <a:buChar char="●"/>
-            </a:pPr>
-            <a:r>
-              <a:rPr lang="en"/>
-              <a:t>Give Blinky new ShortestPath()</a:t>
-            </a:r>
-            <a:endParaRPr/>
-          </a:p>
-          <a:p>
-            <a:pPr indent="-330200" lvl="0" marL="457200" rtl="0" algn="l">
-              <a:spcBef>
-                <a:spcPts val="0"/>
-              </a:spcBef>
-              <a:spcAft>
-                <a:spcPts val="0"/>
-              </a:spcAft>
-              <a:buSzPts val="1600"/>
-              <a:buChar char="●"/>
-            </a:pPr>
-            <a:r>
-              <a:rPr lang="en"/>
-              <a:t>Then give it to all four: what happens to the game?</a:t>
-            </a:r>
-            <a:endParaRPr/>
-          </a:p>
-        </p:txBody>
-      </p:sp>
-    </p:spTree>
-  </p:cSld>
-  <p:clrMapOvr>
-    <a:masterClrMapping/>
-  </p:clrMapOvr>
-</p:sld>
-</file>
-
-<file path=ppt/slides/slide29.xml><?xml version="1.0" encoding="utf-8"?>
-<p:sld xmlns:a="http://schemas.openxmlformats.org/drawingml/2006/main" xmlns:p="http://schemas.openxmlformats.org/presentationml/2006/main" xmlns:r="http://schemas.openxmlformats.org/officeDocument/2006/relationships">
-  <p:cSld>
-    <p:spTree>
-      <p:nvGrpSpPr>
-        <p:cNvPr id="1" name=""/>
-        <p:cNvGrpSpPr/>
-        <p:nvPr/>
-      </p:nvGrpSpPr>
-      <p:grpSpPr/>
-      <p:sp>
-        <p:nvSpPr>
-          <p:cNvPr id="140" name="Google Shape;140;p23"/>
-          <p:cNvSpPr txBox="1"/>
-          <p:nvPr>
-            <p:ph type="title"/>
-          </p:nvPr>
-        </p:nvSpPr>
-        <p:spPr>
-          <a:xfrm>
-            <a:off x="311700" y="195615"/>
-            <a:ext cx="8520600" cy="572700"/>
-          </a:xfrm>
-          <a:prstGeom prst="rect">
-            <a:avLst/>
-          </a:prstGeom>
-        </p:spPr>
-        <p:txBody>
-          <a:bodyPr anchorCtr="0" anchor="t" bIns="91425" lIns="91425" spcFirstLastPara="1" rIns="91425" wrap="square" tIns="91425">
-            <a:normAutofit fontScale="90000"/>
-          </a:bodyPr>
-          <a:lstStyle/>
-          <a:p>
-            <a:pPr indent="0" lvl="0" marL="0" rtl="0" algn="l">
-              <a:spcBef>
-                <a:spcPts val="0"/>
-              </a:spcBef>
-              <a:spcAft>
-                <a:spcPts val="0"/>
-              </a:spcAft>
-              <a:buNone/>
-            </a:pPr>
-            <a:r>
-              <a:rPr lang="en"/>
-              <a:t>Testing the Ghosts</a:t>
-            </a:r>
-            <a:endParaRPr/>
-          </a:p>
-        </p:txBody>
-      </p:sp>
-      <p:sp>
-        <p:nvSpPr>
-          <p:cNvPr id="293" name="Google Shape;293;p45"/>
-          <p:cNvSpPr txBox="1"/>
-          <p:nvPr>
-            <p:ph type="title"/>
-          </p:nvPr>
-        </p:nvSpPr>
-        <p:spPr>
-          <a:xfrm>
-            <a:off x="311700" y="1152475"/>
-            <a:ext cx="3700000" cy="3500000"/>
-          </a:xfrm>
-          <a:prstGeom prst="rect">
-            <a:avLst/>
-          </a:prstGeom>
-        </p:spPr>
-        <p:txBody>
-          <a:bodyPr anchorCtr="0" anchor="t" bIns="91425" lIns="91425" spcFirstLastPara="1" rIns="91425" wrap="square" tIns="91425">
-            <a:normAutofit fontScale="90000"/>
-          </a:bodyPr>
-          <a:lstStyle/>
-          <a:p>
-            <a:pPr indent="-330200" lvl="0" marL="457200" rtl="0" algn="l">
-              <a:buClr>
-                <a:srgbClr val="DEE2E6"/>
-              </a:buClr>
-              <a:spcBef>
-                <a:spcPts val="0"/>
-              </a:spcBef>
-              <a:spcAft>
-                <a:spcPts val="0"/>
-              </a:spcAft>
-              <a:buSzPts val="1600"/>
-              <a:buChar char="●"/>
-            </a:pPr>
-            <a:r>
-              <a:rPr lang="en" sz="1600">
-                <a:solidFill>
-                  <a:srgbClr val="DEE2E6"/>
-                </a:solidFill>
-              </a:rPr>
-              <a:t>A strategy: one small class, one method</a:t>
-            </a:r>
-            <a:endParaRPr/>
-          </a:p>
-          <a:p>
-            <a:pPr indent="-317500" lvl="1" marL="914400" rtl="0" algn="l">
-              <a:buClr>
-                <a:srgbClr val="6C757D"/>
-              </a:buClr>
-              <a:spcBef>
-                <a:spcPts val="0"/>
-              </a:spcBef>
-              <a:spcAft>
-                <a:spcPts val="0"/>
-              </a:spcAft>
-              <a:buSzPts val="1400"/>
-              <a:buChar char="○"/>
-            </a:pPr>
-            <a:r>
-              <a:rPr lang="en" sz="1400">
-                <a:solidFill>
-                  <a:srgbClr val="6C757D"/>
-                </a:solidFill>
-              </a:rPr>
-              <a:t>Put Pac-Man somewhere, check the target</a:t>
-            </a:r>
-            <a:endParaRPr/>
-          </a:p>
-          <a:p>
-            <a:pPr indent="-330200" lvl="0" marL="457200" rtl="0" algn="l">
-              <a:buClr>
-                <a:srgbClr val="DEE2E6"/>
-              </a:buClr>
-              <a:spcBef>
-                <a:spcPts val="0"/>
-              </a:spcBef>
-              <a:spcAft>
-                <a:spcPts val="0"/>
-              </a:spcAft>
-              <a:buSzPts val="1600"/>
-              <a:buChar char="●"/>
-            </a:pPr>
-            <a:r>
-              <a:rPr lang="en" sz="1600">
-                <a:solidFill>
-                  <a:srgbClr val="DEE2E6"/>
-                </a:solidFill>
-              </a:rPr>
-              <a:t>Inky’s target is invisible when playing</a:t>
-            </a:r>
-            <a:endParaRPr/>
-          </a:p>
-          <a:p>
-            <a:pPr indent="-317500" lvl="1" marL="914400" rtl="0" algn="l">
-              <a:buClr>
-                <a:srgbClr val="6C757D"/>
-              </a:buClr>
-              <a:spcBef>
-                <a:spcPts val="0"/>
-              </a:spcBef>
-              <a:spcAft>
-                <a:spcPts val="0"/>
-              </a:spcAft>
-              <a:buSzPts val="1400"/>
-              <a:buChar char="○"/>
-            </a:pPr>
-            <a:r>
-              <a:rPr lang="en" sz="1400">
-                <a:solidFill>
-                  <a:srgbClr val="6C757D"/>
-                </a:solidFill>
-              </a:rPr>
-              <a:t>The test checks it with numbers you can work out on paper</a:t>
-            </a:r>
-            <a:endParaRPr/>
-          </a:p>
-          <a:p>
-            <a:pPr indent="-330200" lvl="0" marL="457200" rtl="0" algn="l">
-              <a:buClr>
-                <a:srgbClr val="DEE2E6"/>
-              </a:buClr>
-              <a:spcBef>
-                <a:spcPts val="0"/>
-              </a:spcBef>
-              <a:spcAft>
-                <a:spcPts val="0"/>
-              </a:spcAft>
-              <a:buSzPts val="1600"/>
-              <a:buChar char="●"/>
-            </a:pPr>
-            <a:r>
-              <a:rPr lang="en" sz="1600">
-                <a:solidFill>
-                  <a:srgbClr val="DEE2E6"/>
-                </a:solidFill>
-              </a:rPr>
-              <a:t>The states: put a ghost in a state, make something happen, check the state after</a:t>
-            </a:r>
-            <a:endParaRPr/>
-          </a:p>
-          <a:p>
-            <a:pPr indent="-330200" lvl="0" marL="457200" rtl="0" algn="l">
-              <a:buClr>
-                <a:srgbClr val="DEE2E6"/>
-              </a:buClr>
-              <a:spcBef>
-                <a:spcPts val="0"/>
-              </a:spcBef>
-              <a:spcAft>
-                <a:spcPts val="0"/>
-              </a:spcAft>
-              <a:buSzPts val="1600"/>
-              <a:buChar char="●"/>
-            </a:pPr>
-            <a:r>
-              <a:rPr lang="en" sz="1600">
-                <a:solidFill>
-                  <a:srgbClr val="DEE2E6"/>
-                </a:solidFill>
-              </a:rPr>
-              <a:t>A small test maze, and a seeded Random</a:t>
-            </a:r>
-            <a:endParaRPr/>
-          </a:p>
-        </p:txBody>
-      </p:sp>
-      <p:sp>
-        <p:nvSpPr>
-          <p:cNvPr id="141" name="Google Shape;141;p23"/>
-          <p:cNvSpPr txBox="1"/>
-          <p:nvPr>
-            <p:ph idx="2" type="body"/>
-          </p:nvPr>
-        </p:nvSpPr>
-        <p:spPr>
-          <a:xfrm>
-            <a:off x="4150000" y="1152475"/>
-            <a:ext cx="4750000" cy="3600000"/>
-          </a:xfrm>
-          <a:prstGeom prst="rect">
-            <a:avLst/>
-          </a:prstGeom>
-        </p:spPr>
-        <p:txBody>
-          <a:bodyPr anchorCtr="0" anchor="t" bIns="91425" lIns="91425" spcFirstLastPara="1" rIns="91425" wrap="square" tIns="91425">
-            <a:noAutofit/>
-          </a:bodyPr>
-          <a:lstStyle/>
-          <a:p>
-            <a:pPr indent="0" lvl="0" marL="0" rtl="0" algn="l">
-              <a:lnSpc>
-                <a:spcPct val="115000"/>
-              </a:lnSpc>
-              <a:spcBef>
-                <a:spcPts val="0"/>
-              </a:spcBef>
-              <a:spcAft>
-                <a:spcPts val="0"/>
-              </a:spcAft>
-              <a:buNone/>
-            </a:pPr>
-            <a:r>
-              <a:rPr lang="en" sz="1000">
-                <a:highlight>
-                  <a:schemeClr val="dk2"/>
-                </a:highlight>
-                <a:latin typeface="Consolas"/>
-                <a:ea typeface="Consolas"/>
-                <a:cs typeface="Consolas"/>
-                <a:sym typeface="Consolas"/>
-              </a:rPr>
-              <a:t>[Fact]</a:t>
-            </a:r>
-            <a:endParaRPr sz="1000">
-              <a:solidFill>
-                <a:srgbClr val="CCCCCC"/>
-              </a:solidFill>
-              <a:highlight>
-                <a:schemeClr val="dk2"/>
-              </a:highlight>
-              <a:latin typeface="Consolas"/>
-              <a:ea typeface="Consolas"/>
-              <a:cs typeface="Consolas"/>
-              <a:sym typeface="Consolas"/>
-            </a:endParaRPr>
-          </a:p>
-          <a:p>
-            <a:pPr indent="0" lvl="0" marL="0" rtl="0" algn="l">
-              <a:lnSpc>
-                <a:spcPct val="115000"/>
-              </a:lnSpc>
-              <a:spcBef>
-                <a:spcPts val="0"/>
-              </a:spcBef>
-              <a:spcAft>
-                <a:spcPts val="0"/>
-              </a:spcAft>
-              <a:buNone/>
-            </a:pPr>
-            <a:r>
-              <a:rPr lang="en" sz="1000">
-                <a:highlight>
-                  <a:schemeClr val="dk2"/>
-                </a:highlight>
-                <a:latin typeface="Consolas"/>
-                <a:ea typeface="Consolas"/>
-                <a:cs typeface="Consolas"/>
-                <a:sym typeface="Consolas"/>
-              </a:rPr>
-              <a:t>public void Inky_doubles_the_line_from_Blinky()</a:t>
-            </a:r>
-            <a:endParaRPr sz="1000">
-              <a:solidFill>
-                <a:srgbClr val="CCCCCC"/>
-              </a:solidFill>
-              <a:highlight>
-                <a:schemeClr val="dk2"/>
-              </a:highlight>
-              <a:latin typeface="Consolas"/>
-              <a:ea typeface="Consolas"/>
-              <a:cs typeface="Consolas"/>
-              <a:sym typeface="Consolas"/>
-            </a:endParaRPr>
-          </a:p>
-          <a:p>
-            <a:pPr indent="0" lvl="0" marL="0" rtl="0" algn="l">
-              <a:lnSpc>
-                <a:spcPct val="115000"/>
-              </a:lnSpc>
-              <a:spcBef>
-                <a:spcPts val="0"/>
-              </a:spcBef>
-              <a:spcAft>
-                <a:spcPts val="0"/>
-              </a:spcAft>
-              <a:buNone/>
-            </a:pPr>
-            <a:r>
-              <a:rPr lang="en" sz="1000">
-                <a:highlight>
-                  <a:schemeClr val="dk2"/>
-                </a:highlight>
-                <a:latin typeface="Consolas"/>
-                <a:ea typeface="Consolas"/>
-                <a:cs typeface="Consolas"/>
-                <a:sym typeface="Consolas"/>
-              </a:rPr>
-              <a:t>{</a:t>
-            </a:r>
-            <a:endParaRPr sz="1000">
-              <a:solidFill>
-                <a:srgbClr val="CCCCCC"/>
-              </a:solidFill>
-              <a:highlight>
-                <a:schemeClr val="dk2"/>
-              </a:highlight>
-              <a:latin typeface="Consolas"/>
-              <a:ea typeface="Consolas"/>
-              <a:cs typeface="Consolas"/>
-              <a:sym typeface="Consolas"/>
-            </a:endParaRPr>
-          </a:p>
-          <a:p>
-            <a:pPr indent="0" lvl="0" marL="0" rtl="0" algn="l">
-              <a:lnSpc>
-                <a:spcPct val="115000"/>
-              </a:lnSpc>
-              <a:spcBef>
-                <a:spcPts val="0"/>
-              </a:spcBef>
-              <a:spcAft>
-                <a:spcPts val="0"/>
-              </a:spcAft>
-              <a:buNone/>
-            </a:pPr>
-            <a:r>
-              <a:rPr lang="en" sz="1000">
-                <a:highlight>
-                  <a:schemeClr val="dk2"/>
-                </a:highlight>
-                <a:latin typeface="Consolas"/>
-                <a:ea typeface="Consolas"/>
-                <a:cs typeface="Consolas"/>
-                <a:sym typeface="Consolas"/>
-              </a:rPr>
-              <a:t>    _world.PacMan.Place(</a:t>
-            </a:r>
-            <a:endParaRPr sz="1000">
-              <a:solidFill>
-                <a:srgbClr val="CCCCCC"/>
-              </a:solidFill>
-              <a:highlight>
-                <a:schemeClr val="dk2"/>
-              </a:highlight>
-              <a:latin typeface="Consolas"/>
-              <a:ea typeface="Consolas"/>
-              <a:cs typeface="Consolas"/>
-              <a:sym typeface="Consolas"/>
-            </a:endParaRPr>
-          </a:p>
-          <a:p>
-            <a:pPr indent="0" lvl="0" marL="0" rtl="0" algn="l">
-              <a:lnSpc>
-                <a:spcPct val="115000"/>
-              </a:lnSpc>
-              <a:spcBef>
-                <a:spcPts val="0"/>
-              </a:spcBef>
-              <a:spcAft>
-                <a:spcPts val="0"/>
-              </a:spcAft>
-              <a:buNone/>
-            </a:pPr>
-            <a:r>
-              <a:rPr lang="en" sz="1000">
-                <a:highlight>
-                  <a:schemeClr val="dk2"/>
-                </a:highlight>
-                <a:latin typeface="Consolas"/>
-                <a:ea typeface="Consolas"/>
-                <a:cs typeface="Consolas"/>
-                <a:sym typeface="Consolas"/>
-              </a:rPr>
-              <a:t>        new Point(5, 1), Direction.Right);</a:t>
-            </a:r>
-            <a:endParaRPr sz="1000">
-              <a:solidFill>
-                <a:srgbClr val="CCCCCC"/>
-              </a:solidFill>
-              <a:highlight>
-                <a:schemeClr val="dk2"/>
-              </a:highlight>
-              <a:latin typeface="Consolas"/>
-              <a:ea typeface="Consolas"/>
-              <a:cs typeface="Consolas"/>
-              <a:sym typeface="Consolas"/>
-            </a:endParaRPr>
-          </a:p>
-          <a:p>
-            <a:pPr indent="0" lvl="0" marL="0" rtl="0" algn="l">
-              <a:lnSpc>
-                <a:spcPct val="115000"/>
-              </a:lnSpc>
-              <a:spcBef>
-                <a:spcPts val="0"/>
-              </a:spcBef>
-              <a:spcAft>
-                <a:spcPts val="0"/>
-              </a:spcAft>
-              <a:buNone/>
-            </a:pPr>
-            <a:r>
-              <a:rPr lang="en" sz="1000">
-                <a:highlight>
-                  <a:schemeClr val="dk2"/>
-                </a:highlight>
-                <a:latin typeface="Consolas"/>
-                <a:ea typeface="Consolas"/>
-                <a:cs typeface="Consolas"/>
-                <a:sym typeface="Consolas"/>
-              </a:rPr>
-              <a:t>    _world.Blinky.Place(</a:t>
-            </a:r>
-            <a:endParaRPr sz="1000">
-              <a:solidFill>
-                <a:srgbClr val="CCCCCC"/>
-              </a:solidFill>
-              <a:highlight>
-                <a:schemeClr val="dk2"/>
-              </a:highlight>
-              <a:latin typeface="Consolas"/>
-              <a:ea typeface="Consolas"/>
-              <a:cs typeface="Consolas"/>
-              <a:sym typeface="Consolas"/>
-            </a:endParaRPr>
-          </a:p>
-          <a:p>
-            <a:pPr indent="0" lvl="0" marL="0" rtl="0" algn="l">
-              <a:lnSpc>
-                <a:spcPct val="115000"/>
-              </a:lnSpc>
-              <a:spcBef>
-                <a:spcPts val="0"/>
-              </a:spcBef>
-              <a:spcAft>
-                <a:spcPts val="0"/>
-              </a:spcAft>
-              <a:buNone/>
-            </a:pPr>
-            <a:r>
-              <a:rPr lang="en" sz="1000">
-                <a:highlight>
-                  <a:schemeClr val="dk2"/>
-                </a:highlight>
-                <a:latin typeface="Consolas"/>
-                <a:ea typeface="Consolas"/>
-                <a:cs typeface="Consolas"/>
-                <a:sym typeface="Consolas"/>
-              </a:rPr>
-              <a:t>        new Point(3, 3), Direction.Left);</a:t>
-            </a:r>
-            <a:endParaRPr sz="1000">
-              <a:solidFill>
-                <a:srgbClr val="CCCCCC"/>
-              </a:solidFill>
-              <a:highlight>
-                <a:schemeClr val="dk2"/>
-              </a:highlight>
-              <a:latin typeface="Consolas"/>
-              <a:ea typeface="Consolas"/>
-              <a:cs typeface="Consolas"/>
-              <a:sym typeface="Consolas"/>
-            </a:endParaRPr>
-          </a:p>
-          <a:p>
-            <a:pPr indent="0" lvl="0" marL="0" rtl="0" algn="l">
-              <a:lnSpc>
-                <a:spcPct val="115000"/>
-              </a:lnSpc>
-              <a:spcBef>
-                <a:spcPts val="0"/>
-              </a:spcBef>
-              <a:spcAft>
-                <a:spcPts val="0"/>
-              </a:spcAft>
-              <a:buNone/>
-            </a:pPr>
-            <a:r>
-              <a:rPr lang="en" sz="1000">
-                <a:highlight>
-                  <a:schemeClr val="dk2"/>
-                </a:highlight>
-                <a:latin typeface="Consolas"/>
-                <a:ea typeface="Consolas"/>
-                <a:cs typeface="Consolas"/>
-                <a:sym typeface="Consolas"/>
-              </a:rPr>
-              <a:t/>
-            </a:r>
-            <a:endParaRPr sz="1000">
-              <a:solidFill>
-                <a:srgbClr val="CCCCCC"/>
-              </a:solidFill>
-              <a:highlight>
-                <a:schemeClr val="dk2"/>
-              </a:highlight>
-              <a:latin typeface="Consolas"/>
-              <a:ea typeface="Consolas"/>
-              <a:cs typeface="Consolas"/>
-              <a:sym typeface="Consolas"/>
-            </a:endParaRPr>
-          </a:p>
-          <a:p>
-            <a:pPr indent="0" lvl="0" marL="0" rtl="0" algn="l">
-              <a:lnSpc>
-                <a:spcPct val="115000"/>
-              </a:lnSpc>
-              <a:spcBef>
-                <a:spcPts val="0"/>
-              </a:spcBef>
-              <a:spcAft>
-                <a:spcPts val="0"/>
-              </a:spcAft>
-              <a:buNone/>
-            </a:pPr>
-            <a:r>
-              <a:rPr lang="en" sz="1000">
-                <a:highlight>
-                  <a:schemeClr val="dk2"/>
-                </a:highlight>
-                <a:latin typeface="Consolas"/>
-                <a:ea typeface="Consolas"/>
-                <a:cs typeface="Consolas"/>
-                <a:sym typeface="Consolas"/>
-              </a:rPr>
-              <a:t>    // Two ahead of Pac-Man: (7, 1).</a:t>
-            </a:r>
-            <a:endParaRPr sz="1000">
-              <a:solidFill>
-                <a:srgbClr val="CCCCCC"/>
-              </a:solidFill>
-              <a:highlight>
-                <a:schemeClr val="dk2"/>
-              </a:highlight>
-              <a:latin typeface="Consolas"/>
-              <a:ea typeface="Consolas"/>
-              <a:cs typeface="Consolas"/>
-              <a:sym typeface="Consolas"/>
-            </a:endParaRPr>
-          </a:p>
-          <a:p>
-            <a:pPr indent="0" lvl="0" marL="0" rtl="0" algn="l">
-              <a:lnSpc>
-                <a:spcPct val="115000"/>
-              </a:lnSpc>
-              <a:spcBef>
-                <a:spcPts val="0"/>
-              </a:spcBef>
-              <a:spcAft>
-                <a:spcPts val="0"/>
-              </a:spcAft>
-              <a:buNone/>
-            </a:pPr>
-            <a:r>
-              <a:rPr lang="en" sz="1000">
-                <a:highlight>
-                  <a:schemeClr val="dk2"/>
-                </a:highlight>
-                <a:latin typeface="Consolas"/>
-                <a:ea typeface="Consolas"/>
-                <a:cs typeface="Consolas"/>
-                <a:sym typeface="Consolas"/>
-              </a:rPr>
-              <a:t>    // From Blinky: (+4, -2), doubled.</a:t>
-            </a:r>
-            <a:endParaRPr sz="1000">
-              <a:solidFill>
-                <a:srgbClr val="CCCCCC"/>
-              </a:solidFill>
-              <a:highlight>
-                <a:schemeClr val="dk2"/>
-              </a:highlight>
-              <a:latin typeface="Consolas"/>
-              <a:ea typeface="Consolas"/>
-              <a:cs typeface="Consolas"/>
-              <a:sym typeface="Consolas"/>
-            </a:endParaRPr>
-          </a:p>
-          <a:p>
-            <a:pPr indent="0" lvl="0" marL="0" rtl="0" algn="l">
-              <a:lnSpc>
-                <a:spcPct val="115000"/>
-              </a:lnSpc>
-              <a:spcBef>
-                <a:spcPts val="0"/>
-              </a:spcBef>
-              <a:spcAft>
-                <a:spcPts val="0"/>
-              </a:spcAft>
-              <a:buNone/>
-            </a:pPr>
-            <a:r>
-              <a:rPr lang="en" sz="1000">
-                <a:highlight>
-                  <a:schemeClr val="dk2"/>
-                </a:highlight>
-                <a:latin typeface="Consolas"/>
-                <a:ea typeface="Consolas"/>
-                <a:cs typeface="Consolas"/>
-                <a:sym typeface="Consolas"/>
-              </a:rPr>
-              <a:t>    Assert.Equal(new Point(11, -1),</a:t>
-            </a:r>
-            <a:endParaRPr sz="1000">
-              <a:solidFill>
-                <a:srgbClr val="CCCCCC"/>
-              </a:solidFill>
-              <a:highlight>
-                <a:schemeClr val="dk2"/>
-              </a:highlight>
-              <a:latin typeface="Consolas"/>
-              <a:ea typeface="Consolas"/>
-              <a:cs typeface="Consolas"/>
-              <a:sym typeface="Consolas"/>
-            </a:endParaRPr>
-          </a:p>
-          <a:p>
-            <a:pPr indent="0" lvl="0" marL="0" rtl="0" algn="l">
-              <a:lnSpc>
-                <a:spcPct val="115000"/>
-              </a:lnSpc>
-              <a:spcBef>
-                <a:spcPts val="0"/>
-              </a:spcBef>
-              <a:spcAft>
-                <a:spcPts val="0"/>
-              </a:spcAft>
-              <a:buNone/>
-            </a:pPr>
-            <a:r>
-              <a:rPr lang="en" sz="1000">
-                <a:highlight>
-                  <a:schemeClr val="dk2"/>
-                </a:highlight>
-                <a:latin typeface="Consolas"/>
-                <a:ea typeface="Consolas"/>
-                <a:cs typeface="Consolas"/>
-                <a:sym typeface="Consolas"/>
-              </a:rPr>
-              <a:t>        TargetOf(_world.Inky));</a:t>
-            </a:r>
-            <a:endParaRPr sz="1000">
-              <a:solidFill>
-                <a:srgbClr val="CCCCCC"/>
-              </a:solidFill>
-              <a:highlight>
-                <a:schemeClr val="dk2"/>
-              </a:highlight>
-              <a:latin typeface="Consolas"/>
-              <a:ea typeface="Consolas"/>
-              <a:cs typeface="Consolas"/>
-              <a:sym typeface="Consolas"/>
-            </a:endParaRPr>
-          </a:p>
-          <a:p>
-            <a:pPr indent="0" lvl="0" marL="0" rtl="0" algn="l">
-              <a:lnSpc>
-                <a:spcPct val="115000"/>
-              </a:lnSpc>
-              <a:spcBef>
-                <a:spcPts val="0"/>
-              </a:spcBef>
-              <a:spcAft>
-                <a:spcPts val="0"/>
-              </a:spcAft>
-              <a:buNone/>
-            </a:pPr>
-            <a:r>
-              <a:rPr lang="en" sz="1000">
-                <a:highlight>
-                  <a:schemeClr val="dk2"/>
-                </a:highlight>
-                <a:latin typeface="Consolas"/>
-                <a:ea typeface="Consolas"/>
-                <a:cs typeface="Consolas"/>
-                <a:sym typeface="Consolas"/>
-              </a:rPr>
-              <a:t>}</a:t>
-            </a:r>
-            <a:endParaRPr sz="1000">
-              <a:solidFill>
-                <a:srgbClr val="CCCCCC"/>
-              </a:solidFill>
-              <a:highlight>
-                <a:schemeClr val="dk2"/>
-              </a:highlight>
-              <a:latin typeface="Consolas"/>
-              <a:ea typeface="Consolas"/>
-              <a:cs typeface="Consolas"/>
-              <a:sym typeface="Consolas"/>
-            </a:endParaRPr>
           </a:p>
         </p:txBody>
       </p:sp>
@@ -18389,6 +17671,872 @@
       <p:grpSpPr/>
       <p:sp>
         <p:nvSpPr>
+          <p:cNvPr id="2" name="Title 1"/>
+          <p:cNvSpPr>
+            <a:spLocks noGrp="1"/>
+          </p:cNvSpPr>
+          <p:nvPr>
+            <p:ph type="title"/>
+          </p:nvPr>
+        </p:nvSpPr>
+        <p:spPr/>
+        <p:txBody>
+          <a:bodyPr/>
+          <a:lstStyle/>
+          <a:p>
+            <a:pPr indent="0" lvl="0" marL="0" rtl="0" algn="l">
+              <a:spcBef>
+                <a:spcPts val="0"/>
+              </a:spcBef>
+              <a:spcAft>
+                <a:spcPts val="0"/>
+              </a:spcAft>
+              <a:buNone/>
+            </a:pPr>
+            <a:r>
+              <a:rPr lang="en"/>
+              <a:t>Try It: The Shortest Path</a:t>
+            </a:r>
+            <a:endParaRPr/>
+          </a:p>
+        </p:txBody>
+      </p:sp>
+      <p:sp>
+        <p:nvSpPr>
+          <p:cNvPr id="3" name="Text Placeholder 2"/>
+          <p:cNvSpPr>
+            <a:spLocks noGrp="1"/>
+          </p:cNvSpPr>
+          <p:nvPr>
+            <p:ph type="body" idx="1"/>
+          </p:nvPr>
+        </p:nvSpPr>
+        <p:spPr>
+          <a:xfrm>
+            <a:off x="311700" y="885950"/>
+            <a:ext cx="8520600" cy="1289304"/>
+          </a:xfrm>
+        </p:spPr>
+        <p:txBody>
+          <a:bodyPr/>
+          <a:lstStyle/>
+          <a:p>
+            <a:pPr indent="-330200" lvl="0" marL="457200" rtl="0" algn="l">
+              <a:spcBef>
+                <a:spcPts val="0"/>
+              </a:spcBef>
+              <a:spcAft>
+                <a:spcPts val="0"/>
+              </a:spcAft>
+              <a:buSzPts val="1600"/>
+              <a:buChar char="●"/>
+            </a:pPr>
+            <a:r>
+              <a:rPr lang="en"/>
+              <a:t>In Pacman4’s World:</a:t>
+            </a:r>
+            <a:endParaRPr/>
+          </a:p>
+          <a:p>
+            <a:pPr indent="-330200" lvl="0" marL="457200" rtl="0" algn="l">
+              <a:spcBef>
+                <a:spcPts val="0"/>
+              </a:spcBef>
+              <a:spcAft>
+                <a:spcPts val="0"/>
+              </a:spcAft>
+              <a:buSzPts val="1600"/>
+              <a:buChar char="●"/>
+            </a:pPr>
+            <a:r>
+              <a:rPr lang="en"/>
+              <a:t>Give Blinky new ShortestPath()</a:t>
+            </a:r>
+            <a:endParaRPr/>
+          </a:p>
+          <a:p>
+            <a:pPr indent="-330200" lvl="0" marL="457200" rtl="0" algn="l">
+              <a:spcBef>
+                <a:spcPts val="0"/>
+              </a:spcBef>
+              <a:spcAft>
+                <a:spcPts val="0"/>
+              </a:spcAft>
+              <a:buSzPts val="1600"/>
+              <a:buChar char="●"/>
+            </a:pPr>
+            <a:r>
+              <a:rPr lang="en"/>
+              <a:t>Then give it to all four: what happens to the game?</a:t>
+            </a:r>
+            <a:endParaRPr/>
+          </a:p>
+        </p:txBody>
+      </p:sp>
+    </p:spTree>
+  </p:cSld>
+  <p:clrMapOvr>
+    <a:masterClrMapping/>
+  </p:clrMapOvr>
+</p:sld>
+</file>
+
+<file path=ppt/slides/slide31.xml><?xml version="1.0" encoding="utf-8"?>
+<p:sld xmlns:a="http://schemas.openxmlformats.org/drawingml/2006/main" xmlns:p="http://schemas.openxmlformats.org/presentationml/2006/main" xmlns:r="http://schemas.openxmlformats.org/officeDocument/2006/relationships">
+  <p:cSld>
+    <p:spTree>
+      <p:nvGrpSpPr>
+        <p:cNvPr id="1" name=""/>
+        <p:cNvGrpSpPr/>
+        <p:nvPr/>
+      </p:nvGrpSpPr>
+      <p:grpSpPr/>
+      <p:sp>
+        <p:nvSpPr>
+          <p:cNvPr id="140" name="Google Shape;140;p23"/>
+          <p:cNvSpPr txBox="1"/>
+          <p:nvPr>
+            <p:ph type="title"/>
+          </p:nvPr>
+        </p:nvSpPr>
+        <p:spPr>
+          <a:xfrm>
+            <a:off x="311700" y="195615"/>
+            <a:ext cx="8520600" cy="572700"/>
+          </a:xfrm>
+          <a:prstGeom prst="rect">
+            <a:avLst/>
+          </a:prstGeom>
+        </p:spPr>
+        <p:txBody>
+          <a:bodyPr anchorCtr="0" anchor="t" bIns="91425" lIns="91425" spcFirstLastPara="1" rIns="91425" wrap="square" tIns="91425">
+            <a:normAutofit fontScale="90000"/>
+          </a:bodyPr>
+          <a:lstStyle/>
+          <a:p>
+            <a:pPr indent="0" lvl="0" marL="0" rtl="0" algn="l">
+              <a:spcBef>
+                <a:spcPts val="0"/>
+              </a:spcBef>
+              <a:spcAft>
+                <a:spcPts val="0"/>
+              </a:spcAft>
+              <a:buNone/>
+            </a:pPr>
+            <a:r>
+              <a:rPr lang="en"/>
+              <a:t>Testing the Ghosts</a:t>
+            </a:r>
+            <a:endParaRPr/>
+          </a:p>
+        </p:txBody>
+      </p:sp>
+      <p:sp>
+        <p:nvSpPr>
+          <p:cNvPr id="293" name="Google Shape;293;p45"/>
+          <p:cNvSpPr txBox="1"/>
+          <p:nvPr>
+            <p:ph type="title"/>
+          </p:nvPr>
+        </p:nvSpPr>
+        <p:spPr>
+          <a:xfrm>
+            <a:off x="311700" y="1152475"/>
+            <a:ext cx="3700000" cy="3500000"/>
+          </a:xfrm>
+          <a:prstGeom prst="rect">
+            <a:avLst/>
+          </a:prstGeom>
+        </p:spPr>
+        <p:txBody>
+          <a:bodyPr anchorCtr="0" anchor="t" bIns="91425" lIns="91425" spcFirstLastPara="1" rIns="91425" wrap="square" tIns="91425">
+            <a:normAutofit fontScale="90000"/>
+          </a:bodyPr>
+          <a:lstStyle/>
+          <a:p>
+            <a:pPr indent="-330200" lvl="0" marL="457200" rtl="0" algn="l">
+              <a:buClr>
+                <a:srgbClr val="DEE2E6"/>
+              </a:buClr>
+              <a:spcBef>
+                <a:spcPts val="0"/>
+              </a:spcBef>
+              <a:spcAft>
+                <a:spcPts val="0"/>
+              </a:spcAft>
+              <a:buSzPts val="1600"/>
+              <a:buChar char="●"/>
+            </a:pPr>
+            <a:r>
+              <a:rPr lang="en" sz="1600">
+                <a:solidFill>
+                  <a:srgbClr val="DEE2E6"/>
+                </a:solidFill>
+              </a:rPr>
+              <a:t>A strategy: one small class, one method</a:t>
+            </a:r>
+            <a:endParaRPr/>
+          </a:p>
+          <a:p>
+            <a:pPr indent="-317500" lvl="1" marL="914400" rtl="0" algn="l">
+              <a:buClr>
+                <a:srgbClr val="6C757D"/>
+              </a:buClr>
+              <a:spcBef>
+                <a:spcPts val="0"/>
+              </a:spcBef>
+              <a:spcAft>
+                <a:spcPts val="0"/>
+              </a:spcAft>
+              <a:buSzPts val="1400"/>
+              <a:buChar char="○"/>
+            </a:pPr>
+            <a:r>
+              <a:rPr lang="en" sz="1400">
+                <a:solidFill>
+                  <a:srgbClr val="6C757D"/>
+                </a:solidFill>
+              </a:rPr>
+              <a:t>Put Pac-Man somewhere, check the target</a:t>
+            </a:r>
+            <a:endParaRPr/>
+          </a:p>
+          <a:p>
+            <a:pPr indent="-330200" lvl="0" marL="457200" rtl="0" algn="l">
+              <a:buClr>
+                <a:srgbClr val="DEE2E6"/>
+              </a:buClr>
+              <a:spcBef>
+                <a:spcPts val="0"/>
+              </a:spcBef>
+              <a:spcAft>
+                <a:spcPts val="0"/>
+              </a:spcAft>
+              <a:buSzPts val="1600"/>
+              <a:buChar char="●"/>
+            </a:pPr>
+            <a:r>
+              <a:rPr lang="en" sz="1600">
+                <a:solidFill>
+                  <a:srgbClr val="DEE2E6"/>
+                </a:solidFill>
+              </a:rPr>
+              <a:t>Inky’s target is invisible when playing</a:t>
+            </a:r>
+            <a:endParaRPr/>
+          </a:p>
+          <a:p>
+            <a:pPr indent="-317500" lvl="1" marL="914400" rtl="0" algn="l">
+              <a:buClr>
+                <a:srgbClr val="6C757D"/>
+              </a:buClr>
+              <a:spcBef>
+                <a:spcPts val="0"/>
+              </a:spcBef>
+              <a:spcAft>
+                <a:spcPts val="0"/>
+              </a:spcAft>
+              <a:buSzPts val="1400"/>
+              <a:buChar char="○"/>
+            </a:pPr>
+            <a:r>
+              <a:rPr lang="en" sz="1400">
+                <a:solidFill>
+                  <a:srgbClr val="6C757D"/>
+                </a:solidFill>
+              </a:rPr>
+              <a:t>The test checks it with numbers you can work out on paper</a:t>
+            </a:r>
+            <a:endParaRPr/>
+          </a:p>
+          <a:p>
+            <a:pPr indent="-330200" lvl="0" marL="457200" rtl="0" algn="l">
+              <a:buClr>
+                <a:srgbClr val="DEE2E6"/>
+              </a:buClr>
+              <a:spcBef>
+                <a:spcPts val="0"/>
+              </a:spcBef>
+              <a:spcAft>
+                <a:spcPts val="0"/>
+              </a:spcAft>
+              <a:buSzPts val="1600"/>
+              <a:buChar char="●"/>
+            </a:pPr>
+            <a:r>
+              <a:rPr lang="en" sz="1600">
+                <a:solidFill>
+                  <a:srgbClr val="DEE2E6"/>
+                </a:solidFill>
+              </a:rPr>
+              <a:t>The states: put a ghost in a state, make something happen, check the state after</a:t>
+            </a:r>
+            <a:endParaRPr/>
+          </a:p>
+          <a:p>
+            <a:pPr indent="-330200" lvl="0" marL="457200" rtl="0" algn="l">
+              <a:buClr>
+                <a:srgbClr val="DEE2E6"/>
+              </a:buClr>
+              <a:spcBef>
+                <a:spcPts val="0"/>
+              </a:spcBef>
+              <a:spcAft>
+                <a:spcPts val="0"/>
+              </a:spcAft>
+              <a:buSzPts val="1600"/>
+              <a:buChar char="●"/>
+            </a:pPr>
+            <a:r>
+              <a:rPr lang="en" sz="1600">
+                <a:solidFill>
+                  <a:srgbClr val="DEE2E6"/>
+                </a:solidFill>
+              </a:rPr>
+              <a:t>A small test maze, and a seeded Random</a:t>
+            </a:r>
+            <a:endParaRPr/>
+          </a:p>
+        </p:txBody>
+      </p:sp>
+      <p:sp>
+        <p:nvSpPr>
+          <p:cNvPr id="141" name="Google Shape;141;p23"/>
+          <p:cNvSpPr txBox="1"/>
+          <p:nvPr>
+            <p:ph idx="2" type="body"/>
+          </p:nvPr>
+        </p:nvSpPr>
+        <p:spPr>
+          <a:xfrm>
+            <a:off x="4150000" y="1152475"/>
+            <a:ext cx="4750000" cy="3600000"/>
+          </a:xfrm>
+          <a:prstGeom prst="rect">
+            <a:avLst/>
+          </a:prstGeom>
+        </p:spPr>
+        <p:txBody>
+          <a:bodyPr anchorCtr="0" anchor="t" bIns="91425" lIns="91425" spcFirstLastPara="1" rIns="91425" wrap="square" tIns="91425">
+            <a:noAutofit/>
+          </a:bodyPr>
+          <a:lstStyle/>
+          <a:p>
+            <a:pPr indent="0" lvl="0" marL="0" rtl="0" algn="l">
+              <a:lnSpc>
+                <a:spcPct val="115000"/>
+              </a:lnSpc>
+              <a:spcBef>
+                <a:spcPts val="0"/>
+              </a:spcBef>
+              <a:spcAft>
+                <a:spcPts val="0"/>
+              </a:spcAft>
+              <a:buNone/>
+            </a:pPr>
+            <a:r>
+              <a:rPr lang="en" sz="1000">
+                <a:highlight>
+                  <a:schemeClr val="dk2"/>
+                </a:highlight>
+                <a:latin typeface="Consolas"/>
+                <a:ea typeface="Consolas"/>
+                <a:cs typeface="Consolas"/>
+                <a:sym typeface="Consolas"/>
+              </a:rPr>
+              <a:t>[Fact]</a:t>
+            </a:r>
+            <a:endParaRPr sz="1000">
+              <a:solidFill>
+                <a:srgbClr val="CCCCCC"/>
+              </a:solidFill>
+              <a:highlight>
+                <a:schemeClr val="dk2"/>
+              </a:highlight>
+              <a:latin typeface="Consolas"/>
+              <a:ea typeface="Consolas"/>
+              <a:cs typeface="Consolas"/>
+              <a:sym typeface="Consolas"/>
+            </a:endParaRPr>
+          </a:p>
+          <a:p>
+            <a:pPr indent="0" lvl="0" marL="0" rtl="0" algn="l">
+              <a:lnSpc>
+                <a:spcPct val="115000"/>
+              </a:lnSpc>
+              <a:spcBef>
+                <a:spcPts val="0"/>
+              </a:spcBef>
+              <a:spcAft>
+                <a:spcPts val="0"/>
+              </a:spcAft>
+              <a:buNone/>
+            </a:pPr>
+            <a:r>
+              <a:rPr lang="en" sz="1000">
+                <a:highlight>
+                  <a:schemeClr val="dk2"/>
+                </a:highlight>
+                <a:latin typeface="Consolas"/>
+                <a:ea typeface="Consolas"/>
+                <a:cs typeface="Consolas"/>
+                <a:sym typeface="Consolas"/>
+              </a:rPr>
+              <a:t>public void Inky_doubles_the_line_from_Blinky()</a:t>
+            </a:r>
+            <a:endParaRPr sz="1000">
+              <a:solidFill>
+                <a:srgbClr val="CCCCCC"/>
+              </a:solidFill>
+              <a:highlight>
+                <a:schemeClr val="dk2"/>
+              </a:highlight>
+              <a:latin typeface="Consolas"/>
+              <a:ea typeface="Consolas"/>
+              <a:cs typeface="Consolas"/>
+              <a:sym typeface="Consolas"/>
+            </a:endParaRPr>
+          </a:p>
+          <a:p>
+            <a:pPr indent="0" lvl="0" marL="0" rtl="0" algn="l">
+              <a:lnSpc>
+                <a:spcPct val="115000"/>
+              </a:lnSpc>
+              <a:spcBef>
+                <a:spcPts val="0"/>
+              </a:spcBef>
+              <a:spcAft>
+                <a:spcPts val="0"/>
+              </a:spcAft>
+              <a:buNone/>
+            </a:pPr>
+            <a:r>
+              <a:rPr lang="en" sz="1000">
+                <a:highlight>
+                  <a:schemeClr val="dk2"/>
+                </a:highlight>
+                <a:latin typeface="Consolas"/>
+                <a:ea typeface="Consolas"/>
+                <a:cs typeface="Consolas"/>
+                <a:sym typeface="Consolas"/>
+              </a:rPr>
+              <a:t>{</a:t>
+            </a:r>
+            <a:endParaRPr sz="1000">
+              <a:solidFill>
+                <a:srgbClr val="CCCCCC"/>
+              </a:solidFill>
+              <a:highlight>
+                <a:schemeClr val="dk2"/>
+              </a:highlight>
+              <a:latin typeface="Consolas"/>
+              <a:ea typeface="Consolas"/>
+              <a:cs typeface="Consolas"/>
+              <a:sym typeface="Consolas"/>
+            </a:endParaRPr>
+          </a:p>
+          <a:p>
+            <a:pPr indent="0" lvl="0" marL="0" rtl="0" algn="l">
+              <a:lnSpc>
+                <a:spcPct val="115000"/>
+              </a:lnSpc>
+              <a:spcBef>
+                <a:spcPts val="0"/>
+              </a:spcBef>
+              <a:spcAft>
+                <a:spcPts val="0"/>
+              </a:spcAft>
+              <a:buNone/>
+            </a:pPr>
+            <a:r>
+              <a:rPr lang="en" sz="1000">
+                <a:highlight>
+                  <a:schemeClr val="dk2"/>
+                </a:highlight>
+                <a:latin typeface="Consolas"/>
+                <a:ea typeface="Consolas"/>
+                <a:cs typeface="Consolas"/>
+                <a:sym typeface="Consolas"/>
+              </a:rPr>
+              <a:t>    _world.PacMan.Place(</a:t>
+            </a:r>
+            <a:endParaRPr sz="1000">
+              <a:solidFill>
+                <a:srgbClr val="CCCCCC"/>
+              </a:solidFill>
+              <a:highlight>
+                <a:schemeClr val="dk2"/>
+              </a:highlight>
+              <a:latin typeface="Consolas"/>
+              <a:ea typeface="Consolas"/>
+              <a:cs typeface="Consolas"/>
+              <a:sym typeface="Consolas"/>
+            </a:endParaRPr>
+          </a:p>
+          <a:p>
+            <a:pPr indent="0" lvl="0" marL="0" rtl="0" algn="l">
+              <a:lnSpc>
+                <a:spcPct val="115000"/>
+              </a:lnSpc>
+              <a:spcBef>
+                <a:spcPts val="0"/>
+              </a:spcBef>
+              <a:spcAft>
+                <a:spcPts val="0"/>
+              </a:spcAft>
+              <a:buNone/>
+            </a:pPr>
+            <a:r>
+              <a:rPr lang="en" sz="1000">
+                <a:highlight>
+                  <a:schemeClr val="dk2"/>
+                </a:highlight>
+                <a:latin typeface="Consolas"/>
+                <a:ea typeface="Consolas"/>
+                <a:cs typeface="Consolas"/>
+                <a:sym typeface="Consolas"/>
+              </a:rPr>
+              <a:t>        new Point(5, 1), Direction.Right);</a:t>
+            </a:r>
+            <a:endParaRPr sz="1000">
+              <a:solidFill>
+                <a:srgbClr val="CCCCCC"/>
+              </a:solidFill>
+              <a:highlight>
+                <a:schemeClr val="dk2"/>
+              </a:highlight>
+              <a:latin typeface="Consolas"/>
+              <a:ea typeface="Consolas"/>
+              <a:cs typeface="Consolas"/>
+              <a:sym typeface="Consolas"/>
+            </a:endParaRPr>
+          </a:p>
+          <a:p>
+            <a:pPr indent="0" lvl="0" marL="0" rtl="0" algn="l">
+              <a:lnSpc>
+                <a:spcPct val="115000"/>
+              </a:lnSpc>
+              <a:spcBef>
+                <a:spcPts val="0"/>
+              </a:spcBef>
+              <a:spcAft>
+                <a:spcPts val="0"/>
+              </a:spcAft>
+              <a:buNone/>
+            </a:pPr>
+            <a:r>
+              <a:rPr lang="en" sz="1000">
+                <a:highlight>
+                  <a:schemeClr val="dk2"/>
+                </a:highlight>
+                <a:latin typeface="Consolas"/>
+                <a:ea typeface="Consolas"/>
+                <a:cs typeface="Consolas"/>
+                <a:sym typeface="Consolas"/>
+              </a:rPr>
+              <a:t>    _world.Blinky.Place(</a:t>
+            </a:r>
+            <a:endParaRPr sz="1000">
+              <a:solidFill>
+                <a:srgbClr val="CCCCCC"/>
+              </a:solidFill>
+              <a:highlight>
+                <a:schemeClr val="dk2"/>
+              </a:highlight>
+              <a:latin typeface="Consolas"/>
+              <a:ea typeface="Consolas"/>
+              <a:cs typeface="Consolas"/>
+              <a:sym typeface="Consolas"/>
+            </a:endParaRPr>
+          </a:p>
+          <a:p>
+            <a:pPr indent="0" lvl="0" marL="0" rtl="0" algn="l">
+              <a:lnSpc>
+                <a:spcPct val="115000"/>
+              </a:lnSpc>
+              <a:spcBef>
+                <a:spcPts val="0"/>
+              </a:spcBef>
+              <a:spcAft>
+                <a:spcPts val="0"/>
+              </a:spcAft>
+              <a:buNone/>
+            </a:pPr>
+            <a:r>
+              <a:rPr lang="en" sz="1000">
+                <a:highlight>
+                  <a:schemeClr val="dk2"/>
+                </a:highlight>
+                <a:latin typeface="Consolas"/>
+                <a:ea typeface="Consolas"/>
+                <a:cs typeface="Consolas"/>
+                <a:sym typeface="Consolas"/>
+              </a:rPr>
+              <a:t>        new Point(3, 3), Direction.Left);</a:t>
+            </a:r>
+            <a:endParaRPr sz="1000">
+              <a:solidFill>
+                <a:srgbClr val="CCCCCC"/>
+              </a:solidFill>
+              <a:highlight>
+                <a:schemeClr val="dk2"/>
+              </a:highlight>
+              <a:latin typeface="Consolas"/>
+              <a:ea typeface="Consolas"/>
+              <a:cs typeface="Consolas"/>
+              <a:sym typeface="Consolas"/>
+            </a:endParaRPr>
+          </a:p>
+          <a:p>
+            <a:pPr indent="0" lvl="0" marL="0" rtl="0" algn="l">
+              <a:lnSpc>
+                <a:spcPct val="115000"/>
+              </a:lnSpc>
+              <a:spcBef>
+                <a:spcPts val="0"/>
+              </a:spcBef>
+              <a:spcAft>
+                <a:spcPts val="0"/>
+              </a:spcAft>
+              <a:buNone/>
+            </a:pPr>
+            <a:r>
+              <a:rPr lang="en" sz="1000">
+                <a:highlight>
+                  <a:schemeClr val="dk2"/>
+                </a:highlight>
+                <a:latin typeface="Consolas"/>
+                <a:ea typeface="Consolas"/>
+                <a:cs typeface="Consolas"/>
+                <a:sym typeface="Consolas"/>
+              </a:rPr>
+              <a:t/>
+            </a:r>
+            <a:endParaRPr sz="1000">
+              <a:solidFill>
+                <a:srgbClr val="CCCCCC"/>
+              </a:solidFill>
+              <a:highlight>
+                <a:schemeClr val="dk2"/>
+              </a:highlight>
+              <a:latin typeface="Consolas"/>
+              <a:ea typeface="Consolas"/>
+              <a:cs typeface="Consolas"/>
+              <a:sym typeface="Consolas"/>
+            </a:endParaRPr>
+          </a:p>
+          <a:p>
+            <a:pPr indent="0" lvl="0" marL="0" rtl="0" algn="l">
+              <a:lnSpc>
+                <a:spcPct val="115000"/>
+              </a:lnSpc>
+              <a:spcBef>
+                <a:spcPts val="0"/>
+              </a:spcBef>
+              <a:spcAft>
+                <a:spcPts val="0"/>
+              </a:spcAft>
+              <a:buNone/>
+            </a:pPr>
+            <a:r>
+              <a:rPr lang="en" sz="1000">
+                <a:highlight>
+                  <a:schemeClr val="dk2"/>
+                </a:highlight>
+                <a:latin typeface="Consolas"/>
+                <a:ea typeface="Consolas"/>
+                <a:cs typeface="Consolas"/>
+                <a:sym typeface="Consolas"/>
+              </a:rPr>
+              <a:t>    // Two ahead of Pac-Man: (7, 1).</a:t>
+            </a:r>
+            <a:endParaRPr sz="1000">
+              <a:solidFill>
+                <a:srgbClr val="CCCCCC"/>
+              </a:solidFill>
+              <a:highlight>
+                <a:schemeClr val="dk2"/>
+              </a:highlight>
+              <a:latin typeface="Consolas"/>
+              <a:ea typeface="Consolas"/>
+              <a:cs typeface="Consolas"/>
+              <a:sym typeface="Consolas"/>
+            </a:endParaRPr>
+          </a:p>
+          <a:p>
+            <a:pPr indent="0" lvl="0" marL="0" rtl="0" algn="l">
+              <a:lnSpc>
+                <a:spcPct val="115000"/>
+              </a:lnSpc>
+              <a:spcBef>
+                <a:spcPts val="0"/>
+              </a:spcBef>
+              <a:spcAft>
+                <a:spcPts val="0"/>
+              </a:spcAft>
+              <a:buNone/>
+            </a:pPr>
+            <a:r>
+              <a:rPr lang="en" sz="1000">
+                <a:highlight>
+                  <a:schemeClr val="dk2"/>
+                </a:highlight>
+                <a:latin typeface="Consolas"/>
+                <a:ea typeface="Consolas"/>
+                <a:cs typeface="Consolas"/>
+                <a:sym typeface="Consolas"/>
+              </a:rPr>
+              <a:t>    // From Blinky: (+4, -2), doubled.</a:t>
+            </a:r>
+            <a:endParaRPr sz="1000">
+              <a:solidFill>
+                <a:srgbClr val="CCCCCC"/>
+              </a:solidFill>
+              <a:highlight>
+                <a:schemeClr val="dk2"/>
+              </a:highlight>
+              <a:latin typeface="Consolas"/>
+              <a:ea typeface="Consolas"/>
+              <a:cs typeface="Consolas"/>
+              <a:sym typeface="Consolas"/>
+            </a:endParaRPr>
+          </a:p>
+          <a:p>
+            <a:pPr indent="0" lvl="0" marL="0" rtl="0" algn="l">
+              <a:lnSpc>
+                <a:spcPct val="115000"/>
+              </a:lnSpc>
+              <a:spcBef>
+                <a:spcPts val="0"/>
+              </a:spcBef>
+              <a:spcAft>
+                <a:spcPts val="0"/>
+              </a:spcAft>
+              <a:buNone/>
+            </a:pPr>
+            <a:r>
+              <a:rPr lang="en" sz="1000">
+                <a:highlight>
+                  <a:schemeClr val="dk2"/>
+                </a:highlight>
+                <a:latin typeface="Consolas"/>
+                <a:ea typeface="Consolas"/>
+                <a:cs typeface="Consolas"/>
+                <a:sym typeface="Consolas"/>
+              </a:rPr>
+              <a:t>    Assert.Equal(new Point(11, -1),</a:t>
+            </a:r>
+            <a:endParaRPr sz="1000">
+              <a:solidFill>
+                <a:srgbClr val="CCCCCC"/>
+              </a:solidFill>
+              <a:highlight>
+                <a:schemeClr val="dk2"/>
+              </a:highlight>
+              <a:latin typeface="Consolas"/>
+              <a:ea typeface="Consolas"/>
+              <a:cs typeface="Consolas"/>
+              <a:sym typeface="Consolas"/>
+            </a:endParaRPr>
+          </a:p>
+          <a:p>
+            <a:pPr indent="0" lvl="0" marL="0" rtl="0" algn="l">
+              <a:lnSpc>
+                <a:spcPct val="115000"/>
+              </a:lnSpc>
+              <a:spcBef>
+                <a:spcPts val="0"/>
+              </a:spcBef>
+              <a:spcAft>
+                <a:spcPts val="0"/>
+              </a:spcAft>
+              <a:buNone/>
+            </a:pPr>
+            <a:r>
+              <a:rPr lang="en" sz="1000">
+                <a:highlight>
+                  <a:schemeClr val="dk2"/>
+                </a:highlight>
+                <a:latin typeface="Consolas"/>
+                <a:ea typeface="Consolas"/>
+                <a:cs typeface="Consolas"/>
+                <a:sym typeface="Consolas"/>
+              </a:rPr>
+              <a:t>        TargetOf(_world.Inky));</a:t>
+            </a:r>
+            <a:endParaRPr sz="1000">
+              <a:solidFill>
+                <a:srgbClr val="CCCCCC"/>
+              </a:solidFill>
+              <a:highlight>
+                <a:schemeClr val="dk2"/>
+              </a:highlight>
+              <a:latin typeface="Consolas"/>
+              <a:ea typeface="Consolas"/>
+              <a:cs typeface="Consolas"/>
+              <a:sym typeface="Consolas"/>
+            </a:endParaRPr>
+          </a:p>
+          <a:p>
+            <a:pPr indent="0" lvl="0" marL="0" rtl="0" algn="l">
+              <a:lnSpc>
+                <a:spcPct val="115000"/>
+              </a:lnSpc>
+              <a:spcBef>
+                <a:spcPts val="0"/>
+              </a:spcBef>
+              <a:spcAft>
+                <a:spcPts val="0"/>
+              </a:spcAft>
+              <a:buNone/>
+            </a:pPr>
+            <a:r>
+              <a:rPr lang="en" sz="1000">
+                <a:highlight>
+                  <a:schemeClr val="dk2"/>
+                </a:highlight>
+                <a:latin typeface="Consolas"/>
+                <a:ea typeface="Consolas"/>
+                <a:cs typeface="Consolas"/>
+                <a:sym typeface="Consolas"/>
+              </a:rPr>
+              <a:t>}</a:t>
+            </a:r>
+            <a:endParaRPr sz="1000">
+              <a:solidFill>
+                <a:srgbClr val="CCCCCC"/>
+              </a:solidFill>
+              <a:highlight>
+                <a:schemeClr val="dk2"/>
+              </a:highlight>
+              <a:latin typeface="Consolas"/>
+              <a:ea typeface="Consolas"/>
+              <a:cs typeface="Consolas"/>
+              <a:sym typeface="Consolas"/>
+            </a:endParaRPr>
+          </a:p>
+        </p:txBody>
+      </p:sp>
+    </p:spTree>
+  </p:cSld>
+  <p:clrMapOvr>
+    <a:masterClrMapping/>
+  </p:clrMapOvr>
+</p:sld>
+</file>
+
+<file path=ppt/slides/slide32.xml><?xml version="1.0" encoding="utf-8"?>
+<p:sld xmlns:a="http://schemas.openxmlformats.org/drawingml/2006/main" xmlns:p="http://schemas.openxmlformats.org/presentationml/2006/main" xmlns:r="http://schemas.openxmlformats.org/officeDocument/2006/relationships">
+  <p:cSld>
+    <p:spTree>
+      <p:nvGrpSpPr>
+        <p:cNvPr id="1" name=""/>
+        <p:cNvGrpSpPr/>
+        <p:nvPr/>
+      </p:nvGrpSpPr>
+      <p:grpSpPr/>
+      <p:sp>
+        <p:nvSpPr>
           <p:cNvPr id="293" name="Google Shape;293;p45"/>
           <p:cNvSpPr txBox="1"/>
           <p:nvPr>
@@ -18945,7 +19093,7 @@
 </p:sld>
 </file>
 
-<file path=ppt/slides/slide31.xml><?xml version="1.0" encoding="utf-8"?>
+<file path=ppt/slides/slide33.xml><?xml version="1.0" encoding="utf-8"?>
 <p:sld xmlns:a="http://schemas.openxmlformats.org/drawingml/2006/main" xmlns:r="http://schemas.openxmlformats.org/officeDocument/2006/relationships" xmlns:mc="http://schemas.openxmlformats.org/markup-compatibility/2006" xmlns:mv="urn:schemas-microsoft-com:mac:vml" xmlns:p="http://schemas.openxmlformats.org/presentationml/2006/main" xmlns:c="http://schemas.openxmlformats.org/drawingml/2006/chart" xmlns:dgm="http://schemas.openxmlformats.org/drawingml/2006/diagram" xmlns:o="urn:schemas-microsoft-com:office:office" xmlns:v="urn:schemas-microsoft-com:vml" xmlns:pvml="urn:schemas-microsoft-com:office:powerpoint" xmlns:com="http://schemas.openxmlformats.org/drawingml/2006/compatibility" xmlns:p14="http://schemas.microsoft.com/office/powerpoint/2010/main" xmlns:p15="http://schemas.microsoft.com/office/powerpoint/2012/main" xmlns:ahyp="http://schemas.microsoft.com/office/drawing/2018/hyperlinkcolor">
   <p:cSld>
     <p:spTree>
@@ -19079,7 +19227,7 @@
 </p:sld>
 </file>
 
-<file path=ppt/slides/slide32.xml><?xml version="1.0" encoding="utf-8"?>
+<file path=ppt/slides/slide34.xml><?xml version="1.0" encoding="utf-8"?>
 <p:sld xmlns:a="http://schemas.openxmlformats.org/drawingml/2006/main" xmlns:r="http://schemas.openxmlformats.org/officeDocument/2006/relationships" xmlns:mc="http://schemas.openxmlformats.org/markup-compatibility/2006" xmlns:mv="urn:schemas-microsoft-com:mac:vml" xmlns:p="http://schemas.openxmlformats.org/presentationml/2006/main" xmlns:c="http://schemas.openxmlformats.org/drawingml/2006/chart" xmlns:dgm="http://schemas.openxmlformats.org/drawingml/2006/diagram" xmlns:o="urn:schemas-microsoft-com:office:office" xmlns:v="urn:schemas-microsoft-com:vml" xmlns:pvml="urn:schemas-microsoft-com:office:powerpoint" xmlns:com="http://schemas.openxmlformats.org/drawingml/2006/compatibility" xmlns:p14="http://schemas.microsoft.com/office/powerpoint/2010/main" xmlns:p15="http://schemas.microsoft.com/office/powerpoint/2012/main" xmlns:ahyp="http://schemas.microsoft.com/office/drawing/2018/hyperlinkcolor">
   <p:cSld>
     <p:spTree>
@@ -19962,1028 +20110,6 @@
 </p:sld>
 </file>
 
-<file path=ppt/slides/slide33.xml><?xml version="1.0" encoding="utf-8"?>
-<p:sld xmlns:a="http://schemas.openxmlformats.org/drawingml/2006/main" xmlns:r="http://schemas.openxmlformats.org/officeDocument/2006/relationships" xmlns:mc="http://schemas.openxmlformats.org/markup-compatibility/2006" xmlns:mv="urn:schemas-microsoft-com:mac:vml" xmlns:p="http://schemas.openxmlformats.org/presentationml/2006/main" xmlns:c="http://schemas.openxmlformats.org/drawingml/2006/chart" xmlns:dgm="http://schemas.openxmlformats.org/drawingml/2006/diagram" xmlns:o="urn:schemas-microsoft-com:office:office" xmlns:v="urn:schemas-microsoft-com:vml" xmlns:pvml="urn:schemas-microsoft-com:office:powerpoint" xmlns:com="http://schemas.openxmlformats.org/drawingml/2006/compatibility" xmlns:p14="http://schemas.microsoft.com/office/powerpoint/2010/main" xmlns:p15="http://schemas.microsoft.com/office/powerpoint/2012/main" xmlns:ahyp="http://schemas.microsoft.com/office/drawing/2018/hyperlinkcolor">
-  <p:cSld>
-    <p:spTree>
-      <p:nvGrpSpPr>
-        <p:cNvPr id="292" name="Shape 292"/>
-        <p:cNvGrpSpPr/>
-        <p:nvPr/>
-      </p:nvGrpSpPr>
-      <p:grpSpPr>
-        <a:xfrm>
-          <a:off x="0" y="0"/>
-          <a:ext cx="0" cy="0"/>
-          <a:chOff x="0" y="0"/>
-          <a:chExt cx="0" cy="0"/>
-        </a:xfrm>
-      </p:grpSpPr>
-      <p:sp>
-        <p:nvSpPr>
-          <p:cNvPr id="293" name="Google Shape;293;p45"/>
-          <p:cNvSpPr txBox="1"/>
-          <p:nvPr>
-            <p:ph type="title"/>
-          </p:nvPr>
-        </p:nvSpPr>
-        <p:spPr>
-          <a:xfrm>
-            <a:off x="311700" y="195615"/>
-            <a:ext cx="8520600" cy="572700"/>
-          </a:xfrm>
-          <a:prstGeom prst="rect">
-            <a:avLst/>
-          </a:prstGeom>
-        </p:spPr>
-        <p:txBody>
-          <a:bodyPr anchorCtr="0" anchor="t" bIns="91425" lIns="91425" spcFirstLastPara="1" rIns="91425" wrap="square" tIns="91425">
-            <a:normAutofit fontScale="90000"/>
-          </a:bodyPr>
-          <a:lstStyle/>
-          <a:p>
-            <a:pPr indent="0" lvl="0" marL="0" rtl="0" algn="l">
-              <a:spcBef>
-                <a:spcPts val="0"/>
-              </a:spcBef>
-              <a:spcAft>
-                <a:spcPts val="0"/>
-              </a:spcAft>
-              <a:buNone/>
-            </a:pPr>
-            <a:r>
-              <a:rPr lang="en">
-                <a:solidFill>
-                  <a:schemeClr val="accent5"/>
-                </a:solidFill>
-              </a:rPr>
-              <a:t>Exercises (Stretch)</a:t>
-            </a:r>
-            <a:endParaRPr>
-              <a:solidFill>
-                <a:schemeClr val="accent5"/>
-              </a:solidFill>
-            </a:endParaRPr>
-          </a:p>
-        </p:txBody>
-      </p:sp>
-      <p:sp>
-        <p:nvSpPr>
-          <p:cNvPr id="294" name="Google Shape;294;p45"/>
-          <p:cNvSpPr txBox="1"/>
-          <p:nvPr>
-            <p:ph idx="1" type="body"/>
-          </p:nvPr>
-        </p:nvSpPr>
-        <p:spPr>
-          <a:xfrm>
-            <a:off x="311700" y="885950"/>
-            <a:ext cx="8520600" cy="4023300"/>
-          </a:xfrm>
-          <a:prstGeom prst="rect">
-            <a:avLst/>
-          </a:prstGeom>
-        </p:spPr>
-        <p:txBody>
-          <a:bodyPr anchorCtr="0" anchor="t" bIns="91425" lIns="91425" spcFirstLastPara="1" rIns="91425" wrap="square" tIns="91425">
-            <a:normAutofit/>
-          </a:bodyPr>
-          <a:lstStyle/>
-          <a:p>
-            <a:pPr indent="-330200" lvl="0" marL="457200" rtl="0" algn="l">
-              <a:spcBef>
-                <a:spcPts val="0"/>
-              </a:spcBef>
-              <a:spcAft>
-                <a:spcPts val="0"/>
-              </a:spcAft>
-              <a:buSzPts val="1600"/>
-              <a:buChar char="●"/>
-            </a:pPr>
-            <a:r>
-              <a:rPr lang="en"/>
-              <a:t>Fruit: after 70 dots, a fruit appears below the house for ten seconds</a:t>
-            </a:r>
-            <a:endParaRPr/>
-          </a:p>
-          <a:p>
-            <a:pPr indent="-317500" lvl="1" marL="914400" rtl="0" algn="l">
-              <a:spcBef>
-                <a:spcPts val="0"/>
-              </a:spcBef>
-              <a:spcAft>
-                <a:spcPts val="0"/>
-              </a:spcAft>
-              <a:buSzPts val="1400"/>
-              <a:buChar char="○"/>
-            </a:pPr>
-            <a:r>
-              <a:rPr lang="en"/>
-              <a:t>Where does that rule belong: World, Maze, or a class of its own?</a:t>
-            </a:r>
-            <a:endParaRPr/>
-          </a:p>
-          <a:p>
-            <a:pPr indent="-330200" lvl="0" marL="457200" rtl="0" algn="l">
-              <a:spcBef>
-                <a:spcPts val="0"/>
-              </a:spcBef>
-              <a:spcAft>
-                <a:spcPts val="0"/>
-              </a:spcAft>
-              <a:buSzPts val="1600"/>
-              <a:buChar char="●"/>
-            </a:pPr>
-            <a:r>
-              <a:rPr lang="en"/>
-              <a:t>Tunnel: ghosts slow down in the tunnel</a:t>
-            </a:r>
-            <a:endParaRPr/>
-          </a:p>
-          <a:p>
-            <a:pPr indent="-317500" lvl="1" marL="914400" rtl="0" algn="l">
-              <a:spcBef>
-                <a:spcPts val="0"/>
-              </a:spcBef>
-              <a:spcAft>
-                <a:spcPts val="0"/>
-              </a:spcAft>
-              <a:buSzPts val="1400"/>
-              <a:buChar char="○"/>
-            </a:pPr>
-            <a:r>
-              <a:rPr lang="en"/>
-              <a:t>Which class knows the ghost is in the tunnel, and which how fast to go?</a:t>
-            </a:r>
-            <a:endParaRPr/>
-          </a:p>
-        </p:txBody>
-      </p:sp>
-    </p:spTree>
-  </p:cSld>
-  <p:clrMapOvr>
-    <a:masterClrMapping/>
-  </p:clrMapOvr>
-  <p:timing>
-    <p:tnLst>
-      <p:par>
-        <p:cTn dur="indefinite" nodeType="tmRoot" restart="never">
-          <p:childTnLst>
-            <p:seq concurrent="1" nextAc="seek">
-              <p:cTn dur="indefinite" id="2" nodeType="mainSeq">
-                <p:childTnLst>
-                  <p:par>
-                    <p:cTn fill="hold">
-                      <p:stCondLst>
-                        <p:cond delay="indefinite"/>
-                      </p:stCondLst>
-                      <p:childTnLst>
-                        <p:par>
-                          <p:cTn fill="hold">
-                            <p:stCondLst>
-                              <p:cond delay="0"/>
-                            </p:stCondLst>
-                            <p:childTnLst>
-                              <p:par>
-                                <p:cTn fill="hold" nodeType="clickEffect" presetClass="entr" presetID="1" presetSubtype="0">
-                                  <p:stCondLst>
-                                    <p:cond delay="0"/>
-                                  </p:stCondLst>
-                                  <p:childTnLst>
-                                    <p:set>
-                                      <p:cBhvr>
-                                        <p:cTn dur="1" fill="hold">
-                                          <p:stCondLst>
-                                            <p:cond delay="0"/>
-                                          </p:stCondLst>
-                                        </p:cTn>
-                                        <p:tgtEl>
-                                          <p:spTgt spid="294">
-                                            <p:txEl>
-                                              <p:pRg end="0" st="0"/>
-                                            </p:txEl>
-                                          </p:spTgt>
-                                        </p:tgtEl>
-                                        <p:attrNameLst>
-                                          <p:attrName>style.visibility</p:attrName>
-                                        </p:attrNameLst>
-                                      </p:cBhvr>
-                                      <p:to>
-                                        <p:strVal val="visible"/>
-                                      </p:to>
-                                    </p:set>
-                                  </p:childTnLst>
-                                </p:cTn>
-                              </p:par>
-                            </p:childTnLst>
-                          </p:cTn>
-                        </p:par>
-                      </p:childTnLst>
-                    </p:cTn>
-                  </p:par>
-                  <p:par>
-                    <p:cTn fill="hold">
-                      <p:stCondLst>
-                        <p:cond delay="indefinite"/>
-                      </p:stCondLst>
-                      <p:childTnLst>
-                        <p:par>
-                          <p:cTn fill="hold">
-                            <p:stCondLst>
-                              <p:cond delay="0"/>
-                            </p:stCondLst>
-                            <p:childTnLst>
-                              <p:par>
-                                <p:cTn fill="hold" nodeType="clickEffect" presetClass="entr" presetID="1" presetSubtype="0">
-                                  <p:stCondLst>
-                                    <p:cond delay="0"/>
-                                  </p:stCondLst>
-                                  <p:childTnLst>
-                                    <p:set>
-                                      <p:cBhvr>
-                                        <p:cTn dur="1" fill="hold">
-                                          <p:stCondLst>
-                                            <p:cond delay="0"/>
-                                          </p:stCondLst>
-                                        </p:cTn>
-                                        <p:tgtEl>
-                                          <p:spTgt spid="294">
-                                            <p:txEl>
-                                              <p:pRg end="1" st="1"/>
-                                            </p:txEl>
-                                          </p:spTgt>
-                                        </p:tgtEl>
-                                        <p:attrNameLst>
-                                          <p:attrName>style.visibility</p:attrName>
-                                        </p:attrNameLst>
-                                      </p:cBhvr>
-                                      <p:to>
-                                        <p:strVal val="visible"/>
-                                      </p:to>
-                                    </p:set>
-                                  </p:childTnLst>
-                                </p:cTn>
-                              </p:par>
-                            </p:childTnLst>
-                          </p:cTn>
-                        </p:par>
-                      </p:childTnLst>
-                    </p:cTn>
-                  </p:par>
-                  <p:par>
-                    <p:cTn fill="hold">
-                      <p:stCondLst>
-                        <p:cond delay="indefinite"/>
-                      </p:stCondLst>
-                      <p:childTnLst>
-                        <p:par>
-                          <p:cTn fill="hold">
-                            <p:stCondLst>
-                              <p:cond delay="0"/>
-                            </p:stCondLst>
-                            <p:childTnLst>
-                              <p:par>
-                                <p:cTn fill="hold" nodeType="clickEffect" presetClass="entr" presetID="1" presetSubtype="0">
-                                  <p:stCondLst>
-                                    <p:cond delay="0"/>
-                                  </p:stCondLst>
-                                  <p:childTnLst>
-                                    <p:set>
-                                      <p:cBhvr>
-                                        <p:cTn dur="1" fill="hold">
-                                          <p:stCondLst>
-                                            <p:cond delay="0"/>
-                                          </p:stCondLst>
-                                        </p:cTn>
-                                        <p:tgtEl>
-                                          <p:spTgt spid="294">
-                                            <p:txEl>
-                                              <p:pRg end="2" st="2"/>
-                                            </p:txEl>
-                                          </p:spTgt>
-                                        </p:tgtEl>
-                                        <p:attrNameLst>
-                                          <p:attrName>style.visibility</p:attrName>
-                                        </p:attrNameLst>
-                                      </p:cBhvr>
-                                      <p:to>
-                                        <p:strVal val="visible"/>
-                                      </p:to>
-                                    </p:set>
-                                  </p:childTnLst>
-                                </p:cTn>
-                              </p:par>
-                            </p:childTnLst>
-                          </p:cTn>
-                        </p:par>
-                      </p:childTnLst>
-                    </p:cTn>
-                  </p:par>
-                  <p:par>
-                    <p:cTn fill="hold">
-                      <p:stCondLst>
-                        <p:cond delay="indefinite"/>
-                      </p:stCondLst>
-                      <p:childTnLst>
-                        <p:par>
-                          <p:cTn fill="hold">
-                            <p:stCondLst>
-                              <p:cond delay="0"/>
-                            </p:stCondLst>
-                            <p:childTnLst>
-                              <p:par>
-                                <p:cTn fill="hold" nodeType="clickEffect" presetClass="entr" presetID="1" presetSubtype="0">
-                                  <p:stCondLst>
-                                    <p:cond delay="0"/>
-                                  </p:stCondLst>
-                                  <p:childTnLst>
-                                    <p:set>
-                                      <p:cBhvr>
-                                        <p:cTn dur="1" fill="hold">
-                                          <p:stCondLst>
-                                            <p:cond delay="0"/>
-                                          </p:stCondLst>
-                                        </p:cTn>
-                                        <p:tgtEl>
-                                          <p:spTgt spid="294">
-                                            <p:txEl>
-                                              <p:pRg end="3" st="3"/>
-                                            </p:txEl>
-                                          </p:spTgt>
-                                        </p:tgtEl>
-                                        <p:attrNameLst>
-                                          <p:attrName>style.visibility</p:attrName>
-                                        </p:attrNameLst>
-                                      </p:cBhvr>
-                                      <p:to>
-                                        <p:strVal val="visible"/>
-                                      </p:to>
-                                    </p:set>
-                                  </p:childTnLst>
-                                </p:cTn>
-                              </p:par>
-                            </p:childTnLst>
-                          </p:cTn>
-                        </p:par>
-                      </p:childTnLst>
-                    </p:cTn>
-                  </p:par>
-                  <p:par>
-                    <p:cTn fill="hold">
-                      <p:stCondLst>
-                        <p:cond delay="indefinite"/>
-                      </p:stCondLst>
-                      <p:childTnLst>
-                        <p:par>
-                          <p:cTn fill="hold">
-                            <p:stCondLst>
-                              <p:cond delay="0"/>
-                            </p:stCondLst>
-                            <p:childTnLst>
-                              <p:par>
-                                <p:cTn fill="hold" nodeType="clickEffect" presetClass="entr" presetID="1" presetSubtype="0">
-                                  <p:stCondLst>
-                                    <p:cond delay="0"/>
-                                  </p:stCondLst>
-                                  <p:childTnLst>
-                                    <p:set>
-                                      <p:cBhvr>
-                                        <p:cTn dur="1" fill="hold">
-                                          <p:stCondLst>
-                                            <p:cond delay="0"/>
-                                          </p:stCondLst>
-                                        </p:cTn>
-                                        <p:tgtEl>
-                                          <p:spTgt spid="294">
-                                            <p:txEl>
-                                              <p:pRg end="4" st="4"/>
-                                            </p:txEl>
-                                          </p:spTgt>
-                                        </p:tgtEl>
-                                        <p:attrNameLst>
-                                          <p:attrName>style.visibility</p:attrName>
-                                        </p:attrNameLst>
-                                      </p:cBhvr>
-                                      <p:to>
-                                        <p:strVal val="visible"/>
-                                      </p:to>
-                                    </p:set>
-                                  </p:childTnLst>
-                                </p:cTn>
-                              </p:par>
-                            </p:childTnLst>
-                          </p:cTn>
-                        </p:par>
-                      </p:childTnLst>
-                    </p:cTn>
-                  </p:par>
-                  <p:par>
-                    <p:cTn fill="hold">
-                      <p:stCondLst>
-                        <p:cond delay="indefinite"/>
-                      </p:stCondLst>
-                      <p:childTnLst>
-                        <p:par>
-                          <p:cTn fill="hold">
-                            <p:stCondLst>
-                              <p:cond delay="0"/>
-                            </p:stCondLst>
-                            <p:childTnLst>
-                              <p:par>
-                                <p:cTn fill="hold" nodeType="clickEffect" presetClass="entr" presetID="1" presetSubtype="0">
-                                  <p:stCondLst>
-                                    <p:cond delay="0"/>
-                                  </p:stCondLst>
-                                  <p:childTnLst>
-                                    <p:set>
-                                      <p:cBhvr>
-                                        <p:cTn dur="1" fill="hold">
-                                          <p:stCondLst>
-                                            <p:cond delay="0"/>
-                                          </p:stCondLst>
-                                        </p:cTn>
-                                        <p:tgtEl>
-                                          <p:spTgt spid="294">
-                                            <p:txEl>
-                                              <p:pRg end="5" st="5"/>
-                                            </p:txEl>
-                                          </p:spTgt>
-                                        </p:tgtEl>
-                                        <p:attrNameLst>
-                                          <p:attrName>style.visibility</p:attrName>
-                                        </p:attrNameLst>
-                                      </p:cBhvr>
-                                      <p:to>
-                                        <p:strVal val="visible"/>
-                                      </p:to>
-                                    </p:set>
-                                  </p:childTnLst>
-                                </p:cTn>
-                              </p:par>
-                            </p:childTnLst>
-                          </p:cTn>
-                        </p:par>
-                      </p:childTnLst>
-                    </p:cTn>
-                  </p:par>
-                  <p:par>
-                    <p:cTn fill="hold">
-                      <p:stCondLst>
-                        <p:cond delay="indefinite"/>
-                      </p:stCondLst>
-                      <p:childTnLst>
-                        <p:par>
-                          <p:cTn fill="hold">
-                            <p:stCondLst>
-                              <p:cond delay="0"/>
-                            </p:stCondLst>
-                            <p:childTnLst>
-                              <p:par>
-                                <p:cTn fill="hold" nodeType="clickEffect" presetClass="entr" presetID="1" presetSubtype="0">
-                                  <p:stCondLst>
-                                    <p:cond delay="0"/>
-                                  </p:stCondLst>
-                                  <p:childTnLst>
-                                    <p:set>
-                                      <p:cBhvr>
-                                        <p:cTn dur="1" fill="hold">
-                                          <p:stCondLst>
-                                            <p:cond delay="0"/>
-                                          </p:stCondLst>
-                                        </p:cTn>
-                                        <p:tgtEl>
-                                          <p:spTgt spid="294">
-                                            <p:txEl>
-                                              <p:pRg end="6" st="6"/>
-                                            </p:txEl>
-                                          </p:spTgt>
-                                        </p:tgtEl>
-                                        <p:attrNameLst>
-                                          <p:attrName>style.visibility</p:attrName>
-                                        </p:attrNameLst>
-                                      </p:cBhvr>
-                                      <p:to>
-                                        <p:strVal val="visible"/>
-                                      </p:to>
-                                    </p:set>
-                                  </p:childTnLst>
-                                </p:cTn>
-                              </p:par>
-                            </p:childTnLst>
-                          </p:cTn>
-                        </p:par>
-                      </p:childTnLst>
-                    </p:cTn>
-                  </p:par>
-                  <p:par>
-                    <p:cTn fill="hold">
-                      <p:stCondLst>
-                        <p:cond delay="indefinite"/>
-                      </p:stCondLst>
-                      <p:childTnLst>
-                        <p:par>
-                          <p:cTn fill="hold">
-                            <p:stCondLst>
-                              <p:cond delay="0"/>
-                            </p:stCondLst>
-                            <p:childTnLst>
-                              <p:par>
-                                <p:cTn fill="hold" nodeType="clickEffect" presetClass="entr" presetID="1" presetSubtype="0">
-                                  <p:stCondLst>
-                                    <p:cond delay="0"/>
-                                  </p:stCondLst>
-                                  <p:childTnLst>
-                                    <p:set>
-                                      <p:cBhvr>
-                                        <p:cTn dur="1" fill="hold">
-                                          <p:stCondLst>
-                                            <p:cond delay="0"/>
-                                          </p:stCondLst>
-                                        </p:cTn>
-                                        <p:tgtEl>
-                                          <p:spTgt spid="294">
-                                            <p:txEl>
-                                              <p:pRg end="7" st="7"/>
-                                            </p:txEl>
-                                          </p:spTgt>
-                                        </p:tgtEl>
-                                        <p:attrNameLst>
-                                          <p:attrName>style.visibility</p:attrName>
-                                        </p:attrNameLst>
-                                      </p:cBhvr>
-                                      <p:to>
-                                        <p:strVal val="visible"/>
-                                      </p:to>
-                                    </p:set>
-                                  </p:childTnLst>
-                                </p:cTn>
-                              </p:par>
-                            </p:childTnLst>
-                          </p:cTn>
-                        </p:par>
-                      </p:childTnLst>
-                    </p:cTn>
-                  </p:par>
-                  <p:par>
-                    <p:cTn fill="hold">
-                      <p:stCondLst>
-                        <p:cond delay="indefinite"/>
-                      </p:stCondLst>
-                      <p:childTnLst>
-                        <p:par>
-                          <p:cTn fill="hold">
-                            <p:stCondLst>
-                              <p:cond delay="0"/>
-                            </p:stCondLst>
-                            <p:childTnLst>
-                              <p:par>
-                                <p:cTn fill="hold" nodeType="clickEffect" presetClass="entr" presetID="1" presetSubtype="0">
-                                  <p:stCondLst>
-                                    <p:cond delay="0"/>
-                                  </p:stCondLst>
-                                  <p:childTnLst>
-                                    <p:set>
-                                      <p:cBhvr>
-                                        <p:cTn dur="1" fill="hold">
-                                          <p:stCondLst>
-                                            <p:cond delay="0"/>
-                                          </p:stCondLst>
-                                        </p:cTn>
-                                        <p:tgtEl>
-                                          <p:spTgt spid="294">
-                                            <p:txEl>
-                                              <p:pRg end="8" st="8"/>
-                                            </p:txEl>
-                                          </p:spTgt>
-                                        </p:tgtEl>
-                                        <p:attrNameLst>
-                                          <p:attrName>style.visibility</p:attrName>
-                                        </p:attrNameLst>
-                                      </p:cBhvr>
-                                      <p:to>
-                                        <p:strVal val="visible"/>
-                                      </p:to>
-                                    </p:set>
-                                  </p:childTnLst>
-                                </p:cTn>
-                              </p:par>
-                            </p:childTnLst>
-                          </p:cTn>
-                        </p:par>
-                      </p:childTnLst>
-                    </p:cTn>
-                  </p:par>
-                  <p:par>
-                    <p:cTn fill="hold">
-                      <p:stCondLst>
-                        <p:cond delay="indefinite"/>
-                      </p:stCondLst>
-                      <p:childTnLst>
-                        <p:par>
-                          <p:cTn fill="hold">
-                            <p:stCondLst>
-                              <p:cond delay="0"/>
-                            </p:stCondLst>
-                            <p:childTnLst>
-                              <p:par>
-                                <p:cTn fill="hold" nodeType="clickEffect" presetClass="entr" presetID="1" presetSubtype="0">
-                                  <p:stCondLst>
-                                    <p:cond delay="0"/>
-                                  </p:stCondLst>
-                                  <p:childTnLst>
-                                    <p:set>
-                                      <p:cBhvr>
-                                        <p:cTn dur="1" fill="hold">
-                                          <p:stCondLst>
-                                            <p:cond delay="0"/>
-                                          </p:stCondLst>
-                                        </p:cTn>
-                                        <p:tgtEl>
-                                          <p:spTgt spid="294">
-                                            <p:txEl>
-                                              <p:pRg end="9" st="9"/>
-                                            </p:txEl>
-                                          </p:spTgt>
-                                        </p:tgtEl>
-                                        <p:attrNameLst>
-                                          <p:attrName>style.visibility</p:attrName>
-                                        </p:attrNameLst>
-                                      </p:cBhvr>
-                                      <p:to>
-                                        <p:strVal val="visible"/>
-                                      </p:to>
-                                    </p:set>
-                                  </p:childTnLst>
-                                </p:cTn>
-                              </p:par>
-                            </p:childTnLst>
-                          </p:cTn>
-                        </p:par>
-                      </p:childTnLst>
-                    </p:cTn>
-                  </p:par>
-                  <p:par>
-                    <p:cTn fill="hold">
-                      <p:stCondLst>
-                        <p:cond delay="indefinite"/>
-                      </p:stCondLst>
-                      <p:childTnLst>
-                        <p:par>
-                          <p:cTn fill="hold">
-                            <p:stCondLst>
-                              <p:cond delay="0"/>
-                            </p:stCondLst>
-                            <p:childTnLst>
-                              <p:par>
-                                <p:cTn fill="hold" nodeType="clickEffect" presetClass="entr" presetID="1" presetSubtype="0">
-                                  <p:stCondLst>
-                                    <p:cond delay="0"/>
-                                  </p:stCondLst>
-                                  <p:childTnLst>
-                                    <p:set>
-                                      <p:cBhvr>
-                                        <p:cTn dur="1" fill="hold">
-                                          <p:stCondLst>
-                                            <p:cond delay="0"/>
-                                          </p:stCondLst>
-                                        </p:cTn>
-                                        <p:tgtEl>
-                                          <p:spTgt spid="294">
-                                            <p:txEl>
-                                              <p:pRg end="10" st="10"/>
-                                            </p:txEl>
-                                          </p:spTgt>
-                                        </p:tgtEl>
-                                        <p:attrNameLst>
-                                          <p:attrName>style.visibility</p:attrName>
-                                        </p:attrNameLst>
-                                      </p:cBhvr>
-                                      <p:to>
-                                        <p:strVal val="visible"/>
-                                      </p:to>
-                                    </p:set>
-                                  </p:childTnLst>
-                                </p:cTn>
-                              </p:par>
-                            </p:childTnLst>
-                          </p:cTn>
-                        </p:par>
-                      </p:childTnLst>
-                    </p:cTn>
-                  </p:par>
-                  <p:par>
-                    <p:cTn fill="hold">
-                      <p:stCondLst>
-                        <p:cond delay="indefinite"/>
-                      </p:stCondLst>
-                      <p:childTnLst>
-                        <p:par>
-                          <p:cTn fill="hold">
-                            <p:stCondLst>
-                              <p:cond delay="0"/>
-                            </p:stCondLst>
-                            <p:childTnLst>
-                              <p:par>
-                                <p:cTn fill="hold" nodeType="clickEffect" presetClass="entr" presetID="1" presetSubtype="0">
-                                  <p:stCondLst>
-                                    <p:cond delay="0"/>
-                                  </p:stCondLst>
-                                  <p:childTnLst>
-                                    <p:set>
-                                      <p:cBhvr>
-                                        <p:cTn dur="1" fill="hold">
-                                          <p:stCondLst>
-                                            <p:cond delay="0"/>
-                                          </p:stCondLst>
-                                        </p:cTn>
-                                        <p:tgtEl>
-                                          <p:spTgt spid="294">
-                                            <p:txEl>
-                                              <p:pRg end="11" st="11"/>
-                                            </p:txEl>
-                                          </p:spTgt>
-                                        </p:tgtEl>
-                                        <p:attrNameLst>
-                                          <p:attrName>style.visibility</p:attrName>
-                                        </p:attrNameLst>
-                                      </p:cBhvr>
-                                      <p:to>
-                                        <p:strVal val="visible"/>
-                                      </p:to>
-                                    </p:set>
-                                  </p:childTnLst>
-                                </p:cTn>
-                              </p:par>
-                            </p:childTnLst>
-                          </p:cTn>
-                        </p:par>
-                      </p:childTnLst>
-                    </p:cTn>
-                  </p:par>
-                  <p:par>
-                    <p:cTn fill="hold">
-                      <p:stCondLst>
-                        <p:cond delay="indefinite"/>
-                      </p:stCondLst>
-                      <p:childTnLst>
-                        <p:par>
-                          <p:cTn fill="hold">
-                            <p:stCondLst>
-                              <p:cond delay="0"/>
-                            </p:stCondLst>
-                            <p:childTnLst>
-                              <p:par>
-                                <p:cTn fill="hold" nodeType="clickEffect" presetClass="entr" presetID="1" presetSubtype="0">
-                                  <p:stCondLst>
-                                    <p:cond delay="0"/>
-                                  </p:stCondLst>
-                                  <p:childTnLst>
-                                    <p:set>
-                                      <p:cBhvr>
-                                        <p:cTn dur="1" fill="hold">
-                                          <p:stCondLst>
-                                            <p:cond delay="0"/>
-                                          </p:stCondLst>
-                                        </p:cTn>
-                                        <p:tgtEl>
-                                          <p:spTgt spid="294">
-                                            <p:txEl>
-                                              <p:pRg end="12" st="12"/>
-                                            </p:txEl>
-                                          </p:spTgt>
-                                        </p:tgtEl>
-                                        <p:attrNameLst>
-                                          <p:attrName>style.visibility</p:attrName>
-                                        </p:attrNameLst>
-                                      </p:cBhvr>
-                                      <p:to>
-                                        <p:strVal val="visible"/>
-                                      </p:to>
-                                    </p:set>
-                                  </p:childTnLst>
-                                </p:cTn>
-                              </p:par>
-                            </p:childTnLst>
-                          </p:cTn>
-                        </p:par>
-                      </p:childTnLst>
-                    </p:cTn>
-                  </p:par>
-                </p:childTnLst>
-              </p:cTn>
-              <p:prevCondLst>
-                <p:cond evt="onPrev">
-                  <p:tgtEl>
-                    <p:sldTgt/>
-                  </p:tgtEl>
-                </p:cond>
-              </p:prevCondLst>
-              <p:nextCondLst>
-                <p:cond evt="onNext">
-                  <p:tgtEl>
-                    <p:sldTgt/>
-                  </p:tgtEl>
-                </p:cond>
-              </p:nextCondLst>
-            </p:seq>
-          </p:childTnLst>
-        </p:cTn>
-      </p:par>
-    </p:tnLst>
-  </p:timing>
-</p:sld>
-</file>
-
-<file path=ppt/slides/slide34.xml><?xml version="1.0" encoding="utf-8"?>
-<p:sld xmlns:a="http://schemas.openxmlformats.org/drawingml/2006/main" xmlns:p="http://schemas.openxmlformats.org/presentationml/2006/main" xmlns:r="http://schemas.openxmlformats.org/officeDocument/2006/relationships">
-  <p:cSld>
-    <p:spTree>
-      <p:nvGrpSpPr>
-        <p:cNvPr id="1" name=""/>
-        <p:cNvGrpSpPr/>
-        <p:nvPr/>
-      </p:nvGrpSpPr>
-      <p:grpSpPr/>
-      <p:sp>
-        <p:nvSpPr>
-          <p:cNvPr id="2" name="Title 1"/>
-          <p:cNvSpPr>
-            <a:spLocks noGrp="1"/>
-          </p:cNvSpPr>
-          <p:nvPr>
-            <p:ph type="title"/>
-          </p:nvPr>
-        </p:nvSpPr>
-        <p:spPr/>
-        <p:txBody>
-          <a:bodyPr/>
-          <a:lstStyle/>
-          <a:p>
-            <a:pPr indent="0" lvl="0" marL="0" rtl="0" algn="l">
-              <a:spcBef>
-                <a:spcPts val="0"/>
-              </a:spcBef>
-              <a:spcAft>
-                <a:spcPts val="0"/>
-              </a:spcAft>
-              <a:buNone/>
-            </a:pPr>
-            <a:r>
-              <a:rPr lang="en"/>
-              <a:t>Check Yourself</a:t>
-            </a:r>
-            <a:endParaRPr/>
-          </a:p>
-        </p:txBody>
-      </p:sp>
-      <p:sp>
-        <p:nvSpPr>
-          <p:cNvPr id="3" name="Text Placeholder 2"/>
-          <p:cNvSpPr>
-            <a:spLocks noGrp="1"/>
-          </p:cNvSpPr>
-          <p:nvPr>
-            <p:ph type="body" idx="1"/>
-          </p:nvPr>
-        </p:nvSpPr>
-        <p:spPr>
-          <a:xfrm>
-            <a:off x="311700" y="885950"/>
-            <a:ext cx="8520600" cy="2103120"/>
-          </a:xfrm>
-        </p:spPr>
-        <p:txBody>
-          <a:bodyPr/>
-          <a:lstStyle/>
-          <a:p>
-            <a:pPr indent="-330200" lvl="0" marL="457200" rtl="0" algn="l">
-              <a:spcBef>
-                <a:spcPts val="0"/>
-              </a:spcBef>
-              <a:spcAft>
-                <a:spcPts val="0"/>
-              </a:spcAft>
-              <a:buSzPts val="1600"/>
-              <a:buChar char="●"/>
-            </a:pPr>
-            <a:r>
-              <a:rPr lang="en" b="1"/>
-              <a:t>What problems does the enum version of the ghost have?</a:t>
-            </a:r>
-            <a:endParaRPr/>
-          </a:p>
-          <a:p>
-            <a:pPr indent="-330200" lvl="0" marL="457200" rtl="0" algn="l">
-              <a:spcBef>
-                <a:spcPts val="0"/>
-              </a:spcBef>
-              <a:spcAft>
-                <a:spcPts val="0"/>
-              </a:spcAft>
-              <a:buSzPts val="1600"/>
-              <a:buChar char="●"/>
-            </a:pPr>
-            <a:r>
-              <a:rPr lang="en" b="1"/>
-              <a:t>In the State pattern, who decides when to change state?</a:t>
-            </a:r>
-            <a:endParaRPr/>
-          </a:p>
-          <a:p>
-            <a:pPr indent="-330200" lvl="0" marL="457200" rtl="0" algn="l">
-              <a:spcBef>
-                <a:spcPts val="0"/>
-              </a:spcBef>
-              <a:spcAft>
-                <a:spcPts val="0"/>
-              </a:spcAft>
-              <a:buSzPts val="1600"/>
-              <a:buChar char="●"/>
-            </a:pPr>
-            <a:r>
-              <a:rPr lang="en" b="1"/>
-              <a:t>What are Enter and Exit for?</a:t>
-            </a:r>
-            <a:endParaRPr/>
-          </a:p>
-          <a:p>
-            <a:pPr indent="-330200" lvl="0" marL="457200" rtl="0" algn="l">
-              <a:spcBef>
-                <a:spcPts val="0"/>
-              </a:spcBef>
-              <a:spcAft>
-                <a:spcPts val="0"/>
-              </a:spcAft>
-              <a:buSzPts val="1600"/>
-              <a:buChar char="●"/>
-            </a:pPr>
-            <a:r>
-              <a:rPr lang="en" b="1"/>
-              <a:t>State and Strategy have the same structure. How do they differ?</a:t>
-            </a:r>
-            <a:endParaRPr/>
-          </a:p>
-          <a:p>
-            <a:pPr indent="-330200" lvl="0" marL="457200" rtl="0" algn="l">
-              <a:spcBef>
-                <a:spcPts val="0"/>
-              </a:spcBef>
-              <a:spcAft>
-                <a:spcPts val="0"/>
-              </a:spcAft>
-              <a:buSzPts val="1600"/>
-              <a:buChar char="●"/>
-            </a:pPr>
-            <a:r>
-              <a:rPr lang="en" b="1"/>
-              <a:t>Why do the chasing ghosts keep the arcade rule?</a:t>
-            </a:r>
-            <a:endParaRPr/>
-          </a:p>
-        </p:txBody>
-      </p:sp>
-      <p:sp>
-        <p:nvSpPr>
-          <p:cNvPr id="4" name="TextBox 3"/>
-          <p:cNvSpPr txBox="1"/>
-          <p:nvPr/>
-        </p:nvSpPr>
-        <p:spPr>
-          <a:xfrm>
-            <a:off x="457200" y="3566160"/>
-            <a:ext cx="8229600" cy="457200"/>
-          </a:xfrm>
-          <a:prstGeom prst="rect">
-            <a:avLst/>
-          </a:prstGeom>
-          <a:noFill/>
-        </p:spPr>
-        <p:txBody>
-          <a:bodyPr wrap="square">
-            <a:spAutoFit/>
-          </a:bodyPr>
-          <a:lstStyle/>
-          <a:p>
-            <a:pPr algn="ctr"/>
-            <a:r>
-              <a:rPr sz="1400" b="0" i="0">
-                <a:solidFill>
-                  <a:srgbClr val="9AA3AB"/>
-                </a:solidFill>
-              </a:rPr>
-              <a:t>The answers, and more questions, are on the course site.</a:t>
-            </a:r>
-          </a:p>
-        </p:txBody>
-      </p:sp>
-    </p:spTree>
-  </p:cSld>
-  <p:clrMapOvr>
-    <a:masterClrMapping/>
-  </p:clrMapOvr>
-</p:sld>
-</file>
-
 <file path=ppt/slides/slide35.xml><?xml version="1.0" encoding="utf-8"?>
 <p:sld xmlns:a="http://schemas.openxmlformats.org/drawingml/2006/main" xmlns:r="http://schemas.openxmlformats.org/officeDocument/2006/relationships" xmlns:mc="http://schemas.openxmlformats.org/markup-compatibility/2006" xmlns:mv="urn:schemas-microsoft-com:mac:vml" xmlns:p="http://schemas.openxmlformats.org/presentationml/2006/main" xmlns:c="http://schemas.openxmlformats.org/drawingml/2006/chart" xmlns:dgm="http://schemas.openxmlformats.org/drawingml/2006/diagram" xmlns:o="urn:schemas-microsoft-com:office:office" xmlns:v="urn:schemas-microsoft-com:vml" xmlns:pvml="urn:schemas-microsoft-com:office:powerpoint" xmlns:com="http://schemas.openxmlformats.org/drawingml/2006/compatibility" xmlns:p14="http://schemas.microsoft.com/office/powerpoint/2010/main" xmlns:p15="http://schemas.microsoft.com/office/powerpoint/2012/main" xmlns:ahyp="http://schemas.microsoft.com/office/drawing/2018/hyperlinkcolor">
   <p:cSld>
@@ -21039,7 +20165,7 @@
                   <a:schemeClr val="accent5"/>
                 </a:solidFill>
               </a:rPr>
-              <a:t>Apply It to Your Project</a:t>
+              <a:t>Exercises (Stretch)</a:t>
             </a:r>
             <a:endParaRPr>
               <a:solidFill>
@@ -21084,7 +20210,7 @@
             </a:pPr>
             <a:r>
               <a:rPr lang="en"/>
-              <a:t>Which objects in your game have modes?</a:t>
+              <a:t>Fruit: after 70 dots, a fruit appears below the house for ten seconds</a:t>
             </a:r>
             <a:endParaRPr/>
           </a:p>
@@ -21101,7 +20227,7 @@
             </a:pPr>
             <a:r>
               <a:rPr lang="en"/>
-              <a:t>Flags, an enum, or state objects?</a:t>
+              <a:t>Where does that rule belong: World, Maze, or a class of its own?</a:t>
             </a:r>
             <a:endParaRPr/>
           </a:p>
@@ -21118,24 +20244,7 @@
             </a:pPr>
             <a:r>
               <a:rPr lang="en"/>
-              <a:t>Where do you switch over a mode in more than one method?</a:t>
-            </a:r>
-            <a:endParaRPr/>
-          </a:p>
-          <a:p>
-            <a:pPr indent="-330200" lvl="0" marL="457200" rtl="0" algn="l">
-              <a:spcBef>
-                <a:spcPts val="0"/>
-              </a:spcBef>
-              <a:spcAft>
-                <a:spcPts val="0"/>
-              </a:spcAft>
-              <a:buSzPts val="1600"/>
-              <a:buChar char="●"/>
-            </a:pPr>
-            <a:r>
-              <a:rPr lang="en"/>
-              <a:t>A behaviour that differs per object, but never changes for one object?</a:t>
+              <a:t>Tunnel: ghosts slow down in the tunnel</a:t>
             </a:r>
             <a:endParaRPr/>
           </a:p>
@@ -21152,7 +20261,7 @@
             </a:pPr>
             <a:r>
               <a:rPr lang="en"/>
-              <a:t>That’s a strategy</a:t>
+              <a:t>Which class knows the ghost is in the tunnel, and which how fast to go?</a:t>
             </a:r>
             <a:endParaRPr/>
           </a:p>
@@ -21869,36 +20978,152 @@
             </a:pPr>
             <a:r>
               <a:rPr lang="en"/>
-              <a:t>Choosing a Direction</a:t>
+              <a:t>Check Yourself</a:t>
             </a:r>
             <a:endParaRPr/>
           </a:p>
         </p:txBody>
       </p:sp>
-      <p:pic>
-        <p:nvPicPr>
-          <p:cNvPr id="3" name="Picture 2" descr="junction.png"/>
-          <p:cNvPicPr>
-            <a:picLocks noChangeAspect="1"/>
-          </p:cNvPicPr>
-          <p:nvPr/>
-        </p:nvPicPr>
-        <p:blipFill>
-          <a:blip r:embed="rId2"/>
-          <a:stretch>
-            <a:fillRect/>
-          </a:stretch>
-        </p:blipFill>
+      <p:sp>
+        <p:nvSpPr>
+          <p:cNvPr id="3" name="Text Placeholder 2"/>
+          <p:cNvSpPr>
+            <a:spLocks noGrp="1"/>
+          </p:cNvSpPr>
+          <p:nvPr>
+            <p:ph type="body" idx="1"/>
+          </p:nvPr>
+        </p:nvSpPr>
         <p:spPr>
           <a:xfrm>
-            <a:off x="594360" y="1051560"/>
-            <a:ext cx="7955279" cy="3977639"/>
+            <a:off x="311700" y="885950"/>
+            <a:ext cx="8520600" cy="2103120"/>
+          </a:xfrm>
+        </p:spPr>
+        <p:txBody>
+          <a:bodyPr/>
+          <a:lstStyle/>
+          <a:p>
+            <a:pPr indent="-330200" lvl="0" marL="457200" rtl="0" algn="l">
+              <a:spcBef>
+                <a:spcPts val="0"/>
+              </a:spcBef>
+              <a:spcAft>
+                <a:spcPts val="0"/>
+              </a:spcAft>
+              <a:buSzPts val="1600"/>
+              <a:buChar char="●"/>
+            </a:pPr>
+            <a:r>
+              <a:rPr lang="en" b="1"/>
+              <a:t>What problems does the enum version of the ghost have?</a:t>
+            </a:r>
+            <a:endParaRPr/>
+          </a:p>
+          <a:p>
+            <a:pPr indent="-330200" lvl="0" marL="457200" rtl="0" algn="l">
+              <a:spcBef>
+                <a:spcPts val="0"/>
+              </a:spcBef>
+              <a:spcAft>
+                <a:spcPts val="0"/>
+              </a:spcAft>
+              <a:buSzPts val="1600"/>
+              <a:buChar char="●"/>
+            </a:pPr>
+            <a:r>
+              <a:rPr lang="en" b="1"/>
+              <a:t>In the State pattern, who decides when to change state?</a:t>
+            </a:r>
+            <a:endParaRPr/>
+          </a:p>
+          <a:p>
+            <a:pPr indent="-330200" lvl="0" marL="457200" rtl="0" algn="l">
+              <a:spcBef>
+                <a:spcPts val="0"/>
+              </a:spcBef>
+              <a:spcAft>
+                <a:spcPts val="0"/>
+              </a:spcAft>
+              <a:buSzPts val="1600"/>
+              <a:buChar char="●"/>
+            </a:pPr>
+            <a:r>
+              <a:rPr lang="en" b="1"/>
+              <a:t>What are Enter and Exit for?</a:t>
+            </a:r>
+            <a:endParaRPr/>
+          </a:p>
+          <a:p>
+            <a:pPr indent="-330200" lvl="0" marL="457200" rtl="0" algn="l">
+              <a:spcBef>
+                <a:spcPts val="0"/>
+              </a:spcBef>
+              <a:spcAft>
+                <a:spcPts val="0"/>
+              </a:spcAft>
+              <a:buSzPts val="1600"/>
+              <a:buChar char="●"/>
+            </a:pPr>
+            <a:r>
+              <a:rPr lang="en" b="1"/>
+              <a:t>State and Strategy have the same structure. How do they differ?</a:t>
+            </a:r>
+            <a:endParaRPr/>
+          </a:p>
+          <a:p>
+            <a:pPr indent="-330200" lvl="0" marL="457200" rtl="0" algn="l">
+              <a:spcBef>
+                <a:spcPts val="0"/>
+              </a:spcBef>
+              <a:spcAft>
+                <a:spcPts val="0"/>
+              </a:spcAft>
+              <a:buSzPts val="1600"/>
+              <a:buChar char="●"/>
+            </a:pPr>
+            <a:r>
+              <a:rPr lang="en" b="1"/>
+              <a:t>Why do the chasing ghosts keep the arcade rule?</a:t>
+            </a:r>
+            <a:endParaRPr/>
+          </a:p>
+        </p:txBody>
+      </p:sp>
+      <p:sp>
+        <p:nvSpPr>
+          <p:cNvPr id="4" name="TextBox 3"/>
+          <p:cNvSpPr txBox="1"/>
+          <p:nvPr/>
+        </p:nvSpPr>
+        <p:spPr>
+          <a:xfrm>
+            <a:off x="457200" y="3566160"/>
+            <a:ext cx="8229600" cy="457200"/>
           </a:xfrm>
           <a:prstGeom prst="rect">
             <a:avLst/>
           </a:prstGeom>
+          <a:noFill/>
         </p:spPr>
-      </p:pic>
+        <p:txBody>
+          <a:bodyPr wrap="square">
+            <a:spAutoFit/>
+          </a:bodyPr>
+          <a:lstStyle/>
+          <a:p>
+            <a:pPr algn="ctr"/>
+            <a:r>
+              <a:rPr sz="1400" b="0" i="0">
+                <a:solidFill>
+                  <a:srgbClr val="9AA3AB"/>
+                </a:solidFill>
+              </a:rPr>
+              <a:t>The answers, and more questions, are on the course site.</a:t>
+            </a:r>
+          </a:p>
+        </p:txBody>
+      </p:sp>
     </p:spTree>
   </p:cSld>
   <p:clrMapOvr>
@@ -21908,76 +21133,851 @@
 </file>
 
 <file path=ppt/slides/slide37.xml><?xml version="1.0" encoding="utf-8"?>
-<p:sld xmlns:a="http://schemas.openxmlformats.org/drawingml/2006/main" xmlns:p="http://schemas.openxmlformats.org/presentationml/2006/main" xmlns:r="http://schemas.openxmlformats.org/officeDocument/2006/relationships">
+<p:sld xmlns:a="http://schemas.openxmlformats.org/drawingml/2006/main" xmlns:r="http://schemas.openxmlformats.org/officeDocument/2006/relationships" xmlns:mc="http://schemas.openxmlformats.org/markup-compatibility/2006" xmlns:mv="urn:schemas-microsoft-com:mac:vml" xmlns:p="http://schemas.openxmlformats.org/presentationml/2006/main" xmlns:c="http://schemas.openxmlformats.org/drawingml/2006/chart" xmlns:dgm="http://schemas.openxmlformats.org/drawingml/2006/diagram" xmlns:o="urn:schemas-microsoft-com:office:office" xmlns:v="urn:schemas-microsoft-com:vml" xmlns:pvml="urn:schemas-microsoft-com:office:powerpoint" xmlns:com="http://schemas.openxmlformats.org/drawingml/2006/compatibility" xmlns:p14="http://schemas.microsoft.com/office/powerpoint/2010/main" xmlns:p15="http://schemas.microsoft.com/office/powerpoint/2012/main" xmlns:ahyp="http://schemas.microsoft.com/office/drawing/2018/hyperlinkcolor">
   <p:cSld>
     <p:spTree>
       <p:nvGrpSpPr>
-        <p:cNvPr id="1" name=""/>
+        <p:cNvPr id="292" name="Shape 292"/>
         <p:cNvGrpSpPr/>
         <p:nvPr/>
       </p:nvGrpSpPr>
-      <p:grpSpPr/>
-      <p:sp>
-        <p:nvSpPr>
-          <p:cNvPr id="2" name="Title 1"/>
-          <p:cNvSpPr>
-            <a:spLocks noGrp="1"/>
-          </p:cNvSpPr>
+      <p:grpSpPr>
+        <a:xfrm>
+          <a:off x="0" y="0"/>
+          <a:ext cx="0" cy="0"/>
+          <a:chOff x="0" y="0"/>
+          <a:chExt cx="0" cy="0"/>
+        </a:xfrm>
+      </p:grpSpPr>
+      <p:sp>
+        <p:nvSpPr>
+          <p:cNvPr id="293" name="Google Shape;293;p45"/>
+          <p:cNvSpPr txBox="1"/>
           <p:nvPr>
             <p:ph type="title"/>
           </p:nvPr>
         </p:nvSpPr>
-        <p:spPr/>
-        <p:txBody>
-          <a:bodyPr/>
-          <a:lstStyle/>
-          <a:p>
-            <a:pPr indent="0" lvl="0" marL="0" rtl="0" algn="l">
-              <a:spcBef>
-                <a:spcPts val="0"/>
-              </a:spcBef>
-              <a:spcAft>
-                <a:spcPts val="0"/>
-              </a:spcAft>
-              <a:buNone/>
-            </a:pPr>
-            <a:r>
-              <a:rPr lang="en"/>
-              <a:t>Scatter and Chase</a:t>
-            </a:r>
-            <a:endParaRPr/>
-          </a:p>
-        </p:txBody>
-      </p:sp>
-      <p:pic>
-        <p:nvPicPr>
-          <p:cNvPr id="3" name="Picture 2" descr="schedule.png"/>
-          <p:cNvPicPr>
-            <a:picLocks noChangeAspect="1"/>
-          </p:cNvPicPr>
-          <p:nvPr/>
-        </p:nvPicPr>
-        <p:blipFill>
-          <a:blip r:embed="rId2"/>
-          <a:stretch>
-            <a:fillRect/>
-          </a:stretch>
-        </p:blipFill>
         <p:spPr>
           <a:xfrm>
-            <a:off x="320039" y="1051560"/>
-            <a:ext cx="8503920" cy="2598420"/>
+            <a:off x="311700" y="195615"/>
+            <a:ext cx="8520600" cy="572700"/>
           </a:xfrm>
           <a:prstGeom prst="rect">
             <a:avLst/>
           </a:prstGeom>
         </p:spPr>
-      </p:pic>
+        <p:txBody>
+          <a:bodyPr anchorCtr="0" anchor="t" bIns="91425" lIns="91425" spcFirstLastPara="1" rIns="91425" wrap="square" tIns="91425">
+            <a:normAutofit fontScale="90000"/>
+          </a:bodyPr>
+          <a:lstStyle/>
+          <a:p>
+            <a:pPr indent="0" lvl="0" marL="0" rtl="0" algn="l">
+              <a:spcBef>
+                <a:spcPts val="0"/>
+              </a:spcBef>
+              <a:spcAft>
+                <a:spcPts val="0"/>
+              </a:spcAft>
+              <a:buNone/>
+            </a:pPr>
+            <a:r>
+              <a:rPr lang="en">
+                <a:solidFill>
+                  <a:schemeClr val="accent5"/>
+                </a:solidFill>
+              </a:rPr>
+              <a:t>Apply It to Your Project</a:t>
+            </a:r>
+            <a:endParaRPr>
+              <a:solidFill>
+                <a:schemeClr val="accent5"/>
+              </a:solidFill>
+            </a:endParaRPr>
+          </a:p>
+        </p:txBody>
+      </p:sp>
+      <p:sp>
+        <p:nvSpPr>
+          <p:cNvPr id="294" name="Google Shape;294;p45"/>
+          <p:cNvSpPr txBox="1"/>
+          <p:nvPr>
+            <p:ph idx="1" type="body"/>
+          </p:nvPr>
+        </p:nvSpPr>
+        <p:spPr>
+          <a:xfrm>
+            <a:off x="311700" y="885950"/>
+            <a:ext cx="8520600" cy="4023300"/>
+          </a:xfrm>
+          <a:prstGeom prst="rect">
+            <a:avLst/>
+          </a:prstGeom>
+        </p:spPr>
+        <p:txBody>
+          <a:bodyPr anchorCtr="0" anchor="t" bIns="91425" lIns="91425" spcFirstLastPara="1" rIns="91425" wrap="square" tIns="91425">
+            <a:normAutofit/>
+          </a:bodyPr>
+          <a:lstStyle/>
+          <a:p>
+            <a:pPr indent="-330200" lvl="0" marL="457200" rtl="0" algn="l">
+              <a:spcBef>
+                <a:spcPts val="0"/>
+              </a:spcBef>
+              <a:spcAft>
+                <a:spcPts val="0"/>
+              </a:spcAft>
+              <a:buSzPts val="1600"/>
+              <a:buChar char="●"/>
+            </a:pPr>
+            <a:r>
+              <a:rPr lang="en"/>
+              <a:t>Which objects in your game have modes?</a:t>
+            </a:r>
+            <a:endParaRPr/>
+          </a:p>
+          <a:p>
+            <a:pPr indent="-317500" lvl="1" marL="914400" rtl="0" algn="l">
+              <a:spcBef>
+                <a:spcPts val="0"/>
+              </a:spcBef>
+              <a:spcAft>
+                <a:spcPts val="0"/>
+              </a:spcAft>
+              <a:buSzPts val="1400"/>
+              <a:buChar char="○"/>
+            </a:pPr>
+            <a:r>
+              <a:rPr lang="en"/>
+              <a:t>Flags, an enum, or state objects?</a:t>
+            </a:r>
+            <a:endParaRPr/>
+          </a:p>
+          <a:p>
+            <a:pPr indent="-330200" lvl="0" marL="457200" rtl="0" algn="l">
+              <a:spcBef>
+                <a:spcPts val="0"/>
+              </a:spcBef>
+              <a:spcAft>
+                <a:spcPts val="0"/>
+              </a:spcAft>
+              <a:buSzPts val="1600"/>
+              <a:buChar char="●"/>
+            </a:pPr>
+            <a:r>
+              <a:rPr lang="en"/>
+              <a:t>Where do you switch over a mode in more than one method?</a:t>
+            </a:r>
+            <a:endParaRPr/>
+          </a:p>
+          <a:p>
+            <a:pPr indent="-330200" lvl="0" marL="457200" rtl="0" algn="l">
+              <a:spcBef>
+                <a:spcPts val="0"/>
+              </a:spcBef>
+              <a:spcAft>
+                <a:spcPts val="0"/>
+              </a:spcAft>
+              <a:buSzPts val="1600"/>
+              <a:buChar char="●"/>
+            </a:pPr>
+            <a:r>
+              <a:rPr lang="en"/>
+              <a:t>A behaviour that differs per object, but never changes for one object?</a:t>
+            </a:r>
+            <a:endParaRPr/>
+          </a:p>
+          <a:p>
+            <a:pPr indent="-317500" lvl="1" marL="914400" rtl="0" algn="l">
+              <a:spcBef>
+                <a:spcPts val="0"/>
+              </a:spcBef>
+              <a:spcAft>
+                <a:spcPts val="0"/>
+              </a:spcAft>
+              <a:buSzPts val="1400"/>
+              <a:buChar char="○"/>
+            </a:pPr>
+            <a:r>
+              <a:rPr lang="en"/>
+              <a:t>That’s a strategy</a:t>
+            </a:r>
+            <a:endParaRPr/>
+          </a:p>
+        </p:txBody>
+      </p:sp>
     </p:spTree>
   </p:cSld>
   <p:clrMapOvr>
     <a:masterClrMapping/>
   </p:clrMapOvr>
+  <p:timing>
+    <p:tnLst>
+      <p:par>
+        <p:cTn dur="indefinite" nodeType="tmRoot" restart="never">
+          <p:childTnLst>
+            <p:seq concurrent="1" nextAc="seek">
+              <p:cTn dur="indefinite" id="2" nodeType="mainSeq">
+                <p:childTnLst>
+                  <p:par>
+                    <p:cTn fill="hold">
+                      <p:stCondLst>
+                        <p:cond delay="indefinite"/>
+                      </p:stCondLst>
+                      <p:childTnLst>
+                        <p:par>
+                          <p:cTn fill="hold">
+                            <p:stCondLst>
+                              <p:cond delay="0"/>
+                            </p:stCondLst>
+                            <p:childTnLst>
+                              <p:par>
+                                <p:cTn fill="hold" nodeType="clickEffect" presetClass="entr" presetID="1" presetSubtype="0">
+                                  <p:stCondLst>
+                                    <p:cond delay="0"/>
+                                  </p:stCondLst>
+                                  <p:childTnLst>
+                                    <p:set>
+                                      <p:cBhvr>
+                                        <p:cTn dur="1" fill="hold">
+                                          <p:stCondLst>
+                                            <p:cond delay="0"/>
+                                          </p:stCondLst>
+                                        </p:cTn>
+                                        <p:tgtEl>
+                                          <p:spTgt spid="294">
+                                            <p:txEl>
+                                              <p:pRg end="0" st="0"/>
+                                            </p:txEl>
+                                          </p:spTgt>
+                                        </p:tgtEl>
+                                        <p:attrNameLst>
+                                          <p:attrName>style.visibility</p:attrName>
+                                        </p:attrNameLst>
+                                      </p:cBhvr>
+                                      <p:to>
+                                        <p:strVal val="visible"/>
+                                      </p:to>
+                                    </p:set>
+                                  </p:childTnLst>
+                                </p:cTn>
+                              </p:par>
+                            </p:childTnLst>
+                          </p:cTn>
+                        </p:par>
+                      </p:childTnLst>
+                    </p:cTn>
+                  </p:par>
+                  <p:par>
+                    <p:cTn fill="hold">
+                      <p:stCondLst>
+                        <p:cond delay="indefinite"/>
+                      </p:stCondLst>
+                      <p:childTnLst>
+                        <p:par>
+                          <p:cTn fill="hold">
+                            <p:stCondLst>
+                              <p:cond delay="0"/>
+                            </p:stCondLst>
+                            <p:childTnLst>
+                              <p:par>
+                                <p:cTn fill="hold" nodeType="clickEffect" presetClass="entr" presetID="1" presetSubtype="0">
+                                  <p:stCondLst>
+                                    <p:cond delay="0"/>
+                                  </p:stCondLst>
+                                  <p:childTnLst>
+                                    <p:set>
+                                      <p:cBhvr>
+                                        <p:cTn dur="1" fill="hold">
+                                          <p:stCondLst>
+                                            <p:cond delay="0"/>
+                                          </p:stCondLst>
+                                        </p:cTn>
+                                        <p:tgtEl>
+                                          <p:spTgt spid="294">
+                                            <p:txEl>
+                                              <p:pRg end="1" st="1"/>
+                                            </p:txEl>
+                                          </p:spTgt>
+                                        </p:tgtEl>
+                                        <p:attrNameLst>
+                                          <p:attrName>style.visibility</p:attrName>
+                                        </p:attrNameLst>
+                                      </p:cBhvr>
+                                      <p:to>
+                                        <p:strVal val="visible"/>
+                                      </p:to>
+                                    </p:set>
+                                  </p:childTnLst>
+                                </p:cTn>
+                              </p:par>
+                            </p:childTnLst>
+                          </p:cTn>
+                        </p:par>
+                      </p:childTnLst>
+                    </p:cTn>
+                  </p:par>
+                  <p:par>
+                    <p:cTn fill="hold">
+                      <p:stCondLst>
+                        <p:cond delay="indefinite"/>
+                      </p:stCondLst>
+                      <p:childTnLst>
+                        <p:par>
+                          <p:cTn fill="hold">
+                            <p:stCondLst>
+                              <p:cond delay="0"/>
+                            </p:stCondLst>
+                            <p:childTnLst>
+                              <p:par>
+                                <p:cTn fill="hold" nodeType="clickEffect" presetClass="entr" presetID="1" presetSubtype="0">
+                                  <p:stCondLst>
+                                    <p:cond delay="0"/>
+                                  </p:stCondLst>
+                                  <p:childTnLst>
+                                    <p:set>
+                                      <p:cBhvr>
+                                        <p:cTn dur="1" fill="hold">
+                                          <p:stCondLst>
+                                            <p:cond delay="0"/>
+                                          </p:stCondLst>
+                                        </p:cTn>
+                                        <p:tgtEl>
+                                          <p:spTgt spid="294">
+                                            <p:txEl>
+                                              <p:pRg end="2" st="2"/>
+                                            </p:txEl>
+                                          </p:spTgt>
+                                        </p:tgtEl>
+                                        <p:attrNameLst>
+                                          <p:attrName>style.visibility</p:attrName>
+                                        </p:attrNameLst>
+                                      </p:cBhvr>
+                                      <p:to>
+                                        <p:strVal val="visible"/>
+                                      </p:to>
+                                    </p:set>
+                                  </p:childTnLst>
+                                </p:cTn>
+                              </p:par>
+                            </p:childTnLst>
+                          </p:cTn>
+                        </p:par>
+                      </p:childTnLst>
+                    </p:cTn>
+                  </p:par>
+                  <p:par>
+                    <p:cTn fill="hold">
+                      <p:stCondLst>
+                        <p:cond delay="indefinite"/>
+                      </p:stCondLst>
+                      <p:childTnLst>
+                        <p:par>
+                          <p:cTn fill="hold">
+                            <p:stCondLst>
+                              <p:cond delay="0"/>
+                            </p:stCondLst>
+                            <p:childTnLst>
+                              <p:par>
+                                <p:cTn fill="hold" nodeType="clickEffect" presetClass="entr" presetID="1" presetSubtype="0">
+                                  <p:stCondLst>
+                                    <p:cond delay="0"/>
+                                  </p:stCondLst>
+                                  <p:childTnLst>
+                                    <p:set>
+                                      <p:cBhvr>
+                                        <p:cTn dur="1" fill="hold">
+                                          <p:stCondLst>
+                                            <p:cond delay="0"/>
+                                          </p:stCondLst>
+                                        </p:cTn>
+                                        <p:tgtEl>
+                                          <p:spTgt spid="294">
+                                            <p:txEl>
+                                              <p:pRg end="3" st="3"/>
+                                            </p:txEl>
+                                          </p:spTgt>
+                                        </p:tgtEl>
+                                        <p:attrNameLst>
+                                          <p:attrName>style.visibility</p:attrName>
+                                        </p:attrNameLst>
+                                      </p:cBhvr>
+                                      <p:to>
+                                        <p:strVal val="visible"/>
+                                      </p:to>
+                                    </p:set>
+                                  </p:childTnLst>
+                                </p:cTn>
+                              </p:par>
+                            </p:childTnLst>
+                          </p:cTn>
+                        </p:par>
+                      </p:childTnLst>
+                    </p:cTn>
+                  </p:par>
+                  <p:par>
+                    <p:cTn fill="hold">
+                      <p:stCondLst>
+                        <p:cond delay="indefinite"/>
+                      </p:stCondLst>
+                      <p:childTnLst>
+                        <p:par>
+                          <p:cTn fill="hold">
+                            <p:stCondLst>
+                              <p:cond delay="0"/>
+                            </p:stCondLst>
+                            <p:childTnLst>
+                              <p:par>
+                                <p:cTn fill="hold" nodeType="clickEffect" presetClass="entr" presetID="1" presetSubtype="0">
+                                  <p:stCondLst>
+                                    <p:cond delay="0"/>
+                                  </p:stCondLst>
+                                  <p:childTnLst>
+                                    <p:set>
+                                      <p:cBhvr>
+                                        <p:cTn dur="1" fill="hold">
+                                          <p:stCondLst>
+                                            <p:cond delay="0"/>
+                                          </p:stCondLst>
+                                        </p:cTn>
+                                        <p:tgtEl>
+                                          <p:spTgt spid="294">
+                                            <p:txEl>
+                                              <p:pRg end="4" st="4"/>
+                                            </p:txEl>
+                                          </p:spTgt>
+                                        </p:tgtEl>
+                                        <p:attrNameLst>
+                                          <p:attrName>style.visibility</p:attrName>
+                                        </p:attrNameLst>
+                                      </p:cBhvr>
+                                      <p:to>
+                                        <p:strVal val="visible"/>
+                                      </p:to>
+                                    </p:set>
+                                  </p:childTnLst>
+                                </p:cTn>
+                              </p:par>
+                            </p:childTnLst>
+                          </p:cTn>
+                        </p:par>
+                      </p:childTnLst>
+                    </p:cTn>
+                  </p:par>
+                  <p:par>
+                    <p:cTn fill="hold">
+                      <p:stCondLst>
+                        <p:cond delay="indefinite"/>
+                      </p:stCondLst>
+                      <p:childTnLst>
+                        <p:par>
+                          <p:cTn fill="hold">
+                            <p:stCondLst>
+                              <p:cond delay="0"/>
+                            </p:stCondLst>
+                            <p:childTnLst>
+                              <p:par>
+                                <p:cTn fill="hold" nodeType="clickEffect" presetClass="entr" presetID="1" presetSubtype="0">
+                                  <p:stCondLst>
+                                    <p:cond delay="0"/>
+                                  </p:stCondLst>
+                                  <p:childTnLst>
+                                    <p:set>
+                                      <p:cBhvr>
+                                        <p:cTn dur="1" fill="hold">
+                                          <p:stCondLst>
+                                            <p:cond delay="0"/>
+                                          </p:stCondLst>
+                                        </p:cTn>
+                                        <p:tgtEl>
+                                          <p:spTgt spid="294">
+                                            <p:txEl>
+                                              <p:pRg end="5" st="5"/>
+                                            </p:txEl>
+                                          </p:spTgt>
+                                        </p:tgtEl>
+                                        <p:attrNameLst>
+                                          <p:attrName>style.visibility</p:attrName>
+                                        </p:attrNameLst>
+                                      </p:cBhvr>
+                                      <p:to>
+                                        <p:strVal val="visible"/>
+                                      </p:to>
+                                    </p:set>
+                                  </p:childTnLst>
+                                </p:cTn>
+                              </p:par>
+                            </p:childTnLst>
+                          </p:cTn>
+                        </p:par>
+                      </p:childTnLst>
+                    </p:cTn>
+                  </p:par>
+                  <p:par>
+                    <p:cTn fill="hold">
+                      <p:stCondLst>
+                        <p:cond delay="indefinite"/>
+                      </p:stCondLst>
+                      <p:childTnLst>
+                        <p:par>
+                          <p:cTn fill="hold">
+                            <p:stCondLst>
+                              <p:cond delay="0"/>
+                            </p:stCondLst>
+                            <p:childTnLst>
+                              <p:par>
+                                <p:cTn fill="hold" nodeType="clickEffect" presetClass="entr" presetID="1" presetSubtype="0">
+                                  <p:stCondLst>
+                                    <p:cond delay="0"/>
+                                  </p:stCondLst>
+                                  <p:childTnLst>
+                                    <p:set>
+                                      <p:cBhvr>
+                                        <p:cTn dur="1" fill="hold">
+                                          <p:stCondLst>
+                                            <p:cond delay="0"/>
+                                          </p:stCondLst>
+                                        </p:cTn>
+                                        <p:tgtEl>
+                                          <p:spTgt spid="294">
+                                            <p:txEl>
+                                              <p:pRg end="6" st="6"/>
+                                            </p:txEl>
+                                          </p:spTgt>
+                                        </p:tgtEl>
+                                        <p:attrNameLst>
+                                          <p:attrName>style.visibility</p:attrName>
+                                        </p:attrNameLst>
+                                      </p:cBhvr>
+                                      <p:to>
+                                        <p:strVal val="visible"/>
+                                      </p:to>
+                                    </p:set>
+                                  </p:childTnLst>
+                                </p:cTn>
+                              </p:par>
+                            </p:childTnLst>
+                          </p:cTn>
+                        </p:par>
+                      </p:childTnLst>
+                    </p:cTn>
+                  </p:par>
+                  <p:par>
+                    <p:cTn fill="hold">
+                      <p:stCondLst>
+                        <p:cond delay="indefinite"/>
+                      </p:stCondLst>
+                      <p:childTnLst>
+                        <p:par>
+                          <p:cTn fill="hold">
+                            <p:stCondLst>
+                              <p:cond delay="0"/>
+                            </p:stCondLst>
+                            <p:childTnLst>
+                              <p:par>
+                                <p:cTn fill="hold" nodeType="clickEffect" presetClass="entr" presetID="1" presetSubtype="0">
+                                  <p:stCondLst>
+                                    <p:cond delay="0"/>
+                                  </p:stCondLst>
+                                  <p:childTnLst>
+                                    <p:set>
+                                      <p:cBhvr>
+                                        <p:cTn dur="1" fill="hold">
+                                          <p:stCondLst>
+                                            <p:cond delay="0"/>
+                                          </p:stCondLst>
+                                        </p:cTn>
+                                        <p:tgtEl>
+                                          <p:spTgt spid="294">
+                                            <p:txEl>
+                                              <p:pRg end="7" st="7"/>
+                                            </p:txEl>
+                                          </p:spTgt>
+                                        </p:tgtEl>
+                                        <p:attrNameLst>
+                                          <p:attrName>style.visibility</p:attrName>
+                                        </p:attrNameLst>
+                                      </p:cBhvr>
+                                      <p:to>
+                                        <p:strVal val="visible"/>
+                                      </p:to>
+                                    </p:set>
+                                  </p:childTnLst>
+                                </p:cTn>
+                              </p:par>
+                            </p:childTnLst>
+                          </p:cTn>
+                        </p:par>
+                      </p:childTnLst>
+                    </p:cTn>
+                  </p:par>
+                  <p:par>
+                    <p:cTn fill="hold">
+                      <p:stCondLst>
+                        <p:cond delay="indefinite"/>
+                      </p:stCondLst>
+                      <p:childTnLst>
+                        <p:par>
+                          <p:cTn fill="hold">
+                            <p:stCondLst>
+                              <p:cond delay="0"/>
+                            </p:stCondLst>
+                            <p:childTnLst>
+                              <p:par>
+                                <p:cTn fill="hold" nodeType="clickEffect" presetClass="entr" presetID="1" presetSubtype="0">
+                                  <p:stCondLst>
+                                    <p:cond delay="0"/>
+                                  </p:stCondLst>
+                                  <p:childTnLst>
+                                    <p:set>
+                                      <p:cBhvr>
+                                        <p:cTn dur="1" fill="hold">
+                                          <p:stCondLst>
+                                            <p:cond delay="0"/>
+                                          </p:stCondLst>
+                                        </p:cTn>
+                                        <p:tgtEl>
+                                          <p:spTgt spid="294">
+                                            <p:txEl>
+                                              <p:pRg end="8" st="8"/>
+                                            </p:txEl>
+                                          </p:spTgt>
+                                        </p:tgtEl>
+                                        <p:attrNameLst>
+                                          <p:attrName>style.visibility</p:attrName>
+                                        </p:attrNameLst>
+                                      </p:cBhvr>
+                                      <p:to>
+                                        <p:strVal val="visible"/>
+                                      </p:to>
+                                    </p:set>
+                                  </p:childTnLst>
+                                </p:cTn>
+                              </p:par>
+                            </p:childTnLst>
+                          </p:cTn>
+                        </p:par>
+                      </p:childTnLst>
+                    </p:cTn>
+                  </p:par>
+                  <p:par>
+                    <p:cTn fill="hold">
+                      <p:stCondLst>
+                        <p:cond delay="indefinite"/>
+                      </p:stCondLst>
+                      <p:childTnLst>
+                        <p:par>
+                          <p:cTn fill="hold">
+                            <p:stCondLst>
+                              <p:cond delay="0"/>
+                            </p:stCondLst>
+                            <p:childTnLst>
+                              <p:par>
+                                <p:cTn fill="hold" nodeType="clickEffect" presetClass="entr" presetID="1" presetSubtype="0">
+                                  <p:stCondLst>
+                                    <p:cond delay="0"/>
+                                  </p:stCondLst>
+                                  <p:childTnLst>
+                                    <p:set>
+                                      <p:cBhvr>
+                                        <p:cTn dur="1" fill="hold">
+                                          <p:stCondLst>
+                                            <p:cond delay="0"/>
+                                          </p:stCondLst>
+                                        </p:cTn>
+                                        <p:tgtEl>
+                                          <p:spTgt spid="294">
+                                            <p:txEl>
+                                              <p:pRg end="9" st="9"/>
+                                            </p:txEl>
+                                          </p:spTgt>
+                                        </p:tgtEl>
+                                        <p:attrNameLst>
+                                          <p:attrName>style.visibility</p:attrName>
+                                        </p:attrNameLst>
+                                      </p:cBhvr>
+                                      <p:to>
+                                        <p:strVal val="visible"/>
+                                      </p:to>
+                                    </p:set>
+                                  </p:childTnLst>
+                                </p:cTn>
+                              </p:par>
+                            </p:childTnLst>
+                          </p:cTn>
+                        </p:par>
+                      </p:childTnLst>
+                    </p:cTn>
+                  </p:par>
+                  <p:par>
+                    <p:cTn fill="hold">
+                      <p:stCondLst>
+                        <p:cond delay="indefinite"/>
+                      </p:stCondLst>
+                      <p:childTnLst>
+                        <p:par>
+                          <p:cTn fill="hold">
+                            <p:stCondLst>
+                              <p:cond delay="0"/>
+                            </p:stCondLst>
+                            <p:childTnLst>
+                              <p:par>
+                                <p:cTn fill="hold" nodeType="clickEffect" presetClass="entr" presetID="1" presetSubtype="0">
+                                  <p:stCondLst>
+                                    <p:cond delay="0"/>
+                                  </p:stCondLst>
+                                  <p:childTnLst>
+                                    <p:set>
+                                      <p:cBhvr>
+                                        <p:cTn dur="1" fill="hold">
+                                          <p:stCondLst>
+                                            <p:cond delay="0"/>
+                                          </p:stCondLst>
+                                        </p:cTn>
+                                        <p:tgtEl>
+                                          <p:spTgt spid="294">
+                                            <p:txEl>
+                                              <p:pRg end="10" st="10"/>
+                                            </p:txEl>
+                                          </p:spTgt>
+                                        </p:tgtEl>
+                                        <p:attrNameLst>
+                                          <p:attrName>style.visibility</p:attrName>
+                                        </p:attrNameLst>
+                                      </p:cBhvr>
+                                      <p:to>
+                                        <p:strVal val="visible"/>
+                                      </p:to>
+                                    </p:set>
+                                  </p:childTnLst>
+                                </p:cTn>
+                              </p:par>
+                            </p:childTnLst>
+                          </p:cTn>
+                        </p:par>
+                      </p:childTnLst>
+                    </p:cTn>
+                  </p:par>
+                  <p:par>
+                    <p:cTn fill="hold">
+                      <p:stCondLst>
+                        <p:cond delay="indefinite"/>
+                      </p:stCondLst>
+                      <p:childTnLst>
+                        <p:par>
+                          <p:cTn fill="hold">
+                            <p:stCondLst>
+                              <p:cond delay="0"/>
+                            </p:stCondLst>
+                            <p:childTnLst>
+                              <p:par>
+                                <p:cTn fill="hold" nodeType="clickEffect" presetClass="entr" presetID="1" presetSubtype="0">
+                                  <p:stCondLst>
+                                    <p:cond delay="0"/>
+                                  </p:stCondLst>
+                                  <p:childTnLst>
+                                    <p:set>
+                                      <p:cBhvr>
+                                        <p:cTn dur="1" fill="hold">
+                                          <p:stCondLst>
+                                            <p:cond delay="0"/>
+                                          </p:stCondLst>
+                                        </p:cTn>
+                                        <p:tgtEl>
+                                          <p:spTgt spid="294">
+                                            <p:txEl>
+                                              <p:pRg end="11" st="11"/>
+                                            </p:txEl>
+                                          </p:spTgt>
+                                        </p:tgtEl>
+                                        <p:attrNameLst>
+                                          <p:attrName>style.visibility</p:attrName>
+                                        </p:attrNameLst>
+                                      </p:cBhvr>
+                                      <p:to>
+                                        <p:strVal val="visible"/>
+                                      </p:to>
+                                    </p:set>
+                                  </p:childTnLst>
+                                </p:cTn>
+                              </p:par>
+                            </p:childTnLst>
+                          </p:cTn>
+                        </p:par>
+                      </p:childTnLst>
+                    </p:cTn>
+                  </p:par>
+                  <p:par>
+                    <p:cTn fill="hold">
+                      <p:stCondLst>
+                        <p:cond delay="indefinite"/>
+                      </p:stCondLst>
+                      <p:childTnLst>
+                        <p:par>
+                          <p:cTn fill="hold">
+                            <p:stCondLst>
+                              <p:cond delay="0"/>
+                            </p:stCondLst>
+                            <p:childTnLst>
+                              <p:par>
+                                <p:cTn fill="hold" nodeType="clickEffect" presetClass="entr" presetID="1" presetSubtype="0">
+                                  <p:stCondLst>
+                                    <p:cond delay="0"/>
+                                  </p:stCondLst>
+                                  <p:childTnLst>
+                                    <p:set>
+                                      <p:cBhvr>
+                                        <p:cTn dur="1" fill="hold">
+                                          <p:stCondLst>
+                                            <p:cond delay="0"/>
+                                          </p:stCondLst>
+                                        </p:cTn>
+                                        <p:tgtEl>
+                                          <p:spTgt spid="294">
+                                            <p:txEl>
+                                              <p:pRg end="12" st="12"/>
+                                            </p:txEl>
+                                          </p:spTgt>
+                                        </p:tgtEl>
+                                        <p:attrNameLst>
+                                          <p:attrName>style.visibility</p:attrName>
+                                        </p:attrNameLst>
+                                      </p:cBhvr>
+                                      <p:to>
+                                        <p:strVal val="visible"/>
+                                      </p:to>
+                                    </p:set>
+                                  </p:childTnLst>
+                                </p:cTn>
+                              </p:par>
+                            </p:childTnLst>
+                          </p:cTn>
+                        </p:par>
+                      </p:childTnLst>
+                    </p:cTn>
+                  </p:par>
+                </p:childTnLst>
+              </p:cTn>
+              <p:prevCondLst>
+                <p:cond evt="onPrev">
+                  <p:tgtEl>
+                    <p:sldTgt/>
+                  </p:tgtEl>
+                </p:cond>
+              </p:prevCondLst>
+              <p:nextCondLst>
+                <p:cond evt="onNext">
+                  <p:tgtEl>
+                    <p:sldTgt/>
+                  </p:tgtEl>
+                </p:cond>
+              </p:nextCondLst>
+            </p:seq>
+          </p:childTnLst>
+        </p:cTn>
+      </p:par>
+    </p:tnLst>
+  </p:timing>
 </p:sld>
 </file>
 

--- a/slides/05 Pac-Man.pptx
+++ b/slides/05 Pac-Man.pptx
@@ -40,7 +40,9 @@
     <p:sldId id="325" r:id="rId29"/>
     <p:sldId id="312" r:id="rId71"/>
     <p:sldId id="313" r:id="rId72"/>
+    <p:sldId id="328" r:id="rId28"/>
     <p:sldId id="280" r:id="rId30"/>
+    <p:sldId id="329" r:id="rId27"/>
     <p:sldId id="292" r:id="rId42"/>
     <p:sldId id="293" r:id="rId52"/>
     <p:sldId id="314" r:id="rId41"/>
@@ -2923,6 +2925,127 @@
           <a:p>
             <a:r>
               <a:t>The fifth ghost (purple) and a cherry are drawn in sprites.png but not in the XML: describing them is part of the exercise.</a:t>
+            </a:r>
+          </a:p>
+        </p:txBody>
+      </p:sp>
+    </p:spTree>
+  </p:cSld>
+  <p:clrMapOvr>
+    <a:masterClrMapping/>
+  </p:clrMapOvr>
+</p:notes>
+</file>
+
+<file path=ppt/notesSlides/notesSlide38.xml><?xml version="1.0" encoding="utf-8"?>
+<p:notes xmlns:a="http://schemas.openxmlformats.org/drawingml/2006/main" xmlns:p="http://schemas.openxmlformats.org/presentationml/2006/main" xmlns:r="http://schemas.openxmlformats.org/officeDocument/2006/relationships">
+  <p:cSld>
+    <p:spTree>
+      <p:nvGrpSpPr>
+        <p:cNvPr id="1" name=""/>
+        <p:cNvGrpSpPr/>
+        <p:nvPr/>
+      </p:nvGrpSpPr>
+      <p:grpSpPr>
+        <a:xfrm>
+          <a:off x="0" y="0"/>
+          <a:ext cx="0" cy="0"/>
+          <a:chOff x="0" y="0"/>
+          <a:chExt cx="0" cy="0"/>
+        </a:xfrm>
+      </p:grpSpPr>
+      <p:sp>
+        <p:nvSpPr>
+          <p:cNvPr id="2" name="Slide Image Placeholder 1"/>
+          <p:cNvSpPr>
+            <a:spLocks noGrp="1"/>
+          </p:cNvSpPr>
+          <p:nvPr>
+            <p:ph type="sldImg" idx="2"/>
+          </p:nvPr>
+        </p:nvSpPr>
+        <p:spPr/>
+      </p:sp>
+      <p:sp>
+        <p:nvSpPr>
+          <p:cNvPr id="3" name="Notes Placeholder 2"/>
+          <p:cNvSpPr>
+            <a:spLocks noGrp="1"/>
+          </p:cNvSpPr>
+          <p:nvPr>
+            <p:ph type="body" idx="1"/>
+          </p:nvPr>
+        </p:nvSpPr>
+        <p:spPr/>
+        <p:txBody>
+          <a:bodyPr/>
+          <a:lstStyle/>
+          <a:p>
+            <a:r>
+              <a:t>Who holds what in the finished Pac-Man. World and everything under it are the rules; the three views draw them.</a:t>
+            </a:r>
+          </a:p>
+          <a:p>
+            <a:r>
+              <a:t>Point at Ghost: one state at a time, chosen by the states themselves, and two strategies chosen once by World.</a:t>
+            </a:r>
+          </a:p>
+        </p:txBody>
+      </p:sp>
+    </p:spTree>
+  </p:cSld>
+  <p:clrMapOvr>
+    <a:masterClrMapping/>
+  </p:clrMapOvr>
+</p:notes>
+</file>
+
+<file path=ppt/notesSlides/notesSlide39.xml><?xml version="1.0" encoding="utf-8"?>
+<p:notes xmlns:a="http://schemas.openxmlformats.org/drawingml/2006/main" xmlns:p="http://schemas.openxmlformats.org/presentationml/2006/main" xmlns:r="http://schemas.openxmlformats.org/officeDocument/2006/relationships">
+  <p:cSld>
+    <p:spTree>
+      <p:nvGrpSpPr>
+        <p:cNvPr id="1" name=""/>
+        <p:cNvGrpSpPr/>
+        <p:nvPr/>
+      </p:nvGrpSpPr>
+      <p:grpSpPr>
+        <a:xfrm>
+          <a:off x="0" y="0"/>
+          <a:ext cx="0" cy="0"/>
+          <a:chOff x="0" y="0"/>
+          <a:chExt cx="0" cy="0"/>
+        </a:xfrm>
+      </p:grpSpPr>
+      <p:sp>
+        <p:nvSpPr>
+          <p:cNvPr id="2" name="Slide Image Placeholder 1"/>
+          <p:cNvSpPr>
+            <a:spLocks noGrp="1"/>
+          </p:cNvSpPr>
+          <p:nvPr>
+            <p:ph type="sldImg" idx="2"/>
+          </p:nvPr>
+        </p:nvSpPr>
+        <p:spPr/>
+      </p:sp>
+      <p:sp>
+        <p:nvSpPr>
+          <p:cNvPr id="3" name="Notes Placeholder 2"/>
+          <p:cNvSpPr>
+            <a:spLocks noGrp="1"/>
+          </p:cNvSpPr>
+          <p:nvPr>
+            <p:ph type="body" idx="1"/>
+          </p:nvPr>
+        </p:nvSpPr>
+        <p:spPr/>
+        <p:txBody>
+          <a:bodyPr/>
+          <a:lstStyle/>
+          <a:p>
+            <a:r>
+              <a:t>The session in one slide. Read each concern aloud and let the class give the answer before pointing at it.</a:t>
             </a:r>
           </a:p>
         </p:txBody>
@@ -21981,6 +22104,1448 @@
 </p:sld>
 </file>
 
+<file path=ppt/slides/slide38.xml><?xml version="1.0" encoding="utf-8"?>
+<p:sld xmlns:a="http://schemas.openxmlformats.org/drawingml/2006/main" xmlns:p="http://schemas.openxmlformats.org/presentationml/2006/main" xmlns:r="http://schemas.openxmlformats.org/officeDocument/2006/relationships">
+  <p:cSld>
+    <p:spTree>
+      <p:nvGrpSpPr>
+        <p:cNvPr id="1" name=""/>
+        <p:cNvGrpSpPr/>
+        <p:nvPr/>
+      </p:nvGrpSpPr>
+      <p:grpSpPr/>
+      <p:sp>
+        <p:nvSpPr>
+          <p:cNvPr id="2" name="Title 1"/>
+          <p:cNvSpPr>
+            <a:spLocks noGrp="1"/>
+          </p:cNvSpPr>
+          <p:nvPr>
+            <p:ph type="title"/>
+          </p:nvPr>
+        </p:nvSpPr>
+        <p:spPr/>
+        <p:txBody>
+          <a:bodyPr/>
+          <a:lstStyle/>
+          <a:p>
+            <a:pPr indent="0" lvl="0" marL="0" rtl="0" algn="l">
+              <a:spcBef>
+                <a:spcPts val="0"/>
+              </a:spcBef>
+              <a:spcAft>
+                <a:spcPts val="0"/>
+              </a:spcAft>
+              <a:buNone/>
+            </a:pPr>
+            <a:r>
+              <a:rPr lang="en"/>
+              <a:t>The Whole Game: Who Holds What</a:t>
+            </a:r>
+            <a:endParaRPr/>
+          </a:p>
+        </p:txBody>
+      </p:sp>
+      <p:sp>
+        <p:nvSpPr>
+          <p:cNvPr id="3" name="Text Placeholder 2"/>
+          <p:cNvSpPr>
+            <a:spLocks noGrp="1"/>
+          </p:cNvSpPr>
+          <p:nvPr>
+            <p:ph type="body" idx="1"/>
+          </p:nvPr>
+        </p:nvSpPr>
+        <p:spPr>
+          <a:xfrm>
+            <a:off x="311700" y="885950"/>
+            <a:ext cx="8520600" cy="521208"/>
+          </a:xfrm>
+        </p:spPr>
+        <p:txBody>
+          <a:bodyPr/>
+          <a:lstStyle/>
+          <a:p>
+            <a:pPr indent="-330200" lvl="0" marL="457200" rtl="0" algn="l">
+              <a:spcBef>
+                <a:spcPts val="0"/>
+              </a:spcBef>
+              <a:spcAft>
+                <a:spcPts val="0"/>
+              </a:spcAft>
+              <a:buSzPts val="1600"/>
+              <a:buChar char="●"/>
+            </a:pPr>
+            <a:r>
+              <a:rPr lang="en" b="1"/>
+              <a:t>World holds the rules, and the views draw them.</a:t>
+            </a:r>
+            <a:endParaRPr/>
+          </a:p>
+        </p:txBody>
+      </p:sp>
+      <p:sp>
+        <p:nvSpPr>
+          <p:cNvPr id="4" name="Rounded Rectangle 3"/>
+          <p:cNvSpPr/>
+          <p:nvPr/>
+        </p:nvSpPr>
+        <p:spPr>
+          <a:xfrm>
+            <a:off x="3429000" y="1481328"/>
+            <a:ext cx="2286000" cy="566928"/>
+          </a:xfrm>
+          <a:prstGeom prst="roundRect">
+            <a:avLst>
+              <a:gd name="adj" fmla="val 12000"/>
+            </a:avLst>
+          </a:prstGeom>
+          <a:solidFill>
+            <a:srgbClr val="2E3338"/>
+          </a:solidFill>
+          <a:ln w="25400">
+            <a:solidFill>
+              <a:srgbClr val="D45D35"/>
+            </a:solidFill>
+          </a:ln>
+          <a:effectLst/>
+        </p:spPr>
+        <p:style>
+          <a:lnRef idx="1">
+            <a:schemeClr val="accent1"/>
+          </a:lnRef>
+          <a:fillRef idx="3">
+            <a:schemeClr val="accent1"/>
+          </a:fillRef>
+          <a:effectRef idx="2">
+            <a:schemeClr val="accent1"/>
+          </a:effectRef>
+          <a:fontRef idx="minor">
+            <a:schemeClr val="lt1"/>
+          </a:fontRef>
+        </p:style>
+        <p:txBody>
+          <a:bodyPr rtlCol="0" anchor="ctr" wrap="square" lIns="73152" rIns="73152"/>
+          <a:lstStyle/>
+          <a:p>
+            <a:pPr algn="ctr"/>
+            <a:r>
+              <a:rPr sz="1300" b="1">
+                <a:solidFill>
+                  <a:srgbClr val="DEE2E6"/>
+                </a:solidFill>
+              </a:rPr>
+              <a:t>Game1 : Core</a:t>
+            </a:r>
+          </a:p>
+        </p:txBody>
+      </p:sp>
+      <p:sp>
+        <p:nvSpPr>
+          <p:cNvPr id="5" name="Rounded Rectangle 4"/>
+          <p:cNvSpPr/>
+          <p:nvPr/>
+        </p:nvSpPr>
+        <p:spPr>
+          <a:xfrm>
+            <a:off x="374903" y="2246376"/>
+            <a:ext cx="1307592" cy="566928"/>
+          </a:xfrm>
+          <a:prstGeom prst="roundRect">
+            <a:avLst>
+              <a:gd name="adj" fmla="val 12000"/>
+            </a:avLst>
+          </a:prstGeom>
+          <a:solidFill>
+            <a:srgbClr val="2E3338"/>
+          </a:solidFill>
+          <a:ln>
+            <a:noFill/>
+          </a:ln>
+          <a:effectLst/>
+        </p:spPr>
+        <p:style>
+          <a:lnRef idx="1">
+            <a:schemeClr val="accent1"/>
+          </a:lnRef>
+          <a:fillRef idx="3">
+            <a:schemeClr val="accent1"/>
+          </a:fillRef>
+          <a:effectRef idx="2">
+            <a:schemeClr val="accent1"/>
+          </a:effectRef>
+          <a:fontRef idx="minor">
+            <a:schemeClr val="lt1"/>
+          </a:fontRef>
+        </p:style>
+        <p:txBody>
+          <a:bodyPr rtlCol="0" anchor="ctr" wrap="square" lIns="73152" rIns="73152"/>
+          <a:lstStyle/>
+          <a:p>
+            <a:pPr algn="ctr"/>
+            <a:r>
+              <a:rPr sz="1200" b="1">
+                <a:solidFill>
+                  <a:srgbClr val="DEE2E6"/>
+                </a:solidFill>
+              </a:rPr>
+              <a:t>Game states</a:t>
+            </a:r>
+          </a:p>
+          <a:p>
+            <a:pPr algn="ctr"/>
+            <a:r>
+              <a:rPr sz="1000" b="0">
+                <a:solidFill>
+                  <a:srgbClr val="9AA3AB"/>
+                </a:solidFill>
+              </a:rPr>
+              <a:t>ready, play, dying</a:t>
+            </a:r>
+          </a:p>
+        </p:txBody>
+      </p:sp>
+      <p:cxnSp>
+        <p:nvCxnSpPr>
+          <p:cNvPr id="6" name="Connector 5"/>
+          <p:cNvCxnSpPr/>
+          <p:nvPr/>
+        </p:nvCxnSpPr>
+        <p:spPr>
+          <a:xfrm flipH="1">
+            <a:off x="1028700" y="2066544"/>
+            <a:ext cx="3543300" cy="161544"/>
+          </a:xfrm>
+          <a:prstGeom prst="line">
+            <a:avLst/>
+          </a:prstGeom>
+          <a:ln w="25400">
+            <a:solidFill>
+              <a:srgbClr val="9AA3AB"/>
+            </a:solidFill>
+            <a:tailEnd type="triangle"/>
+          </a:ln>
+        </p:spPr>
+        <p:style>
+          <a:lnRef idx="2">
+            <a:schemeClr val="accent1"/>
+          </a:lnRef>
+          <a:fillRef idx="0">
+            <a:schemeClr val="accent1"/>
+          </a:fillRef>
+          <a:effectRef idx="1">
+            <a:schemeClr val="accent1"/>
+          </a:effectRef>
+          <a:fontRef idx="minor">
+            <a:schemeClr val="tx1"/>
+          </a:fontRef>
+        </p:style>
+      </p:cxnSp>
+      <p:sp>
+        <p:nvSpPr>
+          <p:cNvPr id="7" name="Rounded Rectangle 6"/>
+          <p:cNvSpPr/>
+          <p:nvPr/>
+        </p:nvSpPr>
+        <p:spPr>
+          <a:xfrm>
+            <a:off x="3429000" y="2246376"/>
+            <a:ext cx="2286000" cy="566928"/>
+          </a:xfrm>
+          <a:prstGeom prst="roundRect">
+            <a:avLst>
+              <a:gd name="adj" fmla="val 12000"/>
+            </a:avLst>
+          </a:prstGeom>
+          <a:solidFill>
+            <a:srgbClr val="2E3338"/>
+          </a:solidFill>
+          <a:ln>
+            <a:noFill/>
+          </a:ln>
+          <a:effectLst/>
+        </p:spPr>
+        <p:style>
+          <a:lnRef idx="1">
+            <a:schemeClr val="accent1"/>
+          </a:lnRef>
+          <a:fillRef idx="3">
+            <a:schemeClr val="accent1"/>
+          </a:fillRef>
+          <a:effectRef idx="2">
+            <a:schemeClr val="accent1"/>
+          </a:effectRef>
+          <a:fontRef idx="minor">
+            <a:schemeClr val="lt1"/>
+          </a:fontRef>
+        </p:style>
+        <p:txBody>
+          <a:bodyPr rtlCol="0" anchor="ctr" wrap="square" lIns="73152" rIns="73152"/>
+          <a:lstStyle/>
+          <a:p>
+            <a:pPr algn="ctr"/>
+            <a:r>
+              <a:rPr sz="1300" b="1">
+                <a:solidFill>
+                  <a:srgbClr val="DEE2E6"/>
+                </a:solidFill>
+              </a:rPr>
+              <a:t>World</a:t>
+            </a:r>
+          </a:p>
+          <a:p>
+            <a:pPr algn="ctr"/>
+            <a:r>
+              <a:rPr sz="1100" b="0">
+                <a:solidFill>
+                  <a:srgbClr val="9AA3AB"/>
+                </a:solidFill>
+              </a:rPr>
+              <a:t>the rules</a:t>
+            </a:r>
+          </a:p>
+        </p:txBody>
+      </p:sp>
+      <p:sp>
+        <p:nvSpPr>
+          <p:cNvPr id="8" name="Rounded Rectangle 7"/>
+          <p:cNvSpPr/>
+          <p:nvPr/>
+        </p:nvSpPr>
+        <p:spPr>
+          <a:xfrm>
+            <a:off x="1792223" y="3011424"/>
+            <a:ext cx="1307592" cy="566928"/>
+          </a:xfrm>
+          <a:prstGeom prst="roundRect">
+            <a:avLst>
+              <a:gd name="adj" fmla="val 12000"/>
+            </a:avLst>
+          </a:prstGeom>
+          <a:solidFill>
+            <a:srgbClr val="2E3338"/>
+          </a:solidFill>
+          <a:ln>
+            <a:noFill/>
+          </a:ln>
+          <a:effectLst/>
+        </p:spPr>
+        <p:style>
+          <a:lnRef idx="1">
+            <a:schemeClr val="accent1"/>
+          </a:lnRef>
+          <a:fillRef idx="3">
+            <a:schemeClr val="accent1"/>
+          </a:fillRef>
+          <a:effectRef idx="2">
+            <a:schemeClr val="accent1"/>
+          </a:effectRef>
+          <a:fontRef idx="minor">
+            <a:schemeClr val="lt1"/>
+          </a:fontRef>
+        </p:style>
+        <p:txBody>
+          <a:bodyPr rtlCol="0" anchor="ctr" wrap="square" lIns="73152" rIns="73152"/>
+          <a:lstStyle/>
+          <a:p>
+            <a:pPr algn="ctr"/>
+            <a:r>
+              <a:rPr sz="1200" b="1">
+                <a:solidFill>
+                  <a:srgbClr val="DEE2E6"/>
+                </a:solidFill>
+              </a:rPr>
+              <a:t>Maze, PacMan</a:t>
+            </a:r>
+          </a:p>
+        </p:txBody>
+      </p:sp>
+      <p:cxnSp>
+        <p:nvCxnSpPr>
+          <p:cNvPr id="9" name="Connector 8"/>
+          <p:cNvCxnSpPr/>
+          <p:nvPr/>
+        </p:nvCxnSpPr>
+        <p:spPr>
+          <a:xfrm flipH="1">
+            <a:off x="2446020" y="2831592"/>
+            <a:ext cx="2125980" cy="161544"/>
+          </a:xfrm>
+          <a:prstGeom prst="line">
+            <a:avLst/>
+          </a:prstGeom>
+          <a:ln w="25400">
+            <a:solidFill>
+              <a:srgbClr val="9AA3AB"/>
+            </a:solidFill>
+            <a:tailEnd type="triangle"/>
+          </a:ln>
+        </p:spPr>
+        <p:style>
+          <a:lnRef idx="2">
+            <a:schemeClr val="accent1"/>
+          </a:lnRef>
+          <a:fillRef idx="0">
+            <a:schemeClr val="accent1"/>
+          </a:fillRef>
+          <a:effectRef idx="1">
+            <a:schemeClr val="accent1"/>
+          </a:effectRef>
+          <a:fontRef idx="minor">
+            <a:schemeClr val="tx1"/>
+          </a:fontRef>
+        </p:style>
+      </p:cxnSp>
+      <p:sp>
+        <p:nvSpPr>
+          <p:cNvPr id="10" name="Rounded Rectangle 9"/>
+          <p:cNvSpPr/>
+          <p:nvPr/>
+        </p:nvSpPr>
+        <p:spPr>
+          <a:xfrm>
+            <a:off x="3429000" y="3011424"/>
+            <a:ext cx="2286000" cy="566928"/>
+          </a:xfrm>
+          <a:prstGeom prst="roundRect">
+            <a:avLst>
+              <a:gd name="adj" fmla="val 12000"/>
+            </a:avLst>
+          </a:prstGeom>
+          <a:solidFill>
+            <a:srgbClr val="2E3338"/>
+          </a:solidFill>
+          <a:ln>
+            <a:noFill/>
+          </a:ln>
+          <a:effectLst/>
+        </p:spPr>
+        <p:style>
+          <a:lnRef idx="1">
+            <a:schemeClr val="accent1"/>
+          </a:lnRef>
+          <a:fillRef idx="3">
+            <a:schemeClr val="accent1"/>
+          </a:fillRef>
+          <a:effectRef idx="2">
+            <a:schemeClr val="accent1"/>
+          </a:effectRef>
+          <a:fontRef idx="minor">
+            <a:schemeClr val="lt1"/>
+          </a:fontRef>
+        </p:style>
+        <p:txBody>
+          <a:bodyPr rtlCol="0" anchor="ctr" wrap="square" lIns="73152" rIns="73152"/>
+          <a:lstStyle/>
+          <a:p>
+            <a:pPr algn="ctr"/>
+            <a:r>
+              <a:rPr sz="1300" b="1">
+                <a:solidFill>
+                  <a:srgbClr val="DEE2E6"/>
+                </a:solidFill>
+              </a:rPr>
+              <a:t>Ghost</a:t>
+            </a:r>
+          </a:p>
+          <a:p>
+            <a:pPr algn="ctr"/>
+            <a:r>
+              <a:rPr sz="1100" b="0">
+                <a:solidFill>
+                  <a:srgbClr val="9AA3AB"/>
+                </a:solidFill>
+              </a:rPr>
+              <a:t>four</a:t>
+            </a:r>
+          </a:p>
+        </p:txBody>
+      </p:sp>
+      <p:sp>
+        <p:nvSpPr>
+          <p:cNvPr id="11" name="Rounded Rectangle 10"/>
+          <p:cNvSpPr/>
+          <p:nvPr/>
+        </p:nvSpPr>
+        <p:spPr>
+          <a:xfrm>
+            <a:off x="3209544" y="3776472"/>
+            <a:ext cx="1307592" cy="566928"/>
+          </a:xfrm>
+          <a:prstGeom prst="roundRect">
+            <a:avLst>
+              <a:gd name="adj" fmla="val 12000"/>
+            </a:avLst>
+          </a:prstGeom>
+          <a:solidFill>
+            <a:srgbClr val="2E3338"/>
+          </a:solidFill>
+          <a:ln>
+            <a:noFill/>
+          </a:ln>
+          <a:effectLst/>
+        </p:spPr>
+        <p:style>
+          <a:lnRef idx="1">
+            <a:schemeClr val="accent1"/>
+          </a:lnRef>
+          <a:fillRef idx="3">
+            <a:schemeClr val="accent1"/>
+          </a:fillRef>
+          <a:effectRef idx="2">
+            <a:schemeClr val="accent1"/>
+          </a:effectRef>
+          <a:fontRef idx="minor">
+            <a:schemeClr val="lt1"/>
+          </a:fontRef>
+        </p:style>
+        <p:txBody>
+          <a:bodyPr rtlCol="0" anchor="ctr" wrap="square" lIns="73152" rIns="73152"/>
+          <a:lstStyle/>
+          <a:p>
+            <a:pPr algn="ctr"/>
+            <a:r>
+              <a:rPr sz="1200" b="1">
+                <a:solidFill>
+                  <a:srgbClr val="DEE2E6"/>
+                </a:solidFill>
+              </a:rPr>
+              <a:t>GhostState</a:t>
+            </a:r>
+          </a:p>
+          <a:p>
+            <a:pPr algn="ctr"/>
+            <a:r>
+              <a:rPr sz="1000" b="0">
+                <a:solidFill>
+                  <a:srgbClr val="9AA3AB"/>
+                </a:solidFill>
+              </a:rPr>
+              <a:t>one at a time</a:t>
+            </a:r>
+          </a:p>
+        </p:txBody>
+      </p:sp>
+      <p:cxnSp>
+        <p:nvCxnSpPr>
+          <p:cNvPr id="12" name="Connector 11"/>
+          <p:cNvCxnSpPr/>
+          <p:nvPr/>
+        </p:nvCxnSpPr>
+        <p:spPr>
+          <a:xfrm flipH="1">
+            <a:off x="3863340" y="3596640"/>
+            <a:ext cx="708660" cy="161544"/>
+          </a:xfrm>
+          <a:prstGeom prst="line">
+            <a:avLst/>
+          </a:prstGeom>
+          <a:ln w="25400">
+            <a:solidFill>
+              <a:srgbClr val="9AA3AB"/>
+            </a:solidFill>
+            <a:tailEnd type="triangle"/>
+          </a:ln>
+        </p:spPr>
+        <p:style>
+          <a:lnRef idx="2">
+            <a:schemeClr val="accent1"/>
+          </a:lnRef>
+          <a:fillRef idx="0">
+            <a:schemeClr val="accent1"/>
+          </a:fillRef>
+          <a:effectRef idx="1">
+            <a:schemeClr val="accent1"/>
+          </a:effectRef>
+          <a:fontRef idx="minor">
+            <a:schemeClr val="tx1"/>
+          </a:fontRef>
+        </p:style>
+      </p:cxnSp>
+      <p:sp>
+        <p:nvSpPr>
+          <p:cNvPr id="13" name="Rounded Rectangle 12"/>
+          <p:cNvSpPr/>
+          <p:nvPr/>
+        </p:nvSpPr>
+        <p:spPr>
+          <a:xfrm>
+            <a:off x="4626864" y="3776472"/>
+            <a:ext cx="1307592" cy="566928"/>
+          </a:xfrm>
+          <a:prstGeom prst="roundRect">
+            <a:avLst>
+              <a:gd name="adj" fmla="val 12000"/>
+            </a:avLst>
+          </a:prstGeom>
+          <a:solidFill>
+            <a:srgbClr val="2E3338"/>
+          </a:solidFill>
+          <a:ln>
+            <a:noFill/>
+          </a:ln>
+          <a:effectLst/>
+        </p:spPr>
+        <p:style>
+          <a:lnRef idx="1">
+            <a:schemeClr val="accent1"/>
+          </a:lnRef>
+          <a:fillRef idx="3">
+            <a:schemeClr val="accent1"/>
+          </a:fillRef>
+          <a:effectRef idx="2">
+            <a:schemeClr val="accent1"/>
+          </a:effectRef>
+          <a:fontRef idx="minor">
+            <a:schemeClr val="lt1"/>
+          </a:fontRef>
+        </p:style>
+        <p:txBody>
+          <a:bodyPr rtlCol="0" anchor="ctr" wrap="square" lIns="73152" rIns="73152"/>
+          <a:lstStyle/>
+          <a:p>
+            <a:pPr algn="ctr"/>
+            <a:r>
+              <a:rPr sz="1200" b="1">
+                <a:solidFill>
+                  <a:srgbClr val="DEE2E6"/>
+                </a:solidFill>
+              </a:rPr>
+              <a:t>Two strategies</a:t>
+            </a:r>
+          </a:p>
+          <a:p>
+            <a:pPr algn="ctr"/>
+            <a:r>
+              <a:rPr sz="1000" b="0">
+                <a:solidFill>
+                  <a:srgbClr val="9AA3AB"/>
+                </a:solidFill>
+              </a:rPr>
+              <a:t>target and route</a:t>
+            </a:r>
+          </a:p>
+        </p:txBody>
+      </p:sp>
+      <p:cxnSp>
+        <p:nvCxnSpPr>
+          <p:cNvPr id="14" name="Connector 13"/>
+          <p:cNvCxnSpPr/>
+          <p:nvPr/>
+        </p:nvCxnSpPr>
+        <p:spPr>
+          <a:xfrm>
+            <a:off x="4572000" y="3596640"/>
+            <a:ext cx="708660" cy="161544"/>
+          </a:xfrm>
+          <a:prstGeom prst="line">
+            <a:avLst/>
+          </a:prstGeom>
+          <a:ln w="25400">
+            <a:solidFill>
+              <a:srgbClr val="9AA3AB"/>
+            </a:solidFill>
+            <a:tailEnd type="triangle"/>
+          </a:ln>
+        </p:spPr>
+        <p:style>
+          <a:lnRef idx="2">
+            <a:schemeClr val="accent1"/>
+          </a:lnRef>
+          <a:fillRef idx="0">
+            <a:schemeClr val="accent1"/>
+          </a:fillRef>
+          <a:effectRef idx="1">
+            <a:schemeClr val="accent1"/>
+          </a:effectRef>
+          <a:fontRef idx="minor">
+            <a:schemeClr val="tx1"/>
+          </a:fontRef>
+        </p:style>
+      </p:cxnSp>
+      <p:cxnSp>
+        <p:nvCxnSpPr>
+          <p:cNvPr id="15" name="Connector 14"/>
+          <p:cNvCxnSpPr/>
+          <p:nvPr/>
+        </p:nvCxnSpPr>
+        <p:spPr>
+          <a:xfrm>
+            <a:off x="4572000" y="2831592"/>
+            <a:ext cx="0" cy="161544"/>
+          </a:xfrm>
+          <a:prstGeom prst="line">
+            <a:avLst/>
+          </a:prstGeom>
+          <a:ln w="25400">
+            <a:solidFill>
+              <a:srgbClr val="9AA3AB"/>
+            </a:solidFill>
+            <a:tailEnd type="triangle"/>
+          </a:ln>
+        </p:spPr>
+        <p:style>
+          <a:lnRef idx="2">
+            <a:schemeClr val="accent1"/>
+          </a:lnRef>
+          <a:fillRef idx="0">
+            <a:schemeClr val="accent1"/>
+          </a:fillRef>
+          <a:effectRef idx="1">
+            <a:schemeClr val="accent1"/>
+          </a:effectRef>
+          <a:fontRef idx="minor">
+            <a:schemeClr val="tx1"/>
+          </a:fontRef>
+        </p:style>
+      </p:cxnSp>
+      <p:sp>
+        <p:nvSpPr>
+          <p:cNvPr id="16" name="Rounded Rectangle 15"/>
+          <p:cNvSpPr/>
+          <p:nvPr/>
+        </p:nvSpPr>
+        <p:spPr>
+          <a:xfrm>
+            <a:off x="6044184" y="3011424"/>
+            <a:ext cx="1307592" cy="566928"/>
+          </a:xfrm>
+          <a:prstGeom prst="roundRect">
+            <a:avLst>
+              <a:gd name="adj" fmla="val 12000"/>
+            </a:avLst>
+          </a:prstGeom>
+          <a:solidFill>
+            <a:srgbClr val="2E3338"/>
+          </a:solidFill>
+          <a:ln>
+            <a:noFill/>
+          </a:ln>
+          <a:effectLst/>
+        </p:spPr>
+        <p:style>
+          <a:lnRef idx="1">
+            <a:schemeClr val="accent1"/>
+          </a:lnRef>
+          <a:fillRef idx="3">
+            <a:schemeClr val="accent1"/>
+          </a:fillRef>
+          <a:effectRef idx="2">
+            <a:schemeClr val="accent1"/>
+          </a:effectRef>
+          <a:fontRef idx="minor">
+            <a:schemeClr val="lt1"/>
+          </a:fontRef>
+        </p:style>
+        <p:txBody>
+          <a:bodyPr rtlCol="0" anchor="ctr" wrap="square" lIns="73152" rIns="73152"/>
+          <a:lstStyle/>
+          <a:p>
+            <a:pPr algn="ctr"/>
+            <a:r>
+              <a:rPr sz="1200" b="1">
+                <a:solidFill>
+                  <a:srgbClr val="DEE2E6"/>
+                </a:solidFill>
+              </a:rPr>
+              <a:t>ModeSchedule</a:t>
+            </a:r>
+          </a:p>
+        </p:txBody>
+      </p:sp>
+      <p:cxnSp>
+        <p:nvCxnSpPr>
+          <p:cNvPr id="17" name="Connector 16"/>
+          <p:cNvCxnSpPr/>
+          <p:nvPr/>
+        </p:nvCxnSpPr>
+        <p:spPr>
+          <a:xfrm>
+            <a:off x="4572000" y="2831592"/>
+            <a:ext cx="2125980" cy="161544"/>
+          </a:xfrm>
+          <a:prstGeom prst="line">
+            <a:avLst/>
+          </a:prstGeom>
+          <a:ln w="25400">
+            <a:solidFill>
+              <a:srgbClr val="9AA3AB"/>
+            </a:solidFill>
+            <a:tailEnd type="triangle"/>
+          </a:ln>
+        </p:spPr>
+        <p:style>
+          <a:lnRef idx="2">
+            <a:schemeClr val="accent1"/>
+          </a:lnRef>
+          <a:fillRef idx="0">
+            <a:schemeClr val="accent1"/>
+          </a:fillRef>
+          <a:effectRef idx="1">
+            <a:schemeClr val="accent1"/>
+          </a:effectRef>
+          <a:fontRef idx="minor">
+            <a:schemeClr val="tx1"/>
+          </a:fontRef>
+        </p:style>
+      </p:cxnSp>
+      <p:cxnSp>
+        <p:nvCxnSpPr>
+          <p:cNvPr id="18" name="Connector 17"/>
+          <p:cNvCxnSpPr/>
+          <p:nvPr/>
+        </p:nvCxnSpPr>
+        <p:spPr>
+          <a:xfrm>
+            <a:off x="4572000" y="2066544"/>
+            <a:ext cx="0" cy="161544"/>
+          </a:xfrm>
+          <a:prstGeom prst="line">
+            <a:avLst/>
+          </a:prstGeom>
+          <a:ln w="25400">
+            <a:solidFill>
+              <a:srgbClr val="9AA3AB"/>
+            </a:solidFill>
+            <a:tailEnd type="triangle"/>
+          </a:ln>
+        </p:spPr>
+        <p:style>
+          <a:lnRef idx="2">
+            <a:schemeClr val="accent1"/>
+          </a:lnRef>
+          <a:fillRef idx="0">
+            <a:schemeClr val="accent1"/>
+          </a:fillRef>
+          <a:effectRef idx="1">
+            <a:schemeClr val="accent1"/>
+          </a:effectRef>
+          <a:fontRef idx="minor">
+            <a:schemeClr val="tx1"/>
+          </a:fontRef>
+        </p:style>
+      </p:cxnSp>
+      <p:sp>
+        <p:nvSpPr>
+          <p:cNvPr id="19" name="Rounded Rectangle 18"/>
+          <p:cNvSpPr/>
+          <p:nvPr/>
+        </p:nvSpPr>
+        <p:spPr>
+          <a:xfrm>
+            <a:off x="7461504" y="2246376"/>
+            <a:ext cx="1307592" cy="566928"/>
+          </a:xfrm>
+          <a:prstGeom prst="roundRect">
+            <a:avLst>
+              <a:gd name="adj" fmla="val 12000"/>
+            </a:avLst>
+          </a:prstGeom>
+          <a:solidFill>
+            <a:srgbClr val="2E3338"/>
+          </a:solidFill>
+          <a:ln>
+            <a:noFill/>
+          </a:ln>
+          <a:effectLst/>
+        </p:spPr>
+        <p:style>
+          <a:lnRef idx="1">
+            <a:schemeClr val="accent1"/>
+          </a:lnRef>
+          <a:fillRef idx="3">
+            <a:schemeClr val="accent1"/>
+          </a:fillRef>
+          <a:effectRef idx="2">
+            <a:schemeClr val="accent1"/>
+          </a:effectRef>
+          <a:fontRef idx="minor">
+            <a:schemeClr val="lt1"/>
+          </a:fontRef>
+        </p:style>
+        <p:txBody>
+          <a:bodyPr rtlCol="0" anchor="ctr" wrap="square" lIns="73152" rIns="73152"/>
+          <a:lstStyle/>
+          <a:p>
+            <a:pPr algn="ctr"/>
+            <a:r>
+              <a:rPr sz="1200" b="1">
+                <a:solidFill>
+                  <a:srgbClr val="DEE2E6"/>
+                </a:solidFill>
+              </a:rPr>
+              <a:t>Views</a:t>
+            </a:r>
+          </a:p>
+          <a:p>
+            <a:pPr algn="ctr"/>
+            <a:r>
+              <a:rPr sz="1000" b="0">
+                <a:solidFill>
+                  <a:srgbClr val="9AA3AB"/>
+                </a:solidFill>
+              </a:rPr>
+              <a:t>maze, Pac-Man, ghosts</a:t>
+            </a:r>
+          </a:p>
+        </p:txBody>
+      </p:sp>
+      <p:cxnSp>
+        <p:nvCxnSpPr>
+          <p:cNvPr id="20" name="Connector 19"/>
+          <p:cNvCxnSpPr/>
+          <p:nvPr/>
+        </p:nvCxnSpPr>
+        <p:spPr>
+          <a:xfrm>
+            <a:off x="4572000" y="2066544"/>
+            <a:ext cx="3543300" cy="161544"/>
+          </a:xfrm>
+          <a:prstGeom prst="line">
+            <a:avLst/>
+          </a:prstGeom>
+          <a:ln w="25400">
+            <a:solidFill>
+              <a:srgbClr val="9AA3AB"/>
+            </a:solidFill>
+            <a:tailEnd type="triangle"/>
+          </a:ln>
+        </p:spPr>
+        <p:style>
+          <a:lnRef idx="2">
+            <a:schemeClr val="accent1"/>
+          </a:lnRef>
+          <a:fillRef idx="0">
+            <a:schemeClr val="accent1"/>
+          </a:fillRef>
+          <a:effectRef idx="1">
+            <a:schemeClr val="accent1"/>
+          </a:effectRef>
+          <a:fontRef idx="minor">
+            <a:schemeClr val="tx1"/>
+          </a:fontRef>
+        </p:style>
+      </p:cxnSp>
+      <p:sp>
+        <p:nvSpPr>
+          <p:cNvPr id="21" name="TextBox 20"/>
+          <p:cNvSpPr txBox="1"/>
+          <p:nvPr/>
+        </p:nvSpPr>
+        <p:spPr>
+          <a:xfrm>
+            <a:off x="457200" y="4462272"/>
+            <a:ext cx="8229600" cy="365760"/>
+          </a:xfrm>
+          <a:prstGeom prst="rect">
+            <a:avLst/>
+          </a:prstGeom>
+          <a:noFill/>
+        </p:spPr>
+        <p:txBody>
+          <a:bodyPr wrap="square">
+            <a:spAutoFit/>
+          </a:bodyPr>
+          <a:lstStyle/>
+          <a:p>
+            <a:pPr algn="ctr"/>
+            <a:r>
+              <a:rPr sz="1300" b="0" i="0">
+                <a:solidFill>
+                  <a:srgbClr val="9AA3AB"/>
+                </a:solidFill>
+              </a:rPr>
+              <a:t>A ghost changes its state all the time, and keeps its two strategies.</a:t>
+            </a:r>
+          </a:p>
+        </p:txBody>
+      </p:sp>
+    </p:spTree>
+  </p:cSld>
+  <p:clrMapOvr>
+    <a:masterClrMapping/>
+  </p:clrMapOvr>
+</p:sld>
+</file>
+
+<file path=ppt/slides/slide39.xml><?xml version="1.0" encoding="utf-8"?>
+<p:sld xmlns:a="http://schemas.openxmlformats.org/drawingml/2006/main" xmlns:p="http://schemas.openxmlformats.org/presentationml/2006/main" xmlns:r="http://schemas.openxmlformats.org/officeDocument/2006/relationships">
+  <p:cSld>
+    <p:spTree>
+      <p:nvGrpSpPr>
+        <p:cNvPr id="1" name=""/>
+        <p:cNvGrpSpPr/>
+        <p:nvPr/>
+      </p:nvGrpSpPr>
+      <p:grpSpPr/>
+      <p:sp>
+        <p:nvSpPr>
+          <p:cNvPr id="2" name="Title 1"/>
+          <p:cNvSpPr>
+            <a:spLocks noGrp="1"/>
+          </p:cNvSpPr>
+          <p:nvPr>
+            <p:ph type="title"/>
+          </p:nvPr>
+        </p:nvSpPr>
+        <p:spPr/>
+        <p:txBody>
+          <a:bodyPr/>
+          <a:lstStyle/>
+          <a:p>
+            <a:pPr indent="0" lvl="0" marL="0" rtl="0" algn="l">
+              <a:spcBef>
+                <a:spcPts val="0"/>
+              </a:spcBef>
+              <a:spcAft>
+                <a:spcPts val="0"/>
+              </a:spcAft>
+              <a:buNone/>
+            </a:pPr>
+            <a:r>
+              <a:rPr lang="en"/>
+              <a:t>Summary</a:t>
+            </a:r>
+            <a:endParaRPr/>
+          </a:p>
+        </p:txBody>
+      </p:sp>
+      <p:sp>
+        <p:nvSpPr>
+          <p:cNvPr id="3" name="Text Placeholder 2"/>
+          <p:cNvSpPr>
+            <a:spLocks noGrp="1"/>
+          </p:cNvSpPr>
+          <p:nvPr>
+            <p:ph type="body" idx="1"/>
+          </p:nvPr>
+        </p:nvSpPr>
+        <p:spPr>
+          <a:xfrm>
+            <a:off x="311700" y="885950"/>
+            <a:ext cx="8520600" cy="521208"/>
+          </a:xfrm>
+        </p:spPr>
+        <p:txBody>
+          <a:bodyPr/>
+          <a:lstStyle/>
+          <a:p>
+            <a:pPr indent="-330200" lvl="0" marL="457200" rtl="0" algn="l">
+              <a:spcBef>
+                <a:spcPts val="0"/>
+              </a:spcBef>
+              <a:spcAft>
+                <a:spcPts val="0"/>
+              </a:spcAft>
+              <a:buSzPts val="1600"/>
+              <a:buChar char="●"/>
+            </a:pPr>
+            <a:r>
+              <a:rPr lang="en" b="1"/>
+              <a:t>Six concerns, and this session’s answer to each.</a:t>
+            </a:r>
+            <a:endParaRPr/>
+          </a:p>
+        </p:txBody>
+      </p:sp>
+      <p:sp>
+        <p:nvSpPr>
+          <p:cNvPr id="4" name="Rounded Rectangle 3"/>
+          <p:cNvSpPr/>
+          <p:nvPr/>
+        </p:nvSpPr>
+        <p:spPr>
+          <a:xfrm>
+            <a:off x="548640" y="1417320"/>
+            <a:ext cx="2560320" cy="914400"/>
+          </a:xfrm>
+          <a:prstGeom prst="roundRect">
+            <a:avLst>
+              <a:gd name="adj" fmla="val 12000"/>
+            </a:avLst>
+          </a:prstGeom>
+          <a:solidFill>
+            <a:srgbClr val="2E3338"/>
+          </a:solidFill>
+          <a:ln>
+            <a:noFill/>
+          </a:ln>
+          <a:effectLst/>
+        </p:spPr>
+        <p:style>
+          <a:lnRef idx="1">
+            <a:schemeClr val="accent1"/>
+          </a:lnRef>
+          <a:fillRef idx="3">
+            <a:schemeClr val="accent1"/>
+          </a:fillRef>
+          <a:effectRef idx="2">
+            <a:schemeClr val="accent1"/>
+          </a:effectRef>
+          <a:fontRef idx="minor">
+            <a:schemeClr val="lt1"/>
+          </a:fontRef>
+        </p:style>
+        <p:txBody>
+          <a:bodyPr rtlCol="0" anchor="ctr" wrap="square" lIns="73152" rIns="73152"/>
+          <a:lstStyle/>
+          <a:p>
+            <a:pPr algn="ctr"/>
+            <a:r>
+              <a:rPr sz="1500" b="1">
+                <a:solidFill>
+                  <a:srgbClr val="DEE2E6"/>
+                </a:solidFill>
+              </a:rPr>
+              <a:t>What a ghost is doing now</a:t>
+            </a:r>
+          </a:p>
+          <a:p>
+            <a:pPr algn="ctr"/>
+            <a:r>
+              <a:rPr sz="1300" b="0">
+                <a:solidFill>
+                  <a:srgbClr val="9AA3AB"/>
+                </a:solidFill>
+              </a:rPr>
+              <a:t>State: a class for each mode</a:t>
+            </a:r>
+          </a:p>
+        </p:txBody>
+      </p:sp>
+      <p:sp>
+        <p:nvSpPr>
+          <p:cNvPr id="5" name="Rounded Rectangle 4"/>
+          <p:cNvSpPr/>
+          <p:nvPr/>
+        </p:nvSpPr>
+        <p:spPr>
+          <a:xfrm>
+            <a:off x="3291840" y="1417320"/>
+            <a:ext cx="2560320" cy="914400"/>
+          </a:xfrm>
+          <a:prstGeom prst="roundRect">
+            <a:avLst>
+              <a:gd name="adj" fmla="val 12000"/>
+            </a:avLst>
+          </a:prstGeom>
+          <a:solidFill>
+            <a:srgbClr val="2E3338"/>
+          </a:solidFill>
+          <a:ln>
+            <a:noFill/>
+          </a:ln>
+          <a:effectLst/>
+        </p:spPr>
+        <p:style>
+          <a:lnRef idx="1">
+            <a:schemeClr val="accent1"/>
+          </a:lnRef>
+          <a:fillRef idx="3">
+            <a:schemeClr val="accent1"/>
+          </a:fillRef>
+          <a:effectRef idx="2">
+            <a:schemeClr val="accent1"/>
+          </a:effectRef>
+          <a:fontRef idx="minor">
+            <a:schemeClr val="lt1"/>
+          </a:fontRef>
+        </p:style>
+        <p:txBody>
+          <a:bodyPr rtlCol="0" anchor="ctr" wrap="square" lIns="73152" rIns="73152"/>
+          <a:lstStyle/>
+          <a:p>
+            <a:pPr algn="ctr"/>
+            <a:r>
+              <a:rPr sz="1500" b="1">
+                <a:solidFill>
+                  <a:srgbClr val="DEE2E6"/>
+                </a:solidFill>
+              </a:rPr>
+              <a:t>How each ghost hunts</a:t>
+            </a:r>
+          </a:p>
+          <a:p>
+            <a:pPr algn="ctr"/>
+            <a:r>
+              <a:rPr sz="1300" b="0">
+                <a:solidFill>
+                  <a:srgbClr val="9AA3AB"/>
+                </a:solidFill>
+              </a:rPr>
+              <a:t>Strategy: ITargetStrategy</a:t>
+            </a:r>
+          </a:p>
+        </p:txBody>
+      </p:sp>
+      <p:sp>
+        <p:nvSpPr>
+          <p:cNvPr id="6" name="Rounded Rectangle 5"/>
+          <p:cNvSpPr/>
+          <p:nvPr/>
+        </p:nvSpPr>
+        <p:spPr>
+          <a:xfrm>
+            <a:off x="6035040" y="1417320"/>
+            <a:ext cx="2560320" cy="914400"/>
+          </a:xfrm>
+          <a:prstGeom prst="roundRect">
+            <a:avLst>
+              <a:gd name="adj" fmla="val 12000"/>
+            </a:avLst>
+          </a:prstGeom>
+          <a:solidFill>
+            <a:srgbClr val="2E3338"/>
+          </a:solidFill>
+          <a:ln>
+            <a:noFill/>
+          </a:ln>
+          <a:effectLst/>
+        </p:spPr>
+        <p:style>
+          <a:lnRef idx="1">
+            <a:schemeClr val="accent1"/>
+          </a:lnRef>
+          <a:fillRef idx="3">
+            <a:schemeClr val="accent1"/>
+          </a:fillRef>
+          <a:effectRef idx="2">
+            <a:schemeClr val="accent1"/>
+          </a:effectRef>
+          <a:fontRef idx="minor">
+            <a:schemeClr val="lt1"/>
+          </a:fontRef>
+        </p:style>
+        <p:txBody>
+          <a:bodyPr rtlCol="0" anchor="ctr" wrap="square" lIns="73152" rIns="73152"/>
+          <a:lstStyle/>
+          <a:p>
+            <a:pPr algn="ctr"/>
+            <a:r>
+              <a:rPr sz="1500" b="1">
+                <a:solidFill>
+                  <a:srgbClr val="DEE2E6"/>
+                </a:solidFill>
+              </a:rPr>
+              <a:t>How a ghost finds its way</a:t>
+            </a:r>
+          </a:p>
+          <a:p>
+            <a:pPr algn="ctr"/>
+            <a:r>
+              <a:rPr sz="1300" b="0">
+                <a:solidFill>
+                  <a:srgbClr val="9AA3AB"/>
+                </a:solidFill>
+              </a:rPr>
+              <a:t>A second strategy: IRouteStrategy</a:t>
+            </a:r>
+          </a:p>
+        </p:txBody>
+      </p:sp>
+      <p:sp>
+        <p:nvSpPr>
+          <p:cNvPr id="7" name="Rounded Rectangle 6"/>
+          <p:cNvSpPr/>
+          <p:nvPr/>
+        </p:nvSpPr>
+        <p:spPr>
+          <a:xfrm>
+            <a:off x="548640" y="2468880"/>
+            <a:ext cx="2560320" cy="914400"/>
+          </a:xfrm>
+          <a:prstGeom prst="roundRect">
+            <a:avLst>
+              <a:gd name="adj" fmla="val 12000"/>
+            </a:avLst>
+          </a:prstGeom>
+          <a:solidFill>
+            <a:srgbClr val="2E3338"/>
+          </a:solidFill>
+          <a:ln>
+            <a:noFill/>
+          </a:ln>
+          <a:effectLst/>
+        </p:spPr>
+        <p:style>
+          <a:lnRef idx="1">
+            <a:schemeClr val="accent1"/>
+          </a:lnRef>
+          <a:fillRef idx="3">
+            <a:schemeClr val="accent1"/>
+          </a:fillRef>
+          <a:effectRef idx="2">
+            <a:schemeClr val="accent1"/>
+          </a:effectRef>
+          <a:fontRef idx="minor">
+            <a:schemeClr val="lt1"/>
+          </a:fontRef>
+        </p:style>
+        <p:txBody>
+          <a:bodyPr rtlCol="0" anchor="ctr" wrap="square" lIns="73152" rIns="73152"/>
+          <a:lstStyle/>
+          <a:p>
+            <a:pPr algn="ctr"/>
+            <a:r>
+              <a:rPr sz="1500" b="1">
+                <a:solidFill>
+                  <a:srgbClr val="DEE2E6"/>
+                </a:solidFill>
+              </a:rPr>
+              <a:t>Who picks the object</a:t>
+            </a:r>
+          </a:p>
+          <a:p>
+            <a:pPr algn="ctr"/>
+            <a:r>
+              <a:rPr sz="1300" b="0">
+                <a:solidFill>
+                  <a:srgbClr val="9AA3AB"/>
+                </a:solidFill>
+              </a:rPr>
+              <a:t>States pick states. World picks strategies</a:t>
+            </a:r>
+          </a:p>
+        </p:txBody>
+      </p:sp>
+      <p:sp>
+        <p:nvSpPr>
+          <p:cNvPr id="8" name="Rounded Rectangle 7"/>
+          <p:cNvSpPr/>
+          <p:nvPr/>
+        </p:nvSpPr>
+        <p:spPr>
+          <a:xfrm>
+            <a:off x="3291840" y="2468880"/>
+            <a:ext cx="2560320" cy="914400"/>
+          </a:xfrm>
+          <a:prstGeom prst="roundRect">
+            <a:avLst>
+              <a:gd name="adj" fmla="val 12000"/>
+            </a:avLst>
+          </a:prstGeom>
+          <a:solidFill>
+            <a:srgbClr val="2E3338"/>
+          </a:solidFill>
+          <a:ln>
+            <a:noFill/>
+          </a:ln>
+          <a:effectLst/>
+        </p:spPr>
+        <p:style>
+          <a:lnRef idx="1">
+            <a:schemeClr val="accent1"/>
+          </a:lnRef>
+          <a:fillRef idx="3">
+            <a:schemeClr val="accent1"/>
+          </a:fillRef>
+          <a:effectRef idx="2">
+            <a:schemeClr val="accent1"/>
+          </a:effectRef>
+          <a:fontRef idx="minor">
+            <a:schemeClr val="lt1"/>
+          </a:fontRef>
+        </p:style>
+        <p:txBody>
+          <a:bodyPr rtlCol="0" anchor="ctr" wrap="square" lIns="73152" rIns="73152"/>
+          <a:lstStyle/>
+          <a:p>
+            <a:pPr algn="ctr"/>
+            <a:r>
+              <a:rPr sz="1500" b="1">
+                <a:solidFill>
+                  <a:srgbClr val="DEE2E6"/>
+                </a:solidFill>
+              </a:rPr>
+              <a:t>Checking a ghost’s rule</a:t>
+            </a:r>
+          </a:p>
+          <a:p>
+            <a:pPr algn="ctr"/>
+            <a:r>
+              <a:rPr sz="1300" b="0">
+                <a:solidFill>
+                  <a:srgbClr val="9AA3AB"/>
+                </a:solidFill>
+              </a:rPr>
+              <a:t>A unit test per strategy and state</a:t>
+            </a:r>
+          </a:p>
+        </p:txBody>
+      </p:sp>
+      <p:sp>
+        <p:nvSpPr>
+          <p:cNvPr id="9" name="Rounded Rectangle 8"/>
+          <p:cNvSpPr/>
+          <p:nvPr/>
+        </p:nvSpPr>
+        <p:spPr>
+          <a:xfrm>
+            <a:off x="6035040" y="2468880"/>
+            <a:ext cx="2560320" cy="914400"/>
+          </a:xfrm>
+          <a:prstGeom prst="roundRect">
+            <a:avLst>
+              <a:gd name="adj" fmla="val 12000"/>
+            </a:avLst>
+          </a:prstGeom>
+          <a:solidFill>
+            <a:srgbClr val="2E3338"/>
+          </a:solidFill>
+          <a:ln>
+            <a:noFill/>
+          </a:ln>
+          <a:effectLst/>
+        </p:spPr>
+        <p:style>
+          <a:lnRef idx="1">
+            <a:schemeClr val="accent1"/>
+          </a:lnRef>
+          <a:fillRef idx="3">
+            <a:schemeClr val="accent1"/>
+          </a:fillRef>
+          <a:effectRef idx="2">
+            <a:schemeClr val="accent1"/>
+          </a:effectRef>
+          <a:fontRef idx="minor">
+            <a:schemeClr val="lt1"/>
+          </a:fontRef>
+        </p:style>
+        <p:txBody>
+          <a:bodyPr rtlCol="0" anchor="ctr" wrap="square" lIns="73152" rIns="73152"/>
+          <a:lstStyle/>
+          <a:p>
+            <a:pPr algn="ctr"/>
+            <a:r>
+              <a:rPr sz="1500" b="1">
+                <a:solidFill>
+                  <a:srgbClr val="DEE2E6"/>
+                </a:solidFill>
+              </a:rPr>
+              <a:t>The flow of the game</a:t>
+            </a:r>
+          </a:p>
+          <a:p>
+            <a:pPr algn="ctr"/>
+            <a:r>
+              <a:rPr sz="1300" b="0">
+                <a:solidFill>
+                  <a:srgbClr val="9AA3AB"/>
+                </a:solidFill>
+              </a:rPr>
+              <a:t>A state machine above the ghosts</a:t>
+            </a:r>
+          </a:p>
+        </p:txBody>
+      </p:sp>
+    </p:spTree>
+  </p:cSld>
+  <p:clrMapOvr>
+    <a:masterClrMapping/>
+  </p:clrMapOvr>
+</p:sld>
+</file>
+
 <file path=ppt/slides/slide4.xml><?xml version="1.0" encoding="utf-8"?>
 <p:sld xmlns:a="http://schemas.openxmlformats.org/drawingml/2006/main" xmlns:r="http://schemas.openxmlformats.org/officeDocument/2006/relationships" xmlns:mc="http://schemas.openxmlformats.org/markup-compatibility/2006" xmlns:mv="urn:schemas-microsoft-com:mac:vml" xmlns:p="http://schemas.openxmlformats.org/presentationml/2006/main" xmlns:c="http://schemas.openxmlformats.org/drawingml/2006/chart" xmlns:dgm="http://schemas.openxmlformats.org/drawingml/2006/diagram" xmlns:o="urn:schemas-microsoft-com:office:office" xmlns:v="urn:schemas-microsoft-com:vml" xmlns:pvml="urn:schemas-microsoft-com:office:powerpoint" xmlns:com="http://schemas.openxmlformats.org/drawingml/2006/compatibility" xmlns:p14="http://schemas.microsoft.com/office/powerpoint/2010/main" xmlns:p15="http://schemas.microsoft.com/office/powerpoint/2012/main" xmlns:ahyp="http://schemas.microsoft.com/office/drawing/2018/hyperlinkcolor">
   <p:cSld>
